--- a/template.pptx
+++ b/template.pptx
@@ -221,1692 +221,12 @@
 <file path=ppt/changesInfos/changesInfo1.xml><?xml version="1.0" encoding="utf-8"?>
 <pc:chgInfo xmlns:a="http://schemas.openxmlformats.org/drawingml/2006/main" xmlns:r="http://schemas.openxmlformats.org/officeDocument/2006/relationships" xmlns:ac="http://schemas.microsoft.com/office/drawing/2013/main/command" xmlns:pc="http://schemas.microsoft.com/office/powerpoint/2013/main/command">
   <pc:docChgLst>
-    <pc:chgData name="Hernan Ramirez Diaz" userId="0b0763af-8f1b-4303-84e1-6429285cc810" providerId="ADAL" clId="{42163F52-BB8D-4D37-ACEA-9F3481FEDAF8}"/>
-    <pc:docChg chg="undo redo custSel addSld delSld modSld sldOrd modSection">
-      <pc:chgData name="Hernan Ramirez Diaz" userId="0b0763af-8f1b-4303-84e1-6429285cc810" providerId="ADAL" clId="{42163F52-BB8D-4D37-ACEA-9F3481FEDAF8}" dt="2025-10-09T23:46:55.071" v="23066" actId="47"/>
-      <pc:docMkLst>
-        <pc:docMk/>
-      </pc:docMkLst>
-      <pc:sldChg chg="ord">
-        <pc:chgData name="Hernan Ramirez Diaz" userId="0b0763af-8f1b-4303-84e1-6429285cc810" providerId="ADAL" clId="{42163F52-BB8D-4D37-ACEA-9F3481FEDAF8}" dt="2025-10-03T21:28:29.889" v="12946"/>
-        <pc:sldMkLst>
-          <pc:docMk/>
-          <pc:sldMk cId="0" sldId="274"/>
-        </pc:sldMkLst>
-      </pc:sldChg>
-      <pc:sldChg chg="modSp mod">
-        <pc:chgData name="Hernan Ramirez Diaz" userId="0b0763af-8f1b-4303-84e1-6429285cc810" providerId="ADAL" clId="{42163F52-BB8D-4D37-ACEA-9F3481FEDAF8}" dt="2025-10-09T17:08:26.822" v="22799" actId="20577"/>
-        <pc:sldMkLst>
-          <pc:docMk/>
-          <pc:sldMk cId="0" sldId="275"/>
-        </pc:sldMkLst>
-      </pc:sldChg>
-      <pc:sldChg chg="add">
-        <pc:chgData name="Hernan Ramirez Diaz" userId="0b0763af-8f1b-4303-84e1-6429285cc810" providerId="ADAL" clId="{42163F52-BB8D-4D37-ACEA-9F3481FEDAF8}" dt="2025-09-30T22:48:51.036" v="3291"/>
-        <pc:sldMkLst>
-          <pc:docMk/>
-          <pc:sldMk cId="1802258249" sldId="280"/>
-        </pc:sldMkLst>
-      </pc:sldChg>
-      <pc:sldChg chg="modSp mod">
-        <pc:chgData name="Hernan Ramirez Diaz" userId="0b0763af-8f1b-4303-84e1-6429285cc810" providerId="ADAL" clId="{42163F52-BB8D-4D37-ACEA-9F3481FEDAF8}" dt="2025-10-09T18:04:53.412" v="22846" actId="20577"/>
-        <pc:sldMkLst>
-          <pc:docMk/>
-          <pc:sldMk cId="1694384516" sldId="285"/>
-        </pc:sldMkLst>
-      </pc:sldChg>
-      <pc:sldChg chg="add">
-        <pc:chgData name="Hernan Ramirez Diaz" userId="0b0763af-8f1b-4303-84e1-6429285cc810" providerId="ADAL" clId="{42163F52-BB8D-4D37-ACEA-9F3481FEDAF8}" dt="2025-09-30T22:48:51.036" v="3291"/>
-        <pc:sldMkLst>
-          <pc:docMk/>
-          <pc:sldMk cId="1946109353" sldId="355"/>
-        </pc:sldMkLst>
-      </pc:sldChg>
-      <pc:sldChg chg="addSp delSp modSp mod">
-        <pc:chgData name="Hernan Ramirez Diaz" userId="0b0763af-8f1b-4303-84e1-6429285cc810" providerId="ADAL" clId="{42163F52-BB8D-4D37-ACEA-9F3481FEDAF8}" dt="2025-09-26T19:17:47.895" v="1246" actId="478"/>
-        <pc:sldMkLst>
-          <pc:docMk/>
-          <pc:sldMk cId="2675615646" sldId="419"/>
-        </pc:sldMkLst>
-      </pc:sldChg>
-      <pc:sldChg chg="addSp delSp modSp add mod modCm modNotesTx">
-        <pc:chgData name="Hernan Ramirez Diaz" userId="0b0763af-8f1b-4303-84e1-6429285cc810" providerId="ADAL" clId="{42163F52-BB8D-4D37-ACEA-9F3481FEDAF8}" dt="2025-10-09T18:32:21.559" v="22854" actId="255"/>
-        <pc:sldMkLst>
-          <pc:docMk/>
-          <pc:sldMk cId="1299622664" sldId="434"/>
-        </pc:sldMkLst>
-        <pc:extLst>
-          <p:ext xmlns:p="http://schemas.openxmlformats.org/presentationml/2006/main" uri="{D6D511B9-2390-475A-947B-AFAB55BFBCF1}">
-            <pc226:cmChg xmlns:pc226="http://schemas.microsoft.com/office/powerpoint/2022/06/main/command" chg="mod">
-              <pc226:chgData name="Hernan Ramirez Diaz" userId="0b0763af-8f1b-4303-84e1-6429285cc810" providerId="ADAL" clId="{42163F52-BB8D-4D37-ACEA-9F3481FEDAF8}" dt="2025-10-09T18:32:19.001" v="22853" actId="20577"/>
-              <pc2:cmMkLst xmlns:pc2="http://schemas.microsoft.com/office/powerpoint/2019/9/main/command">
-                <pc:docMk/>
-                <pc:sldMk cId="1299622664" sldId="434"/>
-                <pc2:cmMk id="{9C52BFDD-9F11-4C01-8EA9-393721749318}"/>
-              </pc2:cmMkLst>
-            </pc226:cmChg>
-          </p:ext>
-        </pc:extLst>
-      </pc:sldChg>
-      <pc:sldChg chg="addSp delSp modSp mod">
-        <pc:chgData name="Hernan Ramirez Diaz" userId="0b0763af-8f1b-4303-84e1-6429285cc810" providerId="ADAL" clId="{42163F52-BB8D-4D37-ACEA-9F3481FEDAF8}" dt="2025-10-04T05:39:23.308" v="18433" actId="20577"/>
-        <pc:sldMkLst>
-          <pc:docMk/>
-          <pc:sldMk cId="2761368814" sldId="2147481181"/>
-        </pc:sldMkLst>
-      </pc:sldChg>
-      <pc:sldChg chg="ord">
-        <pc:chgData name="Hernan Ramirez Diaz" userId="0b0763af-8f1b-4303-84e1-6429285cc810" providerId="ADAL" clId="{42163F52-BB8D-4D37-ACEA-9F3481FEDAF8}" dt="2025-09-26T17:01:54.525" v="385"/>
-        <pc:sldMkLst>
-          <pc:docMk/>
-          <pc:sldMk cId="1105021549" sldId="2147481210"/>
-        </pc:sldMkLst>
-      </pc:sldChg>
-      <pc:sldChg chg="modSp mod modCm">
-        <pc:chgData name="Hernan Ramirez Diaz" userId="0b0763af-8f1b-4303-84e1-6429285cc810" providerId="ADAL" clId="{42163F52-BB8D-4D37-ACEA-9F3481FEDAF8}" dt="2025-10-03T16:10:51.912" v="10625" actId="14100"/>
-        <pc:sldMkLst>
-          <pc:docMk/>
-          <pc:sldMk cId="323746144" sldId="2147481211"/>
-        </pc:sldMkLst>
-        <pc:extLst>
-          <p:ext xmlns:p="http://schemas.openxmlformats.org/presentationml/2006/main" uri="{D6D511B9-2390-475A-947B-AFAB55BFBCF1}">
-            <pc226:cmChg xmlns:pc226="http://schemas.microsoft.com/office/powerpoint/2022/06/main/command" chg="mod">
-              <pc226:chgData name="Hernan Ramirez Diaz" userId="0b0763af-8f1b-4303-84e1-6429285cc810" providerId="ADAL" clId="{42163F52-BB8D-4D37-ACEA-9F3481FEDAF8}" dt="2025-10-02T22:39:01.158" v="9248" actId="20577"/>
-              <pc2:cmMkLst xmlns:pc2="http://schemas.microsoft.com/office/powerpoint/2019/9/main/command">
-                <pc:docMk/>
-                <pc:sldMk cId="323746144" sldId="2147481211"/>
-                <pc2:cmMk id="{39EB2F37-B8FD-49D1-A4FF-14B267B24A40}"/>
-              </pc2:cmMkLst>
-            </pc226:cmChg>
-          </p:ext>
-        </pc:extLst>
-      </pc:sldChg>
-      <pc:sldChg chg="modSp mod">
-        <pc:chgData name="Hernan Ramirez Diaz" userId="0b0763af-8f1b-4303-84e1-6429285cc810" providerId="ADAL" clId="{42163F52-BB8D-4D37-ACEA-9F3481FEDAF8}" dt="2025-10-09T04:58:22.879" v="22528" actId="1035"/>
-        <pc:sldMkLst>
-          <pc:docMk/>
-          <pc:sldMk cId="83366420" sldId="2147481212"/>
-        </pc:sldMkLst>
-      </pc:sldChg>
-      <pc:sldChg chg="delSp modSp mod">
-        <pc:chgData name="Hernan Ramirez Diaz" userId="0b0763af-8f1b-4303-84e1-6429285cc810" providerId="ADAL" clId="{42163F52-BB8D-4D37-ACEA-9F3481FEDAF8}" dt="2025-10-09T17:03:58.170" v="22792" actId="20577"/>
-        <pc:sldMkLst>
-          <pc:docMk/>
-          <pc:sldMk cId="1270242671" sldId="2147481213"/>
-        </pc:sldMkLst>
-        <pc:spChg chg="mod">
-          <ac:chgData name="Hernan Ramirez Diaz" userId="0b0763af-8f1b-4303-84e1-6429285cc810" providerId="ADAL" clId="{42163F52-BB8D-4D37-ACEA-9F3481FEDAF8}" dt="2025-10-09T17:03:58.170" v="22792" actId="20577"/>
-          <ac:spMkLst>
-            <pc:docMk/>
-            <pc:sldMk cId="1270242671" sldId="2147481213"/>
-            <ac:spMk id="4" creationId="{F93D6D7D-FF3F-82F6-14A4-6285C0323998}"/>
-          </ac:spMkLst>
-        </pc:spChg>
-        <pc:graphicFrameChg chg="mod modGraphic">
-          <ac:chgData name="Hernan Ramirez Diaz" userId="0b0763af-8f1b-4303-84e1-6429285cc810" providerId="ADAL" clId="{42163F52-BB8D-4D37-ACEA-9F3481FEDAF8}" dt="2025-10-03T22:43:17.109" v="14321" actId="207"/>
-          <ac:graphicFrameMkLst>
-            <pc:docMk/>
-            <pc:sldMk cId="1270242671" sldId="2147481213"/>
-            <ac:graphicFrameMk id="2" creationId="{38F22EE9-DEDC-E1DA-1E19-E1758E9C192D}"/>
-          </ac:graphicFrameMkLst>
-        </pc:graphicFrameChg>
-      </pc:sldChg>
-      <pc:sldChg chg="delSp modSp mod">
-        <pc:chgData name="Hernan Ramirez Diaz" userId="0b0763af-8f1b-4303-84e1-6429285cc810" providerId="ADAL" clId="{42163F52-BB8D-4D37-ACEA-9F3481FEDAF8}" dt="2025-10-09T05:00:32.384" v="22644" actId="1035"/>
-        <pc:sldMkLst>
-          <pc:docMk/>
-          <pc:sldMk cId="1389874235" sldId="2147481214"/>
-        </pc:sldMkLst>
-      </pc:sldChg>
-      <pc:sldChg chg="modSp add mod">
-        <pc:chgData name="Hernan Ramirez Diaz" userId="0b0763af-8f1b-4303-84e1-6429285cc810" providerId="ADAL" clId="{42163F52-BB8D-4D37-ACEA-9F3481FEDAF8}" dt="2025-10-03T19:58:25.863" v="12889" actId="14100"/>
-        <pc:sldMkLst>
-          <pc:docMk/>
-          <pc:sldMk cId="300876207" sldId="2147481215"/>
-        </pc:sldMkLst>
-      </pc:sldChg>
-      <pc:sldChg chg="add del ord">
-        <pc:chgData name="Hernan Ramirez Diaz" userId="0b0763af-8f1b-4303-84e1-6429285cc810" providerId="ADAL" clId="{42163F52-BB8D-4D37-ACEA-9F3481FEDAF8}" dt="2025-10-03T19:19:44.098" v="12538" actId="2696"/>
-        <pc:sldMkLst>
-          <pc:docMk/>
-          <pc:sldMk cId="3040778351" sldId="2147481215"/>
-        </pc:sldMkLst>
-      </pc:sldChg>
-      <pc:sldChg chg="del">
-        <pc:chgData name="Hernan Ramirez Diaz" userId="0b0763af-8f1b-4303-84e1-6429285cc810" providerId="ADAL" clId="{42163F52-BB8D-4D37-ACEA-9F3481FEDAF8}" dt="2025-10-01T19:52:59.448" v="3710" actId="47"/>
-        <pc:sldMkLst>
-          <pc:docMk/>
-          <pc:sldMk cId="1707149320" sldId="2147481216"/>
-        </pc:sldMkLst>
-      </pc:sldChg>
-      <pc:sldChg chg="addSp delSp modSp mod ord modCm">
-        <pc:chgData name="Hernan Ramirez Diaz" userId="0b0763af-8f1b-4303-84e1-6429285cc810" providerId="ADAL" clId="{42163F52-BB8D-4D37-ACEA-9F3481FEDAF8}" dt="2025-10-09T17:24:41.542" v="22829" actId="20577"/>
-        <pc:sldMkLst>
-          <pc:docMk/>
-          <pc:sldMk cId="3892756515" sldId="2147481219"/>
-        </pc:sldMkLst>
-        <pc:extLst>
-          <p:ext xmlns:p="http://schemas.openxmlformats.org/presentationml/2006/main" uri="{D6D511B9-2390-475A-947B-AFAB55BFBCF1}">
-            <pc226:cmChg xmlns:pc226="http://schemas.microsoft.com/office/powerpoint/2022/06/main/command" chg="mod">
-              <pc226:chgData name="Hernan Ramirez Diaz" userId="0b0763af-8f1b-4303-84e1-6429285cc810" providerId="ADAL" clId="{42163F52-BB8D-4D37-ACEA-9F3481FEDAF8}" dt="2025-10-09T17:24:41.542" v="22829" actId="20577"/>
-              <pc2:cmMkLst xmlns:pc2="http://schemas.microsoft.com/office/powerpoint/2019/9/main/command">
-                <pc:docMk/>
-                <pc:sldMk cId="3892756515" sldId="2147481219"/>
-                <pc2:cmMk id="{E4D7CC20-49CD-274F-A77F-C5E4F47D747E}"/>
-              </pc2:cmMkLst>
-            </pc226:cmChg>
-          </p:ext>
-        </pc:extLst>
-      </pc:sldChg>
-      <pc:sldChg chg="modSp mod modCm">
-        <pc:chgData name="Hernan Ramirez Diaz" userId="0b0763af-8f1b-4303-84e1-6429285cc810" providerId="ADAL" clId="{42163F52-BB8D-4D37-ACEA-9F3481FEDAF8}" dt="2025-10-09T04:59:47.752" v="22596" actId="1035"/>
-        <pc:sldMkLst>
-          <pc:docMk/>
-          <pc:sldMk cId="1157813500" sldId="2147481222"/>
-        </pc:sldMkLst>
-        <pc:extLst>
-          <p:ext xmlns:p="http://schemas.openxmlformats.org/presentationml/2006/main" uri="{D6D511B9-2390-475A-947B-AFAB55BFBCF1}">
-            <pc226:cmChg xmlns:pc226="http://schemas.microsoft.com/office/powerpoint/2022/06/main/command" chg="mod">
-              <pc226:chgData name="Hernan Ramirez Diaz" userId="0b0763af-8f1b-4303-84e1-6429285cc810" providerId="ADAL" clId="{42163F52-BB8D-4D37-ACEA-9F3481FEDAF8}" dt="2025-10-07T18:20:22.027" v="21107" actId="20577"/>
-              <pc2:cmMkLst xmlns:pc2="http://schemas.microsoft.com/office/powerpoint/2019/9/main/command">
-                <pc:docMk/>
-                <pc:sldMk cId="1157813500" sldId="2147481222"/>
-                <pc2:cmMk id="{0E9EAFC1-53E0-4A88-9A39-BCE44D7D16F2}"/>
-              </pc2:cmMkLst>
-            </pc226:cmChg>
-          </p:ext>
-        </pc:extLst>
-      </pc:sldChg>
-      <pc:sldChg chg="modSp mod">
-        <pc:chgData name="Hernan Ramirez Diaz" userId="0b0763af-8f1b-4303-84e1-6429285cc810" providerId="ADAL" clId="{42163F52-BB8D-4D37-ACEA-9F3481FEDAF8}" dt="2025-10-09T04:59:40.805" v="22590" actId="1035"/>
-        <pc:sldMkLst>
-          <pc:docMk/>
-          <pc:sldMk cId="4242413873" sldId="2147481223"/>
-        </pc:sldMkLst>
-      </pc:sldChg>
-      <pc:sldChg chg="ord">
-        <pc:chgData name="Hernan Ramirez Diaz" userId="0b0763af-8f1b-4303-84e1-6429285cc810" providerId="ADAL" clId="{42163F52-BB8D-4D37-ACEA-9F3481FEDAF8}" dt="2025-09-26T17:20:04.965" v="447"/>
-        <pc:sldMkLst>
-          <pc:docMk/>
-          <pc:sldMk cId="3621352377" sldId="2147481224"/>
-        </pc:sldMkLst>
-      </pc:sldChg>
-      <pc:sldChg chg="ord">
-        <pc:chgData name="Hernan Ramirez Diaz" userId="0b0763af-8f1b-4303-84e1-6429285cc810" providerId="ADAL" clId="{42163F52-BB8D-4D37-ACEA-9F3481FEDAF8}" dt="2025-09-26T17:01:54.525" v="385"/>
-        <pc:sldMkLst>
-          <pc:docMk/>
-          <pc:sldMk cId="2178493738" sldId="2147481225"/>
-        </pc:sldMkLst>
-      </pc:sldChg>
-      <pc:sldChg chg="addSp delSp modSp mod ord modCm">
-        <pc:chgData name="Hernan Ramirez Diaz" userId="0b0763af-8f1b-4303-84e1-6429285cc810" providerId="ADAL" clId="{42163F52-BB8D-4D37-ACEA-9F3481FEDAF8}" dt="2025-10-09T17:15:40.602" v="22819" actId="20577"/>
-        <pc:sldMkLst>
-          <pc:docMk/>
-          <pc:sldMk cId="2560992972" sldId="2147481227"/>
-        </pc:sldMkLst>
-        <pc:extLst>
-          <p:ext xmlns:p="http://schemas.openxmlformats.org/presentationml/2006/main" uri="{D6D511B9-2390-475A-947B-AFAB55BFBCF1}">
-            <pc226:cmChg xmlns:pc226="http://schemas.microsoft.com/office/powerpoint/2022/06/main/command" chg="mod">
-              <pc226:chgData name="Hernan Ramirez Diaz" userId="0b0763af-8f1b-4303-84e1-6429285cc810" providerId="ADAL" clId="{42163F52-BB8D-4D37-ACEA-9F3481FEDAF8}" dt="2025-10-09T17:15:40.602" v="22819" actId="20577"/>
-              <pc2:cmMkLst xmlns:pc2="http://schemas.microsoft.com/office/powerpoint/2019/9/main/command">
-                <pc:docMk/>
-                <pc:sldMk cId="2560992972" sldId="2147481227"/>
-                <pc2:cmMk id="{72D62EF9-F7A0-4789-9637-4F84044DA606}"/>
-              </pc2:cmMkLst>
-            </pc226:cmChg>
-          </p:ext>
-        </pc:extLst>
-      </pc:sldChg>
-      <pc:sldChg chg="addSp delSp modSp mod ord">
-        <pc:chgData name="Hernan Ramirez Diaz" userId="0b0763af-8f1b-4303-84e1-6429285cc810" providerId="ADAL" clId="{42163F52-BB8D-4D37-ACEA-9F3481FEDAF8}" dt="2025-10-09T19:32:50.791" v="23064" actId="1037"/>
-        <pc:sldMkLst>
-          <pc:docMk/>
-          <pc:sldMk cId="427855662" sldId="2147481228"/>
-        </pc:sldMkLst>
-      </pc:sldChg>
-      <pc:sldChg chg="modSp mod ord modNotesTx">
-        <pc:chgData name="Hernan Ramirez Diaz" userId="0b0763af-8f1b-4303-84e1-6429285cc810" providerId="ADAL" clId="{42163F52-BB8D-4D37-ACEA-9F3481FEDAF8}" dt="2025-10-09T04:57:52.012" v="22487" actId="1035"/>
-        <pc:sldMkLst>
-          <pc:docMk/>
-          <pc:sldMk cId="1426298556" sldId="2147481229"/>
-        </pc:sldMkLst>
-      </pc:sldChg>
-      <pc:sldChg chg="addSp delSp modSp mod">
-        <pc:chgData name="Hernan Ramirez Diaz" userId="0b0763af-8f1b-4303-84e1-6429285cc810" providerId="ADAL" clId="{42163F52-BB8D-4D37-ACEA-9F3481FEDAF8}" dt="2025-10-09T04:57:58.079" v="22501" actId="1035"/>
-        <pc:sldMkLst>
-          <pc:docMk/>
-          <pc:sldMk cId="3134119948" sldId="2147481230"/>
-        </pc:sldMkLst>
-      </pc:sldChg>
-      <pc:sldChg chg="delSp modSp del mod">
-        <pc:chgData name="Hernan Ramirez Diaz" userId="0b0763af-8f1b-4303-84e1-6429285cc810" providerId="ADAL" clId="{42163F52-BB8D-4D37-ACEA-9F3481FEDAF8}" dt="2025-10-02T20:26:03.335" v="8228" actId="47"/>
-        <pc:sldMkLst>
-          <pc:docMk/>
-          <pc:sldMk cId="1129204174" sldId="2147481231"/>
-        </pc:sldMkLst>
-      </pc:sldChg>
-      <pc:sldChg chg="addSp delSp modSp mod modCm">
-        <pc:chgData name="Hernan Ramirez Diaz" userId="0b0763af-8f1b-4303-84e1-6429285cc810" providerId="ADAL" clId="{42163F52-BB8D-4D37-ACEA-9F3481FEDAF8}" dt="2025-10-09T18:59:36.975" v="22935" actId="20577"/>
-        <pc:sldMkLst>
-          <pc:docMk/>
-          <pc:sldMk cId="1893241687" sldId="2147481232"/>
-        </pc:sldMkLst>
-        <pc:extLst>
-          <p:ext xmlns:p="http://schemas.openxmlformats.org/presentationml/2006/main" uri="{D6D511B9-2390-475A-947B-AFAB55BFBCF1}">
-            <pc226:cmChg xmlns:pc226="http://schemas.microsoft.com/office/powerpoint/2022/06/main/command" chg="mod">
-              <pc226:chgData name="Hernan Ramirez Diaz" userId="0b0763af-8f1b-4303-84e1-6429285cc810" providerId="ADAL" clId="{42163F52-BB8D-4D37-ACEA-9F3481FEDAF8}" dt="2025-10-07T18:08:32.590" v="21033" actId="20577"/>
-              <pc2:cmMkLst xmlns:pc2="http://schemas.microsoft.com/office/powerpoint/2019/9/main/command">
-                <pc:docMk/>
-                <pc:sldMk cId="1893241687" sldId="2147481232"/>
-                <pc2:cmMk id="{29037932-B4DA-4A44-A2AC-7D730AFE600D}"/>
-              </pc2:cmMkLst>
-            </pc226:cmChg>
-          </p:ext>
-        </pc:extLst>
-      </pc:sldChg>
-      <pc:sldChg chg="addSp delSp modSp new mod ord">
-        <pc:chgData name="Hernan Ramirez Diaz" userId="0b0763af-8f1b-4303-84e1-6429285cc810" providerId="ADAL" clId="{42163F52-BB8D-4D37-ACEA-9F3481FEDAF8}" dt="2025-10-01T19:15:27.007" v="3709"/>
-        <pc:sldMkLst>
-          <pc:docMk/>
-          <pc:sldMk cId="4253379048" sldId="2147481233"/>
-        </pc:sldMkLst>
-      </pc:sldChg>
-      <pc:sldChg chg="modSp mod">
-        <pc:chgData name="Hernan Ramirez Diaz" userId="0b0763af-8f1b-4303-84e1-6429285cc810" providerId="ADAL" clId="{42163F52-BB8D-4D37-ACEA-9F3481FEDAF8}" dt="2025-10-02T18:50:50.363" v="7266" actId="1036"/>
-        <pc:sldMkLst>
-          <pc:docMk/>
-          <pc:sldMk cId="3872972120" sldId="2147481234"/>
-        </pc:sldMkLst>
-      </pc:sldChg>
-      <pc:sldChg chg="modSp mod">
-        <pc:chgData name="Hernan Ramirez Diaz" userId="0b0763af-8f1b-4303-84e1-6429285cc810" providerId="ADAL" clId="{42163F52-BB8D-4D37-ACEA-9F3481FEDAF8}" dt="2025-09-30T18:22:12.515" v="2442" actId="20577"/>
-        <pc:sldMkLst>
-          <pc:docMk/>
-          <pc:sldMk cId="2664751740" sldId="2147481235"/>
-        </pc:sldMkLst>
-      </pc:sldChg>
-      <pc:sldChg chg="addSp delSp mod ord">
-        <pc:chgData name="Hernan Ramirez Diaz" userId="0b0763af-8f1b-4303-84e1-6429285cc810" providerId="ADAL" clId="{42163F52-BB8D-4D37-ACEA-9F3481FEDAF8}" dt="2025-10-03T17:59:31.126" v="12393"/>
-        <pc:sldMkLst>
-          <pc:docMk/>
-          <pc:sldMk cId="1567322584" sldId="2147481236"/>
-        </pc:sldMkLst>
-      </pc:sldChg>
-      <pc:sldChg chg="mod ord modShow">
-        <pc:chgData name="Hernan Ramirez Diaz" userId="0b0763af-8f1b-4303-84e1-6429285cc810" providerId="ADAL" clId="{42163F52-BB8D-4D37-ACEA-9F3481FEDAF8}" dt="2025-10-02T00:31:30.415" v="4706"/>
-        <pc:sldMkLst>
-          <pc:docMk/>
-          <pc:sldMk cId="229596941" sldId="2147481237"/>
-        </pc:sldMkLst>
-      </pc:sldChg>
-      <pc:sldChg chg="mod ord modShow">
-        <pc:chgData name="Hernan Ramirez Diaz" userId="0b0763af-8f1b-4303-84e1-6429285cc810" providerId="ADAL" clId="{42163F52-BB8D-4D37-ACEA-9F3481FEDAF8}" dt="2025-10-02T00:11:50.455" v="4246"/>
-        <pc:sldMkLst>
-          <pc:docMk/>
-          <pc:sldMk cId="3130016136" sldId="2147481241"/>
-        </pc:sldMkLst>
-      </pc:sldChg>
-      <pc:sldChg chg="addSp delSp modSp mod ord modNotesTx">
-        <pc:chgData name="Hernan Ramirez Diaz" userId="0b0763af-8f1b-4303-84e1-6429285cc810" providerId="ADAL" clId="{42163F52-BB8D-4D37-ACEA-9F3481FEDAF8}" dt="2025-10-09T04:50:09.294" v="22073" actId="1035"/>
-        <pc:sldMkLst>
-          <pc:docMk/>
-          <pc:sldMk cId="3576209394" sldId="2147481243"/>
-        </pc:sldMkLst>
-      </pc:sldChg>
-      <pc:sldChg chg="addSp delSp modSp mod ord modShow">
-        <pc:chgData name="Hernan Ramirez Diaz" userId="0b0763af-8f1b-4303-84e1-6429285cc810" providerId="ADAL" clId="{42163F52-BB8D-4D37-ACEA-9F3481FEDAF8}" dt="2025-10-09T04:55:44.808" v="22353" actId="1035"/>
-        <pc:sldMkLst>
-          <pc:docMk/>
-          <pc:sldMk cId="2460346233" sldId="2147481244"/>
-        </pc:sldMkLst>
-      </pc:sldChg>
-      <pc:sldChg chg="delSp modSp add mod">
-        <pc:chgData name="Hernan Ramirez Diaz" userId="0b0763af-8f1b-4303-84e1-6429285cc810" providerId="ADAL" clId="{42163F52-BB8D-4D37-ACEA-9F3481FEDAF8}" dt="2025-10-02T22:44:15.905" v="9401" actId="207"/>
-        <pc:sldMkLst>
-          <pc:docMk/>
-          <pc:sldMk cId="3253257184" sldId="2147481245"/>
-        </pc:sldMkLst>
-      </pc:sldChg>
-      <pc:sldChg chg="delSp modSp add mod">
-        <pc:chgData name="Hernan Ramirez Diaz" userId="0b0763af-8f1b-4303-84e1-6429285cc810" providerId="ADAL" clId="{42163F52-BB8D-4D37-ACEA-9F3481FEDAF8}" dt="2025-09-30T22:49:21.331" v="3295" actId="478"/>
-        <pc:sldMkLst>
-          <pc:docMk/>
-          <pc:sldMk cId="3132776874" sldId="2147481246"/>
-        </pc:sldMkLst>
-      </pc:sldChg>
-      <pc:sldChg chg="modSp mod">
-        <pc:chgData name="Hernan Ramirez Diaz" userId="0b0763af-8f1b-4303-84e1-6429285cc810" providerId="ADAL" clId="{42163F52-BB8D-4D37-ACEA-9F3481FEDAF8}" dt="2025-10-02T21:02:50.516" v="8870" actId="1036"/>
-        <pc:sldMkLst>
-          <pc:docMk/>
-          <pc:sldMk cId="1484297181" sldId="2147481247"/>
-        </pc:sldMkLst>
-      </pc:sldChg>
-      <pc:sldChg chg="addSp delSp modSp add mod">
-        <pc:chgData name="Hernan Ramirez Diaz" userId="0b0763af-8f1b-4303-84e1-6429285cc810" providerId="ADAL" clId="{42163F52-BB8D-4D37-ACEA-9F3481FEDAF8}" dt="2025-10-09T04:25:13.090" v="21978" actId="1035"/>
-        <pc:sldMkLst>
-          <pc:docMk/>
-          <pc:sldMk cId="2852939510" sldId="2147481248"/>
-        </pc:sldMkLst>
-      </pc:sldChg>
-      <pc:sldChg chg="modSp mod ord">
-        <pc:chgData name="Hernan Ramirez Diaz" userId="0b0763af-8f1b-4303-84e1-6429285cc810" providerId="ADAL" clId="{42163F52-BB8D-4D37-ACEA-9F3481FEDAF8}" dt="2025-10-09T04:58:28.772" v="22530" actId="1035"/>
-        <pc:sldMkLst>
-          <pc:docMk/>
-          <pc:sldMk cId="25791284" sldId="2147481249"/>
-        </pc:sldMkLst>
-      </pc:sldChg>
-      <pc:sldChg chg="addSp delSp modSp add mod ord modNotesTx">
-        <pc:chgData name="Hernan Ramirez Diaz" userId="0b0763af-8f1b-4303-84e1-6429285cc810" providerId="ADAL" clId="{42163F52-BB8D-4D37-ACEA-9F3481FEDAF8}" dt="2025-10-02T19:20:52.887" v="7370"/>
-        <pc:sldMkLst>
-          <pc:docMk/>
-          <pc:sldMk cId="2176796729" sldId="2147481250"/>
-        </pc:sldMkLst>
-      </pc:sldChg>
-      <pc:sldChg chg="addSp delSp modSp add del mod ord">
-        <pc:chgData name="Hernan Ramirez Diaz" userId="0b0763af-8f1b-4303-84e1-6429285cc810" providerId="ADAL" clId="{42163F52-BB8D-4D37-ACEA-9F3481FEDAF8}" dt="2025-10-01T01:45:35.806" v="3698" actId="47"/>
-        <pc:sldMkLst>
-          <pc:docMk/>
-          <pc:sldMk cId="1939539720" sldId="2147481251"/>
-        </pc:sldMkLst>
-      </pc:sldChg>
-      <pc:sldChg chg="addSp modSp mod ord">
-        <pc:chgData name="Hernan Ramirez Diaz" userId="0b0763af-8f1b-4303-84e1-6429285cc810" providerId="ADAL" clId="{42163F52-BB8D-4D37-ACEA-9F3481FEDAF8}" dt="2025-10-09T19:29:16.947" v="22953" actId="27918"/>
-        <pc:sldMkLst>
-          <pc:docMk/>
-          <pc:sldMk cId="3718838375" sldId="2147481253"/>
-        </pc:sldMkLst>
-      </pc:sldChg>
-      <pc:sldChg chg="addSp modSp new mod">
-        <pc:chgData name="Hernan Ramirez Diaz" userId="0b0763af-8f1b-4303-84e1-6429285cc810" providerId="ADAL" clId="{42163F52-BB8D-4D37-ACEA-9F3481FEDAF8}" dt="2025-10-04T05:38:27.615" v="18257" actId="20577"/>
-        <pc:sldMkLst>
-          <pc:docMk/>
-          <pc:sldMk cId="988488" sldId="2147481255"/>
-        </pc:sldMkLst>
-      </pc:sldChg>
-      <pc:sldChg chg="new del">
-        <pc:chgData name="Hernan Ramirez Diaz" userId="0b0763af-8f1b-4303-84e1-6429285cc810" providerId="ADAL" clId="{42163F52-BB8D-4D37-ACEA-9F3481FEDAF8}" dt="2025-10-04T00:12:44.661" v="16123" actId="47"/>
-        <pc:sldMkLst>
-          <pc:docMk/>
-          <pc:sldMk cId="2390622337" sldId="2147481256"/>
-        </pc:sldMkLst>
-      </pc:sldChg>
-      <pc:sldChg chg="delSp modSp add mod">
-        <pc:chgData name="Hernan Ramirez Diaz" userId="0b0763af-8f1b-4303-84e1-6429285cc810" providerId="ADAL" clId="{42163F52-BB8D-4D37-ACEA-9F3481FEDAF8}" dt="2025-10-09T18:48:15.920" v="22884" actId="20577"/>
-        <pc:sldMkLst>
-          <pc:docMk/>
-          <pc:sldMk cId="2682905776" sldId="2147481257"/>
-        </pc:sldMkLst>
-      </pc:sldChg>
-      <pc:sldChg chg="addSp delSp modSp add mod modNotesTx">
-        <pc:chgData name="Hernan Ramirez Diaz" userId="0b0763af-8f1b-4303-84e1-6429285cc810" providerId="ADAL" clId="{42163F52-BB8D-4D37-ACEA-9F3481FEDAF8}" dt="2025-10-09T19:06:07.148" v="22938" actId="20577"/>
-        <pc:sldMkLst>
-          <pc:docMk/>
-          <pc:sldMk cId="2763871" sldId="2147481258"/>
-        </pc:sldMkLst>
-      </pc:sldChg>
-      <pc:sldChg chg="delSp modSp del mod">
-        <pc:chgData name="Hernan Ramirez Diaz" userId="0b0763af-8f1b-4303-84e1-6429285cc810" providerId="ADAL" clId="{42163F52-BB8D-4D37-ACEA-9F3481FEDAF8}" dt="2025-10-03T16:59:58.268" v="11141" actId="47"/>
-        <pc:sldMkLst>
-          <pc:docMk/>
-          <pc:sldMk cId="2295337202" sldId="2147481259"/>
-        </pc:sldMkLst>
-      </pc:sldChg>
-      <pc:sldChg chg="addSp delSp modSp mod modNotesTx">
-        <pc:chgData name="Hernan Ramirez Diaz" userId="0b0763af-8f1b-4303-84e1-6429285cc810" providerId="ADAL" clId="{42163F52-BB8D-4D37-ACEA-9F3481FEDAF8}" dt="2025-10-09T19:21:31.977" v="22951" actId="20577"/>
-        <pc:sldMkLst>
-          <pc:docMk/>
-          <pc:sldMk cId="2022463905" sldId="2147481260"/>
-        </pc:sldMkLst>
-      </pc:sldChg>
-      <pc:sldChg chg="addSp delSp modSp mod">
-        <pc:chgData name="Hernan Ramirez Diaz" userId="0b0763af-8f1b-4303-84e1-6429285cc810" providerId="ADAL" clId="{42163F52-BB8D-4D37-ACEA-9F3481FEDAF8}" dt="2025-10-09T04:58:46.353" v="22549" actId="14100"/>
-        <pc:sldMkLst>
-          <pc:docMk/>
-          <pc:sldMk cId="648698299" sldId="2147481261"/>
-        </pc:sldMkLst>
-      </pc:sldChg>
-      <pc:sldChg chg="addSp delSp modSp add mod modNotesTx">
-        <pc:chgData name="Hernan Ramirez Diaz" userId="0b0763af-8f1b-4303-84e1-6429285cc810" providerId="ADAL" clId="{42163F52-BB8D-4D37-ACEA-9F3481FEDAF8}" dt="2025-10-09T04:59:29.596" v="22587" actId="1035"/>
-        <pc:sldMkLst>
-          <pc:docMk/>
-          <pc:sldMk cId="4145473322" sldId="2147481262"/>
-        </pc:sldMkLst>
-      </pc:sldChg>
-      <pc:sldChg chg="addSp delSp modSp add mod">
-        <pc:chgData name="Hernan Ramirez Diaz" userId="0b0763af-8f1b-4303-84e1-6429285cc810" providerId="ADAL" clId="{42163F52-BB8D-4D37-ACEA-9F3481FEDAF8}" dt="2025-10-09T05:00:17.277" v="22629" actId="1035"/>
-        <pc:sldMkLst>
-          <pc:docMk/>
-          <pc:sldMk cId="345488764" sldId="2147481264"/>
-        </pc:sldMkLst>
-      </pc:sldChg>
-      <pc:sldChg chg="addSp delSp modSp mod ord">
-        <pc:chgData name="Hernan Ramirez Diaz" userId="0b0763af-8f1b-4303-84e1-6429285cc810" providerId="ADAL" clId="{42163F52-BB8D-4D37-ACEA-9F3481FEDAF8}" dt="2025-10-04T04:45:30.488" v="17443"/>
-        <pc:sldMkLst>
-          <pc:docMk/>
-          <pc:sldMk cId="2503961039" sldId="2147481265"/>
-        </pc:sldMkLst>
-      </pc:sldChg>
-      <pc:sldChg chg="modSp add mod">
-        <pc:chgData name="Hernan Ramirez Diaz" userId="0b0763af-8f1b-4303-84e1-6429285cc810" providerId="ADAL" clId="{42163F52-BB8D-4D37-ACEA-9F3481FEDAF8}" dt="2025-10-03T19:58:37.894" v="12890" actId="14100"/>
-        <pc:sldMkLst>
-          <pc:docMk/>
-          <pc:sldMk cId="863687252" sldId="2147481266"/>
-        </pc:sldMkLst>
-      </pc:sldChg>
-      <pc:sldChg chg="modSp add mod">
-        <pc:chgData name="Hernan Ramirez Diaz" userId="0b0763af-8f1b-4303-84e1-6429285cc810" providerId="ADAL" clId="{42163F52-BB8D-4D37-ACEA-9F3481FEDAF8}" dt="2025-10-03T19:22:30.157" v="12629" actId="20577"/>
-        <pc:sldMkLst>
-          <pc:docMk/>
-          <pc:sldMk cId="1129400367" sldId="2147481267"/>
-        </pc:sldMkLst>
-      </pc:sldChg>
-      <pc:sldChg chg="modSp add mod">
-        <pc:chgData name="Hernan Ramirez Diaz" userId="0b0763af-8f1b-4303-84e1-6429285cc810" providerId="ADAL" clId="{42163F52-BB8D-4D37-ACEA-9F3481FEDAF8}" dt="2025-10-03T22:38:00.493" v="14302" actId="20577"/>
-        <pc:sldMkLst>
-          <pc:docMk/>
-          <pc:sldMk cId="645413853" sldId="2147481268"/>
-        </pc:sldMkLst>
-      </pc:sldChg>
-      <pc:sldChg chg="modSp add mod">
-        <pc:chgData name="Hernan Ramirez Diaz" userId="0b0763af-8f1b-4303-84e1-6429285cc810" providerId="ADAL" clId="{42163F52-BB8D-4D37-ACEA-9F3481FEDAF8}" dt="2025-10-03T19:58:45.624" v="12891" actId="14100"/>
-        <pc:sldMkLst>
-          <pc:docMk/>
-          <pc:sldMk cId="3907743225" sldId="2147481269"/>
-        </pc:sldMkLst>
-      </pc:sldChg>
-      <pc:sldChg chg="modSp add mod">
-        <pc:chgData name="Hernan Ramirez Diaz" userId="0b0763af-8f1b-4303-84e1-6429285cc810" providerId="ADAL" clId="{42163F52-BB8D-4D37-ACEA-9F3481FEDAF8}" dt="2025-10-03T19:58:54.074" v="12892" actId="14100"/>
-        <pc:sldMkLst>
-          <pc:docMk/>
-          <pc:sldMk cId="2080702279" sldId="2147481270"/>
-        </pc:sldMkLst>
-      </pc:sldChg>
-      <pc:sldChg chg="addSp delSp modSp mod ord">
-        <pc:chgData name="Hernan Ramirez Diaz" userId="0b0763af-8f1b-4303-84e1-6429285cc810" providerId="ADAL" clId="{42163F52-BB8D-4D37-ACEA-9F3481FEDAF8}" dt="2025-10-09T04:58:07.039" v="22505" actId="1035"/>
-        <pc:sldMkLst>
-          <pc:docMk/>
-          <pc:sldMk cId="869299062" sldId="2147481271"/>
-        </pc:sldMkLst>
-      </pc:sldChg>
-      <pc:sldChg chg="modSp new del mod">
-        <pc:chgData name="Hernan Ramirez Diaz" userId="0b0763af-8f1b-4303-84e1-6429285cc810" providerId="ADAL" clId="{42163F52-BB8D-4D37-ACEA-9F3481FEDAF8}" dt="2025-10-04T06:03:41.892" v="18453" actId="47"/>
-        <pc:sldMkLst>
-          <pc:docMk/>
-          <pc:sldMk cId="3779341304" sldId="2147481272"/>
-        </pc:sldMkLst>
-      </pc:sldChg>
-      <pc:sldChg chg="new">
-        <pc:chgData name="Hernan Ramirez Diaz" userId="0b0763af-8f1b-4303-84e1-6429285cc810" providerId="ADAL" clId="{42163F52-BB8D-4D37-ACEA-9F3481FEDAF8}" dt="2025-10-03T22:57:27.833" v="14445" actId="680"/>
-        <pc:sldMkLst>
-          <pc:docMk/>
-          <pc:sldMk cId="1252616050" sldId="2147481273"/>
-        </pc:sldMkLst>
-      </pc:sldChg>
-      <pc:sldChg chg="addSp delSp modSp add mod ord">
-        <pc:chgData name="Hernan Ramirez Diaz" userId="0b0763af-8f1b-4303-84e1-6429285cc810" providerId="ADAL" clId="{42163F52-BB8D-4D37-ACEA-9F3481FEDAF8}" dt="2025-10-04T00:27:05.972" v="16436" actId="1076"/>
-        <pc:sldMkLst>
-          <pc:docMk/>
-          <pc:sldMk cId="1976876559" sldId="2147481274"/>
-        </pc:sldMkLst>
-      </pc:sldChg>
-      <pc:sldChg chg="delSp add mod ord">
-        <pc:chgData name="Hernan Ramirez Diaz" userId="0b0763af-8f1b-4303-84e1-6429285cc810" providerId="ADAL" clId="{42163F52-BB8D-4D37-ACEA-9F3481FEDAF8}" dt="2025-10-04T00:21:17.826" v="16356"/>
-        <pc:sldMkLst>
-          <pc:docMk/>
-          <pc:sldMk cId="68822884" sldId="2147481275"/>
-        </pc:sldMkLst>
-      </pc:sldChg>
-      <pc:sldChg chg="addSp delSp modSp add mod">
-        <pc:chgData name="Hernan Ramirez Diaz" userId="0b0763af-8f1b-4303-84e1-6429285cc810" providerId="ADAL" clId="{42163F52-BB8D-4D37-ACEA-9F3481FEDAF8}" dt="2025-10-08T18:03:35.166" v="21342" actId="1076"/>
-        <pc:sldMkLst>
-          <pc:docMk/>
-          <pc:sldMk cId="926817997" sldId="2147481276"/>
-        </pc:sldMkLst>
-      </pc:sldChg>
-      <pc:sldChg chg="delSp modSp add del mod ord">
-        <pc:chgData name="Hernan Ramirez Diaz" userId="0b0763af-8f1b-4303-84e1-6429285cc810" providerId="ADAL" clId="{42163F52-BB8D-4D37-ACEA-9F3481FEDAF8}" dt="2025-10-04T06:05:30.878" v="18628" actId="47"/>
-        <pc:sldMkLst>
-          <pc:docMk/>
-          <pc:sldMk cId="938116946" sldId="2147481277"/>
-        </pc:sldMkLst>
-      </pc:sldChg>
-      <pc:sldChg chg="addSp delSp modSp add mod ord">
-        <pc:chgData name="Hernan Ramirez Diaz" userId="0b0763af-8f1b-4303-84e1-6429285cc810" providerId="ADAL" clId="{42163F52-BB8D-4D37-ACEA-9F3481FEDAF8}" dt="2025-10-09T19:19:56.706" v="22940" actId="115"/>
-        <pc:sldMkLst>
-          <pc:docMk/>
-          <pc:sldMk cId="2350308366" sldId="2147481278"/>
-        </pc:sldMkLst>
-      </pc:sldChg>
-      <pc:sldChg chg="modSp mod">
-        <pc:chgData name="Hernan Ramirez Diaz" userId="0b0763af-8f1b-4303-84e1-6429285cc810" providerId="ADAL" clId="{42163F52-BB8D-4D37-ACEA-9F3481FEDAF8}" dt="2025-10-09T16:55:50.150" v="22770" actId="1035"/>
-        <pc:sldMkLst>
-          <pc:docMk/>
-          <pc:sldMk cId="1618464510" sldId="2147481280"/>
-        </pc:sldMkLst>
-      </pc:sldChg>
-      <pc:sldChg chg="modSp mod">
-        <pc:chgData name="Hernan Ramirez Diaz" userId="0b0763af-8f1b-4303-84e1-6429285cc810" providerId="ADAL" clId="{42163F52-BB8D-4D37-ACEA-9F3481FEDAF8}" dt="2025-10-09T17:04:19.208" v="22794" actId="20577"/>
-        <pc:sldMkLst>
-          <pc:docMk/>
-          <pc:sldMk cId="2379161747" sldId="2147481286"/>
-        </pc:sldMkLst>
-      </pc:sldChg>
-      <pc:sldChg chg="modSp mod">
-        <pc:chgData name="Hernan Ramirez Diaz" userId="0b0763af-8f1b-4303-84e1-6429285cc810" providerId="ADAL" clId="{42163F52-BB8D-4D37-ACEA-9F3481FEDAF8}" dt="2025-10-09T17:04:16.565" v="22793" actId="20577"/>
-        <pc:sldMkLst>
-          <pc:docMk/>
-          <pc:sldMk cId="2042423855" sldId="2147481287"/>
-        </pc:sldMkLst>
-      </pc:sldChg>
-      <pc:sldChg chg="modSp mod">
-        <pc:chgData name="Hernan Ramirez Diaz" userId="0b0763af-8f1b-4303-84e1-6429285cc810" providerId="ADAL" clId="{42163F52-BB8D-4D37-ACEA-9F3481FEDAF8}" dt="2025-10-08T18:04:09.094" v="21366" actId="1076"/>
-        <pc:sldMkLst>
-          <pc:docMk/>
-          <pc:sldMk cId="1156650361" sldId="2147481291"/>
-        </pc:sldMkLst>
-      </pc:sldChg>
-      <pc:sldChg chg="modSp mod ord">
-        <pc:chgData name="Hernan Ramirez Diaz" userId="0b0763af-8f1b-4303-84e1-6429285cc810" providerId="ADAL" clId="{42163F52-BB8D-4D37-ACEA-9F3481FEDAF8}" dt="2025-10-08T18:09:50.816" v="21544"/>
-        <pc:sldMkLst>
-          <pc:docMk/>
-          <pc:sldMk cId="277216321" sldId="2147481295"/>
-        </pc:sldMkLst>
-      </pc:sldChg>
-      <pc:sldChg chg="add del">
-        <pc:chgData name="Hernan Ramirez Diaz" userId="0b0763af-8f1b-4303-84e1-6429285cc810" providerId="ADAL" clId="{42163F52-BB8D-4D37-ACEA-9F3481FEDAF8}" dt="2025-10-09T23:46:55.071" v="23066" actId="47"/>
-        <pc:sldMkLst>
-          <pc:docMk/>
-          <pc:sldMk cId="3933677755" sldId="2147481297"/>
-        </pc:sldMkLst>
-      </pc:sldChg>
-    </pc:docChg>
-  </pc:docChgLst>
-  <pc:docChgLst>
-    <pc:chgData name="Michael Bruno" userId="ed6069a4-1fcb-46c4-b4b7-85c279acb11e" providerId="ADAL" clId="{613589E5-1A9A-41C5-92C9-D44D19F40B73}"/>
-    <pc:docChg chg="custSel modSld">
-      <pc:chgData name="Michael Bruno" userId="ed6069a4-1fcb-46c4-b4b7-85c279acb11e" providerId="ADAL" clId="{613589E5-1A9A-41C5-92C9-D44D19F40B73}" dt="2025-10-10T20:06:34.494" v="3" actId="13926"/>
-      <pc:docMkLst>
-        <pc:docMk/>
-      </pc:docMkLst>
-      <pc:sldChg chg="delSp modSp mod">
-        <pc:chgData name="Michael Bruno" userId="ed6069a4-1fcb-46c4-b4b7-85c279acb11e" providerId="ADAL" clId="{613589E5-1A9A-41C5-92C9-D44D19F40B73}" dt="2025-10-09T23:11:36.343" v="2" actId="478"/>
-        <pc:sldMkLst>
-          <pc:docMk/>
-          <pc:sldMk cId="0" sldId="260"/>
-        </pc:sldMkLst>
-      </pc:sldChg>
-      <pc:sldChg chg="modSp mod">
-        <pc:chgData name="Michael Bruno" userId="ed6069a4-1fcb-46c4-b4b7-85c279acb11e" providerId="ADAL" clId="{613589E5-1A9A-41C5-92C9-D44D19F40B73}" dt="2025-10-10T20:06:34.494" v="3" actId="13926"/>
-        <pc:sldMkLst>
-          <pc:docMk/>
-          <pc:sldMk cId="829862625" sldId="2147481206"/>
-        </pc:sldMkLst>
-      </pc:sldChg>
-    </pc:docChg>
-  </pc:docChgLst>
-  <pc:docChgLst>
-    <pc:chgData name="Ridhima Dhawan" userId="41b5bd7b-df07-43ed-9321-8df1cf164a12" providerId="ADAL" clId="{454EBA3A-CFA7-4557-80A3-8406924164EC}"/>
-    <pc:docChg chg="undo custSel addSld delSld modSld sldOrd delSection modSection">
-      <pc:chgData name="Ridhima Dhawan" userId="41b5bd7b-df07-43ed-9321-8df1cf164a12" providerId="ADAL" clId="{454EBA3A-CFA7-4557-80A3-8406924164EC}" dt="2025-09-26T16:50:09.182" v="9258" actId="20577"/>
-      <pc:docMkLst>
-        <pc:docMk/>
-      </pc:docMkLst>
-      <pc:sldChg chg="modSp mod">
-        <pc:chgData name="Ridhima Dhawan" userId="41b5bd7b-df07-43ed-9321-8df1cf164a12" providerId="ADAL" clId="{454EBA3A-CFA7-4557-80A3-8406924164EC}" dt="2025-09-19T04:20:02.730" v="1329" actId="20577"/>
-        <pc:sldMkLst>
-          <pc:docMk/>
-          <pc:sldMk cId="0" sldId="274"/>
-        </pc:sldMkLst>
-      </pc:sldChg>
-      <pc:sldChg chg="modSp mod">
-        <pc:chgData name="Ridhima Dhawan" userId="41b5bd7b-df07-43ed-9321-8df1cf164a12" providerId="ADAL" clId="{454EBA3A-CFA7-4557-80A3-8406924164EC}" dt="2025-09-17T17:37:21.941" v="5" actId="20577"/>
-        <pc:sldMkLst>
-          <pc:docMk/>
-          <pc:sldMk cId="0" sldId="275"/>
-        </pc:sldMkLst>
-      </pc:sldChg>
-      <pc:sldChg chg="addSp delSp modSp mod">
-        <pc:chgData name="Ridhima Dhawan" userId="41b5bd7b-df07-43ed-9321-8df1cf164a12" providerId="ADAL" clId="{454EBA3A-CFA7-4557-80A3-8406924164EC}" dt="2025-09-23T16:11:19.018" v="2066" actId="14100"/>
-        <pc:sldMkLst>
-          <pc:docMk/>
-          <pc:sldMk cId="1694384516" sldId="285"/>
-        </pc:sldMkLst>
-      </pc:sldChg>
-      <pc:sldChg chg="addSp delSp modSp mod modNotesTx">
-        <pc:chgData name="Ridhima Dhawan" userId="41b5bd7b-df07-43ed-9321-8df1cf164a12" providerId="ADAL" clId="{454EBA3A-CFA7-4557-80A3-8406924164EC}" dt="2025-09-19T03:52:27.481" v="1232" actId="20577"/>
-        <pc:sldMkLst>
-          <pc:docMk/>
-          <pc:sldMk cId="3180984745" sldId="333"/>
-        </pc:sldMkLst>
-      </pc:sldChg>
-      <pc:sldChg chg="addSp delSp modSp mod ord modNotesTx">
-        <pc:chgData name="Ridhima Dhawan" userId="41b5bd7b-df07-43ed-9321-8df1cf164a12" providerId="ADAL" clId="{454EBA3A-CFA7-4557-80A3-8406924164EC}" dt="2025-09-25T15:58:08.681" v="9002" actId="20577"/>
-        <pc:sldMkLst>
-          <pc:docMk/>
-          <pc:sldMk cId="2675615646" sldId="419"/>
-        </pc:sldMkLst>
-      </pc:sldChg>
-      <pc:sldChg chg="del">
-        <pc:chgData name="Ridhima Dhawan" userId="41b5bd7b-df07-43ed-9321-8df1cf164a12" providerId="ADAL" clId="{454EBA3A-CFA7-4557-80A3-8406924164EC}" dt="2025-09-17T17:41:25.728" v="134" actId="47"/>
-        <pc:sldMkLst>
-          <pc:docMk/>
-          <pc:sldMk cId="1299622664" sldId="434"/>
-        </pc:sldMkLst>
-      </pc:sldChg>
-      <pc:sldChg chg="addSp delSp modSp add mod">
-        <pc:chgData name="Ridhima Dhawan" userId="41b5bd7b-df07-43ed-9321-8df1cf164a12" providerId="ADAL" clId="{454EBA3A-CFA7-4557-80A3-8406924164EC}" dt="2025-09-23T19:05:17.611" v="6364" actId="20577"/>
-        <pc:sldMkLst>
-          <pc:docMk/>
-          <pc:sldMk cId="2128657008" sldId="2147481209"/>
-        </pc:sldMkLst>
-      </pc:sldChg>
-      <pc:sldChg chg="addSp delSp modSp new mod ord">
-        <pc:chgData name="Ridhima Dhawan" userId="41b5bd7b-df07-43ed-9321-8df1cf164a12" providerId="ADAL" clId="{454EBA3A-CFA7-4557-80A3-8406924164EC}" dt="2025-09-25T15:39:08.861" v="8952" actId="1076"/>
-        <pc:sldMkLst>
-          <pc:docMk/>
-          <pc:sldMk cId="1105021549" sldId="2147481210"/>
-        </pc:sldMkLst>
-      </pc:sldChg>
-      <pc:sldChg chg="addSp delSp modSp add mod">
-        <pc:chgData name="Ridhima Dhawan" userId="41b5bd7b-df07-43ed-9321-8df1cf164a12" providerId="ADAL" clId="{454EBA3A-CFA7-4557-80A3-8406924164EC}" dt="2025-09-26T06:42:10.782" v="9233" actId="20577"/>
-        <pc:sldMkLst>
-          <pc:docMk/>
-          <pc:sldMk cId="323746144" sldId="2147481211"/>
-        </pc:sldMkLst>
-      </pc:sldChg>
-      <pc:sldChg chg="addSp delSp modSp add mod">
-        <pc:chgData name="Ridhima Dhawan" userId="41b5bd7b-df07-43ed-9321-8df1cf164a12" providerId="ADAL" clId="{454EBA3A-CFA7-4557-80A3-8406924164EC}" dt="2025-09-23T16:39:12.998" v="3725" actId="1076"/>
-        <pc:sldMkLst>
-          <pc:docMk/>
-          <pc:sldMk cId="83366420" sldId="2147481212"/>
-        </pc:sldMkLst>
-      </pc:sldChg>
-      <pc:sldChg chg="addSp delSp modSp add mod">
-        <pc:chgData name="Ridhima Dhawan" userId="41b5bd7b-df07-43ed-9321-8df1cf164a12" providerId="ADAL" clId="{454EBA3A-CFA7-4557-80A3-8406924164EC}" dt="2025-09-26T06:45:21.549" v="9234" actId="1076"/>
-        <pc:sldMkLst>
-          <pc:docMk/>
-          <pc:sldMk cId="1270242671" sldId="2147481213"/>
-        </pc:sldMkLst>
-        <pc:spChg chg="mod">
-          <ac:chgData name="Ridhima Dhawan" userId="41b5bd7b-df07-43ed-9321-8df1cf164a12" providerId="ADAL" clId="{454EBA3A-CFA7-4557-80A3-8406924164EC}" dt="2025-09-23T16:51:56.192" v="3918" actId="20577"/>
-          <ac:spMkLst>
-            <pc:docMk/>
-            <pc:sldMk cId="1270242671" sldId="2147481213"/>
-            <ac:spMk id="3" creationId="{BF8AA7B9-40BC-BD5B-A38F-B69FFA6E6319}"/>
-          </ac:spMkLst>
-        </pc:spChg>
-        <pc:spChg chg="add mod">
-          <ac:chgData name="Ridhima Dhawan" userId="41b5bd7b-df07-43ed-9321-8df1cf164a12" providerId="ADAL" clId="{454EBA3A-CFA7-4557-80A3-8406924164EC}" dt="2025-09-26T06:45:21.549" v="9234" actId="1076"/>
-          <ac:spMkLst>
-            <pc:docMk/>
-            <pc:sldMk cId="1270242671" sldId="2147481213"/>
-            <ac:spMk id="4" creationId="{F93D6D7D-FF3F-82F6-14A4-6285C0323998}"/>
-          </ac:spMkLst>
-        </pc:spChg>
-        <pc:graphicFrameChg chg="add mod modGraphic">
-          <ac:chgData name="Ridhima Dhawan" userId="41b5bd7b-df07-43ed-9321-8df1cf164a12" providerId="ADAL" clId="{454EBA3A-CFA7-4557-80A3-8406924164EC}" dt="2025-09-23T23:14:56.318" v="7961" actId="1076"/>
-          <ac:graphicFrameMkLst>
-            <pc:docMk/>
-            <pc:sldMk cId="1270242671" sldId="2147481213"/>
-            <ac:graphicFrameMk id="2" creationId="{38F22EE9-DEDC-E1DA-1E19-E1758E9C192D}"/>
-          </ac:graphicFrameMkLst>
-        </pc:graphicFrameChg>
-      </pc:sldChg>
-      <pc:sldChg chg="addSp delSp modSp add mod">
-        <pc:chgData name="Ridhima Dhawan" userId="41b5bd7b-df07-43ed-9321-8df1cf164a12" providerId="ADAL" clId="{454EBA3A-CFA7-4557-80A3-8406924164EC}" dt="2025-09-23T18:42:17.814" v="6250" actId="20577"/>
-        <pc:sldMkLst>
-          <pc:docMk/>
-          <pc:sldMk cId="1389874235" sldId="2147481214"/>
-        </pc:sldMkLst>
-      </pc:sldChg>
-      <pc:sldChg chg="modSp add mod">
-        <pc:chgData name="Ridhima Dhawan" userId="41b5bd7b-df07-43ed-9321-8df1cf164a12" providerId="ADAL" clId="{454EBA3A-CFA7-4557-80A3-8406924164EC}" dt="2025-09-17T17:51:09.912" v="323" actId="20577"/>
-        <pc:sldMkLst>
-          <pc:docMk/>
-          <pc:sldMk cId="3040778351" sldId="2147481215"/>
-        </pc:sldMkLst>
-      </pc:sldChg>
-      <pc:sldChg chg="delSp modSp add mod ord">
-        <pc:chgData name="Ridhima Dhawan" userId="41b5bd7b-df07-43ed-9321-8df1cf164a12" providerId="ADAL" clId="{454EBA3A-CFA7-4557-80A3-8406924164EC}" dt="2025-09-17T20:05:15.773" v="1049" actId="313"/>
-        <pc:sldMkLst>
-          <pc:docMk/>
-          <pc:sldMk cId="1707149320" sldId="2147481216"/>
-        </pc:sldMkLst>
-      </pc:sldChg>
-      <pc:sldChg chg="add">
-        <pc:chgData name="Ridhima Dhawan" userId="41b5bd7b-df07-43ed-9321-8df1cf164a12" providerId="ADAL" clId="{454EBA3A-CFA7-4557-80A3-8406924164EC}" dt="2025-09-19T04:19:51.802" v="1315" actId="2890"/>
-        <pc:sldMkLst>
-          <pc:docMk/>
-          <pc:sldMk cId="2307073506" sldId="2147481217"/>
-        </pc:sldMkLst>
-      </pc:sldChg>
-      <pc:sldChg chg="addSp delSp modSp add mod">
-        <pc:chgData name="Ridhima Dhawan" userId="41b5bd7b-df07-43ed-9321-8df1cf164a12" providerId="ADAL" clId="{454EBA3A-CFA7-4557-80A3-8406924164EC}" dt="2025-09-23T19:06:18.876" v="6365" actId="14100"/>
-        <pc:sldMkLst>
-          <pc:docMk/>
-          <pc:sldMk cId="145336846" sldId="2147481218"/>
-        </pc:sldMkLst>
-      </pc:sldChg>
-      <pc:sldChg chg="addSp delSp modSp new mod">
-        <pc:chgData name="Ridhima Dhawan" userId="41b5bd7b-df07-43ed-9321-8df1cf164a12" providerId="ADAL" clId="{454EBA3A-CFA7-4557-80A3-8406924164EC}" dt="2025-09-25T15:21:33.063" v="8938" actId="20577"/>
-        <pc:sldMkLst>
-          <pc:docMk/>
-          <pc:sldMk cId="2449955966" sldId="2147481220"/>
-        </pc:sldMkLst>
-      </pc:sldChg>
-      <pc:sldChg chg="addSp delSp modSp add mod">
-        <pc:chgData name="Ridhima Dhawan" userId="41b5bd7b-df07-43ed-9321-8df1cf164a12" providerId="ADAL" clId="{454EBA3A-CFA7-4557-80A3-8406924164EC}" dt="2025-09-23T23:12:20.625" v="7960" actId="1076"/>
-        <pc:sldMkLst>
-          <pc:docMk/>
-          <pc:sldMk cId="3753532281" sldId="2147481221"/>
-        </pc:sldMkLst>
-      </pc:sldChg>
-      <pc:sldChg chg="addSp delSp modSp add mod ord">
-        <pc:chgData name="Ridhima Dhawan" userId="41b5bd7b-df07-43ed-9321-8df1cf164a12" providerId="ADAL" clId="{454EBA3A-CFA7-4557-80A3-8406924164EC}" dt="2025-09-26T16:50:09.182" v="9258" actId="20577"/>
-        <pc:sldMkLst>
-          <pc:docMk/>
-          <pc:sldMk cId="1157813500" sldId="2147481222"/>
-        </pc:sldMkLst>
-      </pc:sldChg>
-      <pc:sldChg chg="addSp delSp modSp add mod ord replId">
-        <pc:chgData name="Ridhima Dhawan" userId="41b5bd7b-df07-43ed-9321-8df1cf164a12" providerId="ADAL" clId="{454EBA3A-CFA7-4557-80A3-8406924164EC}" dt="2025-09-23T18:24:32.029" v="5732" actId="20577"/>
-        <pc:sldMkLst>
-          <pc:docMk/>
-          <pc:sldMk cId="4242413873" sldId="2147481223"/>
-        </pc:sldMkLst>
-      </pc:sldChg>
-      <pc:sldChg chg="addSp delSp modSp add mod">
-        <pc:chgData name="Ridhima Dhawan" userId="41b5bd7b-df07-43ed-9321-8df1cf164a12" providerId="ADAL" clId="{454EBA3A-CFA7-4557-80A3-8406924164EC}" dt="2025-09-26T06:40:51.484" v="9216" actId="404"/>
-        <pc:sldMkLst>
-          <pc:docMk/>
-          <pc:sldMk cId="3621352377" sldId="2147481224"/>
-        </pc:sldMkLst>
-      </pc:sldChg>
-      <pc:sldChg chg="addSp delSp modSp add mod">
-        <pc:chgData name="Ridhima Dhawan" userId="41b5bd7b-df07-43ed-9321-8df1cf164a12" providerId="ADAL" clId="{454EBA3A-CFA7-4557-80A3-8406924164EC}" dt="2025-09-25T15:39:35.496" v="8966" actId="20577"/>
-        <pc:sldMkLst>
-          <pc:docMk/>
-          <pc:sldMk cId="2178493738" sldId="2147481225"/>
-        </pc:sldMkLst>
-      </pc:sldChg>
-      <pc:sldChg chg="delSp modSp add mod">
-        <pc:chgData name="Ridhima Dhawan" userId="41b5bd7b-df07-43ed-9321-8df1cf164a12" providerId="ADAL" clId="{454EBA3A-CFA7-4557-80A3-8406924164EC}" dt="2025-09-25T18:48:13.249" v="9135" actId="20577"/>
-        <pc:sldMkLst>
-          <pc:docMk/>
-          <pc:sldMk cId="1394883244" sldId="2147481226"/>
-        </pc:sldMkLst>
-      </pc:sldChg>
-      <pc:sldChg chg="addSp delSp modSp add mod">
-        <pc:chgData name="Ridhima Dhawan" userId="41b5bd7b-df07-43ed-9321-8df1cf164a12" providerId="ADAL" clId="{454EBA3A-CFA7-4557-80A3-8406924164EC}" dt="2025-09-25T15:59:22.730" v="9080" actId="20577"/>
-        <pc:sldMkLst>
-          <pc:docMk/>
-          <pc:sldMk cId="2560992972" sldId="2147481227"/>
-        </pc:sldMkLst>
-      </pc:sldChg>
-      <pc:sldChg chg="modSp add mod">
-        <pc:chgData name="Ridhima Dhawan" userId="41b5bd7b-df07-43ed-9321-8df1cf164a12" providerId="ADAL" clId="{454EBA3A-CFA7-4557-80A3-8406924164EC}" dt="2025-09-25T15:59:30.763" v="9087" actId="20577"/>
-        <pc:sldMkLst>
-          <pc:docMk/>
-          <pc:sldMk cId="427855662" sldId="2147481228"/>
-        </pc:sldMkLst>
-      </pc:sldChg>
-      <pc:sldMasterChg chg="delSldLayout">
-        <pc:chgData name="Ridhima Dhawan" userId="41b5bd7b-df07-43ed-9321-8df1cf164a12" providerId="ADAL" clId="{454EBA3A-CFA7-4557-80A3-8406924164EC}" dt="2025-09-23T16:11:22.319" v="2067" actId="47"/>
-        <pc:sldMasterMkLst>
-          <pc:docMk/>
-          <pc:sldMasterMk cId="1804289383" sldId="2147483648"/>
-        </pc:sldMasterMkLst>
-      </pc:sldMasterChg>
-    </pc:docChg>
-  </pc:docChgLst>
-  <pc:docChgLst>
-    <pc:chgData name="Kate Tharp" userId="S::kate.tharp@vml.com::f673b90c-5ccd-4f11-b817-79e0f5d8c583" providerId="AD" clId="Web-{A1CFB926-845E-A4C8-E1FE-729016EF509A}"/>
-    <pc:docChg chg="mod">
-      <pc:chgData name="Kate Tharp" userId="S::kate.tharp@vml.com::f673b90c-5ccd-4f11-b817-79e0f5d8c583" providerId="AD" clId="Web-{A1CFB926-845E-A4C8-E1FE-729016EF509A}" dt="2025-09-30T17:14:33.967" v="0"/>
-      <pc:docMkLst>
-        <pc:docMk/>
-      </pc:docMkLst>
-    </pc:docChg>
-  </pc:docChgLst>
-  <pc:docChgLst>
     <pc:chgData name="Hernan Ramirez Diaz" userId="0b0763af-8f1b-4303-84e1-6429285cc810" providerId="ADAL" clId="{2822E497-8A7B-4458-B97C-66D815959D76}"/>
     <pc:docChg chg="undo redo custSel addSld delSld modSld sldOrd modSection">
       <pc:chgData name="Hernan Ramirez Diaz" userId="0b0763af-8f1b-4303-84e1-6429285cc810" providerId="ADAL" clId="{2822E497-8A7B-4458-B97C-66D815959D76}" dt="2025-09-02T20:40:05.164" v="28504" actId="20577"/>
       <pc:docMkLst>
         <pc:docMk/>
       </pc:docMkLst>
-    </pc:docChg>
-  </pc:docChgLst>
-  <pc:docChgLst>
-    <pc:chgData name="Casey Lee" userId="4bc459e0-655e-452e-96c2-b918c0999cdb" providerId="ADAL" clId="{FEDCCBD3-F3AF-4248-98FF-B03AEB6CAACA}"/>
-    <pc:docChg chg="undo redo custSel addSld delSld modSld sldOrd modSection">
-      <pc:chgData name="Casey Lee" userId="4bc459e0-655e-452e-96c2-b918c0999cdb" providerId="ADAL" clId="{FEDCCBD3-F3AF-4248-98FF-B03AEB6CAACA}" dt="2025-10-17T17:36:01.193" v="70061" actId="21"/>
-      <pc:docMkLst>
-        <pc:docMk/>
-      </pc:docMkLst>
-      <pc:sldChg chg="ord">
-        <pc:chgData name="Casey Lee" userId="4bc459e0-655e-452e-96c2-b918c0999cdb" providerId="ADAL" clId="{FEDCCBD3-F3AF-4248-98FF-B03AEB6CAACA}" dt="2025-10-02T20:28:16.132" v="37985"/>
-        <pc:sldMkLst>
-          <pc:docMk/>
-          <pc:sldMk cId="1802258249" sldId="280"/>
-        </pc:sldMkLst>
-      </pc:sldChg>
-      <pc:sldChg chg="modSp mod">
-        <pc:chgData name="Casey Lee" userId="4bc459e0-655e-452e-96c2-b918c0999cdb" providerId="ADAL" clId="{FEDCCBD3-F3AF-4248-98FF-B03AEB6CAACA}" dt="2025-09-30T16:47:04.428" v="21631" actId="20577"/>
-        <pc:sldMkLst>
-          <pc:docMk/>
-          <pc:sldMk cId="1694384516" sldId="285"/>
-        </pc:sldMkLst>
-      </pc:sldChg>
-      <pc:sldChg chg="add del mod ord modShow">
-        <pc:chgData name="Casey Lee" userId="4bc459e0-655e-452e-96c2-b918c0999cdb" providerId="ADAL" clId="{FEDCCBD3-F3AF-4248-98FF-B03AEB6CAACA}" dt="2025-09-26T16:35:44.883" v="4535"/>
-        <pc:sldMkLst>
-          <pc:docMk/>
-          <pc:sldMk cId="2227000735" sldId="307"/>
-        </pc:sldMkLst>
-      </pc:sldChg>
-      <pc:sldChg chg="addSp delSp modSp mod ord">
-        <pc:chgData name="Casey Lee" userId="4bc459e0-655e-452e-96c2-b918c0999cdb" providerId="ADAL" clId="{FEDCCBD3-F3AF-4248-98FF-B03AEB6CAACA}" dt="2025-10-10T15:24:34.837" v="70048" actId="20577"/>
-        <pc:sldMkLst>
-          <pc:docMk/>
-          <pc:sldMk cId="3180984745" sldId="333"/>
-        </pc:sldMkLst>
-      </pc:sldChg>
-      <pc:sldChg chg="modSp mod ord">
-        <pc:chgData name="Casey Lee" userId="4bc459e0-655e-452e-96c2-b918c0999cdb" providerId="ADAL" clId="{FEDCCBD3-F3AF-4248-98FF-B03AEB6CAACA}" dt="2025-10-02T20:28:16.132" v="37985"/>
-        <pc:sldMkLst>
-          <pc:docMk/>
-          <pc:sldMk cId="1946109353" sldId="355"/>
-        </pc:sldMkLst>
-      </pc:sldChg>
-      <pc:sldChg chg="addSp delSp modSp mod ord">
-        <pc:chgData name="Casey Lee" userId="4bc459e0-655e-452e-96c2-b918c0999cdb" providerId="ADAL" clId="{FEDCCBD3-F3AF-4248-98FF-B03AEB6CAACA}" dt="2025-09-29T13:57:09.558" v="11695"/>
-        <pc:sldMkLst>
-          <pc:docMk/>
-          <pc:sldMk cId="2675615646" sldId="419"/>
-        </pc:sldMkLst>
-      </pc:sldChg>
-      <pc:sldChg chg="addSp delSp modSp mod modCm">
-        <pc:chgData name="Casey Lee" userId="4bc459e0-655e-452e-96c2-b918c0999cdb" providerId="ADAL" clId="{FEDCCBD3-F3AF-4248-98FF-B03AEB6CAACA}" dt="2025-10-06T14:20:14.006" v="51184" actId="20577"/>
-        <pc:sldMkLst>
-          <pc:docMk/>
-          <pc:sldMk cId="1299622664" sldId="434"/>
-        </pc:sldMkLst>
-        <pc:extLst>
-          <p:ext xmlns:p="http://schemas.openxmlformats.org/presentationml/2006/main" uri="{D6D511B9-2390-475A-947B-AFAB55BFBCF1}">
-            <pc226:cmChg xmlns:pc226="http://schemas.microsoft.com/office/powerpoint/2022/06/main/command" chg="mod">
-              <pc226:chgData name="Casey Lee" userId="4bc459e0-655e-452e-96c2-b918c0999cdb" providerId="ADAL" clId="{FEDCCBD3-F3AF-4248-98FF-B03AEB6CAACA}" dt="2025-10-06T14:20:14.006" v="51184" actId="20577"/>
-              <pc2:cmMkLst xmlns:pc2="http://schemas.microsoft.com/office/powerpoint/2019/9/main/command">
-                <pc:docMk/>
-                <pc:sldMk cId="1299622664" sldId="434"/>
-                <pc2:cmMk id="{9C52BFDD-9F11-4C01-8EA9-393721749318}"/>
-              </pc2:cmMkLst>
-            </pc226:cmChg>
-          </p:ext>
-        </pc:extLst>
-      </pc:sldChg>
-      <pc:sldChg chg="add del ord">
-        <pc:chgData name="Casey Lee" userId="4bc459e0-655e-452e-96c2-b918c0999cdb" providerId="ADAL" clId="{FEDCCBD3-F3AF-4248-98FF-B03AEB6CAACA}" dt="2025-10-02T15:55:33.977" v="28746"/>
-        <pc:sldMkLst>
-          <pc:docMk/>
-          <pc:sldMk cId="3900277827" sldId="2147478250"/>
-        </pc:sldMkLst>
-      </pc:sldChg>
-      <pc:sldChg chg="add ord">
-        <pc:chgData name="Casey Lee" userId="4bc459e0-655e-452e-96c2-b918c0999cdb" providerId="ADAL" clId="{FEDCCBD3-F3AF-4248-98FF-B03AEB6CAACA}" dt="2025-10-02T15:55:33.977" v="28746"/>
-        <pc:sldMkLst>
-          <pc:docMk/>
-          <pc:sldMk cId="2066716811" sldId="2147478329"/>
-        </pc:sldMkLst>
-      </pc:sldChg>
-      <pc:sldChg chg="add del">
-        <pc:chgData name="Casey Lee" userId="4bc459e0-655e-452e-96c2-b918c0999cdb" providerId="ADAL" clId="{FEDCCBD3-F3AF-4248-98FF-B03AEB6CAACA}" dt="2025-09-19T19:13:18.647" v="2"/>
-        <pc:sldMkLst>
-          <pc:docMk/>
-          <pc:sldMk cId="679476797" sldId="2147480949"/>
-        </pc:sldMkLst>
-      </pc:sldChg>
-      <pc:sldChg chg="addSp delSp modSp add mod ord">
-        <pc:chgData name="Casey Lee" userId="4bc459e0-655e-452e-96c2-b918c0999cdb" providerId="ADAL" clId="{FEDCCBD3-F3AF-4248-98FF-B03AEB6CAACA}" dt="2025-10-07T13:38:34.824" v="59882"/>
-        <pc:sldMkLst>
-          <pc:docMk/>
-          <pc:sldMk cId="2761368814" sldId="2147481181"/>
-        </pc:sldMkLst>
-      </pc:sldChg>
-      <pc:sldChg chg="addSp delSp modSp add del mod">
-        <pc:chgData name="Casey Lee" userId="4bc459e0-655e-452e-96c2-b918c0999cdb" providerId="ADAL" clId="{FEDCCBD3-F3AF-4248-98FF-B03AEB6CAACA}" dt="2025-09-29T14:22:47.094" v="12758" actId="47"/>
-        <pc:sldMkLst>
-          <pc:docMk/>
-          <pc:sldMk cId="3069225704" sldId="2147481199"/>
-        </pc:sldMkLst>
-      </pc:sldChg>
-      <pc:sldChg chg="modSp add del mod">
-        <pc:chgData name="Casey Lee" userId="4bc459e0-655e-452e-96c2-b918c0999cdb" providerId="ADAL" clId="{FEDCCBD3-F3AF-4248-98FF-B03AEB6CAACA}" dt="2025-10-03T15:18:34.054" v="43364" actId="47"/>
-        <pc:sldMkLst>
-          <pc:docMk/>
-          <pc:sldMk cId="2500079299" sldId="2147481200"/>
-        </pc:sldMkLst>
-      </pc:sldChg>
-      <pc:sldChg chg="modSp add mod ord modCm">
-        <pc:chgData name="Casey Lee" userId="4bc459e0-655e-452e-96c2-b918c0999cdb" providerId="ADAL" clId="{FEDCCBD3-F3AF-4248-98FF-B03AEB6CAACA}" dt="2025-10-10T21:45:55.195" v="70049" actId="13926"/>
-        <pc:sldMkLst>
-          <pc:docMk/>
-          <pc:sldMk cId="829862625" sldId="2147481206"/>
-        </pc:sldMkLst>
-        <pc:extLst>
-          <p:ext xmlns:p="http://schemas.openxmlformats.org/presentationml/2006/main" uri="{D6D511B9-2390-475A-947B-AFAB55BFBCF1}">
-            <pc226:cmChg xmlns:pc226="http://schemas.microsoft.com/office/powerpoint/2022/06/main/command" chg="mod">
-              <pc226:chgData name="Casey Lee" userId="4bc459e0-655e-452e-96c2-b918c0999cdb" providerId="ADAL" clId="{FEDCCBD3-F3AF-4248-98FF-B03AEB6CAACA}" dt="2025-10-08T14:25:52.778" v="68521" actId="20577"/>
-              <pc2:cmMkLst xmlns:pc2="http://schemas.microsoft.com/office/powerpoint/2019/9/main/command">
-                <pc:docMk/>
-                <pc:sldMk cId="829862625" sldId="2147481206"/>
-                <pc2:cmMk id="{8C1768B5-F339-4F29-B263-E3C0B5FBF0A5}"/>
-              </pc2:cmMkLst>
-            </pc226:cmChg>
-          </p:ext>
-        </pc:extLst>
-      </pc:sldChg>
-      <pc:sldChg chg="addSp modSp mod ord">
-        <pc:chgData name="Casey Lee" userId="4bc459e0-655e-452e-96c2-b918c0999cdb" providerId="ADAL" clId="{FEDCCBD3-F3AF-4248-98FF-B03AEB6CAACA}" dt="2025-09-26T16:40:01.486" v="4856"/>
-        <pc:sldMkLst>
-          <pc:docMk/>
-          <pc:sldMk cId="2128657008" sldId="2147481209"/>
-        </pc:sldMkLst>
-      </pc:sldChg>
-      <pc:sldChg chg="addSp delSp modSp mod">
-        <pc:chgData name="Casey Lee" userId="4bc459e0-655e-452e-96c2-b918c0999cdb" providerId="ADAL" clId="{FEDCCBD3-F3AF-4248-98FF-B03AEB6CAACA}" dt="2025-09-19T20:25:41.897" v="1420" actId="20577"/>
-        <pc:sldMkLst>
-          <pc:docMk/>
-          <pc:sldMk cId="1105021549" sldId="2147481210"/>
-        </pc:sldMkLst>
-      </pc:sldChg>
-      <pc:sldChg chg="addSp delSp modSp mod modCm">
-        <pc:chgData name="Casey Lee" userId="4bc459e0-655e-452e-96c2-b918c0999cdb" providerId="ADAL" clId="{FEDCCBD3-F3AF-4248-98FF-B03AEB6CAACA}" dt="2025-10-02T17:39:03.548" v="33313" actId="20577"/>
-        <pc:sldMkLst>
-          <pc:docMk/>
-          <pc:sldMk cId="323746144" sldId="2147481211"/>
-        </pc:sldMkLst>
-        <pc:extLst>
-          <p:ext xmlns:p="http://schemas.openxmlformats.org/presentationml/2006/main" uri="{D6D511B9-2390-475A-947B-AFAB55BFBCF1}">
-            <pc226:cmChg xmlns:pc226="http://schemas.microsoft.com/office/powerpoint/2022/06/main/command" chg="mod">
-              <pc226:chgData name="Casey Lee" userId="4bc459e0-655e-452e-96c2-b918c0999cdb" providerId="ADAL" clId="{FEDCCBD3-F3AF-4248-98FF-B03AEB6CAACA}" dt="2025-10-02T17:39:03.548" v="33313" actId="20577"/>
-              <pc2:cmMkLst xmlns:pc2="http://schemas.microsoft.com/office/powerpoint/2019/9/main/command">
-                <pc:docMk/>
-                <pc:sldMk cId="323746144" sldId="2147481211"/>
-                <pc2:cmMk id="{39EB2F37-B8FD-49D1-A4FF-14B267B24A40}"/>
-              </pc2:cmMkLst>
-            </pc226:cmChg>
-          </p:ext>
-        </pc:extLst>
-      </pc:sldChg>
-      <pc:sldChg chg="addSp delSp modSp mod ord">
-        <pc:chgData name="Casey Lee" userId="4bc459e0-655e-452e-96c2-b918c0999cdb" providerId="ADAL" clId="{FEDCCBD3-F3AF-4248-98FF-B03AEB6CAACA}" dt="2025-10-07T16:36:18.841" v="65435" actId="1076"/>
-        <pc:sldMkLst>
-          <pc:docMk/>
-          <pc:sldMk cId="83366420" sldId="2147481212"/>
-        </pc:sldMkLst>
-      </pc:sldChg>
-      <pc:sldChg chg="addSp delSp modSp mod">
-        <pc:chgData name="Casey Lee" userId="4bc459e0-655e-452e-96c2-b918c0999cdb" providerId="ADAL" clId="{FEDCCBD3-F3AF-4248-98FF-B03AEB6CAACA}" dt="2025-10-06T14:44:31.164" v="51234" actId="20577"/>
-        <pc:sldMkLst>
-          <pc:docMk/>
-          <pc:sldMk cId="1270242671" sldId="2147481213"/>
-        </pc:sldMkLst>
-        <pc:spChg chg="mod">
-          <ac:chgData name="Casey Lee" userId="4bc459e0-655e-452e-96c2-b918c0999cdb" providerId="ADAL" clId="{FEDCCBD3-F3AF-4248-98FF-B03AEB6CAACA}" dt="2025-10-06T14:44:31.164" v="51234" actId="20577"/>
-          <ac:spMkLst>
-            <pc:docMk/>
-            <pc:sldMk cId="1270242671" sldId="2147481213"/>
-            <ac:spMk id="4" creationId="{F93D6D7D-FF3F-82F6-14A4-6285C0323998}"/>
-          </ac:spMkLst>
-        </pc:spChg>
-        <pc:graphicFrameChg chg="mod modGraphic">
-          <ac:chgData name="Casey Lee" userId="4bc459e0-655e-452e-96c2-b918c0999cdb" providerId="ADAL" clId="{FEDCCBD3-F3AF-4248-98FF-B03AEB6CAACA}" dt="2025-10-03T18:57:42.221" v="46337" actId="1076"/>
-          <ac:graphicFrameMkLst>
-            <pc:docMk/>
-            <pc:sldMk cId="1270242671" sldId="2147481213"/>
-            <ac:graphicFrameMk id="2" creationId="{38F22EE9-DEDC-E1DA-1E19-E1758E9C192D}"/>
-          </ac:graphicFrameMkLst>
-        </pc:graphicFrameChg>
-      </pc:sldChg>
-      <pc:sldChg chg="addSp delSp modSp mod">
-        <pc:chgData name="Casey Lee" userId="4bc459e0-655e-452e-96c2-b918c0999cdb" providerId="ADAL" clId="{FEDCCBD3-F3AF-4248-98FF-B03AEB6CAACA}" dt="2025-10-08T14:48:01.931" v="68667" actId="403"/>
-        <pc:sldMkLst>
-          <pc:docMk/>
-          <pc:sldMk cId="1389874235" sldId="2147481214"/>
-        </pc:sldMkLst>
-      </pc:sldChg>
-      <pc:sldChg chg="del">
-        <pc:chgData name="Casey Lee" userId="4bc459e0-655e-452e-96c2-b918c0999cdb" providerId="ADAL" clId="{FEDCCBD3-F3AF-4248-98FF-B03AEB6CAACA}" dt="2025-10-08T12:51:36.953" v="68169" actId="47"/>
-        <pc:sldMkLst>
-          <pc:docMk/>
-          <pc:sldMk cId="300876207" sldId="2147481215"/>
-        </pc:sldMkLst>
-      </pc:sldChg>
-      <pc:sldChg chg="addSp delSp modSp mod ord">
-        <pc:chgData name="Casey Lee" userId="4bc459e0-655e-452e-96c2-b918c0999cdb" providerId="ADAL" clId="{FEDCCBD3-F3AF-4248-98FF-B03AEB6CAACA}" dt="2025-09-26T16:40:01.486" v="4856"/>
-        <pc:sldMkLst>
-          <pc:docMk/>
-          <pc:sldMk cId="145336846" sldId="2147481218"/>
-        </pc:sldMkLst>
-      </pc:sldChg>
-      <pc:sldChg chg="addSp delSp modSp add mod">
-        <pc:chgData name="Casey Lee" userId="4bc459e0-655e-452e-96c2-b918c0999cdb" providerId="ADAL" clId="{FEDCCBD3-F3AF-4248-98FF-B03AEB6CAACA}" dt="2025-10-06T14:20:01.304" v="51183" actId="6549"/>
-        <pc:sldMkLst>
-          <pc:docMk/>
-          <pc:sldMk cId="3892756515" sldId="2147481219"/>
-        </pc:sldMkLst>
-      </pc:sldChg>
-      <pc:sldChg chg="modSp mod ord modShow">
-        <pc:chgData name="Casey Lee" userId="4bc459e0-655e-452e-96c2-b918c0999cdb" providerId="ADAL" clId="{FEDCCBD3-F3AF-4248-98FF-B03AEB6CAACA}" dt="2025-09-30T17:31:46.536" v="22108" actId="729"/>
-        <pc:sldMkLst>
-          <pc:docMk/>
-          <pc:sldMk cId="2449955966" sldId="2147481220"/>
-        </pc:sldMkLst>
-      </pc:sldChg>
-      <pc:sldChg chg="modSp mod ord modShow">
-        <pc:chgData name="Casey Lee" userId="4bc459e0-655e-452e-96c2-b918c0999cdb" providerId="ADAL" clId="{FEDCCBD3-F3AF-4248-98FF-B03AEB6CAACA}" dt="2025-09-30T17:31:46.536" v="22108" actId="729"/>
-        <pc:sldMkLst>
-          <pc:docMk/>
-          <pc:sldMk cId="3753532281" sldId="2147481221"/>
-        </pc:sldMkLst>
-      </pc:sldChg>
-      <pc:sldChg chg="addSp delSp modSp mod ord modCm">
-        <pc:chgData name="Casey Lee" userId="4bc459e0-655e-452e-96c2-b918c0999cdb" providerId="ADAL" clId="{FEDCCBD3-F3AF-4248-98FF-B03AEB6CAACA}" dt="2025-10-02T17:57:31.753" v="34405" actId="255"/>
-        <pc:sldMkLst>
-          <pc:docMk/>
-          <pc:sldMk cId="1157813500" sldId="2147481222"/>
-        </pc:sldMkLst>
-        <pc:extLst>
-          <p:ext xmlns:p="http://schemas.openxmlformats.org/presentationml/2006/main" uri="{D6D511B9-2390-475A-947B-AFAB55BFBCF1}">
-            <pc226:cmChg xmlns:pc226="http://schemas.microsoft.com/office/powerpoint/2022/06/main/command" chg="mod">
-              <pc226:chgData name="Casey Lee" userId="4bc459e0-655e-452e-96c2-b918c0999cdb" providerId="ADAL" clId="{FEDCCBD3-F3AF-4248-98FF-B03AEB6CAACA}" dt="2025-10-02T17:15:03.050" v="32088" actId="20577"/>
-              <pc2:cmMkLst xmlns:pc2="http://schemas.microsoft.com/office/powerpoint/2019/9/main/command">
-                <pc:docMk/>
-                <pc:sldMk cId="1157813500" sldId="2147481222"/>
-                <pc2:cmMk id="{0E9EAFC1-53E0-4A88-9A39-BCE44D7D16F2}"/>
-              </pc2:cmMkLst>
-            </pc226:cmChg>
-          </p:ext>
-        </pc:extLst>
-      </pc:sldChg>
-      <pc:sldChg chg="addSp delSp modSp mod ord">
-        <pc:chgData name="Casey Lee" userId="4bc459e0-655e-452e-96c2-b918c0999cdb" providerId="ADAL" clId="{FEDCCBD3-F3AF-4248-98FF-B03AEB6CAACA}" dt="2025-10-07T14:31:19.673" v="63115"/>
-        <pc:sldMkLst>
-          <pc:docMk/>
-          <pc:sldMk cId="4242413873" sldId="2147481223"/>
-        </pc:sldMkLst>
-      </pc:sldChg>
-      <pc:sldChg chg="ord">
-        <pc:chgData name="Casey Lee" userId="4bc459e0-655e-452e-96c2-b918c0999cdb" providerId="ADAL" clId="{FEDCCBD3-F3AF-4248-98FF-B03AEB6CAACA}" dt="2025-09-30T16:46:42.429" v="21626"/>
-        <pc:sldMkLst>
-          <pc:docMk/>
-          <pc:sldMk cId="3621352377" sldId="2147481224"/>
-        </pc:sldMkLst>
-      </pc:sldChg>
-      <pc:sldChg chg="modSp mod ord">
-        <pc:chgData name="Casey Lee" userId="4bc459e0-655e-452e-96c2-b918c0999cdb" providerId="ADAL" clId="{FEDCCBD3-F3AF-4248-98FF-B03AEB6CAACA}" dt="2025-09-30T16:46:16.686" v="21623"/>
-        <pc:sldMkLst>
-          <pc:docMk/>
-          <pc:sldMk cId="1394883244" sldId="2147481226"/>
-        </pc:sldMkLst>
-      </pc:sldChg>
-      <pc:sldChg chg="addSp delSp modSp mod modCm modNotesTx">
-        <pc:chgData name="Casey Lee" userId="4bc459e0-655e-452e-96c2-b918c0999cdb" providerId="ADAL" clId="{FEDCCBD3-F3AF-4248-98FF-B03AEB6CAACA}" dt="2025-10-01T20:42:30.379" v="26286" actId="14100"/>
-        <pc:sldMkLst>
-          <pc:docMk/>
-          <pc:sldMk cId="2560992972" sldId="2147481227"/>
-        </pc:sldMkLst>
-        <pc:extLst>
-          <p:ext xmlns:p="http://schemas.openxmlformats.org/presentationml/2006/main" uri="{D6D511B9-2390-475A-947B-AFAB55BFBCF1}">
-            <pc226:cmChg xmlns:pc226="http://schemas.microsoft.com/office/powerpoint/2022/06/main/command" chg="mod">
-              <pc226:chgData name="Casey Lee" userId="4bc459e0-655e-452e-96c2-b918c0999cdb" providerId="ADAL" clId="{FEDCCBD3-F3AF-4248-98FF-B03AEB6CAACA}" dt="2025-10-01T20:02:15.709" v="25719" actId="20577"/>
-              <pc2:cmMkLst xmlns:pc2="http://schemas.microsoft.com/office/powerpoint/2019/9/main/command">
-                <pc:docMk/>
-                <pc:sldMk cId="2560992972" sldId="2147481227"/>
-                <pc2:cmMk id="{72D62EF9-F7A0-4789-9637-4F84044DA606}"/>
-              </pc2:cmMkLst>
-            </pc226:cmChg>
-          </p:ext>
-        </pc:extLst>
-      </pc:sldChg>
-      <pc:sldChg chg="addSp delSp modSp mod modNotesTx">
-        <pc:chgData name="Casey Lee" userId="4bc459e0-655e-452e-96c2-b918c0999cdb" providerId="ADAL" clId="{FEDCCBD3-F3AF-4248-98FF-B03AEB6CAACA}" dt="2025-10-01T20:41:18.187" v="26285" actId="478"/>
-        <pc:sldMkLst>
-          <pc:docMk/>
-          <pc:sldMk cId="427855662" sldId="2147481228"/>
-        </pc:sldMkLst>
-      </pc:sldChg>
-      <pc:sldChg chg="addSp delSp modSp add mod ord">
-        <pc:chgData name="Casey Lee" userId="4bc459e0-655e-452e-96c2-b918c0999cdb" providerId="ADAL" clId="{FEDCCBD3-F3AF-4248-98FF-B03AEB6CAACA}" dt="2025-10-07T14:04:08.712" v="61012" actId="1076"/>
-        <pc:sldMkLst>
-          <pc:docMk/>
-          <pc:sldMk cId="1426298556" sldId="2147481229"/>
-        </pc:sldMkLst>
-      </pc:sldChg>
-      <pc:sldChg chg="addSp delSp modSp add mod modNotesTx">
-        <pc:chgData name="Casey Lee" userId="4bc459e0-655e-452e-96c2-b918c0999cdb" providerId="ADAL" clId="{FEDCCBD3-F3AF-4248-98FF-B03AEB6CAACA}" dt="2025-10-02T20:01:31.975" v="37715" actId="255"/>
-        <pc:sldMkLst>
-          <pc:docMk/>
-          <pc:sldMk cId="3134119948" sldId="2147481230"/>
-        </pc:sldMkLst>
-      </pc:sldChg>
-      <pc:sldChg chg="addSp delSp modSp add mod">
-        <pc:chgData name="Casey Lee" userId="4bc459e0-655e-452e-96c2-b918c0999cdb" providerId="ADAL" clId="{FEDCCBD3-F3AF-4248-98FF-B03AEB6CAACA}" dt="2025-10-01T18:56:40.945" v="24342" actId="20577"/>
-        <pc:sldMkLst>
-          <pc:docMk/>
-          <pc:sldMk cId="1129204174" sldId="2147481231"/>
-        </pc:sldMkLst>
-      </pc:sldChg>
-      <pc:sldChg chg="modSp add mod ord">
-        <pc:chgData name="Casey Lee" userId="4bc459e0-655e-452e-96c2-b918c0999cdb" providerId="ADAL" clId="{FEDCCBD3-F3AF-4248-98FF-B03AEB6CAACA}" dt="2025-10-03T20:38:46.309" v="48204" actId="1076"/>
-        <pc:sldMkLst>
-          <pc:docMk/>
-          <pc:sldMk cId="1893241687" sldId="2147481232"/>
-        </pc:sldMkLst>
-      </pc:sldChg>
-      <pc:sldChg chg="add del">
-        <pc:chgData name="Casey Lee" userId="4bc459e0-655e-452e-96c2-b918c0999cdb" providerId="ADAL" clId="{FEDCCBD3-F3AF-4248-98FF-B03AEB6CAACA}" dt="2025-09-29T14:08:50.206" v="12280"/>
-        <pc:sldMkLst>
-          <pc:docMk/>
-          <pc:sldMk cId="1370004904" sldId="2147481234"/>
-        </pc:sldMkLst>
-      </pc:sldChg>
-      <pc:sldChg chg="addSp delSp modSp add del mod">
-        <pc:chgData name="Casey Lee" userId="4bc459e0-655e-452e-96c2-b918c0999cdb" providerId="ADAL" clId="{FEDCCBD3-F3AF-4248-98FF-B03AEB6CAACA}" dt="2025-10-03T14:53:21.106" v="42144" actId="47"/>
-        <pc:sldMkLst>
-          <pc:docMk/>
-          <pc:sldMk cId="3872972120" sldId="2147481234"/>
-        </pc:sldMkLst>
-      </pc:sldChg>
-      <pc:sldChg chg="addSp delSp modSp add del mod">
-        <pc:chgData name="Casey Lee" userId="4bc459e0-655e-452e-96c2-b918c0999cdb" providerId="ADAL" clId="{FEDCCBD3-F3AF-4248-98FF-B03AEB6CAACA}" dt="2025-10-03T13:59:31.111" v="41556" actId="47"/>
-        <pc:sldMkLst>
-          <pc:docMk/>
-          <pc:sldMk cId="2664751740" sldId="2147481235"/>
-        </pc:sldMkLst>
-      </pc:sldChg>
-      <pc:sldChg chg="addSp delSp modSp add mod modShow">
-        <pc:chgData name="Casey Lee" userId="4bc459e0-655e-452e-96c2-b918c0999cdb" providerId="ADAL" clId="{FEDCCBD3-F3AF-4248-98FF-B03AEB6CAACA}" dt="2025-10-03T15:58:41.245" v="44921" actId="14100"/>
-        <pc:sldMkLst>
-          <pc:docMk/>
-          <pc:sldMk cId="1567322584" sldId="2147481236"/>
-        </pc:sldMkLst>
-      </pc:sldChg>
-      <pc:sldChg chg="addSp delSp modSp add mod ord">
-        <pc:chgData name="Casey Lee" userId="4bc459e0-655e-452e-96c2-b918c0999cdb" providerId="ADAL" clId="{FEDCCBD3-F3AF-4248-98FF-B03AEB6CAACA}" dt="2025-10-02T05:31:02.461" v="27783" actId="27918"/>
-        <pc:sldMkLst>
-          <pc:docMk/>
-          <pc:sldMk cId="229596941" sldId="2147481237"/>
-        </pc:sldMkLst>
-      </pc:sldChg>
-      <pc:sldChg chg="addSp delSp modSp add del mod ord">
-        <pc:chgData name="Casey Lee" userId="4bc459e0-655e-452e-96c2-b918c0999cdb" providerId="ADAL" clId="{FEDCCBD3-F3AF-4248-98FF-B03AEB6CAACA}" dt="2025-10-02T05:31:02.417" v="27779" actId="27918"/>
-        <pc:sldMkLst>
-          <pc:docMk/>
-          <pc:sldMk cId="821359188" sldId="2147481238"/>
-        </pc:sldMkLst>
-      </pc:sldChg>
-      <pc:sldChg chg="addSp delSp modSp add mod ord">
-        <pc:chgData name="Casey Lee" userId="4bc459e0-655e-452e-96c2-b918c0999cdb" providerId="ADAL" clId="{FEDCCBD3-F3AF-4248-98FF-B03AEB6CAACA}" dt="2025-10-02T05:31:02.436" v="27781" actId="27918"/>
-        <pc:sldMkLst>
-          <pc:docMk/>
-          <pc:sldMk cId="1694054532" sldId="2147481239"/>
-        </pc:sldMkLst>
-      </pc:sldChg>
-      <pc:sldChg chg="addSp delSp modSp add mod ord">
-        <pc:chgData name="Casey Lee" userId="4bc459e0-655e-452e-96c2-b918c0999cdb" providerId="ADAL" clId="{FEDCCBD3-F3AF-4248-98FF-B03AEB6CAACA}" dt="2025-10-02T05:31:02.449" v="27782" actId="27918"/>
-        <pc:sldMkLst>
-          <pc:docMk/>
-          <pc:sldMk cId="3378682446" sldId="2147481240"/>
-        </pc:sldMkLst>
-      </pc:sldChg>
-      <pc:sldChg chg="addSp delSp modSp add mod">
-        <pc:chgData name="Casey Lee" userId="4bc459e0-655e-452e-96c2-b918c0999cdb" providerId="ADAL" clId="{FEDCCBD3-F3AF-4248-98FF-B03AEB6CAACA}" dt="2025-09-30T20:55:46.946" v="23942" actId="20577"/>
-        <pc:sldMkLst>
-          <pc:docMk/>
-          <pc:sldMk cId="3130016136" sldId="2147481241"/>
-        </pc:sldMkLst>
-      </pc:sldChg>
-      <pc:sldChg chg="add ord">
-        <pc:chgData name="Casey Lee" userId="4bc459e0-655e-452e-96c2-b918c0999cdb" providerId="ADAL" clId="{FEDCCBD3-F3AF-4248-98FF-B03AEB6CAACA}" dt="2025-09-30T14:41:11.888" v="19035"/>
-        <pc:sldMkLst>
-          <pc:docMk/>
-          <pc:sldMk cId="3652664627" sldId="2147481242"/>
-        </pc:sldMkLst>
-      </pc:sldChg>
-      <pc:sldChg chg="addSp delSp modSp add mod ord">
-        <pc:chgData name="Casey Lee" userId="4bc459e0-655e-452e-96c2-b918c0999cdb" providerId="ADAL" clId="{FEDCCBD3-F3AF-4248-98FF-B03AEB6CAACA}" dt="2025-10-06T14:26:54.755" v="51186" actId="20577"/>
-        <pc:sldMkLst>
-          <pc:docMk/>
-          <pc:sldMk cId="3576209394" sldId="2147481243"/>
-        </pc:sldMkLst>
-      </pc:sldChg>
-      <pc:sldChg chg="addSp delSp modSp add mod ord">
-        <pc:chgData name="Casey Lee" userId="4bc459e0-655e-452e-96c2-b918c0999cdb" providerId="ADAL" clId="{FEDCCBD3-F3AF-4248-98FF-B03AEB6CAACA}" dt="2025-10-09T14:30:09.411" v="70035" actId="20577"/>
-        <pc:sldMkLst>
-          <pc:docMk/>
-          <pc:sldMk cId="2460346233" sldId="2147481244"/>
-        </pc:sldMkLst>
-      </pc:sldChg>
-      <pc:sldChg chg="delSp add del mod">
-        <pc:chgData name="Casey Lee" userId="4bc459e0-655e-452e-96c2-b918c0999cdb" providerId="ADAL" clId="{FEDCCBD3-F3AF-4248-98FF-B03AEB6CAACA}" dt="2025-09-30T16:46:21.643" v="21624" actId="47"/>
-        <pc:sldMkLst>
-          <pc:docMk/>
-          <pc:sldMk cId="3652261605" sldId="2147481244"/>
-        </pc:sldMkLst>
-      </pc:sldChg>
-      <pc:sldChg chg="addSp delSp modSp del mod">
-        <pc:chgData name="Casey Lee" userId="4bc459e0-655e-452e-96c2-b918c0999cdb" providerId="ADAL" clId="{FEDCCBD3-F3AF-4248-98FF-B03AEB6CAACA}" dt="2025-10-03T19:07:17.692" v="46513" actId="47"/>
-        <pc:sldMkLst>
-          <pc:docMk/>
-          <pc:sldMk cId="3253257184" sldId="2147481245"/>
-        </pc:sldMkLst>
-      </pc:sldChg>
-      <pc:sldChg chg="addSp delSp modSp del mod ord">
-        <pc:chgData name="Casey Lee" userId="4bc459e0-655e-452e-96c2-b918c0999cdb" providerId="ADAL" clId="{FEDCCBD3-F3AF-4248-98FF-B03AEB6CAACA}" dt="2025-10-02T20:57:45.174" v="38909" actId="47"/>
-        <pc:sldMkLst>
-          <pc:docMk/>
-          <pc:sldMk cId="3132776874" sldId="2147481246"/>
-        </pc:sldMkLst>
-      </pc:sldChg>
-      <pc:sldChg chg="modSp mod">
-        <pc:chgData name="Casey Lee" userId="4bc459e0-655e-452e-96c2-b918c0999cdb" providerId="ADAL" clId="{FEDCCBD3-F3AF-4248-98FF-B03AEB6CAACA}" dt="2025-10-09T14:29:41.840" v="70033" actId="20577"/>
-        <pc:sldMkLst>
-          <pc:docMk/>
-          <pc:sldMk cId="2852939510" sldId="2147481248"/>
-        </pc:sldMkLst>
-      </pc:sldChg>
-      <pc:sldChg chg="add ord">
-        <pc:chgData name="Casey Lee" userId="4bc459e0-655e-452e-96c2-b918c0999cdb" providerId="ADAL" clId="{FEDCCBD3-F3AF-4248-98FF-B03AEB6CAACA}" dt="2025-10-01T19:21:14.031" v="24345"/>
-        <pc:sldMkLst>
-          <pc:docMk/>
-          <pc:sldMk cId="2363090598" sldId="2147481251"/>
-        </pc:sldMkLst>
-      </pc:sldChg>
-      <pc:sldChg chg="add ord">
-        <pc:chgData name="Casey Lee" userId="4bc459e0-655e-452e-96c2-b918c0999cdb" providerId="ADAL" clId="{FEDCCBD3-F3AF-4248-98FF-B03AEB6CAACA}" dt="2025-10-01T19:25:21.977" v="24350"/>
-        <pc:sldMkLst>
-          <pc:docMk/>
-          <pc:sldMk cId="2326761967" sldId="2147481252"/>
-        </pc:sldMkLst>
-      </pc:sldChg>
-      <pc:sldChg chg="addSp delSp modSp add mod ord">
-        <pc:chgData name="Casey Lee" userId="4bc459e0-655e-452e-96c2-b918c0999cdb" providerId="ADAL" clId="{FEDCCBD3-F3AF-4248-98FF-B03AEB6CAACA}" dt="2025-10-02T05:31:02.401" v="27778" actId="27918"/>
-        <pc:sldMkLst>
-          <pc:docMk/>
-          <pc:sldMk cId="3718838375" sldId="2147481253"/>
-        </pc:sldMkLst>
-      </pc:sldChg>
-      <pc:sldChg chg="add del">
-        <pc:chgData name="Casey Lee" userId="4bc459e0-655e-452e-96c2-b918c0999cdb" providerId="ADAL" clId="{FEDCCBD3-F3AF-4248-98FF-B03AEB6CAACA}" dt="2025-10-01T20:10:26.540" v="26275" actId="47"/>
-        <pc:sldMkLst>
-          <pc:docMk/>
-          <pc:sldMk cId="3798332572" sldId="2147481253"/>
-        </pc:sldMkLst>
-      </pc:sldChg>
-      <pc:sldChg chg="add mod ord modShow">
-        <pc:chgData name="Casey Lee" userId="4bc459e0-655e-452e-96c2-b918c0999cdb" providerId="ADAL" clId="{FEDCCBD3-F3AF-4248-98FF-B03AEB6CAACA}" dt="2025-10-02T20:28:16.132" v="37985"/>
-        <pc:sldMkLst>
-          <pc:docMk/>
-          <pc:sldMk cId="2060710732" sldId="2147481254"/>
-        </pc:sldMkLst>
-      </pc:sldChg>
-      <pc:sldChg chg="addSp delSp modSp mod modShow">
-        <pc:chgData name="Casey Lee" userId="4bc459e0-655e-452e-96c2-b918c0999cdb" providerId="ADAL" clId="{FEDCCBD3-F3AF-4248-98FF-B03AEB6CAACA}" dt="2025-10-08T20:39:16.692" v="70028" actId="122"/>
-        <pc:sldMkLst>
-          <pc:docMk/>
-          <pc:sldMk cId="988488" sldId="2147481255"/>
-        </pc:sldMkLst>
-      </pc:sldChg>
-      <pc:sldChg chg="addSp delSp modSp add del mod">
-        <pc:chgData name="Casey Lee" userId="4bc459e0-655e-452e-96c2-b918c0999cdb" providerId="ADAL" clId="{FEDCCBD3-F3AF-4248-98FF-B03AEB6CAACA}" dt="2025-10-02T18:03:09.206" v="34600" actId="47"/>
-        <pc:sldMkLst>
-          <pc:docMk/>
-          <pc:sldMk cId="527820914" sldId="2147481255"/>
-        </pc:sldMkLst>
-      </pc:sldChg>
-      <pc:sldChg chg="addSp delSp modSp add del mod">
-        <pc:chgData name="Casey Lee" userId="4bc459e0-655e-452e-96c2-b918c0999cdb" providerId="ADAL" clId="{FEDCCBD3-F3AF-4248-98FF-B03AEB6CAACA}" dt="2025-10-02T16:43:43.045" v="30085" actId="47"/>
-        <pc:sldMkLst>
-          <pc:docMk/>
-          <pc:sldMk cId="2989387375" sldId="2147481255"/>
-        </pc:sldMkLst>
-      </pc:sldChg>
-      <pc:sldChg chg="new del">
-        <pc:chgData name="Casey Lee" userId="4bc459e0-655e-452e-96c2-b918c0999cdb" providerId="ADAL" clId="{FEDCCBD3-F3AF-4248-98FF-B03AEB6CAACA}" dt="2025-10-02T17:30:01.770" v="32414" actId="47"/>
-        <pc:sldMkLst>
-          <pc:docMk/>
-          <pc:sldMk cId="3199761401" sldId="2147481255"/>
-        </pc:sldMkLst>
-      </pc:sldChg>
-      <pc:sldChg chg="delSp modSp add del mod">
-        <pc:chgData name="Casey Lee" userId="4bc459e0-655e-452e-96c2-b918c0999cdb" providerId="ADAL" clId="{FEDCCBD3-F3AF-4248-98FF-B03AEB6CAACA}" dt="2025-10-03T19:53:41.930" v="47704" actId="47"/>
-        <pc:sldMkLst>
-          <pc:docMk/>
-          <pc:sldMk cId="2390622337" sldId="2147481256"/>
-        </pc:sldMkLst>
-      </pc:sldChg>
-      <pc:sldChg chg="modSp mod">
-        <pc:chgData name="Casey Lee" userId="4bc459e0-655e-452e-96c2-b918c0999cdb" providerId="ADAL" clId="{FEDCCBD3-F3AF-4248-98FF-B03AEB6CAACA}" dt="2025-10-03T20:39:14.325" v="48212" actId="20577"/>
-        <pc:sldMkLst>
-          <pc:docMk/>
-          <pc:sldMk cId="2682905776" sldId="2147481257"/>
-        </pc:sldMkLst>
-      </pc:sldChg>
-      <pc:sldChg chg="modSp mod">
-        <pc:chgData name="Casey Lee" userId="4bc459e0-655e-452e-96c2-b918c0999cdb" providerId="ADAL" clId="{FEDCCBD3-F3AF-4248-98FF-B03AEB6CAACA}" dt="2025-10-03T20:39:56.594" v="48220" actId="20577"/>
-        <pc:sldMkLst>
-          <pc:docMk/>
-          <pc:sldMk cId="2763871" sldId="2147481258"/>
-        </pc:sldMkLst>
-      </pc:sldChg>
-      <pc:sldChg chg="addSp delSp modSp add mod">
-        <pc:chgData name="Casey Lee" userId="4bc459e0-655e-452e-96c2-b918c0999cdb" providerId="ADAL" clId="{FEDCCBD3-F3AF-4248-98FF-B03AEB6CAACA}" dt="2025-10-03T15:31:53.386" v="43638" actId="1076"/>
-        <pc:sldMkLst>
-          <pc:docMk/>
-          <pc:sldMk cId="2295337202" sldId="2147481259"/>
-        </pc:sldMkLst>
-      </pc:sldChg>
-      <pc:sldChg chg="addSp delSp modSp add mod">
-        <pc:chgData name="Casey Lee" userId="4bc459e0-655e-452e-96c2-b918c0999cdb" providerId="ADAL" clId="{FEDCCBD3-F3AF-4248-98FF-B03AEB6CAACA}" dt="2025-10-06T14:42:44.314" v="51204" actId="20577"/>
-        <pc:sldMkLst>
-          <pc:docMk/>
-          <pc:sldMk cId="2022463905" sldId="2147481260"/>
-        </pc:sldMkLst>
-      </pc:sldChg>
-      <pc:sldChg chg="addSp delSp modSp add mod">
-        <pc:chgData name="Casey Lee" userId="4bc459e0-655e-452e-96c2-b918c0999cdb" providerId="ADAL" clId="{FEDCCBD3-F3AF-4248-98FF-B03AEB6CAACA}" dt="2025-10-17T17:36:01.193" v="70061" actId="21"/>
-        <pc:sldMkLst>
-          <pc:docMk/>
-          <pc:sldMk cId="648698299" sldId="2147481261"/>
-        </pc:sldMkLst>
-      </pc:sldChg>
-      <pc:sldChg chg="modSp mod">
-        <pc:chgData name="Casey Lee" userId="4bc459e0-655e-452e-96c2-b918c0999cdb" providerId="ADAL" clId="{FEDCCBD3-F3AF-4248-98FF-B03AEB6CAACA}" dt="2025-10-03T19:00:55.817" v="46428" actId="207"/>
-        <pc:sldMkLst>
-          <pc:docMk/>
-          <pc:sldMk cId="4145473322" sldId="2147481262"/>
-        </pc:sldMkLst>
-      </pc:sldChg>
-      <pc:sldChg chg="addSp delSp modSp add mod ord">
-        <pc:chgData name="Casey Lee" userId="4bc459e0-655e-452e-96c2-b918c0999cdb" providerId="ADAL" clId="{FEDCCBD3-F3AF-4248-98FF-B03AEB6CAACA}" dt="2025-10-07T20:07:50.220" v="65922"/>
-        <pc:sldMkLst>
-          <pc:docMk/>
-          <pc:sldMk cId="756745785" sldId="2147481263"/>
-        </pc:sldMkLst>
-      </pc:sldChg>
-      <pc:sldChg chg="modSp mod">
-        <pc:chgData name="Casey Lee" userId="4bc459e0-655e-452e-96c2-b918c0999cdb" providerId="ADAL" clId="{FEDCCBD3-F3AF-4248-98FF-B03AEB6CAACA}" dt="2025-10-06T14:43:21.408" v="51208" actId="20577"/>
-        <pc:sldMkLst>
-          <pc:docMk/>
-          <pc:sldMk cId="345488764" sldId="2147481264"/>
-        </pc:sldMkLst>
-      </pc:sldChg>
-      <pc:sldChg chg="add del">
-        <pc:chgData name="Casey Lee" userId="4bc459e0-655e-452e-96c2-b918c0999cdb" providerId="ADAL" clId="{FEDCCBD3-F3AF-4248-98FF-B03AEB6CAACA}" dt="2025-10-03T18:56:44.257" v="46243" actId="47"/>
-        <pc:sldMkLst>
-          <pc:docMk/>
-          <pc:sldMk cId="1533153485" sldId="2147481265"/>
-        </pc:sldMkLst>
-      </pc:sldChg>
-      <pc:sldChg chg="modSp add mod">
-        <pc:chgData name="Casey Lee" userId="4bc459e0-655e-452e-96c2-b918c0999cdb" providerId="ADAL" clId="{FEDCCBD3-F3AF-4248-98FF-B03AEB6CAACA}" dt="2025-10-03T19:29:54.444" v="46737" actId="20577"/>
-        <pc:sldMkLst>
-          <pc:docMk/>
-          <pc:sldMk cId="2503961039" sldId="2147481265"/>
-        </pc:sldMkLst>
-      </pc:sldChg>
-      <pc:sldChg chg="mod ord modShow">
-        <pc:chgData name="Casey Lee" userId="4bc459e0-655e-452e-96c2-b918c0999cdb" providerId="ADAL" clId="{FEDCCBD3-F3AF-4248-98FF-B03AEB6CAACA}" dt="2025-10-07T21:02:19.784" v="67905" actId="729"/>
-        <pc:sldMkLst>
-          <pc:docMk/>
-          <pc:sldMk cId="863687252" sldId="2147481266"/>
-        </pc:sldMkLst>
-      </pc:sldChg>
-      <pc:sldChg chg="modSp mod">
-        <pc:chgData name="Casey Lee" userId="4bc459e0-655e-452e-96c2-b918c0999cdb" providerId="ADAL" clId="{FEDCCBD3-F3AF-4248-98FF-B03AEB6CAACA}" dt="2025-10-06T14:38:20.855" v="51196" actId="20577"/>
-        <pc:sldMkLst>
-          <pc:docMk/>
-          <pc:sldMk cId="645413853" sldId="2147481268"/>
-        </pc:sldMkLst>
-      </pc:sldChg>
-      <pc:sldChg chg="modSp mod ord modCm">
-        <pc:chgData name="Casey Lee" userId="4bc459e0-655e-452e-96c2-b918c0999cdb" providerId="ADAL" clId="{FEDCCBD3-F3AF-4248-98FF-B03AEB6CAACA}" dt="2025-10-07T20:03:15.429" v="65920"/>
-        <pc:sldMkLst>
-          <pc:docMk/>
-          <pc:sldMk cId="3907743225" sldId="2147481269"/>
-        </pc:sldMkLst>
-        <pc:extLst>
-          <p:ext xmlns:p="http://schemas.openxmlformats.org/presentationml/2006/main" uri="{D6D511B9-2390-475A-947B-AFAB55BFBCF1}">
-            <pc226:cmChg xmlns:pc226="http://schemas.microsoft.com/office/powerpoint/2022/06/main/command" chg="mod">
-              <pc226:chgData name="Casey Lee" userId="4bc459e0-655e-452e-96c2-b918c0999cdb" providerId="ADAL" clId="{FEDCCBD3-F3AF-4248-98FF-B03AEB6CAACA}" dt="2025-10-07T20:03:01.832" v="65912" actId="20577"/>
-              <pc2:cmMkLst xmlns:pc2="http://schemas.microsoft.com/office/powerpoint/2019/9/main/command">
-                <pc:docMk/>
-                <pc:sldMk cId="3907743225" sldId="2147481269"/>
-                <pc2:cmMk id="{1C84629E-6323-F44F-AD17-0816FD20B7E6}"/>
-              </pc2:cmMkLst>
-            </pc226:cmChg>
-          </p:ext>
-        </pc:extLst>
-      </pc:sldChg>
-      <pc:sldChg chg="del">
-        <pc:chgData name="Casey Lee" userId="4bc459e0-655e-452e-96c2-b918c0999cdb" providerId="ADAL" clId="{FEDCCBD3-F3AF-4248-98FF-B03AEB6CAACA}" dt="2025-10-07T21:02:02.298" v="67901" actId="47"/>
-        <pc:sldMkLst>
-          <pc:docMk/>
-          <pc:sldMk cId="2080702279" sldId="2147481270"/>
-        </pc:sldMkLst>
-      </pc:sldChg>
-      <pc:sldChg chg="addSp delSp modSp add mod">
-        <pc:chgData name="Casey Lee" userId="4bc459e0-655e-452e-96c2-b918c0999cdb" providerId="ADAL" clId="{FEDCCBD3-F3AF-4248-98FF-B03AEB6CAACA}" dt="2025-10-07T20:24:35.150" v="66597" actId="14100"/>
-        <pc:sldMkLst>
-          <pc:docMk/>
-          <pc:sldMk cId="869299062" sldId="2147481271"/>
-        </pc:sldMkLst>
-      </pc:sldChg>
-      <pc:sldChg chg="del">
-        <pc:chgData name="Casey Lee" userId="4bc459e0-655e-452e-96c2-b918c0999cdb" providerId="ADAL" clId="{FEDCCBD3-F3AF-4248-98FF-B03AEB6CAACA}" dt="2025-10-07T14:47:04.313" v="64602" actId="47"/>
-        <pc:sldMkLst>
-          <pc:docMk/>
-          <pc:sldMk cId="1252616050" sldId="2147481273"/>
-        </pc:sldMkLst>
-      </pc:sldChg>
-      <pc:sldChg chg="addSp delSp modSp mod ord">
-        <pc:chgData name="Casey Lee" userId="4bc459e0-655e-452e-96c2-b918c0999cdb" providerId="ADAL" clId="{FEDCCBD3-F3AF-4248-98FF-B03AEB6CAACA}" dt="2025-10-06T22:26:50.546" v="59691"/>
-        <pc:sldMkLst>
-          <pc:docMk/>
-          <pc:sldMk cId="1976876559" sldId="2147481274"/>
-        </pc:sldMkLst>
-      </pc:sldChg>
-      <pc:sldChg chg="addSp modSp mod">
-        <pc:chgData name="Casey Lee" userId="4bc459e0-655e-452e-96c2-b918c0999cdb" providerId="ADAL" clId="{FEDCCBD3-F3AF-4248-98FF-B03AEB6CAACA}" dt="2025-10-07T20:45:56.729" v="66823" actId="20577"/>
-        <pc:sldMkLst>
-          <pc:docMk/>
-          <pc:sldMk cId="926817997" sldId="2147481276"/>
-        </pc:sldMkLst>
-      </pc:sldChg>
-      <pc:sldChg chg="modSp mod">
-        <pc:chgData name="Casey Lee" userId="4bc459e0-655e-452e-96c2-b918c0999cdb" providerId="ADAL" clId="{FEDCCBD3-F3AF-4248-98FF-B03AEB6CAACA}" dt="2025-10-06T14:28:47.223" v="51187" actId="20577"/>
-        <pc:sldMkLst>
-          <pc:docMk/>
-          <pc:sldMk cId="2350308366" sldId="2147481278"/>
-        </pc:sldMkLst>
-      </pc:sldChg>
-      <pc:sldChg chg="modSp add del mod">
-        <pc:chgData name="Casey Lee" userId="4bc459e0-655e-452e-96c2-b918c0999cdb" providerId="ADAL" clId="{FEDCCBD3-F3AF-4248-98FF-B03AEB6CAACA}" dt="2025-10-06T17:59:59.603" v="51304" actId="47"/>
-        <pc:sldMkLst>
-          <pc:docMk/>
-          <pc:sldMk cId="2073971854" sldId="2147481279"/>
-        </pc:sldMkLst>
-      </pc:sldChg>
-      <pc:sldChg chg="add del">
-        <pc:chgData name="Casey Lee" userId="4bc459e0-655e-452e-96c2-b918c0999cdb" providerId="ADAL" clId="{FEDCCBD3-F3AF-4248-98FF-B03AEB6CAACA}" dt="2025-10-06T18:00:11.534" v="51306"/>
-        <pc:sldMkLst>
-          <pc:docMk/>
-          <pc:sldMk cId="2464430635" sldId="2147481279"/>
-        </pc:sldMkLst>
-      </pc:sldChg>
-      <pc:sldChg chg="delSp modSp add del mod">
-        <pc:chgData name="Casey Lee" userId="4bc459e0-655e-452e-96c2-b918c0999cdb" providerId="ADAL" clId="{FEDCCBD3-F3AF-4248-98FF-B03AEB6CAACA}" dt="2025-10-06T18:00:29.729" v="51310" actId="47"/>
-        <pc:sldMkLst>
-          <pc:docMk/>
-          <pc:sldMk cId="2680122059" sldId="2147481279"/>
-        </pc:sldMkLst>
-      </pc:sldChg>
-      <pc:sldChg chg="addSp delSp modSp add del mod">
-        <pc:chgData name="Casey Lee" userId="4bc459e0-655e-452e-96c2-b918c0999cdb" providerId="ADAL" clId="{FEDCCBD3-F3AF-4248-98FF-B03AEB6CAACA}" dt="2025-10-06T20:03:10.927" v="53757" actId="47"/>
-        <pc:sldMkLst>
-          <pc:docMk/>
-          <pc:sldMk cId="3991912433" sldId="2147481279"/>
-        </pc:sldMkLst>
-      </pc:sldChg>
-      <pc:sldChg chg="add del">
-        <pc:chgData name="Casey Lee" userId="4bc459e0-655e-452e-96c2-b918c0999cdb" providerId="ADAL" clId="{FEDCCBD3-F3AF-4248-98FF-B03AEB6CAACA}" dt="2025-10-06T20:11:57.506" v="54064" actId="47"/>
-        <pc:sldMkLst>
-          <pc:docMk/>
-          <pc:sldMk cId="2121545136" sldId="2147481281"/>
-        </pc:sldMkLst>
-      </pc:sldChg>
-      <pc:sldChg chg="addSp delSp modSp add del mod">
-        <pc:chgData name="Casey Lee" userId="4bc459e0-655e-452e-96c2-b918c0999cdb" providerId="ADAL" clId="{FEDCCBD3-F3AF-4248-98FF-B03AEB6CAACA}" dt="2025-10-06T20:04:56.588" v="53773" actId="47"/>
-        <pc:sldMkLst>
-          <pc:docMk/>
-          <pc:sldMk cId="1440506278" sldId="2147481282"/>
-        </pc:sldMkLst>
-      </pc:sldChg>
-      <pc:sldChg chg="addSp delSp modSp add del mod">
-        <pc:chgData name="Casey Lee" userId="4bc459e0-655e-452e-96c2-b918c0999cdb" providerId="ADAL" clId="{FEDCCBD3-F3AF-4248-98FF-B03AEB6CAACA}" dt="2025-10-06T20:08:45.813" v="53874" actId="47"/>
-        <pc:sldMkLst>
-          <pc:docMk/>
-          <pc:sldMk cId="3422270090" sldId="2147481283"/>
-        </pc:sldMkLst>
-      </pc:sldChg>
-      <pc:sldChg chg="addSp delSp modSp add mod ord">
-        <pc:chgData name="Casey Lee" userId="4bc459e0-655e-452e-96c2-b918c0999cdb" providerId="ADAL" clId="{FEDCCBD3-F3AF-4248-98FF-B03AEB6CAACA}" dt="2025-10-07T19:05:05.388" v="65578"/>
-        <pc:sldMkLst>
-          <pc:docMk/>
-          <pc:sldMk cId="1246806865" sldId="2147481284"/>
-        </pc:sldMkLst>
-      </pc:sldChg>
-      <pc:sldChg chg="addSp delSp modSp add del mod ord modShow">
-        <pc:chgData name="Casey Lee" userId="4bc459e0-655e-452e-96c2-b918c0999cdb" providerId="ADAL" clId="{FEDCCBD3-F3AF-4248-98FF-B03AEB6CAACA}" dt="2025-10-06T21:41:42.945" v="57193" actId="47"/>
-        <pc:sldMkLst>
-          <pc:docMk/>
-          <pc:sldMk cId="3679891914" sldId="2147481285"/>
-        </pc:sldMkLst>
-      </pc:sldChg>
-      <pc:sldChg chg="addSp delSp modSp add mod">
-        <pc:chgData name="Casey Lee" userId="4bc459e0-655e-452e-96c2-b918c0999cdb" providerId="ADAL" clId="{FEDCCBD3-F3AF-4248-98FF-B03AEB6CAACA}" dt="2025-10-07T21:11:25.626" v="68168"/>
-        <pc:sldMkLst>
-          <pc:docMk/>
-          <pc:sldMk cId="2379161747" sldId="2147481286"/>
-        </pc:sldMkLst>
-      </pc:sldChg>
-      <pc:sldChg chg="modSp add del mod">
-        <pc:chgData name="Casey Lee" userId="4bc459e0-655e-452e-96c2-b918c0999cdb" providerId="ADAL" clId="{FEDCCBD3-F3AF-4248-98FF-B03AEB6CAACA}" dt="2025-10-06T21:14:50.008" v="55647" actId="47"/>
-        <pc:sldMkLst>
-          <pc:docMk/>
-          <pc:sldMk cId="1754210451" sldId="2147481287"/>
-        </pc:sldMkLst>
-      </pc:sldChg>
-      <pc:sldChg chg="addSp delSp modSp add mod ord modNotesTx">
-        <pc:chgData name="Casey Lee" userId="4bc459e0-655e-452e-96c2-b918c0999cdb" providerId="ADAL" clId="{FEDCCBD3-F3AF-4248-98FF-B03AEB6CAACA}" dt="2025-10-08T13:51:35.424" v="68204" actId="20577"/>
-        <pc:sldMkLst>
-          <pc:docMk/>
-          <pc:sldMk cId="2042423855" sldId="2147481287"/>
-        </pc:sldMkLst>
-      </pc:sldChg>
-      <pc:sldChg chg="add del">
-        <pc:chgData name="Casey Lee" userId="4bc459e0-655e-452e-96c2-b918c0999cdb" providerId="ADAL" clId="{FEDCCBD3-F3AF-4248-98FF-B03AEB6CAACA}" dt="2025-10-06T21:52:12.046" v="57717" actId="47"/>
-        <pc:sldMkLst>
-          <pc:docMk/>
-          <pc:sldMk cId="1027152683" sldId="2147481288"/>
-        </pc:sldMkLst>
-      </pc:sldChg>
-      <pc:sldChg chg="delSp modSp add mod ord">
-        <pc:chgData name="Casey Lee" userId="4bc459e0-655e-452e-96c2-b918c0999cdb" providerId="ADAL" clId="{FEDCCBD3-F3AF-4248-98FF-B03AEB6CAACA}" dt="2025-10-07T19:05:05.388" v="65578"/>
-        <pc:sldMkLst>
-          <pc:docMk/>
-          <pc:sldMk cId="1092428753" sldId="2147481288"/>
-        </pc:sldMkLst>
-      </pc:sldChg>
-      <pc:sldChg chg="add del">
-        <pc:chgData name="Casey Lee" userId="4bc459e0-655e-452e-96c2-b918c0999cdb" providerId="ADAL" clId="{FEDCCBD3-F3AF-4248-98FF-B03AEB6CAACA}" dt="2025-10-06T21:46:01.387" v="57264"/>
-        <pc:sldMkLst>
-          <pc:docMk/>
-          <pc:sldMk cId="4225137205" sldId="2147481288"/>
-        </pc:sldMkLst>
-      </pc:sldChg>
-      <pc:sldChg chg="modSp add mod">
-        <pc:chgData name="Casey Lee" userId="4bc459e0-655e-452e-96c2-b918c0999cdb" providerId="ADAL" clId="{FEDCCBD3-F3AF-4248-98FF-B03AEB6CAACA}" dt="2025-10-07T19:52:51.587" v="65705" actId="948"/>
-        <pc:sldMkLst>
-          <pc:docMk/>
-          <pc:sldMk cId="2213353267" sldId="2147481289"/>
-        </pc:sldMkLst>
-      </pc:sldChg>
-      <pc:sldChg chg="add ord">
-        <pc:chgData name="Casey Lee" userId="4bc459e0-655e-452e-96c2-b918c0999cdb" providerId="ADAL" clId="{FEDCCBD3-F3AF-4248-98FF-B03AEB6CAACA}" dt="2025-10-07T21:00:42.858" v="67899"/>
-        <pc:sldMkLst>
-          <pc:docMk/>
-          <pc:sldMk cId="1751227399" sldId="2147481290"/>
-        </pc:sldMkLst>
-      </pc:sldChg>
-      <pc:sldChg chg="modSp add mod">
-        <pc:chgData name="Casey Lee" userId="4bc459e0-655e-452e-96c2-b918c0999cdb" providerId="ADAL" clId="{FEDCCBD3-F3AF-4248-98FF-B03AEB6CAACA}" dt="2025-10-07T19:53:56.299" v="65827" actId="1076"/>
-        <pc:sldMkLst>
-          <pc:docMk/>
-          <pc:sldMk cId="1156650361" sldId="2147481291"/>
-        </pc:sldMkLst>
-      </pc:sldChg>
-      <pc:sldChg chg="add del">
-        <pc:chgData name="Casey Lee" userId="4bc459e0-655e-452e-96c2-b918c0999cdb" providerId="ADAL" clId="{FEDCCBD3-F3AF-4248-98FF-B03AEB6CAACA}" dt="2025-10-07T21:02:06.578" v="67902" actId="47"/>
-        <pc:sldMkLst>
-          <pc:docMk/>
-          <pc:sldMk cId="361016522" sldId="2147481292"/>
-        </pc:sldMkLst>
-      </pc:sldChg>
-      <pc:sldChg chg="addSp delSp modSp add del mod ord">
-        <pc:chgData name="Casey Lee" userId="4bc459e0-655e-452e-96c2-b918c0999cdb" providerId="ADAL" clId="{FEDCCBD3-F3AF-4248-98FF-B03AEB6CAACA}" dt="2025-10-08T17:27:26.723" v="69666" actId="47"/>
-        <pc:sldMkLst>
-          <pc:docMk/>
-          <pc:sldMk cId="3867349040" sldId="2147481294"/>
-        </pc:sldMkLst>
-      </pc:sldChg>
-      <pc:sldChg chg="addSp delSp modSp add mod ord">
-        <pc:chgData name="Casey Lee" userId="4bc459e0-655e-452e-96c2-b918c0999cdb" providerId="ADAL" clId="{FEDCCBD3-F3AF-4248-98FF-B03AEB6CAACA}" dt="2025-10-08T18:13:18.131" v="69766"/>
-        <pc:sldMkLst>
-          <pc:docMk/>
-          <pc:sldMk cId="277216321" sldId="2147481295"/>
-        </pc:sldMkLst>
-      </pc:sldChg>
-      <pc:sldChg chg="delSp modSp add del mod">
-        <pc:chgData name="Casey Lee" userId="4bc459e0-655e-452e-96c2-b918c0999cdb" providerId="ADAL" clId="{FEDCCBD3-F3AF-4248-98FF-B03AEB6CAACA}" dt="2025-10-08T17:25:27.263" v="69638" actId="47"/>
-        <pc:sldMkLst>
-          <pc:docMk/>
-          <pc:sldMk cId="525573459" sldId="2147481295"/>
-        </pc:sldMkLst>
-      </pc:sldChg>
-      <pc:sldChg chg="addSp delSp modSp add del mod">
-        <pc:chgData name="Casey Lee" userId="4bc459e0-655e-452e-96c2-b918c0999cdb" providerId="ADAL" clId="{FEDCCBD3-F3AF-4248-98FF-B03AEB6CAACA}" dt="2025-10-08T20:34:36.066" v="69822" actId="47"/>
-        <pc:sldMkLst>
-          <pc:docMk/>
-          <pc:sldMk cId="1403578223" sldId="2147481296"/>
-        </pc:sldMkLst>
-      </pc:sldChg>
-      <pc:sldChg chg="add">
-        <pc:chgData name="Casey Lee" userId="4bc459e0-655e-452e-96c2-b918c0999cdb" providerId="ADAL" clId="{FEDCCBD3-F3AF-4248-98FF-B03AEB6CAACA}" dt="2025-10-08T20:34:09.412" v="69814"/>
-        <pc:sldMkLst>
-          <pc:docMk/>
-          <pc:sldMk cId="3933677755" sldId="2147481297"/>
-        </pc:sldMkLst>
-      </pc:sldChg>
-      <pc:sldChg chg="modSp add del mod">
-        <pc:chgData name="Casey Lee" userId="4bc459e0-655e-452e-96c2-b918c0999cdb" providerId="ADAL" clId="{FEDCCBD3-F3AF-4248-98FF-B03AEB6CAACA}" dt="2025-10-10T22:07:45.214" v="70059" actId="47"/>
-        <pc:sldMkLst>
-          <pc:docMk/>
-          <pc:sldMk cId="634037322" sldId="2147481298"/>
-        </pc:sldMkLst>
-      </pc:sldChg>
     </pc:docChg>
   </pc:docChgLst>
   <pc:docChgLst>
@@ -2890,6 +1210,1448 @@
     </pc:docChg>
   </pc:docChgLst>
   <pc:docChgLst>
+    <pc:chgData name="Kate Tharp" userId="S::kate.tharp@vml.com::f673b90c-5ccd-4f11-b817-79e0f5d8c583" providerId="AD" clId="Web-{A1CFB926-845E-A4C8-E1FE-729016EF509A}"/>
+    <pc:docChg chg="mod">
+      <pc:chgData name="Kate Tharp" userId="S::kate.tharp@vml.com::f673b90c-5ccd-4f11-b817-79e0f5d8c583" providerId="AD" clId="Web-{A1CFB926-845E-A4C8-E1FE-729016EF509A}" dt="2025-09-30T17:14:33.967" v="0"/>
+      <pc:docMkLst>
+        <pc:docMk/>
+      </pc:docMkLst>
+    </pc:docChg>
+  </pc:docChgLst>
+  <pc:docChgLst>
+    <pc:chgData name="Casey Lee" userId="4bc459e0-655e-452e-96c2-b918c0999cdb" providerId="ADAL" clId="{FEDCCBD3-F3AF-4248-98FF-B03AEB6CAACA}"/>
+    <pc:docChg chg="undo redo custSel addSld delSld modSld sldOrd modSection">
+      <pc:chgData name="Casey Lee" userId="4bc459e0-655e-452e-96c2-b918c0999cdb" providerId="ADAL" clId="{FEDCCBD3-F3AF-4248-98FF-B03AEB6CAACA}" dt="2025-10-17T17:36:01.193" v="70061" actId="21"/>
+      <pc:docMkLst>
+        <pc:docMk/>
+      </pc:docMkLst>
+      <pc:sldChg chg="ord">
+        <pc:chgData name="Casey Lee" userId="4bc459e0-655e-452e-96c2-b918c0999cdb" providerId="ADAL" clId="{FEDCCBD3-F3AF-4248-98FF-B03AEB6CAACA}" dt="2025-10-02T20:28:16.132" v="37985"/>
+        <pc:sldMkLst>
+          <pc:docMk/>
+          <pc:sldMk cId="1802258249" sldId="280"/>
+        </pc:sldMkLst>
+      </pc:sldChg>
+      <pc:sldChg chg="modSp mod">
+        <pc:chgData name="Casey Lee" userId="4bc459e0-655e-452e-96c2-b918c0999cdb" providerId="ADAL" clId="{FEDCCBD3-F3AF-4248-98FF-B03AEB6CAACA}" dt="2025-09-30T16:47:04.428" v="21631" actId="20577"/>
+        <pc:sldMkLst>
+          <pc:docMk/>
+          <pc:sldMk cId="1694384516" sldId="285"/>
+        </pc:sldMkLst>
+      </pc:sldChg>
+      <pc:sldChg chg="add del mod ord modShow">
+        <pc:chgData name="Casey Lee" userId="4bc459e0-655e-452e-96c2-b918c0999cdb" providerId="ADAL" clId="{FEDCCBD3-F3AF-4248-98FF-B03AEB6CAACA}" dt="2025-09-26T16:35:44.883" v="4535"/>
+        <pc:sldMkLst>
+          <pc:docMk/>
+          <pc:sldMk cId="2227000735" sldId="307"/>
+        </pc:sldMkLst>
+      </pc:sldChg>
+      <pc:sldChg chg="addSp delSp modSp mod ord">
+        <pc:chgData name="Casey Lee" userId="4bc459e0-655e-452e-96c2-b918c0999cdb" providerId="ADAL" clId="{FEDCCBD3-F3AF-4248-98FF-B03AEB6CAACA}" dt="2025-10-10T15:24:34.837" v="70048" actId="20577"/>
+        <pc:sldMkLst>
+          <pc:docMk/>
+          <pc:sldMk cId="3180984745" sldId="333"/>
+        </pc:sldMkLst>
+      </pc:sldChg>
+      <pc:sldChg chg="modSp mod ord">
+        <pc:chgData name="Casey Lee" userId="4bc459e0-655e-452e-96c2-b918c0999cdb" providerId="ADAL" clId="{FEDCCBD3-F3AF-4248-98FF-B03AEB6CAACA}" dt="2025-10-02T20:28:16.132" v="37985"/>
+        <pc:sldMkLst>
+          <pc:docMk/>
+          <pc:sldMk cId="1946109353" sldId="355"/>
+        </pc:sldMkLst>
+      </pc:sldChg>
+      <pc:sldChg chg="addSp delSp modSp mod ord">
+        <pc:chgData name="Casey Lee" userId="4bc459e0-655e-452e-96c2-b918c0999cdb" providerId="ADAL" clId="{FEDCCBD3-F3AF-4248-98FF-B03AEB6CAACA}" dt="2025-09-29T13:57:09.558" v="11695"/>
+        <pc:sldMkLst>
+          <pc:docMk/>
+          <pc:sldMk cId="2675615646" sldId="419"/>
+        </pc:sldMkLst>
+      </pc:sldChg>
+      <pc:sldChg chg="addSp delSp modSp mod modCm">
+        <pc:chgData name="Casey Lee" userId="4bc459e0-655e-452e-96c2-b918c0999cdb" providerId="ADAL" clId="{FEDCCBD3-F3AF-4248-98FF-B03AEB6CAACA}" dt="2025-10-06T14:20:14.006" v="51184" actId="20577"/>
+        <pc:sldMkLst>
+          <pc:docMk/>
+          <pc:sldMk cId="1299622664" sldId="434"/>
+        </pc:sldMkLst>
+        <pc:extLst>
+          <p:ext xmlns:p="http://schemas.openxmlformats.org/presentationml/2006/main" uri="{D6D511B9-2390-475A-947B-AFAB55BFBCF1}">
+            <pc226:cmChg xmlns:pc226="http://schemas.microsoft.com/office/powerpoint/2022/06/main/command" xmlns="" chg="mod">
+              <pc226:chgData name="Casey Lee" userId="4bc459e0-655e-452e-96c2-b918c0999cdb" providerId="ADAL" clId="{FEDCCBD3-F3AF-4248-98FF-B03AEB6CAACA}" dt="2025-10-06T14:20:14.006" v="51184" actId="20577"/>
+              <pc2:cmMkLst xmlns:pc2="http://schemas.microsoft.com/office/powerpoint/2019/9/main/command">
+                <pc:docMk/>
+                <pc:sldMk cId="1299622664" sldId="434"/>
+                <pc2:cmMk id="{9C52BFDD-9F11-4C01-8EA9-393721749318}"/>
+              </pc2:cmMkLst>
+            </pc226:cmChg>
+          </p:ext>
+        </pc:extLst>
+      </pc:sldChg>
+      <pc:sldChg chg="add del ord">
+        <pc:chgData name="Casey Lee" userId="4bc459e0-655e-452e-96c2-b918c0999cdb" providerId="ADAL" clId="{FEDCCBD3-F3AF-4248-98FF-B03AEB6CAACA}" dt="2025-10-02T15:55:33.977" v="28746"/>
+        <pc:sldMkLst>
+          <pc:docMk/>
+          <pc:sldMk cId="3900277827" sldId="2147478250"/>
+        </pc:sldMkLst>
+      </pc:sldChg>
+      <pc:sldChg chg="add ord">
+        <pc:chgData name="Casey Lee" userId="4bc459e0-655e-452e-96c2-b918c0999cdb" providerId="ADAL" clId="{FEDCCBD3-F3AF-4248-98FF-B03AEB6CAACA}" dt="2025-10-02T15:55:33.977" v="28746"/>
+        <pc:sldMkLst>
+          <pc:docMk/>
+          <pc:sldMk cId="2066716811" sldId="2147478329"/>
+        </pc:sldMkLst>
+      </pc:sldChg>
+      <pc:sldChg chg="add del">
+        <pc:chgData name="Casey Lee" userId="4bc459e0-655e-452e-96c2-b918c0999cdb" providerId="ADAL" clId="{FEDCCBD3-F3AF-4248-98FF-B03AEB6CAACA}" dt="2025-09-19T19:13:18.647" v="2"/>
+        <pc:sldMkLst>
+          <pc:docMk/>
+          <pc:sldMk cId="679476797" sldId="2147480949"/>
+        </pc:sldMkLst>
+      </pc:sldChg>
+      <pc:sldChg chg="addSp delSp modSp add mod ord">
+        <pc:chgData name="Casey Lee" userId="4bc459e0-655e-452e-96c2-b918c0999cdb" providerId="ADAL" clId="{FEDCCBD3-F3AF-4248-98FF-B03AEB6CAACA}" dt="2025-10-07T13:38:34.824" v="59882"/>
+        <pc:sldMkLst>
+          <pc:docMk/>
+          <pc:sldMk cId="2761368814" sldId="2147481181"/>
+        </pc:sldMkLst>
+      </pc:sldChg>
+      <pc:sldChg chg="addSp delSp modSp add del mod">
+        <pc:chgData name="Casey Lee" userId="4bc459e0-655e-452e-96c2-b918c0999cdb" providerId="ADAL" clId="{FEDCCBD3-F3AF-4248-98FF-B03AEB6CAACA}" dt="2025-09-29T14:22:47.094" v="12758" actId="47"/>
+        <pc:sldMkLst>
+          <pc:docMk/>
+          <pc:sldMk cId="3069225704" sldId="2147481199"/>
+        </pc:sldMkLst>
+      </pc:sldChg>
+      <pc:sldChg chg="modSp add del mod">
+        <pc:chgData name="Casey Lee" userId="4bc459e0-655e-452e-96c2-b918c0999cdb" providerId="ADAL" clId="{FEDCCBD3-F3AF-4248-98FF-B03AEB6CAACA}" dt="2025-10-03T15:18:34.054" v="43364" actId="47"/>
+        <pc:sldMkLst>
+          <pc:docMk/>
+          <pc:sldMk cId="2500079299" sldId="2147481200"/>
+        </pc:sldMkLst>
+      </pc:sldChg>
+      <pc:sldChg chg="modSp add mod ord modCm">
+        <pc:chgData name="Casey Lee" userId="4bc459e0-655e-452e-96c2-b918c0999cdb" providerId="ADAL" clId="{FEDCCBD3-F3AF-4248-98FF-B03AEB6CAACA}" dt="2025-10-10T21:45:55.195" v="70049" actId="13926"/>
+        <pc:sldMkLst>
+          <pc:docMk/>
+          <pc:sldMk cId="829862625" sldId="2147481206"/>
+        </pc:sldMkLst>
+        <pc:extLst>
+          <p:ext xmlns:p="http://schemas.openxmlformats.org/presentationml/2006/main" uri="{D6D511B9-2390-475A-947B-AFAB55BFBCF1}">
+            <pc226:cmChg xmlns:pc226="http://schemas.microsoft.com/office/powerpoint/2022/06/main/command" xmlns="" chg="mod">
+              <pc226:chgData name="Casey Lee" userId="4bc459e0-655e-452e-96c2-b918c0999cdb" providerId="ADAL" clId="{FEDCCBD3-F3AF-4248-98FF-B03AEB6CAACA}" dt="2025-10-08T14:25:52.778" v="68521" actId="20577"/>
+              <pc2:cmMkLst xmlns:pc2="http://schemas.microsoft.com/office/powerpoint/2019/9/main/command">
+                <pc:docMk/>
+                <pc:sldMk cId="829862625" sldId="2147481206"/>
+                <pc2:cmMk id="{8C1768B5-F339-4F29-B263-E3C0B5FBF0A5}"/>
+              </pc2:cmMkLst>
+            </pc226:cmChg>
+          </p:ext>
+        </pc:extLst>
+      </pc:sldChg>
+      <pc:sldChg chg="addSp modSp mod ord">
+        <pc:chgData name="Casey Lee" userId="4bc459e0-655e-452e-96c2-b918c0999cdb" providerId="ADAL" clId="{FEDCCBD3-F3AF-4248-98FF-B03AEB6CAACA}" dt="2025-09-26T16:40:01.486" v="4856"/>
+        <pc:sldMkLst>
+          <pc:docMk/>
+          <pc:sldMk cId="2128657008" sldId="2147481209"/>
+        </pc:sldMkLst>
+      </pc:sldChg>
+      <pc:sldChg chg="addSp delSp modSp mod">
+        <pc:chgData name="Casey Lee" userId="4bc459e0-655e-452e-96c2-b918c0999cdb" providerId="ADAL" clId="{FEDCCBD3-F3AF-4248-98FF-B03AEB6CAACA}" dt="2025-09-19T20:25:41.897" v="1420" actId="20577"/>
+        <pc:sldMkLst>
+          <pc:docMk/>
+          <pc:sldMk cId="1105021549" sldId="2147481210"/>
+        </pc:sldMkLst>
+      </pc:sldChg>
+      <pc:sldChg chg="addSp delSp modSp mod modCm">
+        <pc:chgData name="Casey Lee" userId="4bc459e0-655e-452e-96c2-b918c0999cdb" providerId="ADAL" clId="{FEDCCBD3-F3AF-4248-98FF-B03AEB6CAACA}" dt="2025-10-02T17:39:03.548" v="33313" actId="20577"/>
+        <pc:sldMkLst>
+          <pc:docMk/>
+          <pc:sldMk cId="323746144" sldId="2147481211"/>
+        </pc:sldMkLst>
+        <pc:extLst>
+          <p:ext xmlns:p="http://schemas.openxmlformats.org/presentationml/2006/main" uri="{D6D511B9-2390-475A-947B-AFAB55BFBCF1}">
+            <pc226:cmChg xmlns:pc226="http://schemas.microsoft.com/office/powerpoint/2022/06/main/command" xmlns="" chg="mod">
+              <pc226:chgData name="Casey Lee" userId="4bc459e0-655e-452e-96c2-b918c0999cdb" providerId="ADAL" clId="{FEDCCBD3-F3AF-4248-98FF-B03AEB6CAACA}" dt="2025-10-02T17:39:03.548" v="33313" actId="20577"/>
+              <pc2:cmMkLst xmlns:pc2="http://schemas.microsoft.com/office/powerpoint/2019/9/main/command">
+                <pc:docMk/>
+                <pc:sldMk cId="323746144" sldId="2147481211"/>
+                <pc2:cmMk id="{39EB2F37-B8FD-49D1-A4FF-14B267B24A40}"/>
+              </pc2:cmMkLst>
+            </pc226:cmChg>
+          </p:ext>
+        </pc:extLst>
+      </pc:sldChg>
+      <pc:sldChg chg="addSp delSp modSp mod ord">
+        <pc:chgData name="Casey Lee" userId="4bc459e0-655e-452e-96c2-b918c0999cdb" providerId="ADAL" clId="{FEDCCBD3-F3AF-4248-98FF-B03AEB6CAACA}" dt="2025-10-07T16:36:18.841" v="65435" actId="1076"/>
+        <pc:sldMkLst>
+          <pc:docMk/>
+          <pc:sldMk cId="83366420" sldId="2147481212"/>
+        </pc:sldMkLst>
+      </pc:sldChg>
+      <pc:sldChg chg="addSp delSp modSp mod">
+        <pc:chgData name="Casey Lee" userId="4bc459e0-655e-452e-96c2-b918c0999cdb" providerId="ADAL" clId="{FEDCCBD3-F3AF-4248-98FF-B03AEB6CAACA}" dt="2025-10-06T14:44:31.164" v="51234" actId="20577"/>
+        <pc:sldMkLst>
+          <pc:docMk/>
+          <pc:sldMk cId="1270242671" sldId="2147481213"/>
+        </pc:sldMkLst>
+        <pc:spChg chg="mod">
+          <ac:chgData name="Casey Lee" userId="4bc459e0-655e-452e-96c2-b918c0999cdb" providerId="ADAL" clId="{FEDCCBD3-F3AF-4248-98FF-B03AEB6CAACA}" dt="2025-10-06T14:44:31.164" v="51234" actId="20577"/>
+          <ac:spMkLst>
+            <pc:docMk/>
+            <pc:sldMk cId="1270242671" sldId="2147481213"/>
+            <ac:spMk id="4" creationId="{F93D6D7D-FF3F-82F6-14A4-6285C0323998}"/>
+          </ac:spMkLst>
+        </pc:spChg>
+        <pc:graphicFrameChg chg="mod modGraphic">
+          <ac:chgData name="Casey Lee" userId="4bc459e0-655e-452e-96c2-b918c0999cdb" providerId="ADAL" clId="{FEDCCBD3-F3AF-4248-98FF-B03AEB6CAACA}" dt="2025-10-03T18:57:42.221" v="46337" actId="1076"/>
+          <ac:graphicFrameMkLst>
+            <pc:docMk/>
+            <pc:sldMk cId="1270242671" sldId="2147481213"/>
+            <ac:graphicFrameMk id="2" creationId="{38F22EE9-DEDC-E1DA-1E19-E1758E9C192D}"/>
+          </ac:graphicFrameMkLst>
+        </pc:graphicFrameChg>
+      </pc:sldChg>
+      <pc:sldChg chg="addSp delSp modSp mod">
+        <pc:chgData name="Casey Lee" userId="4bc459e0-655e-452e-96c2-b918c0999cdb" providerId="ADAL" clId="{FEDCCBD3-F3AF-4248-98FF-B03AEB6CAACA}" dt="2025-10-08T14:48:01.931" v="68667" actId="403"/>
+        <pc:sldMkLst>
+          <pc:docMk/>
+          <pc:sldMk cId="1389874235" sldId="2147481214"/>
+        </pc:sldMkLst>
+      </pc:sldChg>
+      <pc:sldChg chg="del">
+        <pc:chgData name="Casey Lee" userId="4bc459e0-655e-452e-96c2-b918c0999cdb" providerId="ADAL" clId="{FEDCCBD3-F3AF-4248-98FF-B03AEB6CAACA}" dt="2025-10-08T12:51:36.953" v="68169" actId="47"/>
+        <pc:sldMkLst>
+          <pc:docMk/>
+          <pc:sldMk cId="300876207" sldId="2147481215"/>
+        </pc:sldMkLst>
+      </pc:sldChg>
+      <pc:sldChg chg="addSp delSp modSp mod ord">
+        <pc:chgData name="Casey Lee" userId="4bc459e0-655e-452e-96c2-b918c0999cdb" providerId="ADAL" clId="{FEDCCBD3-F3AF-4248-98FF-B03AEB6CAACA}" dt="2025-09-26T16:40:01.486" v="4856"/>
+        <pc:sldMkLst>
+          <pc:docMk/>
+          <pc:sldMk cId="145336846" sldId="2147481218"/>
+        </pc:sldMkLst>
+      </pc:sldChg>
+      <pc:sldChg chg="addSp delSp modSp add mod">
+        <pc:chgData name="Casey Lee" userId="4bc459e0-655e-452e-96c2-b918c0999cdb" providerId="ADAL" clId="{FEDCCBD3-F3AF-4248-98FF-B03AEB6CAACA}" dt="2025-10-06T14:20:01.304" v="51183" actId="6549"/>
+        <pc:sldMkLst>
+          <pc:docMk/>
+          <pc:sldMk cId="3892756515" sldId="2147481219"/>
+        </pc:sldMkLst>
+      </pc:sldChg>
+      <pc:sldChg chg="modSp mod ord modShow">
+        <pc:chgData name="Casey Lee" userId="4bc459e0-655e-452e-96c2-b918c0999cdb" providerId="ADAL" clId="{FEDCCBD3-F3AF-4248-98FF-B03AEB6CAACA}" dt="2025-09-30T17:31:46.536" v="22108" actId="729"/>
+        <pc:sldMkLst>
+          <pc:docMk/>
+          <pc:sldMk cId="2449955966" sldId="2147481220"/>
+        </pc:sldMkLst>
+      </pc:sldChg>
+      <pc:sldChg chg="modSp mod ord modShow">
+        <pc:chgData name="Casey Lee" userId="4bc459e0-655e-452e-96c2-b918c0999cdb" providerId="ADAL" clId="{FEDCCBD3-F3AF-4248-98FF-B03AEB6CAACA}" dt="2025-09-30T17:31:46.536" v="22108" actId="729"/>
+        <pc:sldMkLst>
+          <pc:docMk/>
+          <pc:sldMk cId="3753532281" sldId="2147481221"/>
+        </pc:sldMkLst>
+      </pc:sldChg>
+      <pc:sldChg chg="addSp delSp modSp mod ord modCm">
+        <pc:chgData name="Casey Lee" userId="4bc459e0-655e-452e-96c2-b918c0999cdb" providerId="ADAL" clId="{FEDCCBD3-F3AF-4248-98FF-B03AEB6CAACA}" dt="2025-10-02T17:57:31.753" v="34405" actId="255"/>
+        <pc:sldMkLst>
+          <pc:docMk/>
+          <pc:sldMk cId="1157813500" sldId="2147481222"/>
+        </pc:sldMkLst>
+        <pc:extLst>
+          <p:ext xmlns:p="http://schemas.openxmlformats.org/presentationml/2006/main" uri="{D6D511B9-2390-475A-947B-AFAB55BFBCF1}">
+            <pc226:cmChg xmlns:pc226="http://schemas.microsoft.com/office/powerpoint/2022/06/main/command" xmlns="" chg="mod">
+              <pc226:chgData name="Casey Lee" userId="4bc459e0-655e-452e-96c2-b918c0999cdb" providerId="ADAL" clId="{FEDCCBD3-F3AF-4248-98FF-B03AEB6CAACA}" dt="2025-10-02T17:15:03.050" v="32088" actId="20577"/>
+              <pc2:cmMkLst xmlns:pc2="http://schemas.microsoft.com/office/powerpoint/2019/9/main/command">
+                <pc:docMk/>
+                <pc:sldMk cId="1157813500" sldId="2147481222"/>
+                <pc2:cmMk id="{0E9EAFC1-53E0-4A88-9A39-BCE44D7D16F2}"/>
+              </pc2:cmMkLst>
+            </pc226:cmChg>
+          </p:ext>
+        </pc:extLst>
+      </pc:sldChg>
+      <pc:sldChg chg="addSp delSp modSp mod ord">
+        <pc:chgData name="Casey Lee" userId="4bc459e0-655e-452e-96c2-b918c0999cdb" providerId="ADAL" clId="{FEDCCBD3-F3AF-4248-98FF-B03AEB6CAACA}" dt="2025-10-07T14:31:19.673" v="63115"/>
+        <pc:sldMkLst>
+          <pc:docMk/>
+          <pc:sldMk cId="4242413873" sldId="2147481223"/>
+        </pc:sldMkLst>
+      </pc:sldChg>
+      <pc:sldChg chg="ord">
+        <pc:chgData name="Casey Lee" userId="4bc459e0-655e-452e-96c2-b918c0999cdb" providerId="ADAL" clId="{FEDCCBD3-F3AF-4248-98FF-B03AEB6CAACA}" dt="2025-09-30T16:46:42.429" v="21626"/>
+        <pc:sldMkLst>
+          <pc:docMk/>
+          <pc:sldMk cId="3621352377" sldId="2147481224"/>
+        </pc:sldMkLst>
+      </pc:sldChg>
+      <pc:sldChg chg="modSp mod ord">
+        <pc:chgData name="Casey Lee" userId="4bc459e0-655e-452e-96c2-b918c0999cdb" providerId="ADAL" clId="{FEDCCBD3-F3AF-4248-98FF-B03AEB6CAACA}" dt="2025-09-30T16:46:16.686" v="21623"/>
+        <pc:sldMkLst>
+          <pc:docMk/>
+          <pc:sldMk cId="1394883244" sldId="2147481226"/>
+        </pc:sldMkLst>
+      </pc:sldChg>
+      <pc:sldChg chg="addSp delSp modSp mod modCm modNotesTx">
+        <pc:chgData name="Casey Lee" userId="4bc459e0-655e-452e-96c2-b918c0999cdb" providerId="ADAL" clId="{FEDCCBD3-F3AF-4248-98FF-B03AEB6CAACA}" dt="2025-10-01T20:42:30.379" v="26286" actId="14100"/>
+        <pc:sldMkLst>
+          <pc:docMk/>
+          <pc:sldMk cId="2560992972" sldId="2147481227"/>
+        </pc:sldMkLst>
+        <pc:extLst>
+          <p:ext xmlns:p="http://schemas.openxmlformats.org/presentationml/2006/main" uri="{D6D511B9-2390-475A-947B-AFAB55BFBCF1}">
+            <pc226:cmChg xmlns:pc226="http://schemas.microsoft.com/office/powerpoint/2022/06/main/command" xmlns="" chg="mod">
+              <pc226:chgData name="Casey Lee" userId="4bc459e0-655e-452e-96c2-b918c0999cdb" providerId="ADAL" clId="{FEDCCBD3-F3AF-4248-98FF-B03AEB6CAACA}" dt="2025-10-01T20:02:15.709" v="25719" actId="20577"/>
+              <pc2:cmMkLst xmlns:pc2="http://schemas.microsoft.com/office/powerpoint/2019/9/main/command">
+                <pc:docMk/>
+                <pc:sldMk cId="2560992972" sldId="2147481227"/>
+                <pc2:cmMk id="{72D62EF9-F7A0-4789-9637-4F84044DA606}"/>
+              </pc2:cmMkLst>
+            </pc226:cmChg>
+          </p:ext>
+        </pc:extLst>
+      </pc:sldChg>
+      <pc:sldChg chg="addSp delSp modSp mod modNotesTx">
+        <pc:chgData name="Casey Lee" userId="4bc459e0-655e-452e-96c2-b918c0999cdb" providerId="ADAL" clId="{FEDCCBD3-F3AF-4248-98FF-B03AEB6CAACA}" dt="2025-10-01T20:41:18.187" v="26285" actId="478"/>
+        <pc:sldMkLst>
+          <pc:docMk/>
+          <pc:sldMk cId="427855662" sldId="2147481228"/>
+        </pc:sldMkLst>
+      </pc:sldChg>
+      <pc:sldChg chg="addSp delSp modSp add mod ord">
+        <pc:chgData name="Casey Lee" userId="4bc459e0-655e-452e-96c2-b918c0999cdb" providerId="ADAL" clId="{FEDCCBD3-F3AF-4248-98FF-B03AEB6CAACA}" dt="2025-10-07T14:04:08.712" v="61012" actId="1076"/>
+        <pc:sldMkLst>
+          <pc:docMk/>
+          <pc:sldMk cId="1426298556" sldId="2147481229"/>
+        </pc:sldMkLst>
+      </pc:sldChg>
+      <pc:sldChg chg="addSp delSp modSp add mod modNotesTx">
+        <pc:chgData name="Casey Lee" userId="4bc459e0-655e-452e-96c2-b918c0999cdb" providerId="ADAL" clId="{FEDCCBD3-F3AF-4248-98FF-B03AEB6CAACA}" dt="2025-10-02T20:01:31.975" v="37715" actId="255"/>
+        <pc:sldMkLst>
+          <pc:docMk/>
+          <pc:sldMk cId="3134119948" sldId="2147481230"/>
+        </pc:sldMkLst>
+      </pc:sldChg>
+      <pc:sldChg chg="addSp delSp modSp add mod">
+        <pc:chgData name="Casey Lee" userId="4bc459e0-655e-452e-96c2-b918c0999cdb" providerId="ADAL" clId="{FEDCCBD3-F3AF-4248-98FF-B03AEB6CAACA}" dt="2025-10-01T18:56:40.945" v="24342" actId="20577"/>
+        <pc:sldMkLst>
+          <pc:docMk/>
+          <pc:sldMk cId="1129204174" sldId="2147481231"/>
+        </pc:sldMkLst>
+      </pc:sldChg>
+      <pc:sldChg chg="modSp add mod ord">
+        <pc:chgData name="Casey Lee" userId="4bc459e0-655e-452e-96c2-b918c0999cdb" providerId="ADAL" clId="{FEDCCBD3-F3AF-4248-98FF-B03AEB6CAACA}" dt="2025-10-03T20:38:46.309" v="48204" actId="1076"/>
+        <pc:sldMkLst>
+          <pc:docMk/>
+          <pc:sldMk cId="1893241687" sldId="2147481232"/>
+        </pc:sldMkLst>
+      </pc:sldChg>
+      <pc:sldChg chg="add del">
+        <pc:chgData name="Casey Lee" userId="4bc459e0-655e-452e-96c2-b918c0999cdb" providerId="ADAL" clId="{FEDCCBD3-F3AF-4248-98FF-B03AEB6CAACA}" dt="2025-09-29T14:08:50.206" v="12280"/>
+        <pc:sldMkLst>
+          <pc:docMk/>
+          <pc:sldMk cId="1370004904" sldId="2147481234"/>
+        </pc:sldMkLst>
+      </pc:sldChg>
+      <pc:sldChg chg="addSp delSp modSp add del mod">
+        <pc:chgData name="Casey Lee" userId="4bc459e0-655e-452e-96c2-b918c0999cdb" providerId="ADAL" clId="{FEDCCBD3-F3AF-4248-98FF-B03AEB6CAACA}" dt="2025-10-03T14:53:21.106" v="42144" actId="47"/>
+        <pc:sldMkLst>
+          <pc:docMk/>
+          <pc:sldMk cId="3872972120" sldId="2147481234"/>
+        </pc:sldMkLst>
+      </pc:sldChg>
+      <pc:sldChg chg="addSp delSp modSp add del mod">
+        <pc:chgData name="Casey Lee" userId="4bc459e0-655e-452e-96c2-b918c0999cdb" providerId="ADAL" clId="{FEDCCBD3-F3AF-4248-98FF-B03AEB6CAACA}" dt="2025-10-03T13:59:31.111" v="41556" actId="47"/>
+        <pc:sldMkLst>
+          <pc:docMk/>
+          <pc:sldMk cId="2664751740" sldId="2147481235"/>
+        </pc:sldMkLst>
+      </pc:sldChg>
+      <pc:sldChg chg="addSp delSp modSp add mod modShow">
+        <pc:chgData name="Casey Lee" userId="4bc459e0-655e-452e-96c2-b918c0999cdb" providerId="ADAL" clId="{FEDCCBD3-F3AF-4248-98FF-B03AEB6CAACA}" dt="2025-10-03T15:58:41.245" v="44921" actId="14100"/>
+        <pc:sldMkLst>
+          <pc:docMk/>
+          <pc:sldMk cId="1567322584" sldId="2147481236"/>
+        </pc:sldMkLst>
+      </pc:sldChg>
+      <pc:sldChg chg="addSp delSp modSp add mod ord">
+        <pc:chgData name="Casey Lee" userId="4bc459e0-655e-452e-96c2-b918c0999cdb" providerId="ADAL" clId="{FEDCCBD3-F3AF-4248-98FF-B03AEB6CAACA}" dt="2025-10-02T05:31:02.461" v="27783" actId="27918"/>
+        <pc:sldMkLst>
+          <pc:docMk/>
+          <pc:sldMk cId="229596941" sldId="2147481237"/>
+        </pc:sldMkLst>
+      </pc:sldChg>
+      <pc:sldChg chg="addSp delSp modSp add del mod ord">
+        <pc:chgData name="Casey Lee" userId="4bc459e0-655e-452e-96c2-b918c0999cdb" providerId="ADAL" clId="{FEDCCBD3-F3AF-4248-98FF-B03AEB6CAACA}" dt="2025-10-02T05:31:02.417" v="27779" actId="27918"/>
+        <pc:sldMkLst>
+          <pc:docMk/>
+          <pc:sldMk cId="821359188" sldId="2147481238"/>
+        </pc:sldMkLst>
+      </pc:sldChg>
+      <pc:sldChg chg="addSp delSp modSp add mod ord">
+        <pc:chgData name="Casey Lee" userId="4bc459e0-655e-452e-96c2-b918c0999cdb" providerId="ADAL" clId="{FEDCCBD3-F3AF-4248-98FF-B03AEB6CAACA}" dt="2025-10-02T05:31:02.436" v="27781" actId="27918"/>
+        <pc:sldMkLst>
+          <pc:docMk/>
+          <pc:sldMk cId="1694054532" sldId="2147481239"/>
+        </pc:sldMkLst>
+      </pc:sldChg>
+      <pc:sldChg chg="addSp delSp modSp add mod ord">
+        <pc:chgData name="Casey Lee" userId="4bc459e0-655e-452e-96c2-b918c0999cdb" providerId="ADAL" clId="{FEDCCBD3-F3AF-4248-98FF-B03AEB6CAACA}" dt="2025-10-02T05:31:02.449" v="27782" actId="27918"/>
+        <pc:sldMkLst>
+          <pc:docMk/>
+          <pc:sldMk cId="3378682446" sldId="2147481240"/>
+        </pc:sldMkLst>
+      </pc:sldChg>
+      <pc:sldChg chg="addSp delSp modSp add mod">
+        <pc:chgData name="Casey Lee" userId="4bc459e0-655e-452e-96c2-b918c0999cdb" providerId="ADAL" clId="{FEDCCBD3-F3AF-4248-98FF-B03AEB6CAACA}" dt="2025-09-30T20:55:46.946" v="23942" actId="20577"/>
+        <pc:sldMkLst>
+          <pc:docMk/>
+          <pc:sldMk cId="3130016136" sldId="2147481241"/>
+        </pc:sldMkLst>
+      </pc:sldChg>
+      <pc:sldChg chg="add ord">
+        <pc:chgData name="Casey Lee" userId="4bc459e0-655e-452e-96c2-b918c0999cdb" providerId="ADAL" clId="{FEDCCBD3-F3AF-4248-98FF-B03AEB6CAACA}" dt="2025-09-30T14:41:11.888" v="19035"/>
+        <pc:sldMkLst>
+          <pc:docMk/>
+          <pc:sldMk cId="3652664627" sldId="2147481242"/>
+        </pc:sldMkLst>
+      </pc:sldChg>
+      <pc:sldChg chg="addSp delSp modSp add mod ord">
+        <pc:chgData name="Casey Lee" userId="4bc459e0-655e-452e-96c2-b918c0999cdb" providerId="ADAL" clId="{FEDCCBD3-F3AF-4248-98FF-B03AEB6CAACA}" dt="2025-10-06T14:26:54.755" v="51186" actId="20577"/>
+        <pc:sldMkLst>
+          <pc:docMk/>
+          <pc:sldMk cId="3576209394" sldId="2147481243"/>
+        </pc:sldMkLst>
+      </pc:sldChg>
+      <pc:sldChg chg="addSp delSp modSp add mod ord">
+        <pc:chgData name="Casey Lee" userId="4bc459e0-655e-452e-96c2-b918c0999cdb" providerId="ADAL" clId="{FEDCCBD3-F3AF-4248-98FF-B03AEB6CAACA}" dt="2025-10-09T14:30:09.411" v="70035" actId="20577"/>
+        <pc:sldMkLst>
+          <pc:docMk/>
+          <pc:sldMk cId="2460346233" sldId="2147481244"/>
+        </pc:sldMkLst>
+      </pc:sldChg>
+      <pc:sldChg chg="delSp add del mod">
+        <pc:chgData name="Casey Lee" userId="4bc459e0-655e-452e-96c2-b918c0999cdb" providerId="ADAL" clId="{FEDCCBD3-F3AF-4248-98FF-B03AEB6CAACA}" dt="2025-09-30T16:46:21.643" v="21624" actId="47"/>
+        <pc:sldMkLst>
+          <pc:docMk/>
+          <pc:sldMk cId="3652261605" sldId="2147481244"/>
+        </pc:sldMkLst>
+      </pc:sldChg>
+      <pc:sldChg chg="addSp delSp modSp del mod">
+        <pc:chgData name="Casey Lee" userId="4bc459e0-655e-452e-96c2-b918c0999cdb" providerId="ADAL" clId="{FEDCCBD3-F3AF-4248-98FF-B03AEB6CAACA}" dt="2025-10-03T19:07:17.692" v="46513" actId="47"/>
+        <pc:sldMkLst>
+          <pc:docMk/>
+          <pc:sldMk cId="3253257184" sldId="2147481245"/>
+        </pc:sldMkLst>
+      </pc:sldChg>
+      <pc:sldChg chg="addSp delSp modSp del mod ord">
+        <pc:chgData name="Casey Lee" userId="4bc459e0-655e-452e-96c2-b918c0999cdb" providerId="ADAL" clId="{FEDCCBD3-F3AF-4248-98FF-B03AEB6CAACA}" dt="2025-10-02T20:57:45.174" v="38909" actId="47"/>
+        <pc:sldMkLst>
+          <pc:docMk/>
+          <pc:sldMk cId="3132776874" sldId="2147481246"/>
+        </pc:sldMkLst>
+      </pc:sldChg>
+      <pc:sldChg chg="modSp mod">
+        <pc:chgData name="Casey Lee" userId="4bc459e0-655e-452e-96c2-b918c0999cdb" providerId="ADAL" clId="{FEDCCBD3-F3AF-4248-98FF-B03AEB6CAACA}" dt="2025-10-09T14:29:41.840" v="70033" actId="20577"/>
+        <pc:sldMkLst>
+          <pc:docMk/>
+          <pc:sldMk cId="2852939510" sldId="2147481248"/>
+        </pc:sldMkLst>
+      </pc:sldChg>
+      <pc:sldChg chg="add ord">
+        <pc:chgData name="Casey Lee" userId="4bc459e0-655e-452e-96c2-b918c0999cdb" providerId="ADAL" clId="{FEDCCBD3-F3AF-4248-98FF-B03AEB6CAACA}" dt="2025-10-01T19:21:14.031" v="24345"/>
+        <pc:sldMkLst>
+          <pc:docMk/>
+          <pc:sldMk cId="2363090598" sldId="2147481251"/>
+        </pc:sldMkLst>
+      </pc:sldChg>
+      <pc:sldChg chg="add ord">
+        <pc:chgData name="Casey Lee" userId="4bc459e0-655e-452e-96c2-b918c0999cdb" providerId="ADAL" clId="{FEDCCBD3-F3AF-4248-98FF-B03AEB6CAACA}" dt="2025-10-01T19:25:21.977" v="24350"/>
+        <pc:sldMkLst>
+          <pc:docMk/>
+          <pc:sldMk cId="2326761967" sldId="2147481252"/>
+        </pc:sldMkLst>
+      </pc:sldChg>
+      <pc:sldChg chg="addSp delSp modSp add mod ord">
+        <pc:chgData name="Casey Lee" userId="4bc459e0-655e-452e-96c2-b918c0999cdb" providerId="ADAL" clId="{FEDCCBD3-F3AF-4248-98FF-B03AEB6CAACA}" dt="2025-10-02T05:31:02.401" v="27778" actId="27918"/>
+        <pc:sldMkLst>
+          <pc:docMk/>
+          <pc:sldMk cId="3718838375" sldId="2147481253"/>
+        </pc:sldMkLst>
+      </pc:sldChg>
+      <pc:sldChg chg="add del">
+        <pc:chgData name="Casey Lee" userId="4bc459e0-655e-452e-96c2-b918c0999cdb" providerId="ADAL" clId="{FEDCCBD3-F3AF-4248-98FF-B03AEB6CAACA}" dt="2025-10-01T20:10:26.540" v="26275" actId="47"/>
+        <pc:sldMkLst>
+          <pc:docMk/>
+          <pc:sldMk cId="3798332572" sldId="2147481253"/>
+        </pc:sldMkLst>
+      </pc:sldChg>
+      <pc:sldChg chg="add mod ord modShow">
+        <pc:chgData name="Casey Lee" userId="4bc459e0-655e-452e-96c2-b918c0999cdb" providerId="ADAL" clId="{FEDCCBD3-F3AF-4248-98FF-B03AEB6CAACA}" dt="2025-10-02T20:28:16.132" v="37985"/>
+        <pc:sldMkLst>
+          <pc:docMk/>
+          <pc:sldMk cId="2060710732" sldId="2147481254"/>
+        </pc:sldMkLst>
+      </pc:sldChg>
+      <pc:sldChg chg="addSp delSp modSp mod modShow">
+        <pc:chgData name="Casey Lee" userId="4bc459e0-655e-452e-96c2-b918c0999cdb" providerId="ADAL" clId="{FEDCCBD3-F3AF-4248-98FF-B03AEB6CAACA}" dt="2025-10-08T20:39:16.692" v="70028" actId="122"/>
+        <pc:sldMkLst>
+          <pc:docMk/>
+          <pc:sldMk cId="988488" sldId="2147481255"/>
+        </pc:sldMkLst>
+      </pc:sldChg>
+      <pc:sldChg chg="addSp delSp modSp add del mod">
+        <pc:chgData name="Casey Lee" userId="4bc459e0-655e-452e-96c2-b918c0999cdb" providerId="ADAL" clId="{FEDCCBD3-F3AF-4248-98FF-B03AEB6CAACA}" dt="2025-10-02T18:03:09.206" v="34600" actId="47"/>
+        <pc:sldMkLst>
+          <pc:docMk/>
+          <pc:sldMk cId="527820914" sldId="2147481255"/>
+        </pc:sldMkLst>
+      </pc:sldChg>
+      <pc:sldChg chg="addSp delSp modSp add del mod">
+        <pc:chgData name="Casey Lee" userId="4bc459e0-655e-452e-96c2-b918c0999cdb" providerId="ADAL" clId="{FEDCCBD3-F3AF-4248-98FF-B03AEB6CAACA}" dt="2025-10-02T16:43:43.045" v="30085" actId="47"/>
+        <pc:sldMkLst>
+          <pc:docMk/>
+          <pc:sldMk cId="2989387375" sldId="2147481255"/>
+        </pc:sldMkLst>
+      </pc:sldChg>
+      <pc:sldChg chg="new del">
+        <pc:chgData name="Casey Lee" userId="4bc459e0-655e-452e-96c2-b918c0999cdb" providerId="ADAL" clId="{FEDCCBD3-F3AF-4248-98FF-B03AEB6CAACA}" dt="2025-10-02T17:30:01.770" v="32414" actId="47"/>
+        <pc:sldMkLst>
+          <pc:docMk/>
+          <pc:sldMk cId="3199761401" sldId="2147481255"/>
+        </pc:sldMkLst>
+      </pc:sldChg>
+      <pc:sldChg chg="delSp modSp add del mod">
+        <pc:chgData name="Casey Lee" userId="4bc459e0-655e-452e-96c2-b918c0999cdb" providerId="ADAL" clId="{FEDCCBD3-F3AF-4248-98FF-B03AEB6CAACA}" dt="2025-10-03T19:53:41.930" v="47704" actId="47"/>
+        <pc:sldMkLst>
+          <pc:docMk/>
+          <pc:sldMk cId="2390622337" sldId="2147481256"/>
+        </pc:sldMkLst>
+      </pc:sldChg>
+      <pc:sldChg chg="modSp mod">
+        <pc:chgData name="Casey Lee" userId="4bc459e0-655e-452e-96c2-b918c0999cdb" providerId="ADAL" clId="{FEDCCBD3-F3AF-4248-98FF-B03AEB6CAACA}" dt="2025-10-03T20:39:14.325" v="48212" actId="20577"/>
+        <pc:sldMkLst>
+          <pc:docMk/>
+          <pc:sldMk cId="2682905776" sldId="2147481257"/>
+        </pc:sldMkLst>
+      </pc:sldChg>
+      <pc:sldChg chg="modSp mod">
+        <pc:chgData name="Casey Lee" userId="4bc459e0-655e-452e-96c2-b918c0999cdb" providerId="ADAL" clId="{FEDCCBD3-F3AF-4248-98FF-B03AEB6CAACA}" dt="2025-10-03T20:39:56.594" v="48220" actId="20577"/>
+        <pc:sldMkLst>
+          <pc:docMk/>
+          <pc:sldMk cId="2763871" sldId="2147481258"/>
+        </pc:sldMkLst>
+      </pc:sldChg>
+      <pc:sldChg chg="addSp delSp modSp add mod">
+        <pc:chgData name="Casey Lee" userId="4bc459e0-655e-452e-96c2-b918c0999cdb" providerId="ADAL" clId="{FEDCCBD3-F3AF-4248-98FF-B03AEB6CAACA}" dt="2025-10-03T15:31:53.386" v="43638" actId="1076"/>
+        <pc:sldMkLst>
+          <pc:docMk/>
+          <pc:sldMk cId="2295337202" sldId="2147481259"/>
+        </pc:sldMkLst>
+      </pc:sldChg>
+      <pc:sldChg chg="addSp delSp modSp add mod">
+        <pc:chgData name="Casey Lee" userId="4bc459e0-655e-452e-96c2-b918c0999cdb" providerId="ADAL" clId="{FEDCCBD3-F3AF-4248-98FF-B03AEB6CAACA}" dt="2025-10-06T14:42:44.314" v="51204" actId="20577"/>
+        <pc:sldMkLst>
+          <pc:docMk/>
+          <pc:sldMk cId="2022463905" sldId="2147481260"/>
+        </pc:sldMkLst>
+      </pc:sldChg>
+      <pc:sldChg chg="addSp delSp modSp add mod">
+        <pc:chgData name="Casey Lee" userId="4bc459e0-655e-452e-96c2-b918c0999cdb" providerId="ADAL" clId="{FEDCCBD3-F3AF-4248-98FF-B03AEB6CAACA}" dt="2025-10-17T17:36:01.193" v="70061" actId="21"/>
+        <pc:sldMkLst>
+          <pc:docMk/>
+          <pc:sldMk cId="648698299" sldId="2147481261"/>
+        </pc:sldMkLst>
+      </pc:sldChg>
+      <pc:sldChg chg="modSp mod">
+        <pc:chgData name="Casey Lee" userId="4bc459e0-655e-452e-96c2-b918c0999cdb" providerId="ADAL" clId="{FEDCCBD3-F3AF-4248-98FF-B03AEB6CAACA}" dt="2025-10-03T19:00:55.817" v="46428" actId="207"/>
+        <pc:sldMkLst>
+          <pc:docMk/>
+          <pc:sldMk cId="4145473322" sldId="2147481262"/>
+        </pc:sldMkLst>
+      </pc:sldChg>
+      <pc:sldChg chg="addSp delSp modSp add mod ord">
+        <pc:chgData name="Casey Lee" userId="4bc459e0-655e-452e-96c2-b918c0999cdb" providerId="ADAL" clId="{FEDCCBD3-F3AF-4248-98FF-B03AEB6CAACA}" dt="2025-10-07T20:07:50.220" v="65922"/>
+        <pc:sldMkLst>
+          <pc:docMk/>
+          <pc:sldMk cId="756745785" sldId="2147481263"/>
+        </pc:sldMkLst>
+      </pc:sldChg>
+      <pc:sldChg chg="modSp mod">
+        <pc:chgData name="Casey Lee" userId="4bc459e0-655e-452e-96c2-b918c0999cdb" providerId="ADAL" clId="{FEDCCBD3-F3AF-4248-98FF-B03AEB6CAACA}" dt="2025-10-06T14:43:21.408" v="51208" actId="20577"/>
+        <pc:sldMkLst>
+          <pc:docMk/>
+          <pc:sldMk cId="345488764" sldId="2147481264"/>
+        </pc:sldMkLst>
+      </pc:sldChg>
+      <pc:sldChg chg="add del">
+        <pc:chgData name="Casey Lee" userId="4bc459e0-655e-452e-96c2-b918c0999cdb" providerId="ADAL" clId="{FEDCCBD3-F3AF-4248-98FF-B03AEB6CAACA}" dt="2025-10-03T18:56:44.257" v="46243" actId="47"/>
+        <pc:sldMkLst>
+          <pc:docMk/>
+          <pc:sldMk cId="1533153485" sldId="2147481265"/>
+        </pc:sldMkLst>
+      </pc:sldChg>
+      <pc:sldChg chg="modSp add mod">
+        <pc:chgData name="Casey Lee" userId="4bc459e0-655e-452e-96c2-b918c0999cdb" providerId="ADAL" clId="{FEDCCBD3-F3AF-4248-98FF-B03AEB6CAACA}" dt="2025-10-03T19:29:54.444" v="46737" actId="20577"/>
+        <pc:sldMkLst>
+          <pc:docMk/>
+          <pc:sldMk cId="2503961039" sldId="2147481265"/>
+        </pc:sldMkLst>
+      </pc:sldChg>
+      <pc:sldChg chg="mod ord modShow">
+        <pc:chgData name="Casey Lee" userId="4bc459e0-655e-452e-96c2-b918c0999cdb" providerId="ADAL" clId="{FEDCCBD3-F3AF-4248-98FF-B03AEB6CAACA}" dt="2025-10-07T21:02:19.784" v="67905" actId="729"/>
+        <pc:sldMkLst>
+          <pc:docMk/>
+          <pc:sldMk cId="863687252" sldId="2147481266"/>
+        </pc:sldMkLst>
+      </pc:sldChg>
+      <pc:sldChg chg="modSp mod">
+        <pc:chgData name="Casey Lee" userId="4bc459e0-655e-452e-96c2-b918c0999cdb" providerId="ADAL" clId="{FEDCCBD3-F3AF-4248-98FF-B03AEB6CAACA}" dt="2025-10-06T14:38:20.855" v="51196" actId="20577"/>
+        <pc:sldMkLst>
+          <pc:docMk/>
+          <pc:sldMk cId="645413853" sldId="2147481268"/>
+        </pc:sldMkLst>
+      </pc:sldChg>
+      <pc:sldChg chg="modSp mod ord modCm">
+        <pc:chgData name="Casey Lee" userId="4bc459e0-655e-452e-96c2-b918c0999cdb" providerId="ADAL" clId="{FEDCCBD3-F3AF-4248-98FF-B03AEB6CAACA}" dt="2025-10-07T20:03:15.429" v="65920"/>
+        <pc:sldMkLst>
+          <pc:docMk/>
+          <pc:sldMk cId="3907743225" sldId="2147481269"/>
+        </pc:sldMkLst>
+        <pc:extLst>
+          <p:ext xmlns:p="http://schemas.openxmlformats.org/presentationml/2006/main" uri="{D6D511B9-2390-475A-947B-AFAB55BFBCF1}">
+            <pc226:cmChg xmlns:pc226="http://schemas.microsoft.com/office/powerpoint/2022/06/main/command" xmlns="" chg="mod">
+              <pc226:chgData name="Casey Lee" userId="4bc459e0-655e-452e-96c2-b918c0999cdb" providerId="ADAL" clId="{FEDCCBD3-F3AF-4248-98FF-B03AEB6CAACA}" dt="2025-10-07T20:03:01.832" v="65912" actId="20577"/>
+              <pc2:cmMkLst xmlns:pc2="http://schemas.microsoft.com/office/powerpoint/2019/9/main/command">
+                <pc:docMk/>
+                <pc:sldMk cId="3907743225" sldId="2147481269"/>
+                <pc2:cmMk id="{1C84629E-6323-F44F-AD17-0816FD20B7E6}"/>
+              </pc2:cmMkLst>
+            </pc226:cmChg>
+          </p:ext>
+        </pc:extLst>
+      </pc:sldChg>
+      <pc:sldChg chg="del">
+        <pc:chgData name="Casey Lee" userId="4bc459e0-655e-452e-96c2-b918c0999cdb" providerId="ADAL" clId="{FEDCCBD3-F3AF-4248-98FF-B03AEB6CAACA}" dt="2025-10-07T21:02:02.298" v="67901" actId="47"/>
+        <pc:sldMkLst>
+          <pc:docMk/>
+          <pc:sldMk cId="2080702279" sldId="2147481270"/>
+        </pc:sldMkLst>
+      </pc:sldChg>
+      <pc:sldChg chg="addSp delSp modSp add mod">
+        <pc:chgData name="Casey Lee" userId="4bc459e0-655e-452e-96c2-b918c0999cdb" providerId="ADAL" clId="{FEDCCBD3-F3AF-4248-98FF-B03AEB6CAACA}" dt="2025-10-07T20:24:35.150" v="66597" actId="14100"/>
+        <pc:sldMkLst>
+          <pc:docMk/>
+          <pc:sldMk cId="869299062" sldId="2147481271"/>
+        </pc:sldMkLst>
+      </pc:sldChg>
+      <pc:sldChg chg="del">
+        <pc:chgData name="Casey Lee" userId="4bc459e0-655e-452e-96c2-b918c0999cdb" providerId="ADAL" clId="{FEDCCBD3-F3AF-4248-98FF-B03AEB6CAACA}" dt="2025-10-07T14:47:04.313" v="64602" actId="47"/>
+        <pc:sldMkLst>
+          <pc:docMk/>
+          <pc:sldMk cId="1252616050" sldId="2147481273"/>
+        </pc:sldMkLst>
+      </pc:sldChg>
+      <pc:sldChg chg="addSp delSp modSp mod ord">
+        <pc:chgData name="Casey Lee" userId="4bc459e0-655e-452e-96c2-b918c0999cdb" providerId="ADAL" clId="{FEDCCBD3-F3AF-4248-98FF-B03AEB6CAACA}" dt="2025-10-06T22:26:50.546" v="59691"/>
+        <pc:sldMkLst>
+          <pc:docMk/>
+          <pc:sldMk cId="1976876559" sldId="2147481274"/>
+        </pc:sldMkLst>
+      </pc:sldChg>
+      <pc:sldChg chg="addSp modSp mod">
+        <pc:chgData name="Casey Lee" userId="4bc459e0-655e-452e-96c2-b918c0999cdb" providerId="ADAL" clId="{FEDCCBD3-F3AF-4248-98FF-B03AEB6CAACA}" dt="2025-10-07T20:45:56.729" v="66823" actId="20577"/>
+        <pc:sldMkLst>
+          <pc:docMk/>
+          <pc:sldMk cId="926817997" sldId="2147481276"/>
+        </pc:sldMkLst>
+      </pc:sldChg>
+      <pc:sldChg chg="modSp mod">
+        <pc:chgData name="Casey Lee" userId="4bc459e0-655e-452e-96c2-b918c0999cdb" providerId="ADAL" clId="{FEDCCBD3-F3AF-4248-98FF-B03AEB6CAACA}" dt="2025-10-06T14:28:47.223" v="51187" actId="20577"/>
+        <pc:sldMkLst>
+          <pc:docMk/>
+          <pc:sldMk cId="2350308366" sldId="2147481278"/>
+        </pc:sldMkLst>
+      </pc:sldChg>
+      <pc:sldChg chg="modSp add del mod">
+        <pc:chgData name="Casey Lee" userId="4bc459e0-655e-452e-96c2-b918c0999cdb" providerId="ADAL" clId="{FEDCCBD3-F3AF-4248-98FF-B03AEB6CAACA}" dt="2025-10-06T17:59:59.603" v="51304" actId="47"/>
+        <pc:sldMkLst>
+          <pc:docMk/>
+          <pc:sldMk cId="2073971854" sldId="2147481279"/>
+        </pc:sldMkLst>
+      </pc:sldChg>
+      <pc:sldChg chg="add del">
+        <pc:chgData name="Casey Lee" userId="4bc459e0-655e-452e-96c2-b918c0999cdb" providerId="ADAL" clId="{FEDCCBD3-F3AF-4248-98FF-B03AEB6CAACA}" dt="2025-10-06T18:00:11.534" v="51306"/>
+        <pc:sldMkLst>
+          <pc:docMk/>
+          <pc:sldMk cId="2464430635" sldId="2147481279"/>
+        </pc:sldMkLst>
+      </pc:sldChg>
+      <pc:sldChg chg="delSp modSp add del mod">
+        <pc:chgData name="Casey Lee" userId="4bc459e0-655e-452e-96c2-b918c0999cdb" providerId="ADAL" clId="{FEDCCBD3-F3AF-4248-98FF-B03AEB6CAACA}" dt="2025-10-06T18:00:29.729" v="51310" actId="47"/>
+        <pc:sldMkLst>
+          <pc:docMk/>
+          <pc:sldMk cId="2680122059" sldId="2147481279"/>
+        </pc:sldMkLst>
+      </pc:sldChg>
+      <pc:sldChg chg="addSp delSp modSp add del mod">
+        <pc:chgData name="Casey Lee" userId="4bc459e0-655e-452e-96c2-b918c0999cdb" providerId="ADAL" clId="{FEDCCBD3-F3AF-4248-98FF-B03AEB6CAACA}" dt="2025-10-06T20:03:10.927" v="53757" actId="47"/>
+        <pc:sldMkLst>
+          <pc:docMk/>
+          <pc:sldMk cId="3991912433" sldId="2147481279"/>
+        </pc:sldMkLst>
+      </pc:sldChg>
+      <pc:sldChg chg="add del">
+        <pc:chgData name="Casey Lee" userId="4bc459e0-655e-452e-96c2-b918c0999cdb" providerId="ADAL" clId="{FEDCCBD3-F3AF-4248-98FF-B03AEB6CAACA}" dt="2025-10-06T20:11:57.506" v="54064" actId="47"/>
+        <pc:sldMkLst>
+          <pc:docMk/>
+          <pc:sldMk cId="2121545136" sldId="2147481281"/>
+        </pc:sldMkLst>
+      </pc:sldChg>
+      <pc:sldChg chg="addSp delSp modSp add del mod">
+        <pc:chgData name="Casey Lee" userId="4bc459e0-655e-452e-96c2-b918c0999cdb" providerId="ADAL" clId="{FEDCCBD3-F3AF-4248-98FF-B03AEB6CAACA}" dt="2025-10-06T20:04:56.588" v="53773" actId="47"/>
+        <pc:sldMkLst>
+          <pc:docMk/>
+          <pc:sldMk cId="1440506278" sldId="2147481282"/>
+        </pc:sldMkLst>
+      </pc:sldChg>
+      <pc:sldChg chg="addSp delSp modSp add del mod">
+        <pc:chgData name="Casey Lee" userId="4bc459e0-655e-452e-96c2-b918c0999cdb" providerId="ADAL" clId="{FEDCCBD3-F3AF-4248-98FF-B03AEB6CAACA}" dt="2025-10-06T20:08:45.813" v="53874" actId="47"/>
+        <pc:sldMkLst>
+          <pc:docMk/>
+          <pc:sldMk cId="3422270090" sldId="2147481283"/>
+        </pc:sldMkLst>
+      </pc:sldChg>
+      <pc:sldChg chg="addSp delSp modSp add mod ord">
+        <pc:chgData name="Casey Lee" userId="4bc459e0-655e-452e-96c2-b918c0999cdb" providerId="ADAL" clId="{FEDCCBD3-F3AF-4248-98FF-B03AEB6CAACA}" dt="2025-10-07T19:05:05.388" v="65578"/>
+        <pc:sldMkLst>
+          <pc:docMk/>
+          <pc:sldMk cId="1246806865" sldId="2147481284"/>
+        </pc:sldMkLst>
+      </pc:sldChg>
+      <pc:sldChg chg="addSp delSp modSp add del mod ord modShow">
+        <pc:chgData name="Casey Lee" userId="4bc459e0-655e-452e-96c2-b918c0999cdb" providerId="ADAL" clId="{FEDCCBD3-F3AF-4248-98FF-B03AEB6CAACA}" dt="2025-10-06T21:41:42.945" v="57193" actId="47"/>
+        <pc:sldMkLst>
+          <pc:docMk/>
+          <pc:sldMk cId="3679891914" sldId="2147481285"/>
+        </pc:sldMkLst>
+      </pc:sldChg>
+      <pc:sldChg chg="addSp delSp modSp add mod">
+        <pc:chgData name="Casey Lee" userId="4bc459e0-655e-452e-96c2-b918c0999cdb" providerId="ADAL" clId="{FEDCCBD3-F3AF-4248-98FF-B03AEB6CAACA}" dt="2025-10-07T21:11:25.626" v="68168"/>
+        <pc:sldMkLst>
+          <pc:docMk/>
+          <pc:sldMk cId="2379161747" sldId="2147481286"/>
+        </pc:sldMkLst>
+      </pc:sldChg>
+      <pc:sldChg chg="modSp add del mod">
+        <pc:chgData name="Casey Lee" userId="4bc459e0-655e-452e-96c2-b918c0999cdb" providerId="ADAL" clId="{FEDCCBD3-F3AF-4248-98FF-B03AEB6CAACA}" dt="2025-10-06T21:14:50.008" v="55647" actId="47"/>
+        <pc:sldMkLst>
+          <pc:docMk/>
+          <pc:sldMk cId="1754210451" sldId="2147481287"/>
+        </pc:sldMkLst>
+      </pc:sldChg>
+      <pc:sldChg chg="addSp delSp modSp add mod ord modNotesTx">
+        <pc:chgData name="Casey Lee" userId="4bc459e0-655e-452e-96c2-b918c0999cdb" providerId="ADAL" clId="{FEDCCBD3-F3AF-4248-98FF-B03AEB6CAACA}" dt="2025-10-08T13:51:35.424" v="68204" actId="20577"/>
+        <pc:sldMkLst>
+          <pc:docMk/>
+          <pc:sldMk cId="2042423855" sldId="2147481287"/>
+        </pc:sldMkLst>
+      </pc:sldChg>
+      <pc:sldChg chg="add del">
+        <pc:chgData name="Casey Lee" userId="4bc459e0-655e-452e-96c2-b918c0999cdb" providerId="ADAL" clId="{FEDCCBD3-F3AF-4248-98FF-B03AEB6CAACA}" dt="2025-10-06T21:52:12.046" v="57717" actId="47"/>
+        <pc:sldMkLst>
+          <pc:docMk/>
+          <pc:sldMk cId="1027152683" sldId="2147481288"/>
+        </pc:sldMkLst>
+      </pc:sldChg>
+      <pc:sldChg chg="delSp modSp add mod ord">
+        <pc:chgData name="Casey Lee" userId="4bc459e0-655e-452e-96c2-b918c0999cdb" providerId="ADAL" clId="{FEDCCBD3-F3AF-4248-98FF-B03AEB6CAACA}" dt="2025-10-07T19:05:05.388" v="65578"/>
+        <pc:sldMkLst>
+          <pc:docMk/>
+          <pc:sldMk cId="1092428753" sldId="2147481288"/>
+        </pc:sldMkLst>
+      </pc:sldChg>
+      <pc:sldChg chg="add del">
+        <pc:chgData name="Casey Lee" userId="4bc459e0-655e-452e-96c2-b918c0999cdb" providerId="ADAL" clId="{FEDCCBD3-F3AF-4248-98FF-B03AEB6CAACA}" dt="2025-10-06T21:46:01.387" v="57264"/>
+        <pc:sldMkLst>
+          <pc:docMk/>
+          <pc:sldMk cId="4225137205" sldId="2147481288"/>
+        </pc:sldMkLst>
+      </pc:sldChg>
+      <pc:sldChg chg="modSp add mod">
+        <pc:chgData name="Casey Lee" userId="4bc459e0-655e-452e-96c2-b918c0999cdb" providerId="ADAL" clId="{FEDCCBD3-F3AF-4248-98FF-B03AEB6CAACA}" dt="2025-10-07T19:52:51.587" v="65705" actId="948"/>
+        <pc:sldMkLst>
+          <pc:docMk/>
+          <pc:sldMk cId="2213353267" sldId="2147481289"/>
+        </pc:sldMkLst>
+      </pc:sldChg>
+      <pc:sldChg chg="add ord">
+        <pc:chgData name="Casey Lee" userId="4bc459e0-655e-452e-96c2-b918c0999cdb" providerId="ADAL" clId="{FEDCCBD3-F3AF-4248-98FF-B03AEB6CAACA}" dt="2025-10-07T21:00:42.858" v="67899"/>
+        <pc:sldMkLst>
+          <pc:docMk/>
+          <pc:sldMk cId="1751227399" sldId="2147481290"/>
+        </pc:sldMkLst>
+      </pc:sldChg>
+      <pc:sldChg chg="modSp add mod">
+        <pc:chgData name="Casey Lee" userId="4bc459e0-655e-452e-96c2-b918c0999cdb" providerId="ADAL" clId="{FEDCCBD3-F3AF-4248-98FF-B03AEB6CAACA}" dt="2025-10-07T19:53:56.299" v="65827" actId="1076"/>
+        <pc:sldMkLst>
+          <pc:docMk/>
+          <pc:sldMk cId="1156650361" sldId="2147481291"/>
+        </pc:sldMkLst>
+      </pc:sldChg>
+      <pc:sldChg chg="add del">
+        <pc:chgData name="Casey Lee" userId="4bc459e0-655e-452e-96c2-b918c0999cdb" providerId="ADAL" clId="{FEDCCBD3-F3AF-4248-98FF-B03AEB6CAACA}" dt="2025-10-07T21:02:06.578" v="67902" actId="47"/>
+        <pc:sldMkLst>
+          <pc:docMk/>
+          <pc:sldMk cId="361016522" sldId="2147481292"/>
+        </pc:sldMkLst>
+      </pc:sldChg>
+      <pc:sldChg chg="addSp delSp modSp add del mod ord">
+        <pc:chgData name="Casey Lee" userId="4bc459e0-655e-452e-96c2-b918c0999cdb" providerId="ADAL" clId="{FEDCCBD3-F3AF-4248-98FF-B03AEB6CAACA}" dt="2025-10-08T17:27:26.723" v="69666" actId="47"/>
+        <pc:sldMkLst>
+          <pc:docMk/>
+          <pc:sldMk cId="3867349040" sldId="2147481294"/>
+        </pc:sldMkLst>
+      </pc:sldChg>
+      <pc:sldChg chg="addSp delSp modSp add mod ord">
+        <pc:chgData name="Casey Lee" userId="4bc459e0-655e-452e-96c2-b918c0999cdb" providerId="ADAL" clId="{FEDCCBD3-F3AF-4248-98FF-B03AEB6CAACA}" dt="2025-10-08T18:13:18.131" v="69766"/>
+        <pc:sldMkLst>
+          <pc:docMk/>
+          <pc:sldMk cId="277216321" sldId="2147481295"/>
+        </pc:sldMkLst>
+      </pc:sldChg>
+      <pc:sldChg chg="delSp modSp add del mod">
+        <pc:chgData name="Casey Lee" userId="4bc459e0-655e-452e-96c2-b918c0999cdb" providerId="ADAL" clId="{FEDCCBD3-F3AF-4248-98FF-B03AEB6CAACA}" dt="2025-10-08T17:25:27.263" v="69638" actId="47"/>
+        <pc:sldMkLst>
+          <pc:docMk/>
+          <pc:sldMk cId="525573459" sldId="2147481295"/>
+        </pc:sldMkLst>
+      </pc:sldChg>
+      <pc:sldChg chg="addSp delSp modSp add del mod">
+        <pc:chgData name="Casey Lee" userId="4bc459e0-655e-452e-96c2-b918c0999cdb" providerId="ADAL" clId="{FEDCCBD3-F3AF-4248-98FF-B03AEB6CAACA}" dt="2025-10-08T20:34:36.066" v="69822" actId="47"/>
+        <pc:sldMkLst>
+          <pc:docMk/>
+          <pc:sldMk cId="1403578223" sldId="2147481296"/>
+        </pc:sldMkLst>
+      </pc:sldChg>
+      <pc:sldChg chg="add">
+        <pc:chgData name="Casey Lee" userId="4bc459e0-655e-452e-96c2-b918c0999cdb" providerId="ADAL" clId="{FEDCCBD3-F3AF-4248-98FF-B03AEB6CAACA}" dt="2025-10-08T20:34:09.412" v="69814"/>
+        <pc:sldMkLst>
+          <pc:docMk/>
+          <pc:sldMk cId="3933677755" sldId="2147481297"/>
+        </pc:sldMkLst>
+      </pc:sldChg>
+      <pc:sldChg chg="modSp add del mod">
+        <pc:chgData name="Casey Lee" userId="4bc459e0-655e-452e-96c2-b918c0999cdb" providerId="ADAL" clId="{FEDCCBD3-F3AF-4248-98FF-B03AEB6CAACA}" dt="2025-10-10T22:07:45.214" v="70059" actId="47"/>
+        <pc:sldMkLst>
+          <pc:docMk/>
+          <pc:sldMk cId="634037322" sldId="2147481298"/>
+        </pc:sldMkLst>
+      </pc:sldChg>
+    </pc:docChg>
+  </pc:docChgLst>
+  <pc:docChgLst>
+    <pc:chgData name="Hernan Ramirez Diaz" userId="0b0763af-8f1b-4303-84e1-6429285cc810" providerId="ADAL" clId="{42163F52-BB8D-4D37-ACEA-9F3481FEDAF8}"/>
+    <pc:docChg chg="undo redo custSel addSld delSld modSld sldOrd modSection">
+      <pc:chgData name="Hernan Ramirez Diaz" userId="0b0763af-8f1b-4303-84e1-6429285cc810" providerId="ADAL" clId="{42163F52-BB8D-4D37-ACEA-9F3481FEDAF8}" dt="2025-10-09T23:46:55.071" v="23066" actId="47"/>
+      <pc:docMkLst>
+        <pc:docMk/>
+      </pc:docMkLst>
+      <pc:sldChg chg="ord">
+        <pc:chgData name="Hernan Ramirez Diaz" userId="0b0763af-8f1b-4303-84e1-6429285cc810" providerId="ADAL" clId="{42163F52-BB8D-4D37-ACEA-9F3481FEDAF8}" dt="2025-10-03T21:28:29.889" v="12946"/>
+        <pc:sldMkLst>
+          <pc:docMk/>
+          <pc:sldMk cId="0" sldId="274"/>
+        </pc:sldMkLst>
+      </pc:sldChg>
+      <pc:sldChg chg="modSp mod">
+        <pc:chgData name="Hernan Ramirez Diaz" userId="0b0763af-8f1b-4303-84e1-6429285cc810" providerId="ADAL" clId="{42163F52-BB8D-4D37-ACEA-9F3481FEDAF8}" dt="2025-10-09T17:08:26.822" v="22799" actId="20577"/>
+        <pc:sldMkLst>
+          <pc:docMk/>
+          <pc:sldMk cId="0" sldId="275"/>
+        </pc:sldMkLst>
+      </pc:sldChg>
+      <pc:sldChg chg="add">
+        <pc:chgData name="Hernan Ramirez Diaz" userId="0b0763af-8f1b-4303-84e1-6429285cc810" providerId="ADAL" clId="{42163F52-BB8D-4D37-ACEA-9F3481FEDAF8}" dt="2025-09-30T22:48:51.036" v="3291"/>
+        <pc:sldMkLst>
+          <pc:docMk/>
+          <pc:sldMk cId="1802258249" sldId="280"/>
+        </pc:sldMkLst>
+      </pc:sldChg>
+      <pc:sldChg chg="modSp mod">
+        <pc:chgData name="Hernan Ramirez Diaz" userId="0b0763af-8f1b-4303-84e1-6429285cc810" providerId="ADAL" clId="{42163F52-BB8D-4D37-ACEA-9F3481FEDAF8}" dt="2025-10-09T18:04:53.412" v="22846" actId="20577"/>
+        <pc:sldMkLst>
+          <pc:docMk/>
+          <pc:sldMk cId="1694384516" sldId="285"/>
+        </pc:sldMkLst>
+      </pc:sldChg>
+      <pc:sldChg chg="add">
+        <pc:chgData name="Hernan Ramirez Diaz" userId="0b0763af-8f1b-4303-84e1-6429285cc810" providerId="ADAL" clId="{42163F52-BB8D-4D37-ACEA-9F3481FEDAF8}" dt="2025-09-30T22:48:51.036" v="3291"/>
+        <pc:sldMkLst>
+          <pc:docMk/>
+          <pc:sldMk cId="1946109353" sldId="355"/>
+        </pc:sldMkLst>
+      </pc:sldChg>
+      <pc:sldChg chg="addSp delSp modSp mod">
+        <pc:chgData name="Hernan Ramirez Diaz" userId="0b0763af-8f1b-4303-84e1-6429285cc810" providerId="ADAL" clId="{42163F52-BB8D-4D37-ACEA-9F3481FEDAF8}" dt="2025-09-26T19:17:47.895" v="1246" actId="478"/>
+        <pc:sldMkLst>
+          <pc:docMk/>
+          <pc:sldMk cId="2675615646" sldId="419"/>
+        </pc:sldMkLst>
+      </pc:sldChg>
+      <pc:sldChg chg="addSp delSp modSp add mod modCm modNotesTx">
+        <pc:chgData name="Hernan Ramirez Diaz" userId="0b0763af-8f1b-4303-84e1-6429285cc810" providerId="ADAL" clId="{42163F52-BB8D-4D37-ACEA-9F3481FEDAF8}" dt="2025-10-09T18:32:21.559" v="22854" actId="255"/>
+        <pc:sldMkLst>
+          <pc:docMk/>
+          <pc:sldMk cId="1299622664" sldId="434"/>
+        </pc:sldMkLst>
+        <pc:extLst>
+          <p:ext xmlns:p="http://schemas.openxmlformats.org/presentationml/2006/main" uri="{D6D511B9-2390-475A-947B-AFAB55BFBCF1}">
+            <pc226:cmChg xmlns:pc226="http://schemas.microsoft.com/office/powerpoint/2022/06/main/command" xmlns="" chg="mod">
+              <pc226:chgData name="Hernan Ramirez Diaz" userId="0b0763af-8f1b-4303-84e1-6429285cc810" providerId="ADAL" clId="{42163F52-BB8D-4D37-ACEA-9F3481FEDAF8}" dt="2025-10-09T18:32:19.001" v="22853" actId="20577"/>
+              <pc2:cmMkLst xmlns:pc2="http://schemas.microsoft.com/office/powerpoint/2019/9/main/command">
+                <pc:docMk/>
+                <pc:sldMk cId="1299622664" sldId="434"/>
+                <pc2:cmMk id="{9C52BFDD-9F11-4C01-8EA9-393721749318}"/>
+              </pc2:cmMkLst>
+            </pc226:cmChg>
+          </p:ext>
+        </pc:extLst>
+      </pc:sldChg>
+      <pc:sldChg chg="addSp delSp modSp mod">
+        <pc:chgData name="Hernan Ramirez Diaz" userId="0b0763af-8f1b-4303-84e1-6429285cc810" providerId="ADAL" clId="{42163F52-BB8D-4D37-ACEA-9F3481FEDAF8}" dt="2025-10-04T05:39:23.308" v="18433" actId="20577"/>
+        <pc:sldMkLst>
+          <pc:docMk/>
+          <pc:sldMk cId="2761368814" sldId="2147481181"/>
+        </pc:sldMkLst>
+      </pc:sldChg>
+      <pc:sldChg chg="ord">
+        <pc:chgData name="Hernan Ramirez Diaz" userId="0b0763af-8f1b-4303-84e1-6429285cc810" providerId="ADAL" clId="{42163F52-BB8D-4D37-ACEA-9F3481FEDAF8}" dt="2025-09-26T17:01:54.525" v="385"/>
+        <pc:sldMkLst>
+          <pc:docMk/>
+          <pc:sldMk cId="1105021549" sldId="2147481210"/>
+        </pc:sldMkLst>
+      </pc:sldChg>
+      <pc:sldChg chg="modSp mod modCm">
+        <pc:chgData name="Hernan Ramirez Diaz" userId="0b0763af-8f1b-4303-84e1-6429285cc810" providerId="ADAL" clId="{42163F52-BB8D-4D37-ACEA-9F3481FEDAF8}" dt="2025-10-03T16:10:51.912" v="10625" actId="14100"/>
+        <pc:sldMkLst>
+          <pc:docMk/>
+          <pc:sldMk cId="323746144" sldId="2147481211"/>
+        </pc:sldMkLst>
+        <pc:extLst>
+          <p:ext xmlns:p="http://schemas.openxmlformats.org/presentationml/2006/main" uri="{D6D511B9-2390-475A-947B-AFAB55BFBCF1}">
+            <pc226:cmChg xmlns:pc226="http://schemas.microsoft.com/office/powerpoint/2022/06/main/command" xmlns="" chg="mod">
+              <pc226:chgData name="Hernan Ramirez Diaz" userId="0b0763af-8f1b-4303-84e1-6429285cc810" providerId="ADAL" clId="{42163F52-BB8D-4D37-ACEA-9F3481FEDAF8}" dt="2025-10-02T22:39:01.158" v="9248" actId="20577"/>
+              <pc2:cmMkLst xmlns:pc2="http://schemas.microsoft.com/office/powerpoint/2019/9/main/command">
+                <pc:docMk/>
+                <pc:sldMk cId="323746144" sldId="2147481211"/>
+                <pc2:cmMk id="{39EB2F37-B8FD-49D1-A4FF-14B267B24A40}"/>
+              </pc2:cmMkLst>
+            </pc226:cmChg>
+          </p:ext>
+        </pc:extLst>
+      </pc:sldChg>
+      <pc:sldChg chg="modSp mod">
+        <pc:chgData name="Hernan Ramirez Diaz" userId="0b0763af-8f1b-4303-84e1-6429285cc810" providerId="ADAL" clId="{42163F52-BB8D-4D37-ACEA-9F3481FEDAF8}" dt="2025-10-09T04:58:22.879" v="22528" actId="1035"/>
+        <pc:sldMkLst>
+          <pc:docMk/>
+          <pc:sldMk cId="83366420" sldId="2147481212"/>
+        </pc:sldMkLst>
+      </pc:sldChg>
+      <pc:sldChg chg="delSp modSp mod">
+        <pc:chgData name="Hernan Ramirez Diaz" userId="0b0763af-8f1b-4303-84e1-6429285cc810" providerId="ADAL" clId="{42163F52-BB8D-4D37-ACEA-9F3481FEDAF8}" dt="2025-10-09T17:03:58.170" v="22792" actId="20577"/>
+        <pc:sldMkLst>
+          <pc:docMk/>
+          <pc:sldMk cId="1270242671" sldId="2147481213"/>
+        </pc:sldMkLst>
+        <pc:spChg chg="mod">
+          <ac:chgData name="Hernan Ramirez Diaz" userId="0b0763af-8f1b-4303-84e1-6429285cc810" providerId="ADAL" clId="{42163F52-BB8D-4D37-ACEA-9F3481FEDAF8}" dt="2025-10-09T17:03:58.170" v="22792" actId="20577"/>
+          <ac:spMkLst>
+            <pc:docMk/>
+            <pc:sldMk cId="1270242671" sldId="2147481213"/>
+            <ac:spMk id="4" creationId="{F93D6D7D-FF3F-82F6-14A4-6285C0323998}"/>
+          </ac:spMkLst>
+        </pc:spChg>
+        <pc:graphicFrameChg chg="mod modGraphic">
+          <ac:chgData name="Hernan Ramirez Diaz" userId="0b0763af-8f1b-4303-84e1-6429285cc810" providerId="ADAL" clId="{42163F52-BB8D-4D37-ACEA-9F3481FEDAF8}" dt="2025-10-03T22:43:17.109" v="14321" actId="207"/>
+          <ac:graphicFrameMkLst>
+            <pc:docMk/>
+            <pc:sldMk cId="1270242671" sldId="2147481213"/>
+            <ac:graphicFrameMk id="2" creationId="{38F22EE9-DEDC-E1DA-1E19-E1758E9C192D}"/>
+          </ac:graphicFrameMkLst>
+        </pc:graphicFrameChg>
+      </pc:sldChg>
+      <pc:sldChg chg="delSp modSp mod">
+        <pc:chgData name="Hernan Ramirez Diaz" userId="0b0763af-8f1b-4303-84e1-6429285cc810" providerId="ADAL" clId="{42163F52-BB8D-4D37-ACEA-9F3481FEDAF8}" dt="2025-10-09T05:00:32.384" v="22644" actId="1035"/>
+        <pc:sldMkLst>
+          <pc:docMk/>
+          <pc:sldMk cId="1389874235" sldId="2147481214"/>
+        </pc:sldMkLst>
+      </pc:sldChg>
+      <pc:sldChg chg="modSp add mod">
+        <pc:chgData name="Hernan Ramirez Diaz" userId="0b0763af-8f1b-4303-84e1-6429285cc810" providerId="ADAL" clId="{42163F52-BB8D-4D37-ACEA-9F3481FEDAF8}" dt="2025-10-03T19:58:25.863" v="12889" actId="14100"/>
+        <pc:sldMkLst>
+          <pc:docMk/>
+          <pc:sldMk cId="300876207" sldId="2147481215"/>
+        </pc:sldMkLst>
+      </pc:sldChg>
+      <pc:sldChg chg="add del ord">
+        <pc:chgData name="Hernan Ramirez Diaz" userId="0b0763af-8f1b-4303-84e1-6429285cc810" providerId="ADAL" clId="{42163F52-BB8D-4D37-ACEA-9F3481FEDAF8}" dt="2025-10-03T19:19:44.098" v="12538" actId="2696"/>
+        <pc:sldMkLst>
+          <pc:docMk/>
+          <pc:sldMk cId="3040778351" sldId="2147481215"/>
+        </pc:sldMkLst>
+      </pc:sldChg>
+      <pc:sldChg chg="del">
+        <pc:chgData name="Hernan Ramirez Diaz" userId="0b0763af-8f1b-4303-84e1-6429285cc810" providerId="ADAL" clId="{42163F52-BB8D-4D37-ACEA-9F3481FEDAF8}" dt="2025-10-01T19:52:59.448" v="3710" actId="47"/>
+        <pc:sldMkLst>
+          <pc:docMk/>
+          <pc:sldMk cId="1707149320" sldId="2147481216"/>
+        </pc:sldMkLst>
+      </pc:sldChg>
+      <pc:sldChg chg="addSp delSp modSp mod ord modCm">
+        <pc:chgData name="Hernan Ramirez Diaz" userId="0b0763af-8f1b-4303-84e1-6429285cc810" providerId="ADAL" clId="{42163F52-BB8D-4D37-ACEA-9F3481FEDAF8}" dt="2025-10-09T17:24:41.542" v="22829" actId="20577"/>
+        <pc:sldMkLst>
+          <pc:docMk/>
+          <pc:sldMk cId="3892756515" sldId="2147481219"/>
+        </pc:sldMkLst>
+        <pc:extLst>
+          <p:ext xmlns:p="http://schemas.openxmlformats.org/presentationml/2006/main" uri="{D6D511B9-2390-475A-947B-AFAB55BFBCF1}">
+            <pc226:cmChg xmlns:pc226="http://schemas.microsoft.com/office/powerpoint/2022/06/main/command" xmlns="" chg="mod">
+              <pc226:chgData name="Hernan Ramirez Diaz" userId="0b0763af-8f1b-4303-84e1-6429285cc810" providerId="ADAL" clId="{42163F52-BB8D-4D37-ACEA-9F3481FEDAF8}" dt="2025-10-09T17:24:41.542" v="22829" actId="20577"/>
+              <pc2:cmMkLst xmlns:pc2="http://schemas.microsoft.com/office/powerpoint/2019/9/main/command">
+                <pc:docMk/>
+                <pc:sldMk cId="3892756515" sldId="2147481219"/>
+                <pc2:cmMk id="{E4D7CC20-49CD-274F-A77F-C5E4F47D747E}"/>
+              </pc2:cmMkLst>
+            </pc226:cmChg>
+          </p:ext>
+        </pc:extLst>
+      </pc:sldChg>
+      <pc:sldChg chg="modSp mod modCm">
+        <pc:chgData name="Hernan Ramirez Diaz" userId="0b0763af-8f1b-4303-84e1-6429285cc810" providerId="ADAL" clId="{42163F52-BB8D-4D37-ACEA-9F3481FEDAF8}" dt="2025-10-09T04:59:47.752" v="22596" actId="1035"/>
+        <pc:sldMkLst>
+          <pc:docMk/>
+          <pc:sldMk cId="1157813500" sldId="2147481222"/>
+        </pc:sldMkLst>
+        <pc:extLst>
+          <p:ext xmlns:p="http://schemas.openxmlformats.org/presentationml/2006/main" uri="{D6D511B9-2390-475A-947B-AFAB55BFBCF1}">
+            <pc226:cmChg xmlns:pc226="http://schemas.microsoft.com/office/powerpoint/2022/06/main/command" xmlns="" chg="mod">
+              <pc226:chgData name="Hernan Ramirez Diaz" userId="0b0763af-8f1b-4303-84e1-6429285cc810" providerId="ADAL" clId="{42163F52-BB8D-4D37-ACEA-9F3481FEDAF8}" dt="2025-10-07T18:20:22.027" v="21107" actId="20577"/>
+              <pc2:cmMkLst xmlns:pc2="http://schemas.microsoft.com/office/powerpoint/2019/9/main/command">
+                <pc:docMk/>
+                <pc:sldMk cId="1157813500" sldId="2147481222"/>
+                <pc2:cmMk id="{0E9EAFC1-53E0-4A88-9A39-BCE44D7D16F2}"/>
+              </pc2:cmMkLst>
+            </pc226:cmChg>
+          </p:ext>
+        </pc:extLst>
+      </pc:sldChg>
+      <pc:sldChg chg="modSp mod">
+        <pc:chgData name="Hernan Ramirez Diaz" userId="0b0763af-8f1b-4303-84e1-6429285cc810" providerId="ADAL" clId="{42163F52-BB8D-4D37-ACEA-9F3481FEDAF8}" dt="2025-10-09T04:59:40.805" v="22590" actId="1035"/>
+        <pc:sldMkLst>
+          <pc:docMk/>
+          <pc:sldMk cId="4242413873" sldId="2147481223"/>
+        </pc:sldMkLst>
+      </pc:sldChg>
+      <pc:sldChg chg="ord">
+        <pc:chgData name="Hernan Ramirez Diaz" userId="0b0763af-8f1b-4303-84e1-6429285cc810" providerId="ADAL" clId="{42163F52-BB8D-4D37-ACEA-9F3481FEDAF8}" dt="2025-09-26T17:20:04.965" v="447"/>
+        <pc:sldMkLst>
+          <pc:docMk/>
+          <pc:sldMk cId="3621352377" sldId="2147481224"/>
+        </pc:sldMkLst>
+      </pc:sldChg>
+      <pc:sldChg chg="ord">
+        <pc:chgData name="Hernan Ramirez Diaz" userId="0b0763af-8f1b-4303-84e1-6429285cc810" providerId="ADAL" clId="{42163F52-BB8D-4D37-ACEA-9F3481FEDAF8}" dt="2025-09-26T17:01:54.525" v="385"/>
+        <pc:sldMkLst>
+          <pc:docMk/>
+          <pc:sldMk cId="2178493738" sldId="2147481225"/>
+        </pc:sldMkLst>
+      </pc:sldChg>
+      <pc:sldChg chg="addSp delSp modSp mod ord modCm">
+        <pc:chgData name="Hernan Ramirez Diaz" userId="0b0763af-8f1b-4303-84e1-6429285cc810" providerId="ADAL" clId="{42163F52-BB8D-4D37-ACEA-9F3481FEDAF8}" dt="2025-10-09T17:15:40.602" v="22819" actId="20577"/>
+        <pc:sldMkLst>
+          <pc:docMk/>
+          <pc:sldMk cId="2560992972" sldId="2147481227"/>
+        </pc:sldMkLst>
+        <pc:extLst>
+          <p:ext xmlns:p="http://schemas.openxmlformats.org/presentationml/2006/main" uri="{D6D511B9-2390-475A-947B-AFAB55BFBCF1}">
+            <pc226:cmChg xmlns:pc226="http://schemas.microsoft.com/office/powerpoint/2022/06/main/command" xmlns="" chg="mod">
+              <pc226:chgData name="Hernan Ramirez Diaz" userId="0b0763af-8f1b-4303-84e1-6429285cc810" providerId="ADAL" clId="{42163F52-BB8D-4D37-ACEA-9F3481FEDAF8}" dt="2025-10-09T17:15:40.602" v="22819" actId="20577"/>
+              <pc2:cmMkLst xmlns:pc2="http://schemas.microsoft.com/office/powerpoint/2019/9/main/command">
+                <pc:docMk/>
+                <pc:sldMk cId="2560992972" sldId="2147481227"/>
+                <pc2:cmMk id="{72D62EF9-F7A0-4789-9637-4F84044DA606}"/>
+              </pc2:cmMkLst>
+            </pc226:cmChg>
+          </p:ext>
+        </pc:extLst>
+      </pc:sldChg>
+      <pc:sldChg chg="addSp delSp modSp mod ord">
+        <pc:chgData name="Hernan Ramirez Diaz" userId="0b0763af-8f1b-4303-84e1-6429285cc810" providerId="ADAL" clId="{42163F52-BB8D-4D37-ACEA-9F3481FEDAF8}" dt="2025-10-09T19:32:50.791" v="23064" actId="1037"/>
+        <pc:sldMkLst>
+          <pc:docMk/>
+          <pc:sldMk cId="427855662" sldId="2147481228"/>
+        </pc:sldMkLst>
+      </pc:sldChg>
+      <pc:sldChg chg="modSp mod ord modNotesTx">
+        <pc:chgData name="Hernan Ramirez Diaz" userId="0b0763af-8f1b-4303-84e1-6429285cc810" providerId="ADAL" clId="{42163F52-BB8D-4D37-ACEA-9F3481FEDAF8}" dt="2025-10-09T04:57:52.012" v="22487" actId="1035"/>
+        <pc:sldMkLst>
+          <pc:docMk/>
+          <pc:sldMk cId="1426298556" sldId="2147481229"/>
+        </pc:sldMkLst>
+      </pc:sldChg>
+      <pc:sldChg chg="addSp delSp modSp mod">
+        <pc:chgData name="Hernan Ramirez Diaz" userId="0b0763af-8f1b-4303-84e1-6429285cc810" providerId="ADAL" clId="{42163F52-BB8D-4D37-ACEA-9F3481FEDAF8}" dt="2025-10-09T04:57:58.079" v="22501" actId="1035"/>
+        <pc:sldMkLst>
+          <pc:docMk/>
+          <pc:sldMk cId="3134119948" sldId="2147481230"/>
+        </pc:sldMkLst>
+      </pc:sldChg>
+      <pc:sldChg chg="delSp modSp del mod">
+        <pc:chgData name="Hernan Ramirez Diaz" userId="0b0763af-8f1b-4303-84e1-6429285cc810" providerId="ADAL" clId="{42163F52-BB8D-4D37-ACEA-9F3481FEDAF8}" dt="2025-10-02T20:26:03.335" v="8228" actId="47"/>
+        <pc:sldMkLst>
+          <pc:docMk/>
+          <pc:sldMk cId="1129204174" sldId="2147481231"/>
+        </pc:sldMkLst>
+      </pc:sldChg>
+      <pc:sldChg chg="addSp delSp modSp mod modCm">
+        <pc:chgData name="Hernan Ramirez Diaz" userId="0b0763af-8f1b-4303-84e1-6429285cc810" providerId="ADAL" clId="{42163F52-BB8D-4D37-ACEA-9F3481FEDAF8}" dt="2025-10-09T18:59:36.975" v="22935" actId="20577"/>
+        <pc:sldMkLst>
+          <pc:docMk/>
+          <pc:sldMk cId="1893241687" sldId="2147481232"/>
+        </pc:sldMkLst>
+        <pc:extLst>
+          <p:ext xmlns:p="http://schemas.openxmlformats.org/presentationml/2006/main" uri="{D6D511B9-2390-475A-947B-AFAB55BFBCF1}">
+            <pc226:cmChg xmlns:pc226="http://schemas.microsoft.com/office/powerpoint/2022/06/main/command" xmlns="" chg="mod">
+              <pc226:chgData name="Hernan Ramirez Diaz" userId="0b0763af-8f1b-4303-84e1-6429285cc810" providerId="ADAL" clId="{42163F52-BB8D-4D37-ACEA-9F3481FEDAF8}" dt="2025-10-07T18:08:32.590" v="21033" actId="20577"/>
+              <pc2:cmMkLst xmlns:pc2="http://schemas.microsoft.com/office/powerpoint/2019/9/main/command">
+                <pc:docMk/>
+                <pc:sldMk cId="1893241687" sldId="2147481232"/>
+                <pc2:cmMk id="{29037932-B4DA-4A44-A2AC-7D730AFE600D}"/>
+              </pc2:cmMkLst>
+            </pc226:cmChg>
+          </p:ext>
+        </pc:extLst>
+      </pc:sldChg>
+      <pc:sldChg chg="addSp delSp modSp new mod ord">
+        <pc:chgData name="Hernan Ramirez Diaz" userId="0b0763af-8f1b-4303-84e1-6429285cc810" providerId="ADAL" clId="{42163F52-BB8D-4D37-ACEA-9F3481FEDAF8}" dt="2025-10-01T19:15:27.007" v="3709"/>
+        <pc:sldMkLst>
+          <pc:docMk/>
+          <pc:sldMk cId="4253379048" sldId="2147481233"/>
+        </pc:sldMkLst>
+      </pc:sldChg>
+      <pc:sldChg chg="modSp mod">
+        <pc:chgData name="Hernan Ramirez Diaz" userId="0b0763af-8f1b-4303-84e1-6429285cc810" providerId="ADAL" clId="{42163F52-BB8D-4D37-ACEA-9F3481FEDAF8}" dt="2025-10-02T18:50:50.363" v="7266" actId="1036"/>
+        <pc:sldMkLst>
+          <pc:docMk/>
+          <pc:sldMk cId="3872972120" sldId="2147481234"/>
+        </pc:sldMkLst>
+      </pc:sldChg>
+      <pc:sldChg chg="modSp mod">
+        <pc:chgData name="Hernan Ramirez Diaz" userId="0b0763af-8f1b-4303-84e1-6429285cc810" providerId="ADAL" clId="{42163F52-BB8D-4D37-ACEA-9F3481FEDAF8}" dt="2025-09-30T18:22:12.515" v="2442" actId="20577"/>
+        <pc:sldMkLst>
+          <pc:docMk/>
+          <pc:sldMk cId="2664751740" sldId="2147481235"/>
+        </pc:sldMkLst>
+      </pc:sldChg>
+      <pc:sldChg chg="addSp delSp mod ord">
+        <pc:chgData name="Hernan Ramirez Diaz" userId="0b0763af-8f1b-4303-84e1-6429285cc810" providerId="ADAL" clId="{42163F52-BB8D-4D37-ACEA-9F3481FEDAF8}" dt="2025-10-03T17:59:31.126" v="12393"/>
+        <pc:sldMkLst>
+          <pc:docMk/>
+          <pc:sldMk cId="1567322584" sldId="2147481236"/>
+        </pc:sldMkLst>
+      </pc:sldChg>
+      <pc:sldChg chg="mod ord modShow">
+        <pc:chgData name="Hernan Ramirez Diaz" userId="0b0763af-8f1b-4303-84e1-6429285cc810" providerId="ADAL" clId="{42163F52-BB8D-4D37-ACEA-9F3481FEDAF8}" dt="2025-10-02T00:31:30.415" v="4706"/>
+        <pc:sldMkLst>
+          <pc:docMk/>
+          <pc:sldMk cId="229596941" sldId="2147481237"/>
+        </pc:sldMkLst>
+      </pc:sldChg>
+      <pc:sldChg chg="mod ord modShow">
+        <pc:chgData name="Hernan Ramirez Diaz" userId="0b0763af-8f1b-4303-84e1-6429285cc810" providerId="ADAL" clId="{42163F52-BB8D-4D37-ACEA-9F3481FEDAF8}" dt="2025-10-02T00:11:50.455" v="4246"/>
+        <pc:sldMkLst>
+          <pc:docMk/>
+          <pc:sldMk cId="3130016136" sldId="2147481241"/>
+        </pc:sldMkLst>
+      </pc:sldChg>
+      <pc:sldChg chg="addSp delSp modSp mod ord modNotesTx">
+        <pc:chgData name="Hernan Ramirez Diaz" userId="0b0763af-8f1b-4303-84e1-6429285cc810" providerId="ADAL" clId="{42163F52-BB8D-4D37-ACEA-9F3481FEDAF8}" dt="2025-10-09T04:50:09.294" v="22073" actId="1035"/>
+        <pc:sldMkLst>
+          <pc:docMk/>
+          <pc:sldMk cId="3576209394" sldId="2147481243"/>
+        </pc:sldMkLst>
+      </pc:sldChg>
+      <pc:sldChg chg="addSp delSp modSp mod ord modShow">
+        <pc:chgData name="Hernan Ramirez Diaz" userId="0b0763af-8f1b-4303-84e1-6429285cc810" providerId="ADAL" clId="{42163F52-BB8D-4D37-ACEA-9F3481FEDAF8}" dt="2025-10-09T04:55:44.808" v="22353" actId="1035"/>
+        <pc:sldMkLst>
+          <pc:docMk/>
+          <pc:sldMk cId="2460346233" sldId="2147481244"/>
+        </pc:sldMkLst>
+      </pc:sldChg>
+      <pc:sldChg chg="delSp modSp add mod">
+        <pc:chgData name="Hernan Ramirez Diaz" userId="0b0763af-8f1b-4303-84e1-6429285cc810" providerId="ADAL" clId="{42163F52-BB8D-4D37-ACEA-9F3481FEDAF8}" dt="2025-10-02T22:44:15.905" v="9401" actId="207"/>
+        <pc:sldMkLst>
+          <pc:docMk/>
+          <pc:sldMk cId="3253257184" sldId="2147481245"/>
+        </pc:sldMkLst>
+      </pc:sldChg>
+      <pc:sldChg chg="delSp modSp add mod">
+        <pc:chgData name="Hernan Ramirez Diaz" userId="0b0763af-8f1b-4303-84e1-6429285cc810" providerId="ADAL" clId="{42163F52-BB8D-4D37-ACEA-9F3481FEDAF8}" dt="2025-09-30T22:49:21.331" v="3295" actId="478"/>
+        <pc:sldMkLst>
+          <pc:docMk/>
+          <pc:sldMk cId="3132776874" sldId="2147481246"/>
+        </pc:sldMkLst>
+      </pc:sldChg>
+      <pc:sldChg chg="modSp mod">
+        <pc:chgData name="Hernan Ramirez Diaz" userId="0b0763af-8f1b-4303-84e1-6429285cc810" providerId="ADAL" clId="{42163F52-BB8D-4D37-ACEA-9F3481FEDAF8}" dt="2025-10-02T21:02:50.516" v="8870" actId="1036"/>
+        <pc:sldMkLst>
+          <pc:docMk/>
+          <pc:sldMk cId="1484297181" sldId="2147481247"/>
+        </pc:sldMkLst>
+      </pc:sldChg>
+      <pc:sldChg chg="addSp delSp modSp add mod">
+        <pc:chgData name="Hernan Ramirez Diaz" userId="0b0763af-8f1b-4303-84e1-6429285cc810" providerId="ADAL" clId="{42163F52-BB8D-4D37-ACEA-9F3481FEDAF8}" dt="2025-10-09T04:25:13.090" v="21978" actId="1035"/>
+        <pc:sldMkLst>
+          <pc:docMk/>
+          <pc:sldMk cId="2852939510" sldId="2147481248"/>
+        </pc:sldMkLst>
+      </pc:sldChg>
+      <pc:sldChg chg="modSp mod ord">
+        <pc:chgData name="Hernan Ramirez Diaz" userId="0b0763af-8f1b-4303-84e1-6429285cc810" providerId="ADAL" clId="{42163F52-BB8D-4D37-ACEA-9F3481FEDAF8}" dt="2025-10-09T04:58:28.772" v="22530" actId="1035"/>
+        <pc:sldMkLst>
+          <pc:docMk/>
+          <pc:sldMk cId="25791284" sldId="2147481249"/>
+        </pc:sldMkLst>
+      </pc:sldChg>
+      <pc:sldChg chg="addSp delSp modSp add mod ord modNotesTx">
+        <pc:chgData name="Hernan Ramirez Diaz" userId="0b0763af-8f1b-4303-84e1-6429285cc810" providerId="ADAL" clId="{42163F52-BB8D-4D37-ACEA-9F3481FEDAF8}" dt="2025-10-02T19:20:52.887" v="7370"/>
+        <pc:sldMkLst>
+          <pc:docMk/>
+          <pc:sldMk cId="2176796729" sldId="2147481250"/>
+        </pc:sldMkLst>
+      </pc:sldChg>
+      <pc:sldChg chg="addSp delSp modSp add del mod ord">
+        <pc:chgData name="Hernan Ramirez Diaz" userId="0b0763af-8f1b-4303-84e1-6429285cc810" providerId="ADAL" clId="{42163F52-BB8D-4D37-ACEA-9F3481FEDAF8}" dt="2025-10-01T01:45:35.806" v="3698" actId="47"/>
+        <pc:sldMkLst>
+          <pc:docMk/>
+          <pc:sldMk cId="1939539720" sldId="2147481251"/>
+        </pc:sldMkLst>
+      </pc:sldChg>
+      <pc:sldChg chg="addSp modSp mod ord">
+        <pc:chgData name="Hernan Ramirez Diaz" userId="0b0763af-8f1b-4303-84e1-6429285cc810" providerId="ADAL" clId="{42163F52-BB8D-4D37-ACEA-9F3481FEDAF8}" dt="2025-10-09T19:29:16.947" v="22953" actId="27918"/>
+        <pc:sldMkLst>
+          <pc:docMk/>
+          <pc:sldMk cId="3718838375" sldId="2147481253"/>
+        </pc:sldMkLst>
+      </pc:sldChg>
+      <pc:sldChg chg="addSp modSp new mod">
+        <pc:chgData name="Hernan Ramirez Diaz" userId="0b0763af-8f1b-4303-84e1-6429285cc810" providerId="ADAL" clId="{42163F52-BB8D-4D37-ACEA-9F3481FEDAF8}" dt="2025-10-04T05:38:27.615" v="18257" actId="20577"/>
+        <pc:sldMkLst>
+          <pc:docMk/>
+          <pc:sldMk cId="988488" sldId="2147481255"/>
+        </pc:sldMkLst>
+      </pc:sldChg>
+      <pc:sldChg chg="new del">
+        <pc:chgData name="Hernan Ramirez Diaz" userId="0b0763af-8f1b-4303-84e1-6429285cc810" providerId="ADAL" clId="{42163F52-BB8D-4D37-ACEA-9F3481FEDAF8}" dt="2025-10-04T00:12:44.661" v="16123" actId="47"/>
+        <pc:sldMkLst>
+          <pc:docMk/>
+          <pc:sldMk cId="2390622337" sldId="2147481256"/>
+        </pc:sldMkLst>
+      </pc:sldChg>
+      <pc:sldChg chg="delSp modSp add mod">
+        <pc:chgData name="Hernan Ramirez Diaz" userId="0b0763af-8f1b-4303-84e1-6429285cc810" providerId="ADAL" clId="{42163F52-BB8D-4D37-ACEA-9F3481FEDAF8}" dt="2025-10-09T18:48:15.920" v="22884" actId="20577"/>
+        <pc:sldMkLst>
+          <pc:docMk/>
+          <pc:sldMk cId="2682905776" sldId="2147481257"/>
+        </pc:sldMkLst>
+      </pc:sldChg>
+      <pc:sldChg chg="addSp delSp modSp add mod modNotesTx">
+        <pc:chgData name="Hernan Ramirez Diaz" userId="0b0763af-8f1b-4303-84e1-6429285cc810" providerId="ADAL" clId="{42163F52-BB8D-4D37-ACEA-9F3481FEDAF8}" dt="2025-10-09T19:06:07.148" v="22938" actId="20577"/>
+        <pc:sldMkLst>
+          <pc:docMk/>
+          <pc:sldMk cId="2763871" sldId="2147481258"/>
+        </pc:sldMkLst>
+      </pc:sldChg>
+      <pc:sldChg chg="delSp modSp del mod">
+        <pc:chgData name="Hernan Ramirez Diaz" userId="0b0763af-8f1b-4303-84e1-6429285cc810" providerId="ADAL" clId="{42163F52-BB8D-4D37-ACEA-9F3481FEDAF8}" dt="2025-10-03T16:59:58.268" v="11141" actId="47"/>
+        <pc:sldMkLst>
+          <pc:docMk/>
+          <pc:sldMk cId="2295337202" sldId="2147481259"/>
+        </pc:sldMkLst>
+      </pc:sldChg>
+      <pc:sldChg chg="addSp delSp modSp mod modNotesTx">
+        <pc:chgData name="Hernan Ramirez Diaz" userId="0b0763af-8f1b-4303-84e1-6429285cc810" providerId="ADAL" clId="{42163F52-BB8D-4D37-ACEA-9F3481FEDAF8}" dt="2025-10-09T19:21:31.977" v="22951" actId="20577"/>
+        <pc:sldMkLst>
+          <pc:docMk/>
+          <pc:sldMk cId="2022463905" sldId="2147481260"/>
+        </pc:sldMkLst>
+      </pc:sldChg>
+      <pc:sldChg chg="addSp delSp modSp mod">
+        <pc:chgData name="Hernan Ramirez Diaz" userId="0b0763af-8f1b-4303-84e1-6429285cc810" providerId="ADAL" clId="{42163F52-BB8D-4D37-ACEA-9F3481FEDAF8}" dt="2025-10-09T04:58:46.353" v="22549" actId="14100"/>
+        <pc:sldMkLst>
+          <pc:docMk/>
+          <pc:sldMk cId="648698299" sldId="2147481261"/>
+        </pc:sldMkLst>
+      </pc:sldChg>
+      <pc:sldChg chg="addSp delSp modSp add mod modNotesTx">
+        <pc:chgData name="Hernan Ramirez Diaz" userId="0b0763af-8f1b-4303-84e1-6429285cc810" providerId="ADAL" clId="{42163F52-BB8D-4D37-ACEA-9F3481FEDAF8}" dt="2025-10-09T04:59:29.596" v="22587" actId="1035"/>
+        <pc:sldMkLst>
+          <pc:docMk/>
+          <pc:sldMk cId="4145473322" sldId="2147481262"/>
+        </pc:sldMkLst>
+      </pc:sldChg>
+      <pc:sldChg chg="addSp delSp modSp add mod">
+        <pc:chgData name="Hernan Ramirez Diaz" userId="0b0763af-8f1b-4303-84e1-6429285cc810" providerId="ADAL" clId="{42163F52-BB8D-4D37-ACEA-9F3481FEDAF8}" dt="2025-10-09T05:00:17.277" v="22629" actId="1035"/>
+        <pc:sldMkLst>
+          <pc:docMk/>
+          <pc:sldMk cId="345488764" sldId="2147481264"/>
+        </pc:sldMkLst>
+      </pc:sldChg>
+      <pc:sldChg chg="addSp delSp modSp mod ord">
+        <pc:chgData name="Hernan Ramirez Diaz" userId="0b0763af-8f1b-4303-84e1-6429285cc810" providerId="ADAL" clId="{42163F52-BB8D-4D37-ACEA-9F3481FEDAF8}" dt="2025-10-04T04:45:30.488" v="17443"/>
+        <pc:sldMkLst>
+          <pc:docMk/>
+          <pc:sldMk cId="2503961039" sldId="2147481265"/>
+        </pc:sldMkLst>
+      </pc:sldChg>
+      <pc:sldChg chg="modSp add mod">
+        <pc:chgData name="Hernan Ramirez Diaz" userId="0b0763af-8f1b-4303-84e1-6429285cc810" providerId="ADAL" clId="{42163F52-BB8D-4D37-ACEA-9F3481FEDAF8}" dt="2025-10-03T19:58:37.894" v="12890" actId="14100"/>
+        <pc:sldMkLst>
+          <pc:docMk/>
+          <pc:sldMk cId="863687252" sldId="2147481266"/>
+        </pc:sldMkLst>
+      </pc:sldChg>
+      <pc:sldChg chg="modSp add mod">
+        <pc:chgData name="Hernan Ramirez Diaz" userId="0b0763af-8f1b-4303-84e1-6429285cc810" providerId="ADAL" clId="{42163F52-BB8D-4D37-ACEA-9F3481FEDAF8}" dt="2025-10-03T19:22:30.157" v="12629" actId="20577"/>
+        <pc:sldMkLst>
+          <pc:docMk/>
+          <pc:sldMk cId="1129400367" sldId="2147481267"/>
+        </pc:sldMkLst>
+      </pc:sldChg>
+      <pc:sldChg chg="modSp add mod">
+        <pc:chgData name="Hernan Ramirez Diaz" userId="0b0763af-8f1b-4303-84e1-6429285cc810" providerId="ADAL" clId="{42163F52-BB8D-4D37-ACEA-9F3481FEDAF8}" dt="2025-10-03T22:38:00.493" v="14302" actId="20577"/>
+        <pc:sldMkLst>
+          <pc:docMk/>
+          <pc:sldMk cId="645413853" sldId="2147481268"/>
+        </pc:sldMkLst>
+      </pc:sldChg>
+      <pc:sldChg chg="modSp add mod">
+        <pc:chgData name="Hernan Ramirez Diaz" userId="0b0763af-8f1b-4303-84e1-6429285cc810" providerId="ADAL" clId="{42163F52-BB8D-4D37-ACEA-9F3481FEDAF8}" dt="2025-10-03T19:58:45.624" v="12891" actId="14100"/>
+        <pc:sldMkLst>
+          <pc:docMk/>
+          <pc:sldMk cId="3907743225" sldId="2147481269"/>
+        </pc:sldMkLst>
+      </pc:sldChg>
+      <pc:sldChg chg="modSp add mod">
+        <pc:chgData name="Hernan Ramirez Diaz" userId="0b0763af-8f1b-4303-84e1-6429285cc810" providerId="ADAL" clId="{42163F52-BB8D-4D37-ACEA-9F3481FEDAF8}" dt="2025-10-03T19:58:54.074" v="12892" actId="14100"/>
+        <pc:sldMkLst>
+          <pc:docMk/>
+          <pc:sldMk cId="2080702279" sldId="2147481270"/>
+        </pc:sldMkLst>
+      </pc:sldChg>
+      <pc:sldChg chg="addSp delSp modSp mod ord">
+        <pc:chgData name="Hernan Ramirez Diaz" userId="0b0763af-8f1b-4303-84e1-6429285cc810" providerId="ADAL" clId="{42163F52-BB8D-4D37-ACEA-9F3481FEDAF8}" dt="2025-10-09T04:58:07.039" v="22505" actId="1035"/>
+        <pc:sldMkLst>
+          <pc:docMk/>
+          <pc:sldMk cId="869299062" sldId="2147481271"/>
+        </pc:sldMkLst>
+      </pc:sldChg>
+      <pc:sldChg chg="modSp new del mod">
+        <pc:chgData name="Hernan Ramirez Diaz" userId="0b0763af-8f1b-4303-84e1-6429285cc810" providerId="ADAL" clId="{42163F52-BB8D-4D37-ACEA-9F3481FEDAF8}" dt="2025-10-04T06:03:41.892" v="18453" actId="47"/>
+        <pc:sldMkLst>
+          <pc:docMk/>
+          <pc:sldMk cId="3779341304" sldId="2147481272"/>
+        </pc:sldMkLst>
+      </pc:sldChg>
+      <pc:sldChg chg="new">
+        <pc:chgData name="Hernan Ramirez Diaz" userId="0b0763af-8f1b-4303-84e1-6429285cc810" providerId="ADAL" clId="{42163F52-BB8D-4D37-ACEA-9F3481FEDAF8}" dt="2025-10-03T22:57:27.833" v="14445" actId="680"/>
+        <pc:sldMkLst>
+          <pc:docMk/>
+          <pc:sldMk cId="1252616050" sldId="2147481273"/>
+        </pc:sldMkLst>
+      </pc:sldChg>
+      <pc:sldChg chg="addSp delSp modSp add mod ord">
+        <pc:chgData name="Hernan Ramirez Diaz" userId="0b0763af-8f1b-4303-84e1-6429285cc810" providerId="ADAL" clId="{42163F52-BB8D-4D37-ACEA-9F3481FEDAF8}" dt="2025-10-04T00:27:05.972" v="16436" actId="1076"/>
+        <pc:sldMkLst>
+          <pc:docMk/>
+          <pc:sldMk cId="1976876559" sldId="2147481274"/>
+        </pc:sldMkLst>
+      </pc:sldChg>
+      <pc:sldChg chg="delSp add mod ord">
+        <pc:chgData name="Hernan Ramirez Diaz" userId="0b0763af-8f1b-4303-84e1-6429285cc810" providerId="ADAL" clId="{42163F52-BB8D-4D37-ACEA-9F3481FEDAF8}" dt="2025-10-04T00:21:17.826" v="16356"/>
+        <pc:sldMkLst>
+          <pc:docMk/>
+          <pc:sldMk cId="68822884" sldId="2147481275"/>
+        </pc:sldMkLst>
+      </pc:sldChg>
+      <pc:sldChg chg="addSp delSp modSp add mod">
+        <pc:chgData name="Hernan Ramirez Diaz" userId="0b0763af-8f1b-4303-84e1-6429285cc810" providerId="ADAL" clId="{42163F52-BB8D-4D37-ACEA-9F3481FEDAF8}" dt="2025-10-08T18:03:35.166" v="21342" actId="1076"/>
+        <pc:sldMkLst>
+          <pc:docMk/>
+          <pc:sldMk cId="926817997" sldId="2147481276"/>
+        </pc:sldMkLst>
+      </pc:sldChg>
+      <pc:sldChg chg="delSp modSp add del mod ord">
+        <pc:chgData name="Hernan Ramirez Diaz" userId="0b0763af-8f1b-4303-84e1-6429285cc810" providerId="ADAL" clId="{42163F52-BB8D-4D37-ACEA-9F3481FEDAF8}" dt="2025-10-04T06:05:30.878" v="18628" actId="47"/>
+        <pc:sldMkLst>
+          <pc:docMk/>
+          <pc:sldMk cId="938116946" sldId="2147481277"/>
+        </pc:sldMkLst>
+      </pc:sldChg>
+      <pc:sldChg chg="addSp delSp modSp add mod ord">
+        <pc:chgData name="Hernan Ramirez Diaz" userId="0b0763af-8f1b-4303-84e1-6429285cc810" providerId="ADAL" clId="{42163F52-BB8D-4D37-ACEA-9F3481FEDAF8}" dt="2025-10-09T19:19:56.706" v="22940" actId="115"/>
+        <pc:sldMkLst>
+          <pc:docMk/>
+          <pc:sldMk cId="2350308366" sldId="2147481278"/>
+        </pc:sldMkLst>
+      </pc:sldChg>
+      <pc:sldChg chg="modSp mod">
+        <pc:chgData name="Hernan Ramirez Diaz" userId="0b0763af-8f1b-4303-84e1-6429285cc810" providerId="ADAL" clId="{42163F52-BB8D-4D37-ACEA-9F3481FEDAF8}" dt="2025-10-09T16:55:50.150" v="22770" actId="1035"/>
+        <pc:sldMkLst>
+          <pc:docMk/>
+          <pc:sldMk cId="1618464510" sldId="2147481280"/>
+        </pc:sldMkLst>
+      </pc:sldChg>
+      <pc:sldChg chg="modSp mod">
+        <pc:chgData name="Hernan Ramirez Diaz" userId="0b0763af-8f1b-4303-84e1-6429285cc810" providerId="ADAL" clId="{42163F52-BB8D-4D37-ACEA-9F3481FEDAF8}" dt="2025-10-09T17:04:19.208" v="22794" actId="20577"/>
+        <pc:sldMkLst>
+          <pc:docMk/>
+          <pc:sldMk cId="2379161747" sldId="2147481286"/>
+        </pc:sldMkLst>
+      </pc:sldChg>
+      <pc:sldChg chg="modSp mod">
+        <pc:chgData name="Hernan Ramirez Diaz" userId="0b0763af-8f1b-4303-84e1-6429285cc810" providerId="ADAL" clId="{42163F52-BB8D-4D37-ACEA-9F3481FEDAF8}" dt="2025-10-09T17:04:16.565" v="22793" actId="20577"/>
+        <pc:sldMkLst>
+          <pc:docMk/>
+          <pc:sldMk cId="2042423855" sldId="2147481287"/>
+        </pc:sldMkLst>
+      </pc:sldChg>
+      <pc:sldChg chg="modSp mod">
+        <pc:chgData name="Hernan Ramirez Diaz" userId="0b0763af-8f1b-4303-84e1-6429285cc810" providerId="ADAL" clId="{42163F52-BB8D-4D37-ACEA-9F3481FEDAF8}" dt="2025-10-08T18:04:09.094" v="21366" actId="1076"/>
+        <pc:sldMkLst>
+          <pc:docMk/>
+          <pc:sldMk cId="1156650361" sldId="2147481291"/>
+        </pc:sldMkLst>
+      </pc:sldChg>
+      <pc:sldChg chg="modSp mod ord">
+        <pc:chgData name="Hernan Ramirez Diaz" userId="0b0763af-8f1b-4303-84e1-6429285cc810" providerId="ADAL" clId="{42163F52-BB8D-4D37-ACEA-9F3481FEDAF8}" dt="2025-10-08T18:09:50.816" v="21544"/>
+        <pc:sldMkLst>
+          <pc:docMk/>
+          <pc:sldMk cId="277216321" sldId="2147481295"/>
+        </pc:sldMkLst>
+      </pc:sldChg>
+      <pc:sldChg chg="add del">
+        <pc:chgData name="Hernan Ramirez Diaz" userId="0b0763af-8f1b-4303-84e1-6429285cc810" providerId="ADAL" clId="{42163F52-BB8D-4D37-ACEA-9F3481FEDAF8}" dt="2025-10-09T23:46:55.071" v="23066" actId="47"/>
+        <pc:sldMkLst>
+          <pc:docMk/>
+          <pc:sldMk cId="3933677755" sldId="2147481297"/>
+        </pc:sldMkLst>
+      </pc:sldChg>
+    </pc:docChg>
+  </pc:docChgLst>
+  <pc:docChgLst>
     <pc:chgData name="Shubhangi Verma" userId="c0355bd3-af2b-4be5-9724-d992cd36b32e" providerId="ADAL" clId="{C10E5BAD-77AF-5A72-8623-CDC46286E166}"/>
     <pc:docChg chg="undo custSel addSld modSld sldOrd modSection">
       <pc:chgData name="Shubhangi Verma" userId="c0355bd3-af2b-4be5-9724-d992cd36b32e" providerId="ADAL" clId="{C10E5BAD-77AF-5A72-8623-CDC46286E166}" dt="2025-10-07T20:09:57.553" v="2693" actId="729"/>
@@ -3066,7 +2828,7 @@
         </pc:sldMkLst>
         <pc:extLst>
           <p:ext xmlns:p="http://schemas.openxmlformats.org/presentationml/2006/main" uri="{D6D511B9-2390-475A-947B-AFAB55BFBCF1}">
-            <pc226:cmChg xmlns:pc226="http://schemas.microsoft.com/office/powerpoint/2022/06/main/command" chg="mod">
+            <pc226:cmChg xmlns:pc226="http://schemas.microsoft.com/office/powerpoint/2022/06/main/command" xmlns="" chg="mod">
               <pc226:chgData name="Shubhangi Verma" userId="c0355bd3-af2b-4be5-9724-d992cd36b32e" providerId="ADAL" clId="{C10E5BAD-77AF-5A72-8623-CDC46286E166}" dt="2025-10-07T20:07:04.556" v="2664" actId="20577"/>
               <pc2:cmMkLst xmlns:pc2="http://schemas.microsoft.com/office/powerpoint/2019/9/main/command">
                 <pc:docMk/>
@@ -3077,6 +2839,244 @@
           </p:ext>
         </pc:extLst>
       </pc:sldChg>
+    </pc:docChg>
+  </pc:docChgLst>
+  <pc:docChgLst>
+    <pc:chgData name="Michael Bruno" userId="ed6069a4-1fcb-46c4-b4b7-85c279acb11e" providerId="ADAL" clId="{613589E5-1A9A-41C5-92C9-D44D19F40B73}"/>
+    <pc:docChg chg="custSel modSld">
+      <pc:chgData name="Michael Bruno" userId="ed6069a4-1fcb-46c4-b4b7-85c279acb11e" providerId="ADAL" clId="{613589E5-1A9A-41C5-92C9-D44D19F40B73}" dt="2025-10-10T20:06:34.494" v="3" actId="13926"/>
+      <pc:docMkLst>
+        <pc:docMk/>
+      </pc:docMkLst>
+      <pc:sldChg chg="delSp modSp mod">
+        <pc:chgData name="Michael Bruno" userId="ed6069a4-1fcb-46c4-b4b7-85c279acb11e" providerId="ADAL" clId="{613589E5-1A9A-41C5-92C9-D44D19F40B73}" dt="2025-10-09T23:11:36.343" v="2" actId="478"/>
+        <pc:sldMkLst>
+          <pc:docMk/>
+          <pc:sldMk cId="0" sldId="260"/>
+        </pc:sldMkLst>
+      </pc:sldChg>
+      <pc:sldChg chg="modSp mod">
+        <pc:chgData name="Michael Bruno" userId="ed6069a4-1fcb-46c4-b4b7-85c279acb11e" providerId="ADAL" clId="{613589E5-1A9A-41C5-92C9-D44D19F40B73}" dt="2025-10-10T20:06:34.494" v="3" actId="13926"/>
+        <pc:sldMkLst>
+          <pc:docMk/>
+          <pc:sldMk cId="829862625" sldId="2147481206"/>
+        </pc:sldMkLst>
+      </pc:sldChg>
+    </pc:docChg>
+  </pc:docChgLst>
+  <pc:docChgLst>
+    <pc:chgData name="Ridhima Dhawan" userId="41b5bd7b-df07-43ed-9321-8df1cf164a12" providerId="ADAL" clId="{454EBA3A-CFA7-4557-80A3-8406924164EC}"/>
+    <pc:docChg chg="undo custSel addSld delSld modSld sldOrd delSection modSection">
+      <pc:chgData name="Ridhima Dhawan" userId="41b5bd7b-df07-43ed-9321-8df1cf164a12" providerId="ADAL" clId="{454EBA3A-CFA7-4557-80A3-8406924164EC}" dt="2025-09-26T16:50:09.182" v="9258" actId="20577"/>
+      <pc:docMkLst>
+        <pc:docMk/>
+      </pc:docMkLst>
+      <pc:sldChg chg="modSp mod">
+        <pc:chgData name="Ridhima Dhawan" userId="41b5bd7b-df07-43ed-9321-8df1cf164a12" providerId="ADAL" clId="{454EBA3A-CFA7-4557-80A3-8406924164EC}" dt="2025-09-19T04:20:02.730" v="1329" actId="20577"/>
+        <pc:sldMkLst>
+          <pc:docMk/>
+          <pc:sldMk cId="0" sldId="274"/>
+        </pc:sldMkLst>
+      </pc:sldChg>
+      <pc:sldChg chg="modSp mod">
+        <pc:chgData name="Ridhima Dhawan" userId="41b5bd7b-df07-43ed-9321-8df1cf164a12" providerId="ADAL" clId="{454EBA3A-CFA7-4557-80A3-8406924164EC}" dt="2025-09-17T17:37:21.941" v="5" actId="20577"/>
+        <pc:sldMkLst>
+          <pc:docMk/>
+          <pc:sldMk cId="0" sldId="275"/>
+        </pc:sldMkLst>
+      </pc:sldChg>
+      <pc:sldChg chg="addSp delSp modSp mod">
+        <pc:chgData name="Ridhima Dhawan" userId="41b5bd7b-df07-43ed-9321-8df1cf164a12" providerId="ADAL" clId="{454EBA3A-CFA7-4557-80A3-8406924164EC}" dt="2025-09-23T16:11:19.018" v="2066" actId="14100"/>
+        <pc:sldMkLst>
+          <pc:docMk/>
+          <pc:sldMk cId="1694384516" sldId="285"/>
+        </pc:sldMkLst>
+      </pc:sldChg>
+      <pc:sldChg chg="addSp delSp modSp mod modNotesTx">
+        <pc:chgData name="Ridhima Dhawan" userId="41b5bd7b-df07-43ed-9321-8df1cf164a12" providerId="ADAL" clId="{454EBA3A-CFA7-4557-80A3-8406924164EC}" dt="2025-09-19T03:52:27.481" v="1232" actId="20577"/>
+        <pc:sldMkLst>
+          <pc:docMk/>
+          <pc:sldMk cId="3180984745" sldId="333"/>
+        </pc:sldMkLst>
+      </pc:sldChg>
+      <pc:sldChg chg="addSp delSp modSp mod ord modNotesTx">
+        <pc:chgData name="Ridhima Dhawan" userId="41b5bd7b-df07-43ed-9321-8df1cf164a12" providerId="ADAL" clId="{454EBA3A-CFA7-4557-80A3-8406924164EC}" dt="2025-09-25T15:58:08.681" v="9002" actId="20577"/>
+        <pc:sldMkLst>
+          <pc:docMk/>
+          <pc:sldMk cId="2675615646" sldId="419"/>
+        </pc:sldMkLst>
+      </pc:sldChg>
+      <pc:sldChg chg="del">
+        <pc:chgData name="Ridhima Dhawan" userId="41b5bd7b-df07-43ed-9321-8df1cf164a12" providerId="ADAL" clId="{454EBA3A-CFA7-4557-80A3-8406924164EC}" dt="2025-09-17T17:41:25.728" v="134" actId="47"/>
+        <pc:sldMkLst>
+          <pc:docMk/>
+          <pc:sldMk cId="1299622664" sldId="434"/>
+        </pc:sldMkLst>
+      </pc:sldChg>
+      <pc:sldChg chg="addSp delSp modSp add mod">
+        <pc:chgData name="Ridhima Dhawan" userId="41b5bd7b-df07-43ed-9321-8df1cf164a12" providerId="ADAL" clId="{454EBA3A-CFA7-4557-80A3-8406924164EC}" dt="2025-09-23T19:05:17.611" v="6364" actId="20577"/>
+        <pc:sldMkLst>
+          <pc:docMk/>
+          <pc:sldMk cId="2128657008" sldId="2147481209"/>
+        </pc:sldMkLst>
+      </pc:sldChg>
+      <pc:sldChg chg="addSp delSp modSp new mod ord">
+        <pc:chgData name="Ridhima Dhawan" userId="41b5bd7b-df07-43ed-9321-8df1cf164a12" providerId="ADAL" clId="{454EBA3A-CFA7-4557-80A3-8406924164EC}" dt="2025-09-25T15:39:08.861" v="8952" actId="1076"/>
+        <pc:sldMkLst>
+          <pc:docMk/>
+          <pc:sldMk cId="1105021549" sldId="2147481210"/>
+        </pc:sldMkLst>
+      </pc:sldChg>
+      <pc:sldChg chg="addSp delSp modSp add mod">
+        <pc:chgData name="Ridhima Dhawan" userId="41b5bd7b-df07-43ed-9321-8df1cf164a12" providerId="ADAL" clId="{454EBA3A-CFA7-4557-80A3-8406924164EC}" dt="2025-09-26T06:42:10.782" v="9233" actId="20577"/>
+        <pc:sldMkLst>
+          <pc:docMk/>
+          <pc:sldMk cId="323746144" sldId="2147481211"/>
+        </pc:sldMkLst>
+      </pc:sldChg>
+      <pc:sldChg chg="addSp delSp modSp add mod">
+        <pc:chgData name="Ridhima Dhawan" userId="41b5bd7b-df07-43ed-9321-8df1cf164a12" providerId="ADAL" clId="{454EBA3A-CFA7-4557-80A3-8406924164EC}" dt="2025-09-23T16:39:12.998" v="3725" actId="1076"/>
+        <pc:sldMkLst>
+          <pc:docMk/>
+          <pc:sldMk cId="83366420" sldId="2147481212"/>
+        </pc:sldMkLst>
+      </pc:sldChg>
+      <pc:sldChg chg="addSp delSp modSp add mod">
+        <pc:chgData name="Ridhima Dhawan" userId="41b5bd7b-df07-43ed-9321-8df1cf164a12" providerId="ADAL" clId="{454EBA3A-CFA7-4557-80A3-8406924164EC}" dt="2025-09-26T06:45:21.549" v="9234" actId="1076"/>
+        <pc:sldMkLst>
+          <pc:docMk/>
+          <pc:sldMk cId="1270242671" sldId="2147481213"/>
+        </pc:sldMkLst>
+        <pc:spChg chg="mod">
+          <ac:chgData name="Ridhima Dhawan" userId="41b5bd7b-df07-43ed-9321-8df1cf164a12" providerId="ADAL" clId="{454EBA3A-CFA7-4557-80A3-8406924164EC}" dt="2025-09-23T16:51:56.192" v="3918" actId="20577"/>
+          <ac:spMkLst>
+            <pc:docMk/>
+            <pc:sldMk cId="1270242671" sldId="2147481213"/>
+            <ac:spMk id="3" creationId="{BF8AA7B9-40BC-BD5B-A38F-B69FFA6E6319}"/>
+          </ac:spMkLst>
+        </pc:spChg>
+        <pc:spChg chg="add mod">
+          <ac:chgData name="Ridhima Dhawan" userId="41b5bd7b-df07-43ed-9321-8df1cf164a12" providerId="ADAL" clId="{454EBA3A-CFA7-4557-80A3-8406924164EC}" dt="2025-09-26T06:45:21.549" v="9234" actId="1076"/>
+          <ac:spMkLst>
+            <pc:docMk/>
+            <pc:sldMk cId="1270242671" sldId="2147481213"/>
+            <ac:spMk id="4" creationId="{F93D6D7D-FF3F-82F6-14A4-6285C0323998}"/>
+          </ac:spMkLst>
+        </pc:spChg>
+        <pc:graphicFrameChg chg="add mod modGraphic">
+          <ac:chgData name="Ridhima Dhawan" userId="41b5bd7b-df07-43ed-9321-8df1cf164a12" providerId="ADAL" clId="{454EBA3A-CFA7-4557-80A3-8406924164EC}" dt="2025-09-23T23:14:56.318" v="7961" actId="1076"/>
+          <ac:graphicFrameMkLst>
+            <pc:docMk/>
+            <pc:sldMk cId="1270242671" sldId="2147481213"/>
+            <ac:graphicFrameMk id="2" creationId="{38F22EE9-DEDC-E1DA-1E19-E1758E9C192D}"/>
+          </ac:graphicFrameMkLst>
+        </pc:graphicFrameChg>
+      </pc:sldChg>
+      <pc:sldChg chg="addSp delSp modSp add mod">
+        <pc:chgData name="Ridhima Dhawan" userId="41b5bd7b-df07-43ed-9321-8df1cf164a12" providerId="ADAL" clId="{454EBA3A-CFA7-4557-80A3-8406924164EC}" dt="2025-09-23T18:42:17.814" v="6250" actId="20577"/>
+        <pc:sldMkLst>
+          <pc:docMk/>
+          <pc:sldMk cId="1389874235" sldId="2147481214"/>
+        </pc:sldMkLst>
+      </pc:sldChg>
+      <pc:sldChg chg="modSp add mod">
+        <pc:chgData name="Ridhima Dhawan" userId="41b5bd7b-df07-43ed-9321-8df1cf164a12" providerId="ADAL" clId="{454EBA3A-CFA7-4557-80A3-8406924164EC}" dt="2025-09-17T17:51:09.912" v="323" actId="20577"/>
+        <pc:sldMkLst>
+          <pc:docMk/>
+          <pc:sldMk cId="3040778351" sldId="2147481215"/>
+        </pc:sldMkLst>
+      </pc:sldChg>
+      <pc:sldChg chg="delSp modSp add mod ord">
+        <pc:chgData name="Ridhima Dhawan" userId="41b5bd7b-df07-43ed-9321-8df1cf164a12" providerId="ADAL" clId="{454EBA3A-CFA7-4557-80A3-8406924164EC}" dt="2025-09-17T20:05:15.773" v="1049" actId="313"/>
+        <pc:sldMkLst>
+          <pc:docMk/>
+          <pc:sldMk cId="1707149320" sldId="2147481216"/>
+        </pc:sldMkLst>
+      </pc:sldChg>
+      <pc:sldChg chg="add">
+        <pc:chgData name="Ridhima Dhawan" userId="41b5bd7b-df07-43ed-9321-8df1cf164a12" providerId="ADAL" clId="{454EBA3A-CFA7-4557-80A3-8406924164EC}" dt="2025-09-19T04:19:51.802" v="1315" actId="2890"/>
+        <pc:sldMkLst>
+          <pc:docMk/>
+          <pc:sldMk cId="2307073506" sldId="2147481217"/>
+        </pc:sldMkLst>
+      </pc:sldChg>
+      <pc:sldChg chg="addSp delSp modSp add mod">
+        <pc:chgData name="Ridhima Dhawan" userId="41b5bd7b-df07-43ed-9321-8df1cf164a12" providerId="ADAL" clId="{454EBA3A-CFA7-4557-80A3-8406924164EC}" dt="2025-09-23T19:06:18.876" v="6365" actId="14100"/>
+        <pc:sldMkLst>
+          <pc:docMk/>
+          <pc:sldMk cId="145336846" sldId="2147481218"/>
+        </pc:sldMkLst>
+      </pc:sldChg>
+      <pc:sldChg chg="addSp delSp modSp new mod">
+        <pc:chgData name="Ridhima Dhawan" userId="41b5bd7b-df07-43ed-9321-8df1cf164a12" providerId="ADAL" clId="{454EBA3A-CFA7-4557-80A3-8406924164EC}" dt="2025-09-25T15:21:33.063" v="8938" actId="20577"/>
+        <pc:sldMkLst>
+          <pc:docMk/>
+          <pc:sldMk cId="2449955966" sldId="2147481220"/>
+        </pc:sldMkLst>
+      </pc:sldChg>
+      <pc:sldChg chg="addSp delSp modSp add mod">
+        <pc:chgData name="Ridhima Dhawan" userId="41b5bd7b-df07-43ed-9321-8df1cf164a12" providerId="ADAL" clId="{454EBA3A-CFA7-4557-80A3-8406924164EC}" dt="2025-09-23T23:12:20.625" v="7960" actId="1076"/>
+        <pc:sldMkLst>
+          <pc:docMk/>
+          <pc:sldMk cId="3753532281" sldId="2147481221"/>
+        </pc:sldMkLst>
+      </pc:sldChg>
+      <pc:sldChg chg="addSp delSp modSp add mod ord">
+        <pc:chgData name="Ridhima Dhawan" userId="41b5bd7b-df07-43ed-9321-8df1cf164a12" providerId="ADAL" clId="{454EBA3A-CFA7-4557-80A3-8406924164EC}" dt="2025-09-26T16:50:09.182" v="9258" actId="20577"/>
+        <pc:sldMkLst>
+          <pc:docMk/>
+          <pc:sldMk cId="1157813500" sldId="2147481222"/>
+        </pc:sldMkLst>
+      </pc:sldChg>
+      <pc:sldChg chg="addSp delSp modSp add mod ord replId">
+        <pc:chgData name="Ridhima Dhawan" userId="41b5bd7b-df07-43ed-9321-8df1cf164a12" providerId="ADAL" clId="{454EBA3A-CFA7-4557-80A3-8406924164EC}" dt="2025-09-23T18:24:32.029" v="5732" actId="20577"/>
+        <pc:sldMkLst>
+          <pc:docMk/>
+          <pc:sldMk cId="4242413873" sldId="2147481223"/>
+        </pc:sldMkLst>
+      </pc:sldChg>
+      <pc:sldChg chg="addSp delSp modSp add mod">
+        <pc:chgData name="Ridhima Dhawan" userId="41b5bd7b-df07-43ed-9321-8df1cf164a12" providerId="ADAL" clId="{454EBA3A-CFA7-4557-80A3-8406924164EC}" dt="2025-09-26T06:40:51.484" v="9216" actId="404"/>
+        <pc:sldMkLst>
+          <pc:docMk/>
+          <pc:sldMk cId="3621352377" sldId="2147481224"/>
+        </pc:sldMkLst>
+      </pc:sldChg>
+      <pc:sldChg chg="addSp delSp modSp add mod">
+        <pc:chgData name="Ridhima Dhawan" userId="41b5bd7b-df07-43ed-9321-8df1cf164a12" providerId="ADAL" clId="{454EBA3A-CFA7-4557-80A3-8406924164EC}" dt="2025-09-25T15:39:35.496" v="8966" actId="20577"/>
+        <pc:sldMkLst>
+          <pc:docMk/>
+          <pc:sldMk cId="2178493738" sldId="2147481225"/>
+        </pc:sldMkLst>
+      </pc:sldChg>
+      <pc:sldChg chg="delSp modSp add mod">
+        <pc:chgData name="Ridhima Dhawan" userId="41b5bd7b-df07-43ed-9321-8df1cf164a12" providerId="ADAL" clId="{454EBA3A-CFA7-4557-80A3-8406924164EC}" dt="2025-09-25T18:48:13.249" v="9135" actId="20577"/>
+        <pc:sldMkLst>
+          <pc:docMk/>
+          <pc:sldMk cId="1394883244" sldId="2147481226"/>
+        </pc:sldMkLst>
+      </pc:sldChg>
+      <pc:sldChg chg="addSp delSp modSp add mod">
+        <pc:chgData name="Ridhima Dhawan" userId="41b5bd7b-df07-43ed-9321-8df1cf164a12" providerId="ADAL" clId="{454EBA3A-CFA7-4557-80A3-8406924164EC}" dt="2025-09-25T15:59:22.730" v="9080" actId="20577"/>
+        <pc:sldMkLst>
+          <pc:docMk/>
+          <pc:sldMk cId="2560992972" sldId="2147481227"/>
+        </pc:sldMkLst>
+      </pc:sldChg>
+      <pc:sldChg chg="modSp add mod">
+        <pc:chgData name="Ridhima Dhawan" userId="41b5bd7b-df07-43ed-9321-8df1cf164a12" providerId="ADAL" clId="{454EBA3A-CFA7-4557-80A3-8406924164EC}" dt="2025-09-25T15:59:30.763" v="9087" actId="20577"/>
+        <pc:sldMkLst>
+          <pc:docMk/>
+          <pc:sldMk cId="427855662" sldId="2147481228"/>
+        </pc:sldMkLst>
+      </pc:sldChg>
+      <pc:sldMasterChg chg="delSldLayout">
+        <pc:chgData name="Ridhima Dhawan" userId="41b5bd7b-df07-43ed-9321-8df1cf164a12" providerId="ADAL" clId="{454EBA3A-CFA7-4557-80A3-8406924164EC}" dt="2025-09-23T16:11:22.319" v="2067" actId="47"/>
+        <pc:sldMasterMkLst>
+          <pc:docMk/>
+          <pc:sldMasterMk cId="1804289383" sldId="2147483648"/>
+        </pc:sldMasterMkLst>
+      </pc:sldMasterChg>
     </pc:docChg>
   </pc:docChgLst>
 </pc:chgInfo>
@@ -3236,7 +3236,7 @@
           <a:p>
             <a:fld id="{C2486858-BEB2-AA4A-AEF7-6C259965A833}" type="datetimeFigureOut">
               <a:rPr lang="en-US" smtClean="0"/>
-              <a:t>10/20/25</a:t>
+              <a:t>1/13/26</a:t>
             </a:fld>
             <a:endParaRPr lang="en-US"/>
           </a:p>
@@ -3335,7 +3335,7 @@
           <a:p>
             <a:fld id="{DE650B3E-2EAB-E847-9859-1E8EF3D97F17}" type="datetimeFigureOut">
               <a:rPr lang="en-US" smtClean="0"/>
-              <a:t>10/20/25</a:t>
+              <a:t>1/13/26</a:t>
             </a:fld>
             <a:endParaRPr lang="en-US"/>
           </a:p>
@@ -4610,7 +4610,7 @@
           </p:cNvGraphicFramePr>
           <p:nvPr userDrawn="1">
             <p:custDataLst>
-              <p:tags r:id="rId1"/>
+              <p:tags r:id="rId2"/>
             </p:custDataLst>
           </p:nvPr>
         </p:nvGraphicFramePr>
@@ -4622,12 +4622,12 @@
           <a:graphicData uri="http://schemas.openxmlformats.org/presentationml/2006/ole">
             <mc:AlternateContent xmlns:mc="http://schemas.openxmlformats.org/markup-compatibility/2006">
               <mc:Choice xmlns:v="urn:schemas-microsoft-com:vml" Requires="v">
-                <p:oleObj name="think-cell Slide" r:id="rId3" imgW="592" imgH="595" progId="TCLayout.ActiveDocument.1">
+                <p:oleObj spid="_x0000_s1025" name="think-cell Slide" r:id="rId4" imgW="592" imgH="595" progId="TCLayout.ActiveDocument.1">
                   <p:embed/>
                 </p:oleObj>
               </mc:Choice>
               <mc:Fallback>
-                <p:oleObj name="think-cell Slide" r:id="rId3" imgW="592" imgH="595" progId="TCLayout.ActiveDocument.1">
+                <p:oleObj name="think-cell Slide" r:id="rId4" imgW="592" imgH="595" progId="TCLayout.ActiveDocument.1">
                   <p:embed/>
                   <p:pic>
                     <p:nvPicPr>
@@ -4642,7 +4642,7 @@
                       <p:nvPr/>
                     </p:nvPicPr>
                     <p:blipFill>
-                      <a:blip r:embed="rId4"/>
+                      <a:blip r:embed="rId5"/>
                       <a:stretch>
                         <a:fillRect/>
                       </a:stretch>
@@ -4952,7 +4952,7 @@
             <p:nvPr userDrawn="1"/>
           </p:nvPicPr>
           <p:blipFill>
-            <a:blip r:embed="rId5"/>
+            <a:blip r:embed="rId6"/>
             <a:stretch>
               <a:fillRect/>
             </a:stretch>
@@ -12984,7 +12984,7 @@
             <a:fld id="{ADA417E5-1A75-45D7-BDE0-29E7A6B38811}" type="datetimeFigureOut">
               <a:rPr lang="en-US" smtClean="0"/>
               <a:pPr/>
-              <a:t>10/20/25</a:t>
+              <a:t>1/13/26</a:t>
             </a:fld>
             <a:endParaRPr lang="en-US"/>
           </a:p>
@@ -16208,14 +16208,14 @@
           <p:nvPr>
             <p:extLst>
               <p:ext uri="{D42A27DB-BD31-4B8C-83A1-F6EECF244321}">
-                <p14:modId xmlns:p14="http://schemas.microsoft.com/office/powerpoint/2010/main" val="1548320033"/>
+                <p14:modId xmlns:p14="http://schemas.microsoft.com/office/powerpoint/2010/main" val="972250586"/>
               </p:ext>
             </p:extLst>
           </p:nvPr>
         </p:nvGraphicFramePr>
         <p:xfrm>
-          <a:off x="4183094" y="457202"/>
-          <a:ext cx="7505700" cy="6139772"/>
+          <a:off x="3174101" y="457202"/>
+          <a:ext cx="7505702" cy="6232607"/>
         </p:xfrm>
         <a:graphic>
           <a:graphicData uri="http://schemas.openxmlformats.org/drawingml/2006/table">
@@ -16224,38 +16224,73 @@
                 <a:tableStyleId>{72833802-FEF1-4C79-8D5D-14CF1EAF98D9}</a:tableStyleId>
               </a:tblPr>
               <a:tblGrid>
-                <a:gridCol w="864020">
+                <a:gridCol w="300454">
                   <a:extLst>
                     <a:ext uri="{9D8B030D-6E8A-4147-A177-3AD203B41FA5}">
                       <a16:colId xmlns:a16="http://schemas.microsoft.com/office/drawing/2014/main" val="4043450700"/>
                     </a:ext>
                   </a:extLst>
                 </a:gridCol>
-                <a:gridCol w="921609">
+                <a:gridCol w="320480">
                   <a:extLst>
                     <a:ext uri="{9D8B030D-6E8A-4147-A177-3AD203B41FA5}">
                       <a16:colId xmlns:a16="http://schemas.microsoft.com/office/drawing/2014/main" val="3892022578"/>
                     </a:ext>
                   </a:extLst>
                 </a:gridCol>
-                <a:gridCol w="4167484">
+                <a:gridCol w="1449199">
                   <a:extLst>
                     <a:ext uri="{9D8B030D-6E8A-4147-A177-3AD203B41FA5}">
                       <a16:colId xmlns:a16="http://schemas.microsoft.com/office/drawing/2014/main" val="1855649917"/>
                     </a:ext>
                   </a:extLst>
                 </a:gridCol>
-                <a:gridCol w="764532">
+                <a:gridCol w="1449199">
+                  <a:extLst>
+                    <a:ext uri="{9D8B030D-6E8A-4147-A177-3AD203B41FA5}">
+                      <a16:colId xmlns:a16="http://schemas.microsoft.com/office/drawing/2014/main" val="2553423217"/>
+                    </a:ext>
+                  </a:extLst>
+                </a:gridCol>
+                <a:gridCol w="1449199">
+                  <a:extLst>
+                    <a:ext uri="{9D8B030D-6E8A-4147-A177-3AD203B41FA5}">
+                      <a16:colId xmlns:a16="http://schemas.microsoft.com/office/drawing/2014/main" val="4289153929"/>
+                    </a:ext>
+                  </a:extLst>
+                </a:gridCol>
+                <a:gridCol w="1449199">
+                  <a:extLst>
+                    <a:ext uri="{9D8B030D-6E8A-4147-A177-3AD203B41FA5}">
+                      <a16:colId xmlns:a16="http://schemas.microsoft.com/office/drawing/2014/main" val="3706998436"/>
+                    </a:ext>
+                  </a:extLst>
+                </a:gridCol>
+                <a:gridCol w="265858">
                   <a:extLst>
                     <a:ext uri="{9D8B030D-6E8A-4147-A177-3AD203B41FA5}">
                       <a16:colId xmlns:a16="http://schemas.microsoft.com/office/drawing/2014/main" val="2220294652"/>
                     </a:ext>
                   </a:extLst>
                 </a:gridCol>
-                <a:gridCol w="788055">
+                <a:gridCol w="274038">
                   <a:extLst>
                     <a:ext uri="{9D8B030D-6E8A-4147-A177-3AD203B41FA5}">
                       <a16:colId xmlns:a16="http://schemas.microsoft.com/office/drawing/2014/main" val="273073370"/>
+                    </a:ext>
+                  </a:extLst>
+                </a:gridCol>
+                <a:gridCol w="274038">
+                  <a:extLst>
+                    <a:ext uri="{9D8B030D-6E8A-4147-A177-3AD203B41FA5}">
+                      <a16:colId xmlns:a16="http://schemas.microsoft.com/office/drawing/2014/main" val="1662952939"/>
+                    </a:ext>
+                  </a:extLst>
+                </a:gridCol>
+                <a:gridCol w="274038">
+                  <a:extLst>
+                    <a:ext uri="{9D8B030D-6E8A-4147-A177-3AD203B41FA5}">
+                      <a16:colId xmlns:a16="http://schemas.microsoft.com/office/drawing/2014/main" val="3276163194"/>
                     </a:ext>
                   </a:extLst>
                 </a:gridCol>
@@ -16345,6 +16380,75 @@
                     <a:lstStyle/>
                     <a:p>
                       <a:pPr marL="0" algn="ctr" defTabSz="914400" rtl="0" eaLnBrk="1" fontAlgn="b" latinLnBrk="0" hangingPunct="1"/>
+                      <a:endParaRPr lang="en-US" sz="1200" b="1" u="none" strike="noStrike" kern="1200" dirty="0">
+                        <a:solidFill>
+                          <a:schemeClr val="bg1"/>
+                        </a:solidFill>
+                        <a:effectLst/>
+                        <a:latin typeface="+mn-lt"/>
+                        <a:ea typeface="+mn-ea"/>
+                        <a:cs typeface="+mn-cs"/>
+                      </a:endParaRPr>
+                    </a:p>
+                  </a:txBody>
+                  <a:tcPr marL="4778" marR="4778" marT="4778" marB="0" anchor="ctr">
+                    <a:solidFill>
+                      <a:schemeClr val="accent6"/>
+                    </a:solidFill>
+                  </a:tcPr>
+                </a:tc>
+                <a:tc>
+                  <a:txBody>
+                    <a:bodyPr/>
+                    <a:lstStyle/>
+                    <a:p>
+                      <a:pPr marL="0" algn="ctr" defTabSz="914400" rtl="0" eaLnBrk="1" fontAlgn="b" latinLnBrk="0" hangingPunct="1"/>
+                      <a:endParaRPr lang="en-US" sz="1200" b="1" u="none" strike="noStrike" kern="1200" dirty="0">
+                        <a:solidFill>
+                          <a:schemeClr val="bg1"/>
+                        </a:solidFill>
+                        <a:effectLst/>
+                        <a:latin typeface="+mn-lt"/>
+                        <a:ea typeface="+mn-ea"/>
+                        <a:cs typeface="+mn-cs"/>
+                      </a:endParaRPr>
+                    </a:p>
+                  </a:txBody>
+                  <a:tcPr marL="4778" marR="4778" marT="4778" marB="0" anchor="ctr">
+                    <a:solidFill>
+                      <a:schemeClr val="accent6"/>
+                    </a:solidFill>
+                  </a:tcPr>
+                </a:tc>
+                <a:tc>
+                  <a:txBody>
+                    <a:bodyPr/>
+                    <a:lstStyle/>
+                    <a:p>
+                      <a:pPr marL="0" algn="ctr" defTabSz="914400" rtl="0" eaLnBrk="1" fontAlgn="b" latinLnBrk="0" hangingPunct="1"/>
+                      <a:endParaRPr lang="en-US" sz="1200" b="1" u="none" strike="noStrike" kern="1200" dirty="0">
+                        <a:solidFill>
+                          <a:schemeClr val="bg1"/>
+                        </a:solidFill>
+                        <a:effectLst/>
+                        <a:latin typeface="+mn-lt"/>
+                        <a:ea typeface="+mn-ea"/>
+                        <a:cs typeface="+mn-cs"/>
+                      </a:endParaRPr>
+                    </a:p>
+                  </a:txBody>
+                  <a:tcPr marL="4778" marR="4778" marT="4778" marB="0" anchor="ctr">
+                    <a:solidFill>
+                      <a:schemeClr val="accent6"/>
+                    </a:solidFill>
+                  </a:tcPr>
+                </a:tc>
+                <a:tc>
+                  <a:txBody>
+                    <a:bodyPr/>
+                    <a:lstStyle/>
+                    <a:p>
+                      <a:pPr marL="0" algn="ctr" defTabSz="914400" rtl="0" eaLnBrk="1" fontAlgn="b" latinLnBrk="0" hangingPunct="1"/>
                       <a:r>
                         <a:rPr lang="en-US" sz="1200" b="1" u="none" strike="noStrike" kern="1200" dirty="0">
                           <a:solidFill>
@@ -16383,6 +16487,52 @@
                         </a:rPr>
                         <a:t>CTR</a:t>
                       </a:r>
+                    </a:p>
+                  </a:txBody>
+                  <a:tcPr marL="4778" marR="4778" marT="4778" marB="0" anchor="ctr">
+                    <a:solidFill>
+                      <a:schemeClr val="accent6"/>
+                    </a:solidFill>
+                  </a:tcPr>
+                </a:tc>
+                <a:tc>
+                  <a:txBody>
+                    <a:bodyPr/>
+                    <a:lstStyle/>
+                    <a:p>
+                      <a:pPr marL="0" algn="ctr" defTabSz="914400" rtl="0" eaLnBrk="1" fontAlgn="b" latinLnBrk="0" hangingPunct="1"/>
+                      <a:endParaRPr lang="en-US" sz="1200" b="1" u="none" strike="noStrike" kern="1200" dirty="0">
+                        <a:solidFill>
+                          <a:schemeClr val="bg1"/>
+                        </a:solidFill>
+                        <a:effectLst/>
+                        <a:latin typeface="+mn-lt"/>
+                        <a:ea typeface="+mn-ea"/>
+                        <a:cs typeface="+mn-cs"/>
+                      </a:endParaRPr>
+                    </a:p>
+                  </a:txBody>
+                  <a:tcPr marL="4778" marR="4778" marT="4778" marB="0" anchor="ctr">
+                    <a:solidFill>
+                      <a:schemeClr val="accent6"/>
+                    </a:solidFill>
+                  </a:tcPr>
+                </a:tc>
+                <a:tc>
+                  <a:txBody>
+                    <a:bodyPr/>
+                    <a:lstStyle/>
+                    <a:p>
+                      <a:pPr marL="0" algn="ctr" defTabSz="914400" rtl="0" eaLnBrk="1" fontAlgn="b" latinLnBrk="0" hangingPunct="1"/>
+                      <a:endParaRPr lang="en-US" sz="1200" b="1" u="none" strike="noStrike" kern="1200" dirty="0">
+                        <a:solidFill>
+                          <a:schemeClr val="bg1"/>
+                        </a:solidFill>
+                        <a:effectLst/>
+                        <a:latin typeface="+mn-lt"/>
+                        <a:ea typeface="+mn-ea"/>
+                        <a:cs typeface="+mn-cs"/>
+                      </a:endParaRPr>
                     </a:p>
                   </a:txBody>
                   <a:tcPr marL="4778" marR="4778" marT="4778" marB="0" anchor="ctr">
@@ -16475,6 +16625,63 @@
                     <a:bodyPr/>
                     <a:lstStyle/>
                     <a:p>
+                      <a:pPr algn="ctr" fontAlgn="t"/>
+                      <a:endParaRPr lang="en-US" sz="1200" b="0" i="0" u="none" strike="noStrike" kern="1200" dirty="0">
+                        <a:solidFill>
+                          <a:schemeClr val="tx1"/>
+                        </a:solidFill>
+                        <a:effectLst/>
+                        <a:latin typeface="+mn-lt"/>
+                        <a:ea typeface="+mn-ea"/>
+                        <a:cs typeface="Calibri" panose="020F0502020204030204" pitchFamily="34" charset="0"/>
+                      </a:endParaRPr>
+                    </a:p>
+                  </a:txBody>
+                  <a:tcPr anchor="ctr"/>
+                </a:tc>
+                <a:tc>
+                  <a:txBody>
+                    <a:bodyPr/>
+                    <a:lstStyle/>
+                    <a:p>
+                      <a:pPr algn="ctr" fontAlgn="t"/>
+                      <a:endParaRPr lang="en-US" sz="1200" b="0" i="0" u="none" strike="noStrike" kern="1200" dirty="0">
+                        <a:solidFill>
+                          <a:schemeClr val="tx1"/>
+                        </a:solidFill>
+                        <a:effectLst/>
+                        <a:latin typeface="+mn-lt"/>
+                        <a:ea typeface="+mn-ea"/>
+                        <a:cs typeface="Calibri" panose="020F0502020204030204" pitchFamily="34" charset="0"/>
+                      </a:endParaRPr>
+                    </a:p>
+                  </a:txBody>
+                  <a:tcPr anchor="ctr"/>
+                </a:tc>
+                <a:tc>
+                  <a:txBody>
+                    <a:bodyPr/>
+                    <a:lstStyle/>
+                    <a:p>
+                      <a:pPr algn="ctr" fontAlgn="t"/>
+                      <a:endParaRPr lang="en-US" sz="1200" b="0" i="0" u="none" strike="noStrike" kern="1200" dirty="0">
+                        <a:solidFill>
+                          <a:schemeClr val="tx1"/>
+                        </a:solidFill>
+                        <a:effectLst/>
+                        <a:latin typeface="+mn-lt"/>
+                        <a:ea typeface="+mn-ea"/>
+                        <a:cs typeface="Calibri" panose="020F0502020204030204" pitchFamily="34" charset="0"/>
+                      </a:endParaRPr>
+                    </a:p>
+                  </a:txBody>
+                  <a:tcPr anchor="ctr"/>
+                </a:tc>
+                <a:tc>
+                  <a:txBody>
+                    <a:bodyPr/>
+                    <a:lstStyle/>
+                    <a:p>
                       <a:pPr algn="ctr" fontAlgn="b"/>
                       <a:r>
                         <a:rPr lang="en-US" sz="1200" b="0" i="0" u="none" strike="noStrike" dirty="0">
@@ -16516,6 +16723,42 @@
                         </a:rPr>
                         <a:t>insert</a:t>
                       </a:r>
+                      <a:endParaRPr lang="en-US" sz="1200" b="0" i="0" u="none" strike="noStrike" dirty="0">
+                        <a:solidFill>
+                          <a:srgbClr val="000000"/>
+                        </a:solidFill>
+                        <a:effectLst/>
+                        <a:latin typeface="+mn-lt"/>
+                        <a:cs typeface="Calibri" panose="020F0502020204030204" pitchFamily="34" charset="0"/>
+                      </a:endParaRPr>
+                    </a:p>
+                  </a:txBody>
+                  <a:tcPr marL="0" marR="0" marT="0" marB="0" anchor="ctr"/>
+                </a:tc>
+                <a:tc>
+                  <a:txBody>
+                    <a:bodyPr/>
+                    <a:lstStyle/>
+                    <a:p>
+                      <a:pPr algn="ctr" fontAlgn="b"/>
+                      <a:endParaRPr lang="en-US" sz="1200" b="0" i="0" u="none" strike="noStrike" dirty="0">
+                        <a:solidFill>
+                          <a:srgbClr val="000000"/>
+                        </a:solidFill>
+                        <a:effectLst/>
+                        <a:latin typeface="+mn-lt"/>
+                        <a:cs typeface="Calibri" panose="020F0502020204030204" pitchFamily="34" charset="0"/>
+                      </a:endParaRPr>
+                    </a:p>
+                  </a:txBody>
+                  <a:tcPr marL="0" marR="0" marT="0" marB="0" anchor="ctr"/>
+                </a:tc>
+                <a:tc>
+                  <a:txBody>
+                    <a:bodyPr/>
+                    <a:lstStyle/>
+                    <a:p>
+                      <a:pPr algn="ctr" fontAlgn="b"/>
                       <a:endParaRPr lang="en-US" sz="1200" b="0" i="0" u="none" strike="noStrike" dirty="0">
                         <a:solidFill>
                           <a:srgbClr val="000000"/>
@@ -16624,6 +16867,75 @@
                     <a:bodyPr/>
                     <a:lstStyle/>
                     <a:p>
+                      <a:pPr algn="ctr" fontAlgn="t"/>
+                      <a:endParaRPr lang="en-US" sz="1200" b="0" i="0" u="none" strike="noStrike" kern="1200" dirty="0">
+                        <a:solidFill>
+                          <a:schemeClr val="tx1"/>
+                        </a:solidFill>
+                        <a:effectLst/>
+                        <a:latin typeface="+mn-lt"/>
+                        <a:ea typeface="+mn-ea"/>
+                        <a:cs typeface="Calibri" panose="020F0502020204030204" pitchFamily="34" charset="0"/>
+                      </a:endParaRPr>
+                    </a:p>
+                  </a:txBody>
+                  <a:tcPr anchor="ctr">
+                    <a:solidFill>
+                      <a:schemeClr val="bg2"/>
+                    </a:solidFill>
+                  </a:tcPr>
+                </a:tc>
+                <a:tc>
+                  <a:txBody>
+                    <a:bodyPr/>
+                    <a:lstStyle/>
+                    <a:p>
+                      <a:pPr algn="ctr" fontAlgn="t"/>
+                      <a:endParaRPr lang="en-US" sz="1200" b="0" i="0" u="none" strike="noStrike" kern="1200" dirty="0">
+                        <a:solidFill>
+                          <a:schemeClr val="tx1"/>
+                        </a:solidFill>
+                        <a:effectLst/>
+                        <a:latin typeface="+mn-lt"/>
+                        <a:ea typeface="+mn-ea"/>
+                        <a:cs typeface="Calibri" panose="020F0502020204030204" pitchFamily="34" charset="0"/>
+                      </a:endParaRPr>
+                    </a:p>
+                  </a:txBody>
+                  <a:tcPr anchor="ctr">
+                    <a:solidFill>
+                      <a:schemeClr val="bg2"/>
+                    </a:solidFill>
+                  </a:tcPr>
+                </a:tc>
+                <a:tc>
+                  <a:txBody>
+                    <a:bodyPr/>
+                    <a:lstStyle/>
+                    <a:p>
+                      <a:pPr algn="ctr" fontAlgn="t"/>
+                      <a:endParaRPr lang="en-US" sz="1200" b="0" i="0" u="none" strike="noStrike" kern="1200" dirty="0">
+                        <a:solidFill>
+                          <a:schemeClr val="tx1"/>
+                        </a:solidFill>
+                        <a:effectLst/>
+                        <a:latin typeface="+mn-lt"/>
+                        <a:ea typeface="+mn-ea"/>
+                        <a:cs typeface="Calibri" panose="020F0502020204030204" pitchFamily="34" charset="0"/>
+                      </a:endParaRPr>
+                    </a:p>
+                  </a:txBody>
+                  <a:tcPr anchor="ctr">
+                    <a:solidFill>
+                      <a:schemeClr val="bg2"/>
+                    </a:solidFill>
+                  </a:tcPr>
+                </a:tc>
+                <a:tc>
+                  <a:txBody>
+                    <a:bodyPr/>
+                    <a:lstStyle/>
+                    <a:p>
                       <a:pPr algn="ctr" fontAlgn="b"/>
                       <a:r>
                         <a:rPr lang="en-US" sz="1200" b="0" i="0" u="none" strike="noStrike" dirty="0">
@@ -16669,6 +16981,50 @@
                         </a:rPr>
                         <a:t>insert</a:t>
                       </a:r>
+                      <a:endParaRPr lang="en-US" sz="1200" b="0" i="0" u="none" strike="noStrike" dirty="0">
+                        <a:solidFill>
+                          <a:srgbClr val="000000"/>
+                        </a:solidFill>
+                        <a:effectLst/>
+                        <a:latin typeface="+mn-lt"/>
+                        <a:cs typeface="Calibri" panose="020F0502020204030204" pitchFamily="34" charset="0"/>
+                      </a:endParaRPr>
+                    </a:p>
+                  </a:txBody>
+                  <a:tcPr marL="0" marR="0" marT="0" marB="0" anchor="ctr">
+                    <a:solidFill>
+                      <a:schemeClr val="bg2"/>
+                    </a:solidFill>
+                  </a:tcPr>
+                </a:tc>
+                <a:tc>
+                  <a:txBody>
+                    <a:bodyPr/>
+                    <a:lstStyle/>
+                    <a:p>
+                      <a:pPr algn="ctr" fontAlgn="b"/>
+                      <a:endParaRPr lang="en-US" sz="1200" b="0" i="0" u="none" strike="noStrike" dirty="0">
+                        <a:solidFill>
+                          <a:srgbClr val="000000"/>
+                        </a:solidFill>
+                        <a:effectLst/>
+                        <a:latin typeface="+mn-lt"/>
+                        <a:cs typeface="Calibri" panose="020F0502020204030204" pitchFamily="34" charset="0"/>
+                      </a:endParaRPr>
+                    </a:p>
+                  </a:txBody>
+                  <a:tcPr marL="0" marR="0" marT="0" marB="0" anchor="ctr">
+                    <a:solidFill>
+                      <a:schemeClr val="bg2"/>
+                    </a:solidFill>
+                  </a:tcPr>
+                </a:tc>
+                <a:tc>
+                  <a:txBody>
+                    <a:bodyPr/>
+                    <a:lstStyle/>
+                    <a:p>
+                      <a:pPr algn="ctr" fontAlgn="b"/>
                       <a:endParaRPr lang="en-US" sz="1200" b="0" i="0" u="none" strike="noStrike" dirty="0">
                         <a:solidFill>
                           <a:srgbClr val="000000"/>
@@ -16769,6 +17125,63 @@
                     <a:bodyPr/>
                     <a:lstStyle/>
                     <a:p>
+                      <a:pPr algn="ctr" fontAlgn="t"/>
+                      <a:endParaRPr lang="en-US" sz="1200" b="0" i="0" u="none" strike="noStrike" kern="1200" dirty="0">
+                        <a:solidFill>
+                          <a:schemeClr val="tx1"/>
+                        </a:solidFill>
+                        <a:effectLst/>
+                        <a:latin typeface="+mn-lt"/>
+                        <a:ea typeface="+mn-ea"/>
+                        <a:cs typeface="Calibri" panose="020F0502020204030204" pitchFamily="34" charset="0"/>
+                      </a:endParaRPr>
+                    </a:p>
+                  </a:txBody>
+                  <a:tcPr anchor="ctr"/>
+                </a:tc>
+                <a:tc>
+                  <a:txBody>
+                    <a:bodyPr/>
+                    <a:lstStyle/>
+                    <a:p>
+                      <a:pPr algn="ctr" fontAlgn="t"/>
+                      <a:endParaRPr lang="en-US" sz="1200" b="0" i="0" u="none" strike="noStrike" kern="1200" dirty="0">
+                        <a:solidFill>
+                          <a:schemeClr val="tx1"/>
+                        </a:solidFill>
+                        <a:effectLst/>
+                        <a:latin typeface="+mn-lt"/>
+                        <a:ea typeface="+mn-ea"/>
+                        <a:cs typeface="Calibri" panose="020F0502020204030204" pitchFamily="34" charset="0"/>
+                      </a:endParaRPr>
+                    </a:p>
+                  </a:txBody>
+                  <a:tcPr anchor="ctr"/>
+                </a:tc>
+                <a:tc>
+                  <a:txBody>
+                    <a:bodyPr/>
+                    <a:lstStyle/>
+                    <a:p>
+                      <a:pPr algn="ctr" fontAlgn="t"/>
+                      <a:endParaRPr lang="en-US" sz="1200" b="0" i="0" u="none" strike="noStrike" kern="1200" dirty="0">
+                        <a:solidFill>
+                          <a:schemeClr val="tx1"/>
+                        </a:solidFill>
+                        <a:effectLst/>
+                        <a:latin typeface="+mn-lt"/>
+                        <a:ea typeface="+mn-ea"/>
+                        <a:cs typeface="Calibri" panose="020F0502020204030204" pitchFamily="34" charset="0"/>
+                      </a:endParaRPr>
+                    </a:p>
+                  </a:txBody>
+                  <a:tcPr anchor="ctr"/>
+                </a:tc>
+                <a:tc>
+                  <a:txBody>
+                    <a:bodyPr/>
+                    <a:lstStyle/>
+                    <a:p>
                       <a:pPr algn="ctr" fontAlgn="b"/>
                       <a:r>
                         <a:rPr lang="en-US" sz="1200" b="0" i="0" u="none" strike="noStrike" dirty="0">
@@ -16810,6 +17223,42 @@
                         </a:rPr>
                         <a:t>insert</a:t>
                       </a:r>
+                      <a:endParaRPr lang="en-US" sz="1200" b="0" i="0" u="none" strike="noStrike" dirty="0">
+                        <a:solidFill>
+                          <a:srgbClr val="000000"/>
+                        </a:solidFill>
+                        <a:effectLst/>
+                        <a:latin typeface="+mn-lt"/>
+                        <a:cs typeface="Calibri" panose="020F0502020204030204" pitchFamily="34" charset="0"/>
+                      </a:endParaRPr>
+                    </a:p>
+                  </a:txBody>
+                  <a:tcPr marL="0" marR="0" marT="0" marB="0" anchor="ctr"/>
+                </a:tc>
+                <a:tc>
+                  <a:txBody>
+                    <a:bodyPr/>
+                    <a:lstStyle/>
+                    <a:p>
+                      <a:pPr algn="ctr" fontAlgn="b"/>
+                      <a:endParaRPr lang="en-US" sz="1200" b="0" i="0" u="none" strike="noStrike" dirty="0">
+                        <a:solidFill>
+                          <a:srgbClr val="000000"/>
+                        </a:solidFill>
+                        <a:effectLst/>
+                        <a:latin typeface="+mn-lt"/>
+                        <a:cs typeface="Calibri" panose="020F0502020204030204" pitchFamily="34" charset="0"/>
+                      </a:endParaRPr>
+                    </a:p>
+                  </a:txBody>
+                  <a:tcPr marL="0" marR="0" marT="0" marB="0" anchor="ctr"/>
+                </a:tc>
+                <a:tc>
+                  <a:txBody>
+                    <a:bodyPr/>
+                    <a:lstStyle/>
+                    <a:p>
+                      <a:pPr algn="ctr" fontAlgn="b"/>
                       <a:endParaRPr lang="en-US" sz="1200" b="0" i="0" u="none" strike="noStrike" dirty="0">
                         <a:solidFill>
                           <a:srgbClr val="000000"/>
@@ -16918,6 +17367,75 @@
                     <a:bodyPr/>
                     <a:lstStyle/>
                     <a:p>
+                      <a:pPr algn="ctr" fontAlgn="t"/>
+                      <a:endParaRPr lang="en-US" sz="1200" b="0" i="0" u="none" strike="noStrike" kern="1200" dirty="0">
+                        <a:solidFill>
+                          <a:schemeClr val="tx1"/>
+                        </a:solidFill>
+                        <a:effectLst/>
+                        <a:latin typeface="+mn-lt"/>
+                        <a:ea typeface="+mn-ea"/>
+                        <a:cs typeface="Calibri" panose="020F0502020204030204" pitchFamily="34" charset="0"/>
+                      </a:endParaRPr>
+                    </a:p>
+                  </a:txBody>
+                  <a:tcPr anchor="ctr">
+                    <a:solidFill>
+                      <a:schemeClr val="bg2"/>
+                    </a:solidFill>
+                  </a:tcPr>
+                </a:tc>
+                <a:tc>
+                  <a:txBody>
+                    <a:bodyPr/>
+                    <a:lstStyle/>
+                    <a:p>
+                      <a:pPr algn="ctr" fontAlgn="t"/>
+                      <a:endParaRPr lang="en-US" sz="1200" b="0" i="0" u="none" strike="noStrike" kern="1200" dirty="0">
+                        <a:solidFill>
+                          <a:schemeClr val="tx1"/>
+                        </a:solidFill>
+                        <a:effectLst/>
+                        <a:latin typeface="+mn-lt"/>
+                        <a:ea typeface="+mn-ea"/>
+                        <a:cs typeface="Calibri" panose="020F0502020204030204" pitchFamily="34" charset="0"/>
+                      </a:endParaRPr>
+                    </a:p>
+                  </a:txBody>
+                  <a:tcPr anchor="ctr">
+                    <a:solidFill>
+                      <a:schemeClr val="bg2"/>
+                    </a:solidFill>
+                  </a:tcPr>
+                </a:tc>
+                <a:tc>
+                  <a:txBody>
+                    <a:bodyPr/>
+                    <a:lstStyle/>
+                    <a:p>
+                      <a:pPr algn="ctr" fontAlgn="t"/>
+                      <a:endParaRPr lang="en-US" sz="1200" b="0" i="0" u="none" strike="noStrike" kern="1200" dirty="0">
+                        <a:solidFill>
+                          <a:schemeClr val="tx1"/>
+                        </a:solidFill>
+                        <a:effectLst/>
+                        <a:latin typeface="+mn-lt"/>
+                        <a:ea typeface="+mn-ea"/>
+                        <a:cs typeface="Calibri" panose="020F0502020204030204" pitchFamily="34" charset="0"/>
+                      </a:endParaRPr>
+                    </a:p>
+                  </a:txBody>
+                  <a:tcPr anchor="ctr">
+                    <a:solidFill>
+                      <a:schemeClr val="bg2"/>
+                    </a:solidFill>
+                  </a:tcPr>
+                </a:tc>
+                <a:tc>
+                  <a:txBody>
+                    <a:bodyPr/>
+                    <a:lstStyle/>
+                    <a:p>
                       <a:pPr algn="ctr" fontAlgn="b"/>
                       <a:r>
                         <a:rPr lang="en-US" sz="1200" b="0" i="0" u="none" strike="noStrike" dirty="0">
@@ -16963,6 +17481,50 @@
                         </a:rPr>
                         <a:t>insert</a:t>
                       </a:r>
+                      <a:endParaRPr lang="en-US" sz="1200" b="0" i="0" u="none" strike="noStrike" dirty="0">
+                        <a:solidFill>
+                          <a:srgbClr val="000000"/>
+                        </a:solidFill>
+                        <a:effectLst/>
+                        <a:latin typeface="+mn-lt"/>
+                        <a:cs typeface="Calibri" panose="020F0502020204030204" pitchFamily="34" charset="0"/>
+                      </a:endParaRPr>
+                    </a:p>
+                  </a:txBody>
+                  <a:tcPr marL="0" marR="0" marT="0" marB="0" anchor="ctr">
+                    <a:solidFill>
+                      <a:schemeClr val="bg2"/>
+                    </a:solidFill>
+                  </a:tcPr>
+                </a:tc>
+                <a:tc>
+                  <a:txBody>
+                    <a:bodyPr/>
+                    <a:lstStyle/>
+                    <a:p>
+                      <a:pPr algn="ctr" fontAlgn="b"/>
+                      <a:endParaRPr lang="en-US" sz="1200" b="0" i="0" u="none" strike="noStrike" dirty="0">
+                        <a:solidFill>
+                          <a:srgbClr val="000000"/>
+                        </a:solidFill>
+                        <a:effectLst/>
+                        <a:latin typeface="+mn-lt"/>
+                        <a:cs typeface="Calibri" panose="020F0502020204030204" pitchFamily="34" charset="0"/>
+                      </a:endParaRPr>
+                    </a:p>
+                  </a:txBody>
+                  <a:tcPr marL="0" marR="0" marT="0" marB="0" anchor="ctr">
+                    <a:solidFill>
+                      <a:schemeClr val="bg2"/>
+                    </a:solidFill>
+                  </a:tcPr>
+                </a:tc>
+                <a:tc>
+                  <a:txBody>
+                    <a:bodyPr/>
+                    <a:lstStyle/>
+                    <a:p>
+                      <a:pPr algn="ctr" fontAlgn="b"/>
                       <a:endParaRPr lang="en-US" sz="1200" b="0" i="0" u="none" strike="noStrike" dirty="0">
                         <a:solidFill>
                           <a:srgbClr val="000000"/>
@@ -18767,17 +19329,6 @@
 </file>
 
 <file path=customXml/item2.xml><?xml version="1.0" encoding="utf-8"?>
-<p:properties xmlns:p="http://schemas.microsoft.com/office/2006/metadata/properties" xmlns:xsi="http://www.w3.org/2001/XMLSchema-instance" xmlns:pc="http://schemas.microsoft.com/office/infopath/2007/PartnerControls">
-  <documentManagement>
-    <lcf76f155ced4ddcb4097134ff3c332f xmlns="7114f878-0223-480d-a325-1373c6d0223b">
-      <Terms xmlns="http://schemas.microsoft.com/office/infopath/2007/PartnerControls"/>
-    </lcf76f155ced4ddcb4097134ff3c332f>
-    <TaxCatchAll xmlns="599183fe-bfa3-49f1-b3c6-3d50208c56e4" xsi:nil="true"/>
-  </documentManagement>
-</p:properties>
-</file>
-
-<file path=customXml/item3.xml><?xml version="1.0" encoding="utf-8"?>
 <ct:contentTypeSchema xmlns:ct="http://schemas.microsoft.com/office/2006/metadata/contentType" xmlns:ma="http://schemas.microsoft.com/office/2006/metadata/properties/metaAttributes" ct:_="" ma:_="" ma:contentTypeName="Document" ma:contentTypeID="0x010100DECEB3BBE86464488AD4A21F5C4B0058" ma:contentTypeVersion="14" ma:contentTypeDescription="Create a new document." ma:contentTypeScope="" ma:versionID="a7cc634175b1809f3343f27805d6d95a">
   <xsd:schema xmlns:xsd="http://www.w3.org/2001/XMLSchema" xmlns:xs="http://www.w3.org/2001/XMLSchema" xmlns:p="http://schemas.microsoft.com/office/2006/metadata/properties" xmlns:ns2="7114f878-0223-480d-a325-1373c6d0223b" xmlns:ns3="599183fe-bfa3-49f1-b3c6-3d50208c56e4" targetNamespace="http://schemas.microsoft.com/office/2006/metadata/properties" ma:root="true" ma:fieldsID="eae47b09d137326483c8116c39f5c3ec" ns2:_="" ns3:_="">
     <xsd:import namespace="7114f878-0223-480d-a325-1373c6d0223b"/>
@@ -18990,6 +19541,17 @@
 </ct:contentTypeSchema>
 </file>
 
+<file path=customXml/item3.xml><?xml version="1.0" encoding="utf-8"?>
+<p:properties xmlns:p="http://schemas.microsoft.com/office/2006/metadata/properties" xmlns:xsi="http://www.w3.org/2001/XMLSchema-instance" xmlns:pc="http://schemas.microsoft.com/office/infopath/2007/PartnerControls">
+  <documentManagement>
+    <lcf76f155ced4ddcb4097134ff3c332f xmlns="7114f878-0223-480d-a325-1373c6d0223b">
+      <Terms xmlns="http://schemas.microsoft.com/office/infopath/2007/PartnerControls"/>
+    </lcf76f155ced4ddcb4097134ff3c332f>
+    <TaxCatchAll xmlns="599183fe-bfa3-49f1-b3c6-3d50208c56e4" xsi:nil="true"/>
+  </documentManagement>
+</p:properties>
+</file>
+
 <file path=customXml/itemProps1.xml><?xml version="1.0" encoding="utf-8"?>
 <ds:datastoreItem xmlns:ds="http://schemas.openxmlformats.org/officeDocument/2006/customXml" ds:itemID="{5421F378-326F-4859-B6C8-701A3512AE1B}">
   <ds:schemaRefs>
@@ -18999,23 +19561,6 @@
 </file>
 
 <file path=customXml/itemProps2.xml><?xml version="1.0" encoding="utf-8"?>
-<ds:datastoreItem xmlns:ds="http://schemas.openxmlformats.org/officeDocument/2006/customXml" ds:itemID="{9DE45B87-9247-4103-B93A-84FCD96EFCA6}">
-  <ds:schemaRefs>
-    <ds:schemaRef ds:uri="http://schemas.openxmlformats.org/package/2006/metadata/core-properties"/>
-    <ds:schemaRef ds:uri="599183fe-bfa3-49f1-b3c6-3d50208c56e4"/>
-    <ds:schemaRef ds:uri="http://purl.org/dc/terms/"/>
-    <ds:schemaRef ds:uri="http://purl.org/dc/elements/1.1/"/>
-    <ds:schemaRef ds:uri="http://schemas.microsoft.com/office/2006/metadata/properties"/>
-    <ds:schemaRef ds:uri="http://schemas.microsoft.com/office/infopath/2007/PartnerControls"/>
-    <ds:schemaRef ds:uri="http://purl.org/dc/dcmitype/"/>
-    <ds:schemaRef ds:uri="http://schemas.microsoft.com/office/2006/documentManagement/types"/>
-    <ds:schemaRef ds:uri="7114f878-0223-480d-a325-1373c6d0223b"/>
-    <ds:schemaRef ds:uri="http://www.w3.org/XML/1998/namespace"/>
-  </ds:schemaRefs>
-</ds:datastoreItem>
-</file>
-
-<file path=customXml/itemProps3.xml><?xml version="1.0" encoding="utf-8"?>
 <ds:datastoreItem xmlns:ds="http://schemas.openxmlformats.org/officeDocument/2006/customXml" ds:itemID="{482D9DB4-ACE5-4817-ACA8-DC09E43D06D0}">
   <ds:schemaRefs>
     <ds:schemaRef ds:uri="599183fe-bfa3-49f1-b3c6-3d50208c56e4"/>
@@ -19032,4 +19577,21 @@
     <ds:schemaRef ds:uri="http://www.w3.org/2001/XMLSchema"/>
   </ds:schemaRefs>
 </ds:datastoreItem>
+</file>
+
+<file path=customXml/itemProps3.xml><?xml version="1.0" encoding="utf-8"?>
+<ds:datastoreItem xmlns:ds="http://schemas.openxmlformats.org/officeDocument/2006/customXml" ds:itemID="{9DE45B87-9247-4103-B93A-84FCD96EFCA6}">
+  <ds:schemaRefs>
+    <ds:schemaRef ds:uri="http://schemas.openxmlformats.org/package/2006/metadata/core-properties"/>
+    <ds:schemaRef ds:uri="599183fe-bfa3-49f1-b3c6-3d50208c56e4"/>
+    <ds:schemaRef ds:uri="http://purl.org/dc/terms/"/>
+    <ds:schemaRef ds:uri="http://purl.org/dc/elements/1.1/"/>
+    <ds:schemaRef ds:uri="http://schemas.microsoft.com/office/2006/metadata/properties"/>
+    <ds:schemaRef ds:uri="http://schemas.microsoft.com/office/infopath/2007/PartnerControls"/>
+    <ds:schemaRef ds:uri="http://purl.org/dc/dcmitype/"/>
+    <ds:schemaRef ds:uri="http://schemas.microsoft.com/office/2006/documentManagement/types"/>
+    <ds:schemaRef ds:uri="7114f878-0223-480d-a325-1373c6d0223b"/>
+    <ds:schemaRef ds:uri="http://www.w3.org/XML/1998/namespace"/>
+  </ds:schemaRefs>
+</ds:datastoreItem>
 </file>
--- a/template.pptx
+++ b/template.pptx
@@ -8,15 +8,16 @@
     <p:sldMasterId id="2147484001" r:id="rId7"/>
   </p:sldMasterIdLst>
   <p:notesMasterIdLst>
-    <p:notesMasterId r:id="rId11"/>
+    <p:notesMasterId r:id="rId12"/>
   </p:notesMasterIdLst>
   <p:handoutMasterIdLst>
-    <p:handoutMasterId r:id="rId12"/>
+    <p:handoutMasterId r:id="rId13"/>
   </p:handoutMasterIdLst>
   <p:sldIdLst>
     <p:sldId id="2147481217" r:id="rId8"/>
     <p:sldId id="371" r:id="rId9"/>
     <p:sldId id="2147481213" r:id="rId10"/>
+    <p:sldId id="2147481218" r:id="rId11"/>
   </p:sldIdLst>
   <p:sldSz cx="12192000" cy="6858000"/>
   <p:notesSz cx="6858000" cy="9144000"/>
@@ -212,8 +213,7 @@
 <file path=ppt/revisionInfo.xml><?xml version="1.0" encoding="utf-8"?>
 <p1510:revInfo xmlns:a="http://schemas.openxmlformats.org/drawingml/2006/main" xmlns:r="http://schemas.openxmlformats.org/officeDocument/2006/relationships" xmlns:p1510="http://schemas.microsoft.com/office/powerpoint/2015/10/main">
   <p1510:revLst>
-    <p1510:client id="{3AD00030-EE6A-BE42-8252-30ED1B984238}" v="10" dt="2025-10-20T16:32:16.346"/>
-    <p1510:client id="{798B7DF1-DD72-B24C-B2F9-0205C11665D9}" v="15" dt="2025-10-20T16:59:44.149"/>
+    <p1510:client id="{69B1F2F7-C68D-405E-BF61-9D28334E327E}" v="5" dt="2026-03-02T15:19:45.017"/>
   </p1510:revLst>
 </p1510:revInfo>
 </file>
@@ -221,2862 +221,98 @@
 <file path=ppt/changesInfos/changesInfo1.xml><?xml version="1.0" encoding="utf-8"?>
 <pc:chgInfo xmlns:a="http://schemas.openxmlformats.org/drawingml/2006/main" xmlns:r="http://schemas.openxmlformats.org/officeDocument/2006/relationships" xmlns:ac="http://schemas.microsoft.com/office/drawing/2013/main/command" xmlns:pc="http://schemas.microsoft.com/office/powerpoint/2013/main/command">
   <pc:docChgLst>
-    <pc:chgData name="Hernan Ramirez Diaz" userId="0b0763af-8f1b-4303-84e1-6429285cc810" providerId="ADAL" clId="{2822E497-8A7B-4458-B97C-66D815959D76}"/>
-    <pc:docChg chg="undo redo custSel addSld delSld modSld sldOrd modSection">
-      <pc:chgData name="Hernan Ramirez Diaz" userId="0b0763af-8f1b-4303-84e1-6429285cc810" providerId="ADAL" clId="{2822E497-8A7B-4458-B97C-66D815959D76}" dt="2025-09-02T20:40:05.164" v="28504" actId="20577"/>
+    <pc:chgData name="Casey Lee" userId="4bc459e0-655e-452e-96c2-b918c0999cdb" providerId="ADAL" clId="{D71FFA72-407B-46EE-BB71-C6D17BEEF9AD}"/>
+    <pc:docChg chg="custSel addSld modSld">
+      <pc:chgData name="Casey Lee" userId="4bc459e0-655e-452e-96c2-b918c0999cdb" providerId="ADAL" clId="{D71FFA72-407B-46EE-BB71-C6D17BEEF9AD}" dt="2026-03-02T15:20:53.281" v="76" actId="14734"/>
       <pc:docMkLst>
         <pc:docMk/>
       </pc:docMkLst>
-    </pc:docChg>
-  </pc:docChgLst>
-  <pc:docChgLst>
-    <pc:chgData name="Bilal Othman" userId="f5019779-5bf4-4d33-a04d-492903a8df80" providerId="ADAL" clId="{6AEE4846-9C6E-50AE-9183-DF01E1CFD062}"/>
-    <pc:docChg chg="undo custSel addSld delSld modSld sldOrd addMainMaster delMainMaster modMainMaster addSection delSection modSection">
-      <pc:chgData name="Bilal Othman" userId="f5019779-5bf4-4d33-a04d-492903a8df80" providerId="ADAL" clId="{6AEE4846-9C6E-50AE-9183-DF01E1CFD062}" dt="2025-10-20T16:59:55.421" v="680" actId="207"/>
-      <pc:docMkLst>
-        <pc:docMk/>
-      </pc:docMkLst>
-      <pc:sldChg chg="add del">
-        <pc:chgData name="Bilal Othman" userId="f5019779-5bf4-4d33-a04d-492903a8df80" providerId="ADAL" clId="{6AEE4846-9C6E-50AE-9183-DF01E1CFD062}" dt="2025-10-17T21:12:23.240" v="421" actId="2696"/>
-        <pc:sldMkLst>
-          <pc:docMk/>
-          <pc:sldMk cId="0" sldId="260"/>
-        </pc:sldMkLst>
-      </pc:sldChg>
-      <pc:sldChg chg="add del">
-        <pc:chgData name="Bilal Othman" userId="f5019779-5bf4-4d33-a04d-492903a8df80" providerId="ADAL" clId="{6AEE4846-9C6E-50AE-9183-DF01E1CFD062}" dt="2025-10-17T21:12:10.384" v="381" actId="2696"/>
-        <pc:sldMkLst>
-          <pc:docMk/>
-          <pc:sldMk cId="0" sldId="274"/>
-        </pc:sldMkLst>
-      </pc:sldChg>
-      <pc:sldChg chg="addSp delSp modSp del mod">
-        <pc:chgData name="Bilal Othman" userId="f5019779-5bf4-4d33-a04d-492903a8df80" providerId="ADAL" clId="{6AEE4846-9C6E-50AE-9183-DF01E1CFD062}" dt="2025-10-17T21:25:41.045" v="481" actId="2696"/>
-        <pc:sldMkLst>
-          <pc:docMk/>
-          <pc:sldMk cId="0" sldId="275"/>
-        </pc:sldMkLst>
-      </pc:sldChg>
-      <pc:sldChg chg="add del">
-        <pc:chgData name="Bilal Othman" userId="f5019779-5bf4-4d33-a04d-492903a8df80" providerId="ADAL" clId="{6AEE4846-9C6E-50AE-9183-DF01E1CFD062}" dt="2025-10-17T21:12:23.215" v="408" actId="2696"/>
-        <pc:sldMkLst>
-          <pc:docMk/>
-          <pc:sldMk cId="1802258249" sldId="280"/>
-        </pc:sldMkLst>
-      </pc:sldChg>
-      <pc:sldChg chg="modSp add del mod">
-        <pc:chgData name="Bilal Othman" userId="f5019779-5bf4-4d33-a04d-492903a8df80" providerId="ADAL" clId="{6AEE4846-9C6E-50AE-9183-DF01E1CFD062}" dt="2025-10-17T21:12:10.409" v="385" actId="2696"/>
-        <pc:sldMkLst>
-          <pc:docMk/>
-          <pc:sldMk cId="1694384516" sldId="285"/>
-        </pc:sldMkLst>
-      </pc:sldChg>
-      <pc:sldChg chg="add del">
-        <pc:chgData name="Bilal Othman" userId="f5019779-5bf4-4d33-a04d-492903a8df80" providerId="ADAL" clId="{6AEE4846-9C6E-50AE-9183-DF01E1CFD062}" dt="2025-10-17T21:12:23.264" v="429" actId="2696"/>
-        <pc:sldMkLst>
-          <pc:docMk/>
-          <pc:sldMk cId="2227000735" sldId="307"/>
-        </pc:sldMkLst>
-      </pc:sldChg>
-      <pc:sldChg chg="add del">
-        <pc:chgData name="Bilal Othman" userId="f5019779-5bf4-4d33-a04d-492903a8df80" providerId="ADAL" clId="{6AEE4846-9C6E-50AE-9183-DF01E1CFD062}" dt="2025-10-17T21:12:23.271" v="433" actId="2696"/>
-        <pc:sldMkLst>
-          <pc:docMk/>
-          <pc:sldMk cId="3180984745" sldId="333"/>
-        </pc:sldMkLst>
-      </pc:sldChg>
-      <pc:sldChg chg="add del">
-        <pc:chgData name="Bilal Othman" userId="f5019779-5bf4-4d33-a04d-492903a8df80" providerId="ADAL" clId="{6AEE4846-9C6E-50AE-9183-DF01E1CFD062}" dt="2025-10-17T21:12:23.178" v="400" actId="2696"/>
-        <pc:sldMkLst>
-          <pc:docMk/>
-          <pc:sldMk cId="1946109353" sldId="355"/>
-        </pc:sldMkLst>
-      </pc:sldChg>
-      <pc:sldChg chg="add del">
-        <pc:chgData name="Bilal Othman" userId="f5019779-5bf4-4d33-a04d-492903a8df80" providerId="ADAL" clId="{6AEE4846-9C6E-50AE-9183-DF01E1CFD062}" dt="2025-10-17T21:12:10.364" v="375" actId="2696"/>
-        <pc:sldMkLst>
-          <pc:docMk/>
-          <pc:sldMk cId="3176618820" sldId="370"/>
-        </pc:sldMkLst>
-      </pc:sldChg>
-      <pc:sldChg chg="addSp delSp modSp add del mod">
-        <pc:chgData name="Bilal Othman" userId="f5019779-5bf4-4d33-a04d-492903a8df80" providerId="ADAL" clId="{6AEE4846-9C6E-50AE-9183-DF01E1CFD062}" dt="2025-10-20T16:39:24.671" v="631" actId="207"/>
-        <pc:sldMkLst>
-          <pc:docMk/>
-          <pc:sldMk cId="3441072587" sldId="371"/>
-        </pc:sldMkLst>
-        <pc:spChg chg="add mod">
-          <ac:chgData name="Bilal Othman" userId="f5019779-5bf4-4d33-a04d-492903a8df80" providerId="ADAL" clId="{6AEE4846-9C6E-50AE-9183-DF01E1CFD062}" dt="2025-10-20T16:39:24.671" v="631" actId="207"/>
-          <ac:spMkLst>
-            <pc:docMk/>
-            <pc:sldMk cId="3441072587" sldId="371"/>
-            <ac:spMk id="2" creationId="{9AFF846A-4B6D-D5FA-04C9-ACE00900F5D9}"/>
-          </ac:spMkLst>
-        </pc:spChg>
-        <pc:spChg chg="add mod">
-          <ac:chgData name="Bilal Othman" userId="f5019779-5bf4-4d33-a04d-492903a8df80" providerId="ADAL" clId="{6AEE4846-9C6E-50AE-9183-DF01E1CFD062}" dt="2025-10-20T16:36:41.537" v="629" actId="207"/>
-          <ac:spMkLst>
-            <pc:docMk/>
-            <pc:sldMk cId="3441072587" sldId="371"/>
-            <ac:spMk id="6" creationId="{47CB33DC-E96B-2BE6-C858-5431CAD104D0}"/>
-          </ac:spMkLst>
-        </pc:spChg>
-      </pc:sldChg>
-      <pc:sldChg chg="add del">
-        <pc:chgData name="Bilal Othman" userId="f5019779-5bf4-4d33-a04d-492903a8df80" providerId="ADAL" clId="{6AEE4846-9C6E-50AE-9183-DF01E1CFD062}" dt="2025-10-17T21:12:23.208" v="403" actId="2696"/>
-        <pc:sldMkLst>
-          <pc:docMk/>
-          <pc:sldMk cId="3817856642" sldId="391"/>
-        </pc:sldMkLst>
-      </pc:sldChg>
-      <pc:sldChg chg="add del">
-        <pc:chgData name="Bilal Othman" userId="f5019779-5bf4-4d33-a04d-492903a8df80" providerId="ADAL" clId="{6AEE4846-9C6E-50AE-9183-DF01E1CFD062}" dt="2025-10-17T21:12:23.268" v="432" actId="2696"/>
-        <pc:sldMkLst>
-          <pc:docMk/>
-          <pc:sldMk cId="2675615646" sldId="419"/>
-        </pc:sldMkLst>
-      </pc:sldChg>
-      <pc:sldChg chg="add del">
-        <pc:chgData name="Bilal Othman" userId="f5019779-5bf4-4d33-a04d-492903a8df80" providerId="ADAL" clId="{6AEE4846-9C6E-50AE-9183-DF01E1CFD062}" dt="2025-10-17T21:12:10.331" v="371" actId="2696"/>
-        <pc:sldMkLst>
-          <pc:docMk/>
-          <pc:sldMk cId="1299622664" sldId="434"/>
-        </pc:sldMkLst>
-      </pc:sldChg>
-      <pc:sldChg chg="add del">
-        <pc:chgData name="Bilal Othman" userId="f5019779-5bf4-4d33-a04d-492903a8df80" providerId="ADAL" clId="{6AEE4846-9C6E-50AE-9183-DF01E1CFD062}" dt="2025-10-17T21:12:23.239" v="420" actId="2696"/>
-        <pc:sldMkLst>
-          <pc:docMk/>
-          <pc:sldMk cId="3900277827" sldId="2147478250"/>
-        </pc:sldMkLst>
-      </pc:sldChg>
-      <pc:sldChg chg="add del">
-        <pc:chgData name="Bilal Othman" userId="f5019779-5bf4-4d33-a04d-492903a8df80" providerId="ADAL" clId="{6AEE4846-9C6E-50AE-9183-DF01E1CFD062}" dt="2025-10-17T21:12:23.213" v="406" actId="2696"/>
-        <pc:sldMkLst>
-          <pc:docMk/>
-          <pc:sldMk cId="2066716811" sldId="2147478329"/>
-        </pc:sldMkLst>
-      </pc:sldChg>
-      <pc:sldChg chg="add del">
-        <pc:chgData name="Bilal Othman" userId="f5019779-5bf4-4d33-a04d-492903a8df80" providerId="ADAL" clId="{6AEE4846-9C6E-50AE-9183-DF01E1CFD062}" dt="2025-10-17T21:12:23.228" v="411" actId="2696"/>
-        <pc:sldMkLst>
-          <pc:docMk/>
-          <pc:sldMk cId="679476797" sldId="2147480949"/>
-        </pc:sldMkLst>
-      </pc:sldChg>
-      <pc:sldChg chg="add del">
-        <pc:chgData name="Bilal Othman" userId="f5019779-5bf4-4d33-a04d-492903a8df80" providerId="ADAL" clId="{6AEE4846-9C6E-50AE-9183-DF01E1CFD062}" dt="2025-10-17T21:12:23.236" v="418" actId="2696"/>
-        <pc:sldMkLst>
-          <pc:docMk/>
-          <pc:sldMk cId="2761368814" sldId="2147481181"/>
-        </pc:sldMkLst>
-      </pc:sldChg>
-      <pc:sldChg chg="add del">
-        <pc:chgData name="Bilal Othman" userId="f5019779-5bf4-4d33-a04d-492903a8df80" providerId="ADAL" clId="{6AEE4846-9C6E-50AE-9183-DF01E1CFD062}" dt="2025-10-17T21:12:23.176" v="399" actId="2696"/>
-        <pc:sldMkLst>
-          <pc:docMk/>
-          <pc:sldMk cId="829862625" sldId="2147481206"/>
-        </pc:sldMkLst>
-      </pc:sldChg>
-      <pc:sldChg chg="add del">
-        <pc:chgData name="Bilal Othman" userId="f5019779-5bf4-4d33-a04d-492903a8df80" providerId="ADAL" clId="{6AEE4846-9C6E-50AE-9183-DF01E1CFD062}" dt="2025-10-17T21:12:10.321" v="369" actId="2696"/>
-        <pc:sldMkLst>
-          <pc:docMk/>
-          <pc:sldMk cId="3311923615" sldId="2147481208"/>
-        </pc:sldMkLst>
-      </pc:sldChg>
-      <pc:sldChg chg="add del">
-        <pc:chgData name="Bilal Othman" userId="f5019779-5bf4-4d33-a04d-492903a8df80" providerId="ADAL" clId="{6AEE4846-9C6E-50AE-9183-DF01E1CFD062}" dt="2025-10-17T21:12:23.169" v="395" actId="2696"/>
-        <pc:sldMkLst>
-          <pc:docMk/>
-          <pc:sldMk cId="2128657008" sldId="2147481209"/>
-        </pc:sldMkLst>
-      </pc:sldChg>
-      <pc:sldChg chg="add del">
-        <pc:chgData name="Bilal Othman" userId="f5019779-5bf4-4d33-a04d-492903a8df80" providerId="ADAL" clId="{6AEE4846-9C6E-50AE-9183-DF01E1CFD062}" dt="2025-10-17T21:12:23.263" v="428" actId="2696"/>
-        <pc:sldMkLst>
-          <pc:docMk/>
-          <pc:sldMk cId="1105021549" sldId="2147481210"/>
-        </pc:sldMkLst>
-      </pc:sldChg>
-      <pc:sldChg chg="add del">
-        <pc:chgData name="Bilal Othman" userId="f5019779-5bf4-4d33-a04d-492903a8df80" providerId="ADAL" clId="{6AEE4846-9C6E-50AE-9183-DF01E1CFD062}" dt="2025-10-17T21:12:10.417" v="389" actId="2696"/>
-        <pc:sldMkLst>
-          <pc:docMk/>
-          <pc:sldMk cId="323746144" sldId="2147481211"/>
-        </pc:sldMkLst>
-      </pc:sldChg>
-      <pc:sldChg chg="add del">
-        <pc:chgData name="Bilal Othman" userId="f5019779-5bf4-4d33-a04d-492903a8df80" providerId="ADAL" clId="{6AEE4846-9C6E-50AE-9183-DF01E1CFD062}" dt="2025-10-17T21:12:10.368" v="377" actId="2696"/>
-        <pc:sldMkLst>
-          <pc:docMk/>
-          <pc:sldMk cId="83366420" sldId="2147481212"/>
-        </pc:sldMkLst>
-      </pc:sldChg>
-      <pc:sldChg chg="addSp delSp modSp add del mod">
-        <pc:chgData name="Bilal Othman" userId="f5019779-5bf4-4d33-a04d-492903a8df80" providerId="ADAL" clId="{6AEE4846-9C6E-50AE-9183-DF01E1CFD062}" dt="2025-10-20T16:59:55.421" v="680" actId="207"/>
+      <pc:sldChg chg="modSp mod">
+        <pc:chgData name="Casey Lee" userId="4bc459e0-655e-452e-96c2-b918c0999cdb" providerId="ADAL" clId="{D71FFA72-407B-46EE-BB71-C6D17BEEF9AD}" dt="2026-02-26T14:39:35.841" v="27" actId="20577"/>
         <pc:sldMkLst>
           <pc:docMk/>
           <pc:sldMk cId="1270242671" sldId="2147481213"/>
         </pc:sldMkLst>
         <pc:spChg chg="mod">
-          <ac:chgData name="Bilal Othman" userId="f5019779-5bf4-4d33-a04d-492903a8df80" providerId="ADAL" clId="{6AEE4846-9C6E-50AE-9183-DF01E1CFD062}" dt="2025-10-17T21:26:14.186" v="491" actId="20577"/>
-          <ac:spMkLst>
-            <pc:docMk/>
-            <pc:sldMk cId="1270242671" sldId="2147481213"/>
-            <ac:spMk id="3" creationId="{BF8AA7B9-40BC-BD5B-A38F-B69FFA6E6319}"/>
-          </ac:spMkLst>
-        </pc:spChg>
-        <pc:spChg chg="mod">
-          <ac:chgData name="Bilal Othman" userId="f5019779-5bf4-4d33-a04d-492903a8df80" providerId="ADAL" clId="{6AEE4846-9C6E-50AE-9183-DF01E1CFD062}" dt="2025-10-20T16:32:09.064" v="523" actId="20577"/>
+          <ac:chgData name="Casey Lee" userId="4bc459e0-655e-452e-96c2-b918c0999cdb" providerId="ADAL" clId="{D71FFA72-407B-46EE-BB71-C6D17BEEF9AD}" dt="2026-02-26T14:39:35.841" v="27" actId="20577"/>
           <ac:spMkLst>
             <pc:docMk/>
             <pc:sldMk cId="1270242671" sldId="2147481213"/>
             <ac:spMk id="4" creationId="{F93D6D7D-FF3F-82F6-14A4-6285C0323998}"/>
           </ac:spMkLst>
         </pc:spChg>
-        <pc:spChg chg="add mod">
-          <ac:chgData name="Bilal Othman" userId="f5019779-5bf4-4d33-a04d-492903a8df80" providerId="ADAL" clId="{6AEE4846-9C6E-50AE-9183-DF01E1CFD062}" dt="2025-10-20T16:54:38.276" v="652" actId="14100"/>
-          <ac:spMkLst>
-            <pc:docMk/>
-            <pc:sldMk cId="1270242671" sldId="2147481213"/>
-            <ac:spMk id="5" creationId="{38A0FEB5-AD07-F9CD-2A9B-9560EF304ED8}"/>
-          </ac:spMkLst>
-        </pc:spChg>
-        <pc:spChg chg="add del">
-          <ac:chgData name="Bilal Othman" userId="f5019779-5bf4-4d33-a04d-492903a8df80" providerId="ADAL" clId="{6AEE4846-9C6E-50AE-9183-DF01E1CFD062}" dt="2025-10-20T16:35:49.462" v="599" actId="22"/>
-          <ac:spMkLst>
-            <pc:docMk/>
-            <pc:sldMk cId="1270242671" sldId="2147481213"/>
-            <ac:spMk id="7" creationId="{7871C131-5BC9-E834-CEBE-301444A17685}"/>
-          </ac:spMkLst>
-        </pc:spChg>
-        <pc:spChg chg="add del">
-          <ac:chgData name="Bilal Othman" userId="f5019779-5bf4-4d33-a04d-492903a8df80" providerId="ADAL" clId="{6AEE4846-9C6E-50AE-9183-DF01E1CFD062}" dt="2025-10-20T16:32:13.480" v="525" actId="22"/>
-          <ac:spMkLst>
-            <pc:docMk/>
-            <pc:sldMk cId="1270242671" sldId="2147481213"/>
-            <ac:spMk id="7" creationId="{AF22E3B4-A8ED-2DAD-40A9-2B95A5D2AA5C}"/>
-          </ac:spMkLst>
-        </pc:spChg>
-        <pc:spChg chg="add mod">
-          <ac:chgData name="Bilal Othman" userId="f5019779-5bf4-4d33-a04d-492903a8df80" providerId="ADAL" clId="{6AEE4846-9C6E-50AE-9183-DF01E1CFD062}" dt="2025-10-20T16:32:18.531" v="534" actId="20577"/>
-          <ac:spMkLst>
-            <pc:docMk/>
-            <pc:sldMk cId="1270242671" sldId="2147481213"/>
-            <ac:spMk id="8" creationId="{32992290-9515-0783-1BF1-A0C01F963F2D}"/>
-          </ac:spMkLst>
-        </pc:spChg>
-        <pc:spChg chg="add mod">
-          <ac:chgData name="Bilal Othman" userId="f5019779-5bf4-4d33-a04d-492903a8df80" providerId="ADAL" clId="{6AEE4846-9C6E-50AE-9183-DF01E1CFD062}" dt="2025-10-20T16:39:27.722" v="632" actId="207"/>
+        <pc:spChg chg="mod">
+          <ac:chgData name="Casey Lee" userId="4bc459e0-655e-452e-96c2-b918c0999cdb" providerId="ADAL" clId="{D71FFA72-407B-46EE-BB71-C6D17BEEF9AD}" dt="2026-02-26T14:38:30.796" v="12" actId="1076"/>
           <ac:spMkLst>
             <pc:docMk/>
             <pc:sldMk cId="1270242671" sldId="2147481213"/>
             <ac:spMk id="9" creationId="{5284A7BF-082D-AB49-2C20-F622A6F9DEB3}"/>
           </ac:spMkLst>
         </pc:spChg>
-        <pc:graphicFrameChg chg="mod modGraphic">
-          <ac:chgData name="Bilal Othman" userId="f5019779-5bf4-4d33-a04d-492903a8df80" providerId="ADAL" clId="{6AEE4846-9C6E-50AE-9183-DF01E1CFD062}" dt="2025-10-20T16:59:55.421" v="680" actId="207"/>
+      </pc:sldChg>
+      <pc:sldChg chg="addSp delSp modSp add mod">
+        <pc:chgData name="Casey Lee" userId="4bc459e0-655e-452e-96c2-b918c0999cdb" providerId="ADAL" clId="{D71FFA72-407B-46EE-BB71-C6D17BEEF9AD}" dt="2026-03-02T15:20:53.281" v="76" actId="14734"/>
+        <pc:sldMkLst>
+          <pc:docMk/>
+          <pc:sldMk cId="717545924" sldId="2147481218"/>
+        </pc:sldMkLst>
+        <pc:spChg chg="add del mod">
+          <ac:chgData name="Casey Lee" userId="4bc459e0-655e-452e-96c2-b918c0999cdb" providerId="ADAL" clId="{D71FFA72-407B-46EE-BB71-C6D17BEEF9AD}" dt="2026-03-02T15:18:57.473" v="49" actId="478"/>
+          <ac:spMkLst>
+            <pc:docMk/>
+            <pc:sldMk cId="717545924" sldId="2147481218"/>
+            <ac:spMk id="7" creationId="{FF6ECB99-98E6-8541-96A0-3654A03FFDB4}"/>
+          </ac:spMkLst>
+        </pc:spChg>
+        <pc:spChg chg="mod">
+          <ac:chgData name="Casey Lee" userId="4bc459e0-655e-452e-96c2-b918c0999cdb" providerId="ADAL" clId="{D71FFA72-407B-46EE-BB71-C6D17BEEF9AD}" dt="2026-02-26T14:52:46.211" v="46" actId="20577"/>
+          <ac:spMkLst>
+            <pc:docMk/>
+            <pc:sldMk cId="717545924" sldId="2147481218"/>
+            <ac:spMk id="9" creationId="{BDAA35E6-F194-9CC3-48EB-DC42B5DEBBA1}"/>
+          </ac:spMkLst>
+        </pc:spChg>
+        <pc:spChg chg="add del mod">
+          <ac:chgData name="Casey Lee" userId="4bc459e0-655e-452e-96c2-b918c0999cdb" providerId="ADAL" clId="{D71FFA72-407B-46EE-BB71-C6D17BEEF9AD}" dt="2026-03-02T15:19:14.344" v="54" actId="478"/>
+          <ac:spMkLst>
+            <pc:docMk/>
+            <pc:sldMk cId="717545924" sldId="2147481218"/>
+            <ac:spMk id="11" creationId="{B7BEA2BA-64F6-E0B6-A3A4-7A4036EE73A9}"/>
+          </ac:spMkLst>
+        </pc:spChg>
+        <pc:graphicFrameChg chg="del">
+          <ac:chgData name="Casey Lee" userId="4bc459e0-655e-452e-96c2-b918c0999cdb" providerId="ADAL" clId="{D71FFA72-407B-46EE-BB71-C6D17BEEF9AD}" dt="2026-03-02T15:17:32.361" v="47" actId="478"/>
           <ac:graphicFrameMkLst>
             <pc:docMk/>
-            <pc:sldMk cId="1270242671" sldId="2147481213"/>
-            <ac:graphicFrameMk id="2" creationId="{38F22EE9-DEDC-E1DA-1E19-E1758E9C192D}"/>
+            <pc:sldMk cId="717545924" sldId="2147481218"/>
+            <ac:graphicFrameMk id="2" creationId="{547DB9B6-2D7C-F22C-4224-FFC4DE8ECCC6}"/>
+          </ac:graphicFrameMkLst>
+        </pc:graphicFrameChg>
+        <pc:graphicFrameChg chg="add del mod modGraphic">
+          <ac:chgData name="Casey Lee" userId="4bc459e0-655e-452e-96c2-b918c0999cdb" providerId="ADAL" clId="{D71FFA72-407B-46EE-BB71-C6D17BEEF9AD}" dt="2026-03-02T15:19:09.396" v="52" actId="478"/>
+          <ac:graphicFrameMkLst>
+            <pc:docMk/>
+            <pc:sldMk cId="717545924" sldId="2147481218"/>
+            <ac:graphicFrameMk id="6" creationId="{BF670E6D-9951-B6F3-DEB7-5CF7F9EA5904}"/>
+          </ac:graphicFrameMkLst>
+        </pc:graphicFrameChg>
+        <pc:graphicFrameChg chg="add del mod">
+          <ac:chgData name="Casey Lee" userId="4bc459e0-655e-452e-96c2-b918c0999cdb" providerId="ADAL" clId="{D71FFA72-407B-46EE-BB71-C6D17BEEF9AD}" dt="2026-03-02T15:19:14.344" v="54" actId="478"/>
+          <ac:graphicFrameMkLst>
+            <pc:docMk/>
+            <pc:sldMk cId="717545924" sldId="2147481218"/>
+            <ac:graphicFrameMk id="10" creationId="{BC05D0A6-B310-3442-B7AC-A527BAF927E3}"/>
+          </ac:graphicFrameMkLst>
+        </pc:graphicFrameChg>
+        <pc:graphicFrameChg chg="add mod modGraphic">
+          <ac:chgData name="Casey Lee" userId="4bc459e0-655e-452e-96c2-b918c0999cdb" providerId="ADAL" clId="{D71FFA72-407B-46EE-BB71-C6D17BEEF9AD}" dt="2026-03-02T15:20:53.281" v="76" actId="14734"/>
+          <ac:graphicFrameMkLst>
+            <pc:docMk/>
+            <pc:sldMk cId="717545924" sldId="2147481218"/>
+            <ac:graphicFrameMk id="12" creationId="{C4ED9935-835F-E0EC-07CF-77B128224FE4}"/>
           </ac:graphicFrameMkLst>
         </pc:graphicFrameChg>
       </pc:sldChg>
-      <pc:sldChg chg="add del">
-        <pc:chgData name="Bilal Othman" userId="f5019779-5bf4-4d33-a04d-492903a8df80" providerId="ADAL" clId="{6AEE4846-9C6E-50AE-9183-DF01E1CFD062}" dt="2025-10-20T16:34:09.238" v="535" actId="2696"/>
-        <pc:sldMkLst>
-          <pc:docMk/>
-          <pc:sldMk cId="1389874235" sldId="2147481214"/>
-        </pc:sldMkLst>
-      </pc:sldChg>
-      <pc:sldChg chg="new del">
-        <pc:chgData name="Bilal Othman" userId="f5019779-5bf4-4d33-a04d-492903a8df80" providerId="ADAL" clId="{6AEE4846-9C6E-50AE-9183-DF01E1CFD062}" dt="2025-10-17T21:15:36.527" v="445" actId="680"/>
-        <pc:sldMkLst>
-          <pc:docMk/>
-          <pc:sldMk cId="950735759" sldId="2147481215"/>
-        </pc:sldMkLst>
-      </pc:sldChg>
-      <pc:sldChg chg="new del">
-        <pc:chgData name="Bilal Othman" userId="f5019779-5bf4-4d33-a04d-492903a8df80" providerId="ADAL" clId="{6AEE4846-9C6E-50AE-9183-DF01E1CFD062}" dt="2025-10-17T21:24:02.211" v="457" actId="2696"/>
-        <pc:sldMkLst>
-          <pc:docMk/>
-          <pc:sldMk cId="3610727272" sldId="2147481215"/>
-        </pc:sldMkLst>
-      </pc:sldChg>
-      <pc:sldChg chg="new del">
-        <pc:chgData name="Bilal Othman" userId="f5019779-5bf4-4d33-a04d-492903a8df80" providerId="ADAL" clId="{6AEE4846-9C6E-50AE-9183-DF01E1CFD062}" dt="2025-10-17T21:24:00.747" v="456" actId="2696"/>
-        <pc:sldMkLst>
-          <pc:docMk/>
-          <pc:sldMk cId="1623013858" sldId="2147481216"/>
-        </pc:sldMkLst>
-      </pc:sldChg>
-      <pc:sldChg chg="new del">
-        <pc:chgData name="Bilal Othman" userId="f5019779-5bf4-4d33-a04d-492903a8df80" providerId="ADAL" clId="{6AEE4846-9C6E-50AE-9183-DF01E1CFD062}" dt="2025-10-17T21:18:05.746" v="451" actId="680"/>
-        <pc:sldMkLst>
-          <pc:docMk/>
-          <pc:sldMk cId="2381188872" sldId="2147481216"/>
-        </pc:sldMkLst>
-      </pc:sldChg>
-      <pc:sldChg chg="add del">
-        <pc:chgData name="Bilal Othman" userId="f5019779-5bf4-4d33-a04d-492903a8df80" providerId="ADAL" clId="{6AEE4846-9C6E-50AE-9183-DF01E1CFD062}" dt="2025-10-17T21:12:10.405" v="384" actId="2696"/>
-        <pc:sldMkLst>
-          <pc:docMk/>
-          <pc:sldMk cId="2307073506" sldId="2147481217"/>
-        </pc:sldMkLst>
-      </pc:sldChg>
-      <pc:sldChg chg="addSp modSp new mod ord">
-        <pc:chgData name="Bilal Othman" userId="f5019779-5bf4-4d33-a04d-492903a8df80" providerId="ADAL" clId="{6AEE4846-9C6E-50AE-9183-DF01E1CFD062}" dt="2025-10-20T16:39:20.913" v="630" actId="207"/>
-        <pc:sldMkLst>
-          <pc:docMk/>
-          <pc:sldMk cId="2462155959" sldId="2147481217"/>
-        </pc:sldMkLst>
-        <pc:spChg chg="add mod">
-          <ac:chgData name="Bilal Othman" userId="f5019779-5bf4-4d33-a04d-492903a8df80" providerId="ADAL" clId="{6AEE4846-9C6E-50AE-9183-DF01E1CFD062}" dt="2025-10-20T16:36:35.474" v="628" actId="207"/>
-          <ac:spMkLst>
-            <pc:docMk/>
-            <pc:sldMk cId="2462155959" sldId="2147481217"/>
-            <ac:spMk id="2" creationId="{064257F9-5538-BB75-EA2C-75204B578927}"/>
-          </ac:spMkLst>
-        </pc:spChg>
-        <pc:spChg chg="add mod">
-          <ac:chgData name="Bilal Othman" userId="f5019779-5bf4-4d33-a04d-492903a8df80" providerId="ADAL" clId="{6AEE4846-9C6E-50AE-9183-DF01E1CFD062}" dt="2025-10-17T21:25:37.413" v="480" actId="404"/>
-          <ac:spMkLst>
-            <pc:docMk/>
-            <pc:sldMk cId="2462155959" sldId="2147481217"/>
-            <ac:spMk id="3" creationId="{94672255-69B2-0EEC-B6E2-5120BD1666BA}"/>
-          </ac:spMkLst>
-        </pc:spChg>
-        <pc:spChg chg="add mod">
-          <ac:chgData name="Bilal Othman" userId="f5019779-5bf4-4d33-a04d-492903a8df80" providerId="ADAL" clId="{6AEE4846-9C6E-50AE-9183-DF01E1CFD062}" dt="2025-10-20T16:39:20.913" v="630" actId="207"/>
-          <ac:spMkLst>
-            <pc:docMk/>
-            <pc:sldMk cId="2462155959" sldId="2147481217"/>
-            <ac:spMk id="4" creationId="{E50DECAC-1938-B298-6C4F-B32FA2682BEB}"/>
-          </ac:spMkLst>
-        </pc:spChg>
-      </pc:sldChg>
-      <pc:sldChg chg="add del">
-        <pc:chgData name="Bilal Othman" userId="f5019779-5bf4-4d33-a04d-492903a8df80" providerId="ADAL" clId="{6AEE4846-9C6E-50AE-9183-DF01E1CFD062}" dt="2025-10-17T21:12:23.282" v="434" actId="2696"/>
-        <pc:sldMkLst>
-          <pc:docMk/>
-          <pc:sldMk cId="145336846" sldId="2147481218"/>
-        </pc:sldMkLst>
-      </pc:sldChg>
-      <pc:sldChg chg="add del">
-        <pc:chgData name="Bilal Othman" userId="f5019779-5bf4-4d33-a04d-492903a8df80" providerId="ADAL" clId="{6AEE4846-9C6E-50AE-9183-DF01E1CFD062}" dt="2025-10-17T21:12:10.372" v="379" actId="2696"/>
-        <pc:sldMkLst>
-          <pc:docMk/>
-          <pc:sldMk cId="3892756515" sldId="2147481219"/>
-        </pc:sldMkLst>
-      </pc:sldChg>
-      <pc:sldChg chg="add del">
-        <pc:chgData name="Bilal Othman" userId="f5019779-5bf4-4d33-a04d-492903a8df80" providerId="ADAL" clId="{6AEE4846-9C6E-50AE-9183-DF01E1CFD062}" dt="2025-10-17T21:12:23.211" v="405" actId="2696"/>
-        <pc:sldMkLst>
-          <pc:docMk/>
-          <pc:sldMk cId="2449955966" sldId="2147481220"/>
-        </pc:sldMkLst>
-      </pc:sldChg>
-      <pc:sldChg chg="add del">
-        <pc:chgData name="Bilal Othman" userId="f5019779-5bf4-4d33-a04d-492903a8df80" providerId="ADAL" clId="{6AEE4846-9C6E-50AE-9183-DF01E1CFD062}" dt="2025-10-17T21:12:23.216" v="409" actId="2696"/>
-        <pc:sldMkLst>
-          <pc:docMk/>
-          <pc:sldMk cId="3753532281" sldId="2147481221"/>
-        </pc:sldMkLst>
-      </pc:sldChg>
-      <pc:sldChg chg="add del">
-        <pc:chgData name="Bilal Othman" userId="f5019779-5bf4-4d33-a04d-492903a8df80" providerId="ADAL" clId="{6AEE4846-9C6E-50AE-9183-DF01E1CFD062}" dt="2025-10-17T21:12:10.366" v="376" actId="2696"/>
-        <pc:sldMkLst>
-          <pc:docMk/>
-          <pc:sldMk cId="1157813500" sldId="2147481222"/>
-        </pc:sldMkLst>
-      </pc:sldChg>
-      <pc:sldChg chg="add del">
-        <pc:chgData name="Bilal Othman" userId="f5019779-5bf4-4d33-a04d-492903a8df80" providerId="ADAL" clId="{6AEE4846-9C6E-50AE-9183-DF01E1CFD062}" dt="2025-10-17T21:12:10.415" v="388" actId="2696"/>
-        <pc:sldMkLst>
-          <pc:docMk/>
-          <pc:sldMk cId="4242413873" sldId="2147481223"/>
-        </pc:sldMkLst>
-      </pc:sldChg>
-      <pc:sldChg chg="add del">
-        <pc:chgData name="Bilal Othman" userId="f5019779-5bf4-4d33-a04d-492903a8df80" providerId="ADAL" clId="{6AEE4846-9C6E-50AE-9183-DF01E1CFD062}" dt="2025-10-17T21:12:23.238" v="419" actId="2696"/>
-        <pc:sldMkLst>
-          <pc:docMk/>
-          <pc:sldMk cId="3621352377" sldId="2147481224"/>
-        </pc:sldMkLst>
-      </pc:sldChg>
-      <pc:sldChg chg="add del">
-        <pc:chgData name="Bilal Othman" userId="f5019779-5bf4-4d33-a04d-492903a8df80" providerId="ADAL" clId="{6AEE4846-9C6E-50AE-9183-DF01E1CFD062}" dt="2025-10-17T21:12:23.167" v="394" actId="2696"/>
-        <pc:sldMkLst>
-          <pc:docMk/>
-          <pc:sldMk cId="2178493738" sldId="2147481225"/>
-        </pc:sldMkLst>
-      </pc:sldChg>
-      <pc:sldChg chg="add del">
-        <pc:chgData name="Bilal Othman" userId="f5019779-5bf4-4d33-a04d-492903a8df80" providerId="ADAL" clId="{6AEE4846-9C6E-50AE-9183-DF01E1CFD062}" dt="2025-10-17T21:12:23.230" v="412" actId="2696"/>
-        <pc:sldMkLst>
-          <pc:docMk/>
-          <pc:sldMk cId="1394883244" sldId="2147481226"/>
-        </pc:sldMkLst>
-      </pc:sldChg>
-      <pc:sldChg chg="add del">
-        <pc:chgData name="Bilal Othman" userId="f5019779-5bf4-4d33-a04d-492903a8df80" providerId="ADAL" clId="{6AEE4846-9C6E-50AE-9183-DF01E1CFD062}" dt="2025-10-17T21:12:10.270" v="358" actId="2696"/>
-        <pc:sldMkLst>
-          <pc:docMk/>
-          <pc:sldMk cId="2560992972" sldId="2147481227"/>
-        </pc:sldMkLst>
-      </pc:sldChg>
-      <pc:sldChg chg="add del">
-        <pc:chgData name="Bilal Othman" userId="f5019779-5bf4-4d33-a04d-492903a8df80" providerId="ADAL" clId="{6AEE4846-9C6E-50AE-9183-DF01E1CFD062}" dt="2025-10-17T21:12:10.306" v="367" actId="2696"/>
-        <pc:sldMkLst>
-          <pc:docMk/>
-          <pc:sldMk cId="427855662" sldId="2147481228"/>
-        </pc:sldMkLst>
-      </pc:sldChg>
-      <pc:sldChg chg="add del">
-        <pc:chgData name="Bilal Othman" userId="f5019779-5bf4-4d33-a04d-492903a8df80" providerId="ADAL" clId="{6AEE4846-9C6E-50AE-9183-DF01E1CFD062}" dt="2025-10-17T21:12:10.300" v="366" actId="2696"/>
-        <pc:sldMkLst>
-          <pc:docMk/>
-          <pc:sldMk cId="1426298556" sldId="2147481229"/>
-        </pc:sldMkLst>
-      </pc:sldChg>
-      <pc:sldChg chg="add del">
-        <pc:chgData name="Bilal Othman" userId="f5019779-5bf4-4d33-a04d-492903a8df80" providerId="ADAL" clId="{6AEE4846-9C6E-50AE-9183-DF01E1CFD062}" dt="2025-10-17T21:12:10.429" v="391" actId="2696"/>
-        <pc:sldMkLst>
-          <pc:docMk/>
-          <pc:sldMk cId="3134119948" sldId="2147481230"/>
-        </pc:sldMkLst>
-      </pc:sldChg>
-      <pc:sldChg chg="add del">
-        <pc:chgData name="Bilal Othman" userId="f5019779-5bf4-4d33-a04d-492903a8df80" providerId="ADAL" clId="{6AEE4846-9C6E-50AE-9183-DF01E1CFD062}" dt="2025-10-17T21:12:10.374" v="380" actId="2696"/>
-        <pc:sldMkLst>
-          <pc:docMk/>
-          <pc:sldMk cId="1893241687" sldId="2147481232"/>
-        </pc:sldMkLst>
-      </pc:sldChg>
-      <pc:sldChg chg="add del">
-        <pc:chgData name="Bilal Othman" userId="f5019779-5bf4-4d33-a04d-492903a8df80" providerId="ADAL" clId="{6AEE4846-9C6E-50AE-9183-DF01E1CFD062}" dt="2025-10-17T21:12:23.267" v="431" actId="2696"/>
-        <pc:sldMkLst>
-          <pc:docMk/>
-          <pc:sldMk cId="4253379048" sldId="2147481233"/>
-        </pc:sldMkLst>
-      </pc:sldChg>
-      <pc:sldChg chg="add del">
-        <pc:chgData name="Bilal Othman" userId="f5019779-5bf4-4d33-a04d-492903a8df80" providerId="ADAL" clId="{6AEE4846-9C6E-50AE-9183-DF01E1CFD062}" dt="2025-10-17T21:12:23.289" v="436" actId="2696"/>
-        <pc:sldMkLst>
-          <pc:docMk/>
-          <pc:sldMk cId="1567322584" sldId="2147481236"/>
-        </pc:sldMkLst>
-      </pc:sldChg>
-      <pc:sldChg chg="add del">
-        <pc:chgData name="Bilal Othman" userId="f5019779-5bf4-4d33-a04d-492903a8df80" providerId="ADAL" clId="{6AEE4846-9C6E-50AE-9183-DF01E1CFD062}" dt="2025-10-17T21:12:23.288" v="435" actId="2696"/>
-        <pc:sldMkLst>
-          <pc:docMk/>
-          <pc:sldMk cId="229596941" sldId="2147481237"/>
-        </pc:sldMkLst>
-      </pc:sldChg>
-      <pc:sldChg chg="add del">
-        <pc:chgData name="Bilal Othman" userId="f5019779-5bf4-4d33-a04d-492903a8df80" providerId="ADAL" clId="{6AEE4846-9C6E-50AE-9183-DF01E1CFD062}" dt="2025-10-17T21:12:23.236" v="417" actId="2696"/>
-        <pc:sldMkLst>
-          <pc:docMk/>
-          <pc:sldMk cId="821359188" sldId="2147481238"/>
-        </pc:sldMkLst>
-      </pc:sldChg>
-      <pc:sldChg chg="add del">
-        <pc:chgData name="Bilal Othman" userId="f5019779-5bf4-4d33-a04d-492903a8df80" providerId="ADAL" clId="{6AEE4846-9C6E-50AE-9183-DF01E1CFD062}" dt="2025-10-17T21:12:23.171" v="396" actId="2696"/>
-        <pc:sldMkLst>
-          <pc:docMk/>
-          <pc:sldMk cId="1694054532" sldId="2147481239"/>
-        </pc:sldMkLst>
-      </pc:sldChg>
-      <pc:sldChg chg="add del">
-        <pc:chgData name="Bilal Othman" userId="f5019779-5bf4-4d33-a04d-492903a8df80" providerId="ADAL" clId="{6AEE4846-9C6E-50AE-9183-DF01E1CFD062}" dt="2025-10-17T21:12:23.165" v="393" actId="2696"/>
-        <pc:sldMkLst>
-          <pc:docMk/>
-          <pc:sldMk cId="3378682446" sldId="2147481240"/>
-        </pc:sldMkLst>
-      </pc:sldChg>
-      <pc:sldChg chg="add del">
-        <pc:chgData name="Bilal Othman" userId="f5019779-5bf4-4d33-a04d-492903a8df80" providerId="ADAL" clId="{6AEE4846-9C6E-50AE-9183-DF01E1CFD062}" dt="2025-10-17T21:12:23.214" v="407" actId="2696"/>
-        <pc:sldMkLst>
-          <pc:docMk/>
-          <pc:sldMk cId="3130016136" sldId="2147481241"/>
-        </pc:sldMkLst>
-      </pc:sldChg>
-      <pc:sldChg chg="add del">
-        <pc:chgData name="Bilal Othman" userId="f5019779-5bf4-4d33-a04d-492903a8df80" providerId="ADAL" clId="{6AEE4846-9C6E-50AE-9183-DF01E1CFD062}" dt="2025-10-17T21:12:23.291" v="437" actId="2696"/>
-        <pc:sldMkLst>
-          <pc:docMk/>
-          <pc:sldMk cId="3652664627" sldId="2147481242"/>
-        </pc:sldMkLst>
-      </pc:sldChg>
-      <pc:sldChg chg="add del">
-        <pc:chgData name="Bilal Othman" userId="f5019779-5bf4-4d33-a04d-492903a8df80" providerId="ADAL" clId="{6AEE4846-9C6E-50AE-9183-DF01E1CFD062}" dt="2025-10-17T21:12:10.325" v="370" actId="2696"/>
-        <pc:sldMkLst>
-          <pc:docMk/>
-          <pc:sldMk cId="3576209394" sldId="2147481243"/>
-        </pc:sldMkLst>
-      </pc:sldChg>
-      <pc:sldChg chg="add del">
-        <pc:chgData name="Bilal Othman" userId="f5019779-5bf4-4d33-a04d-492903a8df80" providerId="ADAL" clId="{6AEE4846-9C6E-50AE-9183-DF01E1CFD062}" dt="2025-10-17T21:12:10.266" v="357" actId="2696"/>
-        <pc:sldMkLst>
-          <pc:docMk/>
-          <pc:sldMk cId="2460346233" sldId="2147481244"/>
-        </pc:sldMkLst>
-      </pc:sldChg>
-      <pc:sldChg chg="add del">
-        <pc:chgData name="Bilal Othman" userId="f5019779-5bf4-4d33-a04d-492903a8df80" providerId="ADAL" clId="{6AEE4846-9C6E-50AE-9183-DF01E1CFD062}" dt="2025-10-17T21:12:10.261" v="356" actId="2696"/>
-        <pc:sldMkLst>
-          <pc:docMk/>
-          <pc:sldMk cId="1484297181" sldId="2147481247"/>
-        </pc:sldMkLst>
-      </pc:sldChg>
-      <pc:sldChg chg="add del">
-        <pc:chgData name="Bilal Othman" userId="f5019779-5bf4-4d33-a04d-492903a8df80" providerId="ADAL" clId="{6AEE4846-9C6E-50AE-9183-DF01E1CFD062}" dt="2025-10-17T21:12:10.258" v="355" actId="2696"/>
-        <pc:sldMkLst>
-          <pc:docMk/>
-          <pc:sldMk cId="2852939510" sldId="2147481248"/>
-        </pc:sldMkLst>
-      </pc:sldChg>
-      <pc:sldChg chg="add del">
-        <pc:chgData name="Bilal Othman" userId="f5019779-5bf4-4d33-a04d-492903a8df80" providerId="ADAL" clId="{6AEE4846-9C6E-50AE-9183-DF01E1CFD062}" dt="2025-10-17T21:12:10.333" v="372" actId="2696"/>
-        <pc:sldMkLst>
-          <pc:docMk/>
-          <pc:sldMk cId="25791284" sldId="2147481249"/>
-        </pc:sldMkLst>
-      </pc:sldChg>
-      <pc:sldChg chg="add del">
-        <pc:chgData name="Bilal Othman" userId="f5019779-5bf4-4d33-a04d-492903a8df80" providerId="ADAL" clId="{6AEE4846-9C6E-50AE-9183-DF01E1CFD062}" dt="2025-10-17T21:12:23.252" v="425" actId="2696"/>
-        <pc:sldMkLst>
-          <pc:docMk/>
-          <pc:sldMk cId="2176796729" sldId="2147481250"/>
-        </pc:sldMkLst>
-      </pc:sldChg>
-      <pc:sldChg chg="add del">
-        <pc:chgData name="Bilal Othman" userId="f5019779-5bf4-4d33-a04d-492903a8df80" providerId="ADAL" clId="{6AEE4846-9C6E-50AE-9183-DF01E1CFD062}" dt="2025-10-17T21:12:23.197" v="402" actId="2696"/>
-        <pc:sldMkLst>
-          <pc:docMk/>
-          <pc:sldMk cId="2363090598" sldId="2147481251"/>
-        </pc:sldMkLst>
-      </pc:sldChg>
-      <pc:sldChg chg="add del">
-        <pc:chgData name="Bilal Othman" userId="f5019779-5bf4-4d33-a04d-492903a8df80" providerId="ADAL" clId="{6AEE4846-9C6E-50AE-9183-DF01E1CFD062}" dt="2025-10-17T21:12:23.210" v="404" actId="2696"/>
-        <pc:sldMkLst>
-          <pc:docMk/>
-          <pc:sldMk cId="2326761967" sldId="2147481252"/>
-        </pc:sldMkLst>
-      </pc:sldChg>
-      <pc:sldChg chg="add del">
-        <pc:chgData name="Bilal Othman" userId="f5019779-5bf4-4d33-a04d-492903a8df80" providerId="ADAL" clId="{6AEE4846-9C6E-50AE-9183-DF01E1CFD062}" dt="2025-10-17T21:12:10.272" v="359" actId="2696"/>
-        <pc:sldMkLst>
-          <pc:docMk/>
-          <pc:sldMk cId="3718838375" sldId="2147481253"/>
-        </pc:sldMkLst>
-      </pc:sldChg>
-      <pc:sldChg chg="add del">
-        <pc:chgData name="Bilal Othman" userId="f5019779-5bf4-4d33-a04d-492903a8df80" providerId="ADAL" clId="{6AEE4846-9C6E-50AE-9183-DF01E1CFD062}" dt="2025-10-17T21:12:23.242" v="423" actId="2696"/>
-        <pc:sldMkLst>
-          <pc:docMk/>
-          <pc:sldMk cId="2060710732" sldId="2147481254"/>
-        </pc:sldMkLst>
-      </pc:sldChg>
-      <pc:sldChg chg="add del">
-        <pc:chgData name="Bilal Othman" userId="f5019779-5bf4-4d33-a04d-492903a8df80" providerId="ADAL" clId="{6AEE4846-9C6E-50AE-9183-DF01E1CFD062}" dt="2025-10-17T21:12:23.232" v="415" actId="2696"/>
-        <pc:sldMkLst>
-          <pc:docMk/>
-          <pc:sldMk cId="988488" sldId="2147481255"/>
-        </pc:sldMkLst>
-      </pc:sldChg>
-      <pc:sldChg chg="add del">
-        <pc:chgData name="Bilal Othman" userId="f5019779-5bf4-4d33-a04d-492903a8df80" providerId="ADAL" clId="{6AEE4846-9C6E-50AE-9183-DF01E1CFD062}" dt="2025-10-17T21:12:10.309" v="368" actId="2696"/>
-        <pc:sldMkLst>
-          <pc:docMk/>
-          <pc:sldMk cId="2682905776" sldId="2147481257"/>
-        </pc:sldMkLst>
-      </pc:sldChg>
-      <pc:sldChg chg="add del">
-        <pc:chgData name="Bilal Othman" userId="f5019779-5bf4-4d33-a04d-492903a8df80" providerId="ADAL" clId="{6AEE4846-9C6E-50AE-9183-DF01E1CFD062}" dt="2025-10-17T21:12:10.370" v="378" actId="2696"/>
-        <pc:sldMkLst>
-          <pc:docMk/>
-          <pc:sldMk cId="2763871" sldId="2147481258"/>
-        </pc:sldMkLst>
-      </pc:sldChg>
-      <pc:sldChg chg="add del">
-        <pc:chgData name="Bilal Othman" userId="f5019779-5bf4-4d33-a04d-492903a8df80" providerId="ADAL" clId="{6AEE4846-9C6E-50AE-9183-DF01E1CFD062}" dt="2025-10-17T21:12:10.275" v="360" actId="2696"/>
-        <pc:sldMkLst>
-          <pc:docMk/>
-          <pc:sldMk cId="2022463905" sldId="2147481260"/>
-        </pc:sldMkLst>
-      </pc:sldChg>
-      <pc:sldChg chg="add del">
-        <pc:chgData name="Bilal Othman" userId="f5019779-5bf4-4d33-a04d-492903a8df80" providerId="ADAL" clId="{6AEE4846-9C6E-50AE-9183-DF01E1CFD062}" dt="2025-10-17T21:12:10.395" v="383" actId="2696"/>
-        <pc:sldMkLst>
-          <pc:docMk/>
-          <pc:sldMk cId="648698299" sldId="2147481261"/>
-        </pc:sldMkLst>
-      </pc:sldChg>
-      <pc:sldChg chg="add del">
-        <pc:chgData name="Bilal Othman" userId="f5019779-5bf4-4d33-a04d-492903a8df80" providerId="ADAL" clId="{6AEE4846-9C6E-50AE-9183-DF01E1CFD062}" dt="2025-10-17T21:12:10.278" v="361" actId="2696"/>
-        <pc:sldMkLst>
-          <pc:docMk/>
-          <pc:sldMk cId="4145473322" sldId="2147481262"/>
-        </pc:sldMkLst>
-      </pc:sldChg>
-      <pc:sldChg chg="add del">
-        <pc:chgData name="Bilal Othman" userId="f5019779-5bf4-4d33-a04d-492903a8df80" providerId="ADAL" clId="{6AEE4846-9C6E-50AE-9183-DF01E1CFD062}" dt="2025-10-17T21:12:23.241" v="422" actId="2696"/>
-        <pc:sldMkLst>
-          <pc:docMk/>
-          <pc:sldMk cId="756745785" sldId="2147481263"/>
-        </pc:sldMkLst>
-      </pc:sldChg>
-      <pc:sldChg chg="add del">
-        <pc:chgData name="Bilal Othman" userId="f5019779-5bf4-4d33-a04d-492903a8df80" providerId="ADAL" clId="{6AEE4846-9C6E-50AE-9183-DF01E1CFD062}" dt="2025-10-17T21:12:10.240" v="354" actId="2696"/>
-        <pc:sldMkLst>
-          <pc:docMk/>
-          <pc:sldMk cId="345488764" sldId="2147481264"/>
-        </pc:sldMkLst>
-      </pc:sldChg>
-      <pc:sldChg chg="add del">
-        <pc:chgData name="Bilal Othman" userId="f5019779-5bf4-4d33-a04d-492903a8df80" providerId="ADAL" clId="{6AEE4846-9C6E-50AE-9183-DF01E1CFD062}" dt="2025-10-17T21:12:23.173" v="397" actId="2696"/>
-        <pc:sldMkLst>
-          <pc:docMk/>
-          <pc:sldMk cId="2503961039" sldId="2147481265"/>
-        </pc:sldMkLst>
-      </pc:sldChg>
-      <pc:sldChg chg="add del">
-        <pc:chgData name="Bilal Othman" userId="f5019779-5bf4-4d33-a04d-492903a8df80" providerId="ADAL" clId="{6AEE4846-9C6E-50AE-9183-DF01E1CFD062}" dt="2025-10-17T21:12:23.227" v="410" actId="2696"/>
-        <pc:sldMkLst>
-          <pc:docMk/>
-          <pc:sldMk cId="863687252" sldId="2147481266"/>
-        </pc:sldMkLst>
-      </pc:sldChg>
-      <pc:sldChg chg="add del">
-        <pc:chgData name="Bilal Othman" userId="f5019779-5bf4-4d33-a04d-492903a8df80" providerId="ADAL" clId="{6AEE4846-9C6E-50AE-9183-DF01E1CFD062}" dt="2025-10-17T21:12:10.427" v="390" actId="2696"/>
-        <pc:sldMkLst>
-          <pc:docMk/>
-          <pc:sldMk cId="1129400367" sldId="2147481267"/>
-        </pc:sldMkLst>
-      </pc:sldChg>
-      <pc:sldChg chg="add del">
-        <pc:chgData name="Bilal Othman" userId="f5019779-5bf4-4d33-a04d-492903a8df80" providerId="ADAL" clId="{6AEE4846-9C6E-50AE-9183-DF01E1CFD062}" dt="2025-10-17T21:12:10.355" v="374" actId="2696"/>
-        <pc:sldMkLst>
-          <pc:docMk/>
-          <pc:sldMk cId="645413853" sldId="2147481268"/>
-        </pc:sldMkLst>
-      </pc:sldChg>
-      <pc:sldChg chg="add del">
-        <pc:chgData name="Bilal Othman" userId="f5019779-5bf4-4d33-a04d-492903a8df80" providerId="ADAL" clId="{6AEE4846-9C6E-50AE-9183-DF01E1CFD062}" dt="2025-10-17T21:12:10.345" v="373" actId="2696"/>
-        <pc:sldMkLst>
-          <pc:docMk/>
-          <pc:sldMk cId="3907743225" sldId="2147481269"/>
-        </pc:sldMkLst>
-      </pc:sldChg>
-      <pc:sldChg chg="add del">
-        <pc:chgData name="Bilal Othman" userId="f5019779-5bf4-4d33-a04d-492903a8df80" providerId="ADAL" clId="{6AEE4846-9C6E-50AE-9183-DF01E1CFD062}" dt="2025-10-17T21:12:10.298" v="365" actId="2696"/>
-        <pc:sldMkLst>
-          <pc:docMk/>
-          <pc:sldMk cId="869299062" sldId="2147481271"/>
-        </pc:sldMkLst>
-      </pc:sldChg>
-      <pc:sldChg chg="add del">
-        <pc:chgData name="Bilal Othman" userId="f5019779-5bf4-4d33-a04d-492903a8df80" providerId="ADAL" clId="{6AEE4846-9C6E-50AE-9183-DF01E1CFD062}" dt="2025-10-17T21:12:10.413" v="387" actId="2696"/>
-        <pc:sldMkLst>
-          <pc:docMk/>
-          <pc:sldMk cId="1976876559" sldId="2147481274"/>
-        </pc:sldMkLst>
-      </pc:sldChg>
-      <pc:sldChg chg="add del">
-        <pc:chgData name="Bilal Othman" userId="f5019779-5bf4-4d33-a04d-492903a8df80" providerId="ADAL" clId="{6AEE4846-9C6E-50AE-9183-DF01E1CFD062}" dt="2025-10-17T21:12:23.234" v="416" actId="2696"/>
-        <pc:sldMkLst>
-          <pc:docMk/>
-          <pc:sldMk cId="68822884" sldId="2147481275"/>
-        </pc:sldMkLst>
-      </pc:sldChg>
-      <pc:sldChg chg="add del">
-        <pc:chgData name="Bilal Othman" userId="f5019779-5bf4-4d33-a04d-492903a8df80" providerId="ADAL" clId="{6AEE4846-9C6E-50AE-9183-DF01E1CFD062}" dt="2025-10-17T21:12:10.296" v="364" actId="2696"/>
-        <pc:sldMkLst>
-          <pc:docMk/>
-          <pc:sldMk cId="926817997" sldId="2147481276"/>
-        </pc:sldMkLst>
-      </pc:sldChg>
-      <pc:sldChg chg="add del">
-        <pc:chgData name="Bilal Othman" userId="f5019779-5bf4-4d33-a04d-492903a8df80" providerId="ADAL" clId="{6AEE4846-9C6E-50AE-9183-DF01E1CFD062}" dt="2025-10-17T21:12:10.281" v="362" actId="2696"/>
-        <pc:sldMkLst>
-          <pc:docMk/>
-          <pc:sldMk cId="2350308366" sldId="2147481278"/>
-        </pc:sldMkLst>
-      </pc:sldChg>
-      <pc:sldChg chg="add del">
-        <pc:chgData name="Bilal Othman" userId="f5019779-5bf4-4d33-a04d-492903a8df80" providerId="ADAL" clId="{6AEE4846-9C6E-50AE-9183-DF01E1CFD062}" dt="2025-10-17T21:12:10.412" v="386" actId="2696"/>
-        <pc:sldMkLst>
-          <pc:docMk/>
-          <pc:sldMk cId="1618464510" sldId="2147481280"/>
-        </pc:sldMkLst>
-      </pc:sldChg>
-      <pc:sldChg chg="add del">
-        <pc:chgData name="Bilal Othman" userId="f5019779-5bf4-4d33-a04d-492903a8df80" providerId="ADAL" clId="{6AEE4846-9C6E-50AE-9183-DF01E1CFD062}" dt="2025-10-17T21:12:23.253" v="426" actId="2696"/>
-        <pc:sldMkLst>
-          <pc:docMk/>
-          <pc:sldMk cId="1246806865" sldId="2147481284"/>
-        </pc:sldMkLst>
-      </pc:sldChg>
-      <pc:sldChg chg="add del">
-        <pc:chgData name="Bilal Othman" userId="f5019779-5bf4-4d33-a04d-492903a8df80" providerId="ADAL" clId="{6AEE4846-9C6E-50AE-9183-DF01E1CFD062}" dt="2025-10-17T21:12:23.185" v="401" actId="2696"/>
-        <pc:sldMkLst>
-          <pc:docMk/>
-          <pc:sldMk cId="2379161747" sldId="2147481286"/>
-        </pc:sldMkLst>
-      </pc:sldChg>
-      <pc:sldChg chg="add del">
-        <pc:chgData name="Bilal Othman" userId="f5019779-5bf4-4d33-a04d-492903a8df80" providerId="ADAL" clId="{6AEE4846-9C6E-50AE-9183-DF01E1CFD062}" dt="2025-10-17T21:12:23.244" v="424" actId="2696"/>
-        <pc:sldMkLst>
-          <pc:docMk/>
-          <pc:sldMk cId="2042423855" sldId="2147481287"/>
-        </pc:sldMkLst>
-      </pc:sldChg>
-      <pc:sldChg chg="add del">
-        <pc:chgData name="Bilal Othman" userId="f5019779-5bf4-4d33-a04d-492903a8df80" providerId="ADAL" clId="{6AEE4846-9C6E-50AE-9183-DF01E1CFD062}" dt="2025-10-17T21:12:23.231" v="413" actId="2696"/>
-        <pc:sldMkLst>
-          <pc:docMk/>
-          <pc:sldMk cId="1092428753" sldId="2147481288"/>
-        </pc:sldMkLst>
-      </pc:sldChg>
-      <pc:sldChg chg="add del">
-        <pc:chgData name="Bilal Othman" userId="f5019779-5bf4-4d33-a04d-492903a8df80" providerId="ADAL" clId="{6AEE4846-9C6E-50AE-9183-DF01E1CFD062}" dt="2025-10-17T21:12:10.394" v="382" actId="2696"/>
-        <pc:sldMkLst>
-          <pc:docMk/>
-          <pc:sldMk cId="2213353267" sldId="2147481289"/>
-        </pc:sldMkLst>
-      </pc:sldChg>
-      <pc:sldChg chg="add del">
-        <pc:chgData name="Bilal Othman" userId="f5019779-5bf4-4d33-a04d-492903a8df80" providerId="ADAL" clId="{6AEE4846-9C6E-50AE-9183-DF01E1CFD062}" dt="2025-10-17T21:12:23.175" v="398" actId="2696"/>
-        <pc:sldMkLst>
-          <pc:docMk/>
-          <pc:sldMk cId="1751227399" sldId="2147481290"/>
-        </pc:sldMkLst>
-      </pc:sldChg>
-      <pc:sldChg chg="add del">
-        <pc:chgData name="Bilal Othman" userId="f5019779-5bf4-4d33-a04d-492903a8df80" providerId="ADAL" clId="{6AEE4846-9C6E-50AE-9183-DF01E1CFD062}" dt="2025-10-17T21:12:10.294" v="363" actId="2696"/>
-        <pc:sldMkLst>
-          <pc:docMk/>
-          <pc:sldMk cId="1156650361" sldId="2147481291"/>
-        </pc:sldMkLst>
-      </pc:sldChg>
-      <pc:sldChg chg="add del">
-        <pc:chgData name="Bilal Othman" userId="f5019779-5bf4-4d33-a04d-492903a8df80" providerId="ADAL" clId="{6AEE4846-9C6E-50AE-9183-DF01E1CFD062}" dt="2025-10-17T21:12:23.153" v="392" actId="2696"/>
-        <pc:sldMkLst>
-          <pc:docMk/>
-          <pc:sldMk cId="933037012" sldId="2147481293"/>
-        </pc:sldMkLst>
-      </pc:sldChg>
-      <pc:sldChg chg="add del">
-        <pc:chgData name="Bilal Othman" userId="f5019779-5bf4-4d33-a04d-492903a8df80" providerId="ADAL" clId="{6AEE4846-9C6E-50AE-9183-DF01E1CFD062}" dt="2025-10-17T21:12:23.232" v="414" actId="2696"/>
-        <pc:sldMkLst>
-          <pc:docMk/>
-          <pc:sldMk cId="277216321" sldId="2147481295"/>
-        </pc:sldMkLst>
-      </pc:sldChg>
-      <pc:sldChg chg="add del">
-        <pc:chgData name="Bilal Othman" userId="f5019779-5bf4-4d33-a04d-492903a8df80" providerId="ADAL" clId="{6AEE4846-9C6E-50AE-9183-DF01E1CFD062}" dt="2025-10-17T21:12:23.254" v="427" actId="2696"/>
-        <pc:sldMkLst>
-          <pc:docMk/>
-          <pc:sldMk cId="3933677755" sldId="2147481297"/>
-        </pc:sldMkLst>
-      </pc:sldChg>
-      <pc:sldMasterChg chg="modSldLayout">
-        <pc:chgData name="Bilal Othman" userId="f5019779-5bf4-4d33-a04d-492903a8df80" providerId="ADAL" clId="{6AEE4846-9C6E-50AE-9183-DF01E1CFD062}" dt="2025-10-20T16:53:41.031" v="650" actId="478"/>
-        <pc:sldMasterMkLst>
-          <pc:docMk/>
-          <pc:sldMasterMk cId="1804289383" sldId="2147483648"/>
-        </pc:sldMasterMkLst>
-        <pc:sldLayoutChg chg="addSp delSp modSp mod">
-          <pc:chgData name="Bilal Othman" userId="f5019779-5bf4-4d33-a04d-492903a8df80" providerId="ADAL" clId="{6AEE4846-9C6E-50AE-9183-DF01E1CFD062}" dt="2025-10-17T21:25:49.483" v="483" actId="1076"/>
-          <pc:sldLayoutMkLst>
-            <pc:docMk/>
-            <pc:sldMasterMk cId="1804289383" sldId="2147483648"/>
-            <pc:sldLayoutMk cId="1468406521" sldId="2147483831"/>
-          </pc:sldLayoutMkLst>
-          <pc:picChg chg="add mod">
-            <ac:chgData name="Bilal Othman" userId="f5019779-5bf4-4d33-a04d-492903a8df80" providerId="ADAL" clId="{6AEE4846-9C6E-50AE-9183-DF01E1CFD062}" dt="2025-10-17T21:25:49.483" v="483" actId="1076"/>
-            <ac:picMkLst>
-              <pc:docMk/>
-              <pc:sldMasterMk cId="1804289383" sldId="2147483648"/>
-              <pc:sldLayoutMk cId="1468406521" sldId="2147483831"/>
-              <ac:picMk id="3" creationId="{1A1CC415-D3B6-E073-E388-58BEF1DC4AA5}"/>
-            </ac:picMkLst>
-          </pc:picChg>
-        </pc:sldLayoutChg>
-        <pc:sldLayoutChg chg="delSp modSp mod">
-          <pc:chgData name="Bilal Othman" userId="f5019779-5bf4-4d33-a04d-492903a8df80" providerId="ADAL" clId="{6AEE4846-9C6E-50AE-9183-DF01E1CFD062}" dt="2025-10-20T16:53:41.031" v="650" actId="478"/>
-          <pc:sldLayoutMkLst>
-            <pc:docMk/>
-            <pc:sldMasterMk cId="1804289383" sldId="2147483648"/>
-            <pc:sldLayoutMk cId="1506405986" sldId="2147484042"/>
-          </pc:sldLayoutMkLst>
-          <pc:spChg chg="mod">
-            <ac:chgData name="Bilal Othman" userId="f5019779-5bf4-4d33-a04d-492903a8df80" providerId="ADAL" clId="{6AEE4846-9C6E-50AE-9183-DF01E1CFD062}" dt="2025-10-20T16:53:18.643" v="645" actId="1076"/>
-            <ac:spMkLst>
-              <pc:docMk/>
-              <pc:sldMasterMk cId="1804289383" sldId="2147483648"/>
-              <pc:sldLayoutMk cId="1506405986" sldId="2147484042"/>
-              <ac:spMk id="27" creationId="{9F20E009-1DAD-B2B3-15C9-6FD76460D0C7}"/>
-            </ac:spMkLst>
-          </pc:spChg>
-          <pc:spChg chg="del">
-            <ac:chgData name="Bilal Othman" userId="f5019779-5bf4-4d33-a04d-492903a8df80" providerId="ADAL" clId="{6AEE4846-9C6E-50AE-9183-DF01E1CFD062}" dt="2025-10-20T16:53:27.240" v="646" actId="478"/>
-            <ac:spMkLst>
-              <pc:docMk/>
-              <pc:sldMasterMk cId="1804289383" sldId="2147483648"/>
-              <pc:sldLayoutMk cId="1506405986" sldId="2147484042"/>
-              <ac:spMk id="29" creationId="{C553F42E-EA37-A53D-BC3D-98EF4C6F73D0}"/>
-            </ac:spMkLst>
-          </pc:spChg>
-          <pc:spChg chg="del">
-            <ac:chgData name="Bilal Othman" userId="f5019779-5bf4-4d33-a04d-492903a8df80" providerId="ADAL" clId="{6AEE4846-9C6E-50AE-9183-DF01E1CFD062}" dt="2025-10-20T16:53:30.919" v="647" actId="478"/>
-            <ac:spMkLst>
-              <pc:docMk/>
-              <pc:sldMasterMk cId="1804289383" sldId="2147483648"/>
-              <pc:sldLayoutMk cId="1506405986" sldId="2147484042"/>
-              <ac:spMk id="30" creationId="{625B8563-CA62-446A-DB32-3BB6C504EB00}"/>
-            </ac:spMkLst>
-          </pc:spChg>
-          <pc:spChg chg="del">
-            <ac:chgData name="Bilal Othman" userId="f5019779-5bf4-4d33-a04d-492903a8df80" providerId="ADAL" clId="{6AEE4846-9C6E-50AE-9183-DF01E1CFD062}" dt="2025-10-20T16:53:32.377" v="648" actId="478"/>
-            <ac:spMkLst>
-              <pc:docMk/>
-              <pc:sldMasterMk cId="1804289383" sldId="2147483648"/>
-              <pc:sldLayoutMk cId="1506405986" sldId="2147484042"/>
-              <ac:spMk id="36" creationId="{1757D7CB-F3FE-D190-EBBC-668244C0ED4D}"/>
-            </ac:spMkLst>
-          </pc:spChg>
-          <pc:spChg chg="del">
-            <ac:chgData name="Bilal Othman" userId="f5019779-5bf4-4d33-a04d-492903a8df80" providerId="ADAL" clId="{6AEE4846-9C6E-50AE-9183-DF01E1CFD062}" dt="2025-10-20T16:53:37.651" v="649" actId="478"/>
-            <ac:spMkLst>
-              <pc:docMk/>
-              <pc:sldMasterMk cId="1804289383" sldId="2147483648"/>
-              <pc:sldLayoutMk cId="1506405986" sldId="2147484042"/>
-              <ac:spMk id="37" creationId="{E9C7E58F-8D39-3D12-49CB-9ACBF4BCF604}"/>
-            </ac:spMkLst>
-          </pc:spChg>
-          <pc:spChg chg="del">
-            <ac:chgData name="Bilal Othman" userId="f5019779-5bf4-4d33-a04d-492903a8df80" providerId="ADAL" clId="{6AEE4846-9C6E-50AE-9183-DF01E1CFD062}" dt="2025-10-20T16:53:41.031" v="650" actId="478"/>
-            <ac:spMkLst>
-              <pc:docMk/>
-              <pc:sldMasterMk cId="1804289383" sldId="2147483648"/>
-              <pc:sldLayoutMk cId="1506405986" sldId="2147484042"/>
-              <ac:spMk id="38" creationId="{7598B5FC-839B-323F-0B53-36F5827C390E}"/>
-            </ac:spMkLst>
-          </pc:spChg>
-        </pc:sldLayoutChg>
-        <pc:sldLayoutChg chg="addSp modSp">
-          <pc:chgData name="Bilal Othman" userId="f5019779-5bf4-4d33-a04d-492903a8df80" providerId="ADAL" clId="{6AEE4846-9C6E-50AE-9183-DF01E1CFD062}" dt="2025-10-17T21:15:02.106" v="441"/>
-          <pc:sldLayoutMkLst>
-            <pc:docMk/>
-            <pc:sldMasterMk cId="1804289383" sldId="2147483648"/>
-            <pc:sldLayoutMk cId="1453324459" sldId="2147484106"/>
-          </pc:sldLayoutMkLst>
-          <pc:picChg chg="add mod">
-            <ac:chgData name="Bilal Othman" userId="f5019779-5bf4-4d33-a04d-492903a8df80" providerId="ADAL" clId="{6AEE4846-9C6E-50AE-9183-DF01E1CFD062}" dt="2025-10-17T21:15:02.106" v="441"/>
-            <ac:picMkLst>
-              <pc:docMk/>
-              <pc:sldMasterMk cId="1804289383" sldId="2147483648"/>
-              <pc:sldLayoutMk cId="1453324459" sldId="2147484106"/>
-              <ac:picMk id="2" creationId="{6154393B-90BF-7FD1-D8E1-8E583B2C1B82}"/>
-            </ac:picMkLst>
-          </pc:picChg>
-          <pc:picChg chg="add mod">
-            <ac:chgData name="Bilal Othman" userId="f5019779-5bf4-4d33-a04d-492903a8df80" providerId="ADAL" clId="{6AEE4846-9C6E-50AE-9183-DF01E1CFD062}" dt="2025-10-17T21:15:02.106" v="441"/>
-            <ac:picMkLst>
-              <pc:docMk/>
-              <pc:sldMasterMk cId="1804289383" sldId="2147483648"/>
-              <pc:sldLayoutMk cId="1453324459" sldId="2147484106"/>
-              <ac:picMk id="3" creationId="{8B9A4864-4926-4C62-4B91-03896BDC60BF}"/>
-            </ac:picMkLst>
-          </pc:picChg>
-          <pc:picChg chg="add mod">
-            <ac:chgData name="Bilal Othman" userId="f5019779-5bf4-4d33-a04d-492903a8df80" providerId="ADAL" clId="{6AEE4846-9C6E-50AE-9183-DF01E1CFD062}" dt="2025-10-17T21:15:02.106" v="441"/>
-            <ac:picMkLst>
-              <pc:docMk/>
-              <pc:sldMasterMk cId="1804289383" sldId="2147483648"/>
-              <pc:sldLayoutMk cId="1453324459" sldId="2147484106"/>
-              <ac:picMk id="4" creationId="{70EE9CC7-4D63-74E2-0E2F-B8D3ECB4295D}"/>
-            </ac:picMkLst>
-          </pc:picChg>
-        </pc:sldLayoutChg>
-      </pc:sldMasterChg>
-      <pc:sldMasterChg chg="new del mod addSldLayout delSldLayout">
-        <pc:chgData name="Bilal Othman" userId="f5019779-5bf4-4d33-a04d-492903a8df80" providerId="ADAL" clId="{6AEE4846-9C6E-50AE-9183-DF01E1CFD062}" dt="2025-10-17T21:21:44.994" v="453" actId="6938"/>
-        <pc:sldMasterMkLst>
-          <pc:docMk/>
-          <pc:sldMasterMk cId="2150054721" sldId="2147484107"/>
-        </pc:sldMasterMkLst>
-        <pc:sldLayoutChg chg="new del replId">
-          <pc:chgData name="Bilal Othman" userId="f5019779-5bf4-4d33-a04d-492903a8df80" providerId="ADAL" clId="{6AEE4846-9C6E-50AE-9183-DF01E1CFD062}" dt="2025-10-17T21:21:44.994" v="453" actId="6938"/>
-          <pc:sldLayoutMkLst>
-            <pc:docMk/>
-            <pc:sldMasterMk cId="2150054721" sldId="2147484107"/>
-            <pc:sldLayoutMk cId="109499949" sldId="2147484108"/>
-          </pc:sldLayoutMkLst>
-        </pc:sldLayoutChg>
-        <pc:sldLayoutChg chg="new del replId">
-          <pc:chgData name="Bilal Othman" userId="f5019779-5bf4-4d33-a04d-492903a8df80" providerId="ADAL" clId="{6AEE4846-9C6E-50AE-9183-DF01E1CFD062}" dt="2025-10-17T21:21:44.994" v="453" actId="6938"/>
-          <pc:sldLayoutMkLst>
-            <pc:docMk/>
-            <pc:sldMasterMk cId="2150054721" sldId="2147484107"/>
-            <pc:sldLayoutMk cId="3915349657" sldId="2147484109"/>
-          </pc:sldLayoutMkLst>
-        </pc:sldLayoutChg>
-        <pc:sldLayoutChg chg="new del replId">
-          <pc:chgData name="Bilal Othman" userId="f5019779-5bf4-4d33-a04d-492903a8df80" providerId="ADAL" clId="{6AEE4846-9C6E-50AE-9183-DF01E1CFD062}" dt="2025-10-17T21:21:44.994" v="453" actId="6938"/>
-          <pc:sldLayoutMkLst>
-            <pc:docMk/>
-            <pc:sldMasterMk cId="2150054721" sldId="2147484107"/>
-            <pc:sldLayoutMk cId="1201770034" sldId="2147484110"/>
-          </pc:sldLayoutMkLst>
-        </pc:sldLayoutChg>
-        <pc:sldLayoutChg chg="new del replId">
-          <pc:chgData name="Bilal Othman" userId="f5019779-5bf4-4d33-a04d-492903a8df80" providerId="ADAL" clId="{6AEE4846-9C6E-50AE-9183-DF01E1CFD062}" dt="2025-10-17T21:21:44.994" v="453" actId="6938"/>
-          <pc:sldLayoutMkLst>
-            <pc:docMk/>
-            <pc:sldMasterMk cId="2150054721" sldId="2147484107"/>
-            <pc:sldLayoutMk cId="1382875377" sldId="2147484111"/>
-          </pc:sldLayoutMkLst>
-        </pc:sldLayoutChg>
-        <pc:sldLayoutChg chg="new del replId">
-          <pc:chgData name="Bilal Othman" userId="f5019779-5bf4-4d33-a04d-492903a8df80" providerId="ADAL" clId="{6AEE4846-9C6E-50AE-9183-DF01E1CFD062}" dt="2025-10-17T21:21:44.994" v="453" actId="6938"/>
-          <pc:sldLayoutMkLst>
-            <pc:docMk/>
-            <pc:sldMasterMk cId="2150054721" sldId="2147484107"/>
-            <pc:sldLayoutMk cId="3548703701" sldId="2147484112"/>
-          </pc:sldLayoutMkLst>
-        </pc:sldLayoutChg>
-        <pc:sldLayoutChg chg="new del replId">
-          <pc:chgData name="Bilal Othman" userId="f5019779-5bf4-4d33-a04d-492903a8df80" providerId="ADAL" clId="{6AEE4846-9C6E-50AE-9183-DF01E1CFD062}" dt="2025-10-17T21:21:44.994" v="453" actId="6938"/>
-          <pc:sldLayoutMkLst>
-            <pc:docMk/>
-            <pc:sldMasterMk cId="2150054721" sldId="2147484107"/>
-            <pc:sldLayoutMk cId="1625586564" sldId="2147484113"/>
-          </pc:sldLayoutMkLst>
-        </pc:sldLayoutChg>
-        <pc:sldLayoutChg chg="new del replId">
-          <pc:chgData name="Bilal Othman" userId="f5019779-5bf4-4d33-a04d-492903a8df80" providerId="ADAL" clId="{6AEE4846-9C6E-50AE-9183-DF01E1CFD062}" dt="2025-10-17T21:21:44.994" v="453" actId="6938"/>
-          <pc:sldLayoutMkLst>
-            <pc:docMk/>
-            <pc:sldMasterMk cId="2150054721" sldId="2147484107"/>
-            <pc:sldLayoutMk cId="2508578954" sldId="2147484114"/>
-          </pc:sldLayoutMkLst>
-        </pc:sldLayoutChg>
-        <pc:sldLayoutChg chg="new del replId">
-          <pc:chgData name="Bilal Othman" userId="f5019779-5bf4-4d33-a04d-492903a8df80" providerId="ADAL" clId="{6AEE4846-9C6E-50AE-9183-DF01E1CFD062}" dt="2025-10-17T21:21:44.994" v="453" actId="6938"/>
-          <pc:sldLayoutMkLst>
-            <pc:docMk/>
-            <pc:sldMasterMk cId="2150054721" sldId="2147484107"/>
-            <pc:sldLayoutMk cId="3469426380" sldId="2147484115"/>
-          </pc:sldLayoutMkLst>
-        </pc:sldLayoutChg>
-        <pc:sldLayoutChg chg="new del replId">
-          <pc:chgData name="Bilal Othman" userId="f5019779-5bf4-4d33-a04d-492903a8df80" providerId="ADAL" clId="{6AEE4846-9C6E-50AE-9183-DF01E1CFD062}" dt="2025-10-17T21:21:44.994" v="453" actId="6938"/>
-          <pc:sldLayoutMkLst>
-            <pc:docMk/>
-            <pc:sldMasterMk cId="2150054721" sldId="2147484107"/>
-            <pc:sldLayoutMk cId="3147408494" sldId="2147484116"/>
-          </pc:sldLayoutMkLst>
-        </pc:sldLayoutChg>
-        <pc:sldLayoutChg chg="new del replId">
-          <pc:chgData name="Bilal Othman" userId="f5019779-5bf4-4d33-a04d-492903a8df80" providerId="ADAL" clId="{6AEE4846-9C6E-50AE-9183-DF01E1CFD062}" dt="2025-10-17T21:21:44.994" v="453" actId="6938"/>
-          <pc:sldLayoutMkLst>
-            <pc:docMk/>
-            <pc:sldMasterMk cId="2150054721" sldId="2147484107"/>
-            <pc:sldLayoutMk cId="1446433852" sldId="2147484117"/>
-          </pc:sldLayoutMkLst>
-        </pc:sldLayoutChg>
-        <pc:sldLayoutChg chg="new del replId">
-          <pc:chgData name="Bilal Othman" userId="f5019779-5bf4-4d33-a04d-492903a8df80" providerId="ADAL" clId="{6AEE4846-9C6E-50AE-9183-DF01E1CFD062}" dt="2025-10-17T21:21:44.994" v="453" actId="6938"/>
-          <pc:sldLayoutMkLst>
-            <pc:docMk/>
-            <pc:sldMasterMk cId="2150054721" sldId="2147484107"/>
-            <pc:sldLayoutMk cId="1801072827" sldId="2147484118"/>
-          </pc:sldLayoutMkLst>
-        </pc:sldLayoutChg>
-      </pc:sldMasterChg>
-      <pc:sldMasterChg chg="add del">
-        <pc:chgData name="Bilal Othman" userId="f5019779-5bf4-4d33-a04d-492903a8df80" providerId="ADAL" clId="{6AEE4846-9C6E-50AE-9183-DF01E1CFD062}" dt="2025-10-17T21:12:23.267" v="430" actId="2696"/>
-        <pc:sldMasterMkLst>
-          <pc:docMk/>
-          <pc:sldMasterMk cId="1741442300" sldId="2147484109"/>
-        </pc:sldMasterMkLst>
-      </pc:sldMasterChg>
-    </pc:docChg>
-  </pc:docChgLst>
-  <pc:docChgLst>
-    <pc:chgData name="Kate Tharp" userId="S::kate.tharp@vml.com::f673b90c-5ccd-4f11-b817-79e0f5d8c583" providerId="AD" clId="Web-{A1CFB926-845E-A4C8-E1FE-729016EF509A}"/>
-    <pc:docChg chg="mod">
-      <pc:chgData name="Kate Tharp" userId="S::kate.tharp@vml.com::f673b90c-5ccd-4f11-b817-79e0f5d8c583" providerId="AD" clId="Web-{A1CFB926-845E-A4C8-E1FE-729016EF509A}" dt="2025-09-30T17:14:33.967" v="0"/>
-      <pc:docMkLst>
-        <pc:docMk/>
-      </pc:docMkLst>
-    </pc:docChg>
-  </pc:docChgLst>
-  <pc:docChgLst>
-    <pc:chgData name="Casey Lee" userId="4bc459e0-655e-452e-96c2-b918c0999cdb" providerId="ADAL" clId="{FEDCCBD3-F3AF-4248-98FF-B03AEB6CAACA}"/>
-    <pc:docChg chg="undo redo custSel addSld delSld modSld sldOrd modSection">
-      <pc:chgData name="Casey Lee" userId="4bc459e0-655e-452e-96c2-b918c0999cdb" providerId="ADAL" clId="{FEDCCBD3-F3AF-4248-98FF-B03AEB6CAACA}" dt="2025-10-17T17:36:01.193" v="70061" actId="21"/>
-      <pc:docMkLst>
-        <pc:docMk/>
-      </pc:docMkLst>
-      <pc:sldChg chg="ord">
-        <pc:chgData name="Casey Lee" userId="4bc459e0-655e-452e-96c2-b918c0999cdb" providerId="ADAL" clId="{FEDCCBD3-F3AF-4248-98FF-B03AEB6CAACA}" dt="2025-10-02T20:28:16.132" v="37985"/>
-        <pc:sldMkLst>
-          <pc:docMk/>
-          <pc:sldMk cId="1802258249" sldId="280"/>
-        </pc:sldMkLst>
-      </pc:sldChg>
-      <pc:sldChg chg="modSp mod">
-        <pc:chgData name="Casey Lee" userId="4bc459e0-655e-452e-96c2-b918c0999cdb" providerId="ADAL" clId="{FEDCCBD3-F3AF-4248-98FF-B03AEB6CAACA}" dt="2025-09-30T16:47:04.428" v="21631" actId="20577"/>
-        <pc:sldMkLst>
-          <pc:docMk/>
-          <pc:sldMk cId="1694384516" sldId="285"/>
-        </pc:sldMkLst>
-      </pc:sldChg>
-      <pc:sldChg chg="add del mod ord modShow">
-        <pc:chgData name="Casey Lee" userId="4bc459e0-655e-452e-96c2-b918c0999cdb" providerId="ADAL" clId="{FEDCCBD3-F3AF-4248-98FF-B03AEB6CAACA}" dt="2025-09-26T16:35:44.883" v="4535"/>
-        <pc:sldMkLst>
-          <pc:docMk/>
-          <pc:sldMk cId="2227000735" sldId="307"/>
-        </pc:sldMkLst>
-      </pc:sldChg>
-      <pc:sldChg chg="addSp delSp modSp mod ord">
-        <pc:chgData name="Casey Lee" userId="4bc459e0-655e-452e-96c2-b918c0999cdb" providerId="ADAL" clId="{FEDCCBD3-F3AF-4248-98FF-B03AEB6CAACA}" dt="2025-10-10T15:24:34.837" v="70048" actId="20577"/>
-        <pc:sldMkLst>
-          <pc:docMk/>
-          <pc:sldMk cId="3180984745" sldId="333"/>
-        </pc:sldMkLst>
-      </pc:sldChg>
-      <pc:sldChg chg="modSp mod ord">
-        <pc:chgData name="Casey Lee" userId="4bc459e0-655e-452e-96c2-b918c0999cdb" providerId="ADAL" clId="{FEDCCBD3-F3AF-4248-98FF-B03AEB6CAACA}" dt="2025-10-02T20:28:16.132" v="37985"/>
-        <pc:sldMkLst>
-          <pc:docMk/>
-          <pc:sldMk cId="1946109353" sldId="355"/>
-        </pc:sldMkLst>
-      </pc:sldChg>
-      <pc:sldChg chg="addSp delSp modSp mod ord">
-        <pc:chgData name="Casey Lee" userId="4bc459e0-655e-452e-96c2-b918c0999cdb" providerId="ADAL" clId="{FEDCCBD3-F3AF-4248-98FF-B03AEB6CAACA}" dt="2025-09-29T13:57:09.558" v="11695"/>
-        <pc:sldMkLst>
-          <pc:docMk/>
-          <pc:sldMk cId="2675615646" sldId="419"/>
-        </pc:sldMkLst>
-      </pc:sldChg>
-      <pc:sldChg chg="addSp delSp modSp mod modCm">
-        <pc:chgData name="Casey Lee" userId="4bc459e0-655e-452e-96c2-b918c0999cdb" providerId="ADAL" clId="{FEDCCBD3-F3AF-4248-98FF-B03AEB6CAACA}" dt="2025-10-06T14:20:14.006" v="51184" actId="20577"/>
-        <pc:sldMkLst>
-          <pc:docMk/>
-          <pc:sldMk cId="1299622664" sldId="434"/>
-        </pc:sldMkLst>
-        <pc:extLst>
-          <p:ext xmlns:p="http://schemas.openxmlformats.org/presentationml/2006/main" uri="{D6D511B9-2390-475A-947B-AFAB55BFBCF1}">
-            <pc226:cmChg xmlns:pc226="http://schemas.microsoft.com/office/powerpoint/2022/06/main/command" xmlns="" chg="mod">
-              <pc226:chgData name="Casey Lee" userId="4bc459e0-655e-452e-96c2-b918c0999cdb" providerId="ADAL" clId="{FEDCCBD3-F3AF-4248-98FF-B03AEB6CAACA}" dt="2025-10-06T14:20:14.006" v="51184" actId="20577"/>
-              <pc2:cmMkLst xmlns:pc2="http://schemas.microsoft.com/office/powerpoint/2019/9/main/command">
-                <pc:docMk/>
-                <pc:sldMk cId="1299622664" sldId="434"/>
-                <pc2:cmMk id="{9C52BFDD-9F11-4C01-8EA9-393721749318}"/>
-              </pc2:cmMkLst>
-            </pc226:cmChg>
-          </p:ext>
-        </pc:extLst>
-      </pc:sldChg>
-      <pc:sldChg chg="add del ord">
-        <pc:chgData name="Casey Lee" userId="4bc459e0-655e-452e-96c2-b918c0999cdb" providerId="ADAL" clId="{FEDCCBD3-F3AF-4248-98FF-B03AEB6CAACA}" dt="2025-10-02T15:55:33.977" v="28746"/>
-        <pc:sldMkLst>
-          <pc:docMk/>
-          <pc:sldMk cId="3900277827" sldId="2147478250"/>
-        </pc:sldMkLst>
-      </pc:sldChg>
-      <pc:sldChg chg="add ord">
-        <pc:chgData name="Casey Lee" userId="4bc459e0-655e-452e-96c2-b918c0999cdb" providerId="ADAL" clId="{FEDCCBD3-F3AF-4248-98FF-B03AEB6CAACA}" dt="2025-10-02T15:55:33.977" v="28746"/>
-        <pc:sldMkLst>
-          <pc:docMk/>
-          <pc:sldMk cId="2066716811" sldId="2147478329"/>
-        </pc:sldMkLst>
-      </pc:sldChg>
-      <pc:sldChg chg="add del">
-        <pc:chgData name="Casey Lee" userId="4bc459e0-655e-452e-96c2-b918c0999cdb" providerId="ADAL" clId="{FEDCCBD3-F3AF-4248-98FF-B03AEB6CAACA}" dt="2025-09-19T19:13:18.647" v="2"/>
-        <pc:sldMkLst>
-          <pc:docMk/>
-          <pc:sldMk cId="679476797" sldId="2147480949"/>
-        </pc:sldMkLst>
-      </pc:sldChg>
-      <pc:sldChg chg="addSp delSp modSp add mod ord">
-        <pc:chgData name="Casey Lee" userId="4bc459e0-655e-452e-96c2-b918c0999cdb" providerId="ADAL" clId="{FEDCCBD3-F3AF-4248-98FF-B03AEB6CAACA}" dt="2025-10-07T13:38:34.824" v="59882"/>
-        <pc:sldMkLst>
-          <pc:docMk/>
-          <pc:sldMk cId="2761368814" sldId="2147481181"/>
-        </pc:sldMkLst>
-      </pc:sldChg>
-      <pc:sldChg chg="addSp delSp modSp add del mod">
-        <pc:chgData name="Casey Lee" userId="4bc459e0-655e-452e-96c2-b918c0999cdb" providerId="ADAL" clId="{FEDCCBD3-F3AF-4248-98FF-B03AEB6CAACA}" dt="2025-09-29T14:22:47.094" v="12758" actId="47"/>
-        <pc:sldMkLst>
-          <pc:docMk/>
-          <pc:sldMk cId="3069225704" sldId="2147481199"/>
-        </pc:sldMkLst>
-      </pc:sldChg>
-      <pc:sldChg chg="modSp add del mod">
-        <pc:chgData name="Casey Lee" userId="4bc459e0-655e-452e-96c2-b918c0999cdb" providerId="ADAL" clId="{FEDCCBD3-F3AF-4248-98FF-B03AEB6CAACA}" dt="2025-10-03T15:18:34.054" v="43364" actId="47"/>
-        <pc:sldMkLst>
-          <pc:docMk/>
-          <pc:sldMk cId="2500079299" sldId="2147481200"/>
-        </pc:sldMkLst>
-      </pc:sldChg>
-      <pc:sldChg chg="modSp add mod ord modCm">
-        <pc:chgData name="Casey Lee" userId="4bc459e0-655e-452e-96c2-b918c0999cdb" providerId="ADAL" clId="{FEDCCBD3-F3AF-4248-98FF-B03AEB6CAACA}" dt="2025-10-10T21:45:55.195" v="70049" actId="13926"/>
-        <pc:sldMkLst>
-          <pc:docMk/>
-          <pc:sldMk cId="829862625" sldId="2147481206"/>
-        </pc:sldMkLst>
-        <pc:extLst>
-          <p:ext xmlns:p="http://schemas.openxmlformats.org/presentationml/2006/main" uri="{D6D511B9-2390-475A-947B-AFAB55BFBCF1}">
-            <pc226:cmChg xmlns:pc226="http://schemas.microsoft.com/office/powerpoint/2022/06/main/command" xmlns="" chg="mod">
-              <pc226:chgData name="Casey Lee" userId="4bc459e0-655e-452e-96c2-b918c0999cdb" providerId="ADAL" clId="{FEDCCBD3-F3AF-4248-98FF-B03AEB6CAACA}" dt="2025-10-08T14:25:52.778" v="68521" actId="20577"/>
-              <pc2:cmMkLst xmlns:pc2="http://schemas.microsoft.com/office/powerpoint/2019/9/main/command">
-                <pc:docMk/>
-                <pc:sldMk cId="829862625" sldId="2147481206"/>
-                <pc2:cmMk id="{8C1768B5-F339-4F29-B263-E3C0B5FBF0A5}"/>
-              </pc2:cmMkLst>
-            </pc226:cmChg>
-          </p:ext>
-        </pc:extLst>
-      </pc:sldChg>
-      <pc:sldChg chg="addSp modSp mod ord">
-        <pc:chgData name="Casey Lee" userId="4bc459e0-655e-452e-96c2-b918c0999cdb" providerId="ADAL" clId="{FEDCCBD3-F3AF-4248-98FF-B03AEB6CAACA}" dt="2025-09-26T16:40:01.486" v="4856"/>
-        <pc:sldMkLst>
-          <pc:docMk/>
-          <pc:sldMk cId="2128657008" sldId="2147481209"/>
-        </pc:sldMkLst>
-      </pc:sldChg>
-      <pc:sldChg chg="addSp delSp modSp mod">
-        <pc:chgData name="Casey Lee" userId="4bc459e0-655e-452e-96c2-b918c0999cdb" providerId="ADAL" clId="{FEDCCBD3-F3AF-4248-98FF-B03AEB6CAACA}" dt="2025-09-19T20:25:41.897" v="1420" actId="20577"/>
-        <pc:sldMkLst>
-          <pc:docMk/>
-          <pc:sldMk cId="1105021549" sldId="2147481210"/>
-        </pc:sldMkLst>
-      </pc:sldChg>
-      <pc:sldChg chg="addSp delSp modSp mod modCm">
-        <pc:chgData name="Casey Lee" userId="4bc459e0-655e-452e-96c2-b918c0999cdb" providerId="ADAL" clId="{FEDCCBD3-F3AF-4248-98FF-B03AEB6CAACA}" dt="2025-10-02T17:39:03.548" v="33313" actId="20577"/>
-        <pc:sldMkLst>
-          <pc:docMk/>
-          <pc:sldMk cId="323746144" sldId="2147481211"/>
-        </pc:sldMkLst>
-        <pc:extLst>
-          <p:ext xmlns:p="http://schemas.openxmlformats.org/presentationml/2006/main" uri="{D6D511B9-2390-475A-947B-AFAB55BFBCF1}">
-            <pc226:cmChg xmlns:pc226="http://schemas.microsoft.com/office/powerpoint/2022/06/main/command" xmlns="" chg="mod">
-              <pc226:chgData name="Casey Lee" userId="4bc459e0-655e-452e-96c2-b918c0999cdb" providerId="ADAL" clId="{FEDCCBD3-F3AF-4248-98FF-B03AEB6CAACA}" dt="2025-10-02T17:39:03.548" v="33313" actId="20577"/>
-              <pc2:cmMkLst xmlns:pc2="http://schemas.microsoft.com/office/powerpoint/2019/9/main/command">
-                <pc:docMk/>
-                <pc:sldMk cId="323746144" sldId="2147481211"/>
-                <pc2:cmMk id="{39EB2F37-B8FD-49D1-A4FF-14B267B24A40}"/>
-              </pc2:cmMkLst>
-            </pc226:cmChg>
-          </p:ext>
-        </pc:extLst>
-      </pc:sldChg>
-      <pc:sldChg chg="addSp delSp modSp mod ord">
-        <pc:chgData name="Casey Lee" userId="4bc459e0-655e-452e-96c2-b918c0999cdb" providerId="ADAL" clId="{FEDCCBD3-F3AF-4248-98FF-B03AEB6CAACA}" dt="2025-10-07T16:36:18.841" v="65435" actId="1076"/>
-        <pc:sldMkLst>
-          <pc:docMk/>
-          <pc:sldMk cId="83366420" sldId="2147481212"/>
-        </pc:sldMkLst>
-      </pc:sldChg>
-      <pc:sldChg chg="addSp delSp modSp mod">
-        <pc:chgData name="Casey Lee" userId="4bc459e0-655e-452e-96c2-b918c0999cdb" providerId="ADAL" clId="{FEDCCBD3-F3AF-4248-98FF-B03AEB6CAACA}" dt="2025-10-06T14:44:31.164" v="51234" actId="20577"/>
-        <pc:sldMkLst>
-          <pc:docMk/>
-          <pc:sldMk cId="1270242671" sldId="2147481213"/>
-        </pc:sldMkLst>
-        <pc:spChg chg="mod">
-          <ac:chgData name="Casey Lee" userId="4bc459e0-655e-452e-96c2-b918c0999cdb" providerId="ADAL" clId="{FEDCCBD3-F3AF-4248-98FF-B03AEB6CAACA}" dt="2025-10-06T14:44:31.164" v="51234" actId="20577"/>
-          <ac:spMkLst>
-            <pc:docMk/>
-            <pc:sldMk cId="1270242671" sldId="2147481213"/>
-            <ac:spMk id="4" creationId="{F93D6D7D-FF3F-82F6-14A4-6285C0323998}"/>
-          </ac:spMkLst>
-        </pc:spChg>
-        <pc:graphicFrameChg chg="mod modGraphic">
-          <ac:chgData name="Casey Lee" userId="4bc459e0-655e-452e-96c2-b918c0999cdb" providerId="ADAL" clId="{FEDCCBD3-F3AF-4248-98FF-B03AEB6CAACA}" dt="2025-10-03T18:57:42.221" v="46337" actId="1076"/>
-          <ac:graphicFrameMkLst>
-            <pc:docMk/>
-            <pc:sldMk cId="1270242671" sldId="2147481213"/>
-            <ac:graphicFrameMk id="2" creationId="{38F22EE9-DEDC-E1DA-1E19-E1758E9C192D}"/>
-          </ac:graphicFrameMkLst>
-        </pc:graphicFrameChg>
-      </pc:sldChg>
-      <pc:sldChg chg="addSp delSp modSp mod">
-        <pc:chgData name="Casey Lee" userId="4bc459e0-655e-452e-96c2-b918c0999cdb" providerId="ADAL" clId="{FEDCCBD3-F3AF-4248-98FF-B03AEB6CAACA}" dt="2025-10-08T14:48:01.931" v="68667" actId="403"/>
-        <pc:sldMkLst>
-          <pc:docMk/>
-          <pc:sldMk cId="1389874235" sldId="2147481214"/>
-        </pc:sldMkLst>
-      </pc:sldChg>
-      <pc:sldChg chg="del">
-        <pc:chgData name="Casey Lee" userId="4bc459e0-655e-452e-96c2-b918c0999cdb" providerId="ADAL" clId="{FEDCCBD3-F3AF-4248-98FF-B03AEB6CAACA}" dt="2025-10-08T12:51:36.953" v="68169" actId="47"/>
-        <pc:sldMkLst>
-          <pc:docMk/>
-          <pc:sldMk cId="300876207" sldId="2147481215"/>
-        </pc:sldMkLst>
-      </pc:sldChg>
-      <pc:sldChg chg="addSp delSp modSp mod ord">
-        <pc:chgData name="Casey Lee" userId="4bc459e0-655e-452e-96c2-b918c0999cdb" providerId="ADAL" clId="{FEDCCBD3-F3AF-4248-98FF-B03AEB6CAACA}" dt="2025-09-26T16:40:01.486" v="4856"/>
-        <pc:sldMkLst>
-          <pc:docMk/>
-          <pc:sldMk cId="145336846" sldId="2147481218"/>
-        </pc:sldMkLst>
-      </pc:sldChg>
-      <pc:sldChg chg="addSp delSp modSp add mod">
-        <pc:chgData name="Casey Lee" userId="4bc459e0-655e-452e-96c2-b918c0999cdb" providerId="ADAL" clId="{FEDCCBD3-F3AF-4248-98FF-B03AEB6CAACA}" dt="2025-10-06T14:20:01.304" v="51183" actId="6549"/>
-        <pc:sldMkLst>
-          <pc:docMk/>
-          <pc:sldMk cId="3892756515" sldId="2147481219"/>
-        </pc:sldMkLst>
-      </pc:sldChg>
-      <pc:sldChg chg="modSp mod ord modShow">
-        <pc:chgData name="Casey Lee" userId="4bc459e0-655e-452e-96c2-b918c0999cdb" providerId="ADAL" clId="{FEDCCBD3-F3AF-4248-98FF-B03AEB6CAACA}" dt="2025-09-30T17:31:46.536" v="22108" actId="729"/>
-        <pc:sldMkLst>
-          <pc:docMk/>
-          <pc:sldMk cId="2449955966" sldId="2147481220"/>
-        </pc:sldMkLst>
-      </pc:sldChg>
-      <pc:sldChg chg="modSp mod ord modShow">
-        <pc:chgData name="Casey Lee" userId="4bc459e0-655e-452e-96c2-b918c0999cdb" providerId="ADAL" clId="{FEDCCBD3-F3AF-4248-98FF-B03AEB6CAACA}" dt="2025-09-30T17:31:46.536" v="22108" actId="729"/>
-        <pc:sldMkLst>
-          <pc:docMk/>
-          <pc:sldMk cId="3753532281" sldId="2147481221"/>
-        </pc:sldMkLst>
-      </pc:sldChg>
-      <pc:sldChg chg="addSp delSp modSp mod ord modCm">
-        <pc:chgData name="Casey Lee" userId="4bc459e0-655e-452e-96c2-b918c0999cdb" providerId="ADAL" clId="{FEDCCBD3-F3AF-4248-98FF-B03AEB6CAACA}" dt="2025-10-02T17:57:31.753" v="34405" actId="255"/>
-        <pc:sldMkLst>
-          <pc:docMk/>
-          <pc:sldMk cId="1157813500" sldId="2147481222"/>
-        </pc:sldMkLst>
-        <pc:extLst>
-          <p:ext xmlns:p="http://schemas.openxmlformats.org/presentationml/2006/main" uri="{D6D511B9-2390-475A-947B-AFAB55BFBCF1}">
-            <pc226:cmChg xmlns:pc226="http://schemas.microsoft.com/office/powerpoint/2022/06/main/command" xmlns="" chg="mod">
-              <pc226:chgData name="Casey Lee" userId="4bc459e0-655e-452e-96c2-b918c0999cdb" providerId="ADAL" clId="{FEDCCBD3-F3AF-4248-98FF-B03AEB6CAACA}" dt="2025-10-02T17:15:03.050" v="32088" actId="20577"/>
-              <pc2:cmMkLst xmlns:pc2="http://schemas.microsoft.com/office/powerpoint/2019/9/main/command">
-                <pc:docMk/>
-                <pc:sldMk cId="1157813500" sldId="2147481222"/>
-                <pc2:cmMk id="{0E9EAFC1-53E0-4A88-9A39-BCE44D7D16F2}"/>
-              </pc2:cmMkLst>
-            </pc226:cmChg>
-          </p:ext>
-        </pc:extLst>
-      </pc:sldChg>
-      <pc:sldChg chg="addSp delSp modSp mod ord">
-        <pc:chgData name="Casey Lee" userId="4bc459e0-655e-452e-96c2-b918c0999cdb" providerId="ADAL" clId="{FEDCCBD3-F3AF-4248-98FF-B03AEB6CAACA}" dt="2025-10-07T14:31:19.673" v="63115"/>
-        <pc:sldMkLst>
-          <pc:docMk/>
-          <pc:sldMk cId="4242413873" sldId="2147481223"/>
-        </pc:sldMkLst>
-      </pc:sldChg>
-      <pc:sldChg chg="ord">
-        <pc:chgData name="Casey Lee" userId="4bc459e0-655e-452e-96c2-b918c0999cdb" providerId="ADAL" clId="{FEDCCBD3-F3AF-4248-98FF-B03AEB6CAACA}" dt="2025-09-30T16:46:42.429" v="21626"/>
-        <pc:sldMkLst>
-          <pc:docMk/>
-          <pc:sldMk cId="3621352377" sldId="2147481224"/>
-        </pc:sldMkLst>
-      </pc:sldChg>
-      <pc:sldChg chg="modSp mod ord">
-        <pc:chgData name="Casey Lee" userId="4bc459e0-655e-452e-96c2-b918c0999cdb" providerId="ADAL" clId="{FEDCCBD3-F3AF-4248-98FF-B03AEB6CAACA}" dt="2025-09-30T16:46:16.686" v="21623"/>
-        <pc:sldMkLst>
-          <pc:docMk/>
-          <pc:sldMk cId="1394883244" sldId="2147481226"/>
-        </pc:sldMkLst>
-      </pc:sldChg>
-      <pc:sldChg chg="addSp delSp modSp mod modCm modNotesTx">
-        <pc:chgData name="Casey Lee" userId="4bc459e0-655e-452e-96c2-b918c0999cdb" providerId="ADAL" clId="{FEDCCBD3-F3AF-4248-98FF-B03AEB6CAACA}" dt="2025-10-01T20:42:30.379" v="26286" actId="14100"/>
-        <pc:sldMkLst>
-          <pc:docMk/>
-          <pc:sldMk cId="2560992972" sldId="2147481227"/>
-        </pc:sldMkLst>
-        <pc:extLst>
-          <p:ext xmlns:p="http://schemas.openxmlformats.org/presentationml/2006/main" uri="{D6D511B9-2390-475A-947B-AFAB55BFBCF1}">
-            <pc226:cmChg xmlns:pc226="http://schemas.microsoft.com/office/powerpoint/2022/06/main/command" xmlns="" chg="mod">
-              <pc226:chgData name="Casey Lee" userId="4bc459e0-655e-452e-96c2-b918c0999cdb" providerId="ADAL" clId="{FEDCCBD3-F3AF-4248-98FF-B03AEB6CAACA}" dt="2025-10-01T20:02:15.709" v="25719" actId="20577"/>
-              <pc2:cmMkLst xmlns:pc2="http://schemas.microsoft.com/office/powerpoint/2019/9/main/command">
-                <pc:docMk/>
-                <pc:sldMk cId="2560992972" sldId="2147481227"/>
-                <pc2:cmMk id="{72D62EF9-F7A0-4789-9637-4F84044DA606}"/>
-              </pc2:cmMkLst>
-            </pc226:cmChg>
-          </p:ext>
-        </pc:extLst>
-      </pc:sldChg>
-      <pc:sldChg chg="addSp delSp modSp mod modNotesTx">
-        <pc:chgData name="Casey Lee" userId="4bc459e0-655e-452e-96c2-b918c0999cdb" providerId="ADAL" clId="{FEDCCBD3-F3AF-4248-98FF-B03AEB6CAACA}" dt="2025-10-01T20:41:18.187" v="26285" actId="478"/>
-        <pc:sldMkLst>
-          <pc:docMk/>
-          <pc:sldMk cId="427855662" sldId="2147481228"/>
-        </pc:sldMkLst>
-      </pc:sldChg>
-      <pc:sldChg chg="addSp delSp modSp add mod ord">
-        <pc:chgData name="Casey Lee" userId="4bc459e0-655e-452e-96c2-b918c0999cdb" providerId="ADAL" clId="{FEDCCBD3-F3AF-4248-98FF-B03AEB6CAACA}" dt="2025-10-07T14:04:08.712" v="61012" actId="1076"/>
-        <pc:sldMkLst>
-          <pc:docMk/>
-          <pc:sldMk cId="1426298556" sldId="2147481229"/>
-        </pc:sldMkLst>
-      </pc:sldChg>
-      <pc:sldChg chg="addSp delSp modSp add mod modNotesTx">
-        <pc:chgData name="Casey Lee" userId="4bc459e0-655e-452e-96c2-b918c0999cdb" providerId="ADAL" clId="{FEDCCBD3-F3AF-4248-98FF-B03AEB6CAACA}" dt="2025-10-02T20:01:31.975" v="37715" actId="255"/>
-        <pc:sldMkLst>
-          <pc:docMk/>
-          <pc:sldMk cId="3134119948" sldId="2147481230"/>
-        </pc:sldMkLst>
-      </pc:sldChg>
-      <pc:sldChg chg="addSp delSp modSp add mod">
-        <pc:chgData name="Casey Lee" userId="4bc459e0-655e-452e-96c2-b918c0999cdb" providerId="ADAL" clId="{FEDCCBD3-F3AF-4248-98FF-B03AEB6CAACA}" dt="2025-10-01T18:56:40.945" v="24342" actId="20577"/>
-        <pc:sldMkLst>
-          <pc:docMk/>
-          <pc:sldMk cId="1129204174" sldId="2147481231"/>
-        </pc:sldMkLst>
-      </pc:sldChg>
-      <pc:sldChg chg="modSp add mod ord">
-        <pc:chgData name="Casey Lee" userId="4bc459e0-655e-452e-96c2-b918c0999cdb" providerId="ADAL" clId="{FEDCCBD3-F3AF-4248-98FF-B03AEB6CAACA}" dt="2025-10-03T20:38:46.309" v="48204" actId="1076"/>
-        <pc:sldMkLst>
-          <pc:docMk/>
-          <pc:sldMk cId="1893241687" sldId="2147481232"/>
-        </pc:sldMkLst>
-      </pc:sldChg>
-      <pc:sldChg chg="add del">
-        <pc:chgData name="Casey Lee" userId="4bc459e0-655e-452e-96c2-b918c0999cdb" providerId="ADAL" clId="{FEDCCBD3-F3AF-4248-98FF-B03AEB6CAACA}" dt="2025-09-29T14:08:50.206" v="12280"/>
-        <pc:sldMkLst>
-          <pc:docMk/>
-          <pc:sldMk cId="1370004904" sldId="2147481234"/>
-        </pc:sldMkLst>
-      </pc:sldChg>
-      <pc:sldChg chg="addSp delSp modSp add del mod">
-        <pc:chgData name="Casey Lee" userId="4bc459e0-655e-452e-96c2-b918c0999cdb" providerId="ADAL" clId="{FEDCCBD3-F3AF-4248-98FF-B03AEB6CAACA}" dt="2025-10-03T14:53:21.106" v="42144" actId="47"/>
-        <pc:sldMkLst>
-          <pc:docMk/>
-          <pc:sldMk cId="3872972120" sldId="2147481234"/>
-        </pc:sldMkLst>
-      </pc:sldChg>
-      <pc:sldChg chg="addSp delSp modSp add del mod">
-        <pc:chgData name="Casey Lee" userId="4bc459e0-655e-452e-96c2-b918c0999cdb" providerId="ADAL" clId="{FEDCCBD3-F3AF-4248-98FF-B03AEB6CAACA}" dt="2025-10-03T13:59:31.111" v="41556" actId="47"/>
-        <pc:sldMkLst>
-          <pc:docMk/>
-          <pc:sldMk cId="2664751740" sldId="2147481235"/>
-        </pc:sldMkLst>
-      </pc:sldChg>
-      <pc:sldChg chg="addSp delSp modSp add mod modShow">
-        <pc:chgData name="Casey Lee" userId="4bc459e0-655e-452e-96c2-b918c0999cdb" providerId="ADAL" clId="{FEDCCBD3-F3AF-4248-98FF-B03AEB6CAACA}" dt="2025-10-03T15:58:41.245" v="44921" actId="14100"/>
-        <pc:sldMkLst>
-          <pc:docMk/>
-          <pc:sldMk cId="1567322584" sldId="2147481236"/>
-        </pc:sldMkLst>
-      </pc:sldChg>
-      <pc:sldChg chg="addSp delSp modSp add mod ord">
-        <pc:chgData name="Casey Lee" userId="4bc459e0-655e-452e-96c2-b918c0999cdb" providerId="ADAL" clId="{FEDCCBD3-F3AF-4248-98FF-B03AEB6CAACA}" dt="2025-10-02T05:31:02.461" v="27783" actId="27918"/>
-        <pc:sldMkLst>
-          <pc:docMk/>
-          <pc:sldMk cId="229596941" sldId="2147481237"/>
-        </pc:sldMkLst>
-      </pc:sldChg>
-      <pc:sldChg chg="addSp delSp modSp add del mod ord">
-        <pc:chgData name="Casey Lee" userId="4bc459e0-655e-452e-96c2-b918c0999cdb" providerId="ADAL" clId="{FEDCCBD3-F3AF-4248-98FF-B03AEB6CAACA}" dt="2025-10-02T05:31:02.417" v="27779" actId="27918"/>
-        <pc:sldMkLst>
-          <pc:docMk/>
-          <pc:sldMk cId="821359188" sldId="2147481238"/>
-        </pc:sldMkLst>
-      </pc:sldChg>
-      <pc:sldChg chg="addSp delSp modSp add mod ord">
-        <pc:chgData name="Casey Lee" userId="4bc459e0-655e-452e-96c2-b918c0999cdb" providerId="ADAL" clId="{FEDCCBD3-F3AF-4248-98FF-B03AEB6CAACA}" dt="2025-10-02T05:31:02.436" v="27781" actId="27918"/>
-        <pc:sldMkLst>
-          <pc:docMk/>
-          <pc:sldMk cId="1694054532" sldId="2147481239"/>
-        </pc:sldMkLst>
-      </pc:sldChg>
-      <pc:sldChg chg="addSp delSp modSp add mod ord">
-        <pc:chgData name="Casey Lee" userId="4bc459e0-655e-452e-96c2-b918c0999cdb" providerId="ADAL" clId="{FEDCCBD3-F3AF-4248-98FF-B03AEB6CAACA}" dt="2025-10-02T05:31:02.449" v="27782" actId="27918"/>
-        <pc:sldMkLst>
-          <pc:docMk/>
-          <pc:sldMk cId="3378682446" sldId="2147481240"/>
-        </pc:sldMkLst>
-      </pc:sldChg>
-      <pc:sldChg chg="addSp delSp modSp add mod">
-        <pc:chgData name="Casey Lee" userId="4bc459e0-655e-452e-96c2-b918c0999cdb" providerId="ADAL" clId="{FEDCCBD3-F3AF-4248-98FF-B03AEB6CAACA}" dt="2025-09-30T20:55:46.946" v="23942" actId="20577"/>
-        <pc:sldMkLst>
-          <pc:docMk/>
-          <pc:sldMk cId="3130016136" sldId="2147481241"/>
-        </pc:sldMkLst>
-      </pc:sldChg>
-      <pc:sldChg chg="add ord">
-        <pc:chgData name="Casey Lee" userId="4bc459e0-655e-452e-96c2-b918c0999cdb" providerId="ADAL" clId="{FEDCCBD3-F3AF-4248-98FF-B03AEB6CAACA}" dt="2025-09-30T14:41:11.888" v="19035"/>
-        <pc:sldMkLst>
-          <pc:docMk/>
-          <pc:sldMk cId="3652664627" sldId="2147481242"/>
-        </pc:sldMkLst>
-      </pc:sldChg>
-      <pc:sldChg chg="addSp delSp modSp add mod ord">
-        <pc:chgData name="Casey Lee" userId="4bc459e0-655e-452e-96c2-b918c0999cdb" providerId="ADAL" clId="{FEDCCBD3-F3AF-4248-98FF-B03AEB6CAACA}" dt="2025-10-06T14:26:54.755" v="51186" actId="20577"/>
-        <pc:sldMkLst>
-          <pc:docMk/>
-          <pc:sldMk cId="3576209394" sldId="2147481243"/>
-        </pc:sldMkLst>
-      </pc:sldChg>
-      <pc:sldChg chg="addSp delSp modSp add mod ord">
-        <pc:chgData name="Casey Lee" userId="4bc459e0-655e-452e-96c2-b918c0999cdb" providerId="ADAL" clId="{FEDCCBD3-F3AF-4248-98FF-B03AEB6CAACA}" dt="2025-10-09T14:30:09.411" v="70035" actId="20577"/>
-        <pc:sldMkLst>
-          <pc:docMk/>
-          <pc:sldMk cId="2460346233" sldId="2147481244"/>
-        </pc:sldMkLst>
-      </pc:sldChg>
-      <pc:sldChg chg="delSp add del mod">
-        <pc:chgData name="Casey Lee" userId="4bc459e0-655e-452e-96c2-b918c0999cdb" providerId="ADAL" clId="{FEDCCBD3-F3AF-4248-98FF-B03AEB6CAACA}" dt="2025-09-30T16:46:21.643" v="21624" actId="47"/>
-        <pc:sldMkLst>
-          <pc:docMk/>
-          <pc:sldMk cId="3652261605" sldId="2147481244"/>
-        </pc:sldMkLst>
-      </pc:sldChg>
-      <pc:sldChg chg="addSp delSp modSp del mod">
-        <pc:chgData name="Casey Lee" userId="4bc459e0-655e-452e-96c2-b918c0999cdb" providerId="ADAL" clId="{FEDCCBD3-F3AF-4248-98FF-B03AEB6CAACA}" dt="2025-10-03T19:07:17.692" v="46513" actId="47"/>
-        <pc:sldMkLst>
-          <pc:docMk/>
-          <pc:sldMk cId="3253257184" sldId="2147481245"/>
-        </pc:sldMkLst>
-      </pc:sldChg>
-      <pc:sldChg chg="addSp delSp modSp del mod ord">
-        <pc:chgData name="Casey Lee" userId="4bc459e0-655e-452e-96c2-b918c0999cdb" providerId="ADAL" clId="{FEDCCBD3-F3AF-4248-98FF-B03AEB6CAACA}" dt="2025-10-02T20:57:45.174" v="38909" actId="47"/>
-        <pc:sldMkLst>
-          <pc:docMk/>
-          <pc:sldMk cId="3132776874" sldId="2147481246"/>
-        </pc:sldMkLst>
-      </pc:sldChg>
-      <pc:sldChg chg="modSp mod">
-        <pc:chgData name="Casey Lee" userId="4bc459e0-655e-452e-96c2-b918c0999cdb" providerId="ADAL" clId="{FEDCCBD3-F3AF-4248-98FF-B03AEB6CAACA}" dt="2025-10-09T14:29:41.840" v="70033" actId="20577"/>
-        <pc:sldMkLst>
-          <pc:docMk/>
-          <pc:sldMk cId="2852939510" sldId="2147481248"/>
-        </pc:sldMkLst>
-      </pc:sldChg>
-      <pc:sldChg chg="add ord">
-        <pc:chgData name="Casey Lee" userId="4bc459e0-655e-452e-96c2-b918c0999cdb" providerId="ADAL" clId="{FEDCCBD3-F3AF-4248-98FF-B03AEB6CAACA}" dt="2025-10-01T19:21:14.031" v="24345"/>
-        <pc:sldMkLst>
-          <pc:docMk/>
-          <pc:sldMk cId="2363090598" sldId="2147481251"/>
-        </pc:sldMkLst>
-      </pc:sldChg>
-      <pc:sldChg chg="add ord">
-        <pc:chgData name="Casey Lee" userId="4bc459e0-655e-452e-96c2-b918c0999cdb" providerId="ADAL" clId="{FEDCCBD3-F3AF-4248-98FF-B03AEB6CAACA}" dt="2025-10-01T19:25:21.977" v="24350"/>
-        <pc:sldMkLst>
-          <pc:docMk/>
-          <pc:sldMk cId="2326761967" sldId="2147481252"/>
-        </pc:sldMkLst>
-      </pc:sldChg>
-      <pc:sldChg chg="addSp delSp modSp add mod ord">
-        <pc:chgData name="Casey Lee" userId="4bc459e0-655e-452e-96c2-b918c0999cdb" providerId="ADAL" clId="{FEDCCBD3-F3AF-4248-98FF-B03AEB6CAACA}" dt="2025-10-02T05:31:02.401" v="27778" actId="27918"/>
-        <pc:sldMkLst>
-          <pc:docMk/>
-          <pc:sldMk cId="3718838375" sldId="2147481253"/>
-        </pc:sldMkLst>
-      </pc:sldChg>
-      <pc:sldChg chg="add del">
-        <pc:chgData name="Casey Lee" userId="4bc459e0-655e-452e-96c2-b918c0999cdb" providerId="ADAL" clId="{FEDCCBD3-F3AF-4248-98FF-B03AEB6CAACA}" dt="2025-10-01T20:10:26.540" v="26275" actId="47"/>
-        <pc:sldMkLst>
-          <pc:docMk/>
-          <pc:sldMk cId="3798332572" sldId="2147481253"/>
-        </pc:sldMkLst>
-      </pc:sldChg>
-      <pc:sldChg chg="add mod ord modShow">
-        <pc:chgData name="Casey Lee" userId="4bc459e0-655e-452e-96c2-b918c0999cdb" providerId="ADAL" clId="{FEDCCBD3-F3AF-4248-98FF-B03AEB6CAACA}" dt="2025-10-02T20:28:16.132" v="37985"/>
-        <pc:sldMkLst>
-          <pc:docMk/>
-          <pc:sldMk cId="2060710732" sldId="2147481254"/>
-        </pc:sldMkLst>
-      </pc:sldChg>
-      <pc:sldChg chg="addSp delSp modSp mod modShow">
-        <pc:chgData name="Casey Lee" userId="4bc459e0-655e-452e-96c2-b918c0999cdb" providerId="ADAL" clId="{FEDCCBD3-F3AF-4248-98FF-B03AEB6CAACA}" dt="2025-10-08T20:39:16.692" v="70028" actId="122"/>
-        <pc:sldMkLst>
-          <pc:docMk/>
-          <pc:sldMk cId="988488" sldId="2147481255"/>
-        </pc:sldMkLst>
-      </pc:sldChg>
-      <pc:sldChg chg="addSp delSp modSp add del mod">
-        <pc:chgData name="Casey Lee" userId="4bc459e0-655e-452e-96c2-b918c0999cdb" providerId="ADAL" clId="{FEDCCBD3-F3AF-4248-98FF-B03AEB6CAACA}" dt="2025-10-02T18:03:09.206" v="34600" actId="47"/>
-        <pc:sldMkLst>
-          <pc:docMk/>
-          <pc:sldMk cId="527820914" sldId="2147481255"/>
-        </pc:sldMkLst>
-      </pc:sldChg>
-      <pc:sldChg chg="addSp delSp modSp add del mod">
-        <pc:chgData name="Casey Lee" userId="4bc459e0-655e-452e-96c2-b918c0999cdb" providerId="ADAL" clId="{FEDCCBD3-F3AF-4248-98FF-B03AEB6CAACA}" dt="2025-10-02T16:43:43.045" v="30085" actId="47"/>
-        <pc:sldMkLst>
-          <pc:docMk/>
-          <pc:sldMk cId="2989387375" sldId="2147481255"/>
-        </pc:sldMkLst>
-      </pc:sldChg>
-      <pc:sldChg chg="new del">
-        <pc:chgData name="Casey Lee" userId="4bc459e0-655e-452e-96c2-b918c0999cdb" providerId="ADAL" clId="{FEDCCBD3-F3AF-4248-98FF-B03AEB6CAACA}" dt="2025-10-02T17:30:01.770" v="32414" actId="47"/>
-        <pc:sldMkLst>
-          <pc:docMk/>
-          <pc:sldMk cId="3199761401" sldId="2147481255"/>
-        </pc:sldMkLst>
-      </pc:sldChg>
-      <pc:sldChg chg="delSp modSp add del mod">
-        <pc:chgData name="Casey Lee" userId="4bc459e0-655e-452e-96c2-b918c0999cdb" providerId="ADAL" clId="{FEDCCBD3-F3AF-4248-98FF-B03AEB6CAACA}" dt="2025-10-03T19:53:41.930" v="47704" actId="47"/>
-        <pc:sldMkLst>
-          <pc:docMk/>
-          <pc:sldMk cId="2390622337" sldId="2147481256"/>
-        </pc:sldMkLst>
-      </pc:sldChg>
-      <pc:sldChg chg="modSp mod">
-        <pc:chgData name="Casey Lee" userId="4bc459e0-655e-452e-96c2-b918c0999cdb" providerId="ADAL" clId="{FEDCCBD3-F3AF-4248-98FF-B03AEB6CAACA}" dt="2025-10-03T20:39:14.325" v="48212" actId="20577"/>
-        <pc:sldMkLst>
-          <pc:docMk/>
-          <pc:sldMk cId="2682905776" sldId="2147481257"/>
-        </pc:sldMkLst>
-      </pc:sldChg>
-      <pc:sldChg chg="modSp mod">
-        <pc:chgData name="Casey Lee" userId="4bc459e0-655e-452e-96c2-b918c0999cdb" providerId="ADAL" clId="{FEDCCBD3-F3AF-4248-98FF-B03AEB6CAACA}" dt="2025-10-03T20:39:56.594" v="48220" actId="20577"/>
-        <pc:sldMkLst>
-          <pc:docMk/>
-          <pc:sldMk cId="2763871" sldId="2147481258"/>
-        </pc:sldMkLst>
-      </pc:sldChg>
-      <pc:sldChg chg="addSp delSp modSp add mod">
-        <pc:chgData name="Casey Lee" userId="4bc459e0-655e-452e-96c2-b918c0999cdb" providerId="ADAL" clId="{FEDCCBD3-F3AF-4248-98FF-B03AEB6CAACA}" dt="2025-10-03T15:31:53.386" v="43638" actId="1076"/>
-        <pc:sldMkLst>
-          <pc:docMk/>
-          <pc:sldMk cId="2295337202" sldId="2147481259"/>
-        </pc:sldMkLst>
-      </pc:sldChg>
-      <pc:sldChg chg="addSp delSp modSp add mod">
-        <pc:chgData name="Casey Lee" userId="4bc459e0-655e-452e-96c2-b918c0999cdb" providerId="ADAL" clId="{FEDCCBD3-F3AF-4248-98FF-B03AEB6CAACA}" dt="2025-10-06T14:42:44.314" v="51204" actId="20577"/>
-        <pc:sldMkLst>
-          <pc:docMk/>
-          <pc:sldMk cId="2022463905" sldId="2147481260"/>
-        </pc:sldMkLst>
-      </pc:sldChg>
-      <pc:sldChg chg="addSp delSp modSp add mod">
-        <pc:chgData name="Casey Lee" userId="4bc459e0-655e-452e-96c2-b918c0999cdb" providerId="ADAL" clId="{FEDCCBD3-F3AF-4248-98FF-B03AEB6CAACA}" dt="2025-10-17T17:36:01.193" v="70061" actId="21"/>
-        <pc:sldMkLst>
-          <pc:docMk/>
-          <pc:sldMk cId="648698299" sldId="2147481261"/>
-        </pc:sldMkLst>
-      </pc:sldChg>
-      <pc:sldChg chg="modSp mod">
-        <pc:chgData name="Casey Lee" userId="4bc459e0-655e-452e-96c2-b918c0999cdb" providerId="ADAL" clId="{FEDCCBD3-F3AF-4248-98FF-B03AEB6CAACA}" dt="2025-10-03T19:00:55.817" v="46428" actId="207"/>
-        <pc:sldMkLst>
-          <pc:docMk/>
-          <pc:sldMk cId="4145473322" sldId="2147481262"/>
-        </pc:sldMkLst>
-      </pc:sldChg>
-      <pc:sldChg chg="addSp delSp modSp add mod ord">
-        <pc:chgData name="Casey Lee" userId="4bc459e0-655e-452e-96c2-b918c0999cdb" providerId="ADAL" clId="{FEDCCBD3-F3AF-4248-98FF-B03AEB6CAACA}" dt="2025-10-07T20:07:50.220" v="65922"/>
-        <pc:sldMkLst>
-          <pc:docMk/>
-          <pc:sldMk cId="756745785" sldId="2147481263"/>
-        </pc:sldMkLst>
-      </pc:sldChg>
-      <pc:sldChg chg="modSp mod">
-        <pc:chgData name="Casey Lee" userId="4bc459e0-655e-452e-96c2-b918c0999cdb" providerId="ADAL" clId="{FEDCCBD3-F3AF-4248-98FF-B03AEB6CAACA}" dt="2025-10-06T14:43:21.408" v="51208" actId="20577"/>
-        <pc:sldMkLst>
-          <pc:docMk/>
-          <pc:sldMk cId="345488764" sldId="2147481264"/>
-        </pc:sldMkLst>
-      </pc:sldChg>
-      <pc:sldChg chg="add del">
-        <pc:chgData name="Casey Lee" userId="4bc459e0-655e-452e-96c2-b918c0999cdb" providerId="ADAL" clId="{FEDCCBD3-F3AF-4248-98FF-B03AEB6CAACA}" dt="2025-10-03T18:56:44.257" v="46243" actId="47"/>
-        <pc:sldMkLst>
-          <pc:docMk/>
-          <pc:sldMk cId="1533153485" sldId="2147481265"/>
-        </pc:sldMkLst>
-      </pc:sldChg>
-      <pc:sldChg chg="modSp add mod">
-        <pc:chgData name="Casey Lee" userId="4bc459e0-655e-452e-96c2-b918c0999cdb" providerId="ADAL" clId="{FEDCCBD3-F3AF-4248-98FF-B03AEB6CAACA}" dt="2025-10-03T19:29:54.444" v="46737" actId="20577"/>
-        <pc:sldMkLst>
-          <pc:docMk/>
-          <pc:sldMk cId="2503961039" sldId="2147481265"/>
-        </pc:sldMkLst>
-      </pc:sldChg>
-      <pc:sldChg chg="mod ord modShow">
-        <pc:chgData name="Casey Lee" userId="4bc459e0-655e-452e-96c2-b918c0999cdb" providerId="ADAL" clId="{FEDCCBD3-F3AF-4248-98FF-B03AEB6CAACA}" dt="2025-10-07T21:02:19.784" v="67905" actId="729"/>
-        <pc:sldMkLst>
-          <pc:docMk/>
-          <pc:sldMk cId="863687252" sldId="2147481266"/>
-        </pc:sldMkLst>
-      </pc:sldChg>
-      <pc:sldChg chg="modSp mod">
-        <pc:chgData name="Casey Lee" userId="4bc459e0-655e-452e-96c2-b918c0999cdb" providerId="ADAL" clId="{FEDCCBD3-F3AF-4248-98FF-B03AEB6CAACA}" dt="2025-10-06T14:38:20.855" v="51196" actId="20577"/>
-        <pc:sldMkLst>
-          <pc:docMk/>
-          <pc:sldMk cId="645413853" sldId="2147481268"/>
-        </pc:sldMkLst>
-      </pc:sldChg>
-      <pc:sldChg chg="modSp mod ord modCm">
-        <pc:chgData name="Casey Lee" userId="4bc459e0-655e-452e-96c2-b918c0999cdb" providerId="ADAL" clId="{FEDCCBD3-F3AF-4248-98FF-B03AEB6CAACA}" dt="2025-10-07T20:03:15.429" v="65920"/>
-        <pc:sldMkLst>
-          <pc:docMk/>
-          <pc:sldMk cId="3907743225" sldId="2147481269"/>
-        </pc:sldMkLst>
-        <pc:extLst>
-          <p:ext xmlns:p="http://schemas.openxmlformats.org/presentationml/2006/main" uri="{D6D511B9-2390-475A-947B-AFAB55BFBCF1}">
-            <pc226:cmChg xmlns:pc226="http://schemas.microsoft.com/office/powerpoint/2022/06/main/command" xmlns="" chg="mod">
-              <pc226:chgData name="Casey Lee" userId="4bc459e0-655e-452e-96c2-b918c0999cdb" providerId="ADAL" clId="{FEDCCBD3-F3AF-4248-98FF-B03AEB6CAACA}" dt="2025-10-07T20:03:01.832" v="65912" actId="20577"/>
-              <pc2:cmMkLst xmlns:pc2="http://schemas.microsoft.com/office/powerpoint/2019/9/main/command">
-                <pc:docMk/>
-                <pc:sldMk cId="3907743225" sldId="2147481269"/>
-                <pc2:cmMk id="{1C84629E-6323-F44F-AD17-0816FD20B7E6}"/>
-              </pc2:cmMkLst>
-            </pc226:cmChg>
-          </p:ext>
-        </pc:extLst>
-      </pc:sldChg>
-      <pc:sldChg chg="del">
-        <pc:chgData name="Casey Lee" userId="4bc459e0-655e-452e-96c2-b918c0999cdb" providerId="ADAL" clId="{FEDCCBD3-F3AF-4248-98FF-B03AEB6CAACA}" dt="2025-10-07T21:02:02.298" v="67901" actId="47"/>
-        <pc:sldMkLst>
-          <pc:docMk/>
-          <pc:sldMk cId="2080702279" sldId="2147481270"/>
-        </pc:sldMkLst>
-      </pc:sldChg>
-      <pc:sldChg chg="addSp delSp modSp add mod">
-        <pc:chgData name="Casey Lee" userId="4bc459e0-655e-452e-96c2-b918c0999cdb" providerId="ADAL" clId="{FEDCCBD3-F3AF-4248-98FF-B03AEB6CAACA}" dt="2025-10-07T20:24:35.150" v="66597" actId="14100"/>
-        <pc:sldMkLst>
-          <pc:docMk/>
-          <pc:sldMk cId="869299062" sldId="2147481271"/>
-        </pc:sldMkLst>
-      </pc:sldChg>
-      <pc:sldChg chg="del">
-        <pc:chgData name="Casey Lee" userId="4bc459e0-655e-452e-96c2-b918c0999cdb" providerId="ADAL" clId="{FEDCCBD3-F3AF-4248-98FF-B03AEB6CAACA}" dt="2025-10-07T14:47:04.313" v="64602" actId="47"/>
-        <pc:sldMkLst>
-          <pc:docMk/>
-          <pc:sldMk cId="1252616050" sldId="2147481273"/>
-        </pc:sldMkLst>
-      </pc:sldChg>
-      <pc:sldChg chg="addSp delSp modSp mod ord">
-        <pc:chgData name="Casey Lee" userId="4bc459e0-655e-452e-96c2-b918c0999cdb" providerId="ADAL" clId="{FEDCCBD3-F3AF-4248-98FF-B03AEB6CAACA}" dt="2025-10-06T22:26:50.546" v="59691"/>
-        <pc:sldMkLst>
-          <pc:docMk/>
-          <pc:sldMk cId="1976876559" sldId="2147481274"/>
-        </pc:sldMkLst>
-      </pc:sldChg>
-      <pc:sldChg chg="addSp modSp mod">
-        <pc:chgData name="Casey Lee" userId="4bc459e0-655e-452e-96c2-b918c0999cdb" providerId="ADAL" clId="{FEDCCBD3-F3AF-4248-98FF-B03AEB6CAACA}" dt="2025-10-07T20:45:56.729" v="66823" actId="20577"/>
-        <pc:sldMkLst>
-          <pc:docMk/>
-          <pc:sldMk cId="926817997" sldId="2147481276"/>
-        </pc:sldMkLst>
-      </pc:sldChg>
-      <pc:sldChg chg="modSp mod">
-        <pc:chgData name="Casey Lee" userId="4bc459e0-655e-452e-96c2-b918c0999cdb" providerId="ADAL" clId="{FEDCCBD3-F3AF-4248-98FF-B03AEB6CAACA}" dt="2025-10-06T14:28:47.223" v="51187" actId="20577"/>
-        <pc:sldMkLst>
-          <pc:docMk/>
-          <pc:sldMk cId="2350308366" sldId="2147481278"/>
-        </pc:sldMkLst>
-      </pc:sldChg>
-      <pc:sldChg chg="modSp add del mod">
-        <pc:chgData name="Casey Lee" userId="4bc459e0-655e-452e-96c2-b918c0999cdb" providerId="ADAL" clId="{FEDCCBD3-F3AF-4248-98FF-B03AEB6CAACA}" dt="2025-10-06T17:59:59.603" v="51304" actId="47"/>
-        <pc:sldMkLst>
-          <pc:docMk/>
-          <pc:sldMk cId="2073971854" sldId="2147481279"/>
-        </pc:sldMkLst>
-      </pc:sldChg>
-      <pc:sldChg chg="add del">
-        <pc:chgData name="Casey Lee" userId="4bc459e0-655e-452e-96c2-b918c0999cdb" providerId="ADAL" clId="{FEDCCBD3-F3AF-4248-98FF-B03AEB6CAACA}" dt="2025-10-06T18:00:11.534" v="51306"/>
-        <pc:sldMkLst>
-          <pc:docMk/>
-          <pc:sldMk cId="2464430635" sldId="2147481279"/>
-        </pc:sldMkLst>
-      </pc:sldChg>
-      <pc:sldChg chg="delSp modSp add del mod">
-        <pc:chgData name="Casey Lee" userId="4bc459e0-655e-452e-96c2-b918c0999cdb" providerId="ADAL" clId="{FEDCCBD3-F3AF-4248-98FF-B03AEB6CAACA}" dt="2025-10-06T18:00:29.729" v="51310" actId="47"/>
-        <pc:sldMkLst>
-          <pc:docMk/>
-          <pc:sldMk cId="2680122059" sldId="2147481279"/>
-        </pc:sldMkLst>
-      </pc:sldChg>
-      <pc:sldChg chg="addSp delSp modSp add del mod">
-        <pc:chgData name="Casey Lee" userId="4bc459e0-655e-452e-96c2-b918c0999cdb" providerId="ADAL" clId="{FEDCCBD3-F3AF-4248-98FF-B03AEB6CAACA}" dt="2025-10-06T20:03:10.927" v="53757" actId="47"/>
-        <pc:sldMkLst>
-          <pc:docMk/>
-          <pc:sldMk cId="3991912433" sldId="2147481279"/>
-        </pc:sldMkLst>
-      </pc:sldChg>
-      <pc:sldChg chg="add del">
-        <pc:chgData name="Casey Lee" userId="4bc459e0-655e-452e-96c2-b918c0999cdb" providerId="ADAL" clId="{FEDCCBD3-F3AF-4248-98FF-B03AEB6CAACA}" dt="2025-10-06T20:11:57.506" v="54064" actId="47"/>
-        <pc:sldMkLst>
-          <pc:docMk/>
-          <pc:sldMk cId="2121545136" sldId="2147481281"/>
-        </pc:sldMkLst>
-      </pc:sldChg>
-      <pc:sldChg chg="addSp delSp modSp add del mod">
-        <pc:chgData name="Casey Lee" userId="4bc459e0-655e-452e-96c2-b918c0999cdb" providerId="ADAL" clId="{FEDCCBD3-F3AF-4248-98FF-B03AEB6CAACA}" dt="2025-10-06T20:04:56.588" v="53773" actId="47"/>
-        <pc:sldMkLst>
-          <pc:docMk/>
-          <pc:sldMk cId="1440506278" sldId="2147481282"/>
-        </pc:sldMkLst>
-      </pc:sldChg>
-      <pc:sldChg chg="addSp delSp modSp add del mod">
-        <pc:chgData name="Casey Lee" userId="4bc459e0-655e-452e-96c2-b918c0999cdb" providerId="ADAL" clId="{FEDCCBD3-F3AF-4248-98FF-B03AEB6CAACA}" dt="2025-10-06T20:08:45.813" v="53874" actId="47"/>
-        <pc:sldMkLst>
-          <pc:docMk/>
-          <pc:sldMk cId="3422270090" sldId="2147481283"/>
-        </pc:sldMkLst>
-      </pc:sldChg>
-      <pc:sldChg chg="addSp delSp modSp add mod ord">
-        <pc:chgData name="Casey Lee" userId="4bc459e0-655e-452e-96c2-b918c0999cdb" providerId="ADAL" clId="{FEDCCBD3-F3AF-4248-98FF-B03AEB6CAACA}" dt="2025-10-07T19:05:05.388" v="65578"/>
-        <pc:sldMkLst>
-          <pc:docMk/>
-          <pc:sldMk cId="1246806865" sldId="2147481284"/>
-        </pc:sldMkLst>
-      </pc:sldChg>
-      <pc:sldChg chg="addSp delSp modSp add del mod ord modShow">
-        <pc:chgData name="Casey Lee" userId="4bc459e0-655e-452e-96c2-b918c0999cdb" providerId="ADAL" clId="{FEDCCBD3-F3AF-4248-98FF-B03AEB6CAACA}" dt="2025-10-06T21:41:42.945" v="57193" actId="47"/>
-        <pc:sldMkLst>
-          <pc:docMk/>
-          <pc:sldMk cId="3679891914" sldId="2147481285"/>
-        </pc:sldMkLst>
-      </pc:sldChg>
-      <pc:sldChg chg="addSp delSp modSp add mod">
-        <pc:chgData name="Casey Lee" userId="4bc459e0-655e-452e-96c2-b918c0999cdb" providerId="ADAL" clId="{FEDCCBD3-F3AF-4248-98FF-B03AEB6CAACA}" dt="2025-10-07T21:11:25.626" v="68168"/>
-        <pc:sldMkLst>
-          <pc:docMk/>
-          <pc:sldMk cId="2379161747" sldId="2147481286"/>
-        </pc:sldMkLst>
-      </pc:sldChg>
-      <pc:sldChg chg="modSp add del mod">
-        <pc:chgData name="Casey Lee" userId="4bc459e0-655e-452e-96c2-b918c0999cdb" providerId="ADAL" clId="{FEDCCBD3-F3AF-4248-98FF-B03AEB6CAACA}" dt="2025-10-06T21:14:50.008" v="55647" actId="47"/>
-        <pc:sldMkLst>
-          <pc:docMk/>
-          <pc:sldMk cId="1754210451" sldId="2147481287"/>
-        </pc:sldMkLst>
-      </pc:sldChg>
-      <pc:sldChg chg="addSp delSp modSp add mod ord modNotesTx">
-        <pc:chgData name="Casey Lee" userId="4bc459e0-655e-452e-96c2-b918c0999cdb" providerId="ADAL" clId="{FEDCCBD3-F3AF-4248-98FF-B03AEB6CAACA}" dt="2025-10-08T13:51:35.424" v="68204" actId="20577"/>
-        <pc:sldMkLst>
-          <pc:docMk/>
-          <pc:sldMk cId="2042423855" sldId="2147481287"/>
-        </pc:sldMkLst>
-      </pc:sldChg>
-      <pc:sldChg chg="add del">
-        <pc:chgData name="Casey Lee" userId="4bc459e0-655e-452e-96c2-b918c0999cdb" providerId="ADAL" clId="{FEDCCBD3-F3AF-4248-98FF-B03AEB6CAACA}" dt="2025-10-06T21:52:12.046" v="57717" actId="47"/>
-        <pc:sldMkLst>
-          <pc:docMk/>
-          <pc:sldMk cId="1027152683" sldId="2147481288"/>
-        </pc:sldMkLst>
-      </pc:sldChg>
-      <pc:sldChg chg="delSp modSp add mod ord">
-        <pc:chgData name="Casey Lee" userId="4bc459e0-655e-452e-96c2-b918c0999cdb" providerId="ADAL" clId="{FEDCCBD3-F3AF-4248-98FF-B03AEB6CAACA}" dt="2025-10-07T19:05:05.388" v="65578"/>
-        <pc:sldMkLst>
-          <pc:docMk/>
-          <pc:sldMk cId="1092428753" sldId="2147481288"/>
-        </pc:sldMkLst>
-      </pc:sldChg>
-      <pc:sldChg chg="add del">
-        <pc:chgData name="Casey Lee" userId="4bc459e0-655e-452e-96c2-b918c0999cdb" providerId="ADAL" clId="{FEDCCBD3-F3AF-4248-98FF-B03AEB6CAACA}" dt="2025-10-06T21:46:01.387" v="57264"/>
-        <pc:sldMkLst>
-          <pc:docMk/>
-          <pc:sldMk cId="4225137205" sldId="2147481288"/>
-        </pc:sldMkLst>
-      </pc:sldChg>
-      <pc:sldChg chg="modSp add mod">
-        <pc:chgData name="Casey Lee" userId="4bc459e0-655e-452e-96c2-b918c0999cdb" providerId="ADAL" clId="{FEDCCBD3-F3AF-4248-98FF-B03AEB6CAACA}" dt="2025-10-07T19:52:51.587" v="65705" actId="948"/>
-        <pc:sldMkLst>
-          <pc:docMk/>
-          <pc:sldMk cId="2213353267" sldId="2147481289"/>
-        </pc:sldMkLst>
-      </pc:sldChg>
-      <pc:sldChg chg="add ord">
-        <pc:chgData name="Casey Lee" userId="4bc459e0-655e-452e-96c2-b918c0999cdb" providerId="ADAL" clId="{FEDCCBD3-F3AF-4248-98FF-B03AEB6CAACA}" dt="2025-10-07T21:00:42.858" v="67899"/>
-        <pc:sldMkLst>
-          <pc:docMk/>
-          <pc:sldMk cId="1751227399" sldId="2147481290"/>
-        </pc:sldMkLst>
-      </pc:sldChg>
-      <pc:sldChg chg="modSp add mod">
-        <pc:chgData name="Casey Lee" userId="4bc459e0-655e-452e-96c2-b918c0999cdb" providerId="ADAL" clId="{FEDCCBD3-F3AF-4248-98FF-B03AEB6CAACA}" dt="2025-10-07T19:53:56.299" v="65827" actId="1076"/>
-        <pc:sldMkLst>
-          <pc:docMk/>
-          <pc:sldMk cId="1156650361" sldId="2147481291"/>
-        </pc:sldMkLst>
-      </pc:sldChg>
-      <pc:sldChg chg="add del">
-        <pc:chgData name="Casey Lee" userId="4bc459e0-655e-452e-96c2-b918c0999cdb" providerId="ADAL" clId="{FEDCCBD3-F3AF-4248-98FF-B03AEB6CAACA}" dt="2025-10-07T21:02:06.578" v="67902" actId="47"/>
-        <pc:sldMkLst>
-          <pc:docMk/>
-          <pc:sldMk cId="361016522" sldId="2147481292"/>
-        </pc:sldMkLst>
-      </pc:sldChg>
-      <pc:sldChg chg="addSp delSp modSp add del mod ord">
-        <pc:chgData name="Casey Lee" userId="4bc459e0-655e-452e-96c2-b918c0999cdb" providerId="ADAL" clId="{FEDCCBD3-F3AF-4248-98FF-B03AEB6CAACA}" dt="2025-10-08T17:27:26.723" v="69666" actId="47"/>
-        <pc:sldMkLst>
-          <pc:docMk/>
-          <pc:sldMk cId="3867349040" sldId="2147481294"/>
-        </pc:sldMkLst>
-      </pc:sldChg>
-      <pc:sldChg chg="addSp delSp modSp add mod ord">
-        <pc:chgData name="Casey Lee" userId="4bc459e0-655e-452e-96c2-b918c0999cdb" providerId="ADAL" clId="{FEDCCBD3-F3AF-4248-98FF-B03AEB6CAACA}" dt="2025-10-08T18:13:18.131" v="69766"/>
-        <pc:sldMkLst>
-          <pc:docMk/>
-          <pc:sldMk cId="277216321" sldId="2147481295"/>
-        </pc:sldMkLst>
-      </pc:sldChg>
-      <pc:sldChg chg="delSp modSp add del mod">
-        <pc:chgData name="Casey Lee" userId="4bc459e0-655e-452e-96c2-b918c0999cdb" providerId="ADAL" clId="{FEDCCBD3-F3AF-4248-98FF-B03AEB6CAACA}" dt="2025-10-08T17:25:27.263" v="69638" actId="47"/>
-        <pc:sldMkLst>
-          <pc:docMk/>
-          <pc:sldMk cId="525573459" sldId="2147481295"/>
-        </pc:sldMkLst>
-      </pc:sldChg>
-      <pc:sldChg chg="addSp delSp modSp add del mod">
-        <pc:chgData name="Casey Lee" userId="4bc459e0-655e-452e-96c2-b918c0999cdb" providerId="ADAL" clId="{FEDCCBD3-F3AF-4248-98FF-B03AEB6CAACA}" dt="2025-10-08T20:34:36.066" v="69822" actId="47"/>
-        <pc:sldMkLst>
-          <pc:docMk/>
-          <pc:sldMk cId="1403578223" sldId="2147481296"/>
-        </pc:sldMkLst>
-      </pc:sldChg>
-      <pc:sldChg chg="add">
-        <pc:chgData name="Casey Lee" userId="4bc459e0-655e-452e-96c2-b918c0999cdb" providerId="ADAL" clId="{FEDCCBD3-F3AF-4248-98FF-B03AEB6CAACA}" dt="2025-10-08T20:34:09.412" v="69814"/>
-        <pc:sldMkLst>
-          <pc:docMk/>
-          <pc:sldMk cId="3933677755" sldId="2147481297"/>
-        </pc:sldMkLst>
-      </pc:sldChg>
-      <pc:sldChg chg="modSp add del mod">
-        <pc:chgData name="Casey Lee" userId="4bc459e0-655e-452e-96c2-b918c0999cdb" providerId="ADAL" clId="{FEDCCBD3-F3AF-4248-98FF-B03AEB6CAACA}" dt="2025-10-10T22:07:45.214" v="70059" actId="47"/>
-        <pc:sldMkLst>
-          <pc:docMk/>
-          <pc:sldMk cId="634037322" sldId="2147481298"/>
-        </pc:sldMkLst>
-      </pc:sldChg>
-    </pc:docChg>
-  </pc:docChgLst>
-  <pc:docChgLst>
-    <pc:chgData name="Hernan Ramirez Diaz" userId="0b0763af-8f1b-4303-84e1-6429285cc810" providerId="ADAL" clId="{42163F52-BB8D-4D37-ACEA-9F3481FEDAF8}"/>
-    <pc:docChg chg="undo redo custSel addSld delSld modSld sldOrd modSection">
-      <pc:chgData name="Hernan Ramirez Diaz" userId="0b0763af-8f1b-4303-84e1-6429285cc810" providerId="ADAL" clId="{42163F52-BB8D-4D37-ACEA-9F3481FEDAF8}" dt="2025-10-09T23:46:55.071" v="23066" actId="47"/>
-      <pc:docMkLst>
-        <pc:docMk/>
-      </pc:docMkLst>
-      <pc:sldChg chg="ord">
-        <pc:chgData name="Hernan Ramirez Diaz" userId="0b0763af-8f1b-4303-84e1-6429285cc810" providerId="ADAL" clId="{42163F52-BB8D-4D37-ACEA-9F3481FEDAF8}" dt="2025-10-03T21:28:29.889" v="12946"/>
-        <pc:sldMkLst>
-          <pc:docMk/>
-          <pc:sldMk cId="0" sldId="274"/>
-        </pc:sldMkLst>
-      </pc:sldChg>
-      <pc:sldChg chg="modSp mod">
-        <pc:chgData name="Hernan Ramirez Diaz" userId="0b0763af-8f1b-4303-84e1-6429285cc810" providerId="ADAL" clId="{42163F52-BB8D-4D37-ACEA-9F3481FEDAF8}" dt="2025-10-09T17:08:26.822" v="22799" actId="20577"/>
-        <pc:sldMkLst>
-          <pc:docMk/>
-          <pc:sldMk cId="0" sldId="275"/>
-        </pc:sldMkLst>
-      </pc:sldChg>
-      <pc:sldChg chg="add">
-        <pc:chgData name="Hernan Ramirez Diaz" userId="0b0763af-8f1b-4303-84e1-6429285cc810" providerId="ADAL" clId="{42163F52-BB8D-4D37-ACEA-9F3481FEDAF8}" dt="2025-09-30T22:48:51.036" v="3291"/>
-        <pc:sldMkLst>
-          <pc:docMk/>
-          <pc:sldMk cId="1802258249" sldId="280"/>
-        </pc:sldMkLst>
-      </pc:sldChg>
-      <pc:sldChg chg="modSp mod">
-        <pc:chgData name="Hernan Ramirez Diaz" userId="0b0763af-8f1b-4303-84e1-6429285cc810" providerId="ADAL" clId="{42163F52-BB8D-4D37-ACEA-9F3481FEDAF8}" dt="2025-10-09T18:04:53.412" v="22846" actId="20577"/>
-        <pc:sldMkLst>
-          <pc:docMk/>
-          <pc:sldMk cId="1694384516" sldId="285"/>
-        </pc:sldMkLst>
-      </pc:sldChg>
-      <pc:sldChg chg="add">
-        <pc:chgData name="Hernan Ramirez Diaz" userId="0b0763af-8f1b-4303-84e1-6429285cc810" providerId="ADAL" clId="{42163F52-BB8D-4D37-ACEA-9F3481FEDAF8}" dt="2025-09-30T22:48:51.036" v="3291"/>
-        <pc:sldMkLst>
-          <pc:docMk/>
-          <pc:sldMk cId="1946109353" sldId="355"/>
-        </pc:sldMkLst>
-      </pc:sldChg>
-      <pc:sldChg chg="addSp delSp modSp mod">
-        <pc:chgData name="Hernan Ramirez Diaz" userId="0b0763af-8f1b-4303-84e1-6429285cc810" providerId="ADAL" clId="{42163F52-BB8D-4D37-ACEA-9F3481FEDAF8}" dt="2025-09-26T19:17:47.895" v="1246" actId="478"/>
-        <pc:sldMkLst>
-          <pc:docMk/>
-          <pc:sldMk cId="2675615646" sldId="419"/>
-        </pc:sldMkLst>
-      </pc:sldChg>
-      <pc:sldChg chg="addSp delSp modSp add mod modCm modNotesTx">
-        <pc:chgData name="Hernan Ramirez Diaz" userId="0b0763af-8f1b-4303-84e1-6429285cc810" providerId="ADAL" clId="{42163F52-BB8D-4D37-ACEA-9F3481FEDAF8}" dt="2025-10-09T18:32:21.559" v="22854" actId="255"/>
-        <pc:sldMkLst>
-          <pc:docMk/>
-          <pc:sldMk cId="1299622664" sldId="434"/>
-        </pc:sldMkLst>
-        <pc:extLst>
-          <p:ext xmlns:p="http://schemas.openxmlformats.org/presentationml/2006/main" uri="{D6D511B9-2390-475A-947B-AFAB55BFBCF1}">
-            <pc226:cmChg xmlns:pc226="http://schemas.microsoft.com/office/powerpoint/2022/06/main/command" xmlns="" chg="mod">
-              <pc226:chgData name="Hernan Ramirez Diaz" userId="0b0763af-8f1b-4303-84e1-6429285cc810" providerId="ADAL" clId="{42163F52-BB8D-4D37-ACEA-9F3481FEDAF8}" dt="2025-10-09T18:32:19.001" v="22853" actId="20577"/>
-              <pc2:cmMkLst xmlns:pc2="http://schemas.microsoft.com/office/powerpoint/2019/9/main/command">
-                <pc:docMk/>
-                <pc:sldMk cId="1299622664" sldId="434"/>
-                <pc2:cmMk id="{9C52BFDD-9F11-4C01-8EA9-393721749318}"/>
-              </pc2:cmMkLst>
-            </pc226:cmChg>
-          </p:ext>
-        </pc:extLst>
-      </pc:sldChg>
-      <pc:sldChg chg="addSp delSp modSp mod">
-        <pc:chgData name="Hernan Ramirez Diaz" userId="0b0763af-8f1b-4303-84e1-6429285cc810" providerId="ADAL" clId="{42163F52-BB8D-4D37-ACEA-9F3481FEDAF8}" dt="2025-10-04T05:39:23.308" v="18433" actId="20577"/>
-        <pc:sldMkLst>
-          <pc:docMk/>
-          <pc:sldMk cId="2761368814" sldId="2147481181"/>
-        </pc:sldMkLst>
-      </pc:sldChg>
-      <pc:sldChg chg="ord">
-        <pc:chgData name="Hernan Ramirez Diaz" userId="0b0763af-8f1b-4303-84e1-6429285cc810" providerId="ADAL" clId="{42163F52-BB8D-4D37-ACEA-9F3481FEDAF8}" dt="2025-09-26T17:01:54.525" v="385"/>
-        <pc:sldMkLst>
-          <pc:docMk/>
-          <pc:sldMk cId="1105021549" sldId="2147481210"/>
-        </pc:sldMkLst>
-      </pc:sldChg>
-      <pc:sldChg chg="modSp mod modCm">
-        <pc:chgData name="Hernan Ramirez Diaz" userId="0b0763af-8f1b-4303-84e1-6429285cc810" providerId="ADAL" clId="{42163F52-BB8D-4D37-ACEA-9F3481FEDAF8}" dt="2025-10-03T16:10:51.912" v="10625" actId="14100"/>
-        <pc:sldMkLst>
-          <pc:docMk/>
-          <pc:sldMk cId="323746144" sldId="2147481211"/>
-        </pc:sldMkLst>
-        <pc:extLst>
-          <p:ext xmlns:p="http://schemas.openxmlformats.org/presentationml/2006/main" uri="{D6D511B9-2390-475A-947B-AFAB55BFBCF1}">
-            <pc226:cmChg xmlns:pc226="http://schemas.microsoft.com/office/powerpoint/2022/06/main/command" xmlns="" chg="mod">
-              <pc226:chgData name="Hernan Ramirez Diaz" userId="0b0763af-8f1b-4303-84e1-6429285cc810" providerId="ADAL" clId="{42163F52-BB8D-4D37-ACEA-9F3481FEDAF8}" dt="2025-10-02T22:39:01.158" v="9248" actId="20577"/>
-              <pc2:cmMkLst xmlns:pc2="http://schemas.microsoft.com/office/powerpoint/2019/9/main/command">
-                <pc:docMk/>
-                <pc:sldMk cId="323746144" sldId="2147481211"/>
-                <pc2:cmMk id="{39EB2F37-B8FD-49D1-A4FF-14B267B24A40}"/>
-              </pc2:cmMkLst>
-            </pc226:cmChg>
-          </p:ext>
-        </pc:extLst>
-      </pc:sldChg>
-      <pc:sldChg chg="modSp mod">
-        <pc:chgData name="Hernan Ramirez Diaz" userId="0b0763af-8f1b-4303-84e1-6429285cc810" providerId="ADAL" clId="{42163F52-BB8D-4D37-ACEA-9F3481FEDAF8}" dt="2025-10-09T04:58:22.879" v="22528" actId="1035"/>
-        <pc:sldMkLst>
-          <pc:docMk/>
-          <pc:sldMk cId="83366420" sldId="2147481212"/>
-        </pc:sldMkLst>
-      </pc:sldChg>
-      <pc:sldChg chg="delSp modSp mod">
-        <pc:chgData name="Hernan Ramirez Diaz" userId="0b0763af-8f1b-4303-84e1-6429285cc810" providerId="ADAL" clId="{42163F52-BB8D-4D37-ACEA-9F3481FEDAF8}" dt="2025-10-09T17:03:58.170" v="22792" actId="20577"/>
-        <pc:sldMkLst>
-          <pc:docMk/>
-          <pc:sldMk cId="1270242671" sldId="2147481213"/>
-        </pc:sldMkLst>
-        <pc:spChg chg="mod">
-          <ac:chgData name="Hernan Ramirez Diaz" userId="0b0763af-8f1b-4303-84e1-6429285cc810" providerId="ADAL" clId="{42163F52-BB8D-4D37-ACEA-9F3481FEDAF8}" dt="2025-10-09T17:03:58.170" v="22792" actId="20577"/>
-          <ac:spMkLst>
-            <pc:docMk/>
-            <pc:sldMk cId="1270242671" sldId="2147481213"/>
-            <ac:spMk id="4" creationId="{F93D6D7D-FF3F-82F6-14A4-6285C0323998}"/>
-          </ac:spMkLst>
-        </pc:spChg>
-        <pc:graphicFrameChg chg="mod modGraphic">
-          <ac:chgData name="Hernan Ramirez Diaz" userId="0b0763af-8f1b-4303-84e1-6429285cc810" providerId="ADAL" clId="{42163F52-BB8D-4D37-ACEA-9F3481FEDAF8}" dt="2025-10-03T22:43:17.109" v="14321" actId="207"/>
-          <ac:graphicFrameMkLst>
-            <pc:docMk/>
-            <pc:sldMk cId="1270242671" sldId="2147481213"/>
-            <ac:graphicFrameMk id="2" creationId="{38F22EE9-DEDC-E1DA-1E19-E1758E9C192D}"/>
-          </ac:graphicFrameMkLst>
-        </pc:graphicFrameChg>
-      </pc:sldChg>
-      <pc:sldChg chg="delSp modSp mod">
-        <pc:chgData name="Hernan Ramirez Diaz" userId="0b0763af-8f1b-4303-84e1-6429285cc810" providerId="ADAL" clId="{42163F52-BB8D-4D37-ACEA-9F3481FEDAF8}" dt="2025-10-09T05:00:32.384" v="22644" actId="1035"/>
-        <pc:sldMkLst>
-          <pc:docMk/>
-          <pc:sldMk cId="1389874235" sldId="2147481214"/>
-        </pc:sldMkLst>
-      </pc:sldChg>
-      <pc:sldChg chg="modSp add mod">
-        <pc:chgData name="Hernan Ramirez Diaz" userId="0b0763af-8f1b-4303-84e1-6429285cc810" providerId="ADAL" clId="{42163F52-BB8D-4D37-ACEA-9F3481FEDAF8}" dt="2025-10-03T19:58:25.863" v="12889" actId="14100"/>
-        <pc:sldMkLst>
-          <pc:docMk/>
-          <pc:sldMk cId="300876207" sldId="2147481215"/>
-        </pc:sldMkLst>
-      </pc:sldChg>
-      <pc:sldChg chg="add del ord">
-        <pc:chgData name="Hernan Ramirez Diaz" userId="0b0763af-8f1b-4303-84e1-6429285cc810" providerId="ADAL" clId="{42163F52-BB8D-4D37-ACEA-9F3481FEDAF8}" dt="2025-10-03T19:19:44.098" v="12538" actId="2696"/>
-        <pc:sldMkLst>
-          <pc:docMk/>
-          <pc:sldMk cId="3040778351" sldId="2147481215"/>
-        </pc:sldMkLst>
-      </pc:sldChg>
-      <pc:sldChg chg="del">
-        <pc:chgData name="Hernan Ramirez Diaz" userId="0b0763af-8f1b-4303-84e1-6429285cc810" providerId="ADAL" clId="{42163F52-BB8D-4D37-ACEA-9F3481FEDAF8}" dt="2025-10-01T19:52:59.448" v="3710" actId="47"/>
-        <pc:sldMkLst>
-          <pc:docMk/>
-          <pc:sldMk cId="1707149320" sldId="2147481216"/>
-        </pc:sldMkLst>
-      </pc:sldChg>
-      <pc:sldChg chg="addSp delSp modSp mod ord modCm">
-        <pc:chgData name="Hernan Ramirez Diaz" userId="0b0763af-8f1b-4303-84e1-6429285cc810" providerId="ADAL" clId="{42163F52-BB8D-4D37-ACEA-9F3481FEDAF8}" dt="2025-10-09T17:24:41.542" v="22829" actId="20577"/>
-        <pc:sldMkLst>
-          <pc:docMk/>
-          <pc:sldMk cId="3892756515" sldId="2147481219"/>
-        </pc:sldMkLst>
-        <pc:extLst>
-          <p:ext xmlns:p="http://schemas.openxmlformats.org/presentationml/2006/main" uri="{D6D511B9-2390-475A-947B-AFAB55BFBCF1}">
-            <pc226:cmChg xmlns:pc226="http://schemas.microsoft.com/office/powerpoint/2022/06/main/command" xmlns="" chg="mod">
-              <pc226:chgData name="Hernan Ramirez Diaz" userId="0b0763af-8f1b-4303-84e1-6429285cc810" providerId="ADAL" clId="{42163F52-BB8D-4D37-ACEA-9F3481FEDAF8}" dt="2025-10-09T17:24:41.542" v="22829" actId="20577"/>
-              <pc2:cmMkLst xmlns:pc2="http://schemas.microsoft.com/office/powerpoint/2019/9/main/command">
-                <pc:docMk/>
-                <pc:sldMk cId="3892756515" sldId="2147481219"/>
-                <pc2:cmMk id="{E4D7CC20-49CD-274F-A77F-C5E4F47D747E}"/>
-              </pc2:cmMkLst>
-            </pc226:cmChg>
-          </p:ext>
-        </pc:extLst>
-      </pc:sldChg>
-      <pc:sldChg chg="modSp mod modCm">
-        <pc:chgData name="Hernan Ramirez Diaz" userId="0b0763af-8f1b-4303-84e1-6429285cc810" providerId="ADAL" clId="{42163F52-BB8D-4D37-ACEA-9F3481FEDAF8}" dt="2025-10-09T04:59:47.752" v="22596" actId="1035"/>
-        <pc:sldMkLst>
-          <pc:docMk/>
-          <pc:sldMk cId="1157813500" sldId="2147481222"/>
-        </pc:sldMkLst>
-        <pc:extLst>
-          <p:ext xmlns:p="http://schemas.openxmlformats.org/presentationml/2006/main" uri="{D6D511B9-2390-475A-947B-AFAB55BFBCF1}">
-            <pc226:cmChg xmlns:pc226="http://schemas.microsoft.com/office/powerpoint/2022/06/main/command" xmlns="" chg="mod">
-              <pc226:chgData name="Hernan Ramirez Diaz" userId="0b0763af-8f1b-4303-84e1-6429285cc810" providerId="ADAL" clId="{42163F52-BB8D-4D37-ACEA-9F3481FEDAF8}" dt="2025-10-07T18:20:22.027" v="21107" actId="20577"/>
-              <pc2:cmMkLst xmlns:pc2="http://schemas.microsoft.com/office/powerpoint/2019/9/main/command">
-                <pc:docMk/>
-                <pc:sldMk cId="1157813500" sldId="2147481222"/>
-                <pc2:cmMk id="{0E9EAFC1-53E0-4A88-9A39-BCE44D7D16F2}"/>
-              </pc2:cmMkLst>
-            </pc226:cmChg>
-          </p:ext>
-        </pc:extLst>
-      </pc:sldChg>
-      <pc:sldChg chg="modSp mod">
-        <pc:chgData name="Hernan Ramirez Diaz" userId="0b0763af-8f1b-4303-84e1-6429285cc810" providerId="ADAL" clId="{42163F52-BB8D-4D37-ACEA-9F3481FEDAF8}" dt="2025-10-09T04:59:40.805" v="22590" actId="1035"/>
-        <pc:sldMkLst>
-          <pc:docMk/>
-          <pc:sldMk cId="4242413873" sldId="2147481223"/>
-        </pc:sldMkLst>
-      </pc:sldChg>
-      <pc:sldChg chg="ord">
-        <pc:chgData name="Hernan Ramirez Diaz" userId="0b0763af-8f1b-4303-84e1-6429285cc810" providerId="ADAL" clId="{42163F52-BB8D-4D37-ACEA-9F3481FEDAF8}" dt="2025-09-26T17:20:04.965" v="447"/>
-        <pc:sldMkLst>
-          <pc:docMk/>
-          <pc:sldMk cId="3621352377" sldId="2147481224"/>
-        </pc:sldMkLst>
-      </pc:sldChg>
-      <pc:sldChg chg="ord">
-        <pc:chgData name="Hernan Ramirez Diaz" userId="0b0763af-8f1b-4303-84e1-6429285cc810" providerId="ADAL" clId="{42163F52-BB8D-4D37-ACEA-9F3481FEDAF8}" dt="2025-09-26T17:01:54.525" v="385"/>
-        <pc:sldMkLst>
-          <pc:docMk/>
-          <pc:sldMk cId="2178493738" sldId="2147481225"/>
-        </pc:sldMkLst>
-      </pc:sldChg>
-      <pc:sldChg chg="addSp delSp modSp mod ord modCm">
-        <pc:chgData name="Hernan Ramirez Diaz" userId="0b0763af-8f1b-4303-84e1-6429285cc810" providerId="ADAL" clId="{42163F52-BB8D-4D37-ACEA-9F3481FEDAF8}" dt="2025-10-09T17:15:40.602" v="22819" actId="20577"/>
-        <pc:sldMkLst>
-          <pc:docMk/>
-          <pc:sldMk cId="2560992972" sldId="2147481227"/>
-        </pc:sldMkLst>
-        <pc:extLst>
-          <p:ext xmlns:p="http://schemas.openxmlformats.org/presentationml/2006/main" uri="{D6D511B9-2390-475A-947B-AFAB55BFBCF1}">
-            <pc226:cmChg xmlns:pc226="http://schemas.microsoft.com/office/powerpoint/2022/06/main/command" xmlns="" chg="mod">
-              <pc226:chgData name="Hernan Ramirez Diaz" userId="0b0763af-8f1b-4303-84e1-6429285cc810" providerId="ADAL" clId="{42163F52-BB8D-4D37-ACEA-9F3481FEDAF8}" dt="2025-10-09T17:15:40.602" v="22819" actId="20577"/>
-              <pc2:cmMkLst xmlns:pc2="http://schemas.microsoft.com/office/powerpoint/2019/9/main/command">
-                <pc:docMk/>
-                <pc:sldMk cId="2560992972" sldId="2147481227"/>
-                <pc2:cmMk id="{72D62EF9-F7A0-4789-9637-4F84044DA606}"/>
-              </pc2:cmMkLst>
-            </pc226:cmChg>
-          </p:ext>
-        </pc:extLst>
-      </pc:sldChg>
-      <pc:sldChg chg="addSp delSp modSp mod ord">
-        <pc:chgData name="Hernan Ramirez Diaz" userId="0b0763af-8f1b-4303-84e1-6429285cc810" providerId="ADAL" clId="{42163F52-BB8D-4D37-ACEA-9F3481FEDAF8}" dt="2025-10-09T19:32:50.791" v="23064" actId="1037"/>
-        <pc:sldMkLst>
-          <pc:docMk/>
-          <pc:sldMk cId="427855662" sldId="2147481228"/>
-        </pc:sldMkLst>
-      </pc:sldChg>
-      <pc:sldChg chg="modSp mod ord modNotesTx">
-        <pc:chgData name="Hernan Ramirez Diaz" userId="0b0763af-8f1b-4303-84e1-6429285cc810" providerId="ADAL" clId="{42163F52-BB8D-4D37-ACEA-9F3481FEDAF8}" dt="2025-10-09T04:57:52.012" v="22487" actId="1035"/>
-        <pc:sldMkLst>
-          <pc:docMk/>
-          <pc:sldMk cId="1426298556" sldId="2147481229"/>
-        </pc:sldMkLst>
-      </pc:sldChg>
-      <pc:sldChg chg="addSp delSp modSp mod">
-        <pc:chgData name="Hernan Ramirez Diaz" userId="0b0763af-8f1b-4303-84e1-6429285cc810" providerId="ADAL" clId="{42163F52-BB8D-4D37-ACEA-9F3481FEDAF8}" dt="2025-10-09T04:57:58.079" v="22501" actId="1035"/>
-        <pc:sldMkLst>
-          <pc:docMk/>
-          <pc:sldMk cId="3134119948" sldId="2147481230"/>
-        </pc:sldMkLst>
-      </pc:sldChg>
-      <pc:sldChg chg="delSp modSp del mod">
-        <pc:chgData name="Hernan Ramirez Diaz" userId="0b0763af-8f1b-4303-84e1-6429285cc810" providerId="ADAL" clId="{42163F52-BB8D-4D37-ACEA-9F3481FEDAF8}" dt="2025-10-02T20:26:03.335" v="8228" actId="47"/>
-        <pc:sldMkLst>
-          <pc:docMk/>
-          <pc:sldMk cId="1129204174" sldId="2147481231"/>
-        </pc:sldMkLst>
-      </pc:sldChg>
-      <pc:sldChg chg="addSp delSp modSp mod modCm">
-        <pc:chgData name="Hernan Ramirez Diaz" userId="0b0763af-8f1b-4303-84e1-6429285cc810" providerId="ADAL" clId="{42163F52-BB8D-4D37-ACEA-9F3481FEDAF8}" dt="2025-10-09T18:59:36.975" v="22935" actId="20577"/>
-        <pc:sldMkLst>
-          <pc:docMk/>
-          <pc:sldMk cId="1893241687" sldId="2147481232"/>
-        </pc:sldMkLst>
-        <pc:extLst>
-          <p:ext xmlns:p="http://schemas.openxmlformats.org/presentationml/2006/main" uri="{D6D511B9-2390-475A-947B-AFAB55BFBCF1}">
-            <pc226:cmChg xmlns:pc226="http://schemas.microsoft.com/office/powerpoint/2022/06/main/command" xmlns="" chg="mod">
-              <pc226:chgData name="Hernan Ramirez Diaz" userId="0b0763af-8f1b-4303-84e1-6429285cc810" providerId="ADAL" clId="{42163F52-BB8D-4D37-ACEA-9F3481FEDAF8}" dt="2025-10-07T18:08:32.590" v="21033" actId="20577"/>
-              <pc2:cmMkLst xmlns:pc2="http://schemas.microsoft.com/office/powerpoint/2019/9/main/command">
-                <pc:docMk/>
-                <pc:sldMk cId="1893241687" sldId="2147481232"/>
-                <pc2:cmMk id="{29037932-B4DA-4A44-A2AC-7D730AFE600D}"/>
-              </pc2:cmMkLst>
-            </pc226:cmChg>
-          </p:ext>
-        </pc:extLst>
-      </pc:sldChg>
-      <pc:sldChg chg="addSp delSp modSp new mod ord">
-        <pc:chgData name="Hernan Ramirez Diaz" userId="0b0763af-8f1b-4303-84e1-6429285cc810" providerId="ADAL" clId="{42163F52-BB8D-4D37-ACEA-9F3481FEDAF8}" dt="2025-10-01T19:15:27.007" v="3709"/>
-        <pc:sldMkLst>
-          <pc:docMk/>
-          <pc:sldMk cId="4253379048" sldId="2147481233"/>
-        </pc:sldMkLst>
-      </pc:sldChg>
-      <pc:sldChg chg="modSp mod">
-        <pc:chgData name="Hernan Ramirez Diaz" userId="0b0763af-8f1b-4303-84e1-6429285cc810" providerId="ADAL" clId="{42163F52-BB8D-4D37-ACEA-9F3481FEDAF8}" dt="2025-10-02T18:50:50.363" v="7266" actId="1036"/>
-        <pc:sldMkLst>
-          <pc:docMk/>
-          <pc:sldMk cId="3872972120" sldId="2147481234"/>
-        </pc:sldMkLst>
-      </pc:sldChg>
-      <pc:sldChg chg="modSp mod">
-        <pc:chgData name="Hernan Ramirez Diaz" userId="0b0763af-8f1b-4303-84e1-6429285cc810" providerId="ADAL" clId="{42163F52-BB8D-4D37-ACEA-9F3481FEDAF8}" dt="2025-09-30T18:22:12.515" v="2442" actId="20577"/>
-        <pc:sldMkLst>
-          <pc:docMk/>
-          <pc:sldMk cId="2664751740" sldId="2147481235"/>
-        </pc:sldMkLst>
-      </pc:sldChg>
-      <pc:sldChg chg="addSp delSp mod ord">
-        <pc:chgData name="Hernan Ramirez Diaz" userId="0b0763af-8f1b-4303-84e1-6429285cc810" providerId="ADAL" clId="{42163F52-BB8D-4D37-ACEA-9F3481FEDAF8}" dt="2025-10-03T17:59:31.126" v="12393"/>
-        <pc:sldMkLst>
-          <pc:docMk/>
-          <pc:sldMk cId="1567322584" sldId="2147481236"/>
-        </pc:sldMkLst>
-      </pc:sldChg>
-      <pc:sldChg chg="mod ord modShow">
-        <pc:chgData name="Hernan Ramirez Diaz" userId="0b0763af-8f1b-4303-84e1-6429285cc810" providerId="ADAL" clId="{42163F52-BB8D-4D37-ACEA-9F3481FEDAF8}" dt="2025-10-02T00:31:30.415" v="4706"/>
-        <pc:sldMkLst>
-          <pc:docMk/>
-          <pc:sldMk cId="229596941" sldId="2147481237"/>
-        </pc:sldMkLst>
-      </pc:sldChg>
-      <pc:sldChg chg="mod ord modShow">
-        <pc:chgData name="Hernan Ramirez Diaz" userId="0b0763af-8f1b-4303-84e1-6429285cc810" providerId="ADAL" clId="{42163F52-BB8D-4D37-ACEA-9F3481FEDAF8}" dt="2025-10-02T00:11:50.455" v="4246"/>
-        <pc:sldMkLst>
-          <pc:docMk/>
-          <pc:sldMk cId="3130016136" sldId="2147481241"/>
-        </pc:sldMkLst>
-      </pc:sldChg>
-      <pc:sldChg chg="addSp delSp modSp mod ord modNotesTx">
-        <pc:chgData name="Hernan Ramirez Diaz" userId="0b0763af-8f1b-4303-84e1-6429285cc810" providerId="ADAL" clId="{42163F52-BB8D-4D37-ACEA-9F3481FEDAF8}" dt="2025-10-09T04:50:09.294" v="22073" actId="1035"/>
-        <pc:sldMkLst>
-          <pc:docMk/>
-          <pc:sldMk cId="3576209394" sldId="2147481243"/>
-        </pc:sldMkLst>
-      </pc:sldChg>
-      <pc:sldChg chg="addSp delSp modSp mod ord modShow">
-        <pc:chgData name="Hernan Ramirez Diaz" userId="0b0763af-8f1b-4303-84e1-6429285cc810" providerId="ADAL" clId="{42163F52-BB8D-4D37-ACEA-9F3481FEDAF8}" dt="2025-10-09T04:55:44.808" v="22353" actId="1035"/>
-        <pc:sldMkLst>
-          <pc:docMk/>
-          <pc:sldMk cId="2460346233" sldId="2147481244"/>
-        </pc:sldMkLst>
-      </pc:sldChg>
-      <pc:sldChg chg="delSp modSp add mod">
-        <pc:chgData name="Hernan Ramirez Diaz" userId="0b0763af-8f1b-4303-84e1-6429285cc810" providerId="ADAL" clId="{42163F52-BB8D-4D37-ACEA-9F3481FEDAF8}" dt="2025-10-02T22:44:15.905" v="9401" actId="207"/>
-        <pc:sldMkLst>
-          <pc:docMk/>
-          <pc:sldMk cId="3253257184" sldId="2147481245"/>
-        </pc:sldMkLst>
-      </pc:sldChg>
-      <pc:sldChg chg="delSp modSp add mod">
-        <pc:chgData name="Hernan Ramirez Diaz" userId="0b0763af-8f1b-4303-84e1-6429285cc810" providerId="ADAL" clId="{42163F52-BB8D-4D37-ACEA-9F3481FEDAF8}" dt="2025-09-30T22:49:21.331" v="3295" actId="478"/>
-        <pc:sldMkLst>
-          <pc:docMk/>
-          <pc:sldMk cId="3132776874" sldId="2147481246"/>
-        </pc:sldMkLst>
-      </pc:sldChg>
-      <pc:sldChg chg="modSp mod">
-        <pc:chgData name="Hernan Ramirez Diaz" userId="0b0763af-8f1b-4303-84e1-6429285cc810" providerId="ADAL" clId="{42163F52-BB8D-4D37-ACEA-9F3481FEDAF8}" dt="2025-10-02T21:02:50.516" v="8870" actId="1036"/>
-        <pc:sldMkLst>
-          <pc:docMk/>
-          <pc:sldMk cId="1484297181" sldId="2147481247"/>
-        </pc:sldMkLst>
-      </pc:sldChg>
-      <pc:sldChg chg="addSp delSp modSp add mod">
-        <pc:chgData name="Hernan Ramirez Diaz" userId="0b0763af-8f1b-4303-84e1-6429285cc810" providerId="ADAL" clId="{42163F52-BB8D-4D37-ACEA-9F3481FEDAF8}" dt="2025-10-09T04:25:13.090" v="21978" actId="1035"/>
-        <pc:sldMkLst>
-          <pc:docMk/>
-          <pc:sldMk cId="2852939510" sldId="2147481248"/>
-        </pc:sldMkLst>
-      </pc:sldChg>
-      <pc:sldChg chg="modSp mod ord">
-        <pc:chgData name="Hernan Ramirez Diaz" userId="0b0763af-8f1b-4303-84e1-6429285cc810" providerId="ADAL" clId="{42163F52-BB8D-4D37-ACEA-9F3481FEDAF8}" dt="2025-10-09T04:58:28.772" v="22530" actId="1035"/>
-        <pc:sldMkLst>
-          <pc:docMk/>
-          <pc:sldMk cId="25791284" sldId="2147481249"/>
-        </pc:sldMkLst>
-      </pc:sldChg>
-      <pc:sldChg chg="addSp delSp modSp add mod ord modNotesTx">
-        <pc:chgData name="Hernan Ramirez Diaz" userId="0b0763af-8f1b-4303-84e1-6429285cc810" providerId="ADAL" clId="{42163F52-BB8D-4D37-ACEA-9F3481FEDAF8}" dt="2025-10-02T19:20:52.887" v="7370"/>
-        <pc:sldMkLst>
-          <pc:docMk/>
-          <pc:sldMk cId="2176796729" sldId="2147481250"/>
-        </pc:sldMkLst>
-      </pc:sldChg>
-      <pc:sldChg chg="addSp delSp modSp add del mod ord">
-        <pc:chgData name="Hernan Ramirez Diaz" userId="0b0763af-8f1b-4303-84e1-6429285cc810" providerId="ADAL" clId="{42163F52-BB8D-4D37-ACEA-9F3481FEDAF8}" dt="2025-10-01T01:45:35.806" v="3698" actId="47"/>
-        <pc:sldMkLst>
-          <pc:docMk/>
-          <pc:sldMk cId="1939539720" sldId="2147481251"/>
-        </pc:sldMkLst>
-      </pc:sldChg>
-      <pc:sldChg chg="addSp modSp mod ord">
-        <pc:chgData name="Hernan Ramirez Diaz" userId="0b0763af-8f1b-4303-84e1-6429285cc810" providerId="ADAL" clId="{42163F52-BB8D-4D37-ACEA-9F3481FEDAF8}" dt="2025-10-09T19:29:16.947" v="22953" actId="27918"/>
-        <pc:sldMkLst>
-          <pc:docMk/>
-          <pc:sldMk cId="3718838375" sldId="2147481253"/>
-        </pc:sldMkLst>
-      </pc:sldChg>
-      <pc:sldChg chg="addSp modSp new mod">
-        <pc:chgData name="Hernan Ramirez Diaz" userId="0b0763af-8f1b-4303-84e1-6429285cc810" providerId="ADAL" clId="{42163F52-BB8D-4D37-ACEA-9F3481FEDAF8}" dt="2025-10-04T05:38:27.615" v="18257" actId="20577"/>
-        <pc:sldMkLst>
-          <pc:docMk/>
-          <pc:sldMk cId="988488" sldId="2147481255"/>
-        </pc:sldMkLst>
-      </pc:sldChg>
-      <pc:sldChg chg="new del">
-        <pc:chgData name="Hernan Ramirez Diaz" userId="0b0763af-8f1b-4303-84e1-6429285cc810" providerId="ADAL" clId="{42163F52-BB8D-4D37-ACEA-9F3481FEDAF8}" dt="2025-10-04T00:12:44.661" v="16123" actId="47"/>
-        <pc:sldMkLst>
-          <pc:docMk/>
-          <pc:sldMk cId="2390622337" sldId="2147481256"/>
-        </pc:sldMkLst>
-      </pc:sldChg>
-      <pc:sldChg chg="delSp modSp add mod">
-        <pc:chgData name="Hernan Ramirez Diaz" userId="0b0763af-8f1b-4303-84e1-6429285cc810" providerId="ADAL" clId="{42163F52-BB8D-4D37-ACEA-9F3481FEDAF8}" dt="2025-10-09T18:48:15.920" v="22884" actId="20577"/>
-        <pc:sldMkLst>
-          <pc:docMk/>
-          <pc:sldMk cId="2682905776" sldId="2147481257"/>
-        </pc:sldMkLst>
-      </pc:sldChg>
-      <pc:sldChg chg="addSp delSp modSp add mod modNotesTx">
-        <pc:chgData name="Hernan Ramirez Diaz" userId="0b0763af-8f1b-4303-84e1-6429285cc810" providerId="ADAL" clId="{42163F52-BB8D-4D37-ACEA-9F3481FEDAF8}" dt="2025-10-09T19:06:07.148" v="22938" actId="20577"/>
-        <pc:sldMkLst>
-          <pc:docMk/>
-          <pc:sldMk cId="2763871" sldId="2147481258"/>
-        </pc:sldMkLst>
-      </pc:sldChg>
-      <pc:sldChg chg="delSp modSp del mod">
-        <pc:chgData name="Hernan Ramirez Diaz" userId="0b0763af-8f1b-4303-84e1-6429285cc810" providerId="ADAL" clId="{42163F52-BB8D-4D37-ACEA-9F3481FEDAF8}" dt="2025-10-03T16:59:58.268" v="11141" actId="47"/>
-        <pc:sldMkLst>
-          <pc:docMk/>
-          <pc:sldMk cId="2295337202" sldId="2147481259"/>
-        </pc:sldMkLst>
-      </pc:sldChg>
-      <pc:sldChg chg="addSp delSp modSp mod modNotesTx">
-        <pc:chgData name="Hernan Ramirez Diaz" userId="0b0763af-8f1b-4303-84e1-6429285cc810" providerId="ADAL" clId="{42163F52-BB8D-4D37-ACEA-9F3481FEDAF8}" dt="2025-10-09T19:21:31.977" v="22951" actId="20577"/>
-        <pc:sldMkLst>
-          <pc:docMk/>
-          <pc:sldMk cId="2022463905" sldId="2147481260"/>
-        </pc:sldMkLst>
-      </pc:sldChg>
-      <pc:sldChg chg="addSp delSp modSp mod">
-        <pc:chgData name="Hernan Ramirez Diaz" userId="0b0763af-8f1b-4303-84e1-6429285cc810" providerId="ADAL" clId="{42163F52-BB8D-4D37-ACEA-9F3481FEDAF8}" dt="2025-10-09T04:58:46.353" v="22549" actId="14100"/>
-        <pc:sldMkLst>
-          <pc:docMk/>
-          <pc:sldMk cId="648698299" sldId="2147481261"/>
-        </pc:sldMkLst>
-      </pc:sldChg>
-      <pc:sldChg chg="addSp delSp modSp add mod modNotesTx">
-        <pc:chgData name="Hernan Ramirez Diaz" userId="0b0763af-8f1b-4303-84e1-6429285cc810" providerId="ADAL" clId="{42163F52-BB8D-4D37-ACEA-9F3481FEDAF8}" dt="2025-10-09T04:59:29.596" v="22587" actId="1035"/>
-        <pc:sldMkLst>
-          <pc:docMk/>
-          <pc:sldMk cId="4145473322" sldId="2147481262"/>
-        </pc:sldMkLst>
-      </pc:sldChg>
-      <pc:sldChg chg="addSp delSp modSp add mod">
-        <pc:chgData name="Hernan Ramirez Diaz" userId="0b0763af-8f1b-4303-84e1-6429285cc810" providerId="ADAL" clId="{42163F52-BB8D-4D37-ACEA-9F3481FEDAF8}" dt="2025-10-09T05:00:17.277" v="22629" actId="1035"/>
-        <pc:sldMkLst>
-          <pc:docMk/>
-          <pc:sldMk cId="345488764" sldId="2147481264"/>
-        </pc:sldMkLst>
-      </pc:sldChg>
-      <pc:sldChg chg="addSp delSp modSp mod ord">
-        <pc:chgData name="Hernan Ramirez Diaz" userId="0b0763af-8f1b-4303-84e1-6429285cc810" providerId="ADAL" clId="{42163F52-BB8D-4D37-ACEA-9F3481FEDAF8}" dt="2025-10-04T04:45:30.488" v="17443"/>
-        <pc:sldMkLst>
-          <pc:docMk/>
-          <pc:sldMk cId="2503961039" sldId="2147481265"/>
-        </pc:sldMkLst>
-      </pc:sldChg>
-      <pc:sldChg chg="modSp add mod">
-        <pc:chgData name="Hernan Ramirez Diaz" userId="0b0763af-8f1b-4303-84e1-6429285cc810" providerId="ADAL" clId="{42163F52-BB8D-4D37-ACEA-9F3481FEDAF8}" dt="2025-10-03T19:58:37.894" v="12890" actId="14100"/>
-        <pc:sldMkLst>
-          <pc:docMk/>
-          <pc:sldMk cId="863687252" sldId="2147481266"/>
-        </pc:sldMkLst>
-      </pc:sldChg>
-      <pc:sldChg chg="modSp add mod">
-        <pc:chgData name="Hernan Ramirez Diaz" userId="0b0763af-8f1b-4303-84e1-6429285cc810" providerId="ADAL" clId="{42163F52-BB8D-4D37-ACEA-9F3481FEDAF8}" dt="2025-10-03T19:22:30.157" v="12629" actId="20577"/>
-        <pc:sldMkLst>
-          <pc:docMk/>
-          <pc:sldMk cId="1129400367" sldId="2147481267"/>
-        </pc:sldMkLst>
-      </pc:sldChg>
-      <pc:sldChg chg="modSp add mod">
-        <pc:chgData name="Hernan Ramirez Diaz" userId="0b0763af-8f1b-4303-84e1-6429285cc810" providerId="ADAL" clId="{42163F52-BB8D-4D37-ACEA-9F3481FEDAF8}" dt="2025-10-03T22:38:00.493" v="14302" actId="20577"/>
-        <pc:sldMkLst>
-          <pc:docMk/>
-          <pc:sldMk cId="645413853" sldId="2147481268"/>
-        </pc:sldMkLst>
-      </pc:sldChg>
-      <pc:sldChg chg="modSp add mod">
-        <pc:chgData name="Hernan Ramirez Diaz" userId="0b0763af-8f1b-4303-84e1-6429285cc810" providerId="ADAL" clId="{42163F52-BB8D-4D37-ACEA-9F3481FEDAF8}" dt="2025-10-03T19:58:45.624" v="12891" actId="14100"/>
-        <pc:sldMkLst>
-          <pc:docMk/>
-          <pc:sldMk cId="3907743225" sldId="2147481269"/>
-        </pc:sldMkLst>
-      </pc:sldChg>
-      <pc:sldChg chg="modSp add mod">
-        <pc:chgData name="Hernan Ramirez Diaz" userId="0b0763af-8f1b-4303-84e1-6429285cc810" providerId="ADAL" clId="{42163F52-BB8D-4D37-ACEA-9F3481FEDAF8}" dt="2025-10-03T19:58:54.074" v="12892" actId="14100"/>
-        <pc:sldMkLst>
-          <pc:docMk/>
-          <pc:sldMk cId="2080702279" sldId="2147481270"/>
-        </pc:sldMkLst>
-      </pc:sldChg>
-      <pc:sldChg chg="addSp delSp modSp mod ord">
-        <pc:chgData name="Hernan Ramirez Diaz" userId="0b0763af-8f1b-4303-84e1-6429285cc810" providerId="ADAL" clId="{42163F52-BB8D-4D37-ACEA-9F3481FEDAF8}" dt="2025-10-09T04:58:07.039" v="22505" actId="1035"/>
-        <pc:sldMkLst>
-          <pc:docMk/>
-          <pc:sldMk cId="869299062" sldId="2147481271"/>
-        </pc:sldMkLst>
-      </pc:sldChg>
-      <pc:sldChg chg="modSp new del mod">
-        <pc:chgData name="Hernan Ramirez Diaz" userId="0b0763af-8f1b-4303-84e1-6429285cc810" providerId="ADAL" clId="{42163F52-BB8D-4D37-ACEA-9F3481FEDAF8}" dt="2025-10-04T06:03:41.892" v="18453" actId="47"/>
-        <pc:sldMkLst>
-          <pc:docMk/>
-          <pc:sldMk cId="3779341304" sldId="2147481272"/>
-        </pc:sldMkLst>
-      </pc:sldChg>
-      <pc:sldChg chg="new">
-        <pc:chgData name="Hernan Ramirez Diaz" userId="0b0763af-8f1b-4303-84e1-6429285cc810" providerId="ADAL" clId="{42163F52-BB8D-4D37-ACEA-9F3481FEDAF8}" dt="2025-10-03T22:57:27.833" v="14445" actId="680"/>
-        <pc:sldMkLst>
-          <pc:docMk/>
-          <pc:sldMk cId="1252616050" sldId="2147481273"/>
-        </pc:sldMkLst>
-      </pc:sldChg>
-      <pc:sldChg chg="addSp delSp modSp add mod ord">
-        <pc:chgData name="Hernan Ramirez Diaz" userId="0b0763af-8f1b-4303-84e1-6429285cc810" providerId="ADAL" clId="{42163F52-BB8D-4D37-ACEA-9F3481FEDAF8}" dt="2025-10-04T00:27:05.972" v="16436" actId="1076"/>
-        <pc:sldMkLst>
-          <pc:docMk/>
-          <pc:sldMk cId="1976876559" sldId="2147481274"/>
-        </pc:sldMkLst>
-      </pc:sldChg>
-      <pc:sldChg chg="delSp add mod ord">
-        <pc:chgData name="Hernan Ramirez Diaz" userId="0b0763af-8f1b-4303-84e1-6429285cc810" providerId="ADAL" clId="{42163F52-BB8D-4D37-ACEA-9F3481FEDAF8}" dt="2025-10-04T00:21:17.826" v="16356"/>
-        <pc:sldMkLst>
-          <pc:docMk/>
-          <pc:sldMk cId="68822884" sldId="2147481275"/>
-        </pc:sldMkLst>
-      </pc:sldChg>
-      <pc:sldChg chg="addSp delSp modSp add mod">
-        <pc:chgData name="Hernan Ramirez Diaz" userId="0b0763af-8f1b-4303-84e1-6429285cc810" providerId="ADAL" clId="{42163F52-BB8D-4D37-ACEA-9F3481FEDAF8}" dt="2025-10-08T18:03:35.166" v="21342" actId="1076"/>
-        <pc:sldMkLst>
-          <pc:docMk/>
-          <pc:sldMk cId="926817997" sldId="2147481276"/>
-        </pc:sldMkLst>
-      </pc:sldChg>
-      <pc:sldChg chg="delSp modSp add del mod ord">
-        <pc:chgData name="Hernan Ramirez Diaz" userId="0b0763af-8f1b-4303-84e1-6429285cc810" providerId="ADAL" clId="{42163F52-BB8D-4D37-ACEA-9F3481FEDAF8}" dt="2025-10-04T06:05:30.878" v="18628" actId="47"/>
-        <pc:sldMkLst>
-          <pc:docMk/>
-          <pc:sldMk cId="938116946" sldId="2147481277"/>
-        </pc:sldMkLst>
-      </pc:sldChg>
-      <pc:sldChg chg="addSp delSp modSp add mod ord">
-        <pc:chgData name="Hernan Ramirez Diaz" userId="0b0763af-8f1b-4303-84e1-6429285cc810" providerId="ADAL" clId="{42163F52-BB8D-4D37-ACEA-9F3481FEDAF8}" dt="2025-10-09T19:19:56.706" v="22940" actId="115"/>
-        <pc:sldMkLst>
-          <pc:docMk/>
-          <pc:sldMk cId="2350308366" sldId="2147481278"/>
-        </pc:sldMkLst>
-      </pc:sldChg>
-      <pc:sldChg chg="modSp mod">
-        <pc:chgData name="Hernan Ramirez Diaz" userId="0b0763af-8f1b-4303-84e1-6429285cc810" providerId="ADAL" clId="{42163F52-BB8D-4D37-ACEA-9F3481FEDAF8}" dt="2025-10-09T16:55:50.150" v="22770" actId="1035"/>
-        <pc:sldMkLst>
-          <pc:docMk/>
-          <pc:sldMk cId="1618464510" sldId="2147481280"/>
-        </pc:sldMkLst>
-      </pc:sldChg>
-      <pc:sldChg chg="modSp mod">
-        <pc:chgData name="Hernan Ramirez Diaz" userId="0b0763af-8f1b-4303-84e1-6429285cc810" providerId="ADAL" clId="{42163F52-BB8D-4D37-ACEA-9F3481FEDAF8}" dt="2025-10-09T17:04:19.208" v="22794" actId="20577"/>
-        <pc:sldMkLst>
-          <pc:docMk/>
-          <pc:sldMk cId="2379161747" sldId="2147481286"/>
-        </pc:sldMkLst>
-      </pc:sldChg>
-      <pc:sldChg chg="modSp mod">
-        <pc:chgData name="Hernan Ramirez Diaz" userId="0b0763af-8f1b-4303-84e1-6429285cc810" providerId="ADAL" clId="{42163F52-BB8D-4D37-ACEA-9F3481FEDAF8}" dt="2025-10-09T17:04:16.565" v="22793" actId="20577"/>
-        <pc:sldMkLst>
-          <pc:docMk/>
-          <pc:sldMk cId="2042423855" sldId="2147481287"/>
-        </pc:sldMkLst>
-      </pc:sldChg>
-      <pc:sldChg chg="modSp mod">
-        <pc:chgData name="Hernan Ramirez Diaz" userId="0b0763af-8f1b-4303-84e1-6429285cc810" providerId="ADAL" clId="{42163F52-BB8D-4D37-ACEA-9F3481FEDAF8}" dt="2025-10-08T18:04:09.094" v="21366" actId="1076"/>
-        <pc:sldMkLst>
-          <pc:docMk/>
-          <pc:sldMk cId="1156650361" sldId="2147481291"/>
-        </pc:sldMkLst>
-      </pc:sldChg>
-      <pc:sldChg chg="modSp mod ord">
-        <pc:chgData name="Hernan Ramirez Diaz" userId="0b0763af-8f1b-4303-84e1-6429285cc810" providerId="ADAL" clId="{42163F52-BB8D-4D37-ACEA-9F3481FEDAF8}" dt="2025-10-08T18:09:50.816" v="21544"/>
-        <pc:sldMkLst>
-          <pc:docMk/>
-          <pc:sldMk cId="277216321" sldId="2147481295"/>
-        </pc:sldMkLst>
-      </pc:sldChg>
-      <pc:sldChg chg="add del">
-        <pc:chgData name="Hernan Ramirez Diaz" userId="0b0763af-8f1b-4303-84e1-6429285cc810" providerId="ADAL" clId="{42163F52-BB8D-4D37-ACEA-9F3481FEDAF8}" dt="2025-10-09T23:46:55.071" v="23066" actId="47"/>
-        <pc:sldMkLst>
-          <pc:docMk/>
-          <pc:sldMk cId="3933677755" sldId="2147481297"/>
-        </pc:sldMkLst>
-      </pc:sldChg>
-    </pc:docChg>
-  </pc:docChgLst>
-  <pc:docChgLst>
-    <pc:chgData name="Shubhangi Verma" userId="c0355bd3-af2b-4be5-9724-d992cd36b32e" providerId="ADAL" clId="{C10E5BAD-77AF-5A72-8623-CDC46286E166}"/>
-    <pc:docChg chg="undo custSel addSld modSld sldOrd modSection">
-      <pc:chgData name="Shubhangi Verma" userId="c0355bd3-af2b-4be5-9724-d992cd36b32e" providerId="ADAL" clId="{C10E5BAD-77AF-5A72-8623-CDC46286E166}" dt="2025-10-07T20:09:57.553" v="2693" actId="729"/>
-      <pc:docMkLst>
-        <pc:docMk/>
-      </pc:docMkLst>
-      <pc:sldChg chg="modSp mod">
-        <pc:chgData name="Shubhangi Verma" userId="c0355bd3-af2b-4be5-9724-d992cd36b32e" providerId="ADAL" clId="{C10E5BAD-77AF-5A72-8623-CDC46286E166}" dt="2025-10-07T16:59:30.456" v="2524" actId="207"/>
-        <pc:sldMkLst>
-          <pc:docMk/>
-          <pc:sldMk cId="1299622664" sldId="434"/>
-        </pc:sldMkLst>
-      </pc:sldChg>
-      <pc:sldChg chg="modSp mod">
-        <pc:chgData name="Shubhangi Verma" userId="c0355bd3-af2b-4be5-9724-d992cd36b32e" providerId="ADAL" clId="{C10E5BAD-77AF-5A72-8623-CDC46286E166}" dt="2025-10-06T22:25:47.833" v="2259" actId="14100"/>
-        <pc:sldMkLst>
-          <pc:docMk/>
-          <pc:sldMk cId="2761368814" sldId="2147481181"/>
-        </pc:sldMkLst>
-      </pc:sldChg>
-      <pc:sldChg chg="modSp mod">
-        <pc:chgData name="Shubhangi Verma" userId="c0355bd3-af2b-4be5-9724-d992cd36b32e" providerId="ADAL" clId="{C10E5BAD-77AF-5A72-8623-CDC46286E166}" dt="2025-10-07T18:11:39.941" v="2643" actId="20577"/>
-        <pc:sldMkLst>
-          <pc:docMk/>
-          <pc:sldMk cId="829862625" sldId="2147481206"/>
-        </pc:sldMkLst>
-      </pc:sldChg>
-      <pc:sldChg chg="modSp mod">
-        <pc:chgData name="Shubhangi Verma" userId="c0355bd3-af2b-4be5-9724-d992cd36b32e" providerId="ADAL" clId="{C10E5BAD-77AF-5A72-8623-CDC46286E166}" dt="2025-10-07T18:00:10.734" v="2554" actId="207"/>
-        <pc:sldMkLst>
-          <pc:docMk/>
-          <pc:sldMk cId="1270242671" sldId="2147481213"/>
-        </pc:sldMkLst>
-        <pc:graphicFrameChg chg="modGraphic">
-          <ac:chgData name="Shubhangi Verma" userId="c0355bd3-af2b-4be5-9724-d992cd36b32e" providerId="ADAL" clId="{C10E5BAD-77AF-5A72-8623-CDC46286E166}" dt="2025-10-07T18:00:10.734" v="2554" actId="207"/>
-          <ac:graphicFrameMkLst>
-            <pc:docMk/>
-            <pc:sldMk cId="1270242671" sldId="2147481213"/>
-            <ac:graphicFrameMk id="2" creationId="{38F22EE9-DEDC-E1DA-1E19-E1758E9C192D}"/>
-          </ac:graphicFrameMkLst>
-        </pc:graphicFrameChg>
-      </pc:sldChg>
-      <pc:sldChg chg="mod modShow">
-        <pc:chgData name="Shubhangi Verma" userId="c0355bd3-af2b-4be5-9724-d992cd36b32e" providerId="ADAL" clId="{C10E5BAD-77AF-5A72-8623-CDC46286E166}" dt="2025-10-07T20:04:38.368" v="2644" actId="729"/>
-        <pc:sldMkLst>
-          <pc:docMk/>
-          <pc:sldMk cId="300876207" sldId="2147481215"/>
-        </pc:sldMkLst>
-      </pc:sldChg>
-      <pc:sldChg chg="modSp mod">
-        <pc:chgData name="Shubhangi Verma" userId="c0355bd3-af2b-4be5-9724-d992cd36b32e" providerId="ADAL" clId="{C10E5BAD-77AF-5A72-8623-CDC46286E166}" dt="2025-10-07T16:59:18.582" v="2523" actId="207"/>
-        <pc:sldMkLst>
-          <pc:docMk/>
-          <pc:sldMk cId="3892756515" sldId="2147481219"/>
-        </pc:sldMkLst>
-      </pc:sldChg>
-      <pc:sldChg chg="modSp mod">
-        <pc:chgData name="Shubhangi Verma" userId="c0355bd3-af2b-4be5-9724-d992cd36b32e" providerId="ADAL" clId="{C10E5BAD-77AF-5A72-8623-CDC46286E166}" dt="2025-10-07T17:00:03.892" v="2527" actId="207"/>
-        <pc:sldMkLst>
-          <pc:docMk/>
-          <pc:sldMk cId="1893241687" sldId="2147481232"/>
-        </pc:sldMkLst>
-      </pc:sldChg>
-      <pc:sldChg chg="mod modShow">
-        <pc:chgData name="Shubhangi Verma" userId="c0355bd3-af2b-4be5-9724-d992cd36b32e" providerId="ADAL" clId="{C10E5BAD-77AF-5A72-8623-CDC46286E166}" dt="2025-09-30T23:12:16.327" v="281" actId="729"/>
-        <pc:sldMkLst>
-          <pc:docMk/>
-          <pc:sldMk cId="4253379048" sldId="2147481233"/>
-        </pc:sldMkLst>
-      </pc:sldChg>
-      <pc:sldChg chg="addSp delSp modSp new mod">
-        <pc:chgData name="Shubhangi Verma" userId="c0355bd3-af2b-4be5-9724-d992cd36b32e" providerId="ADAL" clId="{C10E5BAD-77AF-5A72-8623-CDC46286E166}" dt="2025-10-07T16:59:43.472" v="2526" actId="1076"/>
-        <pc:sldMkLst>
-          <pc:docMk/>
-          <pc:sldMk cId="1484297181" sldId="2147481247"/>
-        </pc:sldMkLst>
-      </pc:sldChg>
-      <pc:sldChg chg="modSp mod">
-        <pc:chgData name="Shubhangi Verma" userId="c0355bd3-af2b-4be5-9724-d992cd36b32e" providerId="ADAL" clId="{C10E5BAD-77AF-5A72-8623-CDC46286E166}" dt="2025-10-07T17:01:04.049" v="2530" actId="207"/>
-        <pc:sldMkLst>
-          <pc:docMk/>
-          <pc:sldMk cId="2852939510" sldId="2147481248"/>
-        </pc:sldMkLst>
-      </pc:sldChg>
-      <pc:sldChg chg="addSp delSp modSp new mod">
-        <pc:chgData name="Shubhangi Verma" userId="c0355bd3-af2b-4be5-9724-d992cd36b32e" providerId="ADAL" clId="{C10E5BAD-77AF-5A72-8623-CDC46286E166}" dt="2025-09-30T23:46:31.289" v="1380" actId="1076"/>
-        <pc:sldMkLst>
-          <pc:docMk/>
-          <pc:sldMk cId="25791284" sldId="2147481249"/>
-        </pc:sldMkLst>
-      </pc:sldChg>
-      <pc:sldChg chg="mod ord modShow">
-        <pc:chgData name="Shubhangi Verma" userId="c0355bd3-af2b-4be5-9724-d992cd36b32e" providerId="ADAL" clId="{C10E5BAD-77AF-5A72-8623-CDC46286E166}" dt="2025-10-06T22:25:04.447" v="2257" actId="20578"/>
-        <pc:sldMkLst>
-          <pc:docMk/>
-          <pc:sldMk cId="988488" sldId="2147481255"/>
-        </pc:sldMkLst>
-      </pc:sldChg>
-      <pc:sldChg chg="modSp mod">
-        <pc:chgData name="Shubhangi Verma" userId="c0355bd3-af2b-4be5-9724-d992cd36b32e" providerId="ADAL" clId="{C10E5BAD-77AF-5A72-8623-CDC46286E166}" dt="2025-10-07T17:00:32.928" v="2529" actId="207"/>
-        <pc:sldMkLst>
-          <pc:docMk/>
-          <pc:sldMk cId="2682905776" sldId="2147481257"/>
-        </pc:sldMkLst>
-      </pc:sldChg>
-      <pc:sldChg chg="modSp mod">
-        <pc:chgData name="Shubhangi Verma" userId="c0355bd3-af2b-4be5-9724-d992cd36b32e" providerId="ADAL" clId="{C10E5BAD-77AF-5A72-8623-CDC46286E166}" dt="2025-10-07T17:00:17.956" v="2528" actId="207"/>
-        <pc:sldMkLst>
-          <pc:docMk/>
-          <pc:sldMk cId="2763871" sldId="2147481258"/>
-        </pc:sldMkLst>
-      </pc:sldChg>
-      <pc:sldChg chg="mod modShow modNotesTx">
-        <pc:chgData name="Shubhangi Verma" userId="c0355bd3-af2b-4be5-9724-d992cd36b32e" providerId="ADAL" clId="{C10E5BAD-77AF-5A72-8623-CDC46286E166}" dt="2025-10-07T20:05:21.689" v="2648" actId="729"/>
-        <pc:sldMkLst>
-          <pc:docMk/>
-          <pc:sldMk cId="863687252" sldId="2147481266"/>
-        </pc:sldMkLst>
-      </pc:sldChg>
-      <pc:sldChg chg="modSp mod">
-        <pc:chgData name="Shubhangi Verma" userId="c0355bd3-af2b-4be5-9724-d992cd36b32e" providerId="ADAL" clId="{C10E5BAD-77AF-5A72-8623-CDC46286E166}" dt="2025-10-07T20:08:15.716" v="2684" actId="1076"/>
-        <pc:sldMkLst>
-          <pc:docMk/>
-          <pc:sldMk cId="3907743225" sldId="2147481269"/>
-        </pc:sldMkLst>
-      </pc:sldChg>
-      <pc:sldChg chg="mod modShow">
-        <pc:chgData name="Shubhangi Verma" userId="c0355bd3-af2b-4be5-9724-d992cd36b32e" providerId="ADAL" clId="{C10E5BAD-77AF-5A72-8623-CDC46286E166}" dt="2025-10-07T20:09:57.553" v="2693" actId="729"/>
-        <pc:sldMkLst>
-          <pc:docMk/>
-          <pc:sldMk cId="2080702279" sldId="2147481270"/>
-        </pc:sldMkLst>
-      </pc:sldChg>
-      <pc:sldChg chg="modSp mod">
-        <pc:chgData name="Shubhangi Verma" userId="c0355bd3-af2b-4be5-9724-d992cd36b32e" providerId="ADAL" clId="{C10E5BAD-77AF-5A72-8623-CDC46286E166}" dt="2025-10-07T17:43:19.761" v="2538" actId="207"/>
-        <pc:sldMkLst>
-          <pc:docMk/>
-          <pc:sldMk cId="869299062" sldId="2147481271"/>
-        </pc:sldMkLst>
-      </pc:sldChg>
-      <pc:sldChg chg="modSp mod">
-        <pc:chgData name="Shubhangi Verma" userId="c0355bd3-af2b-4be5-9724-d992cd36b32e" providerId="ADAL" clId="{C10E5BAD-77AF-5A72-8623-CDC46286E166}" dt="2025-10-07T17:43:17.849" v="2535" actId="207"/>
-        <pc:sldMkLst>
-          <pc:docMk/>
-          <pc:sldMk cId="926817997" sldId="2147481276"/>
-        </pc:sldMkLst>
-      </pc:sldChg>
-      <pc:sldChg chg="addSp delSp modSp new mod">
-        <pc:chgData name="Shubhangi Verma" userId="c0355bd3-af2b-4be5-9724-d992cd36b32e" providerId="ADAL" clId="{C10E5BAD-77AF-5A72-8623-CDC46286E166}" dt="2025-10-06T23:06:15.003" v="2519" actId="1076"/>
-        <pc:sldMkLst>
-          <pc:docMk/>
-          <pc:sldMk cId="1618464510" sldId="2147481280"/>
-        </pc:sldMkLst>
-      </pc:sldChg>
-      <pc:sldChg chg="modSp mod">
-        <pc:chgData name="Shubhangi Verma" userId="c0355bd3-af2b-4be5-9724-d992cd36b32e" providerId="ADAL" clId="{C10E5BAD-77AF-5A72-8623-CDC46286E166}" dt="2025-10-07T20:05:07.689" v="2647" actId="207"/>
-        <pc:sldMkLst>
-          <pc:docMk/>
-          <pc:sldMk cId="2213353267" sldId="2147481289"/>
-        </pc:sldMkLst>
-      </pc:sldChg>
-      <pc:sldChg chg="modSp mod">
-        <pc:chgData name="Shubhangi Verma" userId="c0355bd3-af2b-4be5-9724-d992cd36b32e" providerId="ADAL" clId="{C10E5BAD-77AF-5A72-8623-CDC46286E166}" dt="2025-10-07T20:07:53.313" v="2679" actId="1076"/>
-        <pc:sldMkLst>
-          <pc:docMk/>
-          <pc:sldMk cId="1156650361" sldId="2147481291"/>
-        </pc:sldMkLst>
-      </pc:sldChg>
-      <pc:sldChg chg="modSp add mod modCm">
-        <pc:chgData name="Shubhangi Verma" userId="c0355bd3-af2b-4be5-9724-d992cd36b32e" providerId="ADAL" clId="{C10E5BAD-77AF-5A72-8623-CDC46286E166}" dt="2025-10-07T20:09:52.751" v="2692" actId="1076"/>
-        <pc:sldMkLst>
-          <pc:docMk/>
-          <pc:sldMk cId="933037012" sldId="2147481293"/>
-        </pc:sldMkLst>
-        <pc:extLst>
-          <p:ext xmlns:p="http://schemas.openxmlformats.org/presentationml/2006/main" uri="{D6D511B9-2390-475A-947B-AFAB55BFBCF1}">
-            <pc226:cmChg xmlns:pc226="http://schemas.microsoft.com/office/powerpoint/2022/06/main/command" xmlns="" chg="mod">
-              <pc226:chgData name="Shubhangi Verma" userId="c0355bd3-af2b-4be5-9724-d992cd36b32e" providerId="ADAL" clId="{C10E5BAD-77AF-5A72-8623-CDC46286E166}" dt="2025-10-07T20:07:04.556" v="2664" actId="20577"/>
-              <pc2:cmMkLst xmlns:pc2="http://schemas.microsoft.com/office/powerpoint/2019/9/main/command">
-                <pc:docMk/>
-                <pc:sldMk cId="933037012" sldId="2147481293"/>
-                <pc2:cmMk id="{A3D64D06-0681-6D42-8EE3-DB41D2036CFF}"/>
-              </pc2:cmMkLst>
-            </pc226:cmChg>
-          </p:ext>
-        </pc:extLst>
-      </pc:sldChg>
-    </pc:docChg>
-  </pc:docChgLst>
-  <pc:docChgLst>
-    <pc:chgData name="Michael Bruno" userId="ed6069a4-1fcb-46c4-b4b7-85c279acb11e" providerId="ADAL" clId="{613589E5-1A9A-41C5-92C9-D44D19F40B73}"/>
-    <pc:docChg chg="custSel modSld">
-      <pc:chgData name="Michael Bruno" userId="ed6069a4-1fcb-46c4-b4b7-85c279acb11e" providerId="ADAL" clId="{613589E5-1A9A-41C5-92C9-D44D19F40B73}" dt="2025-10-10T20:06:34.494" v="3" actId="13926"/>
-      <pc:docMkLst>
-        <pc:docMk/>
-      </pc:docMkLst>
-      <pc:sldChg chg="delSp modSp mod">
-        <pc:chgData name="Michael Bruno" userId="ed6069a4-1fcb-46c4-b4b7-85c279acb11e" providerId="ADAL" clId="{613589E5-1A9A-41C5-92C9-D44D19F40B73}" dt="2025-10-09T23:11:36.343" v="2" actId="478"/>
-        <pc:sldMkLst>
-          <pc:docMk/>
-          <pc:sldMk cId="0" sldId="260"/>
-        </pc:sldMkLst>
-      </pc:sldChg>
-      <pc:sldChg chg="modSp mod">
-        <pc:chgData name="Michael Bruno" userId="ed6069a4-1fcb-46c4-b4b7-85c279acb11e" providerId="ADAL" clId="{613589E5-1A9A-41C5-92C9-D44D19F40B73}" dt="2025-10-10T20:06:34.494" v="3" actId="13926"/>
-        <pc:sldMkLst>
-          <pc:docMk/>
-          <pc:sldMk cId="829862625" sldId="2147481206"/>
-        </pc:sldMkLst>
-      </pc:sldChg>
-    </pc:docChg>
-  </pc:docChgLst>
-  <pc:docChgLst>
-    <pc:chgData name="Ridhima Dhawan" userId="41b5bd7b-df07-43ed-9321-8df1cf164a12" providerId="ADAL" clId="{454EBA3A-CFA7-4557-80A3-8406924164EC}"/>
-    <pc:docChg chg="undo custSel addSld delSld modSld sldOrd delSection modSection">
-      <pc:chgData name="Ridhima Dhawan" userId="41b5bd7b-df07-43ed-9321-8df1cf164a12" providerId="ADAL" clId="{454EBA3A-CFA7-4557-80A3-8406924164EC}" dt="2025-09-26T16:50:09.182" v="9258" actId="20577"/>
-      <pc:docMkLst>
-        <pc:docMk/>
-      </pc:docMkLst>
-      <pc:sldChg chg="modSp mod">
-        <pc:chgData name="Ridhima Dhawan" userId="41b5bd7b-df07-43ed-9321-8df1cf164a12" providerId="ADAL" clId="{454EBA3A-CFA7-4557-80A3-8406924164EC}" dt="2025-09-19T04:20:02.730" v="1329" actId="20577"/>
-        <pc:sldMkLst>
-          <pc:docMk/>
-          <pc:sldMk cId="0" sldId="274"/>
-        </pc:sldMkLst>
-      </pc:sldChg>
-      <pc:sldChg chg="modSp mod">
-        <pc:chgData name="Ridhima Dhawan" userId="41b5bd7b-df07-43ed-9321-8df1cf164a12" providerId="ADAL" clId="{454EBA3A-CFA7-4557-80A3-8406924164EC}" dt="2025-09-17T17:37:21.941" v="5" actId="20577"/>
-        <pc:sldMkLst>
-          <pc:docMk/>
-          <pc:sldMk cId="0" sldId="275"/>
-        </pc:sldMkLst>
-      </pc:sldChg>
-      <pc:sldChg chg="addSp delSp modSp mod">
-        <pc:chgData name="Ridhima Dhawan" userId="41b5bd7b-df07-43ed-9321-8df1cf164a12" providerId="ADAL" clId="{454EBA3A-CFA7-4557-80A3-8406924164EC}" dt="2025-09-23T16:11:19.018" v="2066" actId="14100"/>
-        <pc:sldMkLst>
-          <pc:docMk/>
-          <pc:sldMk cId="1694384516" sldId="285"/>
-        </pc:sldMkLst>
-      </pc:sldChg>
-      <pc:sldChg chg="addSp delSp modSp mod modNotesTx">
-        <pc:chgData name="Ridhima Dhawan" userId="41b5bd7b-df07-43ed-9321-8df1cf164a12" providerId="ADAL" clId="{454EBA3A-CFA7-4557-80A3-8406924164EC}" dt="2025-09-19T03:52:27.481" v="1232" actId="20577"/>
-        <pc:sldMkLst>
-          <pc:docMk/>
-          <pc:sldMk cId="3180984745" sldId="333"/>
-        </pc:sldMkLst>
-      </pc:sldChg>
-      <pc:sldChg chg="addSp delSp modSp mod ord modNotesTx">
-        <pc:chgData name="Ridhima Dhawan" userId="41b5bd7b-df07-43ed-9321-8df1cf164a12" providerId="ADAL" clId="{454EBA3A-CFA7-4557-80A3-8406924164EC}" dt="2025-09-25T15:58:08.681" v="9002" actId="20577"/>
-        <pc:sldMkLst>
-          <pc:docMk/>
-          <pc:sldMk cId="2675615646" sldId="419"/>
-        </pc:sldMkLst>
-      </pc:sldChg>
-      <pc:sldChg chg="del">
-        <pc:chgData name="Ridhima Dhawan" userId="41b5bd7b-df07-43ed-9321-8df1cf164a12" providerId="ADAL" clId="{454EBA3A-CFA7-4557-80A3-8406924164EC}" dt="2025-09-17T17:41:25.728" v="134" actId="47"/>
-        <pc:sldMkLst>
-          <pc:docMk/>
-          <pc:sldMk cId="1299622664" sldId="434"/>
-        </pc:sldMkLst>
-      </pc:sldChg>
-      <pc:sldChg chg="addSp delSp modSp add mod">
-        <pc:chgData name="Ridhima Dhawan" userId="41b5bd7b-df07-43ed-9321-8df1cf164a12" providerId="ADAL" clId="{454EBA3A-CFA7-4557-80A3-8406924164EC}" dt="2025-09-23T19:05:17.611" v="6364" actId="20577"/>
-        <pc:sldMkLst>
-          <pc:docMk/>
-          <pc:sldMk cId="2128657008" sldId="2147481209"/>
-        </pc:sldMkLst>
-      </pc:sldChg>
-      <pc:sldChg chg="addSp delSp modSp new mod ord">
-        <pc:chgData name="Ridhima Dhawan" userId="41b5bd7b-df07-43ed-9321-8df1cf164a12" providerId="ADAL" clId="{454EBA3A-CFA7-4557-80A3-8406924164EC}" dt="2025-09-25T15:39:08.861" v="8952" actId="1076"/>
-        <pc:sldMkLst>
-          <pc:docMk/>
-          <pc:sldMk cId="1105021549" sldId="2147481210"/>
-        </pc:sldMkLst>
-      </pc:sldChg>
-      <pc:sldChg chg="addSp delSp modSp add mod">
-        <pc:chgData name="Ridhima Dhawan" userId="41b5bd7b-df07-43ed-9321-8df1cf164a12" providerId="ADAL" clId="{454EBA3A-CFA7-4557-80A3-8406924164EC}" dt="2025-09-26T06:42:10.782" v="9233" actId="20577"/>
-        <pc:sldMkLst>
-          <pc:docMk/>
-          <pc:sldMk cId="323746144" sldId="2147481211"/>
-        </pc:sldMkLst>
-      </pc:sldChg>
-      <pc:sldChg chg="addSp delSp modSp add mod">
-        <pc:chgData name="Ridhima Dhawan" userId="41b5bd7b-df07-43ed-9321-8df1cf164a12" providerId="ADAL" clId="{454EBA3A-CFA7-4557-80A3-8406924164EC}" dt="2025-09-23T16:39:12.998" v="3725" actId="1076"/>
-        <pc:sldMkLst>
-          <pc:docMk/>
-          <pc:sldMk cId="83366420" sldId="2147481212"/>
-        </pc:sldMkLst>
-      </pc:sldChg>
-      <pc:sldChg chg="addSp delSp modSp add mod">
-        <pc:chgData name="Ridhima Dhawan" userId="41b5bd7b-df07-43ed-9321-8df1cf164a12" providerId="ADAL" clId="{454EBA3A-CFA7-4557-80A3-8406924164EC}" dt="2025-09-26T06:45:21.549" v="9234" actId="1076"/>
-        <pc:sldMkLst>
-          <pc:docMk/>
-          <pc:sldMk cId="1270242671" sldId="2147481213"/>
-        </pc:sldMkLst>
-        <pc:spChg chg="mod">
-          <ac:chgData name="Ridhima Dhawan" userId="41b5bd7b-df07-43ed-9321-8df1cf164a12" providerId="ADAL" clId="{454EBA3A-CFA7-4557-80A3-8406924164EC}" dt="2025-09-23T16:51:56.192" v="3918" actId="20577"/>
-          <ac:spMkLst>
-            <pc:docMk/>
-            <pc:sldMk cId="1270242671" sldId="2147481213"/>
-            <ac:spMk id="3" creationId="{BF8AA7B9-40BC-BD5B-A38F-B69FFA6E6319}"/>
-          </ac:spMkLst>
-        </pc:spChg>
-        <pc:spChg chg="add mod">
-          <ac:chgData name="Ridhima Dhawan" userId="41b5bd7b-df07-43ed-9321-8df1cf164a12" providerId="ADAL" clId="{454EBA3A-CFA7-4557-80A3-8406924164EC}" dt="2025-09-26T06:45:21.549" v="9234" actId="1076"/>
-          <ac:spMkLst>
-            <pc:docMk/>
-            <pc:sldMk cId="1270242671" sldId="2147481213"/>
-            <ac:spMk id="4" creationId="{F93D6D7D-FF3F-82F6-14A4-6285C0323998}"/>
-          </ac:spMkLst>
-        </pc:spChg>
-        <pc:graphicFrameChg chg="add mod modGraphic">
-          <ac:chgData name="Ridhima Dhawan" userId="41b5bd7b-df07-43ed-9321-8df1cf164a12" providerId="ADAL" clId="{454EBA3A-CFA7-4557-80A3-8406924164EC}" dt="2025-09-23T23:14:56.318" v="7961" actId="1076"/>
-          <ac:graphicFrameMkLst>
-            <pc:docMk/>
-            <pc:sldMk cId="1270242671" sldId="2147481213"/>
-            <ac:graphicFrameMk id="2" creationId="{38F22EE9-DEDC-E1DA-1E19-E1758E9C192D}"/>
-          </ac:graphicFrameMkLst>
-        </pc:graphicFrameChg>
-      </pc:sldChg>
-      <pc:sldChg chg="addSp delSp modSp add mod">
-        <pc:chgData name="Ridhima Dhawan" userId="41b5bd7b-df07-43ed-9321-8df1cf164a12" providerId="ADAL" clId="{454EBA3A-CFA7-4557-80A3-8406924164EC}" dt="2025-09-23T18:42:17.814" v="6250" actId="20577"/>
-        <pc:sldMkLst>
-          <pc:docMk/>
-          <pc:sldMk cId="1389874235" sldId="2147481214"/>
-        </pc:sldMkLst>
-      </pc:sldChg>
-      <pc:sldChg chg="modSp add mod">
-        <pc:chgData name="Ridhima Dhawan" userId="41b5bd7b-df07-43ed-9321-8df1cf164a12" providerId="ADAL" clId="{454EBA3A-CFA7-4557-80A3-8406924164EC}" dt="2025-09-17T17:51:09.912" v="323" actId="20577"/>
-        <pc:sldMkLst>
-          <pc:docMk/>
-          <pc:sldMk cId="3040778351" sldId="2147481215"/>
-        </pc:sldMkLst>
-      </pc:sldChg>
-      <pc:sldChg chg="delSp modSp add mod ord">
-        <pc:chgData name="Ridhima Dhawan" userId="41b5bd7b-df07-43ed-9321-8df1cf164a12" providerId="ADAL" clId="{454EBA3A-CFA7-4557-80A3-8406924164EC}" dt="2025-09-17T20:05:15.773" v="1049" actId="313"/>
-        <pc:sldMkLst>
-          <pc:docMk/>
-          <pc:sldMk cId="1707149320" sldId="2147481216"/>
-        </pc:sldMkLst>
-      </pc:sldChg>
-      <pc:sldChg chg="add">
-        <pc:chgData name="Ridhima Dhawan" userId="41b5bd7b-df07-43ed-9321-8df1cf164a12" providerId="ADAL" clId="{454EBA3A-CFA7-4557-80A3-8406924164EC}" dt="2025-09-19T04:19:51.802" v="1315" actId="2890"/>
-        <pc:sldMkLst>
-          <pc:docMk/>
-          <pc:sldMk cId="2307073506" sldId="2147481217"/>
-        </pc:sldMkLst>
-      </pc:sldChg>
-      <pc:sldChg chg="addSp delSp modSp add mod">
-        <pc:chgData name="Ridhima Dhawan" userId="41b5bd7b-df07-43ed-9321-8df1cf164a12" providerId="ADAL" clId="{454EBA3A-CFA7-4557-80A3-8406924164EC}" dt="2025-09-23T19:06:18.876" v="6365" actId="14100"/>
-        <pc:sldMkLst>
-          <pc:docMk/>
-          <pc:sldMk cId="145336846" sldId="2147481218"/>
-        </pc:sldMkLst>
-      </pc:sldChg>
-      <pc:sldChg chg="addSp delSp modSp new mod">
-        <pc:chgData name="Ridhima Dhawan" userId="41b5bd7b-df07-43ed-9321-8df1cf164a12" providerId="ADAL" clId="{454EBA3A-CFA7-4557-80A3-8406924164EC}" dt="2025-09-25T15:21:33.063" v="8938" actId="20577"/>
-        <pc:sldMkLst>
-          <pc:docMk/>
-          <pc:sldMk cId="2449955966" sldId="2147481220"/>
-        </pc:sldMkLst>
-      </pc:sldChg>
-      <pc:sldChg chg="addSp delSp modSp add mod">
-        <pc:chgData name="Ridhima Dhawan" userId="41b5bd7b-df07-43ed-9321-8df1cf164a12" providerId="ADAL" clId="{454EBA3A-CFA7-4557-80A3-8406924164EC}" dt="2025-09-23T23:12:20.625" v="7960" actId="1076"/>
-        <pc:sldMkLst>
-          <pc:docMk/>
-          <pc:sldMk cId="3753532281" sldId="2147481221"/>
-        </pc:sldMkLst>
-      </pc:sldChg>
-      <pc:sldChg chg="addSp delSp modSp add mod ord">
-        <pc:chgData name="Ridhima Dhawan" userId="41b5bd7b-df07-43ed-9321-8df1cf164a12" providerId="ADAL" clId="{454EBA3A-CFA7-4557-80A3-8406924164EC}" dt="2025-09-26T16:50:09.182" v="9258" actId="20577"/>
-        <pc:sldMkLst>
-          <pc:docMk/>
-          <pc:sldMk cId="1157813500" sldId="2147481222"/>
-        </pc:sldMkLst>
-      </pc:sldChg>
-      <pc:sldChg chg="addSp delSp modSp add mod ord replId">
-        <pc:chgData name="Ridhima Dhawan" userId="41b5bd7b-df07-43ed-9321-8df1cf164a12" providerId="ADAL" clId="{454EBA3A-CFA7-4557-80A3-8406924164EC}" dt="2025-09-23T18:24:32.029" v="5732" actId="20577"/>
-        <pc:sldMkLst>
-          <pc:docMk/>
-          <pc:sldMk cId="4242413873" sldId="2147481223"/>
-        </pc:sldMkLst>
-      </pc:sldChg>
-      <pc:sldChg chg="addSp delSp modSp add mod">
-        <pc:chgData name="Ridhima Dhawan" userId="41b5bd7b-df07-43ed-9321-8df1cf164a12" providerId="ADAL" clId="{454EBA3A-CFA7-4557-80A3-8406924164EC}" dt="2025-09-26T06:40:51.484" v="9216" actId="404"/>
-        <pc:sldMkLst>
-          <pc:docMk/>
-          <pc:sldMk cId="3621352377" sldId="2147481224"/>
-        </pc:sldMkLst>
-      </pc:sldChg>
-      <pc:sldChg chg="addSp delSp modSp add mod">
-        <pc:chgData name="Ridhima Dhawan" userId="41b5bd7b-df07-43ed-9321-8df1cf164a12" providerId="ADAL" clId="{454EBA3A-CFA7-4557-80A3-8406924164EC}" dt="2025-09-25T15:39:35.496" v="8966" actId="20577"/>
-        <pc:sldMkLst>
-          <pc:docMk/>
-          <pc:sldMk cId="2178493738" sldId="2147481225"/>
-        </pc:sldMkLst>
-      </pc:sldChg>
-      <pc:sldChg chg="delSp modSp add mod">
-        <pc:chgData name="Ridhima Dhawan" userId="41b5bd7b-df07-43ed-9321-8df1cf164a12" providerId="ADAL" clId="{454EBA3A-CFA7-4557-80A3-8406924164EC}" dt="2025-09-25T18:48:13.249" v="9135" actId="20577"/>
-        <pc:sldMkLst>
-          <pc:docMk/>
-          <pc:sldMk cId="1394883244" sldId="2147481226"/>
-        </pc:sldMkLst>
-      </pc:sldChg>
-      <pc:sldChg chg="addSp delSp modSp add mod">
-        <pc:chgData name="Ridhima Dhawan" userId="41b5bd7b-df07-43ed-9321-8df1cf164a12" providerId="ADAL" clId="{454EBA3A-CFA7-4557-80A3-8406924164EC}" dt="2025-09-25T15:59:22.730" v="9080" actId="20577"/>
-        <pc:sldMkLst>
-          <pc:docMk/>
-          <pc:sldMk cId="2560992972" sldId="2147481227"/>
-        </pc:sldMkLst>
-      </pc:sldChg>
-      <pc:sldChg chg="modSp add mod">
-        <pc:chgData name="Ridhima Dhawan" userId="41b5bd7b-df07-43ed-9321-8df1cf164a12" providerId="ADAL" clId="{454EBA3A-CFA7-4557-80A3-8406924164EC}" dt="2025-09-25T15:59:30.763" v="9087" actId="20577"/>
-        <pc:sldMkLst>
-          <pc:docMk/>
-          <pc:sldMk cId="427855662" sldId="2147481228"/>
-        </pc:sldMkLst>
-      </pc:sldChg>
-      <pc:sldMasterChg chg="delSldLayout">
-        <pc:chgData name="Ridhima Dhawan" userId="41b5bd7b-df07-43ed-9321-8df1cf164a12" providerId="ADAL" clId="{454EBA3A-CFA7-4557-80A3-8406924164EC}" dt="2025-09-23T16:11:22.319" v="2067" actId="47"/>
-        <pc:sldMasterMkLst>
-          <pc:docMk/>
-          <pc:sldMasterMk cId="1804289383" sldId="2147483648"/>
-        </pc:sldMasterMkLst>
-      </pc:sldMasterChg>
     </pc:docChg>
   </pc:docChgLst>
 </pc:chgInfo>
@@ -3236,7 +472,7 @@
           <a:p>
             <a:fld id="{C2486858-BEB2-AA4A-AEF7-6C259965A833}" type="datetimeFigureOut">
               <a:rPr lang="en-US" smtClean="0"/>
-              <a:t>1/13/26</a:t>
+              <a:t>3/2/2026</a:t>
             </a:fld>
             <a:endParaRPr lang="en-US"/>
           </a:p>
@@ -3335,7 +571,7 @@
           <a:p>
             <a:fld id="{DE650B3E-2EAB-E847-9859-1E8EF3D97F17}" type="datetimeFigureOut">
               <a:rPr lang="en-US" smtClean="0"/>
-              <a:t>1/13/26</a:t>
+              <a:t>3/2/2026</a:t>
             </a:fld>
             <a:endParaRPr lang="en-US"/>
           </a:p>
@@ -3878,6 +1114,114 @@
 </p:notes>
 </file>
 
+<file path=ppt/notesSlides/notesSlide3.xml><?xml version="1.0" encoding="utf-8"?>
+<p:notes xmlns:a="http://schemas.openxmlformats.org/drawingml/2006/main" xmlns:r="http://schemas.openxmlformats.org/officeDocument/2006/relationships" xmlns:p="http://schemas.openxmlformats.org/presentationml/2006/main">
+  <p:cSld>
+    <p:spTree>
+      <p:nvGrpSpPr>
+        <p:cNvPr id="1" name="">
+          <a:extLst>
+            <a:ext uri="{FF2B5EF4-FFF2-40B4-BE49-F238E27FC236}">
+              <a16:creationId xmlns:a16="http://schemas.microsoft.com/office/drawing/2014/main" id="{47250ECD-0A9A-E6E8-D1B1-C37CEF3DDF6A}"/>
+            </a:ext>
+          </a:extLst>
+        </p:cNvPr>
+        <p:cNvGrpSpPr/>
+        <p:nvPr/>
+      </p:nvGrpSpPr>
+      <p:grpSpPr>
+        <a:xfrm>
+          <a:off x="0" y="0"/>
+          <a:ext cx="0" cy="0"/>
+          <a:chOff x="0" y="0"/>
+          <a:chExt cx="0" cy="0"/>
+        </a:xfrm>
+      </p:grpSpPr>
+      <p:sp>
+        <p:nvSpPr>
+          <p:cNvPr id="2" name="Slide Image Placeholder 1">
+            <a:extLst>
+              <a:ext uri="{FF2B5EF4-FFF2-40B4-BE49-F238E27FC236}">
+                <a16:creationId xmlns:a16="http://schemas.microsoft.com/office/drawing/2014/main" id="{2B6A49EB-03B6-3F31-57A0-7DC5C35C3533}"/>
+              </a:ext>
+            </a:extLst>
+          </p:cNvPr>
+          <p:cNvSpPr>
+            <a:spLocks noGrp="1" noRot="1" noChangeAspect="1"/>
+          </p:cNvSpPr>
+          <p:nvPr>
+            <p:ph type="sldImg"/>
+          </p:nvPr>
+        </p:nvSpPr>
+        <p:spPr/>
+      </p:sp>
+      <p:sp>
+        <p:nvSpPr>
+          <p:cNvPr id="3" name="Notes Placeholder 2">
+            <a:extLst>
+              <a:ext uri="{FF2B5EF4-FFF2-40B4-BE49-F238E27FC236}">
+                <a16:creationId xmlns:a16="http://schemas.microsoft.com/office/drawing/2014/main" id="{7DBBC8D0-B39A-C513-2632-8DA37699BC86}"/>
+              </a:ext>
+            </a:extLst>
+          </p:cNvPr>
+          <p:cNvSpPr>
+            <a:spLocks noGrp="1"/>
+          </p:cNvSpPr>
+          <p:nvPr>
+            <p:ph type="body" idx="1"/>
+          </p:nvPr>
+        </p:nvSpPr>
+        <p:spPr/>
+        <p:txBody>
+          <a:bodyPr/>
+          <a:lstStyle/>
+          <a:p>
+            <a:endParaRPr lang="en-US" sz="1200"/>
+          </a:p>
+        </p:txBody>
+      </p:sp>
+      <p:sp>
+        <p:nvSpPr>
+          <p:cNvPr id="4" name="Slide Number Placeholder 3">
+            <a:extLst>
+              <a:ext uri="{FF2B5EF4-FFF2-40B4-BE49-F238E27FC236}">
+                <a16:creationId xmlns:a16="http://schemas.microsoft.com/office/drawing/2014/main" id="{E5DFD209-E260-477E-5E84-27E49671A3E0}"/>
+              </a:ext>
+            </a:extLst>
+          </p:cNvPr>
+          <p:cNvSpPr>
+            <a:spLocks noGrp="1"/>
+          </p:cNvSpPr>
+          <p:nvPr>
+            <p:ph type="sldNum" sz="quarter" idx="5"/>
+          </p:nvPr>
+        </p:nvSpPr>
+        <p:spPr/>
+        <p:txBody>
+          <a:bodyPr/>
+          <a:lstStyle/>
+          <a:p>
+            <a:fld id="{0B3F51BA-7433-1D4B-84CB-B35DE54FDFCD}" type="slidenum">
+              <a:rPr lang="en-US" smtClean="0"/>
+              <a:t>4</a:t>
+            </a:fld>
+            <a:endParaRPr lang="en-US"/>
+          </a:p>
+        </p:txBody>
+      </p:sp>
+    </p:spTree>
+    <p:extLst>
+      <p:ext uri="{BB962C8B-B14F-4D97-AF65-F5344CB8AC3E}">
+        <p14:creationId xmlns:p14="http://schemas.microsoft.com/office/powerpoint/2010/main" val="1051412250"/>
+      </p:ext>
+    </p:extLst>
+  </p:cSld>
+  <p:clrMapOvr>
+    <a:masterClrMapping/>
+  </p:clrMapOvr>
+</p:notes>
+</file>
+
 <file path=ppt/slideLayouts/slideLayout1.xml><?xml version="1.0" encoding="utf-8"?>
 <p:sldLayout xmlns:a="http://schemas.openxmlformats.org/drawingml/2006/main" xmlns:r="http://schemas.openxmlformats.org/officeDocument/2006/relationships" xmlns:p="http://schemas.openxmlformats.org/presentationml/2006/main" preserve="1" userDrawn="1">
   <p:cSld name="1_Cover-Pages_Magenta-Neon-Glow-T">
@@ -4610,7 +1954,7 @@
           </p:cNvGraphicFramePr>
           <p:nvPr userDrawn="1">
             <p:custDataLst>
-              <p:tags r:id="rId2"/>
+              <p:tags r:id="rId1"/>
             </p:custDataLst>
           </p:nvPr>
         </p:nvGraphicFramePr>
@@ -4622,12 +1966,12 @@
           <a:graphicData uri="http://schemas.openxmlformats.org/presentationml/2006/ole">
             <mc:AlternateContent xmlns:mc="http://schemas.openxmlformats.org/markup-compatibility/2006">
               <mc:Choice xmlns:v="urn:schemas-microsoft-com:vml" Requires="v">
-                <p:oleObj spid="_x0000_s1025" name="think-cell Slide" r:id="rId4" imgW="592" imgH="595" progId="TCLayout.ActiveDocument.1">
+                <p:oleObj name="think-cell Slide" r:id="rId3" imgW="592" imgH="595" progId="TCLayout.ActiveDocument.1">
                   <p:embed/>
                 </p:oleObj>
               </mc:Choice>
               <mc:Fallback>
-                <p:oleObj name="think-cell Slide" r:id="rId4" imgW="592" imgH="595" progId="TCLayout.ActiveDocument.1">
+                <p:oleObj name="think-cell Slide" r:id="rId3" imgW="592" imgH="595" progId="TCLayout.ActiveDocument.1">
                   <p:embed/>
                   <p:pic>
                     <p:nvPicPr>
@@ -4642,7 +1986,7 @@
                       <p:nvPr/>
                     </p:nvPicPr>
                     <p:blipFill>
-                      <a:blip r:embed="rId5"/>
+                      <a:blip r:embed="rId4"/>
                       <a:stretch>
                         <a:fillRect/>
                       </a:stretch>
@@ -4952,7 +2296,7 @@
             <p:nvPr userDrawn="1"/>
           </p:nvPicPr>
           <p:blipFill>
-            <a:blip r:embed="rId6"/>
+            <a:blip r:embed="rId5"/>
             <a:stretch>
               <a:fillRect/>
             </a:stretch>
@@ -12984,7 +10328,7 @@
             <a:fld id="{ADA417E5-1A75-45D7-BDE0-29E7A6B38811}" type="datetimeFigureOut">
               <a:rPr lang="en-US" smtClean="0"/>
               <a:pPr/>
-              <a:t>1/13/26</a:t>
+              <a:t>3/2/2026</a:t>
             </a:fld>
             <a:endParaRPr lang="en-US"/>
           </a:p>
@@ -17681,10 +15025,6 @@
               <a:rPr lang="en-US" sz="1200" dirty="0"/>
               <a:t>INSIGHTS</a:t>
             </a:r>
-            <a:endParaRPr lang="en-US" sz="1200" dirty="0">
-              <a:ea typeface="+mn-lt"/>
-              <a:cs typeface="+mn-lt"/>
-            </a:endParaRPr>
           </a:p>
         </p:txBody>
       </p:sp>
@@ -17812,8 +15152,8 @@
         </p:nvSpPr>
         <p:spPr>
           <a:xfrm>
-            <a:off x="12408198" y="85059"/>
-            <a:ext cx="1488555" cy="415498"/>
+            <a:off x="12290600" y="0"/>
+            <a:ext cx="1691847" cy="253916"/>
           </a:xfrm>
           <a:prstGeom prst="rect">
             <a:avLst/>
@@ -17832,7 +15172,7 @@
             </a:r>
             <a:r>
               <a:rPr lang="en-US" sz="1050" dirty="0" err="1"/>
-              <a:t>smsdataslide</a:t>
+              <a:t>datatableslide</a:t>
             </a:r>
             <a:endParaRPr lang="en-US" sz="1050" dirty="0"/>
           </a:p>
@@ -17842,6 +15182,4736 @@
     <p:extLst>
       <p:ext uri="{BB962C8B-B14F-4D97-AF65-F5344CB8AC3E}">
         <p14:creationId xmlns:p14="http://schemas.microsoft.com/office/powerpoint/2010/main" val="1270242671"/>
+      </p:ext>
+    </p:extLst>
+  </p:cSld>
+  <p:clrMapOvr>
+    <a:masterClrMapping/>
+  </p:clrMapOvr>
+</p:sld>
+</file>
+
+<file path=ppt/slides/slide4.xml><?xml version="1.0" encoding="utf-8"?>
+<p:sld xmlns:a="http://schemas.openxmlformats.org/drawingml/2006/main" xmlns:r="http://schemas.openxmlformats.org/officeDocument/2006/relationships" xmlns:p="http://schemas.openxmlformats.org/presentationml/2006/main">
+  <p:cSld>
+    <p:spTree>
+      <p:nvGrpSpPr>
+        <p:cNvPr id="1" name="">
+          <a:extLst>
+            <a:ext uri="{FF2B5EF4-FFF2-40B4-BE49-F238E27FC236}">
+              <a16:creationId xmlns:a16="http://schemas.microsoft.com/office/drawing/2014/main" id="{96E068C7-66AB-970E-52C8-4CE6DAE47551}"/>
+            </a:ext>
+          </a:extLst>
+        </p:cNvPr>
+        <p:cNvGrpSpPr/>
+        <p:nvPr/>
+      </p:nvGrpSpPr>
+      <p:grpSpPr>
+        <a:xfrm>
+          <a:off x="0" y="0"/>
+          <a:ext cx="0" cy="0"/>
+          <a:chOff x="0" y="0"/>
+          <a:chExt cx="0" cy="0"/>
+        </a:xfrm>
+      </p:grpSpPr>
+      <p:sp>
+        <p:nvSpPr>
+          <p:cNvPr id="3" name="Rectangle 2">
+            <a:extLst>
+              <a:ext uri="{FF2B5EF4-FFF2-40B4-BE49-F238E27FC236}">
+                <a16:creationId xmlns:a16="http://schemas.microsoft.com/office/drawing/2014/main" id="{AB8C8DFA-6D34-2D53-8312-B203248BF7F9}"/>
+              </a:ext>
+            </a:extLst>
+          </p:cNvPr>
+          <p:cNvSpPr/>
+          <p:nvPr/>
+        </p:nvSpPr>
+        <p:spPr>
+          <a:xfrm>
+            <a:off x="-15" y="0"/>
+            <a:ext cx="3917172" cy="457202"/>
+          </a:xfrm>
+          <a:prstGeom prst="rect">
+            <a:avLst/>
+          </a:prstGeom>
+          <a:solidFill>
+            <a:schemeClr val="accent1"/>
+          </a:solidFill>
+          <a:ln>
+            <a:noFill/>
+          </a:ln>
+        </p:spPr>
+        <p:style>
+          <a:lnRef idx="2">
+            <a:schemeClr val="accent1">
+              <a:shade val="50000"/>
+            </a:schemeClr>
+          </a:lnRef>
+          <a:fillRef idx="1">
+            <a:schemeClr val="accent1"/>
+          </a:fillRef>
+          <a:effectRef idx="0">
+            <a:schemeClr val="accent1"/>
+          </a:effectRef>
+          <a:fontRef idx="minor">
+            <a:schemeClr val="lt1"/>
+          </a:fontRef>
+        </p:style>
+        <p:txBody>
+          <a:bodyPr lIns="91440" tIns="45720" rIns="91440" bIns="45720" rtlCol="0" anchor="ctr"/>
+          <a:lstStyle/>
+          <a:p>
+            <a:pPr algn="ctr"/>
+            <a:endParaRPr lang="en-US" sz="2000" b="1" dirty="0">
+              <a:solidFill>
+                <a:schemeClr val="bg1"/>
+              </a:solidFill>
+              <a:latin typeface="+mj-lt"/>
+              <a:ea typeface="linea-basic-10" charset="0"/>
+              <a:cs typeface="linea-basic-10" charset="0"/>
+            </a:endParaRPr>
+          </a:p>
+        </p:txBody>
+      </p:sp>
+      <p:sp>
+        <p:nvSpPr>
+          <p:cNvPr id="4" name="TextBox 24">
+            <a:extLst>
+              <a:ext uri="{FF2B5EF4-FFF2-40B4-BE49-F238E27FC236}">
+                <a16:creationId xmlns:a16="http://schemas.microsoft.com/office/drawing/2014/main" id="{95E83695-58DA-4E11-F90B-30EE08CF28D2}"/>
+              </a:ext>
+            </a:extLst>
+          </p:cNvPr>
+          <p:cNvSpPr txBox="1"/>
+          <p:nvPr/>
+        </p:nvSpPr>
+        <p:spPr>
+          <a:xfrm>
+            <a:off x="176188" y="2751764"/>
+            <a:ext cx="3564766" cy="276999"/>
+          </a:xfrm>
+          <a:prstGeom prst="rect">
+            <a:avLst/>
+          </a:prstGeom>
+          <a:noFill/>
+        </p:spPr>
+        <p:txBody>
+          <a:bodyPr wrap="square" lIns="91440" tIns="45720" rIns="91440" bIns="45720" anchor="t">
+            <a:spAutoFit/>
+          </a:bodyPr>
+          <a:lstStyle>
+            <a:defPPr>
+              <a:defRPr lang="en-US"/>
+            </a:defPPr>
+            <a:lvl1pPr marL="0" algn="l" defTabSz="914400" rtl="0" eaLnBrk="1" latinLnBrk="0" hangingPunct="1">
+              <a:defRPr sz="1800" kern="1200">
+                <a:solidFill>
+                  <a:schemeClr val="tx1"/>
+                </a:solidFill>
+                <a:latin typeface="+mn-lt"/>
+                <a:ea typeface="+mn-ea"/>
+                <a:cs typeface="+mn-cs"/>
+              </a:defRPr>
+            </a:lvl1pPr>
+            <a:lvl2pPr marL="457200" algn="l" defTabSz="914400" rtl="0" eaLnBrk="1" latinLnBrk="0" hangingPunct="1">
+              <a:defRPr sz="1800" kern="1200">
+                <a:solidFill>
+                  <a:schemeClr val="tx1"/>
+                </a:solidFill>
+                <a:latin typeface="+mn-lt"/>
+                <a:ea typeface="+mn-ea"/>
+                <a:cs typeface="+mn-cs"/>
+              </a:defRPr>
+            </a:lvl2pPr>
+            <a:lvl3pPr marL="914400" algn="l" defTabSz="914400" rtl="0" eaLnBrk="1" latinLnBrk="0" hangingPunct="1">
+              <a:defRPr sz="1800" kern="1200">
+                <a:solidFill>
+                  <a:schemeClr val="tx1"/>
+                </a:solidFill>
+                <a:latin typeface="+mn-lt"/>
+                <a:ea typeface="+mn-ea"/>
+                <a:cs typeface="+mn-cs"/>
+              </a:defRPr>
+            </a:lvl3pPr>
+            <a:lvl4pPr marL="1371600" algn="l" defTabSz="914400" rtl="0" eaLnBrk="1" latinLnBrk="0" hangingPunct="1">
+              <a:defRPr sz="1800" kern="1200">
+                <a:solidFill>
+                  <a:schemeClr val="tx1"/>
+                </a:solidFill>
+                <a:latin typeface="+mn-lt"/>
+                <a:ea typeface="+mn-ea"/>
+                <a:cs typeface="+mn-cs"/>
+              </a:defRPr>
+            </a:lvl4pPr>
+            <a:lvl5pPr marL="1828800" algn="l" defTabSz="914400" rtl="0" eaLnBrk="1" latinLnBrk="0" hangingPunct="1">
+              <a:defRPr sz="1800" kern="1200">
+                <a:solidFill>
+                  <a:schemeClr val="tx1"/>
+                </a:solidFill>
+                <a:latin typeface="+mn-lt"/>
+                <a:ea typeface="+mn-ea"/>
+                <a:cs typeface="+mn-cs"/>
+              </a:defRPr>
+            </a:lvl5pPr>
+            <a:lvl6pPr marL="2286000" algn="l" defTabSz="914400" rtl="0" eaLnBrk="1" latinLnBrk="0" hangingPunct="1">
+              <a:defRPr sz="1800" kern="1200">
+                <a:solidFill>
+                  <a:schemeClr val="tx1"/>
+                </a:solidFill>
+                <a:latin typeface="+mn-lt"/>
+                <a:ea typeface="+mn-ea"/>
+                <a:cs typeface="+mn-cs"/>
+              </a:defRPr>
+            </a:lvl6pPr>
+            <a:lvl7pPr marL="2743200" algn="l" defTabSz="914400" rtl="0" eaLnBrk="1" latinLnBrk="0" hangingPunct="1">
+              <a:defRPr sz="1800" kern="1200">
+                <a:solidFill>
+                  <a:schemeClr val="tx1"/>
+                </a:solidFill>
+                <a:latin typeface="+mn-lt"/>
+                <a:ea typeface="+mn-ea"/>
+                <a:cs typeface="+mn-cs"/>
+              </a:defRPr>
+            </a:lvl7pPr>
+            <a:lvl8pPr marL="3200400" algn="l" defTabSz="914400" rtl="0" eaLnBrk="1" latinLnBrk="0" hangingPunct="1">
+              <a:defRPr sz="1800" kern="1200">
+                <a:solidFill>
+                  <a:schemeClr val="tx1"/>
+                </a:solidFill>
+                <a:latin typeface="+mn-lt"/>
+                <a:ea typeface="+mn-ea"/>
+                <a:cs typeface="+mn-cs"/>
+              </a:defRPr>
+            </a:lvl8pPr>
+            <a:lvl9pPr marL="3657600" algn="l" defTabSz="914400" rtl="0" eaLnBrk="1" latinLnBrk="0" hangingPunct="1">
+              <a:defRPr sz="1800" kern="1200">
+                <a:solidFill>
+                  <a:schemeClr val="tx1"/>
+                </a:solidFill>
+                <a:latin typeface="+mn-lt"/>
+                <a:ea typeface="+mn-ea"/>
+                <a:cs typeface="+mn-cs"/>
+              </a:defRPr>
+            </a:lvl9pPr>
+          </a:lstStyle>
+          <a:p>
+            <a:pPr marL="285750" indent="-285750">
+              <a:buFont typeface="Wingdings" panose="05000000000000000000" pitchFamily="2" charset="2"/>
+              <a:buChar char="ü"/>
+            </a:pPr>
+            <a:r>
+              <a:rPr lang="en-US" sz="1200" dirty="0"/>
+              <a:t>INSIGHTS</a:t>
+            </a:r>
+          </a:p>
+        </p:txBody>
+      </p:sp>
+      <p:sp>
+        <p:nvSpPr>
+          <p:cNvPr id="5" name="Text 0">
+            <a:extLst>
+              <a:ext uri="{FF2B5EF4-FFF2-40B4-BE49-F238E27FC236}">
+                <a16:creationId xmlns:a16="http://schemas.microsoft.com/office/drawing/2014/main" id="{D4F15F38-BCA2-D9A0-B05A-2A9E5B61A041}"/>
+              </a:ext>
+            </a:extLst>
+          </p:cNvPr>
+          <p:cNvSpPr/>
+          <p:nvPr/>
+        </p:nvSpPr>
+        <p:spPr>
+          <a:xfrm rot="21600000">
+            <a:off x="217432" y="85059"/>
+            <a:ext cx="3564766" cy="644792"/>
+          </a:xfrm>
+          <a:prstGeom prst="rect">
+            <a:avLst/>
+          </a:prstGeom>
+          <a:noFill/>
+          <a:ln/>
+        </p:spPr>
+        <p:txBody>
+          <a:bodyPr wrap="square" lIns="0" tIns="0" rIns="0" bIns="0" rtlCol="0" anchor="t" anchorCtr="0">
+            <a:noAutofit/>
+          </a:bodyPr>
+          <a:lstStyle/>
+          <a:p>
+            <a:pPr algn="ctr" defTabSz="457109">
+              <a:defRPr/>
+            </a:pPr>
+            <a:r>
+              <a:rPr lang="en-US" sz="2000" b="1" i="1" dirty="0">
+                <a:solidFill>
+                  <a:schemeClr val="bg1"/>
+                </a:solidFill>
+                <a:latin typeface="TeleNeo Var ExtraBold Normal" panose="020B0004040202090203" pitchFamily="34" charset="0"/>
+                <a:ea typeface="TeleNeo Var Ultra Italic" pitchFamily="34" charset="-122"/>
+                <a:cs typeface="TeleNeo Var Ultra Italic" pitchFamily="34" charset="-120"/>
+              </a:rPr>
+              <a:t>PLACE_TEXT_TITLE</a:t>
+            </a:r>
+            <a:endParaRPr lang="en-US" sz="2000" dirty="0">
+              <a:solidFill>
+                <a:schemeClr val="bg1"/>
+              </a:solidFill>
+            </a:endParaRPr>
+          </a:p>
+        </p:txBody>
+      </p:sp>
+      <p:sp>
+        <p:nvSpPr>
+          <p:cNvPr id="8" name="Title 1">
+            <a:extLst>
+              <a:ext uri="{FF2B5EF4-FFF2-40B4-BE49-F238E27FC236}">
+                <a16:creationId xmlns:a16="http://schemas.microsoft.com/office/drawing/2014/main" id="{F0D05042-2FF5-41B0-E5A5-812B266EB908}"/>
+              </a:ext>
+            </a:extLst>
+          </p:cNvPr>
+          <p:cNvSpPr txBox="1">
+            <a:spLocks/>
+          </p:cNvSpPr>
+          <p:nvPr/>
+        </p:nvSpPr>
+        <p:spPr>
+          <a:xfrm>
+            <a:off x="217431" y="809642"/>
+            <a:ext cx="3482279" cy="496161"/>
+          </a:xfrm>
+          <a:prstGeom prst="rect">
+            <a:avLst/>
+          </a:prstGeom>
+        </p:spPr>
+        <p:txBody>
+          <a:bodyPr wrap="square" lIns="0" anchor="t" anchorCtr="0">
+            <a:spAutoFit/>
+          </a:bodyPr>
+          <a:lstStyle>
+            <a:lvl1pPr algn="l" defTabSz="914400" rtl="0" eaLnBrk="1" latinLnBrk="0" hangingPunct="1">
+              <a:lnSpc>
+                <a:spcPct val="80000"/>
+              </a:lnSpc>
+              <a:spcBef>
+                <a:spcPct val="0"/>
+              </a:spcBef>
+              <a:buNone/>
+              <a:defRPr sz="2400" b="1" i="0" kern="1200">
+                <a:solidFill>
+                  <a:schemeClr val="accent1"/>
+                </a:solidFill>
+                <a:latin typeface="TeleNeo Office ExtraBold" panose="020B0504040202090203" pitchFamily="34" charset="77"/>
+                <a:ea typeface="+mj-ea"/>
+                <a:cs typeface="+mj-cs"/>
+              </a:defRPr>
+            </a:lvl1pPr>
+          </a:lstStyle>
+          <a:p>
+            <a:r>
+              <a:rPr lang="en-US" sz="3200" dirty="0">
+                <a:solidFill>
+                  <a:schemeClr val="tx2"/>
+                </a:solidFill>
+              </a:rPr>
+              <a:t>HEADLINE</a:t>
+            </a:r>
+            <a:endParaRPr lang="en-US" sz="3200" dirty="0"/>
+          </a:p>
+        </p:txBody>
+      </p:sp>
+      <p:sp>
+        <p:nvSpPr>
+          <p:cNvPr id="9" name="TextBox 8">
+            <a:extLst>
+              <a:ext uri="{FF2B5EF4-FFF2-40B4-BE49-F238E27FC236}">
+                <a16:creationId xmlns:a16="http://schemas.microsoft.com/office/drawing/2014/main" id="{BDAA35E6-F194-9CC3-48EB-DC42B5DEBBA1}"/>
+              </a:ext>
+            </a:extLst>
+          </p:cNvPr>
+          <p:cNvSpPr txBox="1"/>
+          <p:nvPr/>
+        </p:nvSpPr>
+        <p:spPr>
+          <a:xfrm>
+            <a:off x="12290600" y="0"/>
+            <a:ext cx="1691847" cy="253916"/>
+          </a:xfrm>
+          <a:prstGeom prst="rect">
+            <a:avLst/>
+          </a:prstGeom>
+          <a:noFill/>
+        </p:spPr>
+        <p:txBody>
+          <a:bodyPr wrap="square" rtlCol="0">
+            <a:spAutoFit/>
+          </a:bodyPr>
+          <a:lstStyle/>
+          <a:p>
+            <a:r>
+              <a:rPr lang="en-US" sz="1050" dirty="0"/>
+              <a:t>title name: </a:t>
+            </a:r>
+            <a:r>
+              <a:rPr lang="en-US" sz="1050" dirty="0" err="1"/>
+              <a:t>heatmapslide</a:t>
+            </a:r>
+            <a:endParaRPr lang="en-US" sz="1050" dirty="0"/>
+          </a:p>
+        </p:txBody>
+      </p:sp>
+      <p:graphicFrame>
+        <p:nvGraphicFramePr>
+          <p:cNvPr id="12" name="Table 11">
+            <a:extLst>
+              <a:ext uri="{FF2B5EF4-FFF2-40B4-BE49-F238E27FC236}">
+                <a16:creationId xmlns:a16="http://schemas.microsoft.com/office/drawing/2014/main" id="{C4ED9935-835F-E0EC-07CF-77B128224FE4}"/>
+              </a:ext>
+            </a:extLst>
+          </p:cNvPr>
+          <p:cNvGraphicFramePr>
+            <a:graphicFrameLocks noGrp="1"/>
+          </p:cNvGraphicFramePr>
+          <p:nvPr>
+            <p:extLst>
+              <p:ext uri="{D42A27DB-BD31-4B8C-83A1-F6EECF244321}">
+                <p14:modId xmlns:p14="http://schemas.microsoft.com/office/powerpoint/2010/main" val="334317895"/>
+              </p:ext>
+            </p:extLst>
+          </p:nvPr>
+        </p:nvGraphicFramePr>
+        <p:xfrm>
+          <a:off x="4134604" y="457202"/>
+          <a:ext cx="6123887" cy="6215809"/>
+        </p:xfrm>
+        <a:graphic>
+          <a:graphicData uri="http://schemas.openxmlformats.org/drawingml/2006/table">
+            <a:tbl>
+              <a:tblPr/>
+              <a:tblGrid>
+                <a:gridCol w="1077930">
+                  <a:extLst>
+                    <a:ext uri="{9D8B030D-6E8A-4147-A177-3AD203B41FA5}">
+                      <a16:colId xmlns:a16="http://schemas.microsoft.com/office/drawing/2014/main" val="2138594794"/>
+                    </a:ext>
+                  </a:extLst>
+                </a:gridCol>
+                <a:gridCol w="1485978">
+                  <a:extLst>
+                    <a:ext uri="{9D8B030D-6E8A-4147-A177-3AD203B41FA5}">
+                      <a16:colId xmlns:a16="http://schemas.microsoft.com/office/drawing/2014/main" val="2211103091"/>
+                    </a:ext>
+                  </a:extLst>
+                </a:gridCol>
+                <a:gridCol w="2675966">
+                  <a:extLst>
+                    <a:ext uri="{9D8B030D-6E8A-4147-A177-3AD203B41FA5}">
+                      <a16:colId xmlns:a16="http://schemas.microsoft.com/office/drawing/2014/main" val="3202565110"/>
+                    </a:ext>
+                  </a:extLst>
+                </a:gridCol>
+                <a:gridCol w="884013">
+                  <a:extLst>
+                    <a:ext uri="{9D8B030D-6E8A-4147-A177-3AD203B41FA5}">
+                      <a16:colId xmlns:a16="http://schemas.microsoft.com/office/drawing/2014/main" val="43246156"/>
+                    </a:ext>
+                  </a:extLst>
+                </a:gridCol>
+              </a:tblGrid>
+              <a:tr h="592770">
+                <a:tc>
+                  <a:txBody>
+                    <a:bodyPr/>
+                    <a:lstStyle/>
+                    <a:p>
+                      <a:pPr algn="ctr" fontAlgn="ctr">
+                        <a:buNone/>
+                      </a:pPr>
+                      <a:r>
+                        <a:rPr lang="en-US" sz="1100" b="1" i="0" u="none" strike="noStrike">
+                          <a:solidFill>
+                            <a:schemeClr val="bg1"/>
+                          </a:solidFill>
+                          <a:effectLst/>
+                          <a:latin typeface="TeleNeo Office" panose="020B0504040202090203"/>
+                        </a:rPr>
+                        <a:t>Position </a:t>
+                      </a:r>
+                    </a:p>
+                  </a:txBody>
+                  <a:tcPr marL="9525" marR="9525" marT="9525" marB="0" anchor="ctr">
+                    <a:lnL w="12700" cap="flat" cmpd="sng" algn="ctr">
+                      <a:solidFill>
+                        <a:srgbClr val="000000"/>
+                      </a:solidFill>
+                      <a:prstDash val="solid"/>
+                      <a:round/>
+                      <a:headEnd type="none" w="med" len="med"/>
+                      <a:tailEnd type="none" w="med" len="med"/>
+                    </a:lnL>
+                    <a:lnR w="12700" cap="flat" cmpd="sng" algn="ctr">
+                      <a:solidFill>
+                        <a:srgbClr val="000000"/>
+                      </a:solidFill>
+                      <a:prstDash val="solid"/>
+                      <a:round/>
+                      <a:headEnd type="none" w="med" len="med"/>
+                      <a:tailEnd type="none" w="med" len="med"/>
+                    </a:lnR>
+                    <a:lnT w="12700" cap="flat" cmpd="sng" algn="ctr">
+                      <a:solidFill>
+                        <a:srgbClr val="000000"/>
+                      </a:solidFill>
+                      <a:prstDash val="solid"/>
+                      <a:round/>
+                      <a:headEnd type="none" w="med" len="med"/>
+                      <a:tailEnd type="none" w="med" len="med"/>
+                    </a:lnT>
+                    <a:lnB w="12700" cap="flat" cmpd="sng" algn="ctr">
+                      <a:solidFill>
+                        <a:srgbClr val="000000"/>
+                      </a:solidFill>
+                      <a:prstDash val="solid"/>
+                      <a:round/>
+                      <a:headEnd type="none" w="med" len="med"/>
+                      <a:tailEnd type="none" w="med" len="med"/>
+                    </a:lnB>
+                    <a:solidFill>
+                      <a:schemeClr val="tx1">
+                        <a:lumMod val="65000"/>
+                        <a:lumOff val="35000"/>
+                      </a:schemeClr>
+                    </a:solidFill>
+                  </a:tcPr>
+                </a:tc>
+                <a:tc>
+                  <a:txBody>
+                    <a:bodyPr/>
+                    <a:lstStyle/>
+                    <a:p>
+                      <a:pPr algn="ctr" fontAlgn="ctr">
+                        <a:buNone/>
+                      </a:pPr>
+                      <a:r>
+                        <a:rPr lang="en-US" sz="1100" b="1" i="0" u="none" strike="noStrike" dirty="0">
+                          <a:solidFill>
+                            <a:schemeClr val="bg1"/>
+                          </a:solidFill>
+                          <a:effectLst/>
+                          <a:latin typeface="TeleNeo Office" panose="020B0504040202090203"/>
+                        </a:rPr>
+                        <a:t>CTA</a:t>
+                      </a:r>
+                    </a:p>
+                  </a:txBody>
+                  <a:tcPr marL="9525" marR="9525" marT="9525" marB="0" anchor="ctr">
+                    <a:lnL w="12700" cap="flat" cmpd="sng" algn="ctr">
+                      <a:solidFill>
+                        <a:srgbClr val="000000"/>
+                      </a:solidFill>
+                      <a:prstDash val="solid"/>
+                      <a:round/>
+                      <a:headEnd type="none" w="med" len="med"/>
+                      <a:tailEnd type="none" w="med" len="med"/>
+                    </a:lnL>
+                    <a:lnR w="12700" cap="flat" cmpd="sng" algn="ctr">
+                      <a:solidFill>
+                        <a:srgbClr val="000000"/>
+                      </a:solidFill>
+                      <a:prstDash val="solid"/>
+                      <a:round/>
+                      <a:headEnd type="none" w="med" len="med"/>
+                      <a:tailEnd type="none" w="med" len="med"/>
+                    </a:lnR>
+                    <a:lnT w="12700" cap="flat" cmpd="sng" algn="ctr">
+                      <a:solidFill>
+                        <a:srgbClr val="000000"/>
+                      </a:solidFill>
+                      <a:prstDash val="solid"/>
+                      <a:round/>
+                      <a:headEnd type="none" w="med" len="med"/>
+                      <a:tailEnd type="none" w="med" len="med"/>
+                    </a:lnT>
+                    <a:lnB w="12700" cap="flat" cmpd="sng" algn="ctr">
+                      <a:solidFill>
+                        <a:srgbClr val="000000"/>
+                      </a:solidFill>
+                      <a:prstDash val="solid"/>
+                      <a:round/>
+                      <a:headEnd type="none" w="med" len="med"/>
+                      <a:tailEnd type="none" w="med" len="med"/>
+                    </a:lnB>
+                    <a:solidFill>
+                      <a:schemeClr val="tx1">
+                        <a:lumMod val="65000"/>
+                        <a:lumOff val="35000"/>
+                      </a:schemeClr>
+                    </a:solidFill>
+                  </a:tcPr>
+                </a:tc>
+                <a:tc>
+                  <a:txBody>
+                    <a:bodyPr/>
+                    <a:lstStyle/>
+                    <a:p>
+                      <a:pPr algn="ctr" fontAlgn="ctr">
+                        <a:buNone/>
+                      </a:pPr>
+                      <a:r>
+                        <a:rPr lang="en-US" sz="1100" b="1" i="0" u="none" strike="noStrike" dirty="0">
+                          <a:solidFill>
+                            <a:schemeClr val="bg1"/>
+                          </a:solidFill>
+                          <a:effectLst/>
+                          <a:latin typeface="TeleNeo Office" panose="020B0504040202090203"/>
+                        </a:rPr>
+                        <a:t>Offer Details </a:t>
+                      </a:r>
+                    </a:p>
+                  </a:txBody>
+                  <a:tcPr marL="9525" marR="9525" marT="9525" marB="0" anchor="ctr">
+                    <a:lnL w="12700" cap="flat" cmpd="sng" algn="ctr">
+                      <a:solidFill>
+                        <a:srgbClr val="000000"/>
+                      </a:solidFill>
+                      <a:prstDash val="solid"/>
+                      <a:round/>
+                      <a:headEnd type="none" w="med" len="med"/>
+                      <a:tailEnd type="none" w="med" len="med"/>
+                    </a:lnL>
+                    <a:lnR w="12700" cap="flat" cmpd="sng" algn="ctr">
+                      <a:solidFill>
+                        <a:srgbClr val="000000"/>
+                      </a:solidFill>
+                      <a:prstDash val="solid"/>
+                      <a:round/>
+                      <a:headEnd type="none" w="med" len="med"/>
+                      <a:tailEnd type="none" w="med" len="med"/>
+                    </a:lnR>
+                    <a:lnT w="12700" cap="flat" cmpd="sng" algn="ctr">
+                      <a:solidFill>
+                        <a:srgbClr val="000000"/>
+                      </a:solidFill>
+                      <a:prstDash val="solid"/>
+                      <a:round/>
+                      <a:headEnd type="none" w="med" len="med"/>
+                      <a:tailEnd type="none" w="med" len="med"/>
+                    </a:lnT>
+                    <a:lnB w="12700" cap="flat" cmpd="sng" algn="ctr">
+                      <a:solidFill>
+                        <a:srgbClr val="000000"/>
+                      </a:solidFill>
+                      <a:prstDash val="solid"/>
+                      <a:round/>
+                      <a:headEnd type="none" w="med" len="med"/>
+                      <a:tailEnd type="none" w="med" len="med"/>
+                    </a:lnB>
+                    <a:solidFill>
+                      <a:schemeClr val="tx1">
+                        <a:lumMod val="65000"/>
+                        <a:lumOff val="35000"/>
+                      </a:schemeClr>
+                    </a:solidFill>
+                  </a:tcPr>
+                </a:tc>
+                <a:tc>
+                  <a:txBody>
+                    <a:bodyPr/>
+                    <a:lstStyle/>
+                    <a:p>
+                      <a:pPr algn="ctr" fontAlgn="ctr">
+                        <a:buNone/>
+                      </a:pPr>
+                      <a:r>
+                        <a:rPr lang="en-US" sz="1100" b="1" i="0" u="none" strike="noStrike">
+                          <a:solidFill>
+                            <a:schemeClr val="bg1"/>
+                          </a:solidFill>
+                          <a:effectLst/>
+                          <a:latin typeface="TeleNeo Office" panose="020B0504040202090203"/>
+                        </a:rPr>
+                        <a:t>CTR </a:t>
+                      </a:r>
+                    </a:p>
+                  </a:txBody>
+                  <a:tcPr marL="9525" marR="9525" marT="9525" marB="0" anchor="ctr">
+                    <a:lnL w="12700" cap="flat" cmpd="sng" algn="ctr">
+                      <a:solidFill>
+                        <a:srgbClr val="000000"/>
+                      </a:solidFill>
+                      <a:prstDash val="solid"/>
+                      <a:round/>
+                      <a:headEnd type="none" w="med" len="med"/>
+                      <a:tailEnd type="none" w="med" len="med"/>
+                    </a:lnL>
+                    <a:lnR w="12700" cap="flat" cmpd="sng" algn="ctr">
+                      <a:solidFill>
+                        <a:srgbClr val="000000"/>
+                      </a:solidFill>
+                      <a:prstDash val="solid"/>
+                      <a:round/>
+                      <a:headEnd type="none" w="med" len="med"/>
+                      <a:tailEnd type="none" w="med" len="med"/>
+                    </a:lnR>
+                    <a:lnT w="12700" cap="flat" cmpd="sng" algn="ctr">
+                      <a:solidFill>
+                        <a:srgbClr val="000000"/>
+                      </a:solidFill>
+                      <a:prstDash val="solid"/>
+                      <a:round/>
+                      <a:headEnd type="none" w="med" len="med"/>
+                      <a:tailEnd type="none" w="med" len="med"/>
+                    </a:lnT>
+                    <a:lnB w="12700" cap="flat" cmpd="sng" algn="ctr">
+                      <a:solidFill>
+                        <a:srgbClr val="000000"/>
+                      </a:solidFill>
+                      <a:prstDash val="solid"/>
+                      <a:round/>
+                      <a:headEnd type="none" w="med" len="med"/>
+                      <a:tailEnd type="none" w="med" len="med"/>
+                    </a:lnB>
+                    <a:solidFill>
+                      <a:schemeClr val="tx1">
+                        <a:lumMod val="65000"/>
+                        <a:lumOff val="35000"/>
+                      </a:schemeClr>
+                    </a:solidFill>
+                  </a:tcPr>
+                </a:tc>
+                <a:extLst>
+                  <a:ext uri="{0D108BD9-81ED-4DB2-BD59-A6C34878D82A}">
+                    <a16:rowId xmlns:a16="http://schemas.microsoft.com/office/drawing/2014/main" val="3198990316"/>
+                  </a:ext>
+                </a:extLst>
+              </a:tr>
+              <a:tr h="330767">
+                <a:tc>
+                  <a:txBody>
+                    <a:bodyPr/>
+                    <a:lstStyle/>
+                    <a:p>
+                      <a:pPr algn="ctr" fontAlgn="ctr">
+                        <a:buNone/>
+                      </a:pPr>
+                      <a:endParaRPr lang="en-US" sz="1100" b="0" i="0" u="none" strike="noStrike" dirty="0">
+                        <a:solidFill>
+                          <a:srgbClr val="000000"/>
+                        </a:solidFill>
+                        <a:effectLst/>
+                        <a:latin typeface="Aptos Narrow" panose="020B0004020202020204" pitchFamily="34" charset="0"/>
+                      </a:endParaRPr>
+                    </a:p>
+                  </a:txBody>
+                  <a:tcPr marL="9525" marR="9525" marT="9525" marB="0" anchor="ctr">
+                    <a:lnL w="12700" cap="flat" cmpd="sng" algn="ctr">
+                      <a:solidFill>
+                        <a:srgbClr val="000000"/>
+                      </a:solidFill>
+                      <a:prstDash val="solid"/>
+                      <a:round/>
+                      <a:headEnd type="none" w="med" len="med"/>
+                      <a:tailEnd type="none" w="med" len="med"/>
+                    </a:lnL>
+                    <a:lnR w="12700" cap="flat" cmpd="sng" algn="ctr">
+                      <a:solidFill>
+                        <a:srgbClr val="000000"/>
+                      </a:solidFill>
+                      <a:prstDash val="solid"/>
+                      <a:round/>
+                      <a:headEnd type="none" w="med" len="med"/>
+                      <a:tailEnd type="none" w="med" len="med"/>
+                    </a:lnR>
+                    <a:lnT w="12700" cap="flat" cmpd="sng" algn="ctr">
+                      <a:solidFill>
+                        <a:srgbClr val="000000"/>
+                      </a:solidFill>
+                      <a:prstDash val="solid"/>
+                      <a:round/>
+                      <a:headEnd type="none" w="med" len="med"/>
+                      <a:tailEnd type="none" w="med" len="med"/>
+                    </a:lnT>
+                    <a:lnB w="12700" cap="flat" cmpd="sng" algn="ctr">
+                      <a:solidFill>
+                        <a:srgbClr val="000000"/>
+                      </a:solidFill>
+                      <a:prstDash val="solid"/>
+                      <a:round/>
+                      <a:headEnd type="none" w="med" len="med"/>
+                      <a:tailEnd type="none" w="med" len="med"/>
+                    </a:lnB>
+                    <a:noFill/>
+                  </a:tcPr>
+                </a:tc>
+                <a:tc>
+                  <a:txBody>
+                    <a:bodyPr/>
+                    <a:lstStyle/>
+                    <a:p>
+                      <a:pPr algn="l" fontAlgn="ctr">
+                        <a:buNone/>
+                      </a:pPr>
+                      <a:endParaRPr lang="en-US" sz="1100" b="1" i="0" u="none" strike="noStrike">
+                        <a:solidFill>
+                          <a:srgbClr val="000000"/>
+                        </a:solidFill>
+                        <a:effectLst/>
+                        <a:latin typeface="Aptos Narrow" panose="020B0004020202020204" pitchFamily="34" charset="0"/>
+                      </a:endParaRPr>
+                    </a:p>
+                  </a:txBody>
+                  <a:tcPr anchor="ctr">
+                    <a:lnL w="12700" cap="flat" cmpd="sng" algn="ctr">
+                      <a:solidFill>
+                        <a:srgbClr val="000000"/>
+                      </a:solidFill>
+                      <a:prstDash val="solid"/>
+                      <a:round/>
+                      <a:headEnd type="none" w="med" len="med"/>
+                      <a:tailEnd type="none" w="med" len="med"/>
+                    </a:lnL>
+                    <a:lnR w="12700" cap="flat" cmpd="sng" algn="ctr">
+                      <a:solidFill>
+                        <a:srgbClr val="000000"/>
+                      </a:solidFill>
+                      <a:prstDash val="solid"/>
+                      <a:round/>
+                      <a:headEnd type="none" w="med" len="med"/>
+                      <a:tailEnd type="none" w="med" len="med"/>
+                    </a:lnR>
+                    <a:lnT w="12700" cap="flat" cmpd="sng" algn="ctr">
+                      <a:solidFill>
+                        <a:srgbClr val="000000"/>
+                      </a:solidFill>
+                      <a:prstDash val="solid"/>
+                      <a:round/>
+                      <a:headEnd type="none" w="med" len="med"/>
+                      <a:tailEnd type="none" w="med" len="med"/>
+                    </a:lnT>
+                    <a:lnB w="12700" cap="flat" cmpd="sng" algn="ctr">
+                      <a:solidFill>
+                        <a:srgbClr val="000000"/>
+                      </a:solidFill>
+                      <a:prstDash val="solid"/>
+                      <a:round/>
+                      <a:headEnd type="none" w="med" len="med"/>
+                      <a:tailEnd type="none" w="med" len="med"/>
+                    </a:lnB>
+                    <a:noFill/>
+                  </a:tcPr>
+                </a:tc>
+                <a:tc>
+                  <a:txBody>
+                    <a:bodyPr/>
+                    <a:lstStyle/>
+                    <a:p>
+                      <a:pPr algn="l" fontAlgn="ctr">
+                        <a:buNone/>
+                      </a:pPr>
+                      <a:endParaRPr lang="en-US" sz="1100" b="0" i="0" u="none" strike="noStrike" dirty="0">
+                        <a:solidFill>
+                          <a:srgbClr val="000000"/>
+                        </a:solidFill>
+                        <a:effectLst/>
+                        <a:latin typeface="Aptos Narrow" panose="020B0004020202020204" pitchFamily="34" charset="0"/>
+                      </a:endParaRPr>
+                    </a:p>
+                  </a:txBody>
+                  <a:tcPr anchor="ctr">
+                    <a:lnL w="12700" cap="flat" cmpd="sng" algn="ctr">
+                      <a:solidFill>
+                        <a:srgbClr val="000000"/>
+                      </a:solidFill>
+                      <a:prstDash val="solid"/>
+                      <a:round/>
+                      <a:headEnd type="none" w="med" len="med"/>
+                      <a:tailEnd type="none" w="med" len="med"/>
+                    </a:lnL>
+                    <a:lnR w="12700" cap="flat" cmpd="sng" algn="ctr">
+                      <a:solidFill>
+                        <a:srgbClr val="000000"/>
+                      </a:solidFill>
+                      <a:prstDash val="solid"/>
+                      <a:round/>
+                      <a:headEnd type="none" w="med" len="med"/>
+                      <a:tailEnd type="none" w="med" len="med"/>
+                    </a:lnR>
+                    <a:lnT w="12700" cap="flat" cmpd="sng" algn="ctr">
+                      <a:solidFill>
+                        <a:srgbClr val="000000"/>
+                      </a:solidFill>
+                      <a:prstDash val="solid"/>
+                      <a:round/>
+                      <a:headEnd type="none" w="med" len="med"/>
+                      <a:tailEnd type="none" w="med" len="med"/>
+                    </a:lnT>
+                    <a:lnB w="12700" cap="flat" cmpd="sng" algn="ctr">
+                      <a:solidFill>
+                        <a:srgbClr val="000000"/>
+                      </a:solidFill>
+                      <a:prstDash val="solid"/>
+                      <a:round/>
+                      <a:headEnd type="none" w="med" len="med"/>
+                      <a:tailEnd type="none" w="med" len="med"/>
+                    </a:lnB>
+                    <a:noFill/>
+                  </a:tcPr>
+                </a:tc>
+                <a:tc>
+                  <a:txBody>
+                    <a:bodyPr/>
+                    <a:lstStyle/>
+                    <a:p>
+                      <a:pPr algn="ctr" fontAlgn="ctr">
+                        <a:buNone/>
+                      </a:pPr>
+                      <a:endParaRPr lang="en-US" sz="1100" b="0" i="0" u="none" strike="noStrike" dirty="0">
+                        <a:solidFill>
+                          <a:srgbClr val="000000"/>
+                        </a:solidFill>
+                        <a:effectLst/>
+                        <a:latin typeface="Aptos Narrow" panose="020B0004020202020204" pitchFamily="34" charset="0"/>
+                      </a:endParaRPr>
+                    </a:p>
+                  </a:txBody>
+                  <a:tcPr marL="9525" marR="9525" marT="9525" marB="0" anchor="ctr">
+                    <a:lnL w="12700" cap="flat" cmpd="sng" algn="ctr">
+                      <a:solidFill>
+                        <a:srgbClr val="000000"/>
+                      </a:solidFill>
+                      <a:prstDash val="solid"/>
+                      <a:round/>
+                      <a:headEnd type="none" w="med" len="med"/>
+                      <a:tailEnd type="none" w="med" len="med"/>
+                    </a:lnL>
+                    <a:lnR w="12700" cap="flat" cmpd="sng" algn="ctr">
+                      <a:solidFill>
+                        <a:srgbClr val="000000"/>
+                      </a:solidFill>
+                      <a:prstDash val="solid"/>
+                      <a:round/>
+                      <a:headEnd type="none" w="med" len="med"/>
+                      <a:tailEnd type="none" w="med" len="med"/>
+                    </a:lnR>
+                    <a:lnT w="12700" cap="flat" cmpd="sng" algn="ctr">
+                      <a:solidFill>
+                        <a:srgbClr val="000000"/>
+                      </a:solidFill>
+                      <a:prstDash val="solid"/>
+                      <a:round/>
+                      <a:headEnd type="none" w="med" len="med"/>
+                      <a:tailEnd type="none" w="med" len="med"/>
+                    </a:lnT>
+                    <a:lnB w="12700" cap="flat" cmpd="sng" algn="ctr">
+                      <a:solidFill>
+                        <a:srgbClr val="000000"/>
+                      </a:solidFill>
+                      <a:prstDash val="solid"/>
+                      <a:round/>
+                      <a:headEnd type="none" w="med" len="med"/>
+                      <a:tailEnd type="none" w="med" len="med"/>
+                    </a:lnB>
+                    <a:noFill/>
+                  </a:tcPr>
+                </a:tc>
+                <a:extLst>
+                  <a:ext uri="{0D108BD9-81ED-4DB2-BD59-A6C34878D82A}">
+                    <a16:rowId xmlns:a16="http://schemas.microsoft.com/office/drawing/2014/main" val="4269314986"/>
+                  </a:ext>
+                </a:extLst>
+              </a:tr>
+              <a:tr h="330767">
+                <a:tc>
+                  <a:txBody>
+                    <a:bodyPr/>
+                    <a:lstStyle/>
+                    <a:p>
+                      <a:pPr algn="ctr" fontAlgn="ctr">
+                        <a:buNone/>
+                      </a:pPr>
+                      <a:endParaRPr lang="en-US" sz="1100" b="0" i="0" u="none" strike="noStrike" dirty="0">
+                        <a:solidFill>
+                          <a:srgbClr val="000000"/>
+                        </a:solidFill>
+                        <a:effectLst/>
+                        <a:latin typeface="Aptos Narrow" panose="020B0004020202020204" pitchFamily="34" charset="0"/>
+                      </a:endParaRPr>
+                    </a:p>
+                  </a:txBody>
+                  <a:tcPr marL="9525" marR="9525" marT="9525" marB="0" anchor="ctr">
+                    <a:lnL w="12700" cap="flat" cmpd="sng" algn="ctr">
+                      <a:solidFill>
+                        <a:srgbClr val="000000"/>
+                      </a:solidFill>
+                      <a:prstDash val="solid"/>
+                      <a:round/>
+                      <a:headEnd type="none" w="med" len="med"/>
+                      <a:tailEnd type="none" w="med" len="med"/>
+                    </a:lnL>
+                    <a:lnR w="12700" cap="flat" cmpd="sng" algn="ctr">
+                      <a:solidFill>
+                        <a:srgbClr val="000000"/>
+                      </a:solidFill>
+                      <a:prstDash val="solid"/>
+                      <a:round/>
+                      <a:headEnd type="none" w="med" len="med"/>
+                      <a:tailEnd type="none" w="med" len="med"/>
+                    </a:lnR>
+                    <a:lnT w="12700" cap="flat" cmpd="sng" algn="ctr">
+                      <a:solidFill>
+                        <a:srgbClr val="000000"/>
+                      </a:solidFill>
+                      <a:prstDash val="solid"/>
+                      <a:round/>
+                      <a:headEnd type="none" w="med" len="med"/>
+                      <a:tailEnd type="none" w="med" len="med"/>
+                    </a:lnT>
+                    <a:lnB w="12700" cap="flat" cmpd="sng" algn="ctr">
+                      <a:solidFill>
+                        <a:srgbClr val="000000"/>
+                      </a:solidFill>
+                      <a:prstDash val="solid"/>
+                      <a:round/>
+                      <a:headEnd type="none" w="med" len="med"/>
+                      <a:tailEnd type="none" w="med" len="med"/>
+                    </a:lnB>
+                    <a:noFill/>
+                  </a:tcPr>
+                </a:tc>
+                <a:tc>
+                  <a:txBody>
+                    <a:bodyPr/>
+                    <a:lstStyle/>
+                    <a:p>
+                      <a:pPr algn="l" fontAlgn="ctr">
+                        <a:buNone/>
+                      </a:pPr>
+                      <a:endParaRPr lang="en-US" sz="1100" b="1" i="0" u="none" strike="noStrike">
+                        <a:solidFill>
+                          <a:srgbClr val="000000"/>
+                        </a:solidFill>
+                        <a:effectLst/>
+                        <a:latin typeface="Aptos Narrow" panose="020B0004020202020204" pitchFamily="34" charset="0"/>
+                      </a:endParaRPr>
+                    </a:p>
+                  </a:txBody>
+                  <a:tcPr anchor="ctr">
+                    <a:lnL w="12700" cap="flat" cmpd="sng" algn="ctr">
+                      <a:solidFill>
+                        <a:srgbClr val="000000"/>
+                      </a:solidFill>
+                      <a:prstDash val="solid"/>
+                      <a:round/>
+                      <a:headEnd type="none" w="med" len="med"/>
+                      <a:tailEnd type="none" w="med" len="med"/>
+                    </a:lnL>
+                    <a:lnR w="12700" cap="flat" cmpd="sng" algn="ctr">
+                      <a:solidFill>
+                        <a:srgbClr val="000000"/>
+                      </a:solidFill>
+                      <a:prstDash val="solid"/>
+                      <a:round/>
+                      <a:headEnd type="none" w="med" len="med"/>
+                      <a:tailEnd type="none" w="med" len="med"/>
+                    </a:lnR>
+                    <a:lnT w="12700" cap="flat" cmpd="sng" algn="ctr">
+                      <a:solidFill>
+                        <a:srgbClr val="000000"/>
+                      </a:solidFill>
+                      <a:prstDash val="solid"/>
+                      <a:round/>
+                      <a:headEnd type="none" w="med" len="med"/>
+                      <a:tailEnd type="none" w="med" len="med"/>
+                    </a:lnT>
+                    <a:lnB w="12700" cap="flat" cmpd="sng" algn="ctr">
+                      <a:solidFill>
+                        <a:srgbClr val="000000"/>
+                      </a:solidFill>
+                      <a:prstDash val="solid"/>
+                      <a:round/>
+                      <a:headEnd type="none" w="med" len="med"/>
+                      <a:tailEnd type="none" w="med" len="med"/>
+                    </a:lnB>
+                    <a:noFill/>
+                  </a:tcPr>
+                </a:tc>
+                <a:tc>
+                  <a:txBody>
+                    <a:bodyPr/>
+                    <a:lstStyle/>
+                    <a:p>
+                      <a:pPr algn="l" fontAlgn="ctr">
+                        <a:buNone/>
+                      </a:pPr>
+                      <a:endParaRPr lang="en-US" sz="1100" b="0" i="0" u="none" strike="noStrike" dirty="0">
+                        <a:solidFill>
+                          <a:srgbClr val="000000"/>
+                        </a:solidFill>
+                        <a:effectLst/>
+                        <a:latin typeface="Aptos Narrow" panose="020B0004020202020204" pitchFamily="34" charset="0"/>
+                      </a:endParaRPr>
+                    </a:p>
+                  </a:txBody>
+                  <a:tcPr anchor="ctr">
+                    <a:lnL w="12700" cap="flat" cmpd="sng" algn="ctr">
+                      <a:solidFill>
+                        <a:srgbClr val="000000"/>
+                      </a:solidFill>
+                      <a:prstDash val="solid"/>
+                      <a:round/>
+                      <a:headEnd type="none" w="med" len="med"/>
+                      <a:tailEnd type="none" w="med" len="med"/>
+                    </a:lnL>
+                    <a:lnR w="12700" cap="flat" cmpd="sng" algn="ctr">
+                      <a:solidFill>
+                        <a:srgbClr val="000000"/>
+                      </a:solidFill>
+                      <a:prstDash val="solid"/>
+                      <a:round/>
+                      <a:headEnd type="none" w="med" len="med"/>
+                      <a:tailEnd type="none" w="med" len="med"/>
+                    </a:lnR>
+                    <a:lnT w="12700" cap="flat" cmpd="sng" algn="ctr">
+                      <a:solidFill>
+                        <a:srgbClr val="000000"/>
+                      </a:solidFill>
+                      <a:prstDash val="solid"/>
+                      <a:round/>
+                      <a:headEnd type="none" w="med" len="med"/>
+                      <a:tailEnd type="none" w="med" len="med"/>
+                    </a:lnT>
+                    <a:lnB w="12700" cap="flat" cmpd="sng" algn="ctr">
+                      <a:solidFill>
+                        <a:srgbClr val="000000"/>
+                      </a:solidFill>
+                      <a:prstDash val="solid"/>
+                      <a:round/>
+                      <a:headEnd type="none" w="med" len="med"/>
+                      <a:tailEnd type="none" w="med" len="med"/>
+                    </a:lnB>
+                    <a:noFill/>
+                  </a:tcPr>
+                </a:tc>
+                <a:tc>
+                  <a:txBody>
+                    <a:bodyPr/>
+                    <a:lstStyle/>
+                    <a:p>
+                      <a:pPr algn="ctr" fontAlgn="ctr">
+                        <a:buNone/>
+                      </a:pPr>
+                      <a:endParaRPr lang="en-US" sz="1100" b="0" i="0" u="none" strike="noStrike">
+                        <a:solidFill>
+                          <a:srgbClr val="000000"/>
+                        </a:solidFill>
+                        <a:effectLst/>
+                        <a:latin typeface="Aptos Narrow" panose="020B0004020202020204" pitchFamily="34" charset="0"/>
+                      </a:endParaRPr>
+                    </a:p>
+                  </a:txBody>
+                  <a:tcPr marL="9525" marR="9525" marT="9525" marB="0" anchor="ctr">
+                    <a:lnL w="12700" cap="flat" cmpd="sng" algn="ctr">
+                      <a:solidFill>
+                        <a:srgbClr val="000000"/>
+                      </a:solidFill>
+                      <a:prstDash val="solid"/>
+                      <a:round/>
+                      <a:headEnd type="none" w="med" len="med"/>
+                      <a:tailEnd type="none" w="med" len="med"/>
+                    </a:lnL>
+                    <a:lnR w="12700" cap="flat" cmpd="sng" algn="ctr">
+                      <a:solidFill>
+                        <a:srgbClr val="000000"/>
+                      </a:solidFill>
+                      <a:prstDash val="solid"/>
+                      <a:round/>
+                      <a:headEnd type="none" w="med" len="med"/>
+                      <a:tailEnd type="none" w="med" len="med"/>
+                    </a:lnR>
+                    <a:lnT w="12700" cap="flat" cmpd="sng" algn="ctr">
+                      <a:solidFill>
+                        <a:srgbClr val="000000"/>
+                      </a:solidFill>
+                      <a:prstDash val="solid"/>
+                      <a:round/>
+                      <a:headEnd type="none" w="med" len="med"/>
+                      <a:tailEnd type="none" w="med" len="med"/>
+                    </a:lnT>
+                    <a:lnB w="12700" cap="flat" cmpd="sng" algn="ctr">
+                      <a:solidFill>
+                        <a:srgbClr val="000000"/>
+                      </a:solidFill>
+                      <a:prstDash val="solid"/>
+                      <a:round/>
+                      <a:headEnd type="none" w="med" len="med"/>
+                      <a:tailEnd type="none" w="med" len="med"/>
+                    </a:lnB>
+                    <a:noFill/>
+                  </a:tcPr>
+                </a:tc>
+                <a:extLst>
+                  <a:ext uri="{0D108BD9-81ED-4DB2-BD59-A6C34878D82A}">
+                    <a16:rowId xmlns:a16="http://schemas.microsoft.com/office/drawing/2014/main" val="3476846994"/>
+                  </a:ext>
+                </a:extLst>
+              </a:tr>
+              <a:tr h="330767">
+                <a:tc>
+                  <a:txBody>
+                    <a:bodyPr/>
+                    <a:lstStyle/>
+                    <a:p>
+                      <a:pPr algn="ctr" fontAlgn="ctr">
+                        <a:buNone/>
+                      </a:pPr>
+                      <a:endParaRPr lang="en-US" sz="1100" b="0" i="0" u="none" strike="noStrike">
+                        <a:solidFill>
+                          <a:srgbClr val="000000"/>
+                        </a:solidFill>
+                        <a:effectLst/>
+                        <a:latin typeface="Aptos Narrow" panose="020B0004020202020204" pitchFamily="34" charset="0"/>
+                      </a:endParaRPr>
+                    </a:p>
+                  </a:txBody>
+                  <a:tcPr marL="9525" marR="9525" marT="9525" marB="0" anchor="ctr">
+                    <a:lnL w="12700" cap="flat" cmpd="sng" algn="ctr">
+                      <a:solidFill>
+                        <a:srgbClr val="000000"/>
+                      </a:solidFill>
+                      <a:prstDash val="solid"/>
+                      <a:round/>
+                      <a:headEnd type="none" w="med" len="med"/>
+                      <a:tailEnd type="none" w="med" len="med"/>
+                    </a:lnL>
+                    <a:lnR w="12700" cap="flat" cmpd="sng" algn="ctr">
+                      <a:solidFill>
+                        <a:srgbClr val="000000"/>
+                      </a:solidFill>
+                      <a:prstDash val="solid"/>
+                      <a:round/>
+                      <a:headEnd type="none" w="med" len="med"/>
+                      <a:tailEnd type="none" w="med" len="med"/>
+                    </a:lnR>
+                    <a:lnT w="12700" cap="flat" cmpd="sng" algn="ctr">
+                      <a:solidFill>
+                        <a:srgbClr val="000000"/>
+                      </a:solidFill>
+                      <a:prstDash val="solid"/>
+                      <a:round/>
+                      <a:headEnd type="none" w="med" len="med"/>
+                      <a:tailEnd type="none" w="med" len="med"/>
+                    </a:lnT>
+                    <a:lnB w="12700" cap="flat" cmpd="sng" algn="ctr">
+                      <a:solidFill>
+                        <a:srgbClr val="000000"/>
+                      </a:solidFill>
+                      <a:prstDash val="solid"/>
+                      <a:round/>
+                      <a:headEnd type="none" w="med" len="med"/>
+                      <a:tailEnd type="none" w="med" len="med"/>
+                    </a:lnB>
+                    <a:noFill/>
+                  </a:tcPr>
+                </a:tc>
+                <a:tc>
+                  <a:txBody>
+                    <a:bodyPr/>
+                    <a:lstStyle/>
+                    <a:p>
+                      <a:pPr marL="0" marR="0" lvl="0" indent="0" algn="l" defTabSz="914400" rtl="0" eaLnBrk="1" fontAlgn="ctr" latinLnBrk="0" hangingPunct="1">
+                        <a:lnSpc>
+                          <a:spcPct val="100000"/>
+                        </a:lnSpc>
+                        <a:spcBef>
+                          <a:spcPts val="0"/>
+                        </a:spcBef>
+                        <a:spcAft>
+                          <a:spcPts val="0"/>
+                        </a:spcAft>
+                        <a:buClrTx/>
+                        <a:buSzTx/>
+                        <a:buFontTx/>
+                        <a:buNone/>
+                        <a:tabLst/>
+                        <a:defRPr/>
+                      </a:pPr>
+                      <a:endParaRPr lang="en-US" sz="1100" b="1" i="0" u="none" strike="noStrike" dirty="0">
+                        <a:solidFill>
+                          <a:srgbClr val="000000"/>
+                        </a:solidFill>
+                        <a:effectLst/>
+                        <a:latin typeface="Aptos Narrow" panose="020B0004020202020204" pitchFamily="34" charset="0"/>
+                      </a:endParaRPr>
+                    </a:p>
+                  </a:txBody>
+                  <a:tcPr anchor="ctr">
+                    <a:lnL w="12700" cap="flat" cmpd="sng" algn="ctr">
+                      <a:solidFill>
+                        <a:srgbClr val="000000"/>
+                      </a:solidFill>
+                      <a:prstDash val="solid"/>
+                      <a:round/>
+                      <a:headEnd type="none" w="med" len="med"/>
+                      <a:tailEnd type="none" w="med" len="med"/>
+                    </a:lnL>
+                    <a:lnR w="12700" cap="flat" cmpd="sng" algn="ctr">
+                      <a:solidFill>
+                        <a:srgbClr val="000000"/>
+                      </a:solidFill>
+                      <a:prstDash val="solid"/>
+                      <a:round/>
+                      <a:headEnd type="none" w="med" len="med"/>
+                      <a:tailEnd type="none" w="med" len="med"/>
+                    </a:lnR>
+                    <a:lnT w="12700" cap="flat" cmpd="sng" algn="ctr">
+                      <a:solidFill>
+                        <a:srgbClr val="000000"/>
+                      </a:solidFill>
+                      <a:prstDash val="solid"/>
+                      <a:round/>
+                      <a:headEnd type="none" w="med" len="med"/>
+                      <a:tailEnd type="none" w="med" len="med"/>
+                    </a:lnT>
+                    <a:lnB w="12700" cap="flat" cmpd="sng" algn="ctr">
+                      <a:solidFill>
+                        <a:srgbClr val="000000"/>
+                      </a:solidFill>
+                      <a:prstDash val="solid"/>
+                      <a:round/>
+                      <a:headEnd type="none" w="med" len="med"/>
+                      <a:tailEnd type="none" w="med" len="med"/>
+                    </a:lnB>
+                    <a:noFill/>
+                  </a:tcPr>
+                </a:tc>
+                <a:tc>
+                  <a:txBody>
+                    <a:bodyPr/>
+                    <a:lstStyle/>
+                    <a:p>
+                      <a:pPr algn="l" fontAlgn="ctr">
+                        <a:buNone/>
+                      </a:pPr>
+                      <a:endParaRPr lang="en-US" sz="1100" b="0" i="0" u="none" strike="noStrike">
+                        <a:solidFill>
+                          <a:srgbClr val="000000"/>
+                        </a:solidFill>
+                        <a:effectLst/>
+                        <a:latin typeface="Aptos Narrow" panose="020B0004020202020204" pitchFamily="34" charset="0"/>
+                      </a:endParaRPr>
+                    </a:p>
+                  </a:txBody>
+                  <a:tcPr anchor="ctr">
+                    <a:lnL w="12700" cap="flat" cmpd="sng" algn="ctr">
+                      <a:solidFill>
+                        <a:srgbClr val="000000"/>
+                      </a:solidFill>
+                      <a:prstDash val="solid"/>
+                      <a:round/>
+                      <a:headEnd type="none" w="med" len="med"/>
+                      <a:tailEnd type="none" w="med" len="med"/>
+                    </a:lnL>
+                    <a:lnR w="12700" cap="flat" cmpd="sng" algn="ctr">
+                      <a:solidFill>
+                        <a:srgbClr val="000000"/>
+                      </a:solidFill>
+                      <a:prstDash val="solid"/>
+                      <a:round/>
+                      <a:headEnd type="none" w="med" len="med"/>
+                      <a:tailEnd type="none" w="med" len="med"/>
+                    </a:lnR>
+                    <a:lnT w="12700" cap="flat" cmpd="sng" algn="ctr">
+                      <a:solidFill>
+                        <a:srgbClr val="000000"/>
+                      </a:solidFill>
+                      <a:prstDash val="solid"/>
+                      <a:round/>
+                      <a:headEnd type="none" w="med" len="med"/>
+                      <a:tailEnd type="none" w="med" len="med"/>
+                    </a:lnT>
+                    <a:lnB w="12700" cap="flat" cmpd="sng" algn="ctr">
+                      <a:solidFill>
+                        <a:srgbClr val="000000"/>
+                      </a:solidFill>
+                      <a:prstDash val="solid"/>
+                      <a:round/>
+                      <a:headEnd type="none" w="med" len="med"/>
+                      <a:tailEnd type="none" w="med" len="med"/>
+                    </a:lnB>
+                    <a:noFill/>
+                  </a:tcPr>
+                </a:tc>
+                <a:tc>
+                  <a:txBody>
+                    <a:bodyPr/>
+                    <a:lstStyle/>
+                    <a:p>
+                      <a:pPr algn="ctr" fontAlgn="ctr">
+                        <a:buNone/>
+                      </a:pPr>
+                      <a:endParaRPr lang="en-US" sz="1100" b="0" i="0" u="none" strike="noStrike" dirty="0">
+                        <a:solidFill>
+                          <a:srgbClr val="000000"/>
+                        </a:solidFill>
+                        <a:effectLst/>
+                        <a:latin typeface="Aptos Narrow" panose="020B0004020202020204" pitchFamily="34" charset="0"/>
+                      </a:endParaRPr>
+                    </a:p>
+                  </a:txBody>
+                  <a:tcPr marL="9525" marR="9525" marT="9525" marB="0" anchor="ctr">
+                    <a:lnL w="12700" cap="flat" cmpd="sng" algn="ctr">
+                      <a:solidFill>
+                        <a:srgbClr val="000000"/>
+                      </a:solidFill>
+                      <a:prstDash val="solid"/>
+                      <a:round/>
+                      <a:headEnd type="none" w="med" len="med"/>
+                      <a:tailEnd type="none" w="med" len="med"/>
+                    </a:lnL>
+                    <a:lnR w="12700" cap="flat" cmpd="sng" algn="ctr">
+                      <a:solidFill>
+                        <a:srgbClr val="000000"/>
+                      </a:solidFill>
+                      <a:prstDash val="solid"/>
+                      <a:round/>
+                      <a:headEnd type="none" w="med" len="med"/>
+                      <a:tailEnd type="none" w="med" len="med"/>
+                    </a:lnR>
+                    <a:lnT w="12700" cap="flat" cmpd="sng" algn="ctr">
+                      <a:solidFill>
+                        <a:srgbClr val="000000"/>
+                      </a:solidFill>
+                      <a:prstDash val="solid"/>
+                      <a:round/>
+                      <a:headEnd type="none" w="med" len="med"/>
+                      <a:tailEnd type="none" w="med" len="med"/>
+                    </a:lnT>
+                    <a:lnB w="12700" cap="flat" cmpd="sng" algn="ctr">
+                      <a:solidFill>
+                        <a:srgbClr val="000000"/>
+                      </a:solidFill>
+                      <a:prstDash val="solid"/>
+                      <a:round/>
+                      <a:headEnd type="none" w="med" len="med"/>
+                      <a:tailEnd type="none" w="med" len="med"/>
+                    </a:lnB>
+                    <a:noFill/>
+                  </a:tcPr>
+                </a:tc>
+                <a:extLst>
+                  <a:ext uri="{0D108BD9-81ED-4DB2-BD59-A6C34878D82A}">
+                    <a16:rowId xmlns:a16="http://schemas.microsoft.com/office/drawing/2014/main" val="1879299499"/>
+                  </a:ext>
+                </a:extLst>
+              </a:tr>
+              <a:tr h="330767">
+                <a:tc>
+                  <a:txBody>
+                    <a:bodyPr/>
+                    <a:lstStyle/>
+                    <a:p>
+                      <a:pPr algn="ctr" fontAlgn="ctr">
+                        <a:buNone/>
+                      </a:pPr>
+                      <a:endParaRPr lang="en-US" sz="1100" b="0" i="0" u="none" strike="noStrike">
+                        <a:solidFill>
+                          <a:srgbClr val="000000"/>
+                        </a:solidFill>
+                        <a:effectLst/>
+                        <a:latin typeface="Aptos Narrow" panose="020B0004020202020204" pitchFamily="34" charset="0"/>
+                      </a:endParaRPr>
+                    </a:p>
+                  </a:txBody>
+                  <a:tcPr marL="9525" marR="9525" marT="9525" marB="0" anchor="ctr">
+                    <a:lnL w="12700" cap="flat" cmpd="sng" algn="ctr">
+                      <a:solidFill>
+                        <a:srgbClr val="000000"/>
+                      </a:solidFill>
+                      <a:prstDash val="solid"/>
+                      <a:round/>
+                      <a:headEnd type="none" w="med" len="med"/>
+                      <a:tailEnd type="none" w="med" len="med"/>
+                    </a:lnL>
+                    <a:lnR w="12700" cap="flat" cmpd="sng" algn="ctr">
+                      <a:solidFill>
+                        <a:srgbClr val="000000"/>
+                      </a:solidFill>
+                      <a:prstDash val="solid"/>
+                      <a:round/>
+                      <a:headEnd type="none" w="med" len="med"/>
+                      <a:tailEnd type="none" w="med" len="med"/>
+                    </a:lnR>
+                    <a:lnT w="12700" cap="flat" cmpd="sng" algn="ctr">
+                      <a:solidFill>
+                        <a:srgbClr val="000000"/>
+                      </a:solidFill>
+                      <a:prstDash val="solid"/>
+                      <a:round/>
+                      <a:headEnd type="none" w="med" len="med"/>
+                      <a:tailEnd type="none" w="med" len="med"/>
+                    </a:lnT>
+                    <a:lnB w="12700" cap="flat" cmpd="sng" algn="ctr">
+                      <a:solidFill>
+                        <a:srgbClr val="000000"/>
+                      </a:solidFill>
+                      <a:prstDash val="solid"/>
+                      <a:round/>
+                      <a:headEnd type="none" w="med" len="med"/>
+                      <a:tailEnd type="none" w="med" len="med"/>
+                    </a:lnB>
+                    <a:noFill/>
+                  </a:tcPr>
+                </a:tc>
+                <a:tc>
+                  <a:txBody>
+                    <a:bodyPr/>
+                    <a:lstStyle/>
+                    <a:p>
+                      <a:pPr algn="l" fontAlgn="ctr">
+                        <a:buNone/>
+                      </a:pPr>
+                      <a:endParaRPr lang="en-US" sz="1100" b="1" i="0" u="none" strike="noStrike">
+                        <a:solidFill>
+                          <a:srgbClr val="000000"/>
+                        </a:solidFill>
+                        <a:effectLst/>
+                        <a:latin typeface="Aptos Narrow" panose="020B0004020202020204" pitchFamily="34" charset="0"/>
+                      </a:endParaRPr>
+                    </a:p>
+                  </a:txBody>
+                  <a:tcPr anchor="ctr">
+                    <a:lnL w="12700" cap="flat" cmpd="sng" algn="ctr">
+                      <a:solidFill>
+                        <a:srgbClr val="000000"/>
+                      </a:solidFill>
+                      <a:prstDash val="solid"/>
+                      <a:round/>
+                      <a:headEnd type="none" w="med" len="med"/>
+                      <a:tailEnd type="none" w="med" len="med"/>
+                    </a:lnL>
+                    <a:lnR w="12700" cap="flat" cmpd="sng" algn="ctr">
+                      <a:solidFill>
+                        <a:srgbClr val="000000"/>
+                      </a:solidFill>
+                      <a:prstDash val="solid"/>
+                      <a:round/>
+                      <a:headEnd type="none" w="med" len="med"/>
+                      <a:tailEnd type="none" w="med" len="med"/>
+                    </a:lnR>
+                    <a:lnT w="12700" cap="flat" cmpd="sng" algn="ctr">
+                      <a:solidFill>
+                        <a:srgbClr val="000000"/>
+                      </a:solidFill>
+                      <a:prstDash val="solid"/>
+                      <a:round/>
+                      <a:headEnd type="none" w="med" len="med"/>
+                      <a:tailEnd type="none" w="med" len="med"/>
+                    </a:lnT>
+                    <a:lnB w="12700" cap="flat" cmpd="sng" algn="ctr">
+                      <a:solidFill>
+                        <a:srgbClr val="000000"/>
+                      </a:solidFill>
+                      <a:prstDash val="solid"/>
+                      <a:round/>
+                      <a:headEnd type="none" w="med" len="med"/>
+                      <a:tailEnd type="none" w="med" len="med"/>
+                    </a:lnB>
+                    <a:noFill/>
+                  </a:tcPr>
+                </a:tc>
+                <a:tc>
+                  <a:txBody>
+                    <a:bodyPr/>
+                    <a:lstStyle/>
+                    <a:p>
+                      <a:pPr algn="l" fontAlgn="ctr">
+                        <a:buNone/>
+                      </a:pPr>
+                      <a:endParaRPr lang="en-US" sz="1100" b="0" i="0" u="none" strike="noStrike" dirty="0">
+                        <a:solidFill>
+                          <a:srgbClr val="000000"/>
+                        </a:solidFill>
+                        <a:effectLst/>
+                        <a:latin typeface="Aptos Narrow" panose="020B0004020202020204" pitchFamily="34" charset="0"/>
+                      </a:endParaRPr>
+                    </a:p>
+                  </a:txBody>
+                  <a:tcPr anchor="ctr">
+                    <a:lnL w="12700" cap="flat" cmpd="sng" algn="ctr">
+                      <a:solidFill>
+                        <a:srgbClr val="000000"/>
+                      </a:solidFill>
+                      <a:prstDash val="solid"/>
+                      <a:round/>
+                      <a:headEnd type="none" w="med" len="med"/>
+                      <a:tailEnd type="none" w="med" len="med"/>
+                    </a:lnL>
+                    <a:lnR w="12700" cap="flat" cmpd="sng" algn="ctr">
+                      <a:solidFill>
+                        <a:srgbClr val="000000"/>
+                      </a:solidFill>
+                      <a:prstDash val="solid"/>
+                      <a:round/>
+                      <a:headEnd type="none" w="med" len="med"/>
+                      <a:tailEnd type="none" w="med" len="med"/>
+                    </a:lnR>
+                    <a:lnT w="12700" cap="flat" cmpd="sng" algn="ctr">
+                      <a:solidFill>
+                        <a:srgbClr val="000000"/>
+                      </a:solidFill>
+                      <a:prstDash val="solid"/>
+                      <a:round/>
+                      <a:headEnd type="none" w="med" len="med"/>
+                      <a:tailEnd type="none" w="med" len="med"/>
+                    </a:lnT>
+                    <a:lnB w="12700" cap="flat" cmpd="sng" algn="ctr">
+                      <a:solidFill>
+                        <a:srgbClr val="000000"/>
+                      </a:solidFill>
+                      <a:prstDash val="solid"/>
+                      <a:round/>
+                      <a:headEnd type="none" w="med" len="med"/>
+                      <a:tailEnd type="none" w="med" len="med"/>
+                    </a:lnB>
+                    <a:noFill/>
+                  </a:tcPr>
+                </a:tc>
+                <a:tc>
+                  <a:txBody>
+                    <a:bodyPr/>
+                    <a:lstStyle/>
+                    <a:p>
+                      <a:pPr algn="ctr" fontAlgn="ctr">
+                        <a:buNone/>
+                      </a:pPr>
+                      <a:endParaRPr lang="en-US" sz="1100" b="0" i="0" u="none" strike="noStrike" dirty="0">
+                        <a:solidFill>
+                          <a:srgbClr val="000000"/>
+                        </a:solidFill>
+                        <a:effectLst/>
+                        <a:latin typeface="Aptos Narrow" panose="020B0004020202020204" pitchFamily="34" charset="0"/>
+                      </a:endParaRPr>
+                    </a:p>
+                  </a:txBody>
+                  <a:tcPr marL="9525" marR="9525" marT="9525" marB="0" anchor="ctr">
+                    <a:lnL w="12700" cap="flat" cmpd="sng" algn="ctr">
+                      <a:solidFill>
+                        <a:srgbClr val="000000"/>
+                      </a:solidFill>
+                      <a:prstDash val="solid"/>
+                      <a:round/>
+                      <a:headEnd type="none" w="med" len="med"/>
+                      <a:tailEnd type="none" w="med" len="med"/>
+                    </a:lnL>
+                    <a:lnR w="12700" cap="flat" cmpd="sng" algn="ctr">
+                      <a:solidFill>
+                        <a:srgbClr val="000000"/>
+                      </a:solidFill>
+                      <a:prstDash val="solid"/>
+                      <a:round/>
+                      <a:headEnd type="none" w="med" len="med"/>
+                      <a:tailEnd type="none" w="med" len="med"/>
+                    </a:lnR>
+                    <a:lnT w="12700" cap="flat" cmpd="sng" algn="ctr">
+                      <a:solidFill>
+                        <a:srgbClr val="000000"/>
+                      </a:solidFill>
+                      <a:prstDash val="solid"/>
+                      <a:round/>
+                      <a:headEnd type="none" w="med" len="med"/>
+                      <a:tailEnd type="none" w="med" len="med"/>
+                    </a:lnT>
+                    <a:lnB w="12700" cap="flat" cmpd="sng" algn="ctr">
+                      <a:solidFill>
+                        <a:srgbClr val="000000"/>
+                      </a:solidFill>
+                      <a:prstDash val="solid"/>
+                      <a:round/>
+                      <a:headEnd type="none" w="med" len="med"/>
+                      <a:tailEnd type="none" w="med" len="med"/>
+                    </a:lnB>
+                    <a:noFill/>
+                  </a:tcPr>
+                </a:tc>
+                <a:extLst>
+                  <a:ext uri="{0D108BD9-81ED-4DB2-BD59-A6C34878D82A}">
+                    <a16:rowId xmlns:a16="http://schemas.microsoft.com/office/drawing/2014/main" val="973425276"/>
+                  </a:ext>
+                </a:extLst>
+              </a:tr>
+              <a:tr h="330767">
+                <a:tc>
+                  <a:txBody>
+                    <a:bodyPr/>
+                    <a:lstStyle/>
+                    <a:p>
+                      <a:pPr algn="ctr" fontAlgn="ctr">
+                        <a:buNone/>
+                      </a:pPr>
+                      <a:endParaRPr lang="en-US" sz="1100" b="0" i="0" u="none" strike="noStrike">
+                        <a:solidFill>
+                          <a:srgbClr val="000000"/>
+                        </a:solidFill>
+                        <a:effectLst/>
+                        <a:latin typeface="Aptos Narrow" panose="020B0004020202020204" pitchFamily="34" charset="0"/>
+                      </a:endParaRPr>
+                    </a:p>
+                  </a:txBody>
+                  <a:tcPr marL="9525" marR="9525" marT="9525" marB="0" anchor="ctr">
+                    <a:lnL w="12700" cap="flat" cmpd="sng" algn="ctr">
+                      <a:solidFill>
+                        <a:srgbClr val="000000"/>
+                      </a:solidFill>
+                      <a:prstDash val="solid"/>
+                      <a:round/>
+                      <a:headEnd type="none" w="med" len="med"/>
+                      <a:tailEnd type="none" w="med" len="med"/>
+                    </a:lnL>
+                    <a:lnR w="12700" cap="flat" cmpd="sng" algn="ctr">
+                      <a:solidFill>
+                        <a:srgbClr val="000000"/>
+                      </a:solidFill>
+                      <a:prstDash val="solid"/>
+                      <a:round/>
+                      <a:headEnd type="none" w="med" len="med"/>
+                      <a:tailEnd type="none" w="med" len="med"/>
+                    </a:lnR>
+                    <a:lnT w="12700" cap="flat" cmpd="sng" algn="ctr">
+                      <a:solidFill>
+                        <a:srgbClr val="000000"/>
+                      </a:solidFill>
+                      <a:prstDash val="solid"/>
+                      <a:round/>
+                      <a:headEnd type="none" w="med" len="med"/>
+                      <a:tailEnd type="none" w="med" len="med"/>
+                    </a:lnT>
+                    <a:lnB w="12700" cap="flat" cmpd="sng" algn="ctr">
+                      <a:solidFill>
+                        <a:srgbClr val="000000"/>
+                      </a:solidFill>
+                      <a:prstDash val="solid"/>
+                      <a:round/>
+                      <a:headEnd type="none" w="med" len="med"/>
+                      <a:tailEnd type="none" w="med" len="med"/>
+                    </a:lnB>
+                    <a:noFill/>
+                  </a:tcPr>
+                </a:tc>
+                <a:tc>
+                  <a:txBody>
+                    <a:bodyPr/>
+                    <a:lstStyle/>
+                    <a:p>
+                      <a:pPr algn="l" fontAlgn="ctr">
+                        <a:buNone/>
+                      </a:pPr>
+                      <a:endParaRPr lang="en-US" sz="1100" b="1" i="0" u="none" strike="noStrike" dirty="0">
+                        <a:solidFill>
+                          <a:srgbClr val="000000"/>
+                        </a:solidFill>
+                        <a:effectLst/>
+                        <a:latin typeface="Aptos Narrow" panose="020B0004020202020204" pitchFamily="34" charset="0"/>
+                      </a:endParaRPr>
+                    </a:p>
+                  </a:txBody>
+                  <a:tcPr anchor="ctr">
+                    <a:lnL w="12700" cap="flat" cmpd="sng" algn="ctr">
+                      <a:solidFill>
+                        <a:srgbClr val="000000"/>
+                      </a:solidFill>
+                      <a:prstDash val="solid"/>
+                      <a:round/>
+                      <a:headEnd type="none" w="med" len="med"/>
+                      <a:tailEnd type="none" w="med" len="med"/>
+                    </a:lnL>
+                    <a:lnR w="12700" cap="flat" cmpd="sng" algn="ctr">
+                      <a:solidFill>
+                        <a:srgbClr val="000000"/>
+                      </a:solidFill>
+                      <a:prstDash val="solid"/>
+                      <a:round/>
+                      <a:headEnd type="none" w="med" len="med"/>
+                      <a:tailEnd type="none" w="med" len="med"/>
+                    </a:lnR>
+                    <a:lnT w="12700" cap="flat" cmpd="sng" algn="ctr">
+                      <a:solidFill>
+                        <a:srgbClr val="000000"/>
+                      </a:solidFill>
+                      <a:prstDash val="solid"/>
+                      <a:round/>
+                      <a:headEnd type="none" w="med" len="med"/>
+                      <a:tailEnd type="none" w="med" len="med"/>
+                    </a:lnT>
+                    <a:lnB w="12700" cap="flat" cmpd="sng" algn="ctr">
+                      <a:solidFill>
+                        <a:srgbClr val="000000"/>
+                      </a:solidFill>
+                      <a:prstDash val="solid"/>
+                      <a:round/>
+                      <a:headEnd type="none" w="med" len="med"/>
+                      <a:tailEnd type="none" w="med" len="med"/>
+                    </a:lnB>
+                    <a:noFill/>
+                  </a:tcPr>
+                </a:tc>
+                <a:tc>
+                  <a:txBody>
+                    <a:bodyPr/>
+                    <a:lstStyle/>
+                    <a:p>
+                      <a:pPr algn="l" fontAlgn="ctr">
+                        <a:buNone/>
+                      </a:pPr>
+                      <a:endParaRPr lang="en-US" sz="1100" b="0" i="0" u="none" strike="noStrike">
+                        <a:solidFill>
+                          <a:srgbClr val="000000"/>
+                        </a:solidFill>
+                        <a:effectLst/>
+                        <a:latin typeface="Aptos Narrow" panose="020B0004020202020204" pitchFamily="34" charset="0"/>
+                      </a:endParaRPr>
+                    </a:p>
+                  </a:txBody>
+                  <a:tcPr anchor="ctr">
+                    <a:lnL w="12700" cap="flat" cmpd="sng" algn="ctr">
+                      <a:solidFill>
+                        <a:srgbClr val="000000"/>
+                      </a:solidFill>
+                      <a:prstDash val="solid"/>
+                      <a:round/>
+                      <a:headEnd type="none" w="med" len="med"/>
+                      <a:tailEnd type="none" w="med" len="med"/>
+                    </a:lnL>
+                    <a:lnR w="12700" cap="flat" cmpd="sng" algn="ctr">
+                      <a:solidFill>
+                        <a:srgbClr val="000000"/>
+                      </a:solidFill>
+                      <a:prstDash val="solid"/>
+                      <a:round/>
+                      <a:headEnd type="none" w="med" len="med"/>
+                      <a:tailEnd type="none" w="med" len="med"/>
+                    </a:lnR>
+                    <a:lnT w="12700" cap="flat" cmpd="sng" algn="ctr">
+                      <a:solidFill>
+                        <a:srgbClr val="000000"/>
+                      </a:solidFill>
+                      <a:prstDash val="solid"/>
+                      <a:round/>
+                      <a:headEnd type="none" w="med" len="med"/>
+                      <a:tailEnd type="none" w="med" len="med"/>
+                    </a:lnT>
+                    <a:lnB w="12700" cap="flat" cmpd="sng" algn="ctr">
+                      <a:solidFill>
+                        <a:srgbClr val="000000"/>
+                      </a:solidFill>
+                      <a:prstDash val="solid"/>
+                      <a:round/>
+                      <a:headEnd type="none" w="med" len="med"/>
+                      <a:tailEnd type="none" w="med" len="med"/>
+                    </a:lnB>
+                    <a:noFill/>
+                  </a:tcPr>
+                </a:tc>
+                <a:tc>
+                  <a:txBody>
+                    <a:bodyPr/>
+                    <a:lstStyle/>
+                    <a:p>
+                      <a:pPr algn="ctr" fontAlgn="ctr">
+                        <a:buNone/>
+                      </a:pPr>
+                      <a:endParaRPr lang="en-US" sz="1100" b="0" i="0" u="none" strike="noStrike">
+                        <a:solidFill>
+                          <a:srgbClr val="000000"/>
+                        </a:solidFill>
+                        <a:effectLst/>
+                        <a:latin typeface="Aptos Narrow" panose="020B0004020202020204" pitchFamily="34" charset="0"/>
+                      </a:endParaRPr>
+                    </a:p>
+                  </a:txBody>
+                  <a:tcPr marL="9525" marR="9525" marT="9525" marB="0" anchor="ctr">
+                    <a:lnL w="12700" cap="flat" cmpd="sng" algn="ctr">
+                      <a:solidFill>
+                        <a:srgbClr val="000000"/>
+                      </a:solidFill>
+                      <a:prstDash val="solid"/>
+                      <a:round/>
+                      <a:headEnd type="none" w="med" len="med"/>
+                      <a:tailEnd type="none" w="med" len="med"/>
+                    </a:lnL>
+                    <a:lnR w="12700" cap="flat" cmpd="sng" algn="ctr">
+                      <a:solidFill>
+                        <a:srgbClr val="000000"/>
+                      </a:solidFill>
+                      <a:prstDash val="solid"/>
+                      <a:round/>
+                      <a:headEnd type="none" w="med" len="med"/>
+                      <a:tailEnd type="none" w="med" len="med"/>
+                    </a:lnR>
+                    <a:lnT w="12700" cap="flat" cmpd="sng" algn="ctr">
+                      <a:solidFill>
+                        <a:srgbClr val="000000"/>
+                      </a:solidFill>
+                      <a:prstDash val="solid"/>
+                      <a:round/>
+                      <a:headEnd type="none" w="med" len="med"/>
+                      <a:tailEnd type="none" w="med" len="med"/>
+                    </a:lnT>
+                    <a:lnB w="12700" cap="flat" cmpd="sng" algn="ctr">
+                      <a:solidFill>
+                        <a:srgbClr val="000000"/>
+                      </a:solidFill>
+                      <a:prstDash val="solid"/>
+                      <a:round/>
+                      <a:headEnd type="none" w="med" len="med"/>
+                      <a:tailEnd type="none" w="med" len="med"/>
+                    </a:lnB>
+                    <a:noFill/>
+                  </a:tcPr>
+                </a:tc>
+                <a:extLst>
+                  <a:ext uri="{0D108BD9-81ED-4DB2-BD59-A6C34878D82A}">
+                    <a16:rowId xmlns:a16="http://schemas.microsoft.com/office/drawing/2014/main" val="4058971766"/>
+                  </a:ext>
+                </a:extLst>
+              </a:tr>
+              <a:tr h="330767">
+                <a:tc>
+                  <a:txBody>
+                    <a:bodyPr/>
+                    <a:lstStyle/>
+                    <a:p>
+                      <a:pPr algn="ctr" fontAlgn="ctr">
+                        <a:buNone/>
+                      </a:pPr>
+                      <a:endParaRPr lang="en-US" sz="1100" b="0" i="0" u="none" strike="noStrike">
+                        <a:solidFill>
+                          <a:srgbClr val="000000"/>
+                        </a:solidFill>
+                        <a:effectLst/>
+                        <a:latin typeface="Aptos Narrow" panose="020B0004020202020204" pitchFamily="34" charset="0"/>
+                      </a:endParaRPr>
+                    </a:p>
+                  </a:txBody>
+                  <a:tcPr marL="9525" marR="9525" marT="9525" marB="0" anchor="ctr">
+                    <a:lnL w="12700" cap="flat" cmpd="sng" algn="ctr">
+                      <a:solidFill>
+                        <a:srgbClr val="000000"/>
+                      </a:solidFill>
+                      <a:prstDash val="solid"/>
+                      <a:round/>
+                      <a:headEnd type="none" w="med" len="med"/>
+                      <a:tailEnd type="none" w="med" len="med"/>
+                    </a:lnL>
+                    <a:lnR w="12700" cap="flat" cmpd="sng" algn="ctr">
+                      <a:solidFill>
+                        <a:srgbClr val="000000"/>
+                      </a:solidFill>
+                      <a:prstDash val="solid"/>
+                      <a:round/>
+                      <a:headEnd type="none" w="med" len="med"/>
+                      <a:tailEnd type="none" w="med" len="med"/>
+                    </a:lnR>
+                    <a:lnT w="12700" cap="flat" cmpd="sng" algn="ctr">
+                      <a:solidFill>
+                        <a:srgbClr val="000000"/>
+                      </a:solidFill>
+                      <a:prstDash val="solid"/>
+                      <a:round/>
+                      <a:headEnd type="none" w="med" len="med"/>
+                      <a:tailEnd type="none" w="med" len="med"/>
+                    </a:lnT>
+                    <a:lnB w="12700" cap="flat" cmpd="sng" algn="ctr">
+                      <a:solidFill>
+                        <a:srgbClr val="000000"/>
+                      </a:solidFill>
+                      <a:prstDash val="solid"/>
+                      <a:round/>
+                      <a:headEnd type="none" w="med" len="med"/>
+                      <a:tailEnd type="none" w="med" len="med"/>
+                    </a:lnB>
+                    <a:noFill/>
+                  </a:tcPr>
+                </a:tc>
+                <a:tc>
+                  <a:txBody>
+                    <a:bodyPr/>
+                    <a:lstStyle/>
+                    <a:p>
+                      <a:pPr marL="0" marR="0" lvl="0" indent="0" algn="l" defTabSz="914400" rtl="0" eaLnBrk="1" fontAlgn="ctr" latinLnBrk="0" hangingPunct="1">
+                        <a:lnSpc>
+                          <a:spcPct val="100000"/>
+                        </a:lnSpc>
+                        <a:spcBef>
+                          <a:spcPts val="0"/>
+                        </a:spcBef>
+                        <a:spcAft>
+                          <a:spcPts val="0"/>
+                        </a:spcAft>
+                        <a:buClrTx/>
+                        <a:buSzTx/>
+                        <a:buFontTx/>
+                        <a:buNone/>
+                        <a:tabLst/>
+                        <a:defRPr/>
+                      </a:pPr>
+                      <a:endParaRPr lang="en-US" sz="1100" b="1" i="0" u="none" strike="noStrike" dirty="0">
+                        <a:solidFill>
+                          <a:srgbClr val="000000"/>
+                        </a:solidFill>
+                        <a:effectLst/>
+                        <a:latin typeface="Aptos Narrow" panose="020B0004020202020204" pitchFamily="34" charset="0"/>
+                      </a:endParaRPr>
+                    </a:p>
+                  </a:txBody>
+                  <a:tcPr anchor="ctr">
+                    <a:lnL w="12700" cap="flat" cmpd="sng" algn="ctr">
+                      <a:solidFill>
+                        <a:srgbClr val="000000"/>
+                      </a:solidFill>
+                      <a:prstDash val="solid"/>
+                      <a:round/>
+                      <a:headEnd type="none" w="med" len="med"/>
+                      <a:tailEnd type="none" w="med" len="med"/>
+                    </a:lnL>
+                    <a:lnR w="12700" cap="flat" cmpd="sng" algn="ctr">
+                      <a:solidFill>
+                        <a:srgbClr val="000000"/>
+                      </a:solidFill>
+                      <a:prstDash val="solid"/>
+                      <a:round/>
+                      <a:headEnd type="none" w="med" len="med"/>
+                      <a:tailEnd type="none" w="med" len="med"/>
+                    </a:lnR>
+                    <a:lnT w="12700" cap="flat" cmpd="sng" algn="ctr">
+                      <a:solidFill>
+                        <a:srgbClr val="000000"/>
+                      </a:solidFill>
+                      <a:prstDash val="solid"/>
+                      <a:round/>
+                      <a:headEnd type="none" w="med" len="med"/>
+                      <a:tailEnd type="none" w="med" len="med"/>
+                    </a:lnT>
+                    <a:lnB w="12700" cap="flat" cmpd="sng" algn="ctr">
+                      <a:solidFill>
+                        <a:srgbClr val="000000"/>
+                      </a:solidFill>
+                      <a:prstDash val="solid"/>
+                      <a:round/>
+                      <a:headEnd type="none" w="med" len="med"/>
+                      <a:tailEnd type="none" w="med" len="med"/>
+                    </a:lnB>
+                    <a:noFill/>
+                  </a:tcPr>
+                </a:tc>
+                <a:tc>
+                  <a:txBody>
+                    <a:bodyPr/>
+                    <a:lstStyle/>
+                    <a:p>
+                      <a:pPr algn="l" fontAlgn="ctr">
+                        <a:buNone/>
+                      </a:pPr>
+                      <a:endParaRPr lang="en-US" sz="1100" b="0" i="0" u="none" strike="noStrike">
+                        <a:solidFill>
+                          <a:srgbClr val="000000"/>
+                        </a:solidFill>
+                        <a:effectLst/>
+                        <a:latin typeface="Aptos Narrow" panose="020B0004020202020204" pitchFamily="34" charset="0"/>
+                      </a:endParaRPr>
+                    </a:p>
+                  </a:txBody>
+                  <a:tcPr anchor="ctr">
+                    <a:lnL w="12700" cap="flat" cmpd="sng" algn="ctr">
+                      <a:solidFill>
+                        <a:srgbClr val="000000"/>
+                      </a:solidFill>
+                      <a:prstDash val="solid"/>
+                      <a:round/>
+                      <a:headEnd type="none" w="med" len="med"/>
+                      <a:tailEnd type="none" w="med" len="med"/>
+                    </a:lnL>
+                    <a:lnR w="12700" cap="flat" cmpd="sng" algn="ctr">
+                      <a:solidFill>
+                        <a:srgbClr val="000000"/>
+                      </a:solidFill>
+                      <a:prstDash val="solid"/>
+                      <a:round/>
+                      <a:headEnd type="none" w="med" len="med"/>
+                      <a:tailEnd type="none" w="med" len="med"/>
+                    </a:lnR>
+                    <a:lnT w="12700" cap="flat" cmpd="sng" algn="ctr">
+                      <a:solidFill>
+                        <a:srgbClr val="000000"/>
+                      </a:solidFill>
+                      <a:prstDash val="solid"/>
+                      <a:round/>
+                      <a:headEnd type="none" w="med" len="med"/>
+                      <a:tailEnd type="none" w="med" len="med"/>
+                    </a:lnT>
+                    <a:lnB w="12700" cap="flat" cmpd="sng" algn="ctr">
+                      <a:solidFill>
+                        <a:srgbClr val="000000"/>
+                      </a:solidFill>
+                      <a:prstDash val="solid"/>
+                      <a:round/>
+                      <a:headEnd type="none" w="med" len="med"/>
+                      <a:tailEnd type="none" w="med" len="med"/>
+                    </a:lnB>
+                    <a:noFill/>
+                  </a:tcPr>
+                </a:tc>
+                <a:tc>
+                  <a:txBody>
+                    <a:bodyPr/>
+                    <a:lstStyle/>
+                    <a:p>
+                      <a:pPr algn="ctr" fontAlgn="ctr">
+                        <a:buNone/>
+                      </a:pPr>
+                      <a:endParaRPr lang="en-US" sz="1100" b="0" i="0" u="none" strike="noStrike" dirty="0">
+                        <a:solidFill>
+                          <a:srgbClr val="000000"/>
+                        </a:solidFill>
+                        <a:effectLst/>
+                        <a:latin typeface="Aptos Narrow" panose="020B0004020202020204" pitchFamily="34" charset="0"/>
+                      </a:endParaRPr>
+                    </a:p>
+                  </a:txBody>
+                  <a:tcPr marL="9525" marR="9525" marT="9525" marB="0" anchor="ctr">
+                    <a:lnL w="12700" cap="flat" cmpd="sng" algn="ctr">
+                      <a:solidFill>
+                        <a:srgbClr val="000000"/>
+                      </a:solidFill>
+                      <a:prstDash val="solid"/>
+                      <a:round/>
+                      <a:headEnd type="none" w="med" len="med"/>
+                      <a:tailEnd type="none" w="med" len="med"/>
+                    </a:lnL>
+                    <a:lnR w="12700" cap="flat" cmpd="sng" algn="ctr">
+                      <a:solidFill>
+                        <a:srgbClr val="000000"/>
+                      </a:solidFill>
+                      <a:prstDash val="solid"/>
+                      <a:round/>
+                      <a:headEnd type="none" w="med" len="med"/>
+                      <a:tailEnd type="none" w="med" len="med"/>
+                    </a:lnR>
+                    <a:lnT w="12700" cap="flat" cmpd="sng" algn="ctr">
+                      <a:solidFill>
+                        <a:srgbClr val="000000"/>
+                      </a:solidFill>
+                      <a:prstDash val="solid"/>
+                      <a:round/>
+                      <a:headEnd type="none" w="med" len="med"/>
+                      <a:tailEnd type="none" w="med" len="med"/>
+                    </a:lnT>
+                    <a:lnB w="12700" cap="flat" cmpd="sng" algn="ctr">
+                      <a:solidFill>
+                        <a:srgbClr val="000000"/>
+                      </a:solidFill>
+                      <a:prstDash val="solid"/>
+                      <a:round/>
+                      <a:headEnd type="none" w="med" len="med"/>
+                      <a:tailEnd type="none" w="med" len="med"/>
+                    </a:lnB>
+                    <a:noFill/>
+                  </a:tcPr>
+                </a:tc>
+                <a:extLst>
+                  <a:ext uri="{0D108BD9-81ED-4DB2-BD59-A6C34878D82A}">
+                    <a16:rowId xmlns:a16="http://schemas.microsoft.com/office/drawing/2014/main" val="1411338873"/>
+                  </a:ext>
+                </a:extLst>
+              </a:tr>
+              <a:tr h="330767">
+                <a:tc>
+                  <a:txBody>
+                    <a:bodyPr/>
+                    <a:lstStyle/>
+                    <a:p>
+                      <a:pPr algn="ctr" fontAlgn="ctr">
+                        <a:buNone/>
+                      </a:pPr>
+                      <a:endParaRPr lang="en-US" sz="1100" b="0" i="0" u="none" strike="noStrike">
+                        <a:solidFill>
+                          <a:srgbClr val="000000"/>
+                        </a:solidFill>
+                        <a:effectLst/>
+                        <a:latin typeface="Aptos Narrow" panose="020B0004020202020204" pitchFamily="34" charset="0"/>
+                      </a:endParaRPr>
+                    </a:p>
+                  </a:txBody>
+                  <a:tcPr marL="9525" marR="9525" marT="9525" marB="0" anchor="ctr">
+                    <a:lnL w="12700" cap="flat" cmpd="sng" algn="ctr">
+                      <a:solidFill>
+                        <a:srgbClr val="000000"/>
+                      </a:solidFill>
+                      <a:prstDash val="solid"/>
+                      <a:round/>
+                      <a:headEnd type="none" w="med" len="med"/>
+                      <a:tailEnd type="none" w="med" len="med"/>
+                    </a:lnL>
+                    <a:lnR w="12700" cap="flat" cmpd="sng" algn="ctr">
+                      <a:solidFill>
+                        <a:srgbClr val="000000"/>
+                      </a:solidFill>
+                      <a:prstDash val="solid"/>
+                      <a:round/>
+                      <a:headEnd type="none" w="med" len="med"/>
+                      <a:tailEnd type="none" w="med" len="med"/>
+                    </a:lnR>
+                    <a:lnT w="12700" cap="flat" cmpd="sng" algn="ctr">
+                      <a:solidFill>
+                        <a:srgbClr val="000000"/>
+                      </a:solidFill>
+                      <a:prstDash val="solid"/>
+                      <a:round/>
+                      <a:headEnd type="none" w="med" len="med"/>
+                      <a:tailEnd type="none" w="med" len="med"/>
+                    </a:lnT>
+                    <a:lnB w="12700" cap="flat" cmpd="sng" algn="ctr">
+                      <a:solidFill>
+                        <a:srgbClr val="000000"/>
+                      </a:solidFill>
+                      <a:prstDash val="solid"/>
+                      <a:round/>
+                      <a:headEnd type="none" w="med" len="med"/>
+                      <a:tailEnd type="none" w="med" len="med"/>
+                    </a:lnB>
+                    <a:noFill/>
+                  </a:tcPr>
+                </a:tc>
+                <a:tc>
+                  <a:txBody>
+                    <a:bodyPr/>
+                    <a:lstStyle/>
+                    <a:p>
+                      <a:pPr algn="l" fontAlgn="ctr">
+                        <a:buNone/>
+                      </a:pPr>
+                      <a:endParaRPr lang="en-US" sz="1100" b="1" i="0" u="none" strike="noStrike">
+                        <a:solidFill>
+                          <a:srgbClr val="000000"/>
+                        </a:solidFill>
+                        <a:effectLst/>
+                        <a:latin typeface="Aptos Narrow" panose="020B0004020202020204" pitchFamily="34" charset="0"/>
+                      </a:endParaRPr>
+                    </a:p>
+                  </a:txBody>
+                  <a:tcPr anchor="ctr">
+                    <a:lnL w="12700" cap="flat" cmpd="sng" algn="ctr">
+                      <a:solidFill>
+                        <a:srgbClr val="000000"/>
+                      </a:solidFill>
+                      <a:prstDash val="solid"/>
+                      <a:round/>
+                      <a:headEnd type="none" w="med" len="med"/>
+                      <a:tailEnd type="none" w="med" len="med"/>
+                    </a:lnL>
+                    <a:lnR w="12700" cap="flat" cmpd="sng" algn="ctr">
+                      <a:solidFill>
+                        <a:srgbClr val="000000"/>
+                      </a:solidFill>
+                      <a:prstDash val="solid"/>
+                      <a:round/>
+                      <a:headEnd type="none" w="med" len="med"/>
+                      <a:tailEnd type="none" w="med" len="med"/>
+                    </a:lnR>
+                    <a:lnT w="12700" cap="flat" cmpd="sng" algn="ctr">
+                      <a:solidFill>
+                        <a:srgbClr val="000000"/>
+                      </a:solidFill>
+                      <a:prstDash val="solid"/>
+                      <a:round/>
+                      <a:headEnd type="none" w="med" len="med"/>
+                      <a:tailEnd type="none" w="med" len="med"/>
+                    </a:lnT>
+                    <a:lnB w="12700" cap="flat" cmpd="sng" algn="ctr">
+                      <a:solidFill>
+                        <a:srgbClr val="000000"/>
+                      </a:solidFill>
+                      <a:prstDash val="solid"/>
+                      <a:round/>
+                      <a:headEnd type="none" w="med" len="med"/>
+                      <a:tailEnd type="none" w="med" len="med"/>
+                    </a:lnB>
+                    <a:noFill/>
+                  </a:tcPr>
+                </a:tc>
+                <a:tc>
+                  <a:txBody>
+                    <a:bodyPr/>
+                    <a:lstStyle/>
+                    <a:p>
+                      <a:pPr algn="l" fontAlgn="ctr">
+                        <a:buNone/>
+                      </a:pPr>
+                      <a:endParaRPr lang="en-US" sz="1100" b="0" i="0" u="none" strike="noStrike" dirty="0">
+                        <a:solidFill>
+                          <a:srgbClr val="000000"/>
+                        </a:solidFill>
+                        <a:effectLst/>
+                        <a:latin typeface="Aptos Narrow" panose="020B0004020202020204" pitchFamily="34" charset="0"/>
+                      </a:endParaRPr>
+                    </a:p>
+                  </a:txBody>
+                  <a:tcPr anchor="ctr">
+                    <a:lnL w="12700" cap="flat" cmpd="sng" algn="ctr">
+                      <a:solidFill>
+                        <a:srgbClr val="000000"/>
+                      </a:solidFill>
+                      <a:prstDash val="solid"/>
+                      <a:round/>
+                      <a:headEnd type="none" w="med" len="med"/>
+                      <a:tailEnd type="none" w="med" len="med"/>
+                    </a:lnL>
+                    <a:lnR w="12700" cap="flat" cmpd="sng" algn="ctr">
+                      <a:solidFill>
+                        <a:srgbClr val="000000"/>
+                      </a:solidFill>
+                      <a:prstDash val="solid"/>
+                      <a:round/>
+                      <a:headEnd type="none" w="med" len="med"/>
+                      <a:tailEnd type="none" w="med" len="med"/>
+                    </a:lnR>
+                    <a:lnT w="12700" cap="flat" cmpd="sng" algn="ctr">
+                      <a:solidFill>
+                        <a:srgbClr val="000000"/>
+                      </a:solidFill>
+                      <a:prstDash val="solid"/>
+                      <a:round/>
+                      <a:headEnd type="none" w="med" len="med"/>
+                      <a:tailEnd type="none" w="med" len="med"/>
+                    </a:lnT>
+                    <a:lnB w="12700" cap="flat" cmpd="sng" algn="ctr">
+                      <a:solidFill>
+                        <a:srgbClr val="000000"/>
+                      </a:solidFill>
+                      <a:prstDash val="solid"/>
+                      <a:round/>
+                      <a:headEnd type="none" w="med" len="med"/>
+                      <a:tailEnd type="none" w="med" len="med"/>
+                    </a:lnB>
+                    <a:noFill/>
+                  </a:tcPr>
+                </a:tc>
+                <a:tc>
+                  <a:txBody>
+                    <a:bodyPr/>
+                    <a:lstStyle/>
+                    <a:p>
+                      <a:pPr algn="ctr" fontAlgn="ctr">
+                        <a:buNone/>
+                      </a:pPr>
+                      <a:endParaRPr lang="en-US" sz="1100" b="0" i="0" u="none" strike="noStrike" dirty="0">
+                        <a:solidFill>
+                          <a:srgbClr val="000000"/>
+                        </a:solidFill>
+                        <a:effectLst/>
+                        <a:latin typeface="Aptos Narrow" panose="020B0004020202020204" pitchFamily="34" charset="0"/>
+                      </a:endParaRPr>
+                    </a:p>
+                  </a:txBody>
+                  <a:tcPr marL="9525" marR="9525" marT="9525" marB="0" anchor="ctr">
+                    <a:lnL w="12700" cap="flat" cmpd="sng" algn="ctr">
+                      <a:solidFill>
+                        <a:srgbClr val="000000"/>
+                      </a:solidFill>
+                      <a:prstDash val="solid"/>
+                      <a:round/>
+                      <a:headEnd type="none" w="med" len="med"/>
+                      <a:tailEnd type="none" w="med" len="med"/>
+                    </a:lnL>
+                    <a:lnR w="12700" cap="flat" cmpd="sng" algn="ctr">
+                      <a:solidFill>
+                        <a:srgbClr val="000000"/>
+                      </a:solidFill>
+                      <a:prstDash val="solid"/>
+                      <a:round/>
+                      <a:headEnd type="none" w="med" len="med"/>
+                      <a:tailEnd type="none" w="med" len="med"/>
+                    </a:lnR>
+                    <a:lnT w="12700" cap="flat" cmpd="sng" algn="ctr">
+                      <a:solidFill>
+                        <a:srgbClr val="000000"/>
+                      </a:solidFill>
+                      <a:prstDash val="solid"/>
+                      <a:round/>
+                      <a:headEnd type="none" w="med" len="med"/>
+                      <a:tailEnd type="none" w="med" len="med"/>
+                    </a:lnT>
+                    <a:lnB w="12700" cap="flat" cmpd="sng" algn="ctr">
+                      <a:solidFill>
+                        <a:srgbClr val="000000"/>
+                      </a:solidFill>
+                      <a:prstDash val="solid"/>
+                      <a:round/>
+                      <a:headEnd type="none" w="med" len="med"/>
+                      <a:tailEnd type="none" w="med" len="med"/>
+                    </a:lnB>
+                    <a:noFill/>
+                  </a:tcPr>
+                </a:tc>
+                <a:extLst>
+                  <a:ext uri="{0D108BD9-81ED-4DB2-BD59-A6C34878D82A}">
+                    <a16:rowId xmlns:a16="http://schemas.microsoft.com/office/drawing/2014/main" val="3840427043"/>
+                  </a:ext>
+                </a:extLst>
+              </a:tr>
+              <a:tr h="330767">
+                <a:tc>
+                  <a:txBody>
+                    <a:bodyPr/>
+                    <a:lstStyle/>
+                    <a:p>
+                      <a:pPr algn="ctr" fontAlgn="ctr">
+                        <a:buNone/>
+                      </a:pPr>
+                      <a:endParaRPr lang="en-US" sz="1100" b="0" i="0" u="none" strike="noStrike">
+                        <a:solidFill>
+                          <a:srgbClr val="000000"/>
+                        </a:solidFill>
+                        <a:effectLst/>
+                        <a:latin typeface="Aptos Narrow" panose="020B0004020202020204" pitchFamily="34" charset="0"/>
+                      </a:endParaRPr>
+                    </a:p>
+                  </a:txBody>
+                  <a:tcPr marL="9525" marR="9525" marT="9525" marB="0" anchor="ctr">
+                    <a:lnL w="12700" cap="flat" cmpd="sng" algn="ctr">
+                      <a:solidFill>
+                        <a:srgbClr val="000000"/>
+                      </a:solidFill>
+                      <a:prstDash val="solid"/>
+                      <a:round/>
+                      <a:headEnd type="none" w="med" len="med"/>
+                      <a:tailEnd type="none" w="med" len="med"/>
+                    </a:lnL>
+                    <a:lnR w="12700" cap="flat" cmpd="sng" algn="ctr">
+                      <a:solidFill>
+                        <a:srgbClr val="000000"/>
+                      </a:solidFill>
+                      <a:prstDash val="solid"/>
+                      <a:round/>
+                      <a:headEnd type="none" w="med" len="med"/>
+                      <a:tailEnd type="none" w="med" len="med"/>
+                    </a:lnR>
+                    <a:lnT w="12700" cap="flat" cmpd="sng" algn="ctr">
+                      <a:solidFill>
+                        <a:srgbClr val="000000"/>
+                      </a:solidFill>
+                      <a:prstDash val="solid"/>
+                      <a:round/>
+                      <a:headEnd type="none" w="med" len="med"/>
+                      <a:tailEnd type="none" w="med" len="med"/>
+                    </a:lnT>
+                    <a:lnB w="12700" cap="flat" cmpd="sng" algn="ctr">
+                      <a:solidFill>
+                        <a:srgbClr val="000000"/>
+                      </a:solidFill>
+                      <a:prstDash val="solid"/>
+                      <a:round/>
+                      <a:headEnd type="none" w="med" len="med"/>
+                      <a:tailEnd type="none" w="med" len="med"/>
+                    </a:lnB>
+                    <a:noFill/>
+                  </a:tcPr>
+                </a:tc>
+                <a:tc>
+                  <a:txBody>
+                    <a:bodyPr/>
+                    <a:lstStyle/>
+                    <a:p>
+                      <a:pPr algn="l" fontAlgn="ctr">
+                        <a:buNone/>
+                      </a:pPr>
+                      <a:endParaRPr lang="en-US" sz="1100" b="1" i="0" u="none" strike="noStrike" dirty="0">
+                        <a:solidFill>
+                          <a:srgbClr val="000000"/>
+                        </a:solidFill>
+                        <a:effectLst/>
+                        <a:latin typeface="Aptos Narrow" panose="020B0004020202020204" pitchFamily="34" charset="0"/>
+                      </a:endParaRPr>
+                    </a:p>
+                  </a:txBody>
+                  <a:tcPr anchor="ctr">
+                    <a:lnL w="12700" cap="flat" cmpd="sng" algn="ctr">
+                      <a:solidFill>
+                        <a:srgbClr val="000000"/>
+                      </a:solidFill>
+                      <a:prstDash val="solid"/>
+                      <a:round/>
+                      <a:headEnd type="none" w="med" len="med"/>
+                      <a:tailEnd type="none" w="med" len="med"/>
+                    </a:lnL>
+                    <a:lnR w="12700" cap="flat" cmpd="sng" algn="ctr">
+                      <a:solidFill>
+                        <a:srgbClr val="000000"/>
+                      </a:solidFill>
+                      <a:prstDash val="solid"/>
+                      <a:round/>
+                      <a:headEnd type="none" w="med" len="med"/>
+                      <a:tailEnd type="none" w="med" len="med"/>
+                    </a:lnR>
+                    <a:lnT w="12700" cap="flat" cmpd="sng" algn="ctr">
+                      <a:solidFill>
+                        <a:srgbClr val="000000"/>
+                      </a:solidFill>
+                      <a:prstDash val="solid"/>
+                      <a:round/>
+                      <a:headEnd type="none" w="med" len="med"/>
+                      <a:tailEnd type="none" w="med" len="med"/>
+                    </a:lnT>
+                    <a:lnB w="12700" cap="flat" cmpd="sng" algn="ctr">
+                      <a:solidFill>
+                        <a:srgbClr val="000000"/>
+                      </a:solidFill>
+                      <a:prstDash val="solid"/>
+                      <a:round/>
+                      <a:headEnd type="none" w="med" len="med"/>
+                      <a:tailEnd type="none" w="med" len="med"/>
+                    </a:lnB>
+                    <a:noFill/>
+                  </a:tcPr>
+                </a:tc>
+                <a:tc>
+                  <a:txBody>
+                    <a:bodyPr/>
+                    <a:lstStyle/>
+                    <a:p>
+                      <a:pPr algn="l" fontAlgn="ctr">
+                        <a:buNone/>
+                      </a:pPr>
+                      <a:endParaRPr lang="en-US" sz="1100" b="0" i="0" u="none" strike="noStrike">
+                        <a:solidFill>
+                          <a:srgbClr val="000000"/>
+                        </a:solidFill>
+                        <a:effectLst/>
+                        <a:latin typeface="Aptos Narrow" panose="020B0004020202020204" pitchFamily="34" charset="0"/>
+                      </a:endParaRPr>
+                    </a:p>
+                  </a:txBody>
+                  <a:tcPr anchor="ctr">
+                    <a:lnL w="12700" cap="flat" cmpd="sng" algn="ctr">
+                      <a:solidFill>
+                        <a:srgbClr val="000000"/>
+                      </a:solidFill>
+                      <a:prstDash val="solid"/>
+                      <a:round/>
+                      <a:headEnd type="none" w="med" len="med"/>
+                      <a:tailEnd type="none" w="med" len="med"/>
+                    </a:lnL>
+                    <a:lnR w="12700" cap="flat" cmpd="sng" algn="ctr">
+                      <a:solidFill>
+                        <a:srgbClr val="000000"/>
+                      </a:solidFill>
+                      <a:prstDash val="solid"/>
+                      <a:round/>
+                      <a:headEnd type="none" w="med" len="med"/>
+                      <a:tailEnd type="none" w="med" len="med"/>
+                    </a:lnR>
+                    <a:lnT w="12700" cap="flat" cmpd="sng" algn="ctr">
+                      <a:solidFill>
+                        <a:srgbClr val="000000"/>
+                      </a:solidFill>
+                      <a:prstDash val="solid"/>
+                      <a:round/>
+                      <a:headEnd type="none" w="med" len="med"/>
+                      <a:tailEnd type="none" w="med" len="med"/>
+                    </a:lnT>
+                    <a:lnB w="12700" cap="flat" cmpd="sng" algn="ctr">
+                      <a:solidFill>
+                        <a:srgbClr val="000000"/>
+                      </a:solidFill>
+                      <a:prstDash val="solid"/>
+                      <a:round/>
+                      <a:headEnd type="none" w="med" len="med"/>
+                      <a:tailEnd type="none" w="med" len="med"/>
+                    </a:lnB>
+                    <a:noFill/>
+                  </a:tcPr>
+                </a:tc>
+                <a:tc>
+                  <a:txBody>
+                    <a:bodyPr/>
+                    <a:lstStyle/>
+                    <a:p>
+                      <a:pPr algn="ctr" fontAlgn="ctr">
+                        <a:buNone/>
+                      </a:pPr>
+                      <a:endParaRPr lang="en-US" sz="1100" b="0" i="0" u="none" strike="noStrike" dirty="0">
+                        <a:solidFill>
+                          <a:srgbClr val="000000"/>
+                        </a:solidFill>
+                        <a:effectLst/>
+                        <a:latin typeface="Aptos Narrow" panose="020B0004020202020204" pitchFamily="34" charset="0"/>
+                      </a:endParaRPr>
+                    </a:p>
+                  </a:txBody>
+                  <a:tcPr marL="9525" marR="9525" marT="9525" marB="0" anchor="ctr">
+                    <a:lnL w="12700" cap="flat" cmpd="sng" algn="ctr">
+                      <a:solidFill>
+                        <a:srgbClr val="000000"/>
+                      </a:solidFill>
+                      <a:prstDash val="solid"/>
+                      <a:round/>
+                      <a:headEnd type="none" w="med" len="med"/>
+                      <a:tailEnd type="none" w="med" len="med"/>
+                    </a:lnL>
+                    <a:lnR w="12700" cap="flat" cmpd="sng" algn="ctr">
+                      <a:solidFill>
+                        <a:srgbClr val="000000"/>
+                      </a:solidFill>
+                      <a:prstDash val="solid"/>
+                      <a:round/>
+                      <a:headEnd type="none" w="med" len="med"/>
+                      <a:tailEnd type="none" w="med" len="med"/>
+                    </a:lnR>
+                    <a:lnT w="12700" cap="flat" cmpd="sng" algn="ctr">
+                      <a:solidFill>
+                        <a:srgbClr val="000000"/>
+                      </a:solidFill>
+                      <a:prstDash val="solid"/>
+                      <a:round/>
+                      <a:headEnd type="none" w="med" len="med"/>
+                      <a:tailEnd type="none" w="med" len="med"/>
+                    </a:lnT>
+                    <a:lnB w="12700" cap="flat" cmpd="sng" algn="ctr">
+                      <a:solidFill>
+                        <a:srgbClr val="000000"/>
+                      </a:solidFill>
+                      <a:prstDash val="solid"/>
+                      <a:round/>
+                      <a:headEnd type="none" w="med" len="med"/>
+                      <a:tailEnd type="none" w="med" len="med"/>
+                    </a:lnB>
+                    <a:noFill/>
+                  </a:tcPr>
+                </a:tc>
+                <a:extLst>
+                  <a:ext uri="{0D108BD9-81ED-4DB2-BD59-A6C34878D82A}">
+                    <a16:rowId xmlns:a16="http://schemas.microsoft.com/office/drawing/2014/main" val="1261007182"/>
+                  </a:ext>
+                </a:extLst>
+              </a:tr>
+              <a:tr h="330767">
+                <a:tc>
+                  <a:txBody>
+                    <a:bodyPr/>
+                    <a:lstStyle/>
+                    <a:p>
+                      <a:pPr algn="ctr" fontAlgn="ctr">
+                        <a:buNone/>
+                      </a:pPr>
+                      <a:endParaRPr lang="en-US" sz="1100" b="0" i="0" u="none" strike="noStrike">
+                        <a:solidFill>
+                          <a:srgbClr val="000000"/>
+                        </a:solidFill>
+                        <a:effectLst/>
+                        <a:latin typeface="Aptos Narrow" panose="020B0004020202020204" pitchFamily="34" charset="0"/>
+                      </a:endParaRPr>
+                    </a:p>
+                  </a:txBody>
+                  <a:tcPr marL="9525" marR="9525" marT="9525" marB="0" anchor="ctr">
+                    <a:lnL w="12700" cap="flat" cmpd="sng" algn="ctr">
+                      <a:solidFill>
+                        <a:srgbClr val="000000"/>
+                      </a:solidFill>
+                      <a:prstDash val="solid"/>
+                      <a:round/>
+                      <a:headEnd type="none" w="med" len="med"/>
+                      <a:tailEnd type="none" w="med" len="med"/>
+                    </a:lnL>
+                    <a:lnR w="12700" cap="flat" cmpd="sng" algn="ctr">
+                      <a:solidFill>
+                        <a:srgbClr val="000000"/>
+                      </a:solidFill>
+                      <a:prstDash val="solid"/>
+                      <a:round/>
+                      <a:headEnd type="none" w="med" len="med"/>
+                      <a:tailEnd type="none" w="med" len="med"/>
+                    </a:lnR>
+                    <a:lnT w="12700" cap="flat" cmpd="sng" algn="ctr">
+                      <a:solidFill>
+                        <a:srgbClr val="000000"/>
+                      </a:solidFill>
+                      <a:prstDash val="solid"/>
+                      <a:round/>
+                      <a:headEnd type="none" w="med" len="med"/>
+                      <a:tailEnd type="none" w="med" len="med"/>
+                    </a:lnT>
+                    <a:lnB w="12700" cap="flat" cmpd="sng" algn="ctr">
+                      <a:solidFill>
+                        <a:srgbClr val="000000"/>
+                      </a:solidFill>
+                      <a:prstDash val="solid"/>
+                      <a:round/>
+                      <a:headEnd type="none" w="med" len="med"/>
+                      <a:tailEnd type="none" w="med" len="med"/>
+                    </a:lnB>
+                    <a:noFill/>
+                  </a:tcPr>
+                </a:tc>
+                <a:tc>
+                  <a:txBody>
+                    <a:bodyPr/>
+                    <a:lstStyle/>
+                    <a:p>
+                      <a:pPr algn="l" fontAlgn="ctr">
+                        <a:buNone/>
+                      </a:pPr>
+                      <a:endParaRPr lang="en-US" sz="1100" b="1" i="0" u="none" strike="noStrike" dirty="0">
+                        <a:solidFill>
+                          <a:srgbClr val="000000"/>
+                        </a:solidFill>
+                        <a:effectLst/>
+                        <a:latin typeface="Aptos Narrow" panose="020B0004020202020204" pitchFamily="34" charset="0"/>
+                      </a:endParaRPr>
+                    </a:p>
+                  </a:txBody>
+                  <a:tcPr anchor="ctr">
+                    <a:lnL w="12700" cap="flat" cmpd="sng" algn="ctr">
+                      <a:solidFill>
+                        <a:srgbClr val="000000"/>
+                      </a:solidFill>
+                      <a:prstDash val="solid"/>
+                      <a:round/>
+                      <a:headEnd type="none" w="med" len="med"/>
+                      <a:tailEnd type="none" w="med" len="med"/>
+                    </a:lnL>
+                    <a:lnR w="12700" cap="flat" cmpd="sng" algn="ctr">
+                      <a:solidFill>
+                        <a:srgbClr val="000000"/>
+                      </a:solidFill>
+                      <a:prstDash val="solid"/>
+                      <a:round/>
+                      <a:headEnd type="none" w="med" len="med"/>
+                      <a:tailEnd type="none" w="med" len="med"/>
+                    </a:lnR>
+                    <a:lnT w="12700" cap="flat" cmpd="sng" algn="ctr">
+                      <a:solidFill>
+                        <a:srgbClr val="000000"/>
+                      </a:solidFill>
+                      <a:prstDash val="solid"/>
+                      <a:round/>
+                      <a:headEnd type="none" w="med" len="med"/>
+                      <a:tailEnd type="none" w="med" len="med"/>
+                    </a:lnT>
+                    <a:lnB w="12700" cap="flat" cmpd="sng" algn="ctr">
+                      <a:solidFill>
+                        <a:srgbClr val="000000"/>
+                      </a:solidFill>
+                      <a:prstDash val="solid"/>
+                      <a:round/>
+                      <a:headEnd type="none" w="med" len="med"/>
+                      <a:tailEnd type="none" w="med" len="med"/>
+                    </a:lnB>
+                    <a:noFill/>
+                  </a:tcPr>
+                </a:tc>
+                <a:tc>
+                  <a:txBody>
+                    <a:bodyPr/>
+                    <a:lstStyle/>
+                    <a:p>
+                      <a:pPr algn="l" fontAlgn="ctr">
+                        <a:buNone/>
+                      </a:pPr>
+                      <a:endParaRPr lang="en-US" sz="1100" b="0" i="0" u="none" strike="noStrike">
+                        <a:solidFill>
+                          <a:srgbClr val="000000"/>
+                        </a:solidFill>
+                        <a:effectLst/>
+                        <a:latin typeface="Aptos Narrow" panose="020B0004020202020204" pitchFamily="34" charset="0"/>
+                      </a:endParaRPr>
+                    </a:p>
+                  </a:txBody>
+                  <a:tcPr anchor="ctr">
+                    <a:lnL w="12700" cap="flat" cmpd="sng" algn="ctr">
+                      <a:solidFill>
+                        <a:srgbClr val="000000"/>
+                      </a:solidFill>
+                      <a:prstDash val="solid"/>
+                      <a:round/>
+                      <a:headEnd type="none" w="med" len="med"/>
+                      <a:tailEnd type="none" w="med" len="med"/>
+                    </a:lnL>
+                    <a:lnR w="12700" cap="flat" cmpd="sng" algn="ctr">
+                      <a:solidFill>
+                        <a:srgbClr val="000000"/>
+                      </a:solidFill>
+                      <a:prstDash val="solid"/>
+                      <a:round/>
+                      <a:headEnd type="none" w="med" len="med"/>
+                      <a:tailEnd type="none" w="med" len="med"/>
+                    </a:lnR>
+                    <a:lnT w="12700" cap="flat" cmpd="sng" algn="ctr">
+                      <a:solidFill>
+                        <a:srgbClr val="000000"/>
+                      </a:solidFill>
+                      <a:prstDash val="solid"/>
+                      <a:round/>
+                      <a:headEnd type="none" w="med" len="med"/>
+                      <a:tailEnd type="none" w="med" len="med"/>
+                    </a:lnT>
+                    <a:lnB w="12700" cap="flat" cmpd="sng" algn="ctr">
+                      <a:solidFill>
+                        <a:srgbClr val="000000"/>
+                      </a:solidFill>
+                      <a:prstDash val="solid"/>
+                      <a:round/>
+                      <a:headEnd type="none" w="med" len="med"/>
+                      <a:tailEnd type="none" w="med" len="med"/>
+                    </a:lnB>
+                    <a:noFill/>
+                  </a:tcPr>
+                </a:tc>
+                <a:tc>
+                  <a:txBody>
+                    <a:bodyPr/>
+                    <a:lstStyle/>
+                    <a:p>
+                      <a:pPr algn="ctr" fontAlgn="ctr">
+                        <a:buNone/>
+                      </a:pPr>
+                      <a:endParaRPr lang="en-US" sz="1100" b="0" i="0" u="none" strike="noStrike">
+                        <a:solidFill>
+                          <a:srgbClr val="000000"/>
+                        </a:solidFill>
+                        <a:effectLst/>
+                        <a:latin typeface="Aptos Narrow" panose="020B0004020202020204" pitchFamily="34" charset="0"/>
+                      </a:endParaRPr>
+                    </a:p>
+                  </a:txBody>
+                  <a:tcPr marL="9525" marR="9525" marT="9525" marB="0" anchor="ctr">
+                    <a:lnL w="12700" cap="flat" cmpd="sng" algn="ctr">
+                      <a:solidFill>
+                        <a:srgbClr val="000000"/>
+                      </a:solidFill>
+                      <a:prstDash val="solid"/>
+                      <a:round/>
+                      <a:headEnd type="none" w="med" len="med"/>
+                      <a:tailEnd type="none" w="med" len="med"/>
+                    </a:lnL>
+                    <a:lnR w="12700" cap="flat" cmpd="sng" algn="ctr">
+                      <a:solidFill>
+                        <a:srgbClr val="000000"/>
+                      </a:solidFill>
+                      <a:prstDash val="solid"/>
+                      <a:round/>
+                      <a:headEnd type="none" w="med" len="med"/>
+                      <a:tailEnd type="none" w="med" len="med"/>
+                    </a:lnR>
+                    <a:lnT w="12700" cap="flat" cmpd="sng" algn="ctr">
+                      <a:solidFill>
+                        <a:srgbClr val="000000"/>
+                      </a:solidFill>
+                      <a:prstDash val="solid"/>
+                      <a:round/>
+                      <a:headEnd type="none" w="med" len="med"/>
+                      <a:tailEnd type="none" w="med" len="med"/>
+                    </a:lnT>
+                    <a:lnB w="12700" cap="flat" cmpd="sng" algn="ctr">
+                      <a:solidFill>
+                        <a:srgbClr val="000000"/>
+                      </a:solidFill>
+                      <a:prstDash val="solid"/>
+                      <a:round/>
+                      <a:headEnd type="none" w="med" len="med"/>
+                      <a:tailEnd type="none" w="med" len="med"/>
+                    </a:lnB>
+                    <a:noFill/>
+                  </a:tcPr>
+                </a:tc>
+                <a:extLst>
+                  <a:ext uri="{0D108BD9-81ED-4DB2-BD59-A6C34878D82A}">
+                    <a16:rowId xmlns:a16="http://schemas.microsoft.com/office/drawing/2014/main" val="3827485140"/>
+                  </a:ext>
+                </a:extLst>
+              </a:tr>
+              <a:tr h="330767">
+                <a:tc>
+                  <a:txBody>
+                    <a:bodyPr/>
+                    <a:lstStyle/>
+                    <a:p>
+                      <a:pPr algn="ctr" fontAlgn="ctr">
+                        <a:buNone/>
+                      </a:pPr>
+                      <a:endParaRPr lang="en-US" sz="1100" b="0" i="0" u="none" strike="noStrike">
+                        <a:solidFill>
+                          <a:srgbClr val="000000"/>
+                        </a:solidFill>
+                        <a:effectLst/>
+                        <a:latin typeface="Aptos Narrow" panose="020B0004020202020204" pitchFamily="34" charset="0"/>
+                      </a:endParaRPr>
+                    </a:p>
+                  </a:txBody>
+                  <a:tcPr marL="9525" marR="9525" marT="9525" marB="0" anchor="ctr">
+                    <a:lnL w="12700" cap="flat" cmpd="sng" algn="ctr">
+                      <a:solidFill>
+                        <a:srgbClr val="000000"/>
+                      </a:solidFill>
+                      <a:prstDash val="solid"/>
+                      <a:round/>
+                      <a:headEnd type="none" w="med" len="med"/>
+                      <a:tailEnd type="none" w="med" len="med"/>
+                    </a:lnL>
+                    <a:lnR w="12700" cap="flat" cmpd="sng" algn="ctr">
+                      <a:solidFill>
+                        <a:srgbClr val="000000"/>
+                      </a:solidFill>
+                      <a:prstDash val="solid"/>
+                      <a:round/>
+                      <a:headEnd type="none" w="med" len="med"/>
+                      <a:tailEnd type="none" w="med" len="med"/>
+                    </a:lnR>
+                    <a:lnT w="12700" cap="flat" cmpd="sng" algn="ctr">
+                      <a:solidFill>
+                        <a:srgbClr val="000000"/>
+                      </a:solidFill>
+                      <a:prstDash val="solid"/>
+                      <a:round/>
+                      <a:headEnd type="none" w="med" len="med"/>
+                      <a:tailEnd type="none" w="med" len="med"/>
+                    </a:lnT>
+                    <a:lnB w="12700" cap="flat" cmpd="sng" algn="ctr">
+                      <a:solidFill>
+                        <a:srgbClr val="000000"/>
+                      </a:solidFill>
+                      <a:prstDash val="solid"/>
+                      <a:round/>
+                      <a:headEnd type="none" w="med" len="med"/>
+                      <a:tailEnd type="none" w="med" len="med"/>
+                    </a:lnB>
+                    <a:noFill/>
+                  </a:tcPr>
+                </a:tc>
+                <a:tc>
+                  <a:txBody>
+                    <a:bodyPr/>
+                    <a:lstStyle/>
+                    <a:p>
+                      <a:pPr algn="l" fontAlgn="ctr">
+                        <a:buNone/>
+                      </a:pPr>
+                      <a:endParaRPr lang="en-US" sz="1100" b="1" i="0" u="none" strike="noStrike">
+                        <a:solidFill>
+                          <a:srgbClr val="000000"/>
+                        </a:solidFill>
+                        <a:effectLst/>
+                        <a:latin typeface="Aptos Narrow" panose="020B0004020202020204" pitchFamily="34" charset="0"/>
+                      </a:endParaRPr>
+                    </a:p>
+                  </a:txBody>
+                  <a:tcPr anchor="ctr">
+                    <a:lnL w="12700" cap="flat" cmpd="sng" algn="ctr">
+                      <a:solidFill>
+                        <a:srgbClr val="000000"/>
+                      </a:solidFill>
+                      <a:prstDash val="solid"/>
+                      <a:round/>
+                      <a:headEnd type="none" w="med" len="med"/>
+                      <a:tailEnd type="none" w="med" len="med"/>
+                    </a:lnL>
+                    <a:lnR w="12700" cap="flat" cmpd="sng" algn="ctr">
+                      <a:solidFill>
+                        <a:srgbClr val="000000"/>
+                      </a:solidFill>
+                      <a:prstDash val="solid"/>
+                      <a:round/>
+                      <a:headEnd type="none" w="med" len="med"/>
+                      <a:tailEnd type="none" w="med" len="med"/>
+                    </a:lnR>
+                    <a:lnT w="12700" cap="flat" cmpd="sng" algn="ctr">
+                      <a:solidFill>
+                        <a:srgbClr val="000000"/>
+                      </a:solidFill>
+                      <a:prstDash val="solid"/>
+                      <a:round/>
+                      <a:headEnd type="none" w="med" len="med"/>
+                      <a:tailEnd type="none" w="med" len="med"/>
+                    </a:lnT>
+                    <a:lnB w="12700" cap="flat" cmpd="sng" algn="ctr">
+                      <a:solidFill>
+                        <a:srgbClr val="000000"/>
+                      </a:solidFill>
+                      <a:prstDash val="solid"/>
+                      <a:round/>
+                      <a:headEnd type="none" w="med" len="med"/>
+                      <a:tailEnd type="none" w="med" len="med"/>
+                    </a:lnB>
+                    <a:noFill/>
+                  </a:tcPr>
+                </a:tc>
+                <a:tc>
+                  <a:txBody>
+                    <a:bodyPr/>
+                    <a:lstStyle/>
+                    <a:p>
+                      <a:pPr algn="l" fontAlgn="ctr">
+                        <a:buNone/>
+                      </a:pPr>
+                      <a:endParaRPr lang="en-US" sz="1100" b="0" i="0" u="none" strike="noStrike" dirty="0">
+                        <a:solidFill>
+                          <a:srgbClr val="000000"/>
+                        </a:solidFill>
+                        <a:effectLst/>
+                        <a:latin typeface="Aptos Narrow" panose="020B0004020202020204" pitchFamily="34" charset="0"/>
+                      </a:endParaRPr>
+                    </a:p>
+                  </a:txBody>
+                  <a:tcPr anchor="ctr">
+                    <a:lnL w="12700" cap="flat" cmpd="sng" algn="ctr">
+                      <a:solidFill>
+                        <a:srgbClr val="000000"/>
+                      </a:solidFill>
+                      <a:prstDash val="solid"/>
+                      <a:round/>
+                      <a:headEnd type="none" w="med" len="med"/>
+                      <a:tailEnd type="none" w="med" len="med"/>
+                    </a:lnL>
+                    <a:lnR w="12700" cap="flat" cmpd="sng" algn="ctr">
+                      <a:solidFill>
+                        <a:srgbClr val="000000"/>
+                      </a:solidFill>
+                      <a:prstDash val="solid"/>
+                      <a:round/>
+                      <a:headEnd type="none" w="med" len="med"/>
+                      <a:tailEnd type="none" w="med" len="med"/>
+                    </a:lnR>
+                    <a:lnT w="12700" cap="flat" cmpd="sng" algn="ctr">
+                      <a:solidFill>
+                        <a:srgbClr val="000000"/>
+                      </a:solidFill>
+                      <a:prstDash val="solid"/>
+                      <a:round/>
+                      <a:headEnd type="none" w="med" len="med"/>
+                      <a:tailEnd type="none" w="med" len="med"/>
+                    </a:lnT>
+                    <a:lnB w="12700" cap="flat" cmpd="sng" algn="ctr">
+                      <a:solidFill>
+                        <a:srgbClr val="000000"/>
+                      </a:solidFill>
+                      <a:prstDash val="solid"/>
+                      <a:round/>
+                      <a:headEnd type="none" w="med" len="med"/>
+                      <a:tailEnd type="none" w="med" len="med"/>
+                    </a:lnB>
+                    <a:noFill/>
+                  </a:tcPr>
+                </a:tc>
+                <a:tc>
+                  <a:txBody>
+                    <a:bodyPr/>
+                    <a:lstStyle/>
+                    <a:p>
+                      <a:pPr algn="ctr" fontAlgn="ctr">
+                        <a:buNone/>
+                      </a:pPr>
+                      <a:endParaRPr lang="en-US" sz="1100" b="0" i="0" u="none" strike="noStrike" dirty="0">
+                        <a:solidFill>
+                          <a:srgbClr val="000000"/>
+                        </a:solidFill>
+                        <a:effectLst/>
+                        <a:latin typeface="Aptos Narrow" panose="020B0004020202020204" pitchFamily="34" charset="0"/>
+                      </a:endParaRPr>
+                    </a:p>
+                  </a:txBody>
+                  <a:tcPr marL="9525" marR="9525" marT="9525" marB="0" anchor="ctr">
+                    <a:lnL w="12700" cap="flat" cmpd="sng" algn="ctr">
+                      <a:solidFill>
+                        <a:srgbClr val="000000"/>
+                      </a:solidFill>
+                      <a:prstDash val="solid"/>
+                      <a:round/>
+                      <a:headEnd type="none" w="med" len="med"/>
+                      <a:tailEnd type="none" w="med" len="med"/>
+                    </a:lnL>
+                    <a:lnR w="12700" cap="flat" cmpd="sng" algn="ctr">
+                      <a:solidFill>
+                        <a:srgbClr val="000000"/>
+                      </a:solidFill>
+                      <a:prstDash val="solid"/>
+                      <a:round/>
+                      <a:headEnd type="none" w="med" len="med"/>
+                      <a:tailEnd type="none" w="med" len="med"/>
+                    </a:lnR>
+                    <a:lnT w="12700" cap="flat" cmpd="sng" algn="ctr">
+                      <a:solidFill>
+                        <a:srgbClr val="000000"/>
+                      </a:solidFill>
+                      <a:prstDash val="solid"/>
+                      <a:round/>
+                      <a:headEnd type="none" w="med" len="med"/>
+                      <a:tailEnd type="none" w="med" len="med"/>
+                    </a:lnT>
+                    <a:lnB w="12700" cap="flat" cmpd="sng" algn="ctr">
+                      <a:solidFill>
+                        <a:srgbClr val="000000"/>
+                      </a:solidFill>
+                      <a:prstDash val="solid"/>
+                      <a:round/>
+                      <a:headEnd type="none" w="med" len="med"/>
+                      <a:tailEnd type="none" w="med" len="med"/>
+                    </a:lnB>
+                    <a:noFill/>
+                  </a:tcPr>
+                </a:tc>
+                <a:extLst>
+                  <a:ext uri="{0D108BD9-81ED-4DB2-BD59-A6C34878D82A}">
+                    <a16:rowId xmlns:a16="http://schemas.microsoft.com/office/drawing/2014/main" val="3332240617"/>
+                  </a:ext>
+                </a:extLst>
+              </a:tr>
+              <a:tr h="330767">
+                <a:tc>
+                  <a:txBody>
+                    <a:bodyPr/>
+                    <a:lstStyle/>
+                    <a:p>
+                      <a:pPr algn="ctr" fontAlgn="ctr">
+                        <a:buNone/>
+                      </a:pPr>
+                      <a:endParaRPr lang="en-US" sz="1100" b="0" i="0" u="none" strike="noStrike" dirty="0">
+                        <a:solidFill>
+                          <a:srgbClr val="000000"/>
+                        </a:solidFill>
+                        <a:effectLst/>
+                        <a:latin typeface="Aptos Narrow" panose="020B0004020202020204" pitchFamily="34" charset="0"/>
+                      </a:endParaRPr>
+                    </a:p>
+                  </a:txBody>
+                  <a:tcPr marL="9525" marR="9525" marT="9525" marB="0" anchor="ctr">
+                    <a:lnL w="12700" cap="flat" cmpd="sng" algn="ctr">
+                      <a:solidFill>
+                        <a:srgbClr val="000000"/>
+                      </a:solidFill>
+                      <a:prstDash val="solid"/>
+                      <a:round/>
+                      <a:headEnd type="none" w="med" len="med"/>
+                      <a:tailEnd type="none" w="med" len="med"/>
+                    </a:lnL>
+                    <a:lnR w="12700" cap="flat" cmpd="sng" algn="ctr">
+                      <a:solidFill>
+                        <a:srgbClr val="000000"/>
+                      </a:solidFill>
+                      <a:prstDash val="solid"/>
+                      <a:round/>
+                      <a:headEnd type="none" w="med" len="med"/>
+                      <a:tailEnd type="none" w="med" len="med"/>
+                    </a:lnR>
+                    <a:lnT w="12700" cap="flat" cmpd="sng" algn="ctr">
+                      <a:solidFill>
+                        <a:srgbClr val="000000"/>
+                      </a:solidFill>
+                      <a:prstDash val="solid"/>
+                      <a:round/>
+                      <a:headEnd type="none" w="med" len="med"/>
+                      <a:tailEnd type="none" w="med" len="med"/>
+                    </a:lnT>
+                    <a:lnB w="12700" cap="flat" cmpd="sng" algn="ctr">
+                      <a:solidFill>
+                        <a:srgbClr val="000000"/>
+                      </a:solidFill>
+                      <a:prstDash val="solid"/>
+                      <a:round/>
+                      <a:headEnd type="none" w="med" len="med"/>
+                      <a:tailEnd type="none" w="med" len="med"/>
+                    </a:lnB>
+                    <a:noFill/>
+                  </a:tcPr>
+                </a:tc>
+                <a:tc>
+                  <a:txBody>
+                    <a:bodyPr/>
+                    <a:lstStyle/>
+                    <a:p>
+                      <a:pPr algn="l" fontAlgn="ctr">
+                        <a:buNone/>
+                      </a:pPr>
+                      <a:endParaRPr lang="en-US" sz="1100" b="1" i="0" u="none" strike="noStrike">
+                        <a:solidFill>
+                          <a:srgbClr val="000000"/>
+                        </a:solidFill>
+                        <a:effectLst/>
+                        <a:latin typeface="Aptos Narrow" panose="020B0004020202020204" pitchFamily="34" charset="0"/>
+                      </a:endParaRPr>
+                    </a:p>
+                  </a:txBody>
+                  <a:tcPr anchor="ctr">
+                    <a:lnL w="12700" cap="flat" cmpd="sng" algn="ctr">
+                      <a:solidFill>
+                        <a:srgbClr val="000000"/>
+                      </a:solidFill>
+                      <a:prstDash val="solid"/>
+                      <a:round/>
+                      <a:headEnd type="none" w="med" len="med"/>
+                      <a:tailEnd type="none" w="med" len="med"/>
+                    </a:lnL>
+                    <a:lnR w="12700" cap="flat" cmpd="sng" algn="ctr">
+                      <a:solidFill>
+                        <a:srgbClr val="000000"/>
+                      </a:solidFill>
+                      <a:prstDash val="solid"/>
+                      <a:round/>
+                      <a:headEnd type="none" w="med" len="med"/>
+                      <a:tailEnd type="none" w="med" len="med"/>
+                    </a:lnR>
+                    <a:lnT w="12700" cap="flat" cmpd="sng" algn="ctr">
+                      <a:solidFill>
+                        <a:srgbClr val="000000"/>
+                      </a:solidFill>
+                      <a:prstDash val="solid"/>
+                      <a:round/>
+                      <a:headEnd type="none" w="med" len="med"/>
+                      <a:tailEnd type="none" w="med" len="med"/>
+                    </a:lnT>
+                    <a:lnB w="12700" cap="flat" cmpd="sng" algn="ctr">
+                      <a:solidFill>
+                        <a:srgbClr val="000000"/>
+                      </a:solidFill>
+                      <a:prstDash val="solid"/>
+                      <a:round/>
+                      <a:headEnd type="none" w="med" len="med"/>
+                      <a:tailEnd type="none" w="med" len="med"/>
+                    </a:lnB>
+                    <a:noFill/>
+                  </a:tcPr>
+                </a:tc>
+                <a:tc>
+                  <a:txBody>
+                    <a:bodyPr/>
+                    <a:lstStyle/>
+                    <a:p>
+                      <a:pPr algn="l" fontAlgn="ctr">
+                        <a:buNone/>
+                      </a:pPr>
+                      <a:endParaRPr lang="en-US" sz="1100" b="0" i="0" u="none" strike="noStrike">
+                        <a:solidFill>
+                          <a:srgbClr val="000000"/>
+                        </a:solidFill>
+                        <a:effectLst/>
+                        <a:latin typeface="Aptos Narrow" panose="020B0004020202020204" pitchFamily="34" charset="0"/>
+                      </a:endParaRPr>
+                    </a:p>
+                  </a:txBody>
+                  <a:tcPr anchor="ctr">
+                    <a:lnL w="12700" cap="flat" cmpd="sng" algn="ctr">
+                      <a:solidFill>
+                        <a:srgbClr val="000000"/>
+                      </a:solidFill>
+                      <a:prstDash val="solid"/>
+                      <a:round/>
+                      <a:headEnd type="none" w="med" len="med"/>
+                      <a:tailEnd type="none" w="med" len="med"/>
+                    </a:lnL>
+                    <a:lnR w="12700" cap="flat" cmpd="sng" algn="ctr">
+                      <a:solidFill>
+                        <a:srgbClr val="000000"/>
+                      </a:solidFill>
+                      <a:prstDash val="solid"/>
+                      <a:round/>
+                      <a:headEnd type="none" w="med" len="med"/>
+                      <a:tailEnd type="none" w="med" len="med"/>
+                    </a:lnR>
+                    <a:lnT w="12700" cap="flat" cmpd="sng" algn="ctr">
+                      <a:solidFill>
+                        <a:srgbClr val="000000"/>
+                      </a:solidFill>
+                      <a:prstDash val="solid"/>
+                      <a:round/>
+                      <a:headEnd type="none" w="med" len="med"/>
+                      <a:tailEnd type="none" w="med" len="med"/>
+                    </a:lnT>
+                    <a:lnB w="12700" cap="flat" cmpd="sng" algn="ctr">
+                      <a:solidFill>
+                        <a:srgbClr val="000000"/>
+                      </a:solidFill>
+                      <a:prstDash val="solid"/>
+                      <a:round/>
+                      <a:headEnd type="none" w="med" len="med"/>
+                      <a:tailEnd type="none" w="med" len="med"/>
+                    </a:lnB>
+                    <a:noFill/>
+                  </a:tcPr>
+                </a:tc>
+                <a:tc>
+                  <a:txBody>
+                    <a:bodyPr/>
+                    <a:lstStyle/>
+                    <a:p>
+                      <a:pPr algn="ctr" fontAlgn="ctr">
+                        <a:buNone/>
+                      </a:pPr>
+                      <a:endParaRPr lang="en-US" sz="1100" b="0" i="0" u="none" strike="noStrike" dirty="0">
+                        <a:solidFill>
+                          <a:srgbClr val="000000"/>
+                        </a:solidFill>
+                        <a:effectLst/>
+                        <a:latin typeface="Aptos Narrow" panose="020B0004020202020204" pitchFamily="34" charset="0"/>
+                      </a:endParaRPr>
+                    </a:p>
+                  </a:txBody>
+                  <a:tcPr marL="9525" marR="9525" marT="9525" marB="0" anchor="ctr">
+                    <a:lnL w="12700" cap="flat" cmpd="sng" algn="ctr">
+                      <a:solidFill>
+                        <a:srgbClr val="000000"/>
+                      </a:solidFill>
+                      <a:prstDash val="solid"/>
+                      <a:round/>
+                      <a:headEnd type="none" w="med" len="med"/>
+                      <a:tailEnd type="none" w="med" len="med"/>
+                    </a:lnL>
+                    <a:lnR w="12700" cap="flat" cmpd="sng" algn="ctr">
+                      <a:solidFill>
+                        <a:srgbClr val="000000"/>
+                      </a:solidFill>
+                      <a:prstDash val="solid"/>
+                      <a:round/>
+                      <a:headEnd type="none" w="med" len="med"/>
+                      <a:tailEnd type="none" w="med" len="med"/>
+                    </a:lnR>
+                    <a:lnT w="12700" cap="flat" cmpd="sng" algn="ctr">
+                      <a:solidFill>
+                        <a:srgbClr val="000000"/>
+                      </a:solidFill>
+                      <a:prstDash val="solid"/>
+                      <a:round/>
+                      <a:headEnd type="none" w="med" len="med"/>
+                      <a:tailEnd type="none" w="med" len="med"/>
+                    </a:lnT>
+                    <a:lnB w="12700" cap="flat" cmpd="sng" algn="ctr">
+                      <a:solidFill>
+                        <a:srgbClr val="000000"/>
+                      </a:solidFill>
+                      <a:prstDash val="solid"/>
+                      <a:round/>
+                      <a:headEnd type="none" w="med" len="med"/>
+                      <a:tailEnd type="none" w="med" len="med"/>
+                    </a:lnB>
+                    <a:noFill/>
+                  </a:tcPr>
+                </a:tc>
+                <a:extLst>
+                  <a:ext uri="{0D108BD9-81ED-4DB2-BD59-A6C34878D82A}">
+                    <a16:rowId xmlns:a16="http://schemas.microsoft.com/office/drawing/2014/main" val="679488122"/>
+                  </a:ext>
+                </a:extLst>
+              </a:tr>
+              <a:tr h="330767">
+                <a:tc>
+                  <a:txBody>
+                    <a:bodyPr/>
+                    <a:lstStyle/>
+                    <a:p>
+                      <a:pPr algn="ctr" fontAlgn="ctr">
+                        <a:buNone/>
+                      </a:pPr>
+                      <a:endParaRPr lang="en-US" sz="1100" b="0" i="0" u="none" strike="noStrike">
+                        <a:solidFill>
+                          <a:srgbClr val="000000"/>
+                        </a:solidFill>
+                        <a:effectLst/>
+                        <a:latin typeface="Aptos Narrow" panose="020B0004020202020204" pitchFamily="34" charset="0"/>
+                      </a:endParaRPr>
+                    </a:p>
+                  </a:txBody>
+                  <a:tcPr marL="9525" marR="9525" marT="9525" marB="0" anchor="ctr">
+                    <a:lnL w="12700" cap="flat" cmpd="sng" algn="ctr">
+                      <a:solidFill>
+                        <a:srgbClr val="000000"/>
+                      </a:solidFill>
+                      <a:prstDash val="solid"/>
+                      <a:round/>
+                      <a:headEnd type="none" w="med" len="med"/>
+                      <a:tailEnd type="none" w="med" len="med"/>
+                    </a:lnL>
+                    <a:lnR w="12700" cap="flat" cmpd="sng" algn="ctr">
+                      <a:solidFill>
+                        <a:srgbClr val="000000"/>
+                      </a:solidFill>
+                      <a:prstDash val="solid"/>
+                      <a:round/>
+                      <a:headEnd type="none" w="med" len="med"/>
+                      <a:tailEnd type="none" w="med" len="med"/>
+                    </a:lnR>
+                    <a:lnT w="12700" cap="flat" cmpd="sng" algn="ctr">
+                      <a:solidFill>
+                        <a:srgbClr val="000000"/>
+                      </a:solidFill>
+                      <a:prstDash val="solid"/>
+                      <a:round/>
+                      <a:headEnd type="none" w="med" len="med"/>
+                      <a:tailEnd type="none" w="med" len="med"/>
+                    </a:lnT>
+                    <a:lnB w="12700" cap="flat" cmpd="sng" algn="ctr">
+                      <a:solidFill>
+                        <a:srgbClr val="000000"/>
+                      </a:solidFill>
+                      <a:prstDash val="solid"/>
+                      <a:round/>
+                      <a:headEnd type="none" w="med" len="med"/>
+                      <a:tailEnd type="none" w="med" len="med"/>
+                    </a:lnB>
+                    <a:noFill/>
+                  </a:tcPr>
+                </a:tc>
+                <a:tc>
+                  <a:txBody>
+                    <a:bodyPr/>
+                    <a:lstStyle/>
+                    <a:p>
+                      <a:pPr algn="l" fontAlgn="ctr">
+                        <a:buNone/>
+                      </a:pPr>
+                      <a:endParaRPr lang="en-US" sz="1100" b="1" i="0" u="none" strike="noStrike" dirty="0">
+                        <a:solidFill>
+                          <a:srgbClr val="000000"/>
+                        </a:solidFill>
+                        <a:effectLst/>
+                        <a:latin typeface="Aptos Narrow" panose="020B0004020202020204" pitchFamily="34" charset="0"/>
+                      </a:endParaRPr>
+                    </a:p>
+                  </a:txBody>
+                  <a:tcPr anchor="ctr">
+                    <a:lnL w="12700" cap="flat" cmpd="sng" algn="ctr">
+                      <a:solidFill>
+                        <a:srgbClr val="000000"/>
+                      </a:solidFill>
+                      <a:prstDash val="solid"/>
+                      <a:round/>
+                      <a:headEnd type="none" w="med" len="med"/>
+                      <a:tailEnd type="none" w="med" len="med"/>
+                    </a:lnL>
+                    <a:lnR w="12700" cap="flat" cmpd="sng" algn="ctr">
+                      <a:solidFill>
+                        <a:srgbClr val="000000"/>
+                      </a:solidFill>
+                      <a:prstDash val="solid"/>
+                      <a:round/>
+                      <a:headEnd type="none" w="med" len="med"/>
+                      <a:tailEnd type="none" w="med" len="med"/>
+                    </a:lnR>
+                    <a:lnT w="12700" cap="flat" cmpd="sng" algn="ctr">
+                      <a:solidFill>
+                        <a:srgbClr val="000000"/>
+                      </a:solidFill>
+                      <a:prstDash val="solid"/>
+                      <a:round/>
+                      <a:headEnd type="none" w="med" len="med"/>
+                      <a:tailEnd type="none" w="med" len="med"/>
+                    </a:lnT>
+                    <a:lnB w="12700" cap="flat" cmpd="sng" algn="ctr">
+                      <a:solidFill>
+                        <a:srgbClr val="000000"/>
+                      </a:solidFill>
+                      <a:prstDash val="solid"/>
+                      <a:round/>
+                      <a:headEnd type="none" w="med" len="med"/>
+                      <a:tailEnd type="none" w="med" len="med"/>
+                    </a:lnB>
+                    <a:noFill/>
+                  </a:tcPr>
+                </a:tc>
+                <a:tc>
+                  <a:txBody>
+                    <a:bodyPr/>
+                    <a:lstStyle/>
+                    <a:p>
+                      <a:pPr algn="l" fontAlgn="ctr">
+                        <a:buNone/>
+                      </a:pPr>
+                      <a:endParaRPr lang="en-US" sz="1100" b="0" i="0" u="none" strike="noStrike">
+                        <a:solidFill>
+                          <a:srgbClr val="000000"/>
+                        </a:solidFill>
+                        <a:effectLst/>
+                        <a:latin typeface="Aptos Narrow" panose="020B0004020202020204" pitchFamily="34" charset="0"/>
+                      </a:endParaRPr>
+                    </a:p>
+                  </a:txBody>
+                  <a:tcPr anchor="ctr">
+                    <a:lnL w="12700" cap="flat" cmpd="sng" algn="ctr">
+                      <a:solidFill>
+                        <a:srgbClr val="000000"/>
+                      </a:solidFill>
+                      <a:prstDash val="solid"/>
+                      <a:round/>
+                      <a:headEnd type="none" w="med" len="med"/>
+                      <a:tailEnd type="none" w="med" len="med"/>
+                    </a:lnL>
+                    <a:lnR w="12700" cap="flat" cmpd="sng" algn="ctr">
+                      <a:solidFill>
+                        <a:srgbClr val="000000"/>
+                      </a:solidFill>
+                      <a:prstDash val="solid"/>
+                      <a:round/>
+                      <a:headEnd type="none" w="med" len="med"/>
+                      <a:tailEnd type="none" w="med" len="med"/>
+                    </a:lnR>
+                    <a:lnT w="12700" cap="flat" cmpd="sng" algn="ctr">
+                      <a:solidFill>
+                        <a:srgbClr val="000000"/>
+                      </a:solidFill>
+                      <a:prstDash val="solid"/>
+                      <a:round/>
+                      <a:headEnd type="none" w="med" len="med"/>
+                      <a:tailEnd type="none" w="med" len="med"/>
+                    </a:lnT>
+                    <a:lnB w="12700" cap="flat" cmpd="sng" algn="ctr">
+                      <a:solidFill>
+                        <a:srgbClr val="000000"/>
+                      </a:solidFill>
+                      <a:prstDash val="solid"/>
+                      <a:round/>
+                      <a:headEnd type="none" w="med" len="med"/>
+                      <a:tailEnd type="none" w="med" len="med"/>
+                    </a:lnB>
+                    <a:noFill/>
+                  </a:tcPr>
+                </a:tc>
+                <a:tc>
+                  <a:txBody>
+                    <a:bodyPr/>
+                    <a:lstStyle/>
+                    <a:p>
+                      <a:pPr algn="ctr" fontAlgn="ctr">
+                        <a:buNone/>
+                      </a:pPr>
+                      <a:endParaRPr lang="en-US" sz="1100" b="0" i="0" u="none" strike="noStrike" dirty="0">
+                        <a:solidFill>
+                          <a:srgbClr val="000000"/>
+                        </a:solidFill>
+                        <a:effectLst/>
+                        <a:latin typeface="Aptos Narrow" panose="020B0004020202020204" pitchFamily="34" charset="0"/>
+                      </a:endParaRPr>
+                    </a:p>
+                  </a:txBody>
+                  <a:tcPr marL="9525" marR="9525" marT="9525" marB="0" anchor="ctr">
+                    <a:lnL w="12700" cap="flat" cmpd="sng" algn="ctr">
+                      <a:solidFill>
+                        <a:srgbClr val="000000"/>
+                      </a:solidFill>
+                      <a:prstDash val="solid"/>
+                      <a:round/>
+                      <a:headEnd type="none" w="med" len="med"/>
+                      <a:tailEnd type="none" w="med" len="med"/>
+                    </a:lnL>
+                    <a:lnR w="12700" cap="flat" cmpd="sng" algn="ctr">
+                      <a:solidFill>
+                        <a:srgbClr val="000000"/>
+                      </a:solidFill>
+                      <a:prstDash val="solid"/>
+                      <a:round/>
+                      <a:headEnd type="none" w="med" len="med"/>
+                      <a:tailEnd type="none" w="med" len="med"/>
+                    </a:lnR>
+                    <a:lnT w="12700" cap="flat" cmpd="sng" algn="ctr">
+                      <a:solidFill>
+                        <a:srgbClr val="000000"/>
+                      </a:solidFill>
+                      <a:prstDash val="solid"/>
+                      <a:round/>
+                      <a:headEnd type="none" w="med" len="med"/>
+                      <a:tailEnd type="none" w="med" len="med"/>
+                    </a:lnT>
+                    <a:lnB w="12700" cap="flat" cmpd="sng" algn="ctr">
+                      <a:solidFill>
+                        <a:srgbClr val="000000"/>
+                      </a:solidFill>
+                      <a:prstDash val="solid"/>
+                      <a:round/>
+                      <a:headEnd type="none" w="med" len="med"/>
+                      <a:tailEnd type="none" w="med" len="med"/>
+                    </a:lnB>
+                    <a:noFill/>
+                  </a:tcPr>
+                </a:tc>
+                <a:extLst>
+                  <a:ext uri="{0D108BD9-81ED-4DB2-BD59-A6C34878D82A}">
+                    <a16:rowId xmlns:a16="http://schemas.microsoft.com/office/drawing/2014/main" val="2291028341"/>
+                  </a:ext>
+                </a:extLst>
+              </a:tr>
+              <a:tr h="330767">
+                <a:tc>
+                  <a:txBody>
+                    <a:bodyPr/>
+                    <a:lstStyle/>
+                    <a:p>
+                      <a:pPr algn="ctr" fontAlgn="ctr">
+                        <a:buNone/>
+                      </a:pPr>
+                      <a:endParaRPr lang="en-US" sz="1100" b="0" i="0" u="none" strike="noStrike">
+                        <a:solidFill>
+                          <a:srgbClr val="000000"/>
+                        </a:solidFill>
+                        <a:effectLst/>
+                        <a:latin typeface="Aptos Narrow" panose="020B0004020202020204" pitchFamily="34" charset="0"/>
+                      </a:endParaRPr>
+                    </a:p>
+                  </a:txBody>
+                  <a:tcPr marL="9525" marR="9525" marT="9525" marB="0" anchor="ctr">
+                    <a:lnL w="12700" cap="flat" cmpd="sng" algn="ctr">
+                      <a:solidFill>
+                        <a:srgbClr val="000000"/>
+                      </a:solidFill>
+                      <a:prstDash val="solid"/>
+                      <a:round/>
+                      <a:headEnd type="none" w="med" len="med"/>
+                      <a:tailEnd type="none" w="med" len="med"/>
+                    </a:lnL>
+                    <a:lnR w="12700" cap="flat" cmpd="sng" algn="ctr">
+                      <a:solidFill>
+                        <a:srgbClr val="000000"/>
+                      </a:solidFill>
+                      <a:prstDash val="solid"/>
+                      <a:round/>
+                      <a:headEnd type="none" w="med" len="med"/>
+                      <a:tailEnd type="none" w="med" len="med"/>
+                    </a:lnR>
+                    <a:lnT w="12700" cap="flat" cmpd="sng" algn="ctr">
+                      <a:solidFill>
+                        <a:srgbClr val="000000"/>
+                      </a:solidFill>
+                      <a:prstDash val="solid"/>
+                      <a:round/>
+                      <a:headEnd type="none" w="med" len="med"/>
+                      <a:tailEnd type="none" w="med" len="med"/>
+                    </a:lnT>
+                    <a:lnB w="12700" cap="flat" cmpd="sng" algn="ctr">
+                      <a:solidFill>
+                        <a:srgbClr val="000000"/>
+                      </a:solidFill>
+                      <a:prstDash val="solid"/>
+                      <a:round/>
+                      <a:headEnd type="none" w="med" len="med"/>
+                      <a:tailEnd type="none" w="med" len="med"/>
+                    </a:lnB>
+                    <a:noFill/>
+                  </a:tcPr>
+                </a:tc>
+                <a:tc>
+                  <a:txBody>
+                    <a:bodyPr/>
+                    <a:lstStyle/>
+                    <a:p>
+                      <a:pPr algn="l" fontAlgn="ctr">
+                        <a:buNone/>
+                      </a:pPr>
+                      <a:endParaRPr lang="en-US" sz="1100" b="1" i="0" u="none" strike="noStrike" dirty="0">
+                        <a:solidFill>
+                          <a:srgbClr val="000000"/>
+                        </a:solidFill>
+                        <a:effectLst/>
+                        <a:latin typeface="Aptos Narrow" panose="020B0004020202020204" pitchFamily="34" charset="0"/>
+                      </a:endParaRPr>
+                    </a:p>
+                  </a:txBody>
+                  <a:tcPr anchor="ctr">
+                    <a:lnL w="12700" cap="flat" cmpd="sng" algn="ctr">
+                      <a:solidFill>
+                        <a:srgbClr val="000000"/>
+                      </a:solidFill>
+                      <a:prstDash val="solid"/>
+                      <a:round/>
+                      <a:headEnd type="none" w="med" len="med"/>
+                      <a:tailEnd type="none" w="med" len="med"/>
+                    </a:lnL>
+                    <a:lnR w="12700" cap="flat" cmpd="sng" algn="ctr">
+                      <a:solidFill>
+                        <a:srgbClr val="000000"/>
+                      </a:solidFill>
+                      <a:prstDash val="solid"/>
+                      <a:round/>
+                      <a:headEnd type="none" w="med" len="med"/>
+                      <a:tailEnd type="none" w="med" len="med"/>
+                    </a:lnR>
+                    <a:lnT w="12700" cap="flat" cmpd="sng" algn="ctr">
+                      <a:solidFill>
+                        <a:srgbClr val="000000"/>
+                      </a:solidFill>
+                      <a:prstDash val="solid"/>
+                      <a:round/>
+                      <a:headEnd type="none" w="med" len="med"/>
+                      <a:tailEnd type="none" w="med" len="med"/>
+                    </a:lnT>
+                    <a:lnB w="12700" cap="flat" cmpd="sng" algn="ctr">
+                      <a:solidFill>
+                        <a:srgbClr val="000000"/>
+                      </a:solidFill>
+                      <a:prstDash val="solid"/>
+                      <a:round/>
+                      <a:headEnd type="none" w="med" len="med"/>
+                      <a:tailEnd type="none" w="med" len="med"/>
+                    </a:lnB>
+                    <a:noFill/>
+                  </a:tcPr>
+                </a:tc>
+                <a:tc>
+                  <a:txBody>
+                    <a:bodyPr/>
+                    <a:lstStyle/>
+                    <a:p>
+                      <a:pPr algn="l" fontAlgn="ctr">
+                        <a:buNone/>
+                      </a:pPr>
+                      <a:endParaRPr lang="en-US" sz="1100" b="0" i="0" u="none" strike="noStrike">
+                        <a:solidFill>
+                          <a:srgbClr val="000000"/>
+                        </a:solidFill>
+                        <a:effectLst/>
+                        <a:latin typeface="Aptos Narrow" panose="020B0004020202020204" pitchFamily="34" charset="0"/>
+                      </a:endParaRPr>
+                    </a:p>
+                  </a:txBody>
+                  <a:tcPr anchor="ctr">
+                    <a:lnL w="12700" cap="flat" cmpd="sng" algn="ctr">
+                      <a:solidFill>
+                        <a:srgbClr val="000000"/>
+                      </a:solidFill>
+                      <a:prstDash val="solid"/>
+                      <a:round/>
+                      <a:headEnd type="none" w="med" len="med"/>
+                      <a:tailEnd type="none" w="med" len="med"/>
+                    </a:lnL>
+                    <a:lnR w="12700" cap="flat" cmpd="sng" algn="ctr">
+                      <a:solidFill>
+                        <a:srgbClr val="000000"/>
+                      </a:solidFill>
+                      <a:prstDash val="solid"/>
+                      <a:round/>
+                      <a:headEnd type="none" w="med" len="med"/>
+                      <a:tailEnd type="none" w="med" len="med"/>
+                    </a:lnR>
+                    <a:lnT w="12700" cap="flat" cmpd="sng" algn="ctr">
+                      <a:solidFill>
+                        <a:srgbClr val="000000"/>
+                      </a:solidFill>
+                      <a:prstDash val="solid"/>
+                      <a:round/>
+                      <a:headEnd type="none" w="med" len="med"/>
+                      <a:tailEnd type="none" w="med" len="med"/>
+                    </a:lnT>
+                    <a:lnB w="12700" cap="flat" cmpd="sng" algn="ctr">
+                      <a:solidFill>
+                        <a:srgbClr val="000000"/>
+                      </a:solidFill>
+                      <a:prstDash val="solid"/>
+                      <a:round/>
+                      <a:headEnd type="none" w="med" len="med"/>
+                      <a:tailEnd type="none" w="med" len="med"/>
+                    </a:lnB>
+                    <a:noFill/>
+                  </a:tcPr>
+                </a:tc>
+                <a:tc>
+                  <a:txBody>
+                    <a:bodyPr/>
+                    <a:lstStyle/>
+                    <a:p>
+                      <a:pPr algn="ctr" fontAlgn="ctr">
+                        <a:buNone/>
+                      </a:pPr>
+                      <a:endParaRPr lang="en-US" sz="1100" b="0" i="0" u="none" strike="noStrike" dirty="0">
+                        <a:solidFill>
+                          <a:srgbClr val="000000"/>
+                        </a:solidFill>
+                        <a:effectLst/>
+                        <a:latin typeface="Aptos Narrow" panose="020B0004020202020204" pitchFamily="34" charset="0"/>
+                      </a:endParaRPr>
+                    </a:p>
+                  </a:txBody>
+                  <a:tcPr marL="9525" marR="9525" marT="9525" marB="0" anchor="ctr">
+                    <a:lnL w="12700" cap="flat" cmpd="sng" algn="ctr">
+                      <a:solidFill>
+                        <a:srgbClr val="000000"/>
+                      </a:solidFill>
+                      <a:prstDash val="solid"/>
+                      <a:round/>
+                      <a:headEnd type="none" w="med" len="med"/>
+                      <a:tailEnd type="none" w="med" len="med"/>
+                    </a:lnL>
+                    <a:lnR w="12700" cap="flat" cmpd="sng" algn="ctr">
+                      <a:solidFill>
+                        <a:srgbClr val="000000"/>
+                      </a:solidFill>
+                      <a:prstDash val="solid"/>
+                      <a:round/>
+                      <a:headEnd type="none" w="med" len="med"/>
+                      <a:tailEnd type="none" w="med" len="med"/>
+                    </a:lnR>
+                    <a:lnT w="12700" cap="flat" cmpd="sng" algn="ctr">
+                      <a:solidFill>
+                        <a:srgbClr val="000000"/>
+                      </a:solidFill>
+                      <a:prstDash val="solid"/>
+                      <a:round/>
+                      <a:headEnd type="none" w="med" len="med"/>
+                      <a:tailEnd type="none" w="med" len="med"/>
+                    </a:lnT>
+                    <a:lnB w="12700" cap="flat" cmpd="sng" algn="ctr">
+                      <a:solidFill>
+                        <a:srgbClr val="000000"/>
+                      </a:solidFill>
+                      <a:prstDash val="solid"/>
+                      <a:round/>
+                      <a:headEnd type="none" w="med" len="med"/>
+                      <a:tailEnd type="none" w="med" len="med"/>
+                    </a:lnB>
+                    <a:noFill/>
+                  </a:tcPr>
+                </a:tc>
+                <a:extLst>
+                  <a:ext uri="{0D108BD9-81ED-4DB2-BD59-A6C34878D82A}">
+                    <a16:rowId xmlns:a16="http://schemas.microsoft.com/office/drawing/2014/main" val="3433819517"/>
+                  </a:ext>
+                </a:extLst>
+              </a:tr>
+              <a:tr h="330767">
+                <a:tc>
+                  <a:txBody>
+                    <a:bodyPr/>
+                    <a:lstStyle/>
+                    <a:p>
+                      <a:pPr algn="ctr" fontAlgn="ctr">
+                        <a:buNone/>
+                      </a:pPr>
+                      <a:endParaRPr lang="en-US" sz="1100" b="0" i="0" u="none" strike="noStrike">
+                        <a:solidFill>
+                          <a:srgbClr val="000000"/>
+                        </a:solidFill>
+                        <a:effectLst/>
+                        <a:latin typeface="Aptos Narrow" panose="020B0004020202020204" pitchFamily="34" charset="0"/>
+                      </a:endParaRPr>
+                    </a:p>
+                  </a:txBody>
+                  <a:tcPr marL="9525" marR="9525" marT="9525" marB="0" anchor="ctr">
+                    <a:lnL w="12700" cap="flat" cmpd="sng" algn="ctr">
+                      <a:solidFill>
+                        <a:srgbClr val="000000"/>
+                      </a:solidFill>
+                      <a:prstDash val="solid"/>
+                      <a:round/>
+                      <a:headEnd type="none" w="med" len="med"/>
+                      <a:tailEnd type="none" w="med" len="med"/>
+                    </a:lnL>
+                    <a:lnR w="12700" cap="flat" cmpd="sng" algn="ctr">
+                      <a:solidFill>
+                        <a:srgbClr val="000000"/>
+                      </a:solidFill>
+                      <a:prstDash val="solid"/>
+                      <a:round/>
+                      <a:headEnd type="none" w="med" len="med"/>
+                      <a:tailEnd type="none" w="med" len="med"/>
+                    </a:lnR>
+                    <a:lnT w="12700" cap="flat" cmpd="sng" algn="ctr">
+                      <a:solidFill>
+                        <a:srgbClr val="000000"/>
+                      </a:solidFill>
+                      <a:prstDash val="solid"/>
+                      <a:round/>
+                      <a:headEnd type="none" w="med" len="med"/>
+                      <a:tailEnd type="none" w="med" len="med"/>
+                    </a:lnT>
+                    <a:lnB w="12700" cap="flat" cmpd="sng" algn="ctr">
+                      <a:solidFill>
+                        <a:srgbClr val="000000"/>
+                      </a:solidFill>
+                      <a:prstDash val="solid"/>
+                      <a:round/>
+                      <a:headEnd type="none" w="med" len="med"/>
+                      <a:tailEnd type="none" w="med" len="med"/>
+                    </a:lnB>
+                    <a:noFill/>
+                  </a:tcPr>
+                </a:tc>
+                <a:tc>
+                  <a:txBody>
+                    <a:bodyPr/>
+                    <a:lstStyle/>
+                    <a:p>
+                      <a:pPr algn="l" fontAlgn="ctr">
+                        <a:buNone/>
+                      </a:pPr>
+                      <a:endParaRPr lang="en-US" sz="1100" b="1" i="0" u="none" strike="noStrike">
+                        <a:solidFill>
+                          <a:srgbClr val="000000"/>
+                        </a:solidFill>
+                        <a:effectLst/>
+                        <a:latin typeface="Aptos Narrow" panose="020B0004020202020204" pitchFamily="34" charset="0"/>
+                      </a:endParaRPr>
+                    </a:p>
+                  </a:txBody>
+                  <a:tcPr anchor="ctr">
+                    <a:lnL w="12700" cap="flat" cmpd="sng" algn="ctr">
+                      <a:solidFill>
+                        <a:srgbClr val="000000"/>
+                      </a:solidFill>
+                      <a:prstDash val="solid"/>
+                      <a:round/>
+                      <a:headEnd type="none" w="med" len="med"/>
+                      <a:tailEnd type="none" w="med" len="med"/>
+                    </a:lnL>
+                    <a:lnR w="12700" cap="flat" cmpd="sng" algn="ctr">
+                      <a:solidFill>
+                        <a:srgbClr val="000000"/>
+                      </a:solidFill>
+                      <a:prstDash val="solid"/>
+                      <a:round/>
+                      <a:headEnd type="none" w="med" len="med"/>
+                      <a:tailEnd type="none" w="med" len="med"/>
+                    </a:lnR>
+                    <a:lnT w="12700" cap="flat" cmpd="sng" algn="ctr">
+                      <a:solidFill>
+                        <a:srgbClr val="000000"/>
+                      </a:solidFill>
+                      <a:prstDash val="solid"/>
+                      <a:round/>
+                      <a:headEnd type="none" w="med" len="med"/>
+                      <a:tailEnd type="none" w="med" len="med"/>
+                    </a:lnT>
+                    <a:lnB w="12700" cap="flat" cmpd="sng" algn="ctr">
+                      <a:solidFill>
+                        <a:srgbClr val="000000"/>
+                      </a:solidFill>
+                      <a:prstDash val="solid"/>
+                      <a:round/>
+                      <a:headEnd type="none" w="med" len="med"/>
+                      <a:tailEnd type="none" w="med" len="med"/>
+                    </a:lnB>
+                    <a:noFill/>
+                  </a:tcPr>
+                </a:tc>
+                <a:tc>
+                  <a:txBody>
+                    <a:bodyPr/>
+                    <a:lstStyle/>
+                    <a:p>
+                      <a:pPr algn="l" fontAlgn="ctr">
+                        <a:buNone/>
+                      </a:pPr>
+                      <a:endParaRPr lang="en-US" sz="1100" b="0" i="0" u="none" strike="noStrike">
+                        <a:solidFill>
+                          <a:srgbClr val="000000"/>
+                        </a:solidFill>
+                        <a:effectLst/>
+                        <a:latin typeface="Aptos Narrow" panose="020B0004020202020204" pitchFamily="34" charset="0"/>
+                      </a:endParaRPr>
+                    </a:p>
+                  </a:txBody>
+                  <a:tcPr anchor="ctr">
+                    <a:lnL w="12700" cap="flat" cmpd="sng" algn="ctr">
+                      <a:solidFill>
+                        <a:srgbClr val="000000"/>
+                      </a:solidFill>
+                      <a:prstDash val="solid"/>
+                      <a:round/>
+                      <a:headEnd type="none" w="med" len="med"/>
+                      <a:tailEnd type="none" w="med" len="med"/>
+                    </a:lnL>
+                    <a:lnR w="12700" cap="flat" cmpd="sng" algn="ctr">
+                      <a:solidFill>
+                        <a:srgbClr val="000000"/>
+                      </a:solidFill>
+                      <a:prstDash val="solid"/>
+                      <a:round/>
+                      <a:headEnd type="none" w="med" len="med"/>
+                      <a:tailEnd type="none" w="med" len="med"/>
+                    </a:lnR>
+                    <a:lnT w="12700" cap="flat" cmpd="sng" algn="ctr">
+                      <a:solidFill>
+                        <a:srgbClr val="000000"/>
+                      </a:solidFill>
+                      <a:prstDash val="solid"/>
+                      <a:round/>
+                      <a:headEnd type="none" w="med" len="med"/>
+                      <a:tailEnd type="none" w="med" len="med"/>
+                    </a:lnT>
+                    <a:lnB w="12700" cap="flat" cmpd="sng" algn="ctr">
+                      <a:solidFill>
+                        <a:srgbClr val="000000"/>
+                      </a:solidFill>
+                      <a:prstDash val="solid"/>
+                      <a:round/>
+                      <a:headEnd type="none" w="med" len="med"/>
+                      <a:tailEnd type="none" w="med" len="med"/>
+                    </a:lnB>
+                    <a:noFill/>
+                  </a:tcPr>
+                </a:tc>
+                <a:tc>
+                  <a:txBody>
+                    <a:bodyPr/>
+                    <a:lstStyle/>
+                    <a:p>
+                      <a:pPr algn="ctr" fontAlgn="ctr">
+                        <a:buNone/>
+                      </a:pPr>
+                      <a:endParaRPr lang="en-US" sz="1100" b="0" i="0" u="none" strike="noStrike" dirty="0">
+                        <a:solidFill>
+                          <a:srgbClr val="000000"/>
+                        </a:solidFill>
+                        <a:effectLst/>
+                        <a:latin typeface="Aptos Narrow" panose="020B0004020202020204" pitchFamily="34" charset="0"/>
+                      </a:endParaRPr>
+                    </a:p>
+                  </a:txBody>
+                  <a:tcPr marL="9525" marR="9525" marT="9525" marB="0" anchor="ctr">
+                    <a:lnL w="12700" cap="flat" cmpd="sng" algn="ctr">
+                      <a:solidFill>
+                        <a:srgbClr val="000000"/>
+                      </a:solidFill>
+                      <a:prstDash val="solid"/>
+                      <a:round/>
+                      <a:headEnd type="none" w="med" len="med"/>
+                      <a:tailEnd type="none" w="med" len="med"/>
+                    </a:lnL>
+                    <a:lnR w="12700" cap="flat" cmpd="sng" algn="ctr">
+                      <a:solidFill>
+                        <a:srgbClr val="000000"/>
+                      </a:solidFill>
+                      <a:prstDash val="solid"/>
+                      <a:round/>
+                      <a:headEnd type="none" w="med" len="med"/>
+                      <a:tailEnd type="none" w="med" len="med"/>
+                    </a:lnR>
+                    <a:lnT w="12700" cap="flat" cmpd="sng" algn="ctr">
+                      <a:solidFill>
+                        <a:srgbClr val="000000"/>
+                      </a:solidFill>
+                      <a:prstDash val="solid"/>
+                      <a:round/>
+                      <a:headEnd type="none" w="med" len="med"/>
+                      <a:tailEnd type="none" w="med" len="med"/>
+                    </a:lnT>
+                    <a:lnB w="12700" cap="flat" cmpd="sng" algn="ctr">
+                      <a:solidFill>
+                        <a:srgbClr val="000000"/>
+                      </a:solidFill>
+                      <a:prstDash val="solid"/>
+                      <a:round/>
+                      <a:headEnd type="none" w="med" len="med"/>
+                      <a:tailEnd type="none" w="med" len="med"/>
+                    </a:lnB>
+                    <a:noFill/>
+                  </a:tcPr>
+                </a:tc>
+                <a:extLst>
+                  <a:ext uri="{0D108BD9-81ED-4DB2-BD59-A6C34878D82A}">
+                    <a16:rowId xmlns:a16="http://schemas.microsoft.com/office/drawing/2014/main" val="259614610"/>
+                  </a:ext>
+                </a:extLst>
+              </a:tr>
+              <a:tr h="330767">
+                <a:tc>
+                  <a:txBody>
+                    <a:bodyPr/>
+                    <a:lstStyle/>
+                    <a:p>
+                      <a:pPr algn="ctr" fontAlgn="ctr">
+                        <a:buNone/>
+                      </a:pPr>
+                      <a:endParaRPr lang="en-US" sz="1100" b="0" i="0" u="none" strike="noStrike">
+                        <a:solidFill>
+                          <a:srgbClr val="000000"/>
+                        </a:solidFill>
+                        <a:effectLst/>
+                        <a:latin typeface="Aptos Narrow" panose="020B0004020202020204" pitchFamily="34" charset="0"/>
+                      </a:endParaRPr>
+                    </a:p>
+                  </a:txBody>
+                  <a:tcPr marL="9525" marR="9525" marT="9525" marB="0" anchor="ctr">
+                    <a:lnL w="12700" cap="flat" cmpd="sng" algn="ctr">
+                      <a:solidFill>
+                        <a:srgbClr val="000000"/>
+                      </a:solidFill>
+                      <a:prstDash val="solid"/>
+                      <a:round/>
+                      <a:headEnd type="none" w="med" len="med"/>
+                      <a:tailEnd type="none" w="med" len="med"/>
+                    </a:lnL>
+                    <a:lnR w="12700" cap="flat" cmpd="sng" algn="ctr">
+                      <a:solidFill>
+                        <a:srgbClr val="000000"/>
+                      </a:solidFill>
+                      <a:prstDash val="solid"/>
+                      <a:round/>
+                      <a:headEnd type="none" w="med" len="med"/>
+                      <a:tailEnd type="none" w="med" len="med"/>
+                    </a:lnR>
+                    <a:lnT w="12700" cap="flat" cmpd="sng" algn="ctr">
+                      <a:solidFill>
+                        <a:srgbClr val="000000"/>
+                      </a:solidFill>
+                      <a:prstDash val="solid"/>
+                      <a:round/>
+                      <a:headEnd type="none" w="med" len="med"/>
+                      <a:tailEnd type="none" w="med" len="med"/>
+                    </a:lnT>
+                    <a:lnB w="12700" cap="flat" cmpd="sng" algn="ctr">
+                      <a:solidFill>
+                        <a:srgbClr val="000000"/>
+                      </a:solidFill>
+                      <a:prstDash val="solid"/>
+                      <a:round/>
+                      <a:headEnd type="none" w="med" len="med"/>
+                      <a:tailEnd type="none" w="med" len="med"/>
+                    </a:lnB>
+                    <a:noFill/>
+                  </a:tcPr>
+                </a:tc>
+                <a:tc>
+                  <a:txBody>
+                    <a:bodyPr/>
+                    <a:lstStyle/>
+                    <a:p>
+                      <a:pPr algn="l" fontAlgn="ctr">
+                        <a:buNone/>
+                      </a:pPr>
+                      <a:endParaRPr lang="en-US" sz="1100" b="1" i="0" u="none" strike="noStrike" dirty="0">
+                        <a:solidFill>
+                          <a:srgbClr val="000000"/>
+                        </a:solidFill>
+                        <a:effectLst/>
+                        <a:latin typeface="Aptos Narrow" panose="020B0004020202020204" pitchFamily="34" charset="0"/>
+                      </a:endParaRPr>
+                    </a:p>
+                  </a:txBody>
+                  <a:tcPr anchor="ctr">
+                    <a:lnL w="12700" cap="flat" cmpd="sng" algn="ctr">
+                      <a:solidFill>
+                        <a:srgbClr val="000000"/>
+                      </a:solidFill>
+                      <a:prstDash val="solid"/>
+                      <a:round/>
+                      <a:headEnd type="none" w="med" len="med"/>
+                      <a:tailEnd type="none" w="med" len="med"/>
+                    </a:lnL>
+                    <a:lnR w="12700" cap="flat" cmpd="sng" algn="ctr">
+                      <a:solidFill>
+                        <a:srgbClr val="000000"/>
+                      </a:solidFill>
+                      <a:prstDash val="solid"/>
+                      <a:round/>
+                      <a:headEnd type="none" w="med" len="med"/>
+                      <a:tailEnd type="none" w="med" len="med"/>
+                    </a:lnR>
+                    <a:lnT w="12700" cap="flat" cmpd="sng" algn="ctr">
+                      <a:solidFill>
+                        <a:srgbClr val="000000"/>
+                      </a:solidFill>
+                      <a:prstDash val="solid"/>
+                      <a:round/>
+                      <a:headEnd type="none" w="med" len="med"/>
+                      <a:tailEnd type="none" w="med" len="med"/>
+                    </a:lnT>
+                    <a:lnB w="12700" cap="flat" cmpd="sng" algn="ctr">
+                      <a:solidFill>
+                        <a:srgbClr val="000000"/>
+                      </a:solidFill>
+                      <a:prstDash val="solid"/>
+                      <a:round/>
+                      <a:headEnd type="none" w="med" len="med"/>
+                      <a:tailEnd type="none" w="med" len="med"/>
+                    </a:lnB>
+                    <a:noFill/>
+                  </a:tcPr>
+                </a:tc>
+                <a:tc>
+                  <a:txBody>
+                    <a:bodyPr/>
+                    <a:lstStyle/>
+                    <a:p>
+                      <a:pPr algn="l" fontAlgn="ctr">
+                        <a:buNone/>
+                      </a:pPr>
+                      <a:endParaRPr lang="en-US" sz="1100" b="0" i="0" u="none" strike="noStrike">
+                        <a:solidFill>
+                          <a:srgbClr val="000000"/>
+                        </a:solidFill>
+                        <a:effectLst/>
+                        <a:latin typeface="Aptos Narrow" panose="020B0004020202020204" pitchFamily="34" charset="0"/>
+                      </a:endParaRPr>
+                    </a:p>
+                  </a:txBody>
+                  <a:tcPr anchor="ctr">
+                    <a:lnL w="12700" cap="flat" cmpd="sng" algn="ctr">
+                      <a:solidFill>
+                        <a:srgbClr val="000000"/>
+                      </a:solidFill>
+                      <a:prstDash val="solid"/>
+                      <a:round/>
+                      <a:headEnd type="none" w="med" len="med"/>
+                      <a:tailEnd type="none" w="med" len="med"/>
+                    </a:lnL>
+                    <a:lnR w="12700" cap="flat" cmpd="sng" algn="ctr">
+                      <a:solidFill>
+                        <a:srgbClr val="000000"/>
+                      </a:solidFill>
+                      <a:prstDash val="solid"/>
+                      <a:round/>
+                      <a:headEnd type="none" w="med" len="med"/>
+                      <a:tailEnd type="none" w="med" len="med"/>
+                    </a:lnR>
+                    <a:lnT w="12700" cap="flat" cmpd="sng" algn="ctr">
+                      <a:solidFill>
+                        <a:srgbClr val="000000"/>
+                      </a:solidFill>
+                      <a:prstDash val="solid"/>
+                      <a:round/>
+                      <a:headEnd type="none" w="med" len="med"/>
+                      <a:tailEnd type="none" w="med" len="med"/>
+                    </a:lnT>
+                    <a:lnB w="12700" cap="flat" cmpd="sng" algn="ctr">
+                      <a:solidFill>
+                        <a:srgbClr val="000000"/>
+                      </a:solidFill>
+                      <a:prstDash val="solid"/>
+                      <a:round/>
+                      <a:headEnd type="none" w="med" len="med"/>
+                      <a:tailEnd type="none" w="med" len="med"/>
+                    </a:lnB>
+                    <a:noFill/>
+                  </a:tcPr>
+                </a:tc>
+                <a:tc>
+                  <a:txBody>
+                    <a:bodyPr/>
+                    <a:lstStyle/>
+                    <a:p>
+                      <a:pPr algn="ctr" fontAlgn="ctr">
+                        <a:buNone/>
+                      </a:pPr>
+                      <a:endParaRPr lang="en-US" sz="1100" b="0" i="0" u="none" strike="noStrike">
+                        <a:solidFill>
+                          <a:srgbClr val="000000"/>
+                        </a:solidFill>
+                        <a:effectLst/>
+                        <a:latin typeface="Aptos Narrow" panose="020B0004020202020204" pitchFamily="34" charset="0"/>
+                      </a:endParaRPr>
+                    </a:p>
+                  </a:txBody>
+                  <a:tcPr marL="9525" marR="9525" marT="9525" marB="0" anchor="ctr">
+                    <a:lnL w="12700" cap="flat" cmpd="sng" algn="ctr">
+                      <a:solidFill>
+                        <a:srgbClr val="000000"/>
+                      </a:solidFill>
+                      <a:prstDash val="solid"/>
+                      <a:round/>
+                      <a:headEnd type="none" w="med" len="med"/>
+                      <a:tailEnd type="none" w="med" len="med"/>
+                    </a:lnL>
+                    <a:lnR w="12700" cap="flat" cmpd="sng" algn="ctr">
+                      <a:solidFill>
+                        <a:srgbClr val="000000"/>
+                      </a:solidFill>
+                      <a:prstDash val="solid"/>
+                      <a:round/>
+                      <a:headEnd type="none" w="med" len="med"/>
+                      <a:tailEnd type="none" w="med" len="med"/>
+                    </a:lnR>
+                    <a:lnT w="12700" cap="flat" cmpd="sng" algn="ctr">
+                      <a:solidFill>
+                        <a:srgbClr val="000000"/>
+                      </a:solidFill>
+                      <a:prstDash val="solid"/>
+                      <a:round/>
+                      <a:headEnd type="none" w="med" len="med"/>
+                      <a:tailEnd type="none" w="med" len="med"/>
+                    </a:lnT>
+                    <a:lnB w="12700" cap="flat" cmpd="sng" algn="ctr">
+                      <a:solidFill>
+                        <a:srgbClr val="000000"/>
+                      </a:solidFill>
+                      <a:prstDash val="solid"/>
+                      <a:round/>
+                      <a:headEnd type="none" w="med" len="med"/>
+                      <a:tailEnd type="none" w="med" len="med"/>
+                    </a:lnB>
+                    <a:noFill/>
+                  </a:tcPr>
+                </a:tc>
+                <a:extLst>
+                  <a:ext uri="{0D108BD9-81ED-4DB2-BD59-A6C34878D82A}">
+                    <a16:rowId xmlns:a16="http://schemas.microsoft.com/office/drawing/2014/main" val="2137467726"/>
+                  </a:ext>
+                </a:extLst>
+              </a:tr>
+              <a:tr h="330767">
+                <a:tc>
+                  <a:txBody>
+                    <a:bodyPr/>
+                    <a:lstStyle/>
+                    <a:p>
+                      <a:pPr algn="ctr" fontAlgn="ctr">
+                        <a:buNone/>
+                      </a:pPr>
+                      <a:endParaRPr lang="en-US" sz="1100" b="0" i="0" u="none" strike="noStrike">
+                        <a:solidFill>
+                          <a:srgbClr val="000000"/>
+                        </a:solidFill>
+                        <a:effectLst/>
+                        <a:latin typeface="Aptos Narrow" panose="020B0004020202020204" pitchFamily="34" charset="0"/>
+                      </a:endParaRPr>
+                    </a:p>
+                  </a:txBody>
+                  <a:tcPr marL="9525" marR="9525" marT="9525" marB="0" anchor="ctr">
+                    <a:lnL w="12700" cap="flat" cmpd="sng" algn="ctr">
+                      <a:solidFill>
+                        <a:srgbClr val="000000"/>
+                      </a:solidFill>
+                      <a:prstDash val="solid"/>
+                      <a:round/>
+                      <a:headEnd type="none" w="med" len="med"/>
+                      <a:tailEnd type="none" w="med" len="med"/>
+                    </a:lnL>
+                    <a:lnR w="12700" cap="flat" cmpd="sng" algn="ctr">
+                      <a:solidFill>
+                        <a:srgbClr val="000000"/>
+                      </a:solidFill>
+                      <a:prstDash val="solid"/>
+                      <a:round/>
+                      <a:headEnd type="none" w="med" len="med"/>
+                      <a:tailEnd type="none" w="med" len="med"/>
+                    </a:lnR>
+                    <a:lnT w="12700" cap="flat" cmpd="sng" algn="ctr">
+                      <a:solidFill>
+                        <a:srgbClr val="000000"/>
+                      </a:solidFill>
+                      <a:prstDash val="solid"/>
+                      <a:round/>
+                      <a:headEnd type="none" w="med" len="med"/>
+                      <a:tailEnd type="none" w="med" len="med"/>
+                    </a:lnT>
+                    <a:lnB w="12700" cap="flat" cmpd="sng" algn="ctr">
+                      <a:solidFill>
+                        <a:srgbClr val="000000"/>
+                      </a:solidFill>
+                      <a:prstDash val="solid"/>
+                      <a:round/>
+                      <a:headEnd type="none" w="med" len="med"/>
+                      <a:tailEnd type="none" w="med" len="med"/>
+                    </a:lnB>
+                    <a:noFill/>
+                  </a:tcPr>
+                </a:tc>
+                <a:tc>
+                  <a:txBody>
+                    <a:bodyPr/>
+                    <a:lstStyle/>
+                    <a:p>
+                      <a:pPr algn="l" fontAlgn="ctr">
+                        <a:buNone/>
+                      </a:pPr>
+                      <a:endParaRPr lang="en-US" sz="1100" b="1" i="0" u="none" strike="noStrike" dirty="0">
+                        <a:solidFill>
+                          <a:srgbClr val="000000"/>
+                        </a:solidFill>
+                        <a:effectLst/>
+                        <a:latin typeface="Aptos Narrow" panose="020B0004020202020204" pitchFamily="34" charset="0"/>
+                      </a:endParaRPr>
+                    </a:p>
+                  </a:txBody>
+                  <a:tcPr anchor="ctr">
+                    <a:lnL w="12700" cap="flat" cmpd="sng" algn="ctr">
+                      <a:solidFill>
+                        <a:srgbClr val="000000"/>
+                      </a:solidFill>
+                      <a:prstDash val="solid"/>
+                      <a:round/>
+                      <a:headEnd type="none" w="med" len="med"/>
+                      <a:tailEnd type="none" w="med" len="med"/>
+                    </a:lnL>
+                    <a:lnR w="12700" cap="flat" cmpd="sng" algn="ctr">
+                      <a:solidFill>
+                        <a:srgbClr val="000000"/>
+                      </a:solidFill>
+                      <a:prstDash val="solid"/>
+                      <a:round/>
+                      <a:headEnd type="none" w="med" len="med"/>
+                      <a:tailEnd type="none" w="med" len="med"/>
+                    </a:lnR>
+                    <a:lnT w="12700" cap="flat" cmpd="sng" algn="ctr">
+                      <a:solidFill>
+                        <a:srgbClr val="000000"/>
+                      </a:solidFill>
+                      <a:prstDash val="solid"/>
+                      <a:round/>
+                      <a:headEnd type="none" w="med" len="med"/>
+                      <a:tailEnd type="none" w="med" len="med"/>
+                    </a:lnT>
+                    <a:lnB w="12700" cap="flat" cmpd="sng" algn="ctr">
+                      <a:solidFill>
+                        <a:srgbClr val="000000"/>
+                      </a:solidFill>
+                      <a:prstDash val="solid"/>
+                      <a:round/>
+                      <a:headEnd type="none" w="med" len="med"/>
+                      <a:tailEnd type="none" w="med" len="med"/>
+                    </a:lnB>
+                    <a:noFill/>
+                  </a:tcPr>
+                </a:tc>
+                <a:tc>
+                  <a:txBody>
+                    <a:bodyPr/>
+                    <a:lstStyle/>
+                    <a:p>
+                      <a:pPr algn="l" fontAlgn="ctr">
+                        <a:buNone/>
+                      </a:pPr>
+                      <a:endParaRPr lang="en-US" sz="1100" b="0" i="0" u="none" strike="noStrike">
+                        <a:solidFill>
+                          <a:srgbClr val="000000"/>
+                        </a:solidFill>
+                        <a:effectLst/>
+                        <a:latin typeface="Aptos Narrow" panose="020B0004020202020204" pitchFamily="34" charset="0"/>
+                      </a:endParaRPr>
+                    </a:p>
+                  </a:txBody>
+                  <a:tcPr anchor="ctr">
+                    <a:lnL w="12700" cap="flat" cmpd="sng" algn="ctr">
+                      <a:solidFill>
+                        <a:srgbClr val="000000"/>
+                      </a:solidFill>
+                      <a:prstDash val="solid"/>
+                      <a:round/>
+                      <a:headEnd type="none" w="med" len="med"/>
+                      <a:tailEnd type="none" w="med" len="med"/>
+                    </a:lnL>
+                    <a:lnR w="12700" cap="flat" cmpd="sng" algn="ctr">
+                      <a:solidFill>
+                        <a:srgbClr val="000000"/>
+                      </a:solidFill>
+                      <a:prstDash val="solid"/>
+                      <a:round/>
+                      <a:headEnd type="none" w="med" len="med"/>
+                      <a:tailEnd type="none" w="med" len="med"/>
+                    </a:lnR>
+                    <a:lnT w="12700" cap="flat" cmpd="sng" algn="ctr">
+                      <a:solidFill>
+                        <a:srgbClr val="000000"/>
+                      </a:solidFill>
+                      <a:prstDash val="solid"/>
+                      <a:round/>
+                      <a:headEnd type="none" w="med" len="med"/>
+                      <a:tailEnd type="none" w="med" len="med"/>
+                    </a:lnT>
+                    <a:lnB w="12700" cap="flat" cmpd="sng" algn="ctr">
+                      <a:solidFill>
+                        <a:srgbClr val="000000"/>
+                      </a:solidFill>
+                      <a:prstDash val="solid"/>
+                      <a:round/>
+                      <a:headEnd type="none" w="med" len="med"/>
+                      <a:tailEnd type="none" w="med" len="med"/>
+                    </a:lnB>
+                    <a:noFill/>
+                  </a:tcPr>
+                </a:tc>
+                <a:tc>
+                  <a:txBody>
+                    <a:bodyPr/>
+                    <a:lstStyle/>
+                    <a:p>
+                      <a:pPr algn="ctr" fontAlgn="ctr">
+                        <a:buNone/>
+                      </a:pPr>
+                      <a:endParaRPr lang="en-US" sz="1100" b="0" i="0" u="none" strike="noStrike" dirty="0">
+                        <a:solidFill>
+                          <a:srgbClr val="000000"/>
+                        </a:solidFill>
+                        <a:effectLst/>
+                        <a:latin typeface="Aptos Narrow" panose="020B0004020202020204" pitchFamily="34" charset="0"/>
+                      </a:endParaRPr>
+                    </a:p>
+                  </a:txBody>
+                  <a:tcPr marL="9525" marR="9525" marT="9525" marB="0" anchor="ctr">
+                    <a:lnL w="12700" cap="flat" cmpd="sng" algn="ctr">
+                      <a:solidFill>
+                        <a:srgbClr val="000000"/>
+                      </a:solidFill>
+                      <a:prstDash val="solid"/>
+                      <a:round/>
+                      <a:headEnd type="none" w="med" len="med"/>
+                      <a:tailEnd type="none" w="med" len="med"/>
+                    </a:lnL>
+                    <a:lnR w="12700" cap="flat" cmpd="sng" algn="ctr">
+                      <a:solidFill>
+                        <a:srgbClr val="000000"/>
+                      </a:solidFill>
+                      <a:prstDash val="solid"/>
+                      <a:round/>
+                      <a:headEnd type="none" w="med" len="med"/>
+                      <a:tailEnd type="none" w="med" len="med"/>
+                    </a:lnR>
+                    <a:lnT w="12700" cap="flat" cmpd="sng" algn="ctr">
+                      <a:solidFill>
+                        <a:srgbClr val="000000"/>
+                      </a:solidFill>
+                      <a:prstDash val="solid"/>
+                      <a:round/>
+                      <a:headEnd type="none" w="med" len="med"/>
+                      <a:tailEnd type="none" w="med" len="med"/>
+                    </a:lnT>
+                    <a:lnB w="12700" cap="flat" cmpd="sng" algn="ctr">
+                      <a:solidFill>
+                        <a:srgbClr val="000000"/>
+                      </a:solidFill>
+                      <a:prstDash val="solid"/>
+                      <a:round/>
+                      <a:headEnd type="none" w="med" len="med"/>
+                      <a:tailEnd type="none" w="med" len="med"/>
+                    </a:lnB>
+                    <a:noFill/>
+                  </a:tcPr>
+                </a:tc>
+                <a:extLst>
+                  <a:ext uri="{0D108BD9-81ED-4DB2-BD59-A6C34878D82A}">
+                    <a16:rowId xmlns:a16="http://schemas.microsoft.com/office/drawing/2014/main" val="112686958"/>
+                  </a:ext>
+                </a:extLst>
+              </a:tr>
+              <a:tr h="330767">
+                <a:tc>
+                  <a:txBody>
+                    <a:bodyPr/>
+                    <a:lstStyle/>
+                    <a:p>
+                      <a:pPr algn="ctr" fontAlgn="ctr">
+                        <a:buNone/>
+                      </a:pPr>
+                      <a:endParaRPr lang="en-US" sz="1100" b="0" i="0" u="none" strike="noStrike">
+                        <a:solidFill>
+                          <a:srgbClr val="000000"/>
+                        </a:solidFill>
+                        <a:effectLst/>
+                        <a:latin typeface="Aptos Narrow" panose="020B0004020202020204" pitchFamily="34" charset="0"/>
+                      </a:endParaRPr>
+                    </a:p>
+                  </a:txBody>
+                  <a:tcPr marL="9525" marR="9525" marT="9525" marB="0" anchor="ctr">
+                    <a:lnL w="12700" cap="flat" cmpd="sng" algn="ctr">
+                      <a:solidFill>
+                        <a:srgbClr val="000000"/>
+                      </a:solidFill>
+                      <a:prstDash val="solid"/>
+                      <a:round/>
+                      <a:headEnd type="none" w="med" len="med"/>
+                      <a:tailEnd type="none" w="med" len="med"/>
+                    </a:lnL>
+                    <a:lnR w="12700" cap="flat" cmpd="sng" algn="ctr">
+                      <a:solidFill>
+                        <a:srgbClr val="000000"/>
+                      </a:solidFill>
+                      <a:prstDash val="solid"/>
+                      <a:round/>
+                      <a:headEnd type="none" w="med" len="med"/>
+                      <a:tailEnd type="none" w="med" len="med"/>
+                    </a:lnR>
+                    <a:lnT w="12700" cap="flat" cmpd="sng" algn="ctr">
+                      <a:solidFill>
+                        <a:srgbClr val="000000"/>
+                      </a:solidFill>
+                      <a:prstDash val="solid"/>
+                      <a:round/>
+                      <a:headEnd type="none" w="med" len="med"/>
+                      <a:tailEnd type="none" w="med" len="med"/>
+                    </a:lnT>
+                    <a:lnB w="12700" cap="flat" cmpd="sng" algn="ctr">
+                      <a:solidFill>
+                        <a:srgbClr val="000000"/>
+                      </a:solidFill>
+                      <a:prstDash val="solid"/>
+                      <a:round/>
+                      <a:headEnd type="none" w="med" len="med"/>
+                      <a:tailEnd type="none" w="med" len="med"/>
+                    </a:lnB>
+                    <a:noFill/>
+                  </a:tcPr>
+                </a:tc>
+                <a:tc>
+                  <a:txBody>
+                    <a:bodyPr/>
+                    <a:lstStyle/>
+                    <a:p>
+                      <a:pPr algn="l" fontAlgn="ctr">
+                        <a:buNone/>
+                      </a:pPr>
+                      <a:endParaRPr lang="en-US" sz="1100" b="1" i="0" u="none" strike="noStrike" dirty="0">
+                        <a:solidFill>
+                          <a:srgbClr val="000000"/>
+                        </a:solidFill>
+                        <a:effectLst/>
+                        <a:latin typeface="Aptos Narrow" panose="020B0004020202020204" pitchFamily="34" charset="0"/>
+                      </a:endParaRPr>
+                    </a:p>
+                  </a:txBody>
+                  <a:tcPr anchor="ctr">
+                    <a:lnL w="12700" cap="flat" cmpd="sng" algn="ctr">
+                      <a:solidFill>
+                        <a:srgbClr val="000000"/>
+                      </a:solidFill>
+                      <a:prstDash val="solid"/>
+                      <a:round/>
+                      <a:headEnd type="none" w="med" len="med"/>
+                      <a:tailEnd type="none" w="med" len="med"/>
+                    </a:lnL>
+                    <a:lnR w="12700" cap="flat" cmpd="sng" algn="ctr">
+                      <a:solidFill>
+                        <a:srgbClr val="000000"/>
+                      </a:solidFill>
+                      <a:prstDash val="solid"/>
+                      <a:round/>
+                      <a:headEnd type="none" w="med" len="med"/>
+                      <a:tailEnd type="none" w="med" len="med"/>
+                    </a:lnR>
+                    <a:lnT w="12700" cap="flat" cmpd="sng" algn="ctr">
+                      <a:solidFill>
+                        <a:srgbClr val="000000"/>
+                      </a:solidFill>
+                      <a:prstDash val="solid"/>
+                      <a:round/>
+                      <a:headEnd type="none" w="med" len="med"/>
+                      <a:tailEnd type="none" w="med" len="med"/>
+                    </a:lnT>
+                    <a:lnB w="12700" cap="flat" cmpd="sng" algn="ctr">
+                      <a:solidFill>
+                        <a:srgbClr val="000000"/>
+                      </a:solidFill>
+                      <a:prstDash val="solid"/>
+                      <a:round/>
+                      <a:headEnd type="none" w="med" len="med"/>
+                      <a:tailEnd type="none" w="med" len="med"/>
+                    </a:lnB>
+                    <a:noFill/>
+                  </a:tcPr>
+                </a:tc>
+                <a:tc>
+                  <a:txBody>
+                    <a:bodyPr/>
+                    <a:lstStyle/>
+                    <a:p>
+                      <a:pPr algn="l" fontAlgn="ctr">
+                        <a:buNone/>
+                      </a:pPr>
+                      <a:endParaRPr lang="en-US" sz="1100" b="0" i="0" u="none" strike="noStrike">
+                        <a:solidFill>
+                          <a:srgbClr val="000000"/>
+                        </a:solidFill>
+                        <a:effectLst/>
+                        <a:latin typeface="Aptos Narrow" panose="020B0004020202020204" pitchFamily="34" charset="0"/>
+                      </a:endParaRPr>
+                    </a:p>
+                  </a:txBody>
+                  <a:tcPr anchor="ctr">
+                    <a:lnL w="12700" cap="flat" cmpd="sng" algn="ctr">
+                      <a:solidFill>
+                        <a:srgbClr val="000000"/>
+                      </a:solidFill>
+                      <a:prstDash val="solid"/>
+                      <a:round/>
+                      <a:headEnd type="none" w="med" len="med"/>
+                      <a:tailEnd type="none" w="med" len="med"/>
+                    </a:lnL>
+                    <a:lnR w="12700" cap="flat" cmpd="sng" algn="ctr">
+                      <a:solidFill>
+                        <a:srgbClr val="000000"/>
+                      </a:solidFill>
+                      <a:prstDash val="solid"/>
+                      <a:round/>
+                      <a:headEnd type="none" w="med" len="med"/>
+                      <a:tailEnd type="none" w="med" len="med"/>
+                    </a:lnR>
+                    <a:lnT w="12700" cap="flat" cmpd="sng" algn="ctr">
+                      <a:solidFill>
+                        <a:srgbClr val="000000"/>
+                      </a:solidFill>
+                      <a:prstDash val="solid"/>
+                      <a:round/>
+                      <a:headEnd type="none" w="med" len="med"/>
+                      <a:tailEnd type="none" w="med" len="med"/>
+                    </a:lnT>
+                    <a:lnB w="12700" cap="flat" cmpd="sng" algn="ctr">
+                      <a:solidFill>
+                        <a:srgbClr val="000000"/>
+                      </a:solidFill>
+                      <a:prstDash val="solid"/>
+                      <a:round/>
+                      <a:headEnd type="none" w="med" len="med"/>
+                      <a:tailEnd type="none" w="med" len="med"/>
+                    </a:lnB>
+                    <a:noFill/>
+                  </a:tcPr>
+                </a:tc>
+                <a:tc>
+                  <a:txBody>
+                    <a:bodyPr/>
+                    <a:lstStyle/>
+                    <a:p>
+                      <a:pPr algn="ctr" fontAlgn="ctr">
+                        <a:buNone/>
+                      </a:pPr>
+                      <a:endParaRPr lang="en-US" sz="1100" b="0" i="0" u="none" strike="noStrike" dirty="0">
+                        <a:solidFill>
+                          <a:srgbClr val="000000"/>
+                        </a:solidFill>
+                        <a:effectLst/>
+                        <a:latin typeface="Aptos Narrow" panose="020B0004020202020204" pitchFamily="34" charset="0"/>
+                      </a:endParaRPr>
+                    </a:p>
+                  </a:txBody>
+                  <a:tcPr marL="9525" marR="9525" marT="9525" marB="0" anchor="ctr">
+                    <a:lnL w="12700" cap="flat" cmpd="sng" algn="ctr">
+                      <a:solidFill>
+                        <a:srgbClr val="000000"/>
+                      </a:solidFill>
+                      <a:prstDash val="solid"/>
+                      <a:round/>
+                      <a:headEnd type="none" w="med" len="med"/>
+                      <a:tailEnd type="none" w="med" len="med"/>
+                    </a:lnL>
+                    <a:lnR w="12700" cap="flat" cmpd="sng" algn="ctr">
+                      <a:solidFill>
+                        <a:srgbClr val="000000"/>
+                      </a:solidFill>
+                      <a:prstDash val="solid"/>
+                      <a:round/>
+                      <a:headEnd type="none" w="med" len="med"/>
+                      <a:tailEnd type="none" w="med" len="med"/>
+                    </a:lnR>
+                    <a:lnT w="12700" cap="flat" cmpd="sng" algn="ctr">
+                      <a:solidFill>
+                        <a:srgbClr val="000000"/>
+                      </a:solidFill>
+                      <a:prstDash val="solid"/>
+                      <a:round/>
+                      <a:headEnd type="none" w="med" len="med"/>
+                      <a:tailEnd type="none" w="med" len="med"/>
+                    </a:lnT>
+                    <a:lnB w="12700" cap="flat" cmpd="sng" algn="ctr">
+                      <a:solidFill>
+                        <a:srgbClr val="000000"/>
+                      </a:solidFill>
+                      <a:prstDash val="solid"/>
+                      <a:round/>
+                      <a:headEnd type="none" w="med" len="med"/>
+                      <a:tailEnd type="none" w="med" len="med"/>
+                    </a:lnB>
+                    <a:noFill/>
+                  </a:tcPr>
+                </a:tc>
+                <a:extLst>
+                  <a:ext uri="{0D108BD9-81ED-4DB2-BD59-A6C34878D82A}">
+                    <a16:rowId xmlns:a16="http://schemas.microsoft.com/office/drawing/2014/main" val="1043911860"/>
+                  </a:ext>
+                </a:extLst>
+              </a:tr>
+            </a:tbl>
+          </a:graphicData>
+        </a:graphic>
+      </p:graphicFrame>
+    </p:spTree>
+    <p:extLst>
+      <p:ext uri="{BB962C8B-B14F-4D97-AF65-F5344CB8AC3E}">
+        <p14:creationId xmlns:p14="http://schemas.microsoft.com/office/powerpoint/2010/main" val="717545924"/>
       </p:ext>
     </p:extLst>
   </p:cSld>
@@ -19320,12 +21390,14 @@
 </file>
 
 <file path=customXml/item1.xml><?xml version="1.0" encoding="utf-8"?>
-<?mso-contentType ?>
-<FormTemplates xmlns="http://schemas.microsoft.com/sharepoint/v3/contenttype/forms">
-  <Display>DocumentLibraryForm</Display>
-  <Edit>DocumentLibraryForm</Edit>
-  <New>DocumentLibraryForm</New>
-</FormTemplates>
+<p:properties xmlns:p="http://schemas.microsoft.com/office/2006/metadata/properties" xmlns:xsi="http://www.w3.org/2001/XMLSchema-instance" xmlns:pc="http://schemas.microsoft.com/office/infopath/2007/PartnerControls">
+  <documentManagement>
+    <lcf76f155ced4ddcb4097134ff3c332f xmlns="7114f878-0223-480d-a325-1373c6d0223b">
+      <Terms xmlns="http://schemas.microsoft.com/office/infopath/2007/PartnerControls"/>
+    </lcf76f155ced4ddcb4097134ff3c332f>
+    <TaxCatchAll xmlns="599183fe-bfa3-49f1-b3c6-3d50208c56e4" xsi:nil="true"/>
+  </documentManagement>
+</p:properties>
 </file>
 
 <file path=customXml/item2.xml><?xml version="1.0" encoding="utf-8"?>
@@ -19542,20 +21614,27 @@
 </file>
 
 <file path=customXml/item3.xml><?xml version="1.0" encoding="utf-8"?>
-<p:properties xmlns:p="http://schemas.microsoft.com/office/2006/metadata/properties" xmlns:xsi="http://www.w3.org/2001/XMLSchema-instance" xmlns:pc="http://schemas.microsoft.com/office/infopath/2007/PartnerControls">
-  <documentManagement>
-    <lcf76f155ced4ddcb4097134ff3c332f xmlns="7114f878-0223-480d-a325-1373c6d0223b">
-      <Terms xmlns="http://schemas.microsoft.com/office/infopath/2007/PartnerControls"/>
-    </lcf76f155ced4ddcb4097134ff3c332f>
-    <TaxCatchAll xmlns="599183fe-bfa3-49f1-b3c6-3d50208c56e4" xsi:nil="true"/>
-  </documentManagement>
-</p:properties>
+<?mso-contentType ?>
+<FormTemplates xmlns="http://schemas.microsoft.com/sharepoint/v3/contenttype/forms">
+  <Display>DocumentLibraryForm</Display>
+  <Edit>DocumentLibraryForm</Edit>
+  <New>DocumentLibraryForm</New>
+</FormTemplates>
 </file>
 
 <file path=customXml/itemProps1.xml><?xml version="1.0" encoding="utf-8"?>
-<ds:datastoreItem xmlns:ds="http://schemas.openxmlformats.org/officeDocument/2006/customXml" ds:itemID="{5421F378-326F-4859-B6C8-701A3512AE1B}">
+<ds:datastoreItem xmlns:ds="http://schemas.openxmlformats.org/officeDocument/2006/customXml" ds:itemID="{9DE45B87-9247-4103-B93A-84FCD96EFCA6}">
   <ds:schemaRefs>
-    <ds:schemaRef ds:uri="http://schemas.microsoft.com/sharepoint/v3/contenttype/forms"/>
+    <ds:schemaRef ds:uri="http://schemas.openxmlformats.org/package/2006/metadata/core-properties"/>
+    <ds:schemaRef ds:uri="599183fe-bfa3-49f1-b3c6-3d50208c56e4"/>
+    <ds:schemaRef ds:uri="http://purl.org/dc/terms/"/>
+    <ds:schemaRef ds:uri="http://purl.org/dc/elements/1.1/"/>
+    <ds:schemaRef ds:uri="http://schemas.microsoft.com/office/2006/metadata/properties"/>
+    <ds:schemaRef ds:uri="http://schemas.microsoft.com/office/infopath/2007/PartnerControls"/>
+    <ds:schemaRef ds:uri="http://purl.org/dc/dcmitype/"/>
+    <ds:schemaRef ds:uri="http://schemas.microsoft.com/office/2006/documentManagement/types"/>
+    <ds:schemaRef ds:uri="7114f878-0223-480d-a325-1373c6d0223b"/>
+    <ds:schemaRef ds:uri="http://www.w3.org/XML/1998/namespace"/>
   </ds:schemaRefs>
 </ds:datastoreItem>
 </file>
@@ -19580,18 +21659,9 @@
 </file>
 
 <file path=customXml/itemProps3.xml><?xml version="1.0" encoding="utf-8"?>
-<ds:datastoreItem xmlns:ds="http://schemas.openxmlformats.org/officeDocument/2006/customXml" ds:itemID="{9DE45B87-9247-4103-B93A-84FCD96EFCA6}">
+<ds:datastoreItem xmlns:ds="http://schemas.openxmlformats.org/officeDocument/2006/customXml" ds:itemID="{5421F378-326F-4859-B6C8-701A3512AE1B}">
   <ds:schemaRefs>
-    <ds:schemaRef ds:uri="http://schemas.openxmlformats.org/package/2006/metadata/core-properties"/>
-    <ds:schemaRef ds:uri="599183fe-bfa3-49f1-b3c6-3d50208c56e4"/>
-    <ds:schemaRef ds:uri="http://purl.org/dc/terms/"/>
-    <ds:schemaRef ds:uri="http://purl.org/dc/elements/1.1/"/>
-    <ds:schemaRef ds:uri="http://schemas.microsoft.com/office/2006/metadata/properties"/>
-    <ds:schemaRef ds:uri="http://schemas.microsoft.com/office/infopath/2007/PartnerControls"/>
-    <ds:schemaRef ds:uri="http://purl.org/dc/dcmitype/"/>
-    <ds:schemaRef ds:uri="http://schemas.microsoft.com/office/2006/documentManagement/types"/>
-    <ds:schemaRef ds:uri="7114f878-0223-480d-a325-1373c6d0223b"/>
-    <ds:schemaRef ds:uri="http://www.w3.org/XML/1998/namespace"/>
+    <ds:schemaRef ds:uri="http://schemas.microsoft.com/sharepoint/v3/contenttype/forms"/>
   </ds:schemaRefs>
 </ds:datastoreItem>
 </file>
--- a/template.pptx
+++ b/template.pptx
@@ -6,18 +6,22 @@
     <p:sldMasterId id="2147483957" r:id="rId5"/>
     <p:sldMasterId id="2147483834" r:id="rId6"/>
     <p:sldMasterId id="2147484001" r:id="rId7"/>
+    <p:sldMasterId id="2147484108" r:id="rId8"/>
   </p:sldMasterIdLst>
   <p:notesMasterIdLst>
-    <p:notesMasterId r:id="rId12"/>
+    <p:notesMasterId r:id="rId16"/>
   </p:notesMasterIdLst>
   <p:handoutMasterIdLst>
-    <p:handoutMasterId r:id="rId13"/>
+    <p:handoutMasterId r:id="rId17"/>
   </p:handoutMasterIdLst>
   <p:sldIdLst>
-    <p:sldId id="2147481217" r:id="rId8"/>
-    <p:sldId id="371" r:id="rId9"/>
-    <p:sldId id="2147481213" r:id="rId10"/>
-    <p:sldId id="2147481218" r:id="rId11"/>
+    <p:sldId id="2147481217" r:id="rId9"/>
+    <p:sldId id="371" r:id="rId10"/>
+    <p:sldId id="333" r:id="rId11"/>
+    <p:sldId id="2147481213" r:id="rId12"/>
+    <p:sldId id="2147481218" r:id="rId13"/>
+    <p:sldId id="260" r:id="rId14"/>
+    <p:sldId id="2147481205" r:id="rId15"/>
   </p:sldIdLst>
   <p:sldSz cx="12192000" cy="6858000"/>
   <p:notesSz cx="6858000" cy="9144000"/>
@@ -213,7 +217,7 @@
 <file path=ppt/revisionInfo.xml><?xml version="1.0" encoding="utf-8"?>
 <p1510:revInfo xmlns:a="http://schemas.openxmlformats.org/drawingml/2006/main" xmlns:r="http://schemas.openxmlformats.org/officeDocument/2006/relationships" xmlns:p1510="http://schemas.microsoft.com/office/powerpoint/2015/10/main">
   <p1510:revLst>
-    <p1510:client id="{69B1F2F7-C68D-405E-BF61-9D28334E327E}" v="5" dt="2026-03-02T15:19:45.017"/>
+    <p1510:client id="{69B1F2F7-C68D-405E-BF61-9D28334E327E}" v="16" dt="2026-03-02T15:58:20.506"/>
   </p1510:revLst>
 </p1510:revInfo>
 </file>
@@ -222,13 +226,98 @@
 <pc:chgInfo xmlns:a="http://schemas.openxmlformats.org/drawingml/2006/main" xmlns:r="http://schemas.openxmlformats.org/officeDocument/2006/relationships" xmlns:ac="http://schemas.microsoft.com/office/drawing/2013/main/command" xmlns:pc="http://schemas.microsoft.com/office/powerpoint/2013/main/command">
   <pc:docChgLst>
     <pc:chgData name="Casey Lee" userId="4bc459e0-655e-452e-96c2-b918c0999cdb" providerId="ADAL" clId="{D71FFA72-407B-46EE-BB71-C6D17BEEF9AD}"/>
-    <pc:docChg chg="custSel addSld modSld">
-      <pc:chgData name="Casey Lee" userId="4bc459e0-655e-452e-96c2-b918c0999cdb" providerId="ADAL" clId="{D71FFA72-407B-46EE-BB71-C6D17BEEF9AD}" dt="2026-03-02T15:20:53.281" v="76" actId="14734"/>
+    <pc:docChg chg="custSel addSld delSld modSld">
+      <pc:chgData name="Casey Lee" userId="4bc459e0-655e-452e-96c2-b918c0999cdb" providerId="ADAL" clId="{D71FFA72-407B-46EE-BB71-C6D17BEEF9AD}" dt="2026-03-02T15:58:26.349" v="210" actId="20577"/>
       <pc:docMkLst>
         <pc:docMk/>
       </pc:docMkLst>
+      <pc:sldChg chg="addSp modSp add del mod">
+        <pc:chgData name="Casey Lee" userId="4bc459e0-655e-452e-96c2-b918c0999cdb" providerId="ADAL" clId="{D71FFA72-407B-46EE-BB71-C6D17BEEF9AD}" dt="2026-03-02T15:58:03.360" v="190" actId="14100"/>
+        <pc:sldMkLst>
+          <pc:docMk/>
+          <pc:sldMk cId="0" sldId="260"/>
+        </pc:sldMkLst>
+        <pc:spChg chg="add mod">
+          <ac:chgData name="Casey Lee" userId="4bc459e0-655e-452e-96c2-b918c0999cdb" providerId="ADAL" clId="{D71FFA72-407B-46EE-BB71-C6D17BEEF9AD}" dt="2026-03-02T15:58:03.360" v="190" actId="14100"/>
+          <ac:spMkLst>
+            <pc:docMk/>
+            <pc:sldMk cId="0" sldId="260"/>
+            <ac:spMk id="4" creationId="{666E304E-6A8F-042D-71F1-9C3B1DBEA51C}"/>
+          </ac:spMkLst>
+        </pc:spChg>
+      </pc:sldChg>
+      <pc:sldChg chg="addSp delSp modSp add mod">
+        <pc:chgData name="Casey Lee" userId="4bc459e0-655e-452e-96c2-b918c0999cdb" providerId="ADAL" clId="{D71FFA72-407B-46EE-BB71-C6D17BEEF9AD}" dt="2026-03-02T15:56:21.879" v="171" actId="1076"/>
+        <pc:sldMkLst>
+          <pc:docMk/>
+          <pc:sldMk cId="3180984745" sldId="333"/>
+        </pc:sldMkLst>
+        <pc:spChg chg="del">
+          <ac:chgData name="Casey Lee" userId="4bc459e0-655e-452e-96c2-b918c0999cdb" providerId="ADAL" clId="{D71FFA72-407B-46EE-BB71-C6D17BEEF9AD}" dt="2026-03-02T15:54:36.326" v="78" actId="478"/>
+          <ac:spMkLst>
+            <pc:docMk/>
+            <pc:sldMk cId="3180984745" sldId="333"/>
+            <ac:spMk id="3" creationId="{AA4E654A-A0FB-D3C3-5CB1-377AF4604DBF}"/>
+          </ac:spMkLst>
+        </pc:spChg>
+        <pc:spChg chg="add mod">
+          <ac:chgData name="Casey Lee" userId="4bc459e0-655e-452e-96c2-b918c0999cdb" providerId="ADAL" clId="{D71FFA72-407B-46EE-BB71-C6D17BEEF9AD}" dt="2026-03-02T15:56:21.879" v="171" actId="1076"/>
+          <ac:spMkLst>
+            <pc:docMk/>
+            <pc:sldMk cId="3180984745" sldId="333"/>
+            <ac:spMk id="4" creationId="{3A139A75-8DCF-CE06-5543-958703EAA551}"/>
+          </ac:spMkLst>
+        </pc:spChg>
+        <pc:spChg chg="add mod">
+          <ac:chgData name="Casey Lee" userId="4bc459e0-655e-452e-96c2-b918c0999cdb" providerId="ADAL" clId="{D71FFA72-407B-46EE-BB71-C6D17BEEF9AD}" dt="2026-03-02T15:55:49.279" v="160" actId="20577"/>
+          <ac:spMkLst>
+            <pc:docMk/>
+            <pc:sldMk cId="3180984745" sldId="333"/>
+            <ac:spMk id="5" creationId="{7A944355-93D1-2756-3A20-B489E9157328}"/>
+          </ac:spMkLst>
+        </pc:spChg>
+        <pc:spChg chg="del">
+          <ac:chgData name="Casey Lee" userId="4bc459e0-655e-452e-96c2-b918c0999cdb" providerId="ADAL" clId="{D71FFA72-407B-46EE-BB71-C6D17BEEF9AD}" dt="2026-03-02T15:54:55.176" v="80" actId="478"/>
+          <ac:spMkLst>
+            <pc:docMk/>
+            <pc:sldMk cId="3180984745" sldId="333"/>
+            <ac:spMk id="11" creationId="{FB62C9E4-C6BA-70CF-FA1B-3AC83A8E8717}"/>
+          </ac:spMkLst>
+        </pc:spChg>
+        <pc:spChg chg="mod">
+          <ac:chgData name="Casey Lee" userId="4bc459e0-655e-452e-96c2-b918c0999cdb" providerId="ADAL" clId="{D71FFA72-407B-46EE-BB71-C6D17BEEF9AD}" dt="2026-03-02T15:55:13.705" v="107" actId="20577"/>
+          <ac:spMkLst>
+            <pc:docMk/>
+            <pc:sldMk cId="3180984745" sldId="333"/>
+            <ac:spMk id="12" creationId="{0FF36220-5E7F-193E-0C05-4607FE15B0CE}"/>
+          </ac:spMkLst>
+        </pc:spChg>
+        <pc:graphicFrameChg chg="modGraphic">
+          <ac:chgData name="Casey Lee" userId="4bc459e0-655e-452e-96c2-b918c0999cdb" providerId="ADAL" clId="{D71FFA72-407B-46EE-BB71-C6D17BEEF9AD}" dt="2026-03-02T15:56:17.089" v="170" actId="20577"/>
+          <ac:graphicFrameMkLst>
+            <pc:docMk/>
+            <pc:sldMk cId="3180984745" sldId="333"/>
+            <ac:graphicFrameMk id="2" creationId="{42AE7786-A5C3-8B0B-3BAA-2AF3F75FABD4}"/>
+          </ac:graphicFrameMkLst>
+        </pc:graphicFrameChg>
+      </pc:sldChg>
+      <pc:sldChg chg="addSp modSp add del mod">
+        <pc:chgData name="Casey Lee" userId="4bc459e0-655e-452e-96c2-b918c0999cdb" providerId="ADAL" clId="{D71FFA72-407B-46EE-BB71-C6D17BEEF9AD}" dt="2026-03-02T15:58:26.349" v="210" actId="20577"/>
+        <pc:sldMkLst>
+          <pc:docMk/>
+          <pc:sldMk cId="3275475688" sldId="2147481205"/>
+        </pc:sldMkLst>
+        <pc:spChg chg="add mod">
+          <ac:chgData name="Casey Lee" userId="4bc459e0-655e-452e-96c2-b918c0999cdb" providerId="ADAL" clId="{D71FFA72-407B-46EE-BB71-C6D17BEEF9AD}" dt="2026-03-02T15:58:26.349" v="210" actId="20577"/>
+          <ac:spMkLst>
+            <pc:docMk/>
+            <pc:sldMk cId="3275475688" sldId="2147481205"/>
+            <ac:spMk id="4" creationId="{7D13398D-A5EB-2CCF-FF19-32C925192594}"/>
+          </ac:spMkLst>
+        </pc:spChg>
+      </pc:sldChg>
       <pc:sldChg chg="modSp mod">
-        <pc:chgData name="Casey Lee" userId="4bc459e0-655e-452e-96c2-b918c0999cdb" providerId="ADAL" clId="{D71FFA72-407B-46EE-BB71-C6D17BEEF9AD}" dt="2026-02-26T14:39:35.841" v="27" actId="20577"/>
+        <pc:chgData name="Casey Lee" userId="4bc459e0-655e-452e-96c2-b918c0999cdb" providerId="ADAL" clId="{D71FFA72-407B-46EE-BB71-C6D17BEEF9AD}" dt="2026-03-02T15:56:08.529" v="165" actId="14734"/>
         <pc:sldMkLst>
           <pc:docMk/>
           <pc:sldMk cId="1270242671" sldId="2147481213"/>
@@ -249,6 +338,14 @@
             <ac:spMk id="9" creationId="{5284A7BF-082D-AB49-2C20-F622A6F9DEB3}"/>
           </ac:spMkLst>
         </pc:spChg>
+        <pc:graphicFrameChg chg="mod modGraphic">
+          <ac:chgData name="Casey Lee" userId="4bc459e0-655e-452e-96c2-b918c0999cdb" providerId="ADAL" clId="{D71FFA72-407B-46EE-BB71-C6D17BEEF9AD}" dt="2026-03-02T15:56:08.529" v="165" actId="14734"/>
+          <ac:graphicFrameMkLst>
+            <pc:docMk/>
+            <pc:sldMk cId="1270242671" sldId="2147481213"/>
+            <ac:graphicFrameMk id="2" creationId="{38F22EE9-DEDC-E1DA-1E19-E1758E9C192D}"/>
+          </ac:graphicFrameMkLst>
+        </pc:graphicFrameChg>
       </pc:sldChg>
       <pc:sldChg chg="addSp delSp modSp add mod">
         <pc:chgData name="Casey Lee" userId="4bc459e0-655e-452e-96c2-b918c0999cdb" providerId="ADAL" clId="{D71FFA72-407B-46EE-BB71-C6D17BEEF9AD}" dt="2026-03-02T15:20:53.281" v="76" actId="14734"/>
@@ -1011,6 +1108,90 @@
   <p:cSld>
     <p:spTree>
       <p:nvGrpSpPr>
+        <p:cNvPr id="1" name=""/>
+        <p:cNvGrpSpPr/>
+        <p:nvPr/>
+      </p:nvGrpSpPr>
+      <p:grpSpPr>
+        <a:xfrm>
+          <a:off x="0" y="0"/>
+          <a:ext cx="0" cy="0"/>
+          <a:chOff x="0" y="0"/>
+          <a:chExt cx="0" cy="0"/>
+        </a:xfrm>
+      </p:grpSpPr>
+      <p:sp>
+        <p:nvSpPr>
+          <p:cNvPr id="2" name="Slide Image Placeholder 1"/>
+          <p:cNvSpPr>
+            <a:spLocks noGrp="1" noRot="1" noChangeAspect="1"/>
+          </p:cNvSpPr>
+          <p:nvPr>
+            <p:ph type="sldImg"/>
+          </p:nvPr>
+        </p:nvSpPr>
+        <p:spPr/>
+      </p:sp>
+      <p:sp>
+        <p:nvSpPr>
+          <p:cNvPr id="3" name="Notes Placeholder 2"/>
+          <p:cNvSpPr>
+            <a:spLocks noGrp="1"/>
+          </p:cNvSpPr>
+          <p:nvPr>
+            <p:ph type="body" idx="1"/>
+          </p:nvPr>
+        </p:nvSpPr>
+        <p:spPr/>
+        <p:txBody>
+          <a:bodyPr/>
+          <a:lstStyle/>
+          <a:p>
+            <a:endParaRPr lang="en-US"/>
+          </a:p>
+        </p:txBody>
+      </p:sp>
+      <p:sp>
+        <p:nvSpPr>
+          <p:cNvPr id="4" name="Slide Number Placeholder 3"/>
+          <p:cNvSpPr>
+            <a:spLocks noGrp="1"/>
+          </p:cNvSpPr>
+          <p:nvPr>
+            <p:ph type="sldNum" sz="quarter" idx="5"/>
+          </p:nvPr>
+        </p:nvSpPr>
+        <p:spPr/>
+        <p:txBody>
+          <a:bodyPr/>
+          <a:lstStyle/>
+          <a:p>
+            <a:fld id="{0B3F51BA-7433-1D4B-84CB-B35DE54FDFCD}" type="slidenum">
+              <a:rPr lang="en-US" smtClean="0"/>
+              <a:t>3</a:t>
+            </a:fld>
+            <a:endParaRPr lang="en-US"/>
+          </a:p>
+        </p:txBody>
+      </p:sp>
+    </p:spTree>
+    <p:extLst>
+      <p:ext uri="{BB962C8B-B14F-4D97-AF65-F5344CB8AC3E}">
+        <p14:creationId xmlns:p14="http://schemas.microsoft.com/office/powerpoint/2010/main" val="2785579703"/>
+      </p:ext>
+    </p:extLst>
+  </p:cSld>
+  <p:clrMapOvr>
+    <a:masterClrMapping/>
+  </p:clrMapOvr>
+</p:notes>
+</file>
+
+<file path=ppt/notesSlides/notesSlide3.xml><?xml version="1.0" encoding="utf-8"?>
+<p:notes xmlns:a="http://schemas.openxmlformats.org/drawingml/2006/main" xmlns:r="http://schemas.openxmlformats.org/officeDocument/2006/relationships" xmlns:p="http://schemas.openxmlformats.org/presentationml/2006/main">
+  <p:cSld>
+    <p:spTree>
+      <p:nvGrpSpPr>
         <p:cNvPr id="1" name="">
           <a:extLst>
             <a:ext uri="{FF2B5EF4-FFF2-40B4-BE49-F238E27FC236}">
@@ -1095,7 +1276,7 @@
           <a:p>
             <a:fld id="{0B3F51BA-7433-1D4B-84CB-B35DE54FDFCD}" type="slidenum">
               <a:rPr lang="en-US" smtClean="0"/>
-              <a:t>3</a:t>
+              <a:t>4</a:t>
             </a:fld>
             <a:endParaRPr lang="en-US"/>
           </a:p>
@@ -1114,7 +1295,7 @@
 </p:notes>
 </file>
 
-<file path=ppt/notesSlides/notesSlide3.xml><?xml version="1.0" encoding="utf-8"?>
+<file path=ppt/notesSlides/notesSlide4.xml><?xml version="1.0" encoding="utf-8"?>
 <p:notes xmlns:a="http://schemas.openxmlformats.org/drawingml/2006/main" xmlns:r="http://schemas.openxmlformats.org/officeDocument/2006/relationships" xmlns:p="http://schemas.openxmlformats.org/presentationml/2006/main">
   <p:cSld>
     <p:spTree>
@@ -1203,7 +1384,7 @@
           <a:p>
             <a:fld id="{0B3F51BA-7433-1D4B-84CB-B35DE54FDFCD}" type="slidenum">
               <a:rPr lang="en-US" smtClean="0"/>
-              <a:t>4</a:t>
+              <a:t>5</a:t>
             </a:fld>
             <a:endParaRPr lang="en-US"/>
           </a:p>
@@ -1213,6 +1394,318 @@
     <p:extLst>
       <p:ext uri="{BB962C8B-B14F-4D97-AF65-F5344CB8AC3E}">
         <p14:creationId xmlns:p14="http://schemas.microsoft.com/office/powerpoint/2010/main" val="1051412250"/>
+      </p:ext>
+    </p:extLst>
+  </p:cSld>
+  <p:clrMapOvr>
+    <a:masterClrMapping/>
+  </p:clrMapOvr>
+</p:notes>
+</file>
+
+<file path=ppt/notesSlides/notesSlide5.xml><?xml version="1.0" encoding="utf-8"?>
+<p:notes xmlns:a="http://schemas.openxmlformats.org/drawingml/2006/main" xmlns:r="http://schemas.openxmlformats.org/officeDocument/2006/relationships" xmlns:p="http://schemas.openxmlformats.org/presentationml/2006/main">
+  <p:cSld>
+    <p:spTree>
+      <p:nvGrpSpPr>
+        <p:cNvPr id="1" name=""/>
+        <p:cNvGrpSpPr/>
+        <p:nvPr/>
+      </p:nvGrpSpPr>
+      <p:grpSpPr>
+        <a:xfrm>
+          <a:off x="0" y="0"/>
+          <a:ext cx="0" cy="0"/>
+          <a:chOff x="0" y="0"/>
+          <a:chExt cx="0" cy="0"/>
+        </a:xfrm>
+      </p:grpSpPr>
+      <p:sp>
+        <p:nvSpPr>
+          <p:cNvPr id="2" name="Slide Image Placeholder 1"/>
+          <p:cNvSpPr>
+            <a:spLocks noGrp="1" noRot="1" noChangeAspect="1"/>
+          </p:cNvSpPr>
+          <p:nvPr>
+            <p:ph type="sldImg"/>
+          </p:nvPr>
+        </p:nvSpPr>
+        <p:spPr/>
+      </p:sp>
+      <p:sp>
+        <p:nvSpPr>
+          <p:cNvPr id="3" name="Notes Placeholder 2"/>
+          <p:cNvSpPr>
+            <a:spLocks noGrp="1"/>
+          </p:cNvSpPr>
+          <p:nvPr>
+            <p:ph type="body" idx="1"/>
+          </p:nvPr>
+        </p:nvSpPr>
+        <p:spPr/>
+        <p:txBody>
+          <a:bodyPr/>
+          <a:lstStyle/>
+          <a:p>
+            <a:endParaRPr lang="en-US"/>
+          </a:p>
+        </p:txBody>
+      </p:sp>
+      <p:sp>
+        <p:nvSpPr>
+          <p:cNvPr id="4" name="Slide Number Placeholder 3"/>
+          <p:cNvSpPr>
+            <a:spLocks noGrp="1"/>
+          </p:cNvSpPr>
+          <p:nvPr>
+            <p:ph type="sldNum" sz="quarter" idx="10"/>
+          </p:nvPr>
+        </p:nvSpPr>
+        <p:spPr/>
+        <p:txBody>
+          <a:bodyPr/>
+          <a:lstStyle/>
+          <a:p>
+            <a:pPr marL="0" marR="0" lvl="0" indent="0" algn="r" defTabSz="914400" rtl="0" eaLnBrk="1" fontAlgn="auto" latinLnBrk="0" hangingPunct="1">
+              <a:lnSpc>
+                <a:spcPct val="100000"/>
+              </a:lnSpc>
+              <a:spcBef>
+                <a:spcPts val="0"/>
+              </a:spcBef>
+              <a:spcAft>
+                <a:spcPts val="0"/>
+              </a:spcAft>
+              <a:buClrTx/>
+              <a:buSzTx/>
+              <a:buFontTx/>
+              <a:buNone/>
+              <a:tabLst/>
+              <a:defRPr/>
+            </a:pPr>
+            <a:fld id="{F7021451-1387-4CA6-816F-3879F97B5CBC}" type="slidenum">
+              <a:rPr kumimoji="0" lang="en-US" sz="1200" b="0" i="0" u="none" strike="noStrike" kern="1200" cap="none" spc="0" normalizeH="0" baseline="0" noProof="0">
+                <a:ln>
+                  <a:noFill/>
+                </a:ln>
+                <a:solidFill>
+                  <a:prstClr val="black"/>
+                </a:solidFill>
+                <a:effectLst/>
+                <a:uLnTx/>
+                <a:uFillTx/>
+                <a:latin typeface="Calibri" panose="020F0502020204030204"/>
+                <a:ea typeface="+mn-ea"/>
+                <a:cs typeface="+mn-cs"/>
+              </a:rPr>
+              <a:pPr marL="0" marR="0" lvl="0" indent="0" algn="r" defTabSz="914400" rtl="0" eaLnBrk="1" fontAlgn="auto" latinLnBrk="0" hangingPunct="1">
+                <a:lnSpc>
+                  <a:spcPct val="100000"/>
+                </a:lnSpc>
+                <a:spcBef>
+                  <a:spcPts val="0"/>
+                </a:spcBef>
+                <a:spcAft>
+                  <a:spcPts val="0"/>
+                </a:spcAft>
+                <a:buClrTx/>
+                <a:buSzTx/>
+                <a:buFontTx/>
+                <a:buNone/>
+                <a:tabLst/>
+                <a:defRPr/>
+              </a:pPr>
+              <a:t>6</a:t>
+            </a:fld>
+            <a:endParaRPr kumimoji="0" lang="en-US" sz="1200" b="0" i="0" u="none" strike="noStrike" kern="1200" cap="none" spc="0" normalizeH="0" baseline="0" noProof="0">
+              <a:ln>
+                <a:noFill/>
+              </a:ln>
+              <a:solidFill>
+                <a:prstClr val="black"/>
+              </a:solidFill>
+              <a:effectLst/>
+              <a:uLnTx/>
+              <a:uFillTx/>
+              <a:latin typeface="Calibri" panose="020F0502020204030204"/>
+              <a:ea typeface="+mn-ea"/>
+              <a:cs typeface="+mn-cs"/>
+            </a:endParaRPr>
+          </a:p>
+        </p:txBody>
+      </p:sp>
+    </p:spTree>
+    <p:extLst>
+      <p:ext uri="{BB962C8B-B14F-4D97-AF65-F5344CB8AC3E}">
+        <p14:creationId xmlns:p14="http://schemas.microsoft.com/office/powerpoint/2010/main" val="1024086991"/>
+      </p:ext>
+    </p:extLst>
+  </p:cSld>
+  <p:clrMapOvr>
+    <a:masterClrMapping/>
+  </p:clrMapOvr>
+</p:notes>
+</file>
+
+<file path=ppt/notesSlides/notesSlide6.xml><?xml version="1.0" encoding="utf-8"?>
+<p:notes xmlns:a="http://schemas.openxmlformats.org/drawingml/2006/main" xmlns:r="http://schemas.openxmlformats.org/officeDocument/2006/relationships" xmlns:p="http://schemas.openxmlformats.org/presentationml/2006/main">
+  <p:cSld>
+    <p:spTree>
+      <p:nvGrpSpPr>
+        <p:cNvPr id="1" name="">
+          <a:extLst>
+            <a:ext uri="{FF2B5EF4-FFF2-40B4-BE49-F238E27FC236}">
+              <a16:creationId xmlns:a16="http://schemas.microsoft.com/office/drawing/2014/main" id="{7D4251C4-00F4-E016-08EC-2F2CAFC7E63E}"/>
+            </a:ext>
+          </a:extLst>
+        </p:cNvPr>
+        <p:cNvGrpSpPr/>
+        <p:nvPr/>
+      </p:nvGrpSpPr>
+      <p:grpSpPr>
+        <a:xfrm>
+          <a:off x="0" y="0"/>
+          <a:ext cx="0" cy="0"/>
+          <a:chOff x="0" y="0"/>
+          <a:chExt cx="0" cy="0"/>
+        </a:xfrm>
+      </p:grpSpPr>
+      <p:sp>
+        <p:nvSpPr>
+          <p:cNvPr id="2" name="Slide Image Placeholder 1">
+            <a:extLst>
+              <a:ext uri="{FF2B5EF4-FFF2-40B4-BE49-F238E27FC236}">
+                <a16:creationId xmlns:a16="http://schemas.microsoft.com/office/drawing/2014/main" id="{378B71E9-11BA-C7DA-7CA3-BF09BE06C666}"/>
+              </a:ext>
+            </a:extLst>
+          </p:cNvPr>
+          <p:cNvSpPr>
+            <a:spLocks noGrp="1" noRot="1" noChangeAspect="1"/>
+          </p:cNvSpPr>
+          <p:nvPr>
+            <p:ph type="sldImg"/>
+          </p:nvPr>
+        </p:nvSpPr>
+        <p:spPr/>
+      </p:sp>
+      <p:sp>
+        <p:nvSpPr>
+          <p:cNvPr id="3" name="Notes Placeholder 2">
+            <a:extLst>
+              <a:ext uri="{FF2B5EF4-FFF2-40B4-BE49-F238E27FC236}">
+                <a16:creationId xmlns:a16="http://schemas.microsoft.com/office/drawing/2014/main" id="{C250D7AB-61B7-5968-C112-217BEAFAA811}"/>
+              </a:ext>
+            </a:extLst>
+          </p:cNvPr>
+          <p:cNvSpPr>
+            <a:spLocks noGrp="1"/>
+          </p:cNvSpPr>
+          <p:nvPr>
+            <p:ph type="body" idx="1"/>
+          </p:nvPr>
+        </p:nvSpPr>
+        <p:spPr/>
+        <p:txBody>
+          <a:bodyPr/>
+          <a:lstStyle/>
+          <a:p>
+            <a:endParaRPr lang="en-US"/>
+          </a:p>
+        </p:txBody>
+      </p:sp>
+      <p:sp>
+        <p:nvSpPr>
+          <p:cNvPr id="4" name="Slide Number Placeholder 3">
+            <a:extLst>
+              <a:ext uri="{FF2B5EF4-FFF2-40B4-BE49-F238E27FC236}">
+                <a16:creationId xmlns:a16="http://schemas.microsoft.com/office/drawing/2014/main" id="{8A8ACE30-E195-C1AA-9DA1-A38EEC070244}"/>
+              </a:ext>
+            </a:extLst>
+          </p:cNvPr>
+          <p:cNvSpPr>
+            <a:spLocks noGrp="1"/>
+          </p:cNvSpPr>
+          <p:nvPr>
+            <p:ph type="sldNum" sz="quarter" idx="10"/>
+          </p:nvPr>
+        </p:nvSpPr>
+        <p:spPr/>
+        <p:txBody>
+          <a:bodyPr/>
+          <a:lstStyle/>
+          <a:p>
+            <a:pPr marL="0" marR="0" lvl="0" indent="0" algn="r" defTabSz="914400" rtl="0" eaLnBrk="1" fontAlgn="auto" latinLnBrk="0" hangingPunct="1">
+              <a:lnSpc>
+                <a:spcPct val="100000"/>
+              </a:lnSpc>
+              <a:spcBef>
+                <a:spcPts val="0"/>
+              </a:spcBef>
+              <a:spcAft>
+                <a:spcPts val="0"/>
+              </a:spcAft>
+              <a:buClrTx/>
+              <a:buSzTx/>
+              <a:buFontTx/>
+              <a:buNone/>
+              <a:tabLst/>
+              <a:defRPr/>
+            </a:pPr>
+            <a:fld id="{F7021451-1387-4CA6-816F-3879F97B5CBC}" type="slidenum">
+              <a:rPr kumimoji="0" lang="en-US" sz="1200" b="0" i="0" u="none" strike="noStrike" kern="1200" cap="none" spc="0" normalizeH="0" baseline="0" noProof="0">
+                <a:ln>
+                  <a:noFill/>
+                </a:ln>
+                <a:solidFill>
+                  <a:prstClr val="black"/>
+                </a:solidFill>
+                <a:effectLst/>
+                <a:uLnTx/>
+                <a:uFillTx/>
+                <a:latin typeface="Calibri" panose="020F0502020204030204"/>
+                <a:ea typeface="+mn-ea"/>
+                <a:cs typeface="+mn-cs"/>
+              </a:rPr>
+              <a:pPr marL="0" marR="0" lvl="0" indent="0" algn="r" defTabSz="914400" rtl="0" eaLnBrk="1" fontAlgn="auto" latinLnBrk="0" hangingPunct="1">
+                <a:lnSpc>
+                  <a:spcPct val="100000"/>
+                </a:lnSpc>
+                <a:spcBef>
+                  <a:spcPts val="0"/>
+                </a:spcBef>
+                <a:spcAft>
+                  <a:spcPts val="0"/>
+                </a:spcAft>
+                <a:buClrTx/>
+                <a:buSzTx/>
+                <a:buFontTx/>
+                <a:buNone/>
+                <a:tabLst/>
+                <a:defRPr/>
+              </a:pPr>
+              <a:t>7</a:t>
+            </a:fld>
+            <a:endParaRPr kumimoji="0" lang="en-US" sz="1200" b="0" i="0" u="none" strike="noStrike" kern="1200" cap="none" spc="0" normalizeH="0" baseline="0" noProof="0">
+              <a:ln>
+                <a:noFill/>
+              </a:ln>
+              <a:solidFill>
+                <a:prstClr val="black"/>
+              </a:solidFill>
+              <a:effectLst/>
+              <a:uLnTx/>
+              <a:uFillTx/>
+              <a:latin typeface="Calibri" panose="020F0502020204030204"/>
+              <a:ea typeface="+mn-ea"/>
+              <a:cs typeface="+mn-cs"/>
+            </a:endParaRPr>
+          </a:p>
+        </p:txBody>
+      </p:sp>
+    </p:spTree>
+    <p:extLst>
+      <p:ext uri="{BB962C8B-B14F-4D97-AF65-F5344CB8AC3E}">
+        <p14:creationId xmlns:p14="http://schemas.microsoft.com/office/powerpoint/2010/main" val="3109004836"/>
       </p:ext>
     </p:extLst>
   </p:cSld>
@@ -2478,6 +2971,469 @@
 </file>
 
 <file path=ppt/slideLayouts/slideLayout13.xml><?xml version="1.0" encoding="utf-8"?>
+<p:sldLayout xmlns:a="http://schemas.openxmlformats.org/drawingml/2006/main" xmlns:r="http://schemas.openxmlformats.org/officeDocument/2006/relationships" xmlns:p="http://schemas.openxmlformats.org/presentationml/2006/main" userDrawn="1">
+  <p:cSld name="11_Horizontal_blank">
+    <p:spTree>
+      <p:nvGrpSpPr>
+        <p:cNvPr id="1" name=""/>
+        <p:cNvGrpSpPr/>
+        <p:nvPr/>
+      </p:nvGrpSpPr>
+      <p:grpSpPr>
+        <a:xfrm>
+          <a:off x="0" y="0"/>
+          <a:ext cx="0" cy="0"/>
+          <a:chOff x="0" y="0"/>
+          <a:chExt cx="0" cy="0"/>
+        </a:xfrm>
+      </p:grpSpPr>
+      <p:sp>
+        <p:nvSpPr>
+          <p:cNvPr id="25" name="Rectangle 24">
+            <a:extLst>
+              <a:ext uri="{FF2B5EF4-FFF2-40B4-BE49-F238E27FC236}">
+                <a16:creationId xmlns:a16="http://schemas.microsoft.com/office/drawing/2014/main" id="{8C515B59-CEEF-D1D0-69F3-529872FD67FC}"/>
+              </a:ext>
+            </a:extLst>
+          </p:cNvPr>
+          <p:cNvSpPr/>
+          <p:nvPr userDrawn="1"/>
+        </p:nvSpPr>
+        <p:spPr>
+          <a:xfrm>
+            <a:off x="0" y="0"/>
+            <a:ext cx="12192000" cy="2576090"/>
+          </a:xfrm>
+          <a:prstGeom prst="rect">
+            <a:avLst/>
+          </a:prstGeom>
+          <a:solidFill>
+            <a:schemeClr val="tx1">
+              <a:alpha val="4000"/>
+            </a:schemeClr>
+          </a:solidFill>
+          <a:ln>
+            <a:noFill/>
+          </a:ln>
+        </p:spPr>
+        <p:style>
+          <a:lnRef idx="2">
+            <a:schemeClr val="accent1">
+              <a:shade val="50000"/>
+            </a:schemeClr>
+          </a:lnRef>
+          <a:fillRef idx="1">
+            <a:schemeClr val="accent1"/>
+          </a:fillRef>
+          <a:effectRef idx="0">
+            <a:schemeClr val="accent1"/>
+          </a:effectRef>
+          <a:fontRef idx="minor">
+            <a:schemeClr val="lt1"/>
+          </a:fontRef>
+        </p:style>
+        <p:txBody>
+          <a:bodyPr rtlCol="0" anchor="ctr"/>
+          <a:lstStyle/>
+          <a:p>
+            <a:pPr algn="ctr"/>
+            <a:endParaRPr lang="en-US"/>
+          </a:p>
+        </p:txBody>
+      </p:sp>
+      <p:sp>
+        <p:nvSpPr>
+          <p:cNvPr id="4" name="Slide Number Placeholder 5">
+            <a:extLst>
+              <a:ext uri="{FF2B5EF4-FFF2-40B4-BE49-F238E27FC236}">
+                <a16:creationId xmlns:a16="http://schemas.microsoft.com/office/drawing/2014/main" id="{FAE0EA03-33B8-515F-E9A9-4E5837CE00AB}"/>
+              </a:ext>
+            </a:extLst>
+          </p:cNvPr>
+          <p:cNvSpPr txBox="1">
+            <a:spLocks/>
+          </p:cNvSpPr>
+          <p:nvPr userDrawn="1"/>
+        </p:nvSpPr>
+        <p:spPr>
+          <a:xfrm>
+            <a:off x="78952" y="6361009"/>
+            <a:ext cx="629079" cy="489496"/>
+          </a:xfrm>
+          <a:prstGeom prst="rect">
+            <a:avLst/>
+          </a:prstGeom>
+        </p:spPr>
+        <p:txBody>
+          <a:bodyPr vert="horz" wrap="none" lIns="121920" tIns="60960" rIns="121920" bIns="60960" rtlCol="0" anchor="ctr">
+            <a:noAutofit/>
+          </a:bodyPr>
+          <a:lstStyle>
+            <a:defPPr>
+              <a:defRPr lang="en-US"/>
+            </a:defPPr>
+            <a:lvl1pPr marL="0" algn="r" defTabSz="914400" rtl="0" eaLnBrk="1" latinLnBrk="0" hangingPunct="1">
+              <a:defRPr sz="1200" kern="1200">
+                <a:solidFill>
+                  <a:schemeClr val="tx1">
+                    <a:tint val="75000"/>
+                  </a:schemeClr>
+                </a:solidFill>
+                <a:latin typeface="+mn-lt"/>
+                <a:ea typeface="+mn-ea"/>
+                <a:cs typeface="+mn-cs"/>
+              </a:defRPr>
+            </a:lvl1pPr>
+            <a:lvl2pPr marL="457200" algn="l" defTabSz="914400" rtl="0" eaLnBrk="1" latinLnBrk="0" hangingPunct="1">
+              <a:defRPr sz="1800" kern="1200">
+                <a:solidFill>
+                  <a:schemeClr val="tx1"/>
+                </a:solidFill>
+                <a:latin typeface="+mn-lt"/>
+                <a:ea typeface="+mn-ea"/>
+                <a:cs typeface="+mn-cs"/>
+              </a:defRPr>
+            </a:lvl2pPr>
+            <a:lvl3pPr marL="914400" algn="l" defTabSz="914400" rtl="0" eaLnBrk="1" latinLnBrk="0" hangingPunct="1">
+              <a:defRPr sz="1800" kern="1200">
+                <a:solidFill>
+                  <a:schemeClr val="tx1"/>
+                </a:solidFill>
+                <a:latin typeface="+mn-lt"/>
+                <a:ea typeface="+mn-ea"/>
+                <a:cs typeface="+mn-cs"/>
+              </a:defRPr>
+            </a:lvl3pPr>
+            <a:lvl4pPr marL="1371600" algn="l" defTabSz="914400" rtl="0" eaLnBrk="1" latinLnBrk="0" hangingPunct="1">
+              <a:defRPr sz="1800" kern="1200">
+                <a:solidFill>
+                  <a:schemeClr val="tx1"/>
+                </a:solidFill>
+                <a:latin typeface="+mn-lt"/>
+                <a:ea typeface="+mn-ea"/>
+                <a:cs typeface="+mn-cs"/>
+              </a:defRPr>
+            </a:lvl4pPr>
+            <a:lvl5pPr marL="1828800" algn="l" defTabSz="914400" rtl="0" eaLnBrk="1" latinLnBrk="0" hangingPunct="1">
+              <a:defRPr sz="1800" kern="1200">
+                <a:solidFill>
+                  <a:schemeClr val="tx1"/>
+                </a:solidFill>
+                <a:latin typeface="+mn-lt"/>
+                <a:ea typeface="+mn-ea"/>
+                <a:cs typeface="+mn-cs"/>
+              </a:defRPr>
+            </a:lvl5pPr>
+            <a:lvl6pPr marL="2286000" algn="l" defTabSz="914400" rtl="0" eaLnBrk="1" latinLnBrk="0" hangingPunct="1">
+              <a:defRPr sz="1800" kern="1200">
+                <a:solidFill>
+                  <a:schemeClr val="tx1"/>
+                </a:solidFill>
+                <a:latin typeface="+mn-lt"/>
+                <a:ea typeface="+mn-ea"/>
+                <a:cs typeface="+mn-cs"/>
+              </a:defRPr>
+            </a:lvl6pPr>
+            <a:lvl7pPr marL="2743200" algn="l" defTabSz="914400" rtl="0" eaLnBrk="1" latinLnBrk="0" hangingPunct="1">
+              <a:defRPr sz="1800" kern="1200">
+                <a:solidFill>
+                  <a:schemeClr val="tx1"/>
+                </a:solidFill>
+                <a:latin typeface="+mn-lt"/>
+                <a:ea typeface="+mn-ea"/>
+                <a:cs typeface="+mn-cs"/>
+              </a:defRPr>
+            </a:lvl7pPr>
+            <a:lvl8pPr marL="3200400" algn="l" defTabSz="914400" rtl="0" eaLnBrk="1" latinLnBrk="0" hangingPunct="1">
+              <a:defRPr sz="1800" kern="1200">
+                <a:solidFill>
+                  <a:schemeClr val="tx1"/>
+                </a:solidFill>
+                <a:latin typeface="+mn-lt"/>
+                <a:ea typeface="+mn-ea"/>
+                <a:cs typeface="+mn-cs"/>
+              </a:defRPr>
+            </a:lvl8pPr>
+            <a:lvl9pPr marL="3657600" algn="l" defTabSz="914400" rtl="0" eaLnBrk="1" latinLnBrk="0" hangingPunct="1">
+              <a:defRPr sz="1800" kern="1200">
+                <a:solidFill>
+                  <a:schemeClr val="tx1"/>
+                </a:solidFill>
+                <a:latin typeface="+mn-lt"/>
+                <a:ea typeface="+mn-ea"/>
+                <a:cs typeface="+mn-cs"/>
+              </a:defRPr>
+            </a:lvl9pPr>
+          </a:lstStyle>
+          <a:p>
+            <a:pPr algn="ctr"/>
+            <a:fld id="{1A290D8D-6BA0-418D-AFED-C65293F70DA0}" type="slidenum">
+              <a:rPr lang="en-US" sz="1400" b="1" i="0" smtClean="0">
+                <a:solidFill>
+                  <a:schemeClr val="accent1"/>
+                </a:solidFill>
+                <a:latin typeface="+mj-lt"/>
+                <a:ea typeface="Bebas Neue Bold" charset="0"/>
+                <a:cs typeface="Bebas Neue Bold" charset="0"/>
+              </a:rPr>
+              <a:pPr algn="ctr"/>
+              <a:t>‹#›</a:t>
+            </a:fld>
+            <a:endParaRPr lang="en-US" sz="1400" b="1" i="0">
+              <a:solidFill>
+                <a:schemeClr val="accent1"/>
+              </a:solidFill>
+              <a:latin typeface="+mj-lt"/>
+              <a:ea typeface="Bebas Neue Bold" charset="0"/>
+              <a:cs typeface="Bebas Neue Bold" charset="0"/>
+            </a:endParaRPr>
+          </a:p>
+        </p:txBody>
+      </p:sp>
+      <p:sp>
+        <p:nvSpPr>
+          <p:cNvPr id="8" name="Title 23">
+            <a:extLst>
+              <a:ext uri="{FF2B5EF4-FFF2-40B4-BE49-F238E27FC236}">
+                <a16:creationId xmlns:a16="http://schemas.microsoft.com/office/drawing/2014/main" id="{94C4D53A-329E-13AD-C1F8-86A81BC65A2F}"/>
+              </a:ext>
+            </a:extLst>
+          </p:cNvPr>
+          <p:cNvSpPr>
+            <a:spLocks noGrp="1"/>
+          </p:cNvSpPr>
+          <p:nvPr>
+            <p:ph type="title"/>
+          </p:nvPr>
+        </p:nvSpPr>
+        <p:spPr>
+          <a:xfrm>
+            <a:off x="998331" y="786983"/>
+            <a:ext cx="10195337" cy="743005"/>
+          </a:xfrm>
+          <a:prstGeom prst="rect">
+            <a:avLst/>
+          </a:prstGeom>
+        </p:spPr>
+        <p:txBody>
+          <a:bodyPr wrap="square" lIns="0" anchor="t" anchorCtr="0">
+            <a:spAutoFit/>
+          </a:bodyPr>
+          <a:lstStyle>
+            <a:lvl1pPr>
+              <a:lnSpc>
+                <a:spcPct val="80000"/>
+              </a:lnSpc>
+              <a:defRPr sz="2400">
+                <a:solidFill>
+                  <a:schemeClr val="accent1"/>
+                </a:solidFill>
+              </a:defRPr>
+            </a:lvl1pPr>
+          </a:lstStyle>
+          <a:p>
+            <a:endParaRPr lang="en-US"/>
+          </a:p>
+        </p:txBody>
+      </p:sp>
+      <p:sp>
+        <p:nvSpPr>
+          <p:cNvPr id="9" name="Subtext">
+            <a:extLst>
+              <a:ext uri="{FF2B5EF4-FFF2-40B4-BE49-F238E27FC236}">
+                <a16:creationId xmlns:a16="http://schemas.microsoft.com/office/drawing/2014/main" id="{30995445-651B-DCFF-488B-D261BC86C53C}"/>
+              </a:ext>
+            </a:extLst>
+          </p:cNvPr>
+          <p:cNvSpPr>
+            <a:spLocks noGrp="1"/>
+          </p:cNvSpPr>
+          <p:nvPr>
+            <p:ph type="body" sz="quarter" idx="14"/>
+          </p:nvPr>
+        </p:nvSpPr>
+        <p:spPr>
+          <a:xfrm>
+            <a:off x="998331" y="1529988"/>
+            <a:ext cx="3554243" cy="274627"/>
+          </a:xfrm>
+          <a:prstGeom prst="rect">
+            <a:avLst/>
+          </a:prstGeom>
+        </p:spPr>
+        <p:txBody>
+          <a:bodyPr wrap="square" lIns="0">
+            <a:spAutoFit/>
+          </a:bodyPr>
+          <a:lstStyle>
+            <a:lvl1pPr marL="0" indent="0">
+              <a:buNone/>
+              <a:defRPr lang="en-US" sz="1400" b="1" kern="1200" spc="0" dirty="0">
+                <a:solidFill>
+                  <a:schemeClr val="tx1"/>
+                </a:solidFill>
+                <a:latin typeface="+mj-lt"/>
+                <a:ea typeface="Bebas Neue Bold" charset="0"/>
+                <a:cs typeface="Bebas Neue Bold" charset="0"/>
+              </a:defRPr>
+            </a:lvl1pPr>
+          </a:lstStyle>
+          <a:p>
+            <a:pPr marL="0" lvl="0" algn="l" defTabSz="914400" rtl="0" eaLnBrk="1" latinLnBrk="0" hangingPunct="1">
+              <a:lnSpc>
+                <a:spcPct val="80000"/>
+              </a:lnSpc>
+            </a:pPr>
+            <a:endParaRPr lang="en-US"/>
+          </a:p>
+        </p:txBody>
+      </p:sp>
+      <p:sp>
+        <p:nvSpPr>
+          <p:cNvPr id="10" name="Text Placeholder 14">
+            <a:extLst>
+              <a:ext uri="{FF2B5EF4-FFF2-40B4-BE49-F238E27FC236}">
+                <a16:creationId xmlns:a16="http://schemas.microsoft.com/office/drawing/2014/main" id="{01F1991C-44F6-8155-A4F1-24721B80D56A}"/>
+              </a:ext>
+            </a:extLst>
+          </p:cNvPr>
+          <p:cNvSpPr>
+            <a:spLocks noGrp="1"/>
+          </p:cNvSpPr>
+          <p:nvPr>
+            <p:ph type="body" sz="quarter" idx="18"/>
+          </p:nvPr>
+        </p:nvSpPr>
+        <p:spPr>
+          <a:xfrm>
+            <a:off x="981856" y="1816194"/>
+            <a:ext cx="10228288" cy="743005"/>
+          </a:xfrm>
+          <a:prstGeom prst="rect">
+            <a:avLst/>
+          </a:prstGeom>
+        </p:spPr>
+        <p:txBody>
+          <a:bodyPr wrap="square" lIns="0">
+            <a:spAutoFit/>
+          </a:bodyPr>
+          <a:lstStyle>
+            <a:lvl1pPr marL="0" marR="0" indent="0" algn="l" defTabSz="914400" rtl="0" eaLnBrk="1" fontAlgn="auto" latinLnBrk="0" hangingPunct="1">
+              <a:lnSpc>
+                <a:spcPts val="1750"/>
+              </a:lnSpc>
+              <a:spcBef>
+                <a:spcPts val="1000"/>
+              </a:spcBef>
+              <a:spcAft>
+                <a:spcPts val="0"/>
+              </a:spcAft>
+              <a:buClrTx/>
+              <a:buSzTx/>
+              <a:buFont typeface="Arial" panose="020B0604020202020204" pitchFamily="34" charset="0"/>
+              <a:buNone/>
+              <a:tabLst/>
+              <a:defRPr sz="1200" b="0" i="0">
+                <a:latin typeface="TeleNeo Office" panose="020B0504040202090203" pitchFamily="34" charset="77"/>
+              </a:defRPr>
+            </a:lvl1pPr>
+            <a:lvl4pPr marL="1371600" indent="0">
+              <a:buNone/>
+              <a:defRPr/>
+            </a:lvl4pPr>
+            <a:lvl5pPr marL="1828800" indent="0">
+              <a:buNone/>
+              <a:defRPr/>
+            </a:lvl5pPr>
+          </a:lstStyle>
+          <a:p>
+            <a:pPr marL="0" marR="0" lvl="0" indent="0" algn="l" defTabSz="914400" rtl="0" eaLnBrk="1" fontAlgn="auto" latinLnBrk="0" hangingPunct="1">
+              <a:lnSpc>
+                <a:spcPts val="1750"/>
+              </a:lnSpc>
+              <a:spcBef>
+                <a:spcPts val="1000"/>
+              </a:spcBef>
+              <a:spcAft>
+                <a:spcPts val="0"/>
+              </a:spcAft>
+              <a:buClrTx/>
+              <a:buSzTx/>
+              <a:buFont typeface="Arial" panose="020B0604020202020204" pitchFamily="34" charset="0"/>
+              <a:buNone/>
+              <a:tabLst/>
+              <a:defRPr/>
+            </a:pPr>
+            <a:endParaRPr lang="en-US"/>
+          </a:p>
+        </p:txBody>
+      </p:sp>
+      <p:sp>
+        <p:nvSpPr>
+          <p:cNvPr id="11" name="Subtext">
+            <a:extLst>
+              <a:ext uri="{FF2B5EF4-FFF2-40B4-BE49-F238E27FC236}">
+                <a16:creationId xmlns:a16="http://schemas.microsoft.com/office/drawing/2014/main" id="{3641C842-A26A-F188-6E2B-9ADFE1D6B723}"/>
+              </a:ext>
+            </a:extLst>
+          </p:cNvPr>
+          <p:cNvSpPr>
+            <a:spLocks noGrp="1"/>
+          </p:cNvSpPr>
+          <p:nvPr>
+            <p:ph type="body" sz="quarter" idx="26"/>
+          </p:nvPr>
+        </p:nvSpPr>
+        <p:spPr>
+          <a:xfrm rot="16200000">
+            <a:off x="-985112" y="4842292"/>
+            <a:ext cx="2816585" cy="196529"/>
+          </a:xfrm>
+          <a:prstGeom prst="rect">
+            <a:avLst/>
+          </a:prstGeom>
+        </p:spPr>
+        <p:txBody>
+          <a:bodyPr wrap="square" lIns="0" anchor="ctr">
+            <a:spAutoFit/>
+          </a:bodyPr>
+          <a:lstStyle>
+            <a:lvl1pPr marL="0" indent="0">
+              <a:buNone/>
+              <a:defRPr lang="en-US" sz="800" b="1" kern="1200" spc="300" dirty="0">
+                <a:solidFill>
+                  <a:schemeClr val="tx1"/>
+                </a:solidFill>
+                <a:latin typeface="TeleNeo Office ExtraBold" panose="020B0504040202090203" pitchFamily="34" charset="77"/>
+                <a:ea typeface="Bebas Neue Bold" charset="0"/>
+                <a:cs typeface="Bebas Neue Bold" charset="0"/>
+              </a:defRPr>
+            </a:lvl1pPr>
+          </a:lstStyle>
+          <a:p>
+            <a:pPr marL="0" lvl="0" algn="l" defTabSz="914400" rtl="0" eaLnBrk="1" latinLnBrk="0" hangingPunct="1">
+              <a:lnSpc>
+                <a:spcPct val="80000"/>
+              </a:lnSpc>
+            </a:pPr>
+            <a:endParaRPr lang="en-US"/>
+          </a:p>
+        </p:txBody>
+      </p:sp>
+    </p:spTree>
+    <p:extLst>
+      <p:ext uri="{BB962C8B-B14F-4D97-AF65-F5344CB8AC3E}">
+        <p14:creationId xmlns:p14="http://schemas.microsoft.com/office/powerpoint/2010/main" val="2567560091"/>
+      </p:ext>
+    </p:extLst>
+  </p:cSld>
+  <p:clrMapOvr>
+    <a:masterClrMapping/>
+  </p:clrMapOvr>
+</p:sldLayout>
+</file>
+
+<file path=ppt/slideLayouts/slideLayout14.xml><?xml version="1.0" encoding="utf-8"?>
 <p:sldLayout xmlns:a="http://schemas.openxmlformats.org/drawingml/2006/main" xmlns:r="http://schemas.openxmlformats.org/officeDocument/2006/relationships" xmlns:p="http://schemas.openxmlformats.org/presentationml/2006/main" preserve="1" userDrawn="1">
   <p:cSld name="2_Agenda">
     <p:bg>
@@ -2828,7 +3784,7 @@
 </p:sldLayout>
 </file>
 
-<file path=ppt/slideLayouts/slideLayout14.xml><?xml version="1.0" encoding="utf-8"?>
+<file path=ppt/slideLayouts/slideLayout15.xml><?xml version="1.0" encoding="utf-8"?>
 <p:sldLayout xmlns:a="http://schemas.openxmlformats.org/drawingml/2006/main" xmlns:r="http://schemas.openxmlformats.org/officeDocument/2006/relationships" xmlns:p="http://schemas.openxmlformats.org/presentationml/2006/main" preserve="1" userDrawn="1">
   <p:cSld name="3_Section-Divider">
     <p:bg>
@@ -3075,7 +4031,7 @@
 </p:sldLayout>
 </file>
 
-<file path=ppt/slideLayouts/slideLayout15.xml><?xml version="1.0" encoding="utf-8"?>
+<file path=ppt/slideLayouts/slideLayout16.xml><?xml version="1.0" encoding="utf-8"?>
 <p:sldLayout xmlns:a="http://schemas.openxmlformats.org/drawingml/2006/main" xmlns:r="http://schemas.openxmlformats.org/officeDocument/2006/relationships" xmlns:p="http://schemas.openxmlformats.org/presentationml/2006/main" preserve="1" userDrawn="1">
   <p:cSld name="11_Blank">
     <p:spTree>
@@ -4300,7 +5256,7 @@
 </p:sldLayout>
 </file>
 
-<file path=ppt/slideLayouts/slideLayout16.xml><?xml version="1.0" encoding="utf-8"?>
+<file path=ppt/slideLayouts/slideLayout17.xml><?xml version="1.0" encoding="utf-8"?>
 <p:sldLayout xmlns:a="http://schemas.openxmlformats.org/drawingml/2006/main" xmlns:r="http://schemas.openxmlformats.org/officeDocument/2006/relationships" xmlns:p="http://schemas.openxmlformats.org/presentationml/2006/main" preserve="1" userDrawn="1">
   <p:cSld name="11_Blank-Benchmarks">
     <p:spTree>
@@ -5525,7 +6481,7 @@
 </p:sldLayout>
 </file>
 
-<file path=ppt/slideLayouts/slideLayout17.xml><?xml version="1.0" encoding="utf-8"?>
+<file path=ppt/slideLayouts/slideLayout18.xml><?xml version="1.0" encoding="utf-8"?>
 <p:sldLayout xmlns:a="http://schemas.openxmlformats.org/drawingml/2006/main" xmlns:r="http://schemas.openxmlformats.org/officeDocument/2006/relationships" xmlns:p="http://schemas.openxmlformats.org/presentationml/2006/main" preserve="1" userDrawn="1">
   <p:cSld name="11_Blank-thin side">
     <p:spTree>
@@ -6136,7 +7092,7 @@
 </p:sldLayout>
 </file>
 
-<file path=ppt/slideLayouts/slideLayout18.xml><?xml version="1.0" encoding="utf-8"?>
+<file path=ppt/slideLayouts/slideLayout19.xml><?xml version="1.0" encoding="utf-8"?>
 <p:sldLayout xmlns:a="http://schemas.openxmlformats.org/drawingml/2006/main" xmlns:r="http://schemas.openxmlformats.org/officeDocument/2006/relationships" xmlns:p="http://schemas.openxmlformats.org/presentationml/2006/main" preserve="1" userDrawn="1">
   <p:cSld name="11_Blank-Benchmarks-thin side">
     <p:spTree>
@@ -7352,469 +8308,6 @@
     <p:extLst>
       <p:ext uri="{BB962C8B-B14F-4D97-AF65-F5344CB8AC3E}">
         <p14:creationId xmlns:p14="http://schemas.microsoft.com/office/powerpoint/2010/main" val="868643289"/>
-      </p:ext>
-    </p:extLst>
-  </p:cSld>
-  <p:clrMapOvr>
-    <a:masterClrMapping/>
-  </p:clrMapOvr>
-</p:sldLayout>
-</file>
-
-<file path=ppt/slideLayouts/slideLayout19.xml><?xml version="1.0" encoding="utf-8"?>
-<p:sldLayout xmlns:a="http://schemas.openxmlformats.org/drawingml/2006/main" xmlns:r="http://schemas.openxmlformats.org/officeDocument/2006/relationships" xmlns:p="http://schemas.openxmlformats.org/presentationml/2006/main" preserve="1" userDrawn="1">
-  <p:cSld name="11_Horizontal_blank">
-    <p:spTree>
-      <p:nvGrpSpPr>
-        <p:cNvPr id="1" name=""/>
-        <p:cNvGrpSpPr/>
-        <p:nvPr/>
-      </p:nvGrpSpPr>
-      <p:grpSpPr>
-        <a:xfrm>
-          <a:off x="0" y="0"/>
-          <a:ext cx="0" cy="0"/>
-          <a:chOff x="0" y="0"/>
-          <a:chExt cx="0" cy="0"/>
-        </a:xfrm>
-      </p:grpSpPr>
-      <p:sp>
-        <p:nvSpPr>
-          <p:cNvPr id="25" name="Rectangle 24">
-            <a:extLst>
-              <a:ext uri="{FF2B5EF4-FFF2-40B4-BE49-F238E27FC236}">
-                <a16:creationId xmlns:a16="http://schemas.microsoft.com/office/drawing/2014/main" id="{8C515B59-CEEF-D1D0-69F3-529872FD67FC}"/>
-              </a:ext>
-            </a:extLst>
-          </p:cNvPr>
-          <p:cNvSpPr/>
-          <p:nvPr userDrawn="1"/>
-        </p:nvSpPr>
-        <p:spPr>
-          <a:xfrm>
-            <a:off x="0" y="0"/>
-            <a:ext cx="12192000" cy="2576090"/>
-          </a:xfrm>
-          <a:prstGeom prst="rect">
-            <a:avLst/>
-          </a:prstGeom>
-          <a:solidFill>
-            <a:schemeClr val="tx1">
-              <a:alpha val="4000"/>
-            </a:schemeClr>
-          </a:solidFill>
-          <a:ln>
-            <a:noFill/>
-          </a:ln>
-        </p:spPr>
-        <p:style>
-          <a:lnRef idx="2">
-            <a:schemeClr val="accent1">
-              <a:shade val="50000"/>
-            </a:schemeClr>
-          </a:lnRef>
-          <a:fillRef idx="1">
-            <a:schemeClr val="accent1"/>
-          </a:fillRef>
-          <a:effectRef idx="0">
-            <a:schemeClr val="accent1"/>
-          </a:effectRef>
-          <a:fontRef idx="minor">
-            <a:schemeClr val="lt1"/>
-          </a:fontRef>
-        </p:style>
-        <p:txBody>
-          <a:bodyPr rtlCol="0" anchor="ctr"/>
-          <a:lstStyle/>
-          <a:p>
-            <a:pPr algn="ctr"/>
-            <a:endParaRPr lang="en-US"/>
-          </a:p>
-        </p:txBody>
-      </p:sp>
-      <p:sp>
-        <p:nvSpPr>
-          <p:cNvPr id="4" name="Slide Number Placeholder 5">
-            <a:extLst>
-              <a:ext uri="{FF2B5EF4-FFF2-40B4-BE49-F238E27FC236}">
-                <a16:creationId xmlns:a16="http://schemas.microsoft.com/office/drawing/2014/main" id="{FAE0EA03-33B8-515F-E9A9-4E5837CE00AB}"/>
-              </a:ext>
-            </a:extLst>
-          </p:cNvPr>
-          <p:cNvSpPr txBox="1">
-            <a:spLocks/>
-          </p:cNvSpPr>
-          <p:nvPr userDrawn="1"/>
-        </p:nvSpPr>
-        <p:spPr>
-          <a:xfrm>
-            <a:off x="78952" y="6361009"/>
-            <a:ext cx="629079" cy="489496"/>
-          </a:xfrm>
-          <a:prstGeom prst="rect">
-            <a:avLst/>
-          </a:prstGeom>
-        </p:spPr>
-        <p:txBody>
-          <a:bodyPr vert="horz" wrap="none" lIns="121920" tIns="60960" rIns="121920" bIns="60960" rtlCol="0" anchor="ctr">
-            <a:noAutofit/>
-          </a:bodyPr>
-          <a:lstStyle>
-            <a:defPPr>
-              <a:defRPr lang="en-US"/>
-            </a:defPPr>
-            <a:lvl1pPr marL="0" algn="r" defTabSz="914400" rtl="0" eaLnBrk="1" latinLnBrk="0" hangingPunct="1">
-              <a:defRPr sz="1200" kern="1200">
-                <a:solidFill>
-                  <a:schemeClr val="tx1">
-                    <a:tint val="75000"/>
-                  </a:schemeClr>
-                </a:solidFill>
-                <a:latin typeface="+mn-lt"/>
-                <a:ea typeface="+mn-ea"/>
-                <a:cs typeface="+mn-cs"/>
-              </a:defRPr>
-            </a:lvl1pPr>
-            <a:lvl2pPr marL="457200" algn="l" defTabSz="914400" rtl="0" eaLnBrk="1" latinLnBrk="0" hangingPunct="1">
-              <a:defRPr sz="1800" kern="1200">
-                <a:solidFill>
-                  <a:schemeClr val="tx1"/>
-                </a:solidFill>
-                <a:latin typeface="+mn-lt"/>
-                <a:ea typeface="+mn-ea"/>
-                <a:cs typeface="+mn-cs"/>
-              </a:defRPr>
-            </a:lvl2pPr>
-            <a:lvl3pPr marL="914400" algn="l" defTabSz="914400" rtl="0" eaLnBrk="1" latinLnBrk="0" hangingPunct="1">
-              <a:defRPr sz="1800" kern="1200">
-                <a:solidFill>
-                  <a:schemeClr val="tx1"/>
-                </a:solidFill>
-                <a:latin typeface="+mn-lt"/>
-                <a:ea typeface="+mn-ea"/>
-                <a:cs typeface="+mn-cs"/>
-              </a:defRPr>
-            </a:lvl3pPr>
-            <a:lvl4pPr marL="1371600" algn="l" defTabSz="914400" rtl="0" eaLnBrk="1" latinLnBrk="0" hangingPunct="1">
-              <a:defRPr sz="1800" kern="1200">
-                <a:solidFill>
-                  <a:schemeClr val="tx1"/>
-                </a:solidFill>
-                <a:latin typeface="+mn-lt"/>
-                <a:ea typeface="+mn-ea"/>
-                <a:cs typeface="+mn-cs"/>
-              </a:defRPr>
-            </a:lvl4pPr>
-            <a:lvl5pPr marL="1828800" algn="l" defTabSz="914400" rtl="0" eaLnBrk="1" latinLnBrk="0" hangingPunct="1">
-              <a:defRPr sz="1800" kern="1200">
-                <a:solidFill>
-                  <a:schemeClr val="tx1"/>
-                </a:solidFill>
-                <a:latin typeface="+mn-lt"/>
-                <a:ea typeface="+mn-ea"/>
-                <a:cs typeface="+mn-cs"/>
-              </a:defRPr>
-            </a:lvl5pPr>
-            <a:lvl6pPr marL="2286000" algn="l" defTabSz="914400" rtl="0" eaLnBrk="1" latinLnBrk="0" hangingPunct="1">
-              <a:defRPr sz="1800" kern="1200">
-                <a:solidFill>
-                  <a:schemeClr val="tx1"/>
-                </a:solidFill>
-                <a:latin typeface="+mn-lt"/>
-                <a:ea typeface="+mn-ea"/>
-                <a:cs typeface="+mn-cs"/>
-              </a:defRPr>
-            </a:lvl6pPr>
-            <a:lvl7pPr marL="2743200" algn="l" defTabSz="914400" rtl="0" eaLnBrk="1" latinLnBrk="0" hangingPunct="1">
-              <a:defRPr sz="1800" kern="1200">
-                <a:solidFill>
-                  <a:schemeClr val="tx1"/>
-                </a:solidFill>
-                <a:latin typeface="+mn-lt"/>
-                <a:ea typeface="+mn-ea"/>
-                <a:cs typeface="+mn-cs"/>
-              </a:defRPr>
-            </a:lvl7pPr>
-            <a:lvl8pPr marL="3200400" algn="l" defTabSz="914400" rtl="0" eaLnBrk="1" latinLnBrk="0" hangingPunct="1">
-              <a:defRPr sz="1800" kern="1200">
-                <a:solidFill>
-                  <a:schemeClr val="tx1"/>
-                </a:solidFill>
-                <a:latin typeface="+mn-lt"/>
-                <a:ea typeface="+mn-ea"/>
-                <a:cs typeface="+mn-cs"/>
-              </a:defRPr>
-            </a:lvl8pPr>
-            <a:lvl9pPr marL="3657600" algn="l" defTabSz="914400" rtl="0" eaLnBrk="1" latinLnBrk="0" hangingPunct="1">
-              <a:defRPr sz="1800" kern="1200">
-                <a:solidFill>
-                  <a:schemeClr val="tx1"/>
-                </a:solidFill>
-                <a:latin typeface="+mn-lt"/>
-                <a:ea typeface="+mn-ea"/>
-                <a:cs typeface="+mn-cs"/>
-              </a:defRPr>
-            </a:lvl9pPr>
-          </a:lstStyle>
-          <a:p>
-            <a:pPr algn="ctr"/>
-            <a:fld id="{1A290D8D-6BA0-418D-AFED-C65293F70DA0}" type="slidenum">
-              <a:rPr lang="en-US" sz="1400" b="1" i="0" smtClean="0">
-                <a:solidFill>
-                  <a:schemeClr val="accent1"/>
-                </a:solidFill>
-                <a:latin typeface="+mj-lt"/>
-                <a:ea typeface="Bebas Neue Bold" charset="0"/>
-                <a:cs typeface="Bebas Neue Bold" charset="0"/>
-              </a:rPr>
-              <a:pPr algn="ctr"/>
-              <a:t>‹#›</a:t>
-            </a:fld>
-            <a:endParaRPr lang="en-US" sz="1400" b="1" i="0">
-              <a:solidFill>
-                <a:schemeClr val="accent1"/>
-              </a:solidFill>
-              <a:latin typeface="+mj-lt"/>
-              <a:ea typeface="Bebas Neue Bold" charset="0"/>
-              <a:cs typeface="Bebas Neue Bold" charset="0"/>
-            </a:endParaRPr>
-          </a:p>
-        </p:txBody>
-      </p:sp>
-      <p:sp>
-        <p:nvSpPr>
-          <p:cNvPr id="8" name="Title 23">
-            <a:extLst>
-              <a:ext uri="{FF2B5EF4-FFF2-40B4-BE49-F238E27FC236}">
-                <a16:creationId xmlns:a16="http://schemas.microsoft.com/office/drawing/2014/main" id="{94C4D53A-329E-13AD-C1F8-86A81BC65A2F}"/>
-              </a:ext>
-            </a:extLst>
-          </p:cNvPr>
-          <p:cNvSpPr>
-            <a:spLocks noGrp="1"/>
-          </p:cNvSpPr>
-          <p:nvPr>
-            <p:ph type="title"/>
-          </p:nvPr>
-        </p:nvSpPr>
-        <p:spPr>
-          <a:xfrm>
-            <a:off x="998331" y="786983"/>
-            <a:ext cx="10195337" cy="743005"/>
-          </a:xfrm>
-          <a:prstGeom prst="rect">
-            <a:avLst/>
-          </a:prstGeom>
-        </p:spPr>
-        <p:txBody>
-          <a:bodyPr wrap="square" lIns="0" anchor="t" anchorCtr="0">
-            <a:spAutoFit/>
-          </a:bodyPr>
-          <a:lstStyle>
-            <a:lvl1pPr>
-              <a:lnSpc>
-                <a:spcPct val="80000"/>
-              </a:lnSpc>
-              <a:defRPr sz="2400">
-                <a:solidFill>
-                  <a:schemeClr val="accent1"/>
-                </a:solidFill>
-              </a:defRPr>
-            </a:lvl1pPr>
-          </a:lstStyle>
-          <a:p>
-            <a:endParaRPr lang="en-US"/>
-          </a:p>
-        </p:txBody>
-      </p:sp>
-      <p:sp>
-        <p:nvSpPr>
-          <p:cNvPr id="9" name="Subtext">
-            <a:extLst>
-              <a:ext uri="{FF2B5EF4-FFF2-40B4-BE49-F238E27FC236}">
-                <a16:creationId xmlns:a16="http://schemas.microsoft.com/office/drawing/2014/main" id="{30995445-651B-DCFF-488B-D261BC86C53C}"/>
-              </a:ext>
-            </a:extLst>
-          </p:cNvPr>
-          <p:cNvSpPr>
-            <a:spLocks noGrp="1"/>
-          </p:cNvSpPr>
-          <p:nvPr>
-            <p:ph type="body" sz="quarter" idx="14"/>
-          </p:nvPr>
-        </p:nvSpPr>
-        <p:spPr>
-          <a:xfrm>
-            <a:off x="998331" y="1529988"/>
-            <a:ext cx="3554243" cy="274627"/>
-          </a:xfrm>
-          <a:prstGeom prst="rect">
-            <a:avLst/>
-          </a:prstGeom>
-        </p:spPr>
-        <p:txBody>
-          <a:bodyPr wrap="square" lIns="0">
-            <a:spAutoFit/>
-          </a:bodyPr>
-          <a:lstStyle>
-            <a:lvl1pPr marL="0" indent="0">
-              <a:buNone/>
-              <a:defRPr lang="en-US" sz="1400" b="1" kern="1200" spc="0" dirty="0">
-                <a:solidFill>
-                  <a:schemeClr val="tx1"/>
-                </a:solidFill>
-                <a:latin typeface="+mj-lt"/>
-                <a:ea typeface="Bebas Neue Bold" charset="0"/>
-                <a:cs typeface="Bebas Neue Bold" charset="0"/>
-              </a:defRPr>
-            </a:lvl1pPr>
-          </a:lstStyle>
-          <a:p>
-            <a:pPr marL="0" lvl="0" algn="l" defTabSz="914400" rtl="0" eaLnBrk="1" latinLnBrk="0" hangingPunct="1">
-              <a:lnSpc>
-                <a:spcPct val="80000"/>
-              </a:lnSpc>
-            </a:pPr>
-            <a:endParaRPr lang="en-US"/>
-          </a:p>
-        </p:txBody>
-      </p:sp>
-      <p:sp>
-        <p:nvSpPr>
-          <p:cNvPr id="10" name="Text Placeholder 14">
-            <a:extLst>
-              <a:ext uri="{FF2B5EF4-FFF2-40B4-BE49-F238E27FC236}">
-                <a16:creationId xmlns:a16="http://schemas.microsoft.com/office/drawing/2014/main" id="{01F1991C-44F6-8155-A4F1-24721B80D56A}"/>
-              </a:ext>
-            </a:extLst>
-          </p:cNvPr>
-          <p:cNvSpPr>
-            <a:spLocks noGrp="1"/>
-          </p:cNvSpPr>
-          <p:nvPr>
-            <p:ph type="body" sz="quarter" idx="18"/>
-          </p:nvPr>
-        </p:nvSpPr>
-        <p:spPr>
-          <a:xfrm>
-            <a:off x="981856" y="1816194"/>
-            <a:ext cx="10228288" cy="743005"/>
-          </a:xfrm>
-          <a:prstGeom prst="rect">
-            <a:avLst/>
-          </a:prstGeom>
-        </p:spPr>
-        <p:txBody>
-          <a:bodyPr wrap="square" lIns="0">
-            <a:spAutoFit/>
-          </a:bodyPr>
-          <a:lstStyle>
-            <a:lvl1pPr marL="0" marR="0" indent="0" algn="l" defTabSz="914400" rtl="0" eaLnBrk="1" fontAlgn="auto" latinLnBrk="0" hangingPunct="1">
-              <a:lnSpc>
-                <a:spcPts val="1750"/>
-              </a:lnSpc>
-              <a:spcBef>
-                <a:spcPts val="1000"/>
-              </a:spcBef>
-              <a:spcAft>
-                <a:spcPts val="0"/>
-              </a:spcAft>
-              <a:buClrTx/>
-              <a:buSzTx/>
-              <a:buFont typeface="Arial" panose="020B0604020202020204" pitchFamily="34" charset="0"/>
-              <a:buNone/>
-              <a:tabLst/>
-              <a:defRPr sz="1200" b="0" i="0">
-                <a:latin typeface="TeleNeo Office" panose="020B0504040202090203" pitchFamily="34" charset="77"/>
-              </a:defRPr>
-            </a:lvl1pPr>
-            <a:lvl4pPr marL="1371600" indent="0">
-              <a:buNone/>
-              <a:defRPr/>
-            </a:lvl4pPr>
-            <a:lvl5pPr marL="1828800" indent="0">
-              <a:buNone/>
-              <a:defRPr/>
-            </a:lvl5pPr>
-          </a:lstStyle>
-          <a:p>
-            <a:pPr marL="0" marR="0" lvl="0" indent="0" algn="l" defTabSz="914400" rtl="0" eaLnBrk="1" fontAlgn="auto" latinLnBrk="0" hangingPunct="1">
-              <a:lnSpc>
-                <a:spcPts val="1750"/>
-              </a:lnSpc>
-              <a:spcBef>
-                <a:spcPts val="1000"/>
-              </a:spcBef>
-              <a:spcAft>
-                <a:spcPts val="0"/>
-              </a:spcAft>
-              <a:buClrTx/>
-              <a:buSzTx/>
-              <a:buFont typeface="Arial" panose="020B0604020202020204" pitchFamily="34" charset="0"/>
-              <a:buNone/>
-              <a:tabLst/>
-              <a:defRPr/>
-            </a:pPr>
-            <a:endParaRPr lang="en-US"/>
-          </a:p>
-        </p:txBody>
-      </p:sp>
-      <p:sp>
-        <p:nvSpPr>
-          <p:cNvPr id="11" name="Subtext">
-            <a:extLst>
-              <a:ext uri="{FF2B5EF4-FFF2-40B4-BE49-F238E27FC236}">
-                <a16:creationId xmlns:a16="http://schemas.microsoft.com/office/drawing/2014/main" id="{3641C842-A26A-F188-6E2B-9ADFE1D6B723}"/>
-              </a:ext>
-            </a:extLst>
-          </p:cNvPr>
-          <p:cNvSpPr>
-            <a:spLocks noGrp="1"/>
-          </p:cNvSpPr>
-          <p:nvPr>
-            <p:ph type="body" sz="quarter" idx="26"/>
-          </p:nvPr>
-        </p:nvSpPr>
-        <p:spPr>
-          <a:xfrm rot="16200000">
-            <a:off x="-985112" y="4842292"/>
-            <a:ext cx="2816585" cy="196529"/>
-          </a:xfrm>
-          <a:prstGeom prst="rect">
-            <a:avLst/>
-          </a:prstGeom>
-        </p:spPr>
-        <p:txBody>
-          <a:bodyPr wrap="square" lIns="0" anchor="ctr">
-            <a:spAutoFit/>
-          </a:bodyPr>
-          <a:lstStyle>
-            <a:lvl1pPr marL="0" indent="0">
-              <a:buNone/>
-              <a:defRPr lang="en-US" sz="800" b="1" kern="1200" spc="300" dirty="0">
-                <a:solidFill>
-                  <a:schemeClr val="tx1"/>
-                </a:solidFill>
-                <a:latin typeface="TeleNeo Office ExtraBold" panose="020B0504040202090203" pitchFamily="34" charset="77"/>
-                <a:ea typeface="Bebas Neue Bold" charset="0"/>
-                <a:cs typeface="Bebas Neue Bold" charset="0"/>
-              </a:defRPr>
-            </a:lvl1pPr>
-          </a:lstStyle>
-          <a:p>
-            <a:pPr marL="0" lvl="0" algn="l" defTabSz="914400" rtl="0" eaLnBrk="1" latinLnBrk="0" hangingPunct="1">
-              <a:lnSpc>
-                <a:spcPct val="80000"/>
-              </a:lnSpc>
-            </a:pPr>
-            <a:endParaRPr lang="en-US"/>
-          </a:p>
-        </p:txBody>
-      </p:sp>
-    </p:spTree>
-    <p:extLst>
-      <p:ext uri="{BB962C8B-B14F-4D97-AF65-F5344CB8AC3E}">
-        <p14:creationId xmlns:p14="http://schemas.microsoft.com/office/powerpoint/2010/main" val="1359864454"/>
       </p:ext>
     </p:extLst>
   </p:cSld>
@@ -8110,6 +8603,469 @@
 </file>
 
 <file path=ppt/slideLayouts/slideLayout20.xml><?xml version="1.0" encoding="utf-8"?>
+<p:sldLayout xmlns:a="http://schemas.openxmlformats.org/drawingml/2006/main" xmlns:r="http://schemas.openxmlformats.org/officeDocument/2006/relationships" xmlns:p="http://schemas.openxmlformats.org/presentationml/2006/main" preserve="1" userDrawn="1">
+  <p:cSld name="11_Horizontal_blank">
+    <p:spTree>
+      <p:nvGrpSpPr>
+        <p:cNvPr id="1" name=""/>
+        <p:cNvGrpSpPr/>
+        <p:nvPr/>
+      </p:nvGrpSpPr>
+      <p:grpSpPr>
+        <a:xfrm>
+          <a:off x="0" y="0"/>
+          <a:ext cx="0" cy="0"/>
+          <a:chOff x="0" y="0"/>
+          <a:chExt cx="0" cy="0"/>
+        </a:xfrm>
+      </p:grpSpPr>
+      <p:sp>
+        <p:nvSpPr>
+          <p:cNvPr id="25" name="Rectangle 24">
+            <a:extLst>
+              <a:ext uri="{FF2B5EF4-FFF2-40B4-BE49-F238E27FC236}">
+                <a16:creationId xmlns:a16="http://schemas.microsoft.com/office/drawing/2014/main" id="{8C515B59-CEEF-D1D0-69F3-529872FD67FC}"/>
+              </a:ext>
+            </a:extLst>
+          </p:cNvPr>
+          <p:cNvSpPr/>
+          <p:nvPr userDrawn="1"/>
+        </p:nvSpPr>
+        <p:spPr>
+          <a:xfrm>
+            <a:off x="0" y="0"/>
+            <a:ext cx="12192000" cy="2576090"/>
+          </a:xfrm>
+          <a:prstGeom prst="rect">
+            <a:avLst/>
+          </a:prstGeom>
+          <a:solidFill>
+            <a:schemeClr val="tx1">
+              <a:alpha val="4000"/>
+            </a:schemeClr>
+          </a:solidFill>
+          <a:ln>
+            <a:noFill/>
+          </a:ln>
+        </p:spPr>
+        <p:style>
+          <a:lnRef idx="2">
+            <a:schemeClr val="accent1">
+              <a:shade val="50000"/>
+            </a:schemeClr>
+          </a:lnRef>
+          <a:fillRef idx="1">
+            <a:schemeClr val="accent1"/>
+          </a:fillRef>
+          <a:effectRef idx="0">
+            <a:schemeClr val="accent1"/>
+          </a:effectRef>
+          <a:fontRef idx="minor">
+            <a:schemeClr val="lt1"/>
+          </a:fontRef>
+        </p:style>
+        <p:txBody>
+          <a:bodyPr rtlCol="0" anchor="ctr"/>
+          <a:lstStyle/>
+          <a:p>
+            <a:pPr algn="ctr"/>
+            <a:endParaRPr lang="en-US"/>
+          </a:p>
+        </p:txBody>
+      </p:sp>
+      <p:sp>
+        <p:nvSpPr>
+          <p:cNvPr id="4" name="Slide Number Placeholder 5">
+            <a:extLst>
+              <a:ext uri="{FF2B5EF4-FFF2-40B4-BE49-F238E27FC236}">
+                <a16:creationId xmlns:a16="http://schemas.microsoft.com/office/drawing/2014/main" id="{FAE0EA03-33B8-515F-E9A9-4E5837CE00AB}"/>
+              </a:ext>
+            </a:extLst>
+          </p:cNvPr>
+          <p:cNvSpPr txBox="1">
+            <a:spLocks/>
+          </p:cNvSpPr>
+          <p:nvPr userDrawn="1"/>
+        </p:nvSpPr>
+        <p:spPr>
+          <a:xfrm>
+            <a:off x="78952" y="6361009"/>
+            <a:ext cx="629079" cy="489496"/>
+          </a:xfrm>
+          <a:prstGeom prst="rect">
+            <a:avLst/>
+          </a:prstGeom>
+        </p:spPr>
+        <p:txBody>
+          <a:bodyPr vert="horz" wrap="none" lIns="121920" tIns="60960" rIns="121920" bIns="60960" rtlCol="0" anchor="ctr">
+            <a:noAutofit/>
+          </a:bodyPr>
+          <a:lstStyle>
+            <a:defPPr>
+              <a:defRPr lang="en-US"/>
+            </a:defPPr>
+            <a:lvl1pPr marL="0" algn="r" defTabSz="914400" rtl="0" eaLnBrk="1" latinLnBrk="0" hangingPunct="1">
+              <a:defRPr sz="1200" kern="1200">
+                <a:solidFill>
+                  <a:schemeClr val="tx1">
+                    <a:tint val="75000"/>
+                  </a:schemeClr>
+                </a:solidFill>
+                <a:latin typeface="+mn-lt"/>
+                <a:ea typeface="+mn-ea"/>
+                <a:cs typeface="+mn-cs"/>
+              </a:defRPr>
+            </a:lvl1pPr>
+            <a:lvl2pPr marL="457200" algn="l" defTabSz="914400" rtl="0" eaLnBrk="1" latinLnBrk="0" hangingPunct="1">
+              <a:defRPr sz="1800" kern="1200">
+                <a:solidFill>
+                  <a:schemeClr val="tx1"/>
+                </a:solidFill>
+                <a:latin typeface="+mn-lt"/>
+                <a:ea typeface="+mn-ea"/>
+                <a:cs typeface="+mn-cs"/>
+              </a:defRPr>
+            </a:lvl2pPr>
+            <a:lvl3pPr marL="914400" algn="l" defTabSz="914400" rtl="0" eaLnBrk="1" latinLnBrk="0" hangingPunct="1">
+              <a:defRPr sz="1800" kern="1200">
+                <a:solidFill>
+                  <a:schemeClr val="tx1"/>
+                </a:solidFill>
+                <a:latin typeface="+mn-lt"/>
+                <a:ea typeface="+mn-ea"/>
+                <a:cs typeface="+mn-cs"/>
+              </a:defRPr>
+            </a:lvl3pPr>
+            <a:lvl4pPr marL="1371600" algn="l" defTabSz="914400" rtl="0" eaLnBrk="1" latinLnBrk="0" hangingPunct="1">
+              <a:defRPr sz="1800" kern="1200">
+                <a:solidFill>
+                  <a:schemeClr val="tx1"/>
+                </a:solidFill>
+                <a:latin typeface="+mn-lt"/>
+                <a:ea typeface="+mn-ea"/>
+                <a:cs typeface="+mn-cs"/>
+              </a:defRPr>
+            </a:lvl4pPr>
+            <a:lvl5pPr marL="1828800" algn="l" defTabSz="914400" rtl="0" eaLnBrk="1" latinLnBrk="0" hangingPunct="1">
+              <a:defRPr sz="1800" kern="1200">
+                <a:solidFill>
+                  <a:schemeClr val="tx1"/>
+                </a:solidFill>
+                <a:latin typeface="+mn-lt"/>
+                <a:ea typeface="+mn-ea"/>
+                <a:cs typeface="+mn-cs"/>
+              </a:defRPr>
+            </a:lvl5pPr>
+            <a:lvl6pPr marL="2286000" algn="l" defTabSz="914400" rtl="0" eaLnBrk="1" latinLnBrk="0" hangingPunct="1">
+              <a:defRPr sz="1800" kern="1200">
+                <a:solidFill>
+                  <a:schemeClr val="tx1"/>
+                </a:solidFill>
+                <a:latin typeface="+mn-lt"/>
+                <a:ea typeface="+mn-ea"/>
+                <a:cs typeface="+mn-cs"/>
+              </a:defRPr>
+            </a:lvl6pPr>
+            <a:lvl7pPr marL="2743200" algn="l" defTabSz="914400" rtl="0" eaLnBrk="1" latinLnBrk="0" hangingPunct="1">
+              <a:defRPr sz="1800" kern="1200">
+                <a:solidFill>
+                  <a:schemeClr val="tx1"/>
+                </a:solidFill>
+                <a:latin typeface="+mn-lt"/>
+                <a:ea typeface="+mn-ea"/>
+                <a:cs typeface="+mn-cs"/>
+              </a:defRPr>
+            </a:lvl7pPr>
+            <a:lvl8pPr marL="3200400" algn="l" defTabSz="914400" rtl="0" eaLnBrk="1" latinLnBrk="0" hangingPunct="1">
+              <a:defRPr sz="1800" kern="1200">
+                <a:solidFill>
+                  <a:schemeClr val="tx1"/>
+                </a:solidFill>
+                <a:latin typeface="+mn-lt"/>
+                <a:ea typeface="+mn-ea"/>
+                <a:cs typeface="+mn-cs"/>
+              </a:defRPr>
+            </a:lvl8pPr>
+            <a:lvl9pPr marL="3657600" algn="l" defTabSz="914400" rtl="0" eaLnBrk="1" latinLnBrk="0" hangingPunct="1">
+              <a:defRPr sz="1800" kern="1200">
+                <a:solidFill>
+                  <a:schemeClr val="tx1"/>
+                </a:solidFill>
+                <a:latin typeface="+mn-lt"/>
+                <a:ea typeface="+mn-ea"/>
+                <a:cs typeface="+mn-cs"/>
+              </a:defRPr>
+            </a:lvl9pPr>
+          </a:lstStyle>
+          <a:p>
+            <a:pPr algn="ctr"/>
+            <a:fld id="{1A290D8D-6BA0-418D-AFED-C65293F70DA0}" type="slidenum">
+              <a:rPr lang="en-US" sz="1400" b="1" i="0" smtClean="0">
+                <a:solidFill>
+                  <a:schemeClr val="accent1"/>
+                </a:solidFill>
+                <a:latin typeface="+mj-lt"/>
+                <a:ea typeface="Bebas Neue Bold" charset="0"/>
+                <a:cs typeface="Bebas Neue Bold" charset="0"/>
+              </a:rPr>
+              <a:pPr algn="ctr"/>
+              <a:t>‹#›</a:t>
+            </a:fld>
+            <a:endParaRPr lang="en-US" sz="1400" b="1" i="0">
+              <a:solidFill>
+                <a:schemeClr val="accent1"/>
+              </a:solidFill>
+              <a:latin typeface="+mj-lt"/>
+              <a:ea typeface="Bebas Neue Bold" charset="0"/>
+              <a:cs typeface="Bebas Neue Bold" charset="0"/>
+            </a:endParaRPr>
+          </a:p>
+        </p:txBody>
+      </p:sp>
+      <p:sp>
+        <p:nvSpPr>
+          <p:cNvPr id="8" name="Title 23">
+            <a:extLst>
+              <a:ext uri="{FF2B5EF4-FFF2-40B4-BE49-F238E27FC236}">
+                <a16:creationId xmlns:a16="http://schemas.microsoft.com/office/drawing/2014/main" id="{94C4D53A-329E-13AD-C1F8-86A81BC65A2F}"/>
+              </a:ext>
+            </a:extLst>
+          </p:cNvPr>
+          <p:cNvSpPr>
+            <a:spLocks noGrp="1"/>
+          </p:cNvSpPr>
+          <p:nvPr>
+            <p:ph type="title"/>
+          </p:nvPr>
+        </p:nvSpPr>
+        <p:spPr>
+          <a:xfrm>
+            <a:off x="998331" y="786983"/>
+            <a:ext cx="10195337" cy="743005"/>
+          </a:xfrm>
+          <a:prstGeom prst="rect">
+            <a:avLst/>
+          </a:prstGeom>
+        </p:spPr>
+        <p:txBody>
+          <a:bodyPr wrap="square" lIns="0" anchor="t" anchorCtr="0">
+            <a:spAutoFit/>
+          </a:bodyPr>
+          <a:lstStyle>
+            <a:lvl1pPr>
+              <a:lnSpc>
+                <a:spcPct val="80000"/>
+              </a:lnSpc>
+              <a:defRPr sz="2400">
+                <a:solidFill>
+                  <a:schemeClr val="accent1"/>
+                </a:solidFill>
+              </a:defRPr>
+            </a:lvl1pPr>
+          </a:lstStyle>
+          <a:p>
+            <a:endParaRPr lang="en-US"/>
+          </a:p>
+        </p:txBody>
+      </p:sp>
+      <p:sp>
+        <p:nvSpPr>
+          <p:cNvPr id="9" name="Subtext">
+            <a:extLst>
+              <a:ext uri="{FF2B5EF4-FFF2-40B4-BE49-F238E27FC236}">
+                <a16:creationId xmlns:a16="http://schemas.microsoft.com/office/drawing/2014/main" id="{30995445-651B-DCFF-488B-D261BC86C53C}"/>
+              </a:ext>
+            </a:extLst>
+          </p:cNvPr>
+          <p:cNvSpPr>
+            <a:spLocks noGrp="1"/>
+          </p:cNvSpPr>
+          <p:nvPr>
+            <p:ph type="body" sz="quarter" idx="14"/>
+          </p:nvPr>
+        </p:nvSpPr>
+        <p:spPr>
+          <a:xfrm>
+            <a:off x="998331" y="1529988"/>
+            <a:ext cx="3554243" cy="274627"/>
+          </a:xfrm>
+          <a:prstGeom prst="rect">
+            <a:avLst/>
+          </a:prstGeom>
+        </p:spPr>
+        <p:txBody>
+          <a:bodyPr wrap="square" lIns="0">
+            <a:spAutoFit/>
+          </a:bodyPr>
+          <a:lstStyle>
+            <a:lvl1pPr marL="0" indent="0">
+              <a:buNone/>
+              <a:defRPr lang="en-US" sz="1400" b="1" kern="1200" spc="0" dirty="0">
+                <a:solidFill>
+                  <a:schemeClr val="tx1"/>
+                </a:solidFill>
+                <a:latin typeface="+mj-lt"/>
+                <a:ea typeface="Bebas Neue Bold" charset="0"/>
+                <a:cs typeface="Bebas Neue Bold" charset="0"/>
+              </a:defRPr>
+            </a:lvl1pPr>
+          </a:lstStyle>
+          <a:p>
+            <a:pPr marL="0" lvl="0" algn="l" defTabSz="914400" rtl="0" eaLnBrk="1" latinLnBrk="0" hangingPunct="1">
+              <a:lnSpc>
+                <a:spcPct val="80000"/>
+              </a:lnSpc>
+            </a:pPr>
+            <a:endParaRPr lang="en-US"/>
+          </a:p>
+        </p:txBody>
+      </p:sp>
+      <p:sp>
+        <p:nvSpPr>
+          <p:cNvPr id="10" name="Text Placeholder 14">
+            <a:extLst>
+              <a:ext uri="{FF2B5EF4-FFF2-40B4-BE49-F238E27FC236}">
+                <a16:creationId xmlns:a16="http://schemas.microsoft.com/office/drawing/2014/main" id="{01F1991C-44F6-8155-A4F1-24721B80D56A}"/>
+              </a:ext>
+            </a:extLst>
+          </p:cNvPr>
+          <p:cNvSpPr>
+            <a:spLocks noGrp="1"/>
+          </p:cNvSpPr>
+          <p:nvPr>
+            <p:ph type="body" sz="quarter" idx="18"/>
+          </p:nvPr>
+        </p:nvSpPr>
+        <p:spPr>
+          <a:xfrm>
+            <a:off x="981856" y="1816194"/>
+            <a:ext cx="10228288" cy="743005"/>
+          </a:xfrm>
+          <a:prstGeom prst="rect">
+            <a:avLst/>
+          </a:prstGeom>
+        </p:spPr>
+        <p:txBody>
+          <a:bodyPr wrap="square" lIns="0">
+            <a:spAutoFit/>
+          </a:bodyPr>
+          <a:lstStyle>
+            <a:lvl1pPr marL="0" marR="0" indent="0" algn="l" defTabSz="914400" rtl="0" eaLnBrk="1" fontAlgn="auto" latinLnBrk="0" hangingPunct="1">
+              <a:lnSpc>
+                <a:spcPts val="1750"/>
+              </a:lnSpc>
+              <a:spcBef>
+                <a:spcPts val="1000"/>
+              </a:spcBef>
+              <a:spcAft>
+                <a:spcPts val="0"/>
+              </a:spcAft>
+              <a:buClrTx/>
+              <a:buSzTx/>
+              <a:buFont typeface="Arial" panose="020B0604020202020204" pitchFamily="34" charset="0"/>
+              <a:buNone/>
+              <a:tabLst/>
+              <a:defRPr sz="1200" b="0" i="0">
+                <a:latin typeface="TeleNeo Office" panose="020B0504040202090203" pitchFamily="34" charset="77"/>
+              </a:defRPr>
+            </a:lvl1pPr>
+            <a:lvl4pPr marL="1371600" indent="0">
+              <a:buNone/>
+              <a:defRPr/>
+            </a:lvl4pPr>
+            <a:lvl5pPr marL="1828800" indent="0">
+              <a:buNone/>
+              <a:defRPr/>
+            </a:lvl5pPr>
+          </a:lstStyle>
+          <a:p>
+            <a:pPr marL="0" marR="0" lvl="0" indent="0" algn="l" defTabSz="914400" rtl="0" eaLnBrk="1" fontAlgn="auto" latinLnBrk="0" hangingPunct="1">
+              <a:lnSpc>
+                <a:spcPts val="1750"/>
+              </a:lnSpc>
+              <a:spcBef>
+                <a:spcPts val="1000"/>
+              </a:spcBef>
+              <a:spcAft>
+                <a:spcPts val="0"/>
+              </a:spcAft>
+              <a:buClrTx/>
+              <a:buSzTx/>
+              <a:buFont typeface="Arial" panose="020B0604020202020204" pitchFamily="34" charset="0"/>
+              <a:buNone/>
+              <a:tabLst/>
+              <a:defRPr/>
+            </a:pPr>
+            <a:endParaRPr lang="en-US"/>
+          </a:p>
+        </p:txBody>
+      </p:sp>
+      <p:sp>
+        <p:nvSpPr>
+          <p:cNvPr id="11" name="Subtext">
+            <a:extLst>
+              <a:ext uri="{FF2B5EF4-FFF2-40B4-BE49-F238E27FC236}">
+                <a16:creationId xmlns:a16="http://schemas.microsoft.com/office/drawing/2014/main" id="{3641C842-A26A-F188-6E2B-9ADFE1D6B723}"/>
+              </a:ext>
+            </a:extLst>
+          </p:cNvPr>
+          <p:cNvSpPr>
+            <a:spLocks noGrp="1"/>
+          </p:cNvSpPr>
+          <p:nvPr>
+            <p:ph type="body" sz="quarter" idx="26"/>
+          </p:nvPr>
+        </p:nvSpPr>
+        <p:spPr>
+          <a:xfrm rot="16200000">
+            <a:off x="-985112" y="4842292"/>
+            <a:ext cx="2816585" cy="196529"/>
+          </a:xfrm>
+          <a:prstGeom prst="rect">
+            <a:avLst/>
+          </a:prstGeom>
+        </p:spPr>
+        <p:txBody>
+          <a:bodyPr wrap="square" lIns="0" anchor="ctr">
+            <a:spAutoFit/>
+          </a:bodyPr>
+          <a:lstStyle>
+            <a:lvl1pPr marL="0" indent="0">
+              <a:buNone/>
+              <a:defRPr lang="en-US" sz="800" b="1" kern="1200" spc="300" dirty="0">
+                <a:solidFill>
+                  <a:schemeClr val="tx1"/>
+                </a:solidFill>
+                <a:latin typeface="TeleNeo Office ExtraBold" panose="020B0504040202090203" pitchFamily="34" charset="77"/>
+                <a:ea typeface="Bebas Neue Bold" charset="0"/>
+                <a:cs typeface="Bebas Neue Bold" charset="0"/>
+              </a:defRPr>
+            </a:lvl1pPr>
+          </a:lstStyle>
+          <a:p>
+            <a:pPr marL="0" lvl="0" algn="l" defTabSz="914400" rtl="0" eaLnBrk="1" latinLnBrk="0" hangingPunct="1">
+              <a:lnSpc>
+                <a:spcPct val="80000"/>
+              </a:lnSpc>
+            </a:pPr>
+            <a:endParaRPr lang="en-US"/>
+          </a:p>
+        </p:txBody>
+      </p:sp>
+    </p:spTree>
+    <p:extLst>
+      <p:ext uri="{BB962C8B-B14F-4D97-AF65-F5344CB8AC3E}">
+        <p14:creationId xmlns:p14="http://schemas.microsoft.com/office/powerpoint/2010/main" val="1359864454"/>
+      </p:ext>
+    </p:extLst>
+  </p:cSld>
+  <p:clrMapOvr>
+    <a:masterClrMapping/>
+  </p:clrMapOvr>
+</p:sldLayout>
+</file>
+
+<file path=ppt/slideLayouts/slideLayout21.xml><?xml version="1.0" encoding="utf-8"?>
 <p:sldLayout xmlns:a="http://schemas.openxmlformats.org/drawingml/2006/main" xmlns:r="http://schemas.openxmlformats.org/officeDocument/2006/relationships" xmlns:p="http://schemas.openxmlformats.org/presentationml/2006/main" preserve="1" userDrawn="1">
   <p:cSld name="11_Horizontal_1 Image">
     <p:spTree>
@@ -8628,7 +9584,7 @@
 </p:sldLayout>
 </file>
 
-<file path=ppt/slideLayouts/slideLayout21.xml><?xml version="1.0" encoding="utf-8"?>
+<file path=ppt/slideLayouts/slideLayout22.xml><?xml version="1.0" encoding="utf-8"?>
 <p:sldLayout xmlns:a="http://schemas.openxmlformats.org/drawingml/2006/main" xmlns:r="http://schemas.openxmlformats.org/officeDocument/2006/relationships" xmlns:p="http://schemas.openxmlformats.org/presentationml/2006/main" preserve="1" userDrawn="1">
   <p:cSld name="11_Horizontal_2 Image">
     <p:spTree>
@@ -9200,6 +10156,2387 @@
   <p:clrMapOvr>
     <a:masterClrMapping/>
   </p:clrMapOvr>
+</p:sldLayout>
+</file>
+
+<file path=ppt/slideLayouts/slideLayout23.xml><?xml version="1.0" encoding="utf-8"?>
+<p:sldLayout xmlns:a="http://schemas.openxmlformats.org/drawingml/2006/main" xmlns:r="http://schemas.openxmlformats.org/officeDocument/2006/relationships" xmlns:p="http://schemas.openxmlformats.org/presentationml/2006/main" preserve="1" userDrawn="1">
+  <p:cSld name="1_Cover-Pages_Magenta-T">
+    <p:bg>
+      <p:bgPr>
+        <a:solidFill>
+          <a:schemeClr val="accent1"/>
+        </a:solidFill>
+        <a:effectLst/>
+      </p:bgPr>
+    </p:bg>
+    <p:spTree>
+      <p:nvGrpSpPr>
+        <p:cNvPr id="1" name=""/>
+        <p:cNvGrpSpPr/>
+        <p:nvPr/>
+      </p:nvGrpSpPr>
+      <p:grpSpPr>
+        <a:xfrm>
+          <a:off x="0" y="0"/>
+          <a:ext cx="0" cy="0"/>
+          <a:chOff x="0" y="0"/>
+          <a:chExt cx="0" cy="0"/>
+        </a:xfrm>
+      </p:grpSpPr>
+      <p:pic>
+        <p:nvPicPr>
+          <p:cNvPr id="2" name="Picture 1">
+            <a:extLst>
+              <a:ext uri="{FF2B5EF4-FFF2-40B4-BE49-F238E27FC236}">
+                <a16:creationId xmlns:a16="http://schemas.microsoft.com/office/drawing/2014/main" id="{4BF15CC9-2ACD-754F-A40D-CAB7AA33E013}"/>
+              </a:ext>
+            </a:extLst>
+          </p:cNvPr>
+          <p:cNvPicPr>
+            <a:picLocks noChangeAspect="1"/>
+          </p:cNvPicPr>
+          <p:nvPr userDrawn="1"/>
+        </p:nvPicPr>
+        <p:blipFill>
+          <a:blip r:embed="rId2"/>
+          <a:stretch>
+            <a:fillRect/>
+          </a:stretch>
+        </p:blipFill>
+        <p:spPr>
+          <a:xfrm>
+            <a:off x="7064368" y="982468"/>
+            <a:ext cx="4165712" cy="4965192"/>
+          </a:xfrm>
+          <a:prstGeom prst="rect">
+            <a:avLst/>
+          </a:prstGeom>
+        </p:spPr>
+      </p:pic>
+      <p:sp>
+        <p:nvSpPr>
+          <p:cNvPr id="6" name="Text Placeholder 15">
+            <a:extLst>
+              <a:ext uri="{FF2B5EF4-FFF2-40B4-BE49-F238E27FC236}">
+                <a16:creationId xmlns:a16="http://schemas.microsoft.com/office/drawing/2014/main" id="{5280C5CB-615C-D84B-A98D-EB13D2803A2D}"/>
+              </a:ext>
+            </a:extLst>
+          </p:cNvPr>
+          <p:cNvSpPr>
+            <a:spLocks noGrp="1"/>
+          </p:cNvSpPr>
+          <p:nvPr>
+            <p:ph type="body" sz="quarter" idx="11" hasCustomPrompt="1"/>
+          </p:nvPr>
+        </p:nvSpPr>
+        <p:spPr>
+          <a:xfrm>
+            <a:off x="981855" y="5788597"/>
+            <a:ext cx="3127157" cy="248530"/>
+          </a:xfrm>
+          <a:prstGeom prst="rect">
+            <a:avLst/>
+          </a:prstGeom>
+        </p:spPr>
+        <p:txBody>
+          <a:bodyPr lIns="0" tIns="45720" rIns="91440" bIns="45720">
+            <a:spAutoFit/>
+          </a:bodyPr>
+          <a:lstStyle>
+            <a:lvl1pPr marL="0" indent="0">
+              <a:buNone/>
+              <a:defRPr lang="en-US" sz="1200" b="1" kern="1200" spc="300" dirty="0">
+                <a:solidFill>
+                  <a:schemeClr val="bg1"/>
+                </a:solidFill>
+                <a:latin typeface="TeleNeo Office ExtraBold" panose="020B0504040202090203" pitchFamily="34" charset="77"/>
+                <a:ea typeface="Bebas Neue Bold" charset="0"/>
+                <a:cs typeface="Bebas Neue Bold" charset="0"/>
+              </a:defRPr>
+            </a:lvl1pPr>
+            <a:lvl3pPr marL="914400" indent="0">
+              <a:buNone/>
+              <a:defRPr lang="en-US" sz="1200" b="1" kern="1200" spc="300" dirty="0">
+                <a:solidFill>
+                  <a:schemeClr val="bg1"/>
+                </a:solidFill>
+                <a:latin typeface="TeleNeo Office ExtraBold" panose="020B0504040202090203" pitchFamily="34" charset="77"/>
+                <a:ea typeface="Bebas Neue Bold" charset="0"/>
+                <a:cs typeface="Bebas Neue Bold" charset="0"/>
+              </a:defRPr>
+            </a:lvl3pPr>
+          </a:lstStyle>
+          <a:p>
+            <a:pPr marL="0" lvl="0" algn="l" defTabSz="914400" rtl="0" eaLnBrk="1" latinLnBrk="0" hangingPunct="1">
+              <a:lnSpc>
+                <a:spcPct val="80000"/>
+              </a:lnSpc>
+            </a:pPr>
+            <a:r>
+              <a:rPr lang="en-US"/>
+              <a:t>SUBTEXT</a:t>
+            </a:r>
+          </a:p>
+        </p:txBody>
+      </p:sp>
+      <p:sp>
+        <p:nvSpPr>
+          <p:cNvPr id="7" name="Title 23">
+            <a:extLst>
+              <a:ext uri="{FF2B5EF4-FFF2-40B4-BE49-F238E27FC236}">
+                <a16:creationId xmlns:a16="http://schemas.microsoft.com/office/drawing/2014/main" id="{C728E607-C7C9-664B-B04B-671FD912E092}"/>
+              </a:ext>
+            </a:extLst>
+          </p:cNvPr>
+          <p:cNvSpPr>
+            <a:spLocks noGrp="1"/>
+          </p:cNvSpPr>
+          <p:nvPr>
+            <p:ph type="title" hasCustomPrompt="1"/>
+          </p:nvPr>
+        </p:nvSpPr>
+        <p:spPr>
+          <a:xfrm>
+            <a:off x="981855" y="4186293"/>
+            <a:ext cx="5983721" cy="1367810"/>
+          </a:xfrm>
+          <a:prstGeom prst="rect">
+            <a:avLst/>
+          </a:prstGeom>
+        </p:spPr>
+        <p:txBody>
+          <a:bodyPr lIns="0" tIns="0" rIns="0" bIns="0" anchor="b" anchorCtr="0">
+            <a:spAutoFit/>
+          </a:bodyPr>
+          <a:lstStyle>
+            <a:lvl1pPr>
+              <a:lnSpc>
+                <a:spcPct val="80000"/>
+              </a:lnSpc>
+              <a:defRPr sz="5400">
+                <a:solidFill>
+                  <a:schemeClr val="bg1"/>
+                </a:solidFill>
+              </a:defRPr>
+            </a:lvl1pPr>
+          </a:lstStyle>
+          <a:p>
+            <a:r>
+              <a:rPr lang="en-US"/>
+              <a:t>Cover Page</a:t>
+            </a:r>
+            <a:br>
+              <a:rPr lang="en-US"/>
+            </a:br>
+            <a:r>
+              <a:rPr lang="en-US"/>
+              <a:t>Text Highlight</a:t>
+            </a:r>
+          </a:p>
+        </p:txBody>
+      </p:sp>
+      <p:sp>
+        <p:nvSpPr>
+          <p:cNvPr id="3" name="TextBox 2">
+            <a:extLst>
+              <a:ext uri="{FF2B5EF4-FFF2-40B4-BE49-F238E27FC236}">
+                <a16:creationId xmlns:a16="http://schemas.microsoft.com/office/drawing/2014/main" id="{B6614839-4DEB-6582-2404-779F9501A1A3}"/>
+              </a:ext>
+            </a:extLst>
+          </p:cNvPr>
+          <p:cNvSpPr txBox="1"/>
+          <p:nvPr userDrawn="1"/>
+        </p:nvSpPr>
+        <p:spPr>
+          <a:xfrm rot="16200000">
+            <a:off x="-459364" y="5485096"/>
+            <a:ext cx="1739579" cy="215444"/>
+          </a:xfrm>
+          <a:prstGeom prst="rect">
+            <a:avLst/>
+          </a:prstGeom>
+          <a:noFill/>
+        </p:spPr>
+        <p:txBody>
+          <a:bodyPr wrap="none" rtlCol="0">
+            <a:spAutoFit/>
+          </a:bodyPr>
+          <a:lstStyle/>
+          <a:p>
+            <a:r>
+              <a:rPr lang="en-US" sz="800" b="1" i="0" spc="600">
+                <a:solidFill>
+                  <a:schemeClr val="bg1"/>
+                </a:solidFill>
+                <a:latin typeface="TeleNeo Office" panose="020B0504040202090203" pitchFamily="34" charset="77"/>
+                <a:ea typeface="Bebas Neue Bold" charset="0"/>
+                <a:cs typeface="Bebas Neue Bold" charset="0"/>
+              </a:rPr>
+              <a:t>CONFIDENTIAL</a:t>
+            </a:r>
+          </a:p>
+        </p:txBody>
+      </p:sp>
+    </p:spTree>
+    <p:extLst>
+      <p:ext uri="{BB962C8B-B14F-4D97-AF65-F5344CB8AC3E}">
+        <p14:creationId xmlns:p14="http://schemas.microsoft.com/office/powerpoint/2010/main" val="3561976942"/>
+      </p:ext>
+    </p:extLst>
+  </p:cSld>
+  <p:clrMapOvr>
+    <a:masterClrMapping/>
+  </p:clrMapOvr>
+  <p:extLst>
+    <p:ext uri="{DCECCB84-F9BA-43D5-87BE-67443E8EF086}">
+      <p15:sldGuideLst xmlns:p15="http://schemas.microsoft.com/office/powerpoint/2012/main">
+        <p15:guide id="1" orient="horz" pos="3744">
+          <p15:clr>
+            <a:srgbClr val="FBAE40"/>
+          </p15:clr>
+        </p15:guide>
+      </p15:sldGuideLst>
+    </p:ext>
+  </p:extLst>
+</p:sldLayout>
+</file>
+
+<file path=ppt/slideLayouts/slideLayout24.xml><?xml version="1.0" encoding="utf-8"?>
+<p:sldLayout xmlns:a="http://schemas.openxmlformats.org/drawingml/2006/main" xmlns:r="http://schemas.openxmlformats.org/officeDocument/2006/relationships" xmlns:p="http://schemas.openxmlformats.org/presentationml/2006/main" preserve="1" userDrawn="1">
+  <p:cSld name="1_Cover-Pages_Magenta-Neon-Glow-T">
+    <p:bg>
+      <p:bgPr>
+        <a:solidFill>
+          <a:schemeClr val="accent1"/>
+        </a:solidFill>
+        <a:effectLst/>
+      </p:bgPr>
+    </p:bg>
+    <p:spTree>
+      <p:nvGrpSpPr>
+        <p:cNvPr id="1" name=""/>
+        <p:cNvGrpSpPr/>
+        <p:nvPr/>
+      </p:nvGrpSpPr>
+      <p:grpSpPr>
+        <a:xfrm>
+          <a:off x="0" y="0"/>
+          <a:ext cx="0" cy="0"/>
+          <a:chOff x="0" y="0"/>
+          <a:chExt cx="0" cy="0"/>
+        </a:xfrm>
+      </p:grpSpPr>
+      <p:sp>
+        <p:nvSpPr>
+          <p:cNvPr id="7" name="Text Placeholder 15">
+            <a:extLst>
+              <a:ext uri="{FF2B5EF4-FFF2-40B4-BE49-F238E27FC236}">
+                <a16:creationId xmlns:a16="http://schemas.microsoft.com/office/drawing/2014/main" id="{A4723750-F7B4-E14B-BD61-C134E772DBAF}"/>
+              </a:ext>
+            </a:extLst>
+          </p:cNvPr>
+          <p:cNvSpPr>
+            <a:spLocks noGrp="1"/>
+          </p:cNvSpPr>
+          <p:nvPr>
+            <p:ph type="body" sz="quarter" idx="11" hasCustomPrompt="1"/>
+          </p:nvPr>
+        </p:nvSpPr>
+        <p:spPr>
+          <a:xfrm>
+            <a:off x="981855" y="5788597"/>
+            <a:ext cx="3127157" cy="248530"/>
+          </a:xfrm>
+          <a:prstGeom prst="rect">
+            <a:avLst/>
+          </a:prstGeom>
+        </p:spPr>
+        <p:txBody>
+          <a:bodyPr lIns="0" tIns="45720" rIns="91440" bIns="45720">
+            <a:spAutoFit/>
+          </a:bodyPr>
+          <a:lstStyle>
+            <a:lvl1pPr marL="0" indent="0">
+              <a:buNone/>
+              <a:defRPr lang="en-US" sz="1200" b="1" kern="1200" spc="300" dirty="0">
+                <a:solidFill>
+                  <a:schemeClr val="bg1"/>
+                </a:solidFill>
+                <a:latin typeface="TeleNeo Office ExtraBold" panose="020B0504040202090203" pitchFamily="34" charset="77"/>
+                <a:ea typeface="Bebas Neue Bold" charset="0"/>
+                <a:cs typeface="Bebas Neue Bold" charset="0"/>
+              </a:defRPr>
+            </a:lvl1pPr>
+            <a:lvl3pPr marL="914400" indent="0">
+              <a:buNone/>
+              <a:defRPr lang="en-US" sz="1200" b="1" kern="1200" spc="300" dirty="0">
+                <a:solidFill>
+                  <a:schemeClr val="bg1"/>
+                </a:solidFill>
+                <a:latin typeface="TeleNeo Office ExtraBold" panose="020B0504040202090203" pitchFamily="34" charset="77"/>
+                <a:ea typeface="Bebas Neue Bold" charset="0"/>
+                <a:cs typeface="Bebas Neue Bold" charset="0"/>
+              </a:defRPr>
+            </a:lvl3pPr>
+          </a:lstStyle>
+          <a:p>
+            <a:pPr marL="0" lvl="0" algn="l" defTabSz="914400" rtl="0" eaLnBrk="1" latinLnBrk="0" hangingPunct="1">
+              <a:lnSpc>
+                <a:spcPct val="80000"/>
+              </a:lnSpc>
+            </a:pPr>
+            <a:r>
+              <a:rPr lang="en-US"/>
+              <a:t>SUBTEXT</a:t>
+            </a:r>
+          </a:p>
+        </p:txBody>
+      </p:sp>
+      <p:sp>
+        <p:nvSpPr>
+          <p:cNvPr id="8" name="Title 23">
+            <a:extLst>
+              <a:ext uri="{FF2B5EF4-FFF2-40B4-BE49-F238E27FC236}">
+                <a16:creationId xmlns:a16="http://schemas.microsoft.com/office/drawing/2014/main" id="{2EEBB26B-B446-A040-BAFA-3352E9B168B9}"/>
+              </a:ext>
+            </a:extLst>
+          </p:cNvPr>
+          <p:cNvSpPr>
+            <a:spLocks noGrp="1"/>
+          </p:cNvSpPr>
+          <p:nvPr>
+            <p:ph type="title" hasCustomPrompt="1"/>
+          </p:nvPr>
+        </p:nvSpPr>
+        <p:spPr>
+          <a:xfrm>
+            <a:off x="981855" y="4186293"/>
+            <a:ext cx="5983721" cy="1367810"/>
+          </a:xfrm>
+          <a:prstGeom prst="rect">
+            <a:avLst/>
+          </a:prstGeom>
+        </p:spPr>
+        <p:txBody>
+          <a:bodyPr lIns="0" tIns="0" rIns="0" bIns="0" anchor="b" anchorCtr="0">
+            <a:spAutoFit/>
+          </a:bodyPr>
+          <a:lstStyle>
+            <a:lvl1pPr>
+              <a:lnSpc>
+                <a:spcPct val="80000"/>
+              </a:lnSpc>
+              <a:defRPr sz="5400">
+                <a:solidFill>
+                  <a:schemeClr val="bg1"/>
+                </a:solidFill>
+              </a:defRPr>
+            </a:lvl1pPr>
+          </a:lstStyle>
+          <a:p>
+            <a:r>
+              <a:rPr lang="en-US"/>
+              <a:t>Cover Page</a:t>
+            </a:r>
+            <a:br>
+              <a:rPr lang="en-US"/>
+            </a:br>
+            <a:r>
+              <a:rPr lang="en-US"/>
+              <a:t>Text Highlight</a:t>
+            </a:r>
+          </a:p>
+        </p:txBody>
+      </p:sp>
+      <p:pic>
+        <p:nvPicPr>
+          <p:cNvPr id="10" name="Picture 9" descr="A picture containing text, clipart&#10;&#10;Description automatically generated">
+            <a:extLst>
+              <a:ext uri="{FF2B5EF4-FFF2-40B4-BE49-F238E27FC236}">
+                <a16:creationId xmlns:a16="http://schemas.microsoft.com/office/drawing/2014/main" id="{722AC4E3-D9AB-8948-A5D8-E4071ADA008C}"/>
+              </a:ext>
+            </a:extLst>
+          </p:cNvPr>
+          <p:cNvPicPr>
+            <a:picLocks noChangeAspect="1"/>
+          </p:cNvPicPr>
+          <p:nvPr userDrawn="1"/>
+        </p:nvPicPr>
+        <p:blipFill rotWithShape="1">
+          <a:blip r:embed="rId2" cstate="email">
+            <a:alphaModFix/>
+            <a:extLst>
+              <a:ext uri="{28A0092B-C50C-407E-A947-70E740481C1C}">
+                <a14:useLocalDpi xmlns:a14="http://schemas.microsoft.com/office/drawing/2010/main"/>
+              </a:ext>
+            </a:extLst>
+          </a:blip>
+          <a:srcRect/>
+          <a:stretch/>
+        </p:blipFill>
+        <p:spPr>
+          <a:xfrm>
+            <a:off x="6009454" y="338203"/>
+            <a:ext cx="6182546" cy="6275540"/>
+          </a:xfrm>
+          <a:prstGeom prst="rect">
+            <a:avLst/>
+          </a:prstGeom>
+        </p:spPr>
+      </p:pic>
+      <p:sp>
+        <p:nvSpPr>
+          <p:cNvPr id="2" name="TextBox 1">
+            <a:extLst>
+              <a:ext uri="{FF2B5EF4-FFF2-40B4-BE49-F238E27FC236}">
+                <a16:creationId xmlns:a16="http://schemas.microsoft.com/office/drawing/2014/main" id="{CF516019-7E3E-F826-1FE5-3E2410B2E14B}"/>
+              </a:ext>
+            </a:extLst>
+          </p:cNvPr>
+          <p:cNvSpPr txBox="1"/>
+          <p:nvPr userDrawn="1"/>
+        </p:nvSpPr>
+        <p:spPr>
+          <a:xfrm rot="16200000">
+            <a:off x="-459364" y="5485096"/>
+            <a:ext cx="1739579" cy="215444"/>
+          </a:xfrm>
+          <a:prstGeom prst="rect">
+            <a:avLst/>
+          </a:prstGeom>
+          <a:noFill/>
+        </p:spPr>
+        <p:txBody>
+          <a:bodyPr wrap="none" rtlCol="0">
+            <a:spAutoFit/>
+          </a:bodyPr>
+          <a:lstStyle/>
+          <a:p>
+            <a:r>
+              <a:rPr lang="en-US" sz="800" b="1" i="0" spc="600">
+                <a:solidFill>
+                  <a:schemeClr val="bg1"/>
+                </a:solidFill>
+                <a:latin typeface="TeleNeo Office" panose="020B0504040202090203" pitchFamily="34" charset="77"/>
+                <a:ea typeface="Bebas Neue Bold" charset="0"/>
+                <a:cs typeface="Bebas Neue Bold" charset="0"/>
+              </a:rPr>
+              <a:t>CONFIDENTIAL</a:t>
+            </a:r>
+          </a:p>
+        </p:txBody>
+      </p:sp>
+    </p:spTree>
+    <p:extLst>
+      <p:ext uri="{BB962C8B-B14F-4D97-AF65-F5344CB8AC3E}">
+        <p14:creationId xmlns:p14="http://schemas.microsoft.com/office/powerpoint/2010/main" val="2625645033"/>
+      </p:ext>
+    </p:extLst>
+  </p:cSld>
+  <p:clrMapOvr>
+    <a:masterClrMapping/>
+  </p:clrMapOvr>
+  <p:extLst>
+    <p:ext uri="{DCECCB84-F9BA-43D5-87BE-67443E8EF086}">
+      <p15:sldGuideLst xmlns:p15="http://schemas.microsoft.com/office/powerpoint/2012/main">
+        <p15:guide id="1" orient="horz" pos="3744">
+          <p15:clr>
+            <a:srgbClr val="FBAE40"/>
+          </p15:clr>
+        </p15:guide>
+      </p15:sldGuideLst>
+    </p:ext>
+  </p:extLst>
+</p:sldLayout>
+</file>
+
+<file path=ppt/slideLayouts/slideLayout25.xml><?xml version="1.0" encoding="utf-8"?>
+<p:sldLayout xmlns:a="http://schemas.openxmlformats.org/drawingml/2006/main" xmlns:r="http://schemas.openxmlformats.org/officeDocument/2006/relationships" xmlns:p="http://schemas.openxmlformats.org/presentationml/2006/main" userDrawn="1">
+  <p:cSld name="10_Charts-Graphs-thin side">
+    <p:spTree>
+      <p:nvGrpSpPr>
+        <p:cNvPr id="1" name=""/>
+        <p:cNvGrpSpPr/>
+        <p:nvPr/>
+      </p:nvGrpSpPr>
+      <p:grpSpPr>
+        <a:xfrm>
+          <a:off x="0" y="0"/>
+          <a:ext cx="0" cy="0"/>
+          <a:chOff x="0" y="0"/>
+          <a:chExt cx="0" cy="0"/>
+        </a:xfrm>
+      </p:grpSpPr>
+      <p:sp>
+        <p:nvSpPr>
+          <p:cNvPr id="27" name="Rectangle 26">
+            <a:extLst>
+              <a:ext uri="{FF2B5EF4-FFF2-40B4-BE49-F238E27FC236}">
+                <a16:creationId xmlns:a16="http://schemas.microsoft.com/office/drawing/2014/main" id="{9F20E009-1DAD-B2B3-15C9-6FD76460D0C7}"/>
+              </a:ext>
+            </a:extLst>
+          </p:cNvPr>
+          <p:cNvSpPr/>
+          <p:nvPr userDrawn="1"/>
+        </p:nvSpPr>
+        <p:spPr>
+          <a:xfrm>
+            <a:off x="0" y="0"/>
+            <a:ext cx="3917018" cy="6858000"/>
+          </a:xfrm>
+          <a:prstGeom prst="rect">
+            <a:avLst/>
+          </a:prstGeom>
+          <a:solidFill>
+            <a:schemeClr val="tx1">
+              <a:alpha val="4000"/>
+            </a:schemeClr>
+          </a:solidFill>
+          <a:ln>
+            <a:noFill/>
+          </a:ln>
+        </p:spPr>
+        <p:style>
+          <a:lnRef idx="2">
+            <a:schemeClr val="accent1">
+              <a:shade val="50000"/>
+            </a:schemeClr>
+          </a:lnRef>
+          <a:fillRef idx="1">
+            <a:schemeClr val="accent1"/>
+          </a:fillRef>
+          <a:effectRef idx="0">
+            <a:schemeClr val="accent1"/>
+          </a:effectRef>
+          <a:fontRef idx="minor">
+            <a:schemeClr val="lt1"/>
+          </a:fontRef>
+        </p:style>
+        <p:txBody>
+          <a:bodyPr rtlCol="0" anchor="ctr"/>
+          <a:lstStyle/>
+          <a:p>
+            <a:pPr algn="ctr"/>
+            <a:endParaRPr lang="en-US"/>
+          </a:p>
+        </p:txBody>
+      </p:sp>
+      <p:sp>
+        <p:nvSpPr>
+          <p:cNvPr id="28" name="Slide Number Placeholder 5">
+            <a:extLst>
+              <a:ext uri="{FF2B5EF4-FFF2-40B4-BE49-F238E27FC236}">
+                <a16:creationId xmlns:a16="http://schemas.microsoft.com/office/drawing/2014/main" id="{C720981C-23E8-EC72-1BEE-1302E7E8F2A6}"/>
+              </a:ext>
+            </a:extLst>
+          </p:cNvPr>
+          <p:cNvSpPr txBox="1">
+            <a:spLocks/>
+          </p:cNvSpPr>
+          <p:nvPr userDrawn="1"/>
+        </p:nvSpPr>
+        <p:spPr>
+          <a:xfrm>
+            <a:off x="78952" y="6361009"/>
+            <a:ext cx="629079" cy="489496"/>
+          </a:xfrm>
+          <a:prstGeom prst="rect">
+            <a:avLst/>
+          </a:prstGeom>
+        </p:spPr>
+        <p:txBody>
+          <a:bodyPr vert="horz" wrap="none" lIns="121920" tIns="60960" rIns="121920" bIns="60960" rtlCol="0" anchor="ctr">
+            <a:noAutofit/>
+          </a:bodyPr>
+          <a:lstStyle>
+            <a:defPPr>
+              <a:defRPr lang="en-US"/>
+            </a:defPPr>
+            <a:lvl1pPr marL="0" algn="r" defTabSz="914400" rtl="0" eaLnBrk="1" latinLnBrk="0" hangingPunct="1">
+              <a:defRPr sz="1200" kern="1200">
+                <a:solidFill>
+                  <a:schemeClr val="tx1">
+                    <a:tint val="75000"/>
+                  </a:schemeClr>
+                </a:solidFill>
+                <a:latin typeface="+mn-lt"/>
+                <a:ea typeface="+mn-ea"/>
+                <a:cs typeface="+mn-cs"/>
+              </a:defRPr>
+            </a:lvl1pPr>
+            <a:lvl2pPr marL="457200" algn="l" defTabSz="914400" rtl="0" eaLnBrk="1" latinLnBrk="0" hangingPunct="1">
+              <a:defRPr sz="1800" kern="1200">
+                <a:solidFill>
+                  <a:schemeClr val="tx1"/>
+                </a:solidFill>
+                <a:latin typeface="+mn-lt"/>
+                <a:ea typeface="+mn-ea"/>
+                <a:cs typeface="+mn-cs"/>
+              </a:defRPr>
+            </a:lvl2pPr>
+            <a:lvl3pPr marL="914400" algn="l" defTabSz="914400" rtl="0" eaLnBrk="1" latinLnBrk="0" hangingPunct="1">
+              <a:defRPr sz="1800" kern="1200">
+                <a:solidFill>
+                  <a:schemeClr val="tx1"/>
+                </a:solidFill>
+                <a:latin typeface="+mn-lt"/>
+                <a:ea typeface="+mn-ea"/>
+                <a:cs typeface="+mn-cs"/>
+              </a:defRPr>
+            </a:lvl3pPr>
+            <a:lvl4pPr marL="1371600" algn="l" defTabSz="914400" rtl="0" eaLnBrk="1" latinLnBrk="0" hangingPunct="1">
+              <a:defRPr sz="1800" kern="1200">
+                <a:solidFill>
+                  <a:schemeClr val="tx1"/>
+                </a:solidFill>
+                <a:latin typeface="+mn-lt"/>
+                <a:ea typeface="+mn-ea"/>
+                <a:cs typeface="+mn-cs"/>
+              </a:defRPr>
+            </a:lvl4pPr>
+            <a:lvl5pPr marL="1828800" algn="l" defTabSz="914400" rtl="0" eaLnBrk="1" latinLnBrk="0" hangingPunct="1">
+              <a:defRPr sz="1800" kern="1200">
+                <a:solidFill>
+                  <a:schemeClr val="tx1"/>
+                </a:solidFill>
+                <a:latin typeface="+mn-lt"/>
+                <a:ea typeface="+mn-ea"/>
+                <a:cs typeface="+mn-cs"/>
+              </a:defRPr>
+            </a:lvl5pPr>
+            <a:lvl6pPr marL="2286000" algn="l" defTabSz="914400" rtl="0" eaLnBrk="1" latinLnBrk="0" hangingPunct="1">
+              <a:defRPr sz="1800" kern="1200">
+                <a:solidFill>
+                  <a:schemeClr val="tx1"/>
+                </a:solidFill>
+                <a:latin typeface="+mn-lt"/>
+                <a:ea typeface="+mn-ea"/>
+                <a:cs typeface="+mn-cs"/>
+              </a:defRPr>
+            </a:lvl6pPr>
+            <a:lvl7pPr marL="2743200" algn="l" defTabSz="914400" rtl="0" eaLnBrk="1" latinLnBrk="0" hangingPunct="1">
+              <a:defRPr sz="1800" kern="1200">
+                <a:solidFill>
+                  <a:schemeClr val="tx1"/>
+                </a:solidFill>
+                <a:latin typeface="+mn-lt"/>
+                <a:ea typeface="+mn-ea"/>
+                <a:cs typeface="+mn-cs"/>
+              </a:defRPr>
+            </a:lvl7pPr>
+            <a:lvl8pPr marL="3200400" algn="l" defTabSz="914400" rtl="0" eaLnBrk="1" latinLnBrk="0" hangingPunct="1">
+              <a:defRPr sz="1800" kern="1200">
+                <a:solidFill>
+                  <a:schemeClr val="tx1"/>
+                </a:solidFill>
+                <a:latin typeface="+mn-lt"/>
+                <a:ea typeface="+mn-ea"/>
+                <a:cs typeface="+mn-cs"/>
+              </a:defRPr>
+            </a:lvl8pPr>
+            <a:lvl9pPr marL="3657600" algn="l" defTabSz="914400" rtl="0" eaLnBrk="1" latinLnBrk="0" hangingPunct="1">
+              <a:defRPr sz="1800" kern="1200">
+                <a:solidFill>
+                  <a:schemeClr val="tx1"/>
+                </a:solidFill>
+                <a:latin typeface="+mn-lt"/>
+                <a:ea typeface="+mn-ea"/>
+                <a:cs typeface="+mn-cs"/>
+              </a:defRPr>
+            </a:lvl9pPr>
+          </a:lstStyle>
+          <a:p>
+            <a:pPr algn="ctr"/>
+            <a:fld id="{1A290D8D-6BA0-418D-AFED-C65293F70DA0}" type="slidenum">
+              <a:rPr lang="en-US" sz="1400" b="1" i="0" smtClean="0">
+                <a:solidFill>
+                  <a:schemeClr val="accent1"/>
+                </a:solidFill>
+                <a:latin typeface="+mj-lt"/>
+                <a:ea typeface="Bebas Neue Bold" charset="0"/>
+                <a:cs typeface="Bebas Neue Bold" charset="0"/>
+              </a:rPr>
+              <a:pPr algn="ctr"/>
+              <a:t>‹#›</a:t>
+            </a:fld>
+            <a:endParaRPr lang="en-US" sz="1400" b="1" i="0">
+              <a:solidFill>
+                <a:schemeClr val="accent1"/>
+              </a:solidFill>
+              <a:latin typeface="+mj-lt"/>
+              <a:ea typeface="Bebas Neue Bold" charset="0"/>
+              <a:cs typeface="Bebas Neue Bold" charset="0"/>
+            </a:endParaRPr>
+          </a:p>
+        </p:txBody>
+      </p:sp>
+      <p:sp>
+        <p:nvSpPr>
+          <p:cNvPr id="29" name="Title 23">
+            <a:extLst>
+              <a:ext uri="{FF2B5EF4-FFF2-40B4-BE49-F238E27FC236}">
+                <a16:creationId xmlns:a16="http://schemas.microsoft.com/office/drawing/2014/main" id="{C553F42E-EA37-A53D-BC3D-98EF4C6F73D0}"/>
+              </a:ext>
+            </a:extLst>
+          </p:cNvPr>
+          <p:cNvSpPr>
+            <a:spLocks noGrp="1"/>
+          </p:cNvSpPr>
+          <p:nvPr>
+            <p:ph type="title"/>
+          </p:nvPr>
+        </p:nvSpPr>
+        <p:spPr>
+          <a:xfrm>
+            <a:off x="998332" y="786983"/>
+            <a:ext cx="2749986" cy="743005"/>
+          </a:xfrm>
+          <a:prstGeom prst="rect">
+            <a:avLst/>
+          </a:prstGeom>
+        </p:spPr>
+        <p:txBody>
+          <a:bodyPr wrap="square" lIns="0" anchor="t" anchorCtr="0">
+            <a:spAutoFit/>
+          </a:bodyPr>
+          <a:lstStyle>
+            <a:lvl1pPr>
+              <a:lnSpc>
+                <a:spcPct val="80000"/>
+              </a:lnSpc>
+              <a:defRPr sz="2400">
+                <a:solidFill>
+                  <a:schemeClr val="accent1"/>
+                </a:solidFill>
+              </a:defRPr>
+            </a:lvl1pPr>
+          </a:lstStyle>
+          <a:p>
+            <a:endParaRPr lang="en-US"/>
+          </a:p>
+        </p:txBody>
+      </p:sp>
+      <p:sp>
+        <p:nvSpPr>
+          <p:cNvPr id="30" name="Subtext">
+            <a:extLst>
+              <a:ext uri="{FF2B5EF4-FFF2-40B4-BE49-F238E27FC236}">
+                <a16:creationId xmlns:a16="http://schemas.microsoft.com/office/drawing/2014/main" id="{625B8563-CA62-446A-DB32-3BB6C504EB00}"/>
+              </a:ext>
+            </a:extLst>
+          </p:cNvPr>
+          <p:cNvSpPr>
+            <a:spLocks noGrp="1"/>
+          </p:cNvSpPr>
+          <p:nvPr>
+            <p:ph type="body" sz="quarter" idx="13"/>
+          </p:nvPr>
+        </p:nvSpPr>
+        <p:spPr>
+          <a:xfrm>
+            <a:off x="998332" y="1529988"/>
+            <a:ext cx="2749986" cy="274562"/>
+          </a:xfrm>
+          <a:prstGeom prst="rect">
+            <a:avLst/>
+          </a:prstGeom>
+        </p:spPr>
+        <p:txBody>
+          <a:bodyPr wrap="square" lIns="0">
+            <a:spAutoFit/>
+          </a:bodyPr>
+          <a:lstStyle>
+            <a:lvl1pPr marL="0" indent="0">
+              <a:buNone/>
+              <a:defRPr lang="en-US" sz="1400" b="1" kern="1200" spc="0" dirty="0">
+                <a:solidFill>
+                  <a:schemeClr val="tx1"/>
+                </a:solidFill>
+                <a:latin typeface="TeleNeo Office ExtraBold" panose="020B0504040202090203" pitchFamily="34" charset="77"/>
+                <a:ea typeface="Bebas Neue Bold" charset="0"/>
+                <a:cs typeface="Bebas Neue Bold" charset="0"/>
+              </a:defRPr>
+            </a:lvl1pPr>
+          </a:lstStyle>
+          <a:p>
+            <a:pPr marL="0" lvl="0" algn="l" defTabSz="914400" rtl="0" eaLnBrk="1" latinLnBrk="0" hangingPunct="1">
+              <a:lnSpc>
+                <a:spcPct val="80000"/>
+              </a:lnSpc>
+            </a:pPr>
+            <a:endParaRPr lang="en-US"/>
+          </a:p>
+        </p:txBody>
+      </p:sp>
+      <p:sp>
+        <p:nvSpPr>
+          <p:cNvPr id="31" name="Subtext">
+            <a:extLst>
+              <a:ext uri="{FF2B5EF4-FFF2-40B4-BE49-F238E27FC236}">
+                <a16:creationId xmlns:a16="http://schemas.microsoft.com/office/drawing/2014/main" id="{F4279D22-477E-3B0F-91DD-21DC25785240}"/>
+              </a:ext>
+            </a:extLst>
+          </p:cNvPr>
+          <p:cNvSpPr>
+            <a:spLocks noGrp="1"/>
+          </p:cNvSpPr>
+          <p:nvPr>
+            <p:ph type="body" sz="quarter" idx="40"/>
+          </p:nvPr>
+        </p:nvSpPr>
+        <p:spPr>
+          <a:xfrm rot="16200000">
+            <a:off x="-985112" y="4842292"/>
+            <a:ext cx="2816585" cy="196529"/>
+          </a:xfrm>
+          <a:prstGeom prst="rect">
+            <a:avLst/>
+          </a:prstGeom>
+        </p:spPr>
+        <p:txBody>
+          <a:bodyPr wrap="square" lIns="0" anchor="ctr">
+            <a:spAutoFit/>
+          </a:bodyPr>
+          <a:lstStyle>
+            <a:lvl1pPr marL="0" indent="0">
+              <a:buNone/>
+              <a:defRPr lang="en-US" sz="800" b="1" kern="1200" spc="300" dirty="0">
+                <a:solidFill>
+                  <a:schemeClr val="tx1"/>
+                </a:solidFill>
+                <a:latin typeface="TeleNeo Office ExtraBold" panose="020B0504040202090203" pitchFamily="34" charset="77"/>
+                <a:ea typeface="Bebas Neue Bold" charset="0"/>
+                <a:cs typeface="Bebas Neue Bold" charset="0"/>
+              </a:defRPr>
+            </a:lvl1pPr>
+          </a:lstStyle>
+          <a:p>
+            <a:pPr marL="0" lvl="0" algn="l" defTabSz="914400" rtl="0" eaLnBrk="1" latinLnBrk="0" hangingPunct="1">
+              <a:lnSpc>
+                <a:spcPct val="80000"/>
+              </a:lnSpc>
+            </a:pPr>
+            <a:endParaRPr lang="en-US"/>
+          </a:p>
+        </p:txBody>
+      </p:sp>
+      <p:sp>
+        <p:nvSpPr>
+          <p:cNvPr id="36" name="Text Placeholder 19">
+            <a:extLst>
+              <a:ext uri="{FF2B5EF4-FFF2-40B4-BE49-F238E27FC236}">
+                <a16:creationId xmlns:a16="http://schemas.microsoft.com/office/drawing/2014/main" id="{1757D7CB-F3FE-D190-EBBC-668244C0ED4D}"/>
+              </a:ext>
+            </a:extLst>
+          </p:cNvPr>
+          <p:cNvSpPr>
+            <a:spLocks noGrp="1"/>
+          </p:cNvSpPr>
+          <p:nvPr>
+            <p:ph type="body" sz="quarter" idx="43"/>
+          </p:nvPr>
+        </p:nvSpPr>
+        <p:spPr>
+          <a:xfrm>
+            <a:off x="929958" y="1928178"/>
+            <a:ext cx="2818360" cy="1097518"/>
+          </a:xfrm>
+          <a:prstGeom prst="rect">
+            <a:avLst/>
+          </a:prstGeom>
+        </p:spPr>
+        <p:txBody>
+          <a:bodyPr/>
+          <a:lstStyle>
+            <a:lvl1pPr marL="6350" indent="0">
+              <a:buFontTx/>
+              <a:buNone/>
+              <a:tabLst/>
+              <a:defRPr sz="1200">
+                <a:latin typeface="+mn-lt"/>
+              </a:defRPr>
+            </a:lvl1pPr>
+            <a:lvl2pPr marL="6350" indent="0">
+              <a:buFontTx/>
+              <a:buNone/>
+              <a:tabLst/>
+              <a:defRPr sz="1200" b="0">
+                <a:latin typeface="+mn-lt"/>
+              </a:defRPr>
+            </a:lvl2pPr>
+            <a:lvl3pPr>
+              <a:defRPr sz="1200">
+                <a:latin typeface="+mn-lt"/>
+              </a:defRPr>
+            </a:lvl3pPr>
+            <a:lvl4pPr>
+              <a:defRPr sz="1200">
+                <a:latin typeface="+mn-lt"/>
+              </a:defRPr>
+            </a:lvl4pPr>
+            <a:lvl5pPr>
+              <a:defRPr sz="1200">
+                <a:latin typeface="+mn-lt"/>
+              </a:defRPr>
+            </a:lvl5pPr>
+          </a:lstStyle>
+          <a:p>
+            <a:pPr lvl="0"/>
+            <a:r>
+              <a:rPr lang="en-US"/>
+              <a:t>Click to edit Master text styles</a:t>
+            </a:r>
+          </a:p>
+          <a:p>
+            <a:pPr lvl="1"/>
+            <a:r>
+              <a:rPr lang="en-US"/>
+              <a:t>Second level</a:t>
+            </a:r>
+          </a:p>
+        </p:txBody>
+      </p:sp>
+      <p:sp>
+        <p:nvSpPr>
+          <p:cNvPr id="37" name="Text Placeholder 19">
+            <a:extLst>
+              <a:ext uri="{FF2B5EF4-FFF2-40B4-BE49-F238E27FC236}">
+                <a16:creationId xmlns:a16="http://schemas.microsoft.com/office/drawing/2014/main" id="{E9C7E58F-8D39-3D12-49CB-9ACBF4BCF604}"/>
+              </a:ext>
+            </a:extLst>
+          </p:cNvPr>
+          <p:cNvSpPr>
+            <a:spLocks noGrp="1"/>
+          </p:cNvSpPr>
+          <p:nvPr>
+            <p:ph type="body" sz="quarter" idx="44"/>
+          </p:nvPr>
+        </p:nvSpPr>
+        <p:spPr>
+          <a:xfrm>
+            <a:off x="929958" y="3143669"/>
+            <a:ext cx="2818360" cy="1097518"/>
+          </a:xfrm>
+          <a:prstGeom prst="rect">
+            <a:avLst/>
+          </a:prstGeom>
+        </p:spPr>
+        <p:txBody>
+          <a:bodyPr/>
+          <a:lstStyle>
+            <a:lvl1pPr marL="6350" indent="0">
+              <a:buFontTx/>
+              <a:buNone/>
+              <a:tabLst/>
+              <a:defRPr sz="1200">
+                <a:latin typeface="+mn-lt"/>
+              </a:defRPr>
+            </a:lvl1pPr>
+            <a:lvl2pPr marL="6350" indent="0">
+              <a:buFontTx/>
+              <a:buNone/>
+              <a:tabLst/>
+              <a:defRPr sz="1200" b="0">
+                <a:latin typeface="+mn-lt"/>
+              </a:defRPr>
+            </a:lvl2pPr>
+            <a:lvl3pPr>
+              <a:defRPr sz="1200">
+                <a:latin typeface="+mn-lt"/>
+              </a:defRPr>
+            </a:lvl3pPr>
+            <a:lvl4pPr>
+              <a:defRPr sz="1200">
+                <a:latin typeface="+mn-lt"/>
+              </a:defRPr>
+            </a:lvl4pPr>
+            <a:lvl5pPr>
+              <a:defRPr sz="1200">
+                <a:latin typeface="+mn-lt"/>
+              </a:defRPr>
+            </a:lvl5pPr>
+          </a:lstStyle>
+          <a:p>
+            <a:pPr lvl="0"/>
+            <a:r>
+              <a:rPr lang="en-US"/>
+              <a:t>Click to edit Master text styles</a:t>
+            </a:r>
+          </a:p>
+          <a:p>
+            <a:pPr lvl="1"/>
+            <a:r>
+              <a:rPr lang="en-US"/>
+              <a:t>Second level</a:t>
+            </a:r>
+          </a:p>
+        </p:txBody>
+      </p:sp>
+      <p:sp>
+        <p:nvSpPr>
+          <p:cNvPr id="38" name="Text Placeholder 19">
+            <a:extLst>
+              <a:ext uri="{FF2B5EF4-FFF2-40B4-BE49-F238E27FC236}">
+                <a16:creationId xmlns:a16="http://schemas.microsoft.com/office/drawing/2014/main" id="{7598B5FC-839B-323F-0B53-36F5827C390E}"/>
+              </a:ext>
+            </a:extLst>
+          </p:cNvPr>
+          <p:cNvSpPr>
+            <a:spLocks noGrp="1"/>
+          </p:cNvSpPr>
+          <p:nvPr>
+            <p:ph type="body" sz="quarter" idx="45"/>
+          </p:nvPr>
+        </p:nvSpPr>
+        <p:spPr>
+          <a:xfrm>
+            <a:off x="929958" y="4359160"/>
+            <a:ext cx="2818360" cy="1097518"/>
+          </a:xfrm>
+          <a:prstGeom prst="rect">
+            <a:avLst/>
+          </a:prstGeom>
+        </p:spPr>
+        <p:txBody>
+          <a:bodyPr/>
+          <a:lstStyle>
+            <a:lvl1pPr marL="6350" indent="0">
+              <a:buFontTx/>
+              <a:buNone/>
+              <a:tabLst/>
+              <a:defRPr sz="1200">
+                <a:latin typeface="+mn-lt"/>
+              </a:defRPr>
+            </a:lvl1pPr>
+            <a:lvl2pPr marL="6350" indent="0">
+              <a:buFontTx/>
+              <a:buNone/>
+              <a:tabLst/>
+              <a:defRPr sz="1200" b="0">
+                <a:latin typeface="+mn-lt"/>
+              </a:defRPr>
+            </a:lvl2pPr>
+            <a:lvl3pPr>
+              <a:defRPr sz="1200">
+                <a:latin typeface="+mn-lt"/>
+              </a:defRPr>
+            </a:lvl3pPr>
+            <a:lvl4pPr>
+              <a:defRPr sz="1200">
+                <a:latin typeface="+mn-lt"/>
+              </a:defRPr>
+            </a:lvl4pPr>
+            <a:lvl5pPr>
+              <a:defRPr sz="1200">
+                <a:latin typeface="+mn-lt"/>
+              </a:defRPr>
+            </a:lvl5pPr>
+          </a:lstStyle>
+          <a:p>
+            <a:pPr lvl="0"/>
+            <a:r>
+              <a:rPr lang="en-US"/>
+              <a:t>Click to edit Master text styles</a:t>
+            </a:r>
+          </a:p>
+          <a:p>
+            <a:pPr lvl="1"/>
+            <a:r>
+              <a:rPr lang="en-US"/>
+              <a:t>Second level</a:t>
+            </a:r>
+          </a:p>
+        </p:txBody>
+      </p:sp>
+    </p:spTree>
+    <p:extLst>
+      <p:ext uri="{BB962C8B-B14F-4D97-AF65-F5344CB8AC3E}">
+        <p14:creationId xmlns:p14="http://schemas.microsoft.com/office/powerpoint/2010/main" val="1402078020"/>
+      </p:ext>
+    </p:extLst>
+  </p:cSld>
+  <p:clrMapOvr>
+    <a:masterClrMapping/>
+  </p:clrMapOvr>
+</p:sldLayout>
+</file>
+
+<file path=ppt/slideLayouts/slideLayout26.xml><?xml version="1.0" encoding="utf-8"?>
+<p:sldLayout xmlns:a="http://schemas.openxmlformats.org/drawingml/2006/main" xmlns:r="http://schemas.openxmlformats.org/officeDocument/2006/relationships" xmlns:p="http://schemas.openxmlformats.org/presentationml/2006/main" userDrawn="1">
+  <p:cSld name="11_Blank-thin side">
+    <p:spTree>
+      <p:nvGrpSpPr>
+        <p:cNvPr id="1" name=""/>
+        <p:cNvGrpSpPr/>
+        <p:nvPr/>
+      </p:nvGrpSpPr>
+      <p:grpSpPr>
+        <a:xfrm>
+          <a:off x="0" y="0"/>
+          <a:ext cx="0" cy="0"/>
+          <a:chOff x="0" y="0"/>
+          <a:chExt cx="0" cy="0"/>
+        </a:xfrm>
+      </p:grpSpPr>
+      <p:sp>
+        <p:nvSpPr>
+          <p:cNvPr id="27" name="Rectangle 26">
+            <a:extLst>
+              <a:ext uri="{FF2B5EF4-FFF2-40B4-BE49-F238E27FC236}">
+                <a16:creationId xmlns:a16="http://schemas.microsoft.com/office/drawing/2014/main" id="{B9E26F17-2293-E0C9-DD12-7C85F4D74524}"/>
+              </a:ext>
+            </a:extLst>
+          </p:cNvPr>
+          <p:cNvSpPr/>
+          <p:nvPr userDrawn="1"/>
+        </p:nvSpPr>
+        <p:spPr>
+          <a:xfrm>
+            <a:off x="0" y="0"/>
+            <a:ext cx="3917018" cy="6858000"/>
+          </a:xfrm>
+          <a:prstGeom prst="rect">
+            <a:avLst/>
+          </a:prstGeom>
+          <a:solidFill>
+            <a:schemeClr val="tx1">
+              <a:alpha val="4000"/>
+            </a:schemeClr>
+          </a:solidFill>
+          <a:ln>
+            <a:noFill/>
+          </a:ln>
+        </p:spPr>
+        <p:style>
+          <a:lnRef idx="2">
+            <a:schemeClr val="accent1">
+              <a:shade val="50000"/>
+            </a:schemeClr>
+          </a:lnRef>
+          <a:fillRef idx="1">
+            <a:schemeClr val="accent1"/>
+          </a:fillRef>
+          <a:effectRef idx="0">
+            <a:schemeClr val="accent1"/>
+          </a:effectRef>
+          <a:fontRef idx="minor">
+            <a:schemeClr val="lt1"/>
+          </a:fontRef>
+        </p:style>
+        <p:txBody>
+          <a:bodyPr rtlCol="0" anchor="ctr"/>
+          <a:lstStyle/>
+          <a:p>
+            <a:pPr algn="ctr"/>
+            <a:endParaRPr lang="en-US"/>
+          </a:p>
+        </p:txBody>
+      </p:sp>
+      <p:sp>
+        <p:nvSpPr>
+          <p:cNvPr id="28" name="Slide Number Placeholder 5">
+            <a:extLst>
+              <a:ext uri="{FF2B5EF4-FFF2-40B4-BE49-F238E27FC236}">
+                <a16:creationId xmlns:a16="http://schemas.microsoft.com/office/drawing/2014/main" id="{534F6D69-5EEC-574E-6137-0FF81B89D823}"/>
+              </a:ext>
+            </a:extLst>
+          </p:cNvPr>
+          <p:cNvSpPr txBox="1">
+            <a:spLocks/>
+          </p:cNvSpPr>
+          <p:nvPr userDrawn="1"/>
+        </p:nvSpPr>
+        <p:spPr>
+          <a:xfrm>
+            <a:off x="78952" y="6361009"/>
+            <a:ext cx="629079" cy="489496"/>
+          </a:xfrm>
+          <a:prstGeom prst="rect">
+            <a:avLst/>
+          </a:prstGeom>
+        </p:spPr>
+        <p:txBody>
+          <a:bodyPr vert="horz" wrap="none" lIns="121920" tIns="60960" rIns="121920" bIns="60960" rtlCol="0" anchor="ctr">
+            <a:noAutofit/>
+          </a:bodyPr>
+          <a:lstStyle>
+            <a:defPPr>
+              <a:defRPr lang="en-US"/>
+            </a:defPPr>
+            <a:lvl1pPr marL="0" algn="r" defTabSz="914400" rtl="0" eaLnBrk="1" latinLnBrk="0" hangingPunct="1">
+              <a:defRPr sz="1200" kern="1200">
+                <a:solidFill>
+                  <a:schemeClr val="tx1">
+                    <a:tint val="75000"/>
+                  </a:schemeClr>
+                </a:solidFill>
+                <a:latin typeface="+mn-lt"/>
+                <a:ea typeface="+mn-ea"/>
+                <a:cs typeface="+mn-cs"/>
+              </a:defRPr>
+            </a:lvl1pPr>
+            <a:lvl2pPr marL="457200" algn="l" defTabSz="914400" rtl="0" eaLnBrk="1" latinLnBrk="0" hangingPunct="1">
+              <a:defRPr sz="1800" kern="1200">
+                <a:solidFill>
+                  <a:schemeClr val="tx1"/>
+                </a:solidFill>
+                <a:latin typeface="+mn-lt"/>
+                <a:ea typeface="+mn-ea"/>
+                <a:cs typeface="+mn-cs"/>
+              </a:defRPr>
+            </a:lvl2pPr>
+            <a:lvl3pPr marL="914400" algn="l" defTabSz="914400" rtl="0" eaLnBrk="1" latinLnBrk="0" hangingPunct="1">
+              <a:defRPr sz="1800" kern="1200">
+                <a:solidFill>
+                  <a:schemeClr val="tx1"/>
+                </a:solidFill>
+                <a:latin typeface="+mn-lt"/>
+                <a:ea typeface="+mn-ea"/>
+                <a:cs typeface="+mn-cs"/>
+              </a:defRPr>
+            </a:lvl3pPr>
+            <a:lvl4pPr marL="1371600" algn="l" defTabSz="914400" rtl="0" eaLnBrk="1" latinLnBrk="0" hangingPunct="1">
+              <a:defRPr sz="1800" kern="1200">
+                <a:solidFill>
+                  <a:schemeClr val="tx1"/>
+                </a:solidFill>
+                <a:latin typeface="+mn-lt"/>
+                <a:ea typeface="+mn-ea"/>
+                <a:cs typeface="+mn-cs"/>
+              </a:defRPr>
+            </a:lvl4pPr>
+            <a:lvl5pPr marL="1828800" algn="l" defTabSz="914400" rtl="0" eaLnBrk="1" latinLnBrk="0" hangingPunct="1">
+              <a:defRPr sz="1800" kern="1200">
+                <a:solidFill>
+                  <a:schemeClr val="tx1"/>
+                </a:solidFill>
+                <a:latin typeface="+mn-lt"/>
+                <a:ea typeface="+mn-ea"/>
+                <a:cs typeface="+mn-cs"/>
+              </a:defRPr>
+            </a:lvl5pPr>
+            <a:lvl6pPr marL="2286000" algn="l" defTabSz="914400" rtl="0" eaLnBrk="1" latinLnBrk="0" hangingPunct="1">
+              <a:defRPr sz="1800" kern="1200">
+                <a:solidFill>
+                  <a:schemeClr val="tx1"/>
+                </a:solidFill>
+                <a:latin typeface="+mn-lt"/>
+                <a:ea typeface="+mn-ea"/>
+                <a:cs typeface="+mn-cs"/>
+              </a:defRPr>
+            </a:lvl6pPr>
+            <a:lvl7pPr marL="2743200" algn="l" defTabSz="914400" rtl="0" eaLnBrk="1" latinLnBrk="0" hangingPunct="1">
+              <a:defRPr sz="1800" kern="1200">
+                <a:solidFill>
+                  <a:schemeClr val="tx1"/>
+                </a:solidFill>
+                <a:latin typeface="+mn-lt"/>
+                <a:ea typeface="+mn-ea"/>
+                <a:cs typeface="+mn-cs"/>
+              </a:defRPr>
+            </a:lvl7pPr>
+            <a:lvl8pPr marL="3200400" algn="l" defTabSz="914400" rtl="0" eaLnBrk="1" latinLnBrk="0" hangingPunct="1">
+              <a:defRPr sz="1800" kern="1200">
+                <a:solidFill>
+                  <a:schemeClr val="tx1"/>
+                </a:solidFill>
+                <a:latin typeface="+mn-lt"/>
+                <a:ea typeface="+mn-ea"/>
+                <a:cs typeface="+mn-cs"/>
+              </a:defRPr>
+            </a:lvl8pPr>
+            <a:lvl9pPr marL="3657600" algn="l" defTabSz="914400" rtl="0" eaLnBrk="1" latinLnBrk="0" hangingPunct="1">
+              <a:defRPr sz="1800" kern="1200">
+                <a:solidFill>
+                  <a:schemeClr val="tx1"/>
+                </a:solidFill>
+                <a:latin typeface="+mn-lt"/>
+                <a:ea typeface="+mn-ea"/>
+                <a:cs typeface="+mn-cs"/>
+              </a:defRPr>
+            </a:lvl9pPr>
+          </a:lstStyle>
+          <a:p>
+            <a:pPr algn="ctr"/>
+            <a:fld id="{1A290D8D-6BA0-418D-AFED-C65293F70DA0}" type="slidenum">
+              <a:rPr lang="en-US" sz="1400" b="1" i="0" smtClean="0">
+                <a:solidFill>
+                  <a:schemeClr val="accent1"/>
+                </a:solidFill>
+                <a:latin typeface="+mj-lt"/>
+                <a:ea typeface="Bebas Neue Bold" charset="0"/>
+                <a:cs typeface="Bebas Neue Bold" charset="0"/>
+              </a:rPr>
+              <a:pPr algn="ctr"/>
+              <a:t>‹#›</a:t>
+            </a:fld>
+            <a:endParaRPr lang="en-US" sz="1400" b="1" i="0">
+              <a:solidFill>
+                <a:schemeClr val="accent1"/>
+              </a:solidFill>
+              <a:latin typeface="+mj-lt"/>
+              <a:ea typeface="Bebas Neue Bold" charset="0"/>
+              <a:cs typeface="Bebas Neue Bold" charset="0"/>
+            </a:endParaRPr>
+          </a:p>
+        </p:txBody>
+      </p:sp>
+      <p:sp>
+        <p:nvSpPr>
+          <p:cNvPr id="29" name="Title 23">
+            <a:extLst>
+              <a:ext uri="{FF2B5EF4-FFF2-40B4-BE49-F238E27FC236}">
+                <a16:creationId xmlns:a16="http://schemas.microsoft.com/office/drawing/2014/main" id="{9E67884B-FCE5-DB36-B726-179605743DF8}"/>
+              </a:ext>
+            </a:extLst>
+          </p:cNvPr>
+          <p:cNvSpPr>
+            <a:spLocks noGrp="1"/>
+          </p:cNvSpPr>
+          <p:nvPr>
+            <p:ph type="title"/>
+          </p:nvPr>
+        </p:nvSpPr>
+        <p:spPr>
+          <a:xfrm>
+            <a:off x="998332" y="786983"/>
+            <a:ext cx="2749986" cy="743005"/>
+          </a:xfrm>
+          <a:prstGeom prst="rect">
+            <a:avLst/>
+          </a:prstGeom>
+        </p:spPr>
+        <p:txBody>
+          <a:bodyPr wrap="square" lIns="0" anchor="t" anchorCtr="0">
+            <a:spAutoFit/>
+          </a:bodyPr>
+          <a:lstStyle>
+            <a:lvl1pPr>
+              <a:lnSpc>
+                <a:spcPct val="80000"/>
+              </a:lnSpc>
+              <a:defRPr sz="2400">
+                <a:solidFill>
+                  <a:schemeClr val="accent1"/>
+                </a:solidFill>
+              </a:defRPr>
+            </a:lvl1pPr>
+          </a:lstStyle>
+          <a:p>
+            <a:endParaRPr lang="en-US"/>
+          </a:p>
+        </p:txBody>
+      </p:sp>
+      <p:sp>
+        <p:nvSpPr>
+          <p:cNvPr id="30" name="Subtext">
+            <a:extLst>
+              <a:ext uri="{FF2B5EF4-FFF2-40B4-BE49-F238E27FC236}">
+                <a16:creationId xmlns:a16="http://schemas.microsoft.com/office/drawing/2014/main" id="{E12B5898-4B24-8A16-F787-2D727C48DCE5}"/>
+              </a:ext>
+            </a:extLst>
+          </p:cNvPr>
+          <p:cNvSpPr>
+            <a:spLocks noGrp="1"/>
+          </p:cNvSpPr>
+          <p:nvPr>
+            <p:ph type="body" sz="quarter" idx="13"/>
+          </p:nvPr>
+        </p:nvSpPr>
+        <p:spPr>
+          <a:xfrm>
+            <a:off x="998332" y="1529988"/>
+            <a:ext cx="2749986" cy="274562"/>
+          </a:xfrm>
+          <a:prstGeom prst="rect">
+            <a:avLst/>
+          </a:prstGeom>
+        </p:spPr>
+        <p:txBody>
+          <a:bodyPr wrap="square" lIns="0">
+            <a:spAutoFit/>
+          </a:bodyPr>
+          <a:lstStyle>
+            <a:lvl1pPr marL="0" indent="0">
+              <a:buNone/>
+              <a:defRPr lang="en-US" sz="1400" b="1" kern="1200" spc="0" dirty="0">
+                <a:solidFill>
+                  <a:schemeClr val="tx1"/>
+                </a:solidFill>
+                <a:latin typeface="TeleNeo Office ExtraBold" panose="020B0504040202090203" pitchFamily="34" charset="77"/>
+                <a:ea typeface="Bebas Neue Bold" charset="0"/>
+                <a:cs typeface="Bebas Neue Bold" charset="0"/>
+              </a:defRPr>
+            </a:lvl1pPr>
+          </a:lstStyle>
+          <a:p>
+            <a:pPr marL="0" lvl="0" algn="l" defTabSz="914400" rtl="0" eaLnBrk="1" latinLnBrk="0" hangingPunct="1">
+              <a:lnSpc>
+                <a:spcPct val="80000"/>
+              </a:lnSpc>
+            </a:pPr>
+            <a:endParaRPr lang="en-US"/>
+          </a:p>
+        </p:txBody>
+      </p:sp>
+      <p:sp>
+        <p:nvSpPr>
+          <p:cNvPr id="31" name="Subtext">
+            <a:extLst>
+              <a:ext uri="{FF2B5EF4-FFF2-40B4-BE49-F238E27FC236}">
+                <a16:creationId xmlns:a16="http://schemas.microsoft.com/office/drawing/2014/main" id="{2EC65E53-A5F8-F022-785D-2F84A9D3237F}"/>
+              </a:ext>
+            </a:extLst>
+          </p:cNvPr>
+          <p:cNvSpPr>
+            <a:spLocks noGrp="1"/>
+          </p:cNvSpPr>
+          <p:nvPr>
+            <p:ph type="body" sz="quarter" idx="40"/>
+          </p:nvPr>
+        </p:nvSpPr>
+        <p:spPr>
+          <a:xfrm rot="16200000">
+            <a:off x="-985112" y="4842292"/>
+            <a:ext cx="2816585" cy="196529"/>
+          </a:xfrm>
+          <a:prstGeom prst="rect">
+            <a:avLst/>
+          </a:prstGeom>
+        </p:spPr>
+        <p:txBody>
+          <a:bodyPr wrap="square" lIns="0" anchor="ctr">
+            <a:spAutoFit/>
+          </a:bodyPr>
+          <a:lstStyle>
+            <a:lvl1pPr marL="0" indent="0">
+              <a:buNone/>
+              <a:defRPr lang="en-US" sz="800" b="1" kern="1200" spc="300" dirty="0">
+                <a:solidFill>
+                  <a:schemeClr val="tx1"/>
+                </a:solidFill>
+                <a:latin typeface="TeleNeo Office ExtraBold" panose="020B0504040202090203" pitchFamily="34" charset="77"/>
+                <a:ea typeface="Bebas Neue Bold" charset="0"/>
+                <a:cs typeface="Bebas Neue Bold" charset="0"/>
+              </a:defRPr>
+            </a:lvl1pPr>
+          </a:lstStyle>
+          <a:p>
+            <a:pPr marL="0" lvl="0" algn="l" defTabSz="914400" rtl="0" eaLnBrk="1" latinLnBrk="0" hangingPunct="1">
+              <a:lnSpc>
+                <a:spcPct val="80000"/>
+              </a:lnSpc>
+            </a:pPr>
+            <a:endParaRPr lang="en-US"/>
+          </a:p>
+        </p:txBody>
+      </p:sp>
+      <p:sp>
+        <p:nvSpPr>
+          <p:cNvPr id="36" name="Text Placeholder 19">
+            <a:extLst>
+              <a:ext uri="{FF2B5EF4-FFF2-40B4-BE49-F238E27FC236}">
+                <a16:creationId xmlns:a16="http://schemas.microsoft.com/office/drawing/2014/main" id="{CC10CA78-BE3A-D247-880B-3B0DC92350EC}"/>
+              </a:ext>
+            </a:extLst>
+          </p:cNvPr>
+          <p:cNvSpPr>
+            <a:spLocks noGrp="1"/>
+          </p:cNvSpPr>
+          <p:nvPr>
+            <p:ph type="body" sz="quarter" idx="43"/>
+          </p:nvPr>
+        </p:nvSpPr>
+        <p:spPr>
+          <a:xfrm>
+            <a:off x="929958" y="1928178"/>
+            <a:ext cx="2818360" cy="1097518"/>
+          </a:xfrm>
+          <a:prstGeom prst="rect">
+            <a:avLst/>
+          </a:prstGeom>
+        </p:spPr>
+        <p:txBody>
+          <a:bodyPr/>
+          <a:lstStyle>
+            <a:lvl1pPr marL="6350" indent="0">
+              <a:buFontTx/>
+              <a:buNone/>
+              <a:tabLst/>
+              <a:defRPr sz="1200">
+                <a:latin typeface="+mn-lt"/>
+              </a:defRPr>
+            </a:lvl1pPr>
+            <a:lvl2pPr marL="6350" indent="0">
+              <a:buFontTx/>
+              <a:buNone/>
+              <a:tabLst/>
+              <a:defRPr sz="1200" b="0">
+                <a:latin typeface="+mn-lt"/>
+              </a:defRPr>
+            </a:lvl2pPr>
+            <a:lvl3pPr>
+              <a:defRPr sz="1200">
+                <a:latin typeface="+mn-lt"/>
+              </a:defRPr>
+            </a:lvl3pPr>
+            <a:lvl4pPr>
+              <a:defRPr sz="1200">
+                <a:latin typeface="+mn-lt"/>
+              </a:defRPr>
+            </a:lvl4pPr>
+            <a:lvl5pPr>
+              <a:defRPr sz="1200">
+                <a:latin typeface="+mn-lt"/>
+              </a:defRPr>
+            </a:lvl5pPr>
+          </a:lstStyle>
+          <a:p>
+            <a:pPr lvl="0"/>
+            <a:r>
+              <a:rPr lang="en-US"/>
+              <a:t>Click to edit Master text styles</a:t>
+            </a:r>
+          </a:p>
+          <a:p>
+            <a:pPr lvl="1"/>
+            <a:r>
+              <a:rPr lang="en-US"/>
+              <a:t>Second level</a:t>
+            </a:r>
+          </a:p>
+        </p:txBody>
+      </p:sp>
+      <p:sp>
+        <p:nvSpPr>
+          <p:cNvPr id="37" name="Text Placeholder 19">
+            <a:extLst>
+              <a:ext uri="{FF2B5EF4-FFF2-40B4-BE49-F238E27FC236}">
+                <a16:creationId xmlns:a16="http://schemas.microsoft.com/office/drawing/2014/main" id="{47259E98-49BA-EEF8-B945-6C0D43AD7E87}"/>
+              </a:ext>
+            </a:extLst>
+          </p:cNvPr>
+          <p:cNvSpPr>
+            <a:spLocks noGrp="1"/>
+          </p:cNvSpPr>
+          <p:nvPr>
+            <p:ph type="body" sz="quarter" idx="44"/>
+          </p:nvPr>
+        </p:nvSpPr>
+        <p:spPr>
+          <a:xfrm>
+            <a:off x="929958" y="3143669"/>
+            <a:ext cx="2818360" cy="1097518"/>
+          </a:xfrm>
+          <a:prstGeom prst="rect">
+            <a:avLst/>
+          </a:prstGeom>
+        </p:spPr>
+        <p:txBody>
+          <a:bodyPr/>
+          <a:lstStyle>
+            <a:lvl1pPr marL="6350" indent="0">
+              <a:buFontTx/>
+              <a:buNone/>
+              <a:tabLst/>
+              <a:defRPr sz="1200">
+                <a:latin typeface="+mn-lt"/>
+              </a:defRPr>
+            </a:lvl1pPr>
+            <a:lvl2pPr marL="6350" indent="0">
+              <a:buFontTx/>
+              <a:buNone/>
+              <a:tabLst/>
+              <a:defRPr sz="1200" b="0">
+                <a:latin typeface="+mn-lt"/>
+              </a:defRPr>
+            </a:lvl2pPr>
+            <a:lvl3pPr>
+              <a:defRPr sz="1200">
+                <a:latin typeface="+mn-lt"/>
+              </a:defRPr>
+            </a:lvl3pPr>
+            <a:lvl4pPr>
+              <a:defRPr sz="1200">
+                <a:latin typeface="+mn-lt"/>
+              </a:defRPr>
+            </a:lvl4pPr>
+            <a:lvl5pPr>
+              <a:defRPr sz="1200">
+                <a:latin typeface="+mn-lt"/>
+              </a:defRPr>
+            </a:lvl5pPr>
+          </a:lstStyle>
+          <a:p>
+            <a:pPr lvl="0"/>
+            <a:r>
+              <a:rPr lang="en-US"/>
+              <a:t>Click to edit Master text styles</a:t>
+            </a:r>
+          </a:p>
+          <a:p>
+            <a:pPr lvl="1"/>
+            <a:r>
+              <a:rPr lang="en-US"/>
+              <a:t>Second level</a:t>
+            </a:r>
+          </a:p>
+        </p:txBody>
+      </p:sp>
+      <p:sp>
+        <p:nvSpPr>
+          <p:cNvPr id="38" name="Text Placeholder 19">
+            <a:extLst>
+              <a:ext uri="{FF2B5EF4-FFF2-40B4-BE49-F238E27FC236}">
+                <a16:creationId xmlns:a16="http://schemas.microsoft.com/office/drawing/2014/main" id="{34C0A7B5-2BB5-950A-C129-22E5E42EA57D}"/>
+              </a:ext>
+            </a:extLst>
+          </p:cNvPr>
+          <p:cNvSpPr>
+            <a:spLocks noGrp="1"/>
+          </p:cNvSpPr>
+          <p:nvPr>
+            <p:ph type="body" sz="quarter" idx="45"/>
+          </p:nvPr>
+        </p:nvSpPr>
+        <p:spPr>
+          <a:xfrm>
+            <a:off x="929958" y="4359160"/>
+            <a:ext cx="2818360" cy="1097518"/>
+          </a:xfrm>
+          <a:prstGeom prst="rect">
+            <a:avLst/>
+          </a:prstGeom>
+        </p:spPr>
+        <p:txBody>
+          <a:bodyPr/>
+          <a:lstStyle>
+            <a:lvl1pPr marL="6350" indent="0">
+              <a:buFontTx/>
+              <a:buNone/>
+              <a:tabLst/>
+              <a:defRPr sz="1200">
+                <a:latin typeface="+mn-lt"/>
+              </a:defRPr>
+            </a:lvl1pPr>
+            <a:lvl2pPr marL="6350" indent="0">
+              <a:buFontTx/>
+              <a:buNone/>
+              <a:tabLst/>
+              <a:defRPr sz="1200" b="0">
+                <a:latin typeface="+mn-lt"/>
+              </a:defRPr>
+            </a:lvl2pPr>
+            <a:lvl3pPr>
+              <a:defRPr sz="1200">
+                <a:latin typeface="+mn-lt"/>
+              </a:defRPr>
+            </a:lvl3pPr>
+            <a:lvl4pPr>
+              <a:defRPr sz="1200">
+                <a:latin typeface="+mn-lt"/>
+              </a:defRPr>
+            </a:lvl4pPr>
+            <a:lvl5pPr>
+              <a:defRPr sz="1200">
+                <a:latin typeface="+mn-lt"/>
+              </a:defRPr>
+            </a:lvl5pPr>
+          </a:lstStyle>
+          <a:p>
+            <a:pPr lvl="0"/>
+            <a:r>
+              <a:rPr lang="en-US"/>
+              <a:t>Click to edit Master text styles</a:t>
+            </a:r>
+          </a:p>
+          <a:p>
+            <a:pPr lvl="1"/>
+            <a:r>
+              <a:rPr lang="en-US"/>
+              <a:t>Second level</a:t>
+            </a:r>
+          </a:p>
+        </p:txBody>
+      </p:sp>
+    </p:spTree>
+    <p:extLst>
+      <p:ext uri="{BB962C8B-B14F-4D97-AF65-F5344CB8AC3E}">
+        <p14:creationId xmlns:p14="http://schemas.microsoft.com/office/powerpoint/2010/main" val="1391552644"/>
+      </p:ext>
+    </p:extLst>
+  </p:cSld>
+  <p:clrMapOvr>
+    <a:masterClrMapping/>
+  </p:clrMapOvr>
+</p:sldLayout>
+</file>
+
+<file path=ppt/slideLayouts/slideLayout27.xml><?xml version="1.0" encoding="utf-8"?>
+<p:sldLayout xmlns:a="http://schemas.openxmlformats.org/drawingml/2006/main" xmlns:r="http://schemas.openxmlformats.org/officeDocument/2006/relationships" xmlns:p="http://schemas.openxmlformats.org/presentationml/2006/main" userDrawn="1">
+  <p:cSld name="2_Agenda">
+    <p:bg>
+      <p:bgPr>
+        <a:solidFill>
+          <a:schemeClr val="bg1"/>
+        </a:solidFill>
+        <a:effectLst/>
+      </p:bgPr>
+    </p:bg>
+    <p:spTree>
+      <p:nvGrpSpPr>
+        <p:cNvPr id="1" name=""/>
+        <p:cNvGrpSpPr/>
+        <p:nvPr/>
+      </p:nvGrpSpPr>
+      <p:grpSpPr>
+        <a:xfrm>
+          <a:off x="0" y="0"/>
+          <a:ext cx="0" cy="0"/>
+          <a:chOff x="0" y="0"/>
+          <a:chExt cx="0" cy="0"/>
+        </a:xfrm>
+      </p:grpSpPr>
+      <p:sp>
+        <p:nvSpPr>
+          <p:cNvPr id="18" name="Rectangle 17">
+            <a:extLst>
+              <a:ext uri="{FF2B5EF4-FFF2-40B4-BE49-F238E27FC236}">
+                <a16:creationId xmlns:a16="http://schemas.microsoft.com/office/drawing/2014/main" id="{377EFE61-7E38-B240-8B05-A454D15190CE}"/>
+              </a:ext>
+            </a:extLst>
+          </p:cNvPr>
+          <p:cNvSpPr/>
+          <p:nvPr userDrawn="1"/>
+        </p:nvSpPr>
+        <p:spPr>
+          <a:xfrm>
+            <a:off x="0" y="0"/>
+            <a:ext cx="4810539" cy="6858000"/>
+          </a:xfrm>
+          <a:prstGeom prst="rect">
+            <a:avLst/>
+          </a:prstGeom>
+          <a:solidFill>
+            <a:schemeClr val="accent1"/>
+          </a:solidFill>
+          <a:ln>
+            <a:noFill/>
+          </a:ln>
+        </p:spPr>
+        <p:style>
+          <a:lnRef idx="2">
+            <a:schemeClr val="accent1">
+              <a:shade val="50000"/>
+            </a:schemeClr>
+          </a:lnRef>
+          <a:fillRef idx="1">
+            <a:schemeClr val="accent1"/>
+          </a:fillRef>
+          <a:effectRef idx="0">
+            <a:schemeClr val="accent1"/>
+          </a:effectRef>
+          <a:fontRef idx="minor">
+            <a:schemeClr val="lt1"/>
+          </a:fontRef>
+        </p:style>
+        <p:txBody>
+          <a:bodyPr rtlCol="0" anchor="ctr"/>
+          <a:lstStyle/>
+          <a:p>
+            <a:pPr algn="ctr"/>
+            <a:endParaRPr lang="en-US"/>
+          </a:p>
+        </p:txBody>
+      </p:sp>
+      <p:sp>
+        <p:nvSpPr>
+          <p:cNvPr id="20" name="Title 23">
+            <a:extLst>
+              <a:ext uri="{FF2B5EF4-FFF2-40B4-BE49-F238E27FC236}">
+                <a16:creationId xmlns:a16="http://schemas.microsoft.com/office/drawing/2014/main" id="{4931CCE8-4108-B646-BD0A-E4AE386E09C2}"/>
+              </a:ext>
+            </a:extLst>
+          </p:cNvPr>
+          <p:cNvSpPr>
+            <a:spLocks noGrp="1"/>
+          </p:cNvSpPr>
+          <p:nvPr>
+            <p:ph type="title" hasCustomPrompt="1"/>
+          </p:nvPr>
+        </p:nvSpPr>
+        <p:spPr>
+          <a:xfrm>
+            <a:off x="981855" y="1681123"/>
+            <a:ext cx="3462823" cy="899477"/>
+          </a:xfrm>
+          <a:prstGeom prst="rect">
+            <a:avLst/>
+          </a:prstGeom>
+        </p:spPr>
+        <p:txBody>
+          <a:bodyPr wrap="square" lIns="0" anchor="t" anchorCtr="0">
+            <a:spAutoFit/>
+          </a:bodyPr>
+          <a:lstStyle>
+            <a:lvl1pPr>
+              <a:lnSpc>
+                <a:spcPct val="80000"/>
+              </a:lnSpc>
+              <a:defRPr>
+                <a:solidFill>
+                  <a:schemeClr val="bg1"/>
+                </a:solidFill>
+              </a:defRPr>
+            </a:lvl1pPr>
+          </a:lstStyle>
+          <a:p>
+            <a:r>
+              <a:rPr lang="en-US"/>
+              <a:t>Agenda</a:t>
+            </a:r>
+          </a:p>
+        </p:txBody>
+      </p:sp>
+      <p:sp>
+        <p:nvSpPr>
+          <p:cNvPr id="19" name="Slide Number Placeholder 5">
+            <a:extLst>
+              <a:ext uri="{FF2B5EF4-FFF2-40B4-BE49-F238E27FC236}">
+                <a16:creationId xmlns:a16="http://schemas.microsoft.com/office/drawing/2014/main" id="{52BA001F-CC22-3F49-B9E4-6B923C39871A}"/>
+              </a:ext>
+            </a:extLst>
+          </p:cNvPr>
+          <p:cNvSpPr txBox="1">
+            <a:spLocks/>
+          </p:cNvSpPr>
+          <p:nvPr userDrawn="1"/>
+        </p:nvSpPr>
+        <p:spPr>
+          <a:xfrm>
+            <a:off x="78952" y="6361009"/>
+            <a:ext cx="629079" cy="489496"/>
+          </a:xfrm>
+          <a:prstGeom prst="rect">
+            <a:avLst/>
+          </a:prstGeom>
+        </p:spPr>
+        <p:txBody>
+          <a:bodyPr vert="horz" wrap="none" lIns="121920" tIns="60960" rIns="121920" bIns="60960" rtlCol="0" anchor="ctr">
+            <a:noAutofit/>
+          </a:bodyPr>
+          <a:lstStyle>
+            <a:defPPr>
+              <a:defRPr lang="en-US"/>
+            </a:defPPr>
+            <a:lvl1pPr marL="0" algn="r" defTabSz="914400" rtl="0" eaLnBrk="1" latinLnBrk="0" hangingPunct="1">
+              <a:defRPr sz="1200" kern="1200">
+                <a:solidFill>
+                  <a:schemeClr val="tx1">
+                    <a:tint val="75000"/>
+                  </a:schemeClr>
+                </a:solidFill>
+                <a:latin typeface="+mn-lt"/>
+                <a:ea typeface="+mn-ea"/>
+                <a:cs typeface="+mn-cs"/>
+              </a:defRPr>
+            </a:lvl1pPr>
+            <a:lvl2pPr marL="457200" algn="l" defTabSz="914400" rtl="0" eaLnBrk="1" latinLnBrk="0" hangingPunct="1">
+              <a:defRPr sz="1800" kern="1200">
+                <a:solidFill>
+                  <a:schemeClr val="tx1"/>
+                </a:solidFill>
+                <a:latin typeface="+mn-lt"/>
+                <a:ea typeface="+mn-ea"/>
+                <a:cs typeface="+mn-cs"/>
+              </a:defRPr>
+            </a:lvl2pPr>
+            <a:lvl3pPr marL="914400" algn="l" defTabSz="914400" rtl="0" eaLnBrk="1" latinLnBrk="0" hangingPunct="1">
+              <a:defRPr sz="1800" kern="1200">
+                <a:solidFill>
+                  <a:schemeClr val="tx1"/>
+                </a:solidFill>
+                <a:latin typeface="+mn-lt"/>
+                <a:ea typeface="+mn-ea"/>
+                <a:cs typeface="+mn-cs"/>
+              </a:defRPr>
+            </a:lvl3pPr>
+            <a:lvl4pPr marL="1371600" algn="l" defTabSz="914400" rtl="0" eaLnBrk="1" latinLnBrk="0" hangingPunct="1">
+              <a:defRPr sz="1800" kern="1200">
+                <a:solidFill>
+                  <a:schemeClr val="tx1"/>
+                </a:solidFill>
+                <a:latin typeface="+mn-lt"/>
+                <a:ea typeface="+mn-ea"/>
+                <a:cs typeface="+mn-cs"/>
+              </a:defRPr>
+            </a:lvl4pPr>
+            <a:lvl5pPr marL="1828800" algn="l" defTabSz="914400" rtl="0" eaLnBrk="1" latinLnBrk="0" hangingPunct="1">
+              <a:defRPr sz="1800" kern="1200">
+                <a:solidFill>
+                  <a:schemeClr val="tx1"/>
+                </a:solidFill>
+                <a:latin typeface="+mn-lt"/>
+                <a:ea typeface="+mn-ea"/>
+                <a:cs typeface="+mn-cs"/>
+              </a:defRPr>
+            </a:lvl5pPr>
+            <a:lvl6pPr marL="2286000" algn="l" defTabSz="914400" rtl="0" eaLnBrk="1" latinLnBrk="0" hangingPunct="1">
+              <a:defRPr sz="1800" kern="1200">
+                <a:solidFill>
+                  <a:schemeClr val="tx1"/>
+                </a:solidFill>
+                <a:latin typeface="+mn-lt"/>
+                <a:ea typeface="+mn-ea"/>
+                <a:cs typeface="+mn-cs"/>
+              </a:defRPr>
+            </a:lvl6pPr>
+            <a:lvl7pPr marL="2743200" algn="l" defTabSz="914400" rtl="0" eaLnBrk="1" latinLnBrk="0" hangingPunct="1">
+              <a:defRPr sz="1800" kern="1200">
+                <a:solidFill>
+                  <a:schemeClr val="tx1"/>
+                </a:solidFill>
+                <a:latin typeface="+mn-lt"/>
+                <a:ea typeface="+mn-ea"/>
+                <a:cs typeface="+mn-cs"/>
+              </a:defRPr>
+            </a:lvl7pPr>
+            <a:lvl8pPr marL="3200400" algn="l" defTabSz="914400" rtl="0" eaLnBrk="1" latinLnBrk="0" hangingPunct="1">
+              <a:defRPr sz="1800" kern="1200">
+                <a:solidFill>
+                  <a:schemeClr val="tx1"/>
+                </a:solidFill>
+                <a:latin typeface="+mn-lt"/>
+                <a:ea typeface="+mn-ea"/>
+                <a:cs typeface="+mn-cs"/>
+              </a:defRPr>
+            </a:lvl8pPr>
+            <a:lvl9pPr marL="3657600" algn="l" defTabSz="914400" rtl="0" eaLnBrk="1" latinLnBrk="0" hangingPunct="1">
+              <a:defRPr sz="1800" kern="1200">
+                <a:solidFill>
+                  <a:schemeClr val="tx1"/>
+                </a:solidFill>
+                <a:latin typeface="+mn-lt"/>
+                <a:ea typeface="+mn-ea"/>
+                <a:cs typeface="+mn-cs"/>
+              </a:defRPr>
+            </a:lvl9pPr>
+          </a:lstStyle>
+          <a:p>
+            <a:pPr algn="ctr"/>
+            <a:fld id="{1A290D8D-6BA0-418D-AFED-C65293F70DA0}" type="slidenum">
+              <a:rPr lang="en-US" sz="1400" b="1" i="0" smtClean="0">
+                <a:solidFill>
+                  <a:schemeClr val="bg1"/>
+                </a:solidFill>
+                <a:latin typeface="+mj-lt"/>
+                <a:ea typeface="Bebas Neue Bold" charset="0"/>
+                <a:cs typeface="Bebas Neue Bold" charset="0"/>
+              </a:rPr>
+              <a:pPr algn="ctr"/>
+              <a:t>‹#›</a:t>
+            </a:fld>
+            <a:endParaRPr lang="en-US" sz="1400" b="1" i="0">
+              <a:solidFill>
+                <a:schemeClr val="bg1"/>
+              </a:solidFill>
+              <a:latin typeface="+mj-lt"/>
+              <a:ea typeface="Bebas Neue Bold" charset="0"/>
+              <a:cs typeface="Bebas Neue Bold" charset="0"/>
+            </a:endParaRPr>
+          </a:p>
+        </p:txBody>
+      </p:sp>
+      <p:sp>
+        <p:nvSpPr>
+          <p:cNvPr id="47" name="Subtext">
+            <a:extLst>
+              <a:ext uri="{FF2B5EF4-FFF2-40B4-BE49-F238E27FC236}">
+                <a16:creationId xmlns:a16="http://schemas.microsoft.com/office/drawing/2014/main" id="{B2F1C238-80DA-92D9-129F-D68BF702019C}"/>
+              </a:ext>
+            </a:extLst>
+          </p:cNvPr>
+          <p:cNvSpPr>
+            <a:spLocks noGrp="1"/>
+          </p:cNvSpPr>
+          <p:nvPr>
+            <p:ph type="body" sz="quarter" idx="26"/>
+          </p:nvPr>
+        </p:nvSpPr>
+        <p:spPr>
+          <a:xfrm rot="16200000">
+            <a:off x="-985112" y="4829308"/>
+            <a:ext cx="2816585" cy="222497"/>
+          </a:xfrm>
+          <a:prstGeom prst="rect">
+            <a:avLst/>
+          </a:prstGeom>
+        </p:spPr>
+        <p:txBody>
+          <a:bodyPr wrap="square" lIns="0" anchor="ctr">
+            <a:spAutoFit/>
+          </a:bodyPr>
+          <a:lstStyle>
+            <a:lvl1pPr marL="0" indent="0">
+              <a:buNone/>
+              <a:defRPr lang="en-US" sz="1000" b="1" kern="1200" spc="300" dirty="0">
+                <a:solidFill>
+                  <a:schemeClr val="bg1"/>
+                </a:solidFill>
+                <a:latin typeface="TeleNeo Office ExtraBold" panose="020B0504040202090203" pitchFamily="34" charset="77"/>
+                <a:ea typeface="Bebas Neue Bold" charset="0"/>
+                <a:cs typeface="Bebas Neue Bold" charset="0"/>
+              </a:defRPr>
+            </a:lvl1pPr>
+          </a:lstStyle>
+          <a:p>
+            <a:pPr marL="0" lvl="0" algn="l" defTabSz="914400" rtl="0" eaLnBrk="1" latinLnBrk="0" hangingPunct="1">
+              <a:lnSpc>
+                <a:spcPct val="80000"/>
+              </a:lnSpc>
+            </a:pPr>
+            <a:endParaRPr lang="en-US"/>
+          </a:p>
+        </p:txBody>
+      </p:sp>
+    </p:spTree>
+    <p:extLst>
+      <p:ext uri="{BB962C8B-B14F-4D97-AF65-F5344CB8AC3E}">
+        <p14:creationId xmlns:p14="http://schemas.microsoft.com/office/powerpoint/2010/main" val="4226493833"/>
+      </p:ext>
+    </p:extLst>
+  </p:cSld>
+  <p:clrMapOvr>
+    <a:masterClrMapping/>
+  </p:clrMapOvr>
+  <p:extLst>
+    <p:ext uri="{DCECCB84-F9BA-43D5-87BE-67443E8EF086}">
+      <p15:sldGuideLst xmlns:p15="http://schemas.microsoft.com/office/powerpoint/2012/main">
+        <p15:guide id="1" orient="horz" pos="3744">
+          <p15:clr>
+            <a:srgbClr val="FBAE40"/>
+          </p15:clr>
+        </p15:guide>
+      </p15:sldGuideLst>
+    </p:ext>
+  </p:extLst>
+</p:sldLayout>
+</file>
+
+<file path=ppt/slideLayouts/slideLayout28.xml><?xml version="1.0" encoding="utf-8"?>
+<p:sldLayout xmlns:a="http://schemas.openxmlformats.org/drawingml/2006/main" xmlns:r="http://schemas.openxmlformats.org/officeDocument/2006/relationships" xmlns:p="http://schemas.openxmlformats.org/presentationml/2006/main">
+  <p:cSld name="DEFAULT">
+    <p:bg>
+      <p:bgRef idx="1001">
+        <a:schemeClr val="bg1"/>
+      </p:bgRef>
+    </p:bg>
+    <p:spTree>
+      <p:nvGrpSpPr>
+        <p:cNvPr id="1" name=""/>
+        <p:cNvGrpSpPr/>
+        <p:nvPr/>
+      </p:nvGrpSpPr>
+      <p:grpSpPr>
+        <a:xfrm>
+          <a:off x="0" y="0"/>
+          <a:ext cx="0" cy="0"/>
+          <a:chOff x="0" y="0"/>
+          <a:chExt cx="0" cy="0"/>
+        </a:xfrm>
+      </p:grpSpPr>
+    </p:spTree>
+    <p:extLst>
+      <p:ext uri="{BB962C8B-B14F-4D97-AF65-F5344CB8AC3E}">
+        <p14:creationId xmlns:p14="http://schemas.microsoft.com/office/powerpoint/2010/main" val="2667368339"/>
+      </p:ext>
+    </p:extLst>
+  </p:cSld>
+  <p:clrMapOvr>
+    <a:masterClrMapping/>
+  </p:clrMapOvr>
+</p:sldLayout>
+</file>
+
+<file path=ppt/slideLayouts/slideLayout29.xml><?xml version="1.0" encoding="utf-8"?>
+<p:sldLayout xmlns:a="http://schemas.openxmlformats.org/drawingml/2006/main" xmlns:r="http://schemas.openxmlformats.org/officeDocument/2006/relationships" xmlns:p="http://schemas.openxmlformats.org/presentationml/2006/main" userDrawn="1">
+  <p:cSld name="Blank Gray">
+    <p:bg>
+      <p:bgPr>
+        <a:solidFill>
+          <a:srgbClr val="F5F5F5"/>
+        </a:solidFill>
+        <a:effectLst/>
+      </p:bgPr>
+    </p:bg>
+    <p:spTree>
+      <p:nvGrpSpPr>
+        <p:cNvPr id="1" name=""/>
+        <p:cNvGrpSpPr/>
+        <p:nvPr/>
+      </p:nvGrpSpPr>
+      <p:grpSpPr>
+        <a:xfrm>
+          <a:off x="0" y="0"/>
+          <a:ext cx="0" cy="0"/>
+          <a:chOff x="0" y="0"/>
+          <a:chExt cx="0" cy="0"/>
+        </a:xfrm>
+      </p:grpSpPr>
+      <p:sp>
+        <p:nvSpPr>
+          <p:cNvPr id="2" name="TextBox 1">
+            <a:extLst>
+              <a:ext uri="{FF2B5EF4-FFF2-40B4-BE49-F238E27FC236}">
+                <a16:creationId xmlns:a16="http://schemas.microsoft.com/office/drawing/2014/main" id="{C74F4197-8C76-3A8F-53DA-6C17B1D3ED7D}"/>
+              </a:ext>
+            </a:extLst>
+          </p:cNvPr>
+          <p:cNvSpPr txBox="1"/>
+          <p:nvPr userDrawn="1"/>
+        </p:nvSpPr>
+        <p:spPr>
+          <a:xfrm>
+            <a:off x="257358" y="6370818"/>
+            <a:ext cx="609848" cy="169277"/>
+          </a:xfrm>
+          <a:prstGeom prst="rect">
+            <a:avLst/>
+          </a:prstGeom>
+          <a:noFill/>
+        </p:spPr>
+        <p:txBody>
+          <a:bodyPr wrap="square" lIns="0" tIns="0" rIns="0" bIns="0" rtlCol="0">
+            <a:spAutoFit/>
+          </a:bodyPr>
+          <a:lstStyle/>
+          <a:p>
+            <a:pPr defTabSz="914217"/>
+            <a:fld id="{AF9ABA86-0794-FE4B-B8F9-177F634B1549}" type="slidenum">
+              <a:rPr lang="en-US" sz="1100" b="1">
+                <a:solidFill>
+                  <a:srgbClr val="000000"/>
+                </a:solidFill>
+                <a:latin typeface="TeleNeo Office" panose="020B0504040202090203" pitchFamily="34" charset="77"/>
+              </a:rPr>
+              <a:pPr defTabSz="914217"/>
+              <a:t>‹#›</a:t>
+            </a:fld>
+            <a:endParaRPr lang="en-US" sz="1100" b="1">
+              <a:solidFill>
+                <a:srgbClr val="000000"/>
+              </a:solidFill>
+              <a:latin typeface="TeleNeo Office" panose="020B0504040202090203" pitchFamily="34" charset="77"/>
+            </a:endParaRPr>
+          </a:p>
+        </p:txBody>
+      </p:sp>
+      <p:sp>
+        <p:nvSpPr>
+          <p:cNvPr id="3" name="Shape 3">
+            <a:extLst>
+              <a:ext uri="{FF2B5EF4-FFF2-40B4-BE49-F238E27FC236}">
+                <a16:creationId xmlns:a16="http://schemas.microsoft.com/office/drawing/2014/main" id="{E976437F-B162-C54D-89B3-D57A16BACFA0}"/>
+              </a:ext>
+            </a:extLst>
+          </p:cNvPr>
+          <p:cNvSpPr/>
+          <p:nvPr userDrawn="1"/>
+        </p:nvSpPr>
+        <p:spPr>
+          <a:xfrm>
+            <a:off x="11569640" y="5778500"/>
+            <a:ext cx="317498" cy="762000"/>
+          </a:xfrm>
+          <a:prstGeom prst="rect">
+            <a:avLst/>
+          </a:prstGeom>
+          <a:noFill/>
+          <a:ln/>
+        </p:spPr>
+        <p:txBody>
+          <a:bodyPr/>
+          <a:lstStyle/>
+          <a:p>
+            <a:endParaRPr lang="en-CR" sz="900"/>
+          </a:p>
+        </p:txBody>
+      </p:sp>
+      <p:pic>
+        <p:nvPicPr>
+          <p:cNvPr id="4" name="Image 0" descr=" ">
+            <a:extLst>
+              <a:ext uri="{FF2B5EF4-FFF2-40B4-BE49-F238E27FC236}">
+                <a16:creationId xmlns:a16="http://schemas.microsoft.com/office/drawing/2014/main" id="{F6EFDDC6-EF2B-32D5-6BA5-910EAE4AB8AE}"/>
+              </a:ext>
+            </a:extLst>
+          </p:cNvPr>
+          <p:cNvPicPr/>
+          <p:nvPr userDrawn="1"/>
+        </p:nvPicPr>
+        <p:blipFill>
+          <a:blip r:embed="rId2">
+            <a:extLst>
+              <a:ext uri="{96DAC541-7B7A-43D3-8B79-37D633B846F1}">
+                <asvg:svgBlip xmlns:asvg="http://schemas.microsoft.com/office/drawing/2016/SVG/main" r:embed="rId3"/>
+              </a:ext>
+            </a:extLst>
+          </a:blip>
+          <a:stretch>
+            <a:fillRect/>
+          </a:stretch>
+        </p:blipFill>
+        <p:spPr>
+          <a:xfrm>
+            <a:off x="11568815" y="5778500"/>
+            <a:ext cx="319148" cy="317500"/>
+          </a:xfrm>
+          <a:prstGeom prst="rect">
+            <a:avLst/>
+          </a:prstGeom>
+        </p:spPr>
+      </p:pic>
+      <p:pic>
+        <p:nvPicPr>
+          <p:cNvPr id="5" name="Image 1" descr=" ">
+            <a:extLst>
+              <a:ext uri="{FF2B5EF4-FFF2-40B4-BE49-F238E27FC236}">
+                <a16:creationId xmlns:a16="http://schemas.microsoft.com/office/drawing/2014/main" id="{3D7BC490-97B3-E574-26F6-5D68FFEAC42C}"/>
+              </a:ext>
+            </a:extLst>
+          </p:cNvPr>
+          <p:cNvPicPr/>
+          <p:nvPr userDrawn="1"/>
+        </p:nvPicPr>
+        <p:blipFill>
+          <a:blip r:embed="rId4">
+            <a:extLst>
+              <a:ext uri="{96DAC541-7B7A-43D3-8B79-37D633B846F1}">
+                <asvg:svgBlip xmlns:asvg="http://schemas.microsoft.com/office/drawing/2016/SVG/main" r:embed="rId5"/>
+              </a:ext>
+            </a:extLst>
+          </a:blip>
+          <a:stretch>
+            <a:fillRect/>
+          </a:stretch>
+        </p:blipFill>
+        <p:spPr>
+          <a:xfrm>
+            <a:off x="11569640" y="6153150"/>
+            <a:ext cx="317498" cy="6350"/>
+          </a:xfrm>
+          <a:prstGeom prst="rect">
+            <a:avLst/>
+          </a:prstGeom>
+        </p:spPr>
+      </p:pic>
+      <p:pic>
+        <p:nvPicPr>
+          <p:cNvPr id="6" name="Image 2" descr=" ">
+            <a:extLst>
+              <a:ext uri="{FF2B5EF4-FFF2-40B4-BE49-F238E27FC236}">
+                <a16:creationId xmlns:a16="http://schemas.microsoft.com/office/drawing/2014/main" id="{AEC8B7B8-0245-2B96-E8D0-7D21BAB5ED8A}"/>
+              </a:ext>
+            </a:extLst>
+          </p:cNvPr>
+          <p:cNvPicPr/>
+          <p:nvPr userDrawn="1"/>
+        </p:nvPicPr>
+        <p:blipFill>
+          <a:blip r:embed="rId6">
+            <a:extLst>
+              <a:ext uri="{96DAC541-7B7A-43D3-8B79-37D633B846F1}">
+                <asvg:svgBlip xmlns:asvg="http://schemas.microsoft.com/office/drawing/2016/SVG/main" r:embed="rId7"/>
+              </a:ext>
+            </a:extLst>
+          </a:blip>
+          <a:stretch>
+            <a:fillRect/>
+          </a:stretch>
+        </p:blipFill>
+        <p:spPr>
+          <a:xfrm>
+            <a:off x="11569640" y="6223000"/>
+            <a:ext cx="317498" cy="317500"/>
+          </a:xfrm>
+          <a:prstGeom prst="rect">
+            <a:avLst/>
+          </a:prstGeom>
+        </p:spPr>
+      </p:pic>
+      <p:sp>
+        <p:nvSpPr>
+          <p:cNvPr id="7" name="Text Placeholder 55">
+            <a:extLst>
+              <a:ext uri="{FF2B5EF4-FFF2-40B4-BE49-F238E27FC236}">
+                <a16:creationId xmlns:a16="http://schemas.microsoft.com/office/drawing/2014/main" id="{9C2EF805-10F6-249B-D8FA-09BE19C413BA}"/>
+              </a:ext>
+            </a:extLst>
+          </p:cNvPr>
+          <p:cNvSpPr>
+            <a:spLocks noGrp="1"/>
+          </p:cNvSpPr>
+          <p:nvPr>
+            <p:ph type="body" sz="quarter" idx="10" hasCustomPrompt="1"/>
+          </p:nvPr>
+        </p:nvSpPr>
+        <p:spPr>
+          <a:xfrm>
+            <a:off x="211676" y="237674"/>
+            <a:ext cx="4926165" cy="276614"/>
+          </a:xfrm>
+          <a:prstGeom prst="rect">
+            <a:avLst/>
+          </a:prstGeom>
+        </p:spPr>
+        <p:txBody>
+          <a:bodyPr>
+            <a:spAutoFit/>
+          </a:bodyPr>
+          <a:lstStyle>
+            <a:lvl1pPr marL="0" indent="0">
+              <a:buNone/>
+              <a:defRPr sz="1300" b="1" i="0">
+                <a:latin typeface="TeleNeo Office ExtraBold" panose="020B0504040202090203" pitchFamily="34" charset="77"/>
+              </a:defRPr>
+            </a:lvl1pPr>
+          </a:lstStyle>
+          <a:p>
+            <a:pPr lvl="0"/>
+            <a:r>
+              <a:rPr lang="en-US"/>
+              <a:t>SLIDE TITLE</a:t>
+            </a:r>
+          </a:p>
+        </p:txBody>
+      </p:sp>
+    </p:spTree>
+    <p:extLst>
+      <p:ext uri="{BB962C8B-B14F-4D97-AF65-F5344CB8AC3E}">
+        <p14:creationId xmlns:p14="http://schemas.microsoft.com/office/powerpoint/2010/main" val="3574225300"/>
+      </p:ext>
+    </p:extLst>
+  </p:cSld>
+  <p:clrMapOvr>
+    <a:masterClrMapping/>
+  </p:clrMapOvr>
+  <p:extLst>
+    <p:ext uri="{DCECCB84-F9BA-43D5-87BE-67443E8EF086}">
+      <p15:sldGuideLst xmlns:p15="http://schemas.microsoft.com/office/powerpoint/2012/main">
+        <p15:guide id="1" orient="horz" pos="4320">
+          <p15:clr>
+            <a:srgbClr val="FBAE40"/>
+          </p15:clr>
+        </p15:guide>
+        <p15:guide id="2" pos="7681">
+          <p15:clr>
+            <a:srgbClr val="FBAE40"/>
+          </p15:clr>
+        </p15:guide>
+      </p15:sldGuideLst>
+    </p:ext>
+  </p:extLst>
 </p:sldLayout>
 </file>
 
@@ -11710,6 +15047,7 @@
     <p:sldLayoutId id="2147484097" r:id="rId10"/>
     <p:sldLayoutId id="2147484098" r:id="rId11"/>
     <p:sldLayoutId id="2147484102" r:id="rId12"/>
+    <p:sldLayoutId id="2147484107" r:id="rId13"/>
   </p:sldLayoutIdLst>
   <p:txStyles>
     <p:titleStyle>
@@ -13140,6 +16478,376 @@
 </p:sldMaster>
 </file>
 
+<file path=ppt/slideMasters/slideMaster5.xml><?xml version="1.0" encoding="utf-8"?>
+<p:sldMaster xmlns:a="http://schemas.openxmlformats.org/drawingml/2006/main" xmlns:r="http://schemas.openxmlformats.org/officeDocument/2006/relationships" xmlns:p="http://schemas.openxmlformats.org/presentationml/2006/main">
+  <p:cSld>
+    <p:bg>
+      <p:bgRef idx="1001">
+        <a:schemeClr val="bg1"/>
+      </p:bgRef>
+    </p:bg>
+    <p:spTree>
+      <p:nvGrpSpPr>
+        <p:cNvPr id="1" name=""/>
+        <p:cNvGrpSpPr/>
+        <p:nvPr/>
+      </p:nvGrpSpPr>
+      <p:grpSpPr>
+        <a:xfrm>
+          <a:off x="0" y="0"/>
+          <a:ext cx="0" cy="0"/>
+          <a:chOff x="0" y="0"/>
+          <a:chExt cx="0" cy="0"/>
+        </a:xfrm>
+      </p:grpSpPr>
+    </p:spTree>
+    <p:extLst>
+      <p:ext uri="{BB962C8B-B14F-4D97-AF65-F5344CB8AC3E}">
+        <p14:creationId xmlns:p14="http://schemas.microsoft.com/office/powerpoint/2010/main" val="1348033047"/>
+      </p:ext>
+    </p:extLst>
+  </p:cSld>
+  <p:clrMap bg1="lt1" tx1="dk1" bg2="lt2" tx2="dk2" accent1="accent1" accent2="accent2" accent3="accent3" accent4="accent4" accent5="accent5" accent6="accent6" hlink="hlink" folHlink="folHlink"/>
+  <p:sldLayoutIdLst>
+    <p:sldLayoutId id="2147484109" r:id="rId1"/>
+    <p:sldLayoutId id="2147484110" r:id="rId2"/>
+    <p:sldLayoutId id="2147484111" r:id="rId3"/>
+    <p:sldLayoutId id="2147484112" r:id="rId4"/>
+    <p:sldLayoutId id="2147484113" r:id="rId5"/>
+    <p:sldLayoutId id="2147484114" r:id="rId6"/>
+    <p:sldLayoutId id="2147484115" r:id="rId7"/>
+  </p:sldLayoutIdLst>
+  <p:txStyles>
+    <p:titleStyle>
+      <a:lvl1pPr algn="l" defTabSz="914400" rtl="0" eaLnBrk="1" latinLnBrk="0" hangingPunct="1">
+        <a:lnSpc>
+          <a:spcPct val="90000"/>
+        </a:lnSpc>
+        <a:spcBef>
+          <a:spcPct val="0"/>
+        </a:spcBef>
+        <a:buNone/>
+        <a:defRPr sz="6200" b="1" i="0" kern="1200">
+          <a:solidFill>
+            <a:schemeClr val="tx1"/>
+          </a:solidFill>
+          <a:latin typeface="TeleNeo Office ExtraBold" panose="020B0504040202090203" pitchFamily="34" charset="77"/>
+          <a:ea typeface="+mj-ea"/>
+          <a:cs typeface="+mj-cs"/>
+        </a:defRPr>
+      </a:lvl1pPr>
+    </p:titleStyle>
+    <p:bodyStyle>
+      <a:lvl1pPr marL="228600" indent="-228600" algn="l" defTabSz="914400" rtl="0" eaLnBrk="1" latinLnBrk="0" hangingPunct="1">
+        <a:lnSpc>
+          <a:spcPct val="90000"/>
+        </a:lnSpc>
+        <a:spcBef>
+          <a:spcPts val="1000"/>
+        </a:spcBef>
+        <a:buFont typeface="Arial"/>
+        <a:buChar char="•"/>
+        <a:defRPr sz="6200" b="1" i="0" kern="1200">
+          <a:solidFill>
+            <a:schemeClr val="tx1"/>
+          </a:solidFill>
+          <a:latin typeface="TeleNeo Office ExtraBold" panose="020B0504040202090203" pitchFamily="34" charset="77"/>
+          <a:ea typeface="+mn-ea"/>
+          <a:cs typeface="+mn-cs"/>
+        </a:defRPr>
+      </a:lvl1pPr>
+      <a:lvl2pPr marL="685800" marR="0" indent="-228600" algn="l" defTabSz="914400" rtl="0" eaLnBrk="1" fontAlgn="auto" latinLnBrk="0" hangingPunct="1">
+        <a:lnSpc>
+          <a:spcPct val="90000"/>
+        </a:lnSpc>
+        <a:spcBef>
+          <a:spcPts val="500"/>
+        </a:spcBef>
+        <a:spcAft>
+          <a:spcPts val="0"/>
+        </a:spcAft>
+        <a:buClrTx/>
+        <a:buSzTx/>
+        <a:buFont typeface="Arial"/>
+        <a:buChar char="•"/>
+        <a:tabLst/>
+        <a:defRPr sz="4800" b="1" i="0" kern="1200" spc="0">
+          <a:solidFill>
+            <a:schemeClr val="tx1"/>
+          </a:solidFill>
+          <a:latin typeface="TeleNeo Office ExtraBold" panose="020B0504040202090203" pitchFamily="34" charset="77"/>
+          <a:ea typeface="+mn-ea"/>
+          <a:cs typeface="+mn-cs"/>
+        </a:defRPr>
+      </a:lvl2pPr>
+      <a:lvl3pPr marL="1143000" marR="0" indent="-228600" algn="l" defTabSz="914400" rtl="0" eaLnBrk="1" fontAlgn="auto" latinLnBrk="0" hangingPunct="1">
+        <a:lnSpc>
+          <a:spcPct val="90000"/>
+        </a:lnSpc>
+        <a:spcBef>
+          <a:spcPts val="500"/>
+        </a:spcBef>
+        <a:spcAft>
+          <a:spcPts val="0"/>
+        </a:spcAft>
+        <a:buClrTx/>
+        <a:buSzTx/>
+        <a:buFont typeface="Arial"/>
+        <a:buChar char="•"/>
+        <a:tabLst/>
+        <a:defRPr sz="1200" b="1" i="0" kern="1200" spc="300">
+          <a:solidFill>
+            <a:schemeClr val="tx1"/>
+          </a:solidFill>
+          <a:latin typeface="TeleNeo Office ExtraBold" panose="020B0504040202090203" pitchFamily="34" charset="77"/>
+          <a:ea typeface="+mn-ea"/>
+          <a:cs typeface="+mn-cs"/>
+        </a:defRPr>
+      </a:lvl3pPr>
+      <a:lvl4pPr marL="1600200" indent="-228600" algn="l" defTabSz="914400" rtl="0" eaLnBrk="1" latinLnBrk="0" hangingPunct="1">
+        <a:lnSpc>
+          <a:spcPct val="90000"/>
+        </a:lnSpc>
+        <a:spcBef>
+          <a:spcPts val="500"/>
+        </a:spcBef>
+        <a:buFont typeface="Arial"/>
+        <a:buChar char="•"/>
+        <a:defRPr sz="1400" b="0" i="0" kern="1200">
+          <a:solidFill>
+            <a:schemeClr val="tx1"/>
+          </a:solidFill>
+          <a:latin typeface="TeleNeo Office" panose="020B0504040202090203" pitchFamily="34" charset="77"/>
+          <a:ea typeface="+mn-ea"/>
+          <a:cs typeface="+mn-cs"/>
+        </a:defRPr>
+      </a:lvl4pPr>
+      <a:lvl5pPr marL="2057400" indent="-228600" algn="l" defTabSz="914400" rtl="0" eaLnBrk="1" latinLnBrk="0" hangingPunct="1">
+        <a:lnSpc>
+          <a:spcPct val="90000"/>
+        </a:lnSpc>
+        <a:spcBef>
+          <a:spcPts val="500"/>
+        </a:spcBef>
+        <a:buFont typeface="Arial"/>
+        <a:buChar char="•"/>
+        <a:defRPr sz="1800" kern="1200">
+          <a:solidFill>
+            <a:schemeClr val="tx1"/>
+          </a:solidFill>
+          <a:latin typeface="+mn-lt"/>
+          <a:ea typeface="+mn-ea"/>
+          <a:cs typeface="+mn-cs"/>
+        </a:defRPr>
+      </a:lvl5pPr>
+      <a:lvl6pPr marL="2514600" indent="-228600" algn="l" defTabSz="914400" rtl="0" eaLnBrk="1" latinLnBrk="0" hangingPunct="1">
+        <a:lnSpc>
+          <a:spcPct val="90000"/>
+        </a:lnSpc>
+        <a:spcBef>
+          <a:spcPts val="500"/>
+        </a:spcBef>
+        <a:buFont typeface="Arial"/>
+        <a:buChar char="•"/>
+        <a:defRPr sz="1800" kern="1200">
+          <a:solidFill>
+            <a:schemeClr val="tx1"/>
+          </a:solidFill>
+          <a:latin typeface="+mn-lt"/>
+          <a:ea typeface="+mn-ea"/>
+          <a:cs typeface="+mn-cs"/>
+        </a:defRPr>
+      </a:lvl6pPr>
+      <a:lvl7pPr marL="2971800" indent="-228600" algn="l" defTabSz="914400" rtl="0" eaLnBrk="1" latinLnBrk="0" hangingPunct="1">
+        <a:lnSpc>
+          <a:spcPct val="90000"/>
+        </a:lnSpc>
+        <a:spcBef>
+          <a:spcPts val="500"/>
+        </a:spcBef>
+        <a:buFont typeface="Arial"/>
+        <a:buChar char="•"/>
+        <a:defRPr sz="1800" kern="1200">
+          <a:solidFill>
+            <a:schemeClr val="tx1"/>
+          </a:solidFill>
+          <a:latin typeface="+mn-lt"/>
+          <a:ea typeface="+mn-ea"/>
+          <a:cs typeface="+mn-cs"/>
+        </a:defRPr>
+      </a:lvl7pPr>
+      <a:lvl8pPr marL="3429000" indent="-228600" algn="l" defTabSz="914400" rtl="0" eaLnBrk="1" latinLnBrk="0" hangingPunct="1">
+        <a:lnSpc>
+          <a:spcPct val="90000"/>
+        </a:lnSpc>
+        <a:spcBef>
+          <a:spcPts val="500"/>
+        </a:spcBef>
+        <a:buFont typeface="Arial"/>
+        <a:buChar char="•"/>
+        <a:defRPr sz="1800" kern="1200">
+          <a:solidFill>
+            <a:schemeClr val="tx1"/>
+          </a:solidFill>
+          <a:latin typeface="+mn-lt"/>
+          <a:ea typeface="+mn-ea"/>
+          <a:cs typeface="+mn-cs"/>
+        </a:defRPr>
+      </a:lvl8pPr>
+      <a:lvl9pPr marL="3886200" indent="-228600" algn="l" defTabSz="914400" rtl="0" eaLnBrk="1" latinLnBrk="0" hangingPunct="1">
+        <a:lnSpc>
+          <a:spcPct val="90000"/>
+        </a:lnSpc>
+        <a:spcBef>
+          <a:spcPts val="500"/>
+        </a:spcBef>
+        <a:buFont typeface="Arial"/>
+        <a:buChar char="•"/>
+        <a:defRPr sz="1800" kern="1200">
+          <a:solidFill>
+            <a:schemeClr val="tx1"/>
+          </a:solidFill>
+          <a:latin typeface="+mn-lt"/>
+          <a:ea typeface="+mn-ea"/>
+          <a:cs typeface="+mn-cs"/>
+        </a:defRPr>
+      </a:lvl9pPr>
+    </p:bodyStyle>
+    <p:otherStyle>
+      <a:defPPr>
+        <a:defRPr lang="en-US"/>
+      </a:defPPr>
+      <a:lvl1pPr marL="0" algn="l" defTabSz="914400" rtl="0" eaLnBrk="1" latinLnBrk="0" hangingPunct="1">
+        <a:defRPr sz="1800" kern="1200">
+          <a:solidFill>
+            <a:schemeClr val="tx1"/>
+          </a:solidFill>
+          <a:latin typeface="+mn-lt"/>
+          <a:ea typeface="+mn-ea"/>
+          <a:cs typeface="+mn-cs"/>
+        </a:defRPr>
+      </a:lvl1pPr>
+      <a:lvl2pPr marL="457200" algn="l" defTabSz="914400" rtl="0" eaLnBrk="1" latinLnBrk="0" hangingPunct="1">
+        <a:defRPr sz="1800" kern="1200">
+          <a:solidFill>
+            <a:schemeClr val="tx1"/>
+          </a:solidFill>
+          <a:latin typeface="+mn-lt"/>
+          <a:ea typeface="+mn-ea"/>
+          <a:cs typeface="+mn-cs"/>
+        </a:defRPr>
+      </a:lvl2pPr>
+      <a:lvl3pPr marL="914400" algn="l" defTabSz="914400" rtl="0" eaLnBrk="1" latinLnBrk="0" hangingPunct="1">
+        <a:defRPr sz="1800" kern="1200">
+          <a:solidFill>
+            <a:schemeClr val="tx1"/>
+          </a:solidFill>
+          <a:latin typeface="+mn-lt"/>
+          <a:ea typeface="+mn-ea"/>
+          <a:cs typeface="+mn-cs"/>
+        </a:defRPr>
+      </a:lvl3pPr>
+      <a:lvl4pPr marL="1371600" algn="l" defTabSz="914400" rtl="0" eaLnBrk="1" latinLnBrk="0" hangingPunct="1">
+        <a:defRPr sz="1800" kern="1200">
+          <a:solidFill>
+            <a:schemeClr val="tx1"/>
+          </a:solidFill>
+          <a:latin typeface="+mn-lt"/>
+          <a:ea typeface="+mn-ea"/>
+          <a:cs typeface="+mn-cs"/>
+        </a:defRPr>
+      </a:lvl4pPr>
+      <a:lvl5pPr marL="1828800" algn="l" defTabSz="914400" rtl="0" eaLnBrk="1" latinLnBrk="0" hangingPunct="1">
+        <a:defRPr sz="1800" kern="1200">
+          <a:solidFill>
+            <a:schemeClr val="tx1"/>
+          </a:solidFill>
+          <a:latin typeface="+mn-lt"/>
+          <a:ea typeface="+mn-ea"/>
+          <a:cs typeface="+mn-cs"/>
+        </a:defRPr>
+      </a:lvl5pPr>
+      <a:lvl6pPr marL="2286000" algn="l" defTabSz="914400" rtl="0" eaLnBrk="1" latinLnBrk="0" hangingPunct="1">
+        <a:defRPr sz="1800" kern="1200">
+          <a:solidFill>
+            <a:schemeClr val="tx1"/>
+          </a:solidFill>
+          <a:latin typeface="+mn-lt"/>
+          <a:ea typeface="+mn-ea"/>
+          <a:cs typeface="+mn-cs"/>
+        </a:defRPr>
+      </a:lvl6pPr>
+      <a:lvl7pPr marL="2743200" algn="l" defTabSz="914400" rtl="0" eaLnBrk="1" latinLnBrk="0" hangingPunct="1">
+        <a:defRPr sz="1800" kern="1200">
+          <a:solidFill>
+            <a:schemeClr val="tx1"/>
+          </a:solidFill>
+          <a:latin typeface="+mn-lt"/>
+          <a:ea typeface="+mn-ea"/>
+          <a:cs typeface="+mn-cs"/>
+        </a:defRPr>
+      </a:lvl7pPr>
+      <a:lvl8pPr marL="3200400" algn="l" defTabSz="914400" rtl="0" eaLnBrk="1" latinLnBrk="0" hangingPunct="1">
+        <a:defRPr sz="1800" kern="1200">
+          <a:solidFill>
+            <a:schemeClr val="tx1"/>
+          </a:solidFill>
+          <a:latin typeface="+mn-lt"/>
+          <a:ea typeface="+mn-ea"/>
+          <a:cs typeface="+mn-cs"/>
+        </a:defRPr>
+      </a:lvl8pPr>
+      <a:lvl9pPr marL="3657600" algn="l" defTabSz="914400" rtl="0" eaLnBrk="1" latinLnBrk="0" hangingPunct="1">
+        <a:defRPr sz="1800" kern="1200">
+          <a:solidFill>
+            <a:schemeClr val="tx1"/>
+          </a:solidFill>
+          <a:latin typeface="+mn-lt"/>
+          <a:ea typeface="+mn-ea"/>
+          <a:cs typeface="+mn-cs"/>
+        </a:defRPr>
+      </a:lvl9pPr>
+    </p:otherStyle>
+  </p:txStyles>
+  <p:extLst>
+    <p:ext uri="{27BBF7A9-308A-43DC-89C8-2F10F3537804}">
+      <p15:sldGuideLst xmlns:p15="http://schemas.microsoft.com/office/powerpoint/2012/main">
+        <p15:guide id="2" pos="617">
+          <p15:clr>
+            <a:srgbClr val="F26B43"/>
+          </p15:clr>
+        </p15:guide>
+        <p15:guide id="3" pos="4482">
+          <p15:clr>
+            <a:srgbClr val="F26B43"/>
+          </p15:clr>
+        </p15:guide>
+        <p15:guide id="4" pos="7055">
+          <p15:clr>
+            <a:srgbClr val="F26B43"/>
+          </p15:clr>
+        </p15:guide>
+        <p15:guide id="5" pos="1907">
+          <p15:clr>
+            <a:srgbClr val="F26B43"/>
+          </p15:clr>
+        </p15:guide>
+        <p15:guide id="6" pos="3194">
+          <p15:clr>
+            <a:srgbClr val="F26B43"/>
+          </p15:clr>
+        </p15:guide>
+        <p15:guide id="7" pos="5769">
+          <p15:clr>
+            <a:srgbClr val="F26B43"/>
+          </p15:clr>
+        </p15:guide>
+      </p15:sldGuideLst>
+    </p:ext>
+  </p:extLst>
+</p:sldMaster>
+</file>
+
 <file path=ppt/slides/slide1.xml><?xml version="1.0" encoding="utf-8"?>
 <p:sld xmlns:a="http://schemas.openxmlformats.org/drawingml/2006/main" xmlns:r="http://schemas.openxmlformats.org/officeDocument/2006/relationships" xmlns:p="http://schemas.openxmlformats.org/presentationml/2006/main">
   <p:cSld>
@@ -13463,6 +17171,659 @@
         <p:cNvPr id="1" name="">
           <a:extLst>
             <a:ext uri="{FF2B5EF4-FFF2-40B4-BE49-F238E27FC236}">
+              <a16:creationId xmlns:a16="http://schemas.microsoft.com/office/drawing/2014/main" id="{8C021785-08CA-A2D3-281C-54F2D3F35EB2}"/>
+            </a:ext>
+          </a:extLst>
+        </p:cNvPr>
+        <p:cNvGrpSpPr/>
+        <p:nvPr/>
+      </p:nvGrpSpPr>
+      <p:grpSpPr>
+        <a:xfrm>
+          <a:off x="0" y="0"/>
+          <a:ext cx="0" cy="0"/>
+          <a:chOff x="0" y="0"/>
+          <a:chExt cx="0" cy="0"/>
+        </a:xfrm>
+      </p:grpSpPr>
+      <p:sp>
+        <p:nvSpPr>
+          <p:cNvPr id="6" name="Rectangle 5">
+            <a:extLst>
+              <a:ext uri="{FF2B5EF4-FFF2-40B4-BE49-F238E27FC236}">
+                <a16:creationId xmlns:a16="http://schemas.microsoft.com/office/drawing/2014/main" id="{4440D58F-D20F-BA05-1214-DC34121BC60F}"/>
+              </a:ext>
+            </a:extLst>
+          </p:cNvPr>
+          <p:cNvSpPr/>
+          <p:nvPr/>
+        </p:nvSpPr>
+        <p:spPr>
+          <a:xfrm>
+            <a:off x="0" y="1893277"/>
+            <a:ext cx="12192000" cy="822977"/>
+          </a:xfrm>
+          <a:prstGeom prst="rect">
+            <a:avLst/>
+          </a:prstGeom>
+          <a:solidFill>
+            <a:schemeClr val="bg1"/>
+          </a:solidFill>
+          <a:ln>
+            <a:noFill/>
+          </a:ln>
+        </p:spPr>
+        <p:style>
+          <a:lnRef idx="2">
+            <a:schemeClr val="accent1">
+              <a:shade val="50000"/>
+            </a:schemeClr>
+          </a:lnRef>
+          <a:fillRef idx="1">
+            <a:schemeClr val="accent1"/>
+          </a:fillRef>
+          <a:effectRef idx="0">
+            <a:schemeClr val="accent1"/>
+          </a:effectRef>
+          <a:fontRef idx="minor">
+            <a:schemeClr val="lt1"/>
+          </a:fontRef>
+        </p:style>
+        <p:txBody>
+          <a:bodyPr rtlCol="0" anchor="ctr"/>
+          <a:lstStyle/>
+          <a:p>
+            <a:pPr algn="ctr"/>
+            <a:endParaRPr lang="en-US" sz="2000" spc="300">
+              <a:latin typeface="linea-basic-10" charset="0"/>
+              <a:ea typeface="linea-basic-10" charset="0"/>
+              <a:cs typeface="linea-basic-10" charset="0"/>
+            </a:endParaRPr>
+          </a:p>
+        </p:txBody>
+      </p:sp>
+      <p:sp>
+        <p:nvSpPr>
+          <p:cNvPr id="7" name="Shape 3">
+            <a:extLst>
+              <a:ext uri="{FF2B5EF4-FFF2-40B4-BE49-F238E27FC236}">
+                <a16:creationId xmlns:a16="http://schemas.microsoft.com/office/drawing/2014/main" id="{2321C1D6-DB59-30A6-4C8D-8202DE4DD116}"/>
+              </a:ext>
+            </a:extLst>
+          </p:cNvPr>
+          <p:cNvSpPr/>
+          <p:nvPr/>
+        </p:nvSpPr>
+        <p:spPr>
+          <a:xfrm>
+            <a:off x="11569640" y="5778194"/>
+            <a:ext cx="317498" cy="761901"/>
+          </a:xfrm>
+          <a:prstGeom prst="rect">
+            <a:avLst/>
+          </a:prstGeom>
+          <a:noFill/>
+          <a:ln/>
+        </p:spPr>
+        <p:txBody>
+          <a:bodyPr/>
+          <a:lstStyle/>
+          <a:p>
+            <a:pPr defTabSz="457109">
+              <a:defRPr/>
+            </a:pPr>
+            <a:endParaRPr lang="en-CR" sz="900">
+              <a:solidFill>
+                <a:prstClr val="black"/>
+              </a:solidFill>
+              <a:latin typeface="Calibri" panose="020F0502020204030204"/>
+            </a:endParaRPr>
+          </a:p>
+        </p:txBody>
+      </p:sp>
+      <p:pic>
+        <p:nvPicPr>
+          <p:cNvPr id="8" name="Image 0" descr=" ">
+            <a:extLst>
+              <a:ext uri="{FF2B5EF4-FFF2-40B4-BE49-F238E27FC236}">
+                <a16:creationId xmlns:a16="http://schemas.microsoft.com/office/drawing/2014/main" id="{AE4862CA-9EA3-1211-224D-57A43824B23A}"/>
+              </a:ext>
+            </a:extLst>
+          </p:cNvPr>
+          <p:cNvPicPr/>
+          <p:nvPr/>
+        </p:nvPicPr>
+        <p:blipFill>
+          <a:blip r:embed="rId3">
+            <a:extLst>
+              <a:ext uri="{96DAC541-7B7A-43D3-8B79-37D633B846F1}">
+                <asvg:svgBlip xmlns:asvg="http://schemas.microsoft.com/office/drawing/2016/SVG/main" r:embed="rId4"/>
+              </a:ext>
+            </a:extLst>
+          </a:blip>
+          <a:stretch>
+            <a:fillRect/>
+          </a:stretch>
+        </p:blipFill>
+        <p:spPr>
+          <a:xfrm>
+            <a:off x="11568816" y="5778194"/>
+            <a:ext cx="319148" cy="317459"/>
+          </a:xfrm>
+          <a:prstGeom prst="rect">
+            <a:avLst/>
+          </a:prstGeom>
+        </p:spPr>
+      </p:pic>
+      <p:pic>
+        <p:nvPicPr>
+          <p:cNvPr id="9" name="Image 1" descr=" ">
+            <a:extLst>
+              <a:ext uri="{FF2B5EF4-FFF2-40B4-BE49-F238E27FC236}">
+                <a16:creationId xmlns:a16="http://schemas.microsoft.com/office/drawing/2014/main" id="{72C2BEA1-3FC0-E42F-FD41-F71614895325}"/>
+              </a:ext>
+            </a:extLst>
+          </p:cNvPr>
+          <p:cNvPicPr/>
+          <p:nvPr/>
+        </p:nvPicPr>
+        <p:blipFill>
+          <a:blip r:embed="rId5">
+            <a:extLst>
+              <a:ext uri="{96DAC541-7B7A-43D3-8B79-37D633B846F1}">
+                <asvg:svgBlip xmlns:asvg="http://schemas.microsoft.com/office/drawing/2016/SVG/main" r:embed="rId6"/>
+              </a:ext>
+            </a:extLst>
+          </a:blip>
+          <a:stretch>
+            <a:fillRect/>
+          </a:stretch>
+        </p:blipFill>
+        <p:spPr>
+          <a:xfrm>
+            <a:off x="11569640" y="6152795"/>
+            <a:ext cx="317498" cy="6349"/>
+          </a:xfrm>
+          <a:prstGeom prst="rect">
+            <a:avLst/>
+          </a:prstGeom>
+        </p:spPr>
+      </p:pic>
+      <p:pic>
+        <p:nvPicPr>
+          <p:cNvPr id="10" name="Image 2" descr=" ">
+            <a:extLst>
+              <a:ext uri="{FF2B5EF4-FFF2-40B4-BE49-F238E27FC236}">
+                <a16:creationId xmlns:a16="http://schemas.microsoft.com/office/drawing/2014/main" id="{56CBAED7-48EE-34EE-D098-9D03DD9B68B3}"/>
+              </a:ext>
+            </a:extLst>
+          </p:cNvPr>
+          <p:cNvPicPr/>
+          <p:nvPr/>
+        </p:nvPicPr>
+        <p:blipFill>
+          <a:blip r:embed="rId7">
+            <a:extLst>
+              <a:ext uri="{96DAC541-7B7A-43D3-8B79-37D633B846F1}">
+                <asvg:svgBlip xmlns:asvg="http://schemas.microsoft.com/office/drawing/2016/SVG/main" r:embed="rId8"/>
+              </a:ext>
+            </a:extLst>
+          </a:blip>
+          <a:stretch>
+            <a:fillRect/>
+          </a:stretch>
+        </p:blipFill>
+        <p:spPr>
+          <a:xfrm>
+            <a:off x="11569640" y="6222636"/>
+            <a:ext cx="317498" cy="317459"/>
+          </a:xfrm>
+          <a:prstGeom prst="rect">
+            <a:avLst/>
+          </a:prstGeom>
+        </p:spPr>
+      </p:pic>
+      <p:graphicFrame>
+        <p:nvGraphicFramePr>
+          <p:cNvPr id="2" name="Table 1">
+            <a:extLst>
+              <a:ext uri="{FF2B5EF4-FFF2-40B4-BE49-F238E27FC236}">
+                <a16:creationId xmlns:a16="http://schemas.microsoft.com/office/drawing/2014/main" id="{42AE7786-A5C3-8B0B-3BAA-2AF3F75FABD4}"/>
+              </a:ext>
+            </a:extLst>
+          </p:cNvPr>
+          <p:cNvGraphicFramePr>
+            <a:graphicFrameLocks noGrp="1"/>
+          </p:cNvGraphicFramePr>
+          <p:nvPr>
+            <p:extLst>
+              <p:ext uri="{D42A27DB-BD31-4B8C-83A1-F6EECF244321}">
+                <p14:modId xmlns:p14="http://schemas.microsoft.com/office/powerpoint/2010/main" val="4159772814"/>
+              </p:ext>
+            </p:extLst>
+          </p:nvPr>
+        </p:nvGraphicFramePr>
+        <p:xfrm>
+          <a:off x="800101" y="2208322"/>
+          <a:ext cx="10248899" cy="3425543"/>
+        </p:xfrm>
+        <a:graphic>
+          <a:graphicData uri="http://schemas.openxmlformats.org/drawingml/2006/table">
+            <a:tbl>
+              <a:tblPr firstRow="1" bandRow="1">
+                <a:tableStyleId>{0E3FDE45-AF77-4B5C-9715-49D594BDF05E}</a:tableStyleId>
+              </a:tblPr>
+              <a:tblGrid>
+                <a:gridCol w="1234505">
+                  <a:extLst>
+                    <a:ext uri="{9D8B030D-6E8A-4147-A177-3AD203B41FA5}">
+                      <a16:colId xmlns:a16="http://schemas.microsoft.com/office/drawing/2014/main" val="3745820439"/>
+                    </a:ext>
+                  </a:extLst>
+                </a:gridCol>
+                <a:gridCol w="3004798">
+                  <a:extLst>
+                    <a:ext uri="{9D8B030D-6E8A-4147-A177-3AD203B41FA5}">
+                      <a16:colId xmlns:a16="http://schemas.microsoft.com/office/drawing/2014/main" val="3950257759"/>
+                    </a:ext>
+                  </a:extLst>
+                </a:gridCol>
+                <a:gridCol w="3004798">
+                  <a:extLst>
+                    <a:ext uri="{9D8B030D-6E8A-4147-A177-3AD203B41FA5}">
+                      <a16:colId xmlns:a16="http://schemas.microsoft.com/office/drawing/2014/main" val="2431130036"/>
+                    </a:ext>
+                  </a:extLst>
+                </a:gridCol>
+                <a:gridCol w="3004798">
+                  <a:extLst>
+                    <a:ext uri="{9D8B030D-6E8A-4147-A177-3AD203B41FA5}">
+                      <a16:colId xmlns:a16="http://schemas.microsoft.com/office/drawing/2014/main" val="2222290433"/>
+                    </a:ext>
+                  </a:extLst>
+                </a:gridCol>
+              </a:tblGrid>
+              <a:tr h="673705">
+                <a:tc>
+                  <a:txBody>
+                    <a:bodyPr/>
+                    <a:lstStyle/>
+                    <a:p>
+                      <a:endParaRPr lang="en-US"/>
+                    </a:p>
+                  </a:txBody>
+                  <a:tcPr/>
+                </a:tc>
+                <a:tc>
+                  <a:txBody>
+                    <a:bodyPr/>
+                    <a:lstStyle/>
+                    <a:p>
+                      <a:pPr algn="ctr"/>
+                      <a:r>
+                        <a:rPr lang="en-US" dirty="0"/>
+                        <a:t>EM OR</a:t>
+                      </a:r>
+                    </a:p>
+                  </a:txBody>
+                  <a:tcPr anchor="ctr"/>
+                </a:tc>
+                <a:tc>
+                  <a:txBody>
+                    <a:bodyPr/>
+                    <a:lstStyle/>
+                    <a:p>
+                      <a:pPr algn="ctr"/>
+                      <a:r>
+                        <a:rPr lang="en-US"/>
+                        <a:t>EM CTR</a:t>
+                      </a:r>
+                    </a:p>
+                  </a:txBody>
+                  <a:tcPr anchor="ctr"/>
+                </a:tc>
+                <a:tc>
+                  <a:txBody>
+                    <a:bodyPr/>
+                    <a:lstStyle/>
+                    <a:p>
+                      <a:pPr algn="ctr"/>
+                      <a:r>
+                        <a:rPr lang="en-US"/>
+                        <a:t>SMS CTR</a:t>
+                      </a:r>
+                    </a:p>
+                  </a:txBody>
+                  <a:tcPr anchor="ctr"/>
+                </a:tc>
+                <a:extLst>
+                  <a:ext uri="{0D108BD9-81ED-4DB2-BD59-A6C34878D82A}">
+                    <a16:rowId xmlns:a16="http://schemas.microsoft.com/office/drawing/2014/main" val="1077992044"/>
+                  </a:ext>
+                </a:extLst>
+              </a:tr>
+              <a:tr h="1375919">
+                <a:tc>
+                  <a:txBody>
+                    <a:bodyPr/>
+                    <a:lstStyle/>
+                    <a:p>
+                      <a:r>
+                        <a:rPr lang="en-US" dirty="0"/>
+                        <a:t>Insert</a:t>
+                      </a:r>
+                    </a:p>
+                  </a:txBody>
+                  <a:tcPr anchor="ctr"/>
+                </a:tc>
+                <a:tc>
+                  <a:txBody>
+                    <a:bodyPr/>
+                    <a:lstStyle/>
+                    <a:p>
+                      <a:pPr algn="ctr"/>
+                      <a:endParaRPr lang="en-US" sz="1600" kern="1200" dirty="0">
+                        <a:solidFill>
+                          <a:srgbClr val="92D050"/>
+                        </a:solidFill>
+                        <a:latin typeface="+mn-lt"/>
+                        <a:ea typeface="+mn-ea"/>
+                        <a:cs typeface="+mn-cs"/>
+                      </a:endParaRPr>
+                    </a:p>
+                  </a:txBody>
+                  <a:tcPr anchor="ctr"/>
+                </a:tc>
+                <a:tc>
+                  <a:txBody>
+                    <a:bodyPr/>
+                    <a:lstStyle/>
+                    <a:p>
+                      <a:pPr algn="ctr"/>
+                      <a:endParaRPr lang="en-US" sz="1600" kern="1200">
+                        <a:solidFill>
+                          <a:srgbClr val="F8696B"/>
+                        </a:solidFill>
+                        <a:latin typeface="+mn-lt"/>
+                        <a:ea typeface="+mn-ea"/>
+                        <a:cs typeface="+mn-cs"/>
+                      </a:endParaRPr>
+                    </a:p>
+                  </a:txBody>
+                  <a:tcPr anchor="ctr"/>
+                </a:tc>
+                <a:tc>
+                  <a:txBody>
+                    <a:bodyPr/>
+                    <a:lstStyle/>
+                    <a:p>
+                      <a:pPr algn="ctr"/>
+                      <a:endParaRPr lang="en-US" sz="1600" kern="1200">
+                        <a:solidFill>
+                          <a:srgbClr val="92D050"/>
+                        </a:solidFill>
+                        <a:latin typeface="+mn-lt"/>
+                        <a:ea typeface="+mn-ea"/>
+                        <a:cs typeface="+mn-cs"/>
+                      </a:endParaRPr>
+                    </a:p>
+                  </a:txBody>
+                  <a:tcPr anchor="ctr"/>
+                </a:tc>
+                <a:extLst>
+                  <a:ext uri="{0D108BD9-81ED-4DB2-BD59-A6C34878D82A}">
+                    <a16:rowId xmlns:a16="http://schemas.microsoft.com/office/drawing/2014/main" val="3480663744"/>
+                  </a:ext>
+                </a:extLst>
+              </a:tr>
+              <a:tr h="1375919">
+                <a:tc>
+                  <a:txBody>
+                    <a:bodyPr/>
+                    <a:lstStyle/>
+                    <a:p>
+                      <a:r>
+                        <a:rPr lang="en-US" dirty="0"/>
+                        <a:t>Insert</a:t>
+                      </a:r>
+                    </a:p>
+                  </a:txBody>
+                  <a:tcPr anchor="ctr"/>
+                </a:tc>
+                <a:tc>
+                  <a:txBody>
+                    <a:bodyPr/>
+                    <a:lstStyle/>
+                    <a:p>
+                      <a:pPr algn="ctr"/>
+                      <a:endParaRPr lang="en-US" sz="1600" kern="1200">
+                        <a:solidFill>
+                          <a:srgbClr val="92D050"/>
+                        </a:solidFill>
+                        <a:latin typeface="+mn-lt"/>
+                        <a:ea typeface="+mn-ea"/>
+                        <a:cs typeface="+mn-cs"/>
+                      </a:endParaRPr>
+                    </a:p>
+                  </a:txBody>
+                  <a:tcPr anchor="ctr"/>
+                </a:tc>
+                <a:tc>
+                  <a:txBody>
+                    <a:bodyPr/>
+                    <a:lstStyle/>
+                    <a:p>
+                      <a:pPr algn="ctr"/>
+                      <a:endParaRPr lang="en-US" sz="1600" kern="1200" dirty="0">
+                        <a:solidFill>
+                          <a:srgbClr val="F8696B"/>
+                        </a:solidFill>
+                        <a:latin typeface="+mn-lt"/>
+                        <a:ea typeface="+mn-ea"/>
+                        <a:cs typeface="+mn-cs"/>
+                      </a:endParaRPr>
+                    </a:p>
+                  </a:txBody>
+                  <a:tcPr anchor="ctr"/>
+                </a:tc>
+                <a:tc>
+                  <a:txBody>
+                    <a:bodyPr/>
+                    <a:lstStyle/>
+                    <a:p>
+                      <a:pPr algn="ctr"/>
+                      <a:endParaRPr lang="en-US" sz="1600" kern="1200" dirty="0">
+                        <a:solidFill>
+                          <a:srgbClr val="F8696B"/>
+                        </a:solidFill>
+                        <a:latin typeface="+mn-lt"/>
+                        <a:ea typeface="+mn-ea"/>
+                        <a:cs typeface="+mn-cs"/>
+                      </a:endParaRPr>
+                    </a:p>
+                  </a:txBody>
+                  <a:tcPr anchor="ctr"/>
+                </a:tc>
+                <a:extLst>
+                  <a:ext uri="{0D108BD9-81ED-4DB2-BD59-A6C34878D82A}">
+                    <a16:rowId xmlns:a16="http://schemas.microsoft.com/office/drawing/2014/main" val="2852524651"/>
+                  </a:ext>
+                </a:extLst>
+              </a:tr>
+            </a:tbl>
+          </a:graphicData>
+        </a:graphic>
+      </p:graphicFrame>
+      <p:sp>
+        <p:nvSpPr>
+          <p:cNvPr id="12" name="TextBox 11">
+            <a:extLst>
+              <a:ext uri="{FF2B5EF4-FFF2-40B4-BE49-F238E27FC236}">
+                <a16:creationId xmlns:a16="http://schemas.microsoft.com/office/drawing/2014/main" id="{0FF36220-5E7F-193E-0C05-4607FE15B0CE}"/>
+              </a:ext>
+            </a:extLst>
+          </p:cNvPr>
+          <p:cNvSpPr txBox="1"/>
+          <p:nvPr/>
+        </p:nvSpPr>
+        <p:spPr>
+          <a:xfrm>
+            <a:off x="800101" y="5819556"/>
+            <a:ext cx="9614434" cy="261610"/>
+          </a:xfrm>
+          <a:prstGeom prst="rect">
+            <a:avLst/>
+          </a:prstGeom>
+          <a:noFill/>
+        </p:spPr>
+        <p:txBody>
+          <a:bodyPr wrap="square" rtlCol="0">
+            <a:spAutoFit/>
+          </a:bodyPr>
+          <a:lstStyle/>
+          <a:p>
+            <a:r>
+              <a:rPr lang="en-US" sz="1100" i="1" dirty="0">
+                <a:solidFill>
+                  <a:schemeClr val="accent6">
+                    <a:lumMod val="60000"/>
+                    <a:lumOff val="40000"/>
+                  </a:schemeClr>
+                </a:solidFill>
+              </a:rPr>
+              <a:t>Considerations</a:t>
+            </a:r>
+            <a:endParaRPr lang="en-US" sz="1100" dirty="0">
+              <a:solidFill>
+                <a:schemeClr val="accent6">
+                  <a:lumMod val="60000"/>
+                  <a:lumOff val="40000"/>
+                </a:schemeClr>
+              </a:solidFill>
+            </a:endParaRPr>
+          </a:p>
+        </p:txBody>
+      </p:sp>
+      <p:sp>
+        <p:nvSpPr>
+          <p:cNvPr id="4" name="Title 1">
+            <a:extLst>
+              <a:ext uri="{FF2B5EF4-FFF2-40B4-BE49-F238E27FC236}">
+                <a16:creationId xmlns:a16="http://schemas.microsoft.com/office/drawing/2014/main" id="{3A139A75-8DCF-CE06-5543-958703EAA551}"/>
+              </a:ext>
+            </a:extLst>
+          </p:cNvPr>
+          <p:cNvSpPr txBox="1">
+            <a:spLocks/>
+          </p:cNvSpPr>
+          <p:nvPr/>
+        </p:nvSpPr>
+        <p:spPr>
+          <a:xfrm>
+            <a:off x="800101" y="727974"/>
+            <a:ext cx="3482279" cy="496161"/>
+          </a:xfrm>
+          <a:prstGeom prst="rect">
+            <a:avLst/>
+          </a:prstGeom>
+        </p:spPr>
+        <p:txBody>
+          <a:bodyPr wrap="square" lIns="0" anchor="t" anchorCtr="0">
+            <a:spAutoFit/>
+          </a:bodyPr>
+          <a:lstStyle>
+            <a:lvl1pPr algn="l" defTabSz="914400" rtl="0" eaLnBrk="1" latinLnBrk="0" hangingPunct="1">
+              <a:lnSpc>
+                <a:spcPct val="80000"/>
+              </a:lnSpc>
+              <a:spcBef>
+                <a:spcPct val="0"/>
+              </a:spcBef>
+              <a:buNone/>
+              <a:defRPr sz="2400" b="1" i="0" kern="1200">
+                <a:solidFill>
+                  <a:schemeClr val="accent1"/>
+                </a:solidFill>
+                <a:latin typeface="TeleNeo Office ExtraBold" panose="020B0504040202090203" pitchFamily="34" charset="77"/>
+                <a:ea typeface="+mj-ea"/>
+                <a:cs typeface="+mj-cs"/>
+              </a:defRPr>
+            </a:lvl1pPr>
+          </a:lstStyle>
+          <a:p>
+            <a:r>
+              <a:rPr lang="en-US" sz="3200" dirty="0">
+                <a:solidFill>
+                  <a:schemeClr val="tx2"/>
+                </a:solidFill>
+              </a:rPr>
+              <a:t>HEADLINE</a:t>
+            </a:r>
+            <a:endParaRPr lang="en-US" sz="3200" dirty="0"/>
+          </a:p>
+        </p:txBody>
+      </p:sp>
+      <p:sp>
+        <p:nvSpPr>
+          <p:cNvPr id="5" name="TextBox 4">
+            <a:extLst>
+              <a:ext uri="{FF2B5EF4-FFF2-40B4-BE49-F238E27FC236}">
+                <a16:creationId xmlns:a16="http://schemas.microsoft.com/office/drawing/2014/main" id="{7A944355-93D1-2756-3A20-B489E9157328}"/>
+              </a:ext>
+            </a:extLst>
+          </p:cNvPr>
+          <p:cNvSpPr txBox="1"/>
+          <p:nvPr/>
+        </p:nvSpPr>
+        <p:spPr>
+          <a:xfrm>
+            <a:off x="12290600" y="0"/>
+            <a:ext cx="1691847" cy="253916"/>
+          </a:xfrm>
+          <a:prstGeom prst="rect">
+            <a:avLst/>
+          </a:prstGeom>
+          <a:noFill/>
+        </p:spPr>
+        <p:txBody>
+          <a:bodyPr wrap="square" rtlCol="0">
+            <a:spAutoFit/>
+          </a:bodyPr>
+          <a:lstStyle/>
+          <a:p>
+            <a:r>
+              <a:rPr lang="en-US" sz="1050" dirty="0"/>
+              <a:t>title name: </a:t>
+            </a:r>
+            <a:r>
+              <a:rPr lang="en-US" sz="1050" dirty="0" err="1"/>
+              <a:t>highlevelslide</a:t>
+            </a:r>
+            <a:endParaRPr lang="en-US" sz="1050" dirty="0"/>
+          </a:p>
+        </p:txBody>
+      </p:sp>
+    </p:spTree>
+    <p:extLst>
+      <p:ext uri="{BB962C8B-B14F-4D97-AF65-F5344CB8AC3E}">
+        <p14:creationId xmlns:p14="http://schemas.microsoft.com/office/powerpoint/2010/main" val="3180984745"/>
+      </p:ext>
+    </p:extLst>
+  </p:cSld>
+  <p:clrMapOvr>
+    <a:masterClrMapping/>
+  </p:clrMapOvr>
+</p:sld>
+</file>
+
+<file path=ppt/slides/slide4.xml><?xml version="1.0" encoding="utf-8"?>
+<p:sld xmlns:a="http://schemas.openxmlformats.org/drawingml/2006/main" xmlns:r="http://schemas.openxmlformats.org/officeDocument/2006/relationships" xmlns:p="http://schemas.openxmlformats.org/presentationml/2006/main">
+  <p:cSld>
+    <p:spTree>
+      <p:nvGrpSpPr>
+        <p:cNvPr id="1" name="">
+          <a:extLst>
+            <a:ext uri="{FF2B5EF4-FFF2-40B4-BE49-F238E27FC236}">
               <a16:creationId xmlns:a16="http://schemas.microsoft.com/office/drawing/2014/main" id="{5A7F4B38-CC5D-EA2B-C9CA-F935EAA44C71}"/>
             </a:ext>
           </a:extLst>
@@ -13552,14 +17913,14 @@
           <p:nvPr>
             <p:extLst>
               <p:ext uri="{D42A27DB-BD31-4B8C-83A1-F6EECF244321}">
-                <p14:modId xmlns:p14="http://schemas.microsoft.com/office/powerpoint/2010/main" val="972250586"/>
+                <p14:modId xmlns:p14="http://schemas.microsoft.com/office/powerpoint/2010/main" val="100755570"/>
               </p:ext>
             </p:extLst>
           </p:nvPr>
         </p:nvGraphicFramePr>
         <p:xfrm>
-          <a:off x="3174101" y="457202"/>
-          <a:ext cx="7505702" cy="6232607"/>
+          <a:off x="3880884" y="457202"/>
+          <a:ext cx="7759422" cy="6139772"/>
         </p:xfrm>
         <a:graphic>
           <a:graphicData uri="http://schemas.openxmlformats.org/drawingml/2006/table">
@@ -13568,21 +17929,21 @@
                 <a:tableStyleId>{72833802-FEF1-4C79-8D5D-14CF1EAF98D9}</a:tableStyleId>
               </a:tblPr>
               <a:tblGrid>
-                <a:gridCol w="300454">
+                <a:gridCol w="554174">
                   <a:extLst>
                     <a:ext uri="{9D8B030D-6E8A-4147-A177-3AD203B41FA5}">
                       <a16:colId xmlns:a16="http://schemas.microsoft.com/office/drawing/2014/main" val="4043450700"/>
                     </a:ext>
                   </a:extLst>
                 </a:gridCol>
-                <a:gridCol w="320480">
+                <a:gridCol w="742998">
                   <a:extLst>
                     <a:ext uri="{9D8B030D-6E8A-4147-A177-3AD203B41FA5}">
                       <a16:colId xmlns:a16="http://schemas.microsoft.com/office/drawing/2014/main" val="3892022578"/>
                     </a:ext>
                   </a:extLst>
                 </a:gridCol>
-                <a:gridCol w="1449199">
+                <a:gridCol w="1026681">
                   <a:extLst>
                     <a:ext uri="{9D8B030D-6E8A-4147-A177-3AD203B41FA5}">
                       <a16:colId xmlns:a16="http://schemas.microsoft.com/office/drawing/2014/main" val="1855649917"/>
@@ -13603,21 +17964,21 @@
                     </a:ext>
                   </a:extLst>
                 </a:gridCol>
-                <a:gridCol w="1449199">
+                <a:gridCol w="799349">
                   <a:extLst>
                     <a:ext uri="{9D8B030D-6E8A-4147-A177-3AD203B41FA5}">
                       <a16:colId xmlns:a16="http://schemas.microsoft.com/office/drawing/2014/main" val="3706998436"/>
                     </a:ext>
                   </a:extLst>
                 </a:gridCol>
-                <a:gridCol w="265858">
+                <a:gridCol w="723014">
                   <a:extLst>
                     <a:ext uri="{9D8B030D-6E8A-4147-A177-3AD203B41FA5}">
                       <a16:colId xmlns:a16="http://schemas.microsoft.com/office/drawing/2014/main" val="2220294652"/>
                     </a:ext>
                   </a:extLst>
                 </a:gridCol>
-                <a:gridCol w="274038">
+                <a:gridCol w="466732">
                   <a:extLst>
                     <a:ext uri="{9D8B030D-6E8A-4147-A177-3AD203B41FA5}">
                       <a16:colId xmlns:a16="http://schemas.microsoft.com/office/drawing/2014/main" val="273073370"/>
@@ -15191,7 +19552,7 @@
 </p:sld>
 </file>
 
-<file path=ppt/slides/slide4.xml><?xml version="1.0" encoding="utf-8"?>
+<file path=ppt/slides/slide5.xml><?xml version="1.0" encoding="utf-8"?>
 <p:sld xmlns:a="http://schemas.openxmlformats.org/drawingml/2006/main" xmlns:r="http://schemas.openxmlformats.org/officeDocument/2006/relationships" xmlns:p="http://schemas.openxmlformats.org/presentationml/2006/main">
   <p:cSld>
     <p:spTree>
@@ -19912,6 +24273,529 @@
     <p:extLst>
       <p:ext uri="{BB962C8B-B14F-4D97-AF65-F5344CB8AC3E}">
         <p14:creationId xmlns:p14="http://schemas.microsoft.com/office/powerpoint/2010/main" val="717545924"/>
+      </p:ext>
+    </p:extLst>
+  </p:cSld>
+  <p:clrMapOvr>
+    <a:masterClrMapping/>
+  </p:clrMapOvr>
+</p:sld>
+</file>
+
+<file path=ppt/slides/slide6.xml><?xml version="1.0" encoding="utf-8"?>
+<p:sld xmlns:a="http://schemas.openxmlformats.org/drawingml/2006/main" xmlns:r="http://schemas.openxmlformats.org/officeDocument/2006/relationships" xmlns:p="http://schemas.openxmlformats.org/presentationml/2006/main">
+  <p:cSld>
+    <p:spTree>
+      <p:nvGrpSpPr>
+        <p:cNvPr id="1" name=""/>
+        <p:cNvGrpSpPr/>
+        <p:nvPr/>
+      </p:nvGrpSpPr>
+      <p:grpSpPr>
+        <a:xfrm>
+          <a:off x="0" y="0"/>
+          <a:ext cx="0" cy="0"/>
+          <a:chOff x="0" y="0"/>
+          <a:chExt cx="0" cy="0"/>
+        </a:xfrm>
+      </p:grpSpPr>
+      <p:pic>
+        <p:nvPicPr>
+          <p:cNvPr id="2" name="Image 0" descr=" "/>
+          <p:cNvPicPr>
+            <a:picLocks noGrp="1" noRot="1" noChangeAspect="1" noMove="1" noResize="1" noEditPoints="1" noAdjustHandles="1" noChangeArrowheads="1" noChangeShapeType="1" noCrop="1"/>
+          </p:cNvPicPr>
+          <p:nvPr/>
+        </p:nvPicPr>
+        <p:blipFill>
+          <a:blip r:embed="rId3"/>
+          <a:stretch>
+            <a:fillRect/>
+          </a:stretch>
+        </p:blipFill>
+        <p:spPr>
+          <a:xfrm>
+            <a:off x="0" y="447"/>
+            <a:ext cx="12191937" cy="6857107"/>
+          </a:xfrm>
+          <a:prstGeom prst="rect">
+            <a:avLst/>
+          </a:prstGeom>
+        </p:spPr>
+      </p:pic>
+      <p:pic>
+        <p:nvPicPr>
+          <p:cNvPr id="3" name="Image 1" descr=" "/>
+          <p:cNvPicPr>
+            <a:picLocks noGrp="1" noRot="1" noChangeAspect="1" noMove="1" noResize="1" noEditPoints="1" noAdjustHandles="1" noChangeArrowheads="1" noChangeShapeType="1" noCrop="1"/>
+          </p:cNvPicPr>
+          <p:nvPr/>
+        </p:nvPicPr>
+        <p:blipFill>
+          <a:blip r:embed="rId4">
+            <a:extLst>
+              <a:ext uri="{96DAC541-7B7A-43D3-8B79-37D633B846F1}">
+                <asvg:svgBlip xmlns:asvg="http://schemas.microsoft.com/office/drawing/2016/SVG/main" r:embed="rId5"/>
+              </a:ext>
+            </a:extLst>
+          </a:blip>
+          <a:stretch>
+            <a:fillRect/>
+          </a:stretch>
+        </p:blipFill>
+        <p:spPr>
+          <a:xfrm>
+            <a:off x="11553765" y="447"/>
+            <a:ext cx="634997" cy="634917"/>
+          </a:xfrm>
+          <a:prstGeom prst="rect">
+            <a:avLst/>
+          </a:prstGeom>
+        </p:spPr>
+      </p:pic>
+      <p:sp>
+        <p:nvSpPr>
+          <p:cNvPr id="14" name="Text 4">
+            <a:extLst>
+              <a:ext uri="{FF2B5EF4-FFF2-40B4-BE49-F238E27FC236}">
+                <a16:creationId xmlns:a16="http://schemas.microsoft.com/office/drawing/2014/main" id="{A1BB8E7E-9E61-661D-E26B-27BB5B28121D}"/>
+              </a:ext>
+            </a:extLst>
+          </p:cNvPr>
+          <p:cNvSpPr>
+            <a:spLocks noGrp="1" noRot="1" noMove="1" noResize="1" noEditPoints="1" noAdjustHandles="1" noChangeArrowheads="1" noChangeShapeType="1"/>
+          </p:cNvSpPr>
+          <p:nvPr/>
+        </p:nvSpPr>
+        <p:spPr>
+          <a:xfrm>
+            <a:off x="804330" y="2768686"/>
+            <a:ext cx="10583278" cy="1356607"/>
+          </a:xfrm>
+          <a:prstGeom prst="rect">
+            <a:avLst/>
+          </a:prstGeom>
+          <a:noFill/>
+          <a:ln/>
+        </p:spPr>
+        <p:txBody>
+          <a:bodyPr wrap="square" lIns="0" tIns="0" rIns="0" bIns="0" rtlCol="0" anchor="b"/>
+          <a:lstStyle/>
+          <a:p>
+            <a:pPr marL="0" marR="0" lvl="0" indent="0" algn="ctr" defTabSz="914400" rtl="0" eaLnBrk="1" fontAlgn="auto" latinLnBrk="0" hangingPunct="1">
+              <a:lnSpc>
+                <a:spcPts val="13997"/>
+              </a:lnSpc>
+              <a:spcBef>
+                <a:spcPts val="0"/>
+              </a:spcBef>
+              <a:spcAft>
+                <a:spcPts val="0"/>
+              </a:spcAft>
+              <a:buClrTx/>
+              <a:buSzTx/>
+              <a:buFontTx/>
+              <a:buNone/>
+              <a:tabLst/>
+              <a:defRPr/>
+            </a:pPr>
+            <a:r>
+              <a:rPr kumimoji="0" lang="en-US" sz="9998" b="1" i="0" u="none" strike="noStrike" kern="1200" cap="none" spc="0" normalizeH="0" baseline="0" noProof="0">
+                <a:ln>
+                  <a:noFill/>
+                </a:ln>
+                <a:solidFill>
+                  <a:srgbClr val="FFFFFF">
+                    <a:alpha val="100000"/>
+                  </a:srgbClr>
+                </a:solidFill>
+                <a:effectLst/>
+                <a:uLnTx/>
+                <a:uFillTx/>
+                <a:latin typeface="TeleNeo Var ExtraBold Normal" panose="020B0004040202090203" pitchFamily="34" charset="0"/>
+                <a:ea typeface="TeleNeo Var ExtraBold Italic" pitchFamily="34" charset="-122"/>
+                <a:cs typeface="TeleNeo Var ExtraBold Italic" pitchFamily="34" charset="-120"/>
+              </a:rPr>
+              <a:t>Thank</a:t>
+            </a:r>
+            <a:r>
+              <a:rPr kumimoji="0" lang="en-US" sz="9998" b="1" i="1" u="none" strike="noStrike" kern="1200" cap="none" spc="0" normalizeH="0" baseline="0" noProof="0">
+                <a:ln>
+                  <a:noFill/>
+                </a:ln>
+                <a:solidFill>
+                  <a:srgbClr val="FFFFFF">
+                    <a:alpha val="100000"/>
+                  </a:srgbClr>
+                </a:solidFill>
+                <a:effectLst/>
+                <a:uLnTx/>
+                <a:uFillTx/>
+                <a:latin typeface="TeleNeo Var ExtraBold Normal" panose="020B0004040202090203" pitchFamily="34" charset="0"/>
+                <a:ea typeface="TeleNeo Var ExtraBold Italic" pitchFamily="34" charset="-122"/>
+                <a:cs typeface="TeleNeo Var ExtraBold Italic" pitchFamily="34" charset="-120"/>
+              </a:rPr>
+              <a:t> </a:t>
+            </a:r>
+            <a:r>
+              <a:rPr kumimoji="0" lang="en-US" sz="9998" b="1" i="0" u="none" strike="noStrike" kern="1200" cap="none" spc="0" normalizeH="0" baseline="0" noProof="0">
+                <a:ln>
+                  <a:noFill/>
+                </a:ln>
+                <a:solidFill>
+                  <a:srgbClr val="FFFFFF">
+                    <a:alpha val="100000"/>
+                  </a:srgbClr>
+                </a:solidFill>
+                <a:effectLst/>
+                <a:uLnTx/>
+                <a:uFillTx/>
+                <a:latin typeface="TeleNeo Var ExtraBold Normal" panose="020B0004040202090203" pitchFamily="34" charset="0"/>
+                <a:ea typeface="TeleNeo Var ExtraBold Italic" pitchFamily="34" charset="-122"/>
+                <a:cs typeface="TeleNeo Var ExtraBold Italic" pitchFamily="34" charset="-120"/>
+              </a:rPr>
+              <a:t>You</a:t>
+            </a:r>
+            <a:endParaRPr kumimoji="0" lang="en-US" sz="9998" b="1" i="0" u="none" strike="noStrike" kern="1200" cap="none" spc="0" normalizeH="0" baseline="0" noProof="0">
+              <a:ln>
+                <a:noFill/>
+              </a:ln>
+              <a:solidFill>
+                <a:srgbClr val="000000"/>
+              </a:solidFill>
+              <a:effectLst/>
+              <a:uLnTx/>
+              <a:uFillTx/>
+              <a:latin typeface="TeleNeo Var ExtraBold Normal" panose="020B0004040202090203" pitchFamily="34" charset="0"/>
+              <a:ea typeface="+mn-ea"/>
+              <a:cs typeface="+mn-cs"/>
+            </a:endParaRPr>
+          </a:p>
+        </p:txBody>
+      </p:sp>
+      <p:pic>
+        <p:nvPicPr>
+          <p:cNvPr id="15" name="Picture 14" descr="A white circle in the sky&#10;&#10;Description automatically generated">
+            <a:extLst>
+              <a:ext uri="{FF2B5EF4-FFF2-40B4-BE49-F238E27FC236}">
+                <a16:creationId xmlns:a16="http://schemas.microsoft.com/office/drawing/2014/main" id="{38A7CDAC-B066-5C75-B93C-B6657A5FCD9D}"/>
+              </a:ext>
+            </a:extLst>
+          </p:cNvPr>
+          <p:cNvPicPr>
+            <a:picLocks noGrp="1" noRot="1" noMove="1" noResize="1" noEditPoints="1" noAdjustHandles="1" noChangeArrowheads="1" noChangeShapeType="1" noCrop="1"/>
+          </p:cNvPicPr>
+          <p:nvPr/>
+        </p:nvPicPr>
+        <p:blipFill>
+          <a:blip r:embed="rId6"/>
+          <a:stretch>
+            <a:fillRect/>
+          </a:stretch>
+        </p:blipFill>
+        <p:spPr>
+          <a:xfrm>
+            <a:off x="4899150" y="5879781"/>
+            <a:ext cx="2393638" cy="342855"/>
+          </a:xfrm>
+          <a:prstGeom prst="rect">
+            <a:avLst/>
+          </a:prstGeom>
+        </p:spPr>
+      </p:pic>
+      <p:sp>
+        <p:nvSpPr>
+          <p:cNvPr id="4" name="TextBox 3">
+            <a:extLst>
+              <a:ext uri="{FF2B5EF4-FFF2-40B4-BE49-F238E27FC236}">
+                <a16:creationId xmlns:a16="http://schemas.microsoft.com/office/drawing/2014/main" id="{666E304E-6A8F-042D-71F1-9C3B1DBEA51C}"/>
+              </a:ext>
+            </a:extLst>
+          </p:cNvPr>
+          <p:cNvSpPr txBox="1"/>
+          <p:nvPr/>
+        </p:nvSpPr>
+        <p:spPr>
+          <a:xfrm>
+            <a:off x="12408198" y="85059"/>
+            <a:ext cx="1679942" cy="253916"/>
+          </a:xfrm>
+          <a:prstGeom prst="rect">
+            <a:avLst/>
+          </a:prstGeom>
+          <a:noFill/>
+        </p:spPr>
+        <p:txBody>
+          <a:bodyPr wrap="square" rtlCol="0">
+            <a:spAutoFit/>
+          </a:bodyPr>
+          <a:lstStyle/>
+          <a:p>
+            <a:r>
+              <a:rPr lang="en-US" sz="1050" dirty="0"/>
+              <a:t>title name: </a:t>
+            </a:r>
+            <a:r>
+              <a:rPr lang="en-US" sz="1050" dirty="0" err="1"/>
+              <a:t>thankyouslide</a:t>
+            </a:r>
+            <a:endParaRPr lang="en-US" sz="1050" dirty="0"/>
+          </a:p>
+        </p:txBody>
+      </p:sp>
+    </p:spTree>
+  </p:cSld>
+  <p:clrMapOvr>
+    <a:masterClrMapping/>
+  </p:clrMapOvr>
+</p:sld>
+</file>
+
+<file path=ppt/slides/slide7.xml><?xml version="1.0" encoding="utf-8"?>
+<p:sld xmlns:a="http://schemas.openxmlformats.org/drawingml/2006/main" xmlns:r="http://schemas.openxmlformats.org/officeDocument/2006/relationships" xmlns:p="http://schemas.openxmlformats.org/presentationml/2006/main">
+  <p:cSld>
+    <p:spTree>
+      <p:nvGrpSpPr>
+        <p:cNvPr id="1" name="">
+          <a:extLst>
+            <a:ext uri="{FF2B5EF4-FFF2-40B4-BE49-F238E27FC236}">
+              <a16:creationId xmlns:a16="http://schemas.microsoft.com/office/drawing/2014/main" id="{005E20DF-04D4-AB19-CD0B-EE9A6F470DC9}"/>
+            </a:ext>
+          </a:extLst>
+        </p:cNvPr>
+        <p:cNvGrpSpPr/>
+        <p:nvPr/>
+      </p:nvGrpSpPr>
+      <p:grpSpPr>
+        <a:xfrm>
+          <a:off x="0" y="0"/>
+          <a:ext cx="0" cy="0"/>
+          <a:chOff x="0" y="0"/>
+          <a:chExt cx="0" cy="0"/>
+        </a:xfrm>
+      </p:grpSpPr>
+      <p:pic>
+        <p:nvPicPr>
+          <p:cNvPr id="2" name="Image 0" descr=" ">
+            <a:extLst>
+              <a:ext uri="{FF2B5EF4-FFF2-40B4-BE49-F238E27FC236}">
+                <a16:creationId xmlns:a16="http://schemas.microsoft.com/office/drawing/2014/main" id="{90719AA2-35C6-1789-F734-61DA63026440}"/>
+              </a:ext>
+            </a:extLst>
+          </p:cNvPr>
+          <p:cNvPicPr>
+            <a:picLocks noGrp="1" noRot="1" noChangeAspect="1" noMove="1" noResize="1" noEditPoints="1" noAdjustHandles="1" noChangeArrowheads="1" noChangeShapeType="1" noCrop="1"/>
+          </p:cNvPicPr>
+          <p:nvPr/>
+        </p:nvPicPr>
+        <p:blipFill>
+          <a:blip r:embed="rId3"/>
+          <a:stretch>
+            <a:fillRect/>
+          </a:stretch>
+        </p:blipFill>
+        <p:spPr>
+          <a:xfrm>
+            <a:off x="0" y="447"/>
+            <a:ext cx="12191937" cy="6857107"/>
+          </a:xfrm>
+          <a:prstGeom prst="rect">
+            <a:avLst/>
+          </a:prstGeom>
+        </p:spPr>
+      </p:pic>
+      <p:pic>
+        <p:nvPicPr>
+          <p:cNvPr id="3" name="Image 1" descr=" ">
+            <a:extLst>
+              <a:ext uri="{FF2B5EF4-FFF2-40B4-BE49-F238E27FC236}">
+                <a16:creationId xmlns:a16="http://schemas.microsoft.com/office/drawing/2014/main" id="{97654028-F01C-5704-430D-F94BAA4CED2D}"/>
+              </a:ext>
+            </a:extLst>
+          </p:cNvPr>
+          <p:cNvPicPr>
+            <a:picLocks noGrp="1" noRot="1" noChangeAspect="1" noMove="1" noResize="1" noEditPoints="1" noAdjustHandles="1" noChangeArrowheads="1" noChangeShapeType="1" noCrop="1"/>
+          </p:cNvPicPr>
+          <p:nvPr/>
+        </p:nvPicPr>
+        <p:blipFill>
+          <a:blip r:embed="rId4">
+            <a:extLst>
+              <a:ext uri="{96DAC541-7B7A-43D3-8B79-37D633B846F1}">
+                <asvg:svgBlip xmlns:asvg="http://schemas.microsoft.com/office/drawing/2016/SVG/main" r:embed="rId5"/>
+              </a:ext>
+            </a:extLst>
+          </a:blip>
+          <a:stretch>
+            <a:fillRect/>
+          </a:stretch>
+        </p:blipFill>
+        <p:spPr>
+          <a:xfrm>
+            <a:off x="11553765" y="447"/>
+            <a:ext cx="634997" cy="634917"/>
+          </a:xfrm>
+          <a:prstGeom prst="rect">
+            <a:avLst/>
+          </a:prstGeom>
+        </p:spPr>
+      </p:pic>
+      <p:sp>
+        <p:nvSpPr>
+          <p:cNvPr id="14" name="Text 4">
+            <a:extLst>
+              <a:ext uri="{FF2B5EF4-FFF2-40B4-BE49-F238E27FC236}">
+                <a16:creationId xmlns:a16="http://schemas.microsoft.com/office/drawing/2014/main" id="{434B9B80-5572-0C75-B827-499BC26DF964}"/>
+              </a:ext>
+            </a:extLst>
+          </p:cNvPr>
+          <p:cNvSpPr>
+            <a:spLocks noGrp="1" noRot="1" noMove="1" noResize="1" noEditPoints="1" noAdjustHandles="1" noChangeArrowheads="1" noChangeShapeType="1"/>
+          </p:cNvSpPr>
+          <p:nvPr/>
+        </p:nvSpPr>
+        <p:spPr>
+          <a:xfrm>
+            <a:off x="804330" y="2768686"/>
+            <a:ext cx="10583278" cy="1356607"/>
+          </a:xfrm>
+          <a:prstGeom prst="rect">
+            <a:avLst/>
+          </a:prstGeom>
+          <a:noFill/>
+          <a:ln/>
+        </p:spPr>
+        <p:txBody>
+          <a:bodyPr wrap="square" lIns="0" tIns="0" rIns="0" bIns="0" rtlCol="0" anchor="b"/>
+          <a:lstStyle/>
+          <a:p>
+            <a:pPr marL="0" marR="0" lvl="0" indent="0" algn="ctr" defTabSz="914400" rtl="0" eaLnBrk="1" fontAlgn="auto" latinLnBrk="0" hangingPunct="1">
+              <a:lnSpc>
+                <a:spcPts val="13997"/>
+              </a:lnSpc>
+              <a:spcBef>
+                <a:spcPts val="0"/>
+              </a:spcBef>
+              <a:spcAft>
+                <a:spcPts val="0"/>
+              </a:spcAft>
+              <a:buClrTx/>
+              <a:buSzTx/>
+              <a:buFontTx/>
+              <a:buNone/>
+              <a:tabLst/>
+              <a:defRPr/>
+            </a:pPr>
+            <a:r>
+              <a:rPr kumimoji="0" lang="en-US" sz="9998" b="1" i="0" u="none" strike="noStrike" kern="1200" cap="none" spc="0" normalizeH="0" baseline="0" noProof="0">
+                <a:ln>
+                  <a:noFill/>
+                </a:ln>
+                <a:solidFill>
+                  <a:srgbClr val="FFFFFF">
+                    <a:alpha val="100000"/>
+                  </a:srgbClr>
+                </a:solidFill>
+                <a:effectLst/>
+                <a:uLnTx/>
+                <a:uFillTx/>
+                <a:latin typeface="TeleNeo Var ExtraBold Normal" panose="020B0004040202090203" pitchFamily="34" charset="0"/>
+                <a:ea typeface="TeleNeo Var ExtraBold Italic" pitchFamily="34" charset="-122"/>
+                <a:cs typeface="TeleNeo Var ExtraBold Italic" pitchFamily="34" charset="-120"/>
+              </a:rPr>
+              <a:t>Appendix</a:t>
+            </a:r>
+            <a:endParaRPr kumimoji="0" lang="en-US" sz="9998" b="1" i="1" u="none" strike="noStrike" kern="1200" cap="none" spc="0" normalizeH="0" baseline="0" noProof="0">
+              <a:ln>
+                <a:noFill/>
+              </a:ln>
+              <a:solidFill>
+                <a:srgbClr val="000000"/>
+              </a:solidFill>
+              <a:effectLst/>
+              <a:uLnTx/>
+              <a:uFillTx/>
+              <a:latin typeface="TeleNeo Var ExtraBold Normal" panose="020B0004040202090203" pitchFamily="34" charset="0"/>
+              <a:ea typeface="+mn-ea"/>
+              <a:cs typeface="+mn-cs"/>
+            </a:endParaRPr>
+          </a:p>
+        </p:txBody>
+      </p:sp>
+      <p:pic>
+        <p:nvPicPr>
+          <p:cNvPr id="15" name="Picture 14" descr="A white circle in the sky&#10;&#10;Description automatically generated">
+            <a:extLst>
+              <a:ext uri="{FF2B5EF4-FFF2-40B4-BE49-F238E27FC236}">
+                <a16:creationId xmlns:a16="http://schemas.microsoft.com/office/drawing/2014/main" id="{357D0783-14DA-8C3A-74E0-91A307E3A43C}"/>
+              </a:ext>
+            </a:extLst>
+          </p:cNvPr>
+          <p:cNvPicPr>
+            <a:picLocks noGrp="1" noRot="1" noMove="1" noResize="1" noEditPoints="1" noAdjustHandles="1" noChangeArrowheads="1" noChangeShapeType="1" noCrop="1"/>
+          </p:cNvPicPr>
+          <p:nvPr/>
+        </p:nvPicPr>
+        <p:blipFill>
+          <a:blip r:embed="rId6"/>
+          <a:stretch>
+            <a:fillRect/>
+          </a:stretch>
+        </p:blipFill>
+        <p:spPr>
+          <a:xfrm>
+            <a:off x="4899150" y="5879781"/>
+            <a:ext cx="2393638" cy="342855"/>
+          </a:xfrm>
+          <a:prstGeom prst="rect">
+            <a:avLst/>
+          </a:prstGeom>
+        </p:spPr>
+      </p:pic>
+      <p:sp>
+        <p:nvSpPr>
+          <p:cNvPr id="4" name="TextBox 3">
+            <a:extLst>
+              <a:ext uri="{FF2B5EF4-FFF2-40B4-BE49-F238E27FC236}">
+                <a16:creationId xmlns:a16="http://schemas.microsoft.com/office/drawing/2014/main" id="{7D13398D-A5EB-2CCF-FF19-32C925192594}"/>
+              </a:ext>
+            </a:extLst>
+          </p:cNvPr>
+          <p:cNvSpPr txBox="1"/>
+          <p:nvPr/>
+        </p:nvSpPr>
+        <p:spPr>
+          <a:xfrm>
+            <a:off x="12408198" y="85059"/>
+            <a:ext cx="1679942" cy="253916"/>
+          </a:xfrm>
+          <a:prstGeom prst="rect">
+            <a:avLst/>
+          </a:prstGeom>
+          <a:noFill/>
+        </p:spPr>
+        <p:txBody>
+          <a:bodyPr wrap="square" rtlCol="0">
+            <a:spAutoFit/>
+          </a:bodyPr>
+          <a:lstStyle/>
+          <a:p>
+            <a:r>
+              <a:rPr lang="en-US" sz="1050" dirty="0"/>
+              <a:t>title name: </a:t>
+            </a:r>
+            <a:r>
+              <a:rPr lang="en-US" sz="1050" dirty="0" err="1"/>
+              <a:t>appendixslide</a:t>
+            </a:r>
+            <a:endParaRPr lang="en-US" sz="1050" dirty="0"/>
+          </a:p>
+        </p:txBody>
+      </p:sp>
+    </p:spTree>
+    <p:extLst>
+      <p:ext uri="{BB962C8B-B14F-4D97-AF65-F5344CB8AC3E}">
+        <p14:creationId xmlns:p14="http://schemas.microsoft.com/office/powerpoint/2010/main" val="3275475688"/>
       </p:ext>
     </p:extLst>
   </p:cSld>
@@ -20868,116 +25752,56 @@
 </file>
 
 <file path=ppt/theme/theme5.xml><?xml version="1.0" encoding="utf-8"?>
-<a:theme xmlns:a="http://schemas.openxmlformats.org/drawingml/2006/main" name="Office Theme">
+<a:theme xmlns:a="http://schemas.openxmlformats.org/drawingml/2006/main" name="2_Cover-Pages">
   <a:themeElements>
-    <a:clrScheme name="Office">
+    <a:clrScheme name="Custom 3">
       <a:dk1>
-        <a:sysClr val="windowText" lastClr="000000"/>
+        <a:srgbClr val="000000"/>
       </a:dk1>
       <a:lt1>
-        <a:sysClr val="window" lastClr="FFFFFF"/>
+        <a:srgbClr val="FFFFFF"/>
       </a:lt1>
       <a:dk2>
-        <a:srgbClr val="44546A"/>
+        <a:srgbClr val="000000"/>
       </a:dk2>
       <a:lt2>
-        <a:srgbClr val="E7E6E6"/>
+        <a:srgbClr val="E8E8E8"/>
       </a:lt2>
       <a:accent1>
-        <a:srgbClr val="5B9BD5"/>
+        <a:srgbClr val="E20074"/>
       </a:accent1>
       <a:accent2>
-        <a:srgbClr val="ED7D31"/>
+        <a:srgbClr val="C8C8C8"/>
       </a:accent2>
       <a:accent3>
-        <a:srgbClr val="A5A5A5"/>
+        <a:srgbClr val="C8C8C8"/>
       </a:accent3>
       <a:accent4>
-        <a:srgbClr val="FFC000"/>
+        <a:srgbClr val="861B54"/>
       </a:accent4>
       <a:accent5>
-        <a:srgbClr val="4472C4"/>
+        <a:srgbClr val="9B9B9B"/>
       </a:accent5>
       <a:accent6>
-        <a:srgbClr val="70AD47"/>
+        <a:srgbClr val="3C3C3C"/>
       </a:accent6>
       <a:hlink>
-        <a:srgbClr val="0563C1"/>
+        <a:srgbClr val="E20074"/>
       </a:hlink>
       <a:folHlink>
-        <a:srgbClr val="954F72"/>
+        <a:srgbClr val="97024F"/>
       </a:folHlink>
     </a:clrScheme>
-    <a:fontScheme name="Office">
+    <a:fontScheme name="TeleNeo-Office">
       <a:majorFont>
-        <a:latin typeface="Calibri Light" panose="020F0302020204030204"/>
+        <a:latin typeface="TeleNeo Office ExtraBold"/>
         <a:ea typeface=""/>
         <a:cs typeface=""/>
-        <a:font script="Jpan" typeface="ＭＳ Ｐゴシック"/>
-        <a:font script="Hang" typeface="맑은 고딕"/>
-        <a:font script="Hans" typeface="宋体"/>
-        <a:font script="Hant" typeface="新細明體"/>
-        <a:font script="Arab" typeface="Times New Roman"/>
-        <a:font script="Hebr" typeface="Times New Roman"/>
-        <a:font script="Thai" typeface="Angsana New"/>
-        <a:font script="Ethi" typeface="Nyala"/>
-        <a:font script="Beng" typeface="Vrinda"/>
-        <a:font script="Gujr" typeface="Shruti"/>
-        <a:font script="Khmr" typeface="MoolBoran"/>
-        <a:font script="Knda" typeface="Tunga"/>
-        <a:font script="Guru" typeface="Raavi"/>
-        <a:font script="Cans" typeface="Euphemia"/>
-        <a:font script="Cher" typeface="Plantagenet Cherokee"/>
-        <a:font script="Yiii" typeface="Microsoft Yi Baiti"/>
-        <a:font script="Tibt" typeface="Microsoft Himalaya"/>
-        <a:font script="Thaa" typeface="MV Boli"/>
-        <a:font script="Deva" typeface="Mangal"/>
-        <a:font script="Telu" typeface="Gautami"/>
-        <a:font script="Taml" typeface="Latha"/>
-        <a:font script="Syrc" typeface="Estrangelo Edessa"/>
-        <a:font script="Orya" typeface="Kalinga"/>
-        <a:font script="Mlym" typeface="Kartika"/>
-        <a:font script="Laoo" typeface="DokChampa"/>
-        <a:font script="Sinh" typeface="Iskoola Pota"/>
-        <a:font script="Mong" typeface="Mongolian Baiti"/>
-        <a:font script="Viet" typeface="Times New Roman"/>
-        <a:font script="Uigh" typeface="Microsoft Uighur"/>
-        <a:font script="Geor" typeface="Sylfaen"/>
       </a:majorFont>
       <a:minorFont>
-        <a:latin typeface="Calibri" panose="020F0502020204030204"/>
+        <a:latin typeface="TeleNeo Office"/>
         <a:ea typeface=""/>
         <a:cs typeface=""/>
-        <a:font script="Jpan" typeface="ＭＳ Ｐゴシック"/>
-        <a:font script="Hang" typeface="맑은 고딕"/>
-        <a:font script="Hans" typeface="宋体"/>
-        <a:font script="Hant" typeface="新細明體"/>
-        <a:font script="Arab" typeface="Arial"/>
-        <a:font script="Hebr" typeface="Arial"/>
-        <a:font script="Thai" typeface="Cordia New"/>
-        <a:font script="Ethi" typeface="Nyala"/>
-        <a:font script="Beng" typeface="Vrinda"/>
-        <a:font script="Gujr" typeface="Shruti"/>
-        <a:font script="Khmr" typeface="DaunPenh"/>
-        <a:font script="Knda" typeface="Tunga"/>
-        <a:font script="Guru" typeface="Raavi"/>
-        <a:font script="Cans" typeface="Euphemia"/>
-        <a:font script="Cher" typeface="Plantagenet Cherokee"/>
-        <a:font script="Yiii" typeface="Microsoft Yi Baiti"/>
-        <a:font script="Tibt" typeface="Microsoft Himalaya"/>
-        <a:font script="Thaa" typeface="MV Boli"/>
-        <a:font script="Deva" typeface="Mangal"/>
-        <a:font script="Telu" typeface="Gautami"/>
-        <a:font script="Taml" typeface="Latha"/>
-        <a:font script="Syrc" typeface="Estrangelo Edessa"/>
-        <a:font script="Orya" typeface="Kalinga"/>
-        <a:font script="Mlym" typeface="Kartika"/>
-        <a:font script="Laoo" typeface="DokChampa"/>
-        <a:font script="Sinh" typeface="Iskoola Pota"/>
-        <a:font script="Mong" typeface="Mongolian Baiti"/>
-        <a:font script="Viet" typeface="Arial"/>
-        <a:font script="Uigh" typeface="Microsoft Uighur"/>
-        <a:font script="Geor" typeface="Sylfaen"/>
       </a:minorFont>
     </a:fontScheme>
     <a:fmtScheme name="Office">
@@ -21118,11 +25942,45 @@
       </a:bgFillStyleLst>
     </a:fmtScheme>
   </a:themeElements>
-  <a:objectDefaults/>
+  <a:objectDefaults>
+    <a:spDef>
+      <a:spPr>
+        <a:ln>
+          <a:noFill/>
+        </a:ln>
+      </a:spPr>
+      <a:bodyPr rtlCol="0" anchor="ctr"/>
+      <a:lstStyle>
+        <a:defPPr algn="ctr">
+          <a:defRPr sz="2000" spc="300">
+            <a:latin typeface="linea-basic-10" charset="0"/>
+            <a:ea typeface="linea-basic-10" charset="0"/>
+            <a:cs typeface="linea-basic-10" charset="0"/>
+          </a:defRPr>
+        </a:defPPr>
+      </a:lstStyle>
+      <a:style>
+        <a:lnRef idx="2">
+          <a:schemeClr val="accent1">
+            <a:shade val="50000"/>
+          </a:schemeClr>
+        </a:lnRef>
+        <a:fillRef idx="1">
+          <a:schemeClr val="accent1"/>
+        </a:fillRef>
+        <a:effectRef idx="0">
+          <a:schemeClr val="accent1"/>
+        </a:effectRef>
+        <a:fontRef idx="minor">
+          <a:schemeClr val="lt1"/>
+        </a:fontRef>
+      </a:style>
+    </a:spDef>
+  </a:objectDefaults>
   <a:extraClrSchemeLst/>
   <a:extLst>
     <a:ext uri="{05A4C25C-085E-4340-85A3-A5531E510DB2}">
-      <thm15:themeFamily xmlns:thm15="http://schemas.microsoft.com/office/thememl/2012/main" name="Office Theme" id="{62F939B6-93AF-4DB8-9C6B-D6C7DFDC589F}" vid="{4A3C46E8-61CC-4603-A589-7422A47A8E4A}"/>
+      <thm15:themeFamily xmlns:thm15="http://schemas.microsoft.com/office/thememl/2012/main" name="T-Mobile_Reporting_MasterDeckTemplate_2_7_23" id="{A5D7F6A9-7623-F64F-92A0-AD2B0AB960E3}" vid="{2BA0F938-9CAA-B74D-8737-991A3CF8DB67}"/>
     </a:ext>
   </a:extLst>
 </a:theme>
@@ -21389,15 +26247,274 @@
 </a:theme>
 </file>
 
+<file path=ppt/theme/theme7.xml><?xml version="1.0" encoding="utf-8"?>
+<a:theme xmlns:a="http://schemas.openxmlformats.org/drawingml/2006/main" name="Office Theme">
+  <a:themeElements>
+    <a:clrScheme name="Office">
+      <a:dk1>
+        <a:sysClr val="windowText" lastClr="000000"/>
+      </a:dk1>
+      <a:lt1>
+        <a:sysClr val="window" lastClr="FFFFFF"/>
+      </a:lt1>
+      <a:dk2>
+        <a:srgbClr val="44546A"/>
+      </a:dk2>
+      <a:lt2>
+        <a:srgbClr val="E7E6E6"/>
+      </a:lt2>
+      <a:accent1>
+        <a:srgbClr val="5B9BD5"/>
+      </a:accent1>
+      <a:accent2>
+        <a:srgbClr val="ED7D31"/>
+      </a:accent2>
+      <a:accent3>
+        <a:srgbClr val="A5A5A5"/>
+      </a:accent3>
+      <a:accent4>
+        <a:srgbClr val="FFC000"/>
+      </a:accent4>
+      <a:accent5>
+        <a:srgbClr val="4472C4"/>
+      </a:accent5>
+      <a:accent6>
+        <a:srgbClr val="70AD47"/>
+      </a:accent6>
+      <a:hlink>
+        <a:srgbClr val="0563C1"/>
+      </a:hlink>
+      <a:folHlink>
+        <a:srgbClr val="954F72"/>
+      </a:folHlink>
+    </a:clrScheme>
+    <a:fontScheme name="Office">
+      <a:majorFont>
+        <a:latin typeface="Calibri Light" panose="020F0302020204030204"/>
+        <a:ea typeface=""/>
+        <a:cs typeface=""/>
+        <a:font script="Jpan" typeface="ＭＳ Ｐゴシック"/>
+        <a:font script="Hang" typeface="맑은 고딕"/>
+        <a:font script="Hans" typeface="宋体"/>
+        <a:font script="Hant" typeface="新細明體"/>
+        <a:font script="Arab" typeface="Times New Roman"/>
+        <a:font script="Hebr" typeface="Times New Roman"/>
+        <a:font script="Thai" typeface="Angsana New"/>
+        <a:font script="Ethi" typeface="Nyala"/>
+        <a:font script="Beng" typeface="Vrinda"/>
+        <a:font script="Gujr" typeface="Shruti"/>
+        <a:font script="Khmr" typeface="MoolBoran"/>
+        <a:font script="Knda" typeface="Tunga"/>
+        <a:font script="Guru" typeface="Raavi"/>
+        <a:font script="Cans" typeface="Euphemia"/>
+        <a:font script="Cher" typeface="Plantagenet Cherokee"/>
+        <a:font script="Yiii" typeface="Microsoft Yi Baiti"/>
+        <a:font script="Tibt" typeface="Microsoft Himalaya"/>
+        <a:font script="Thaa" typeface="MV Boli"/>
+        <a:font script="Deva" typeface="Mangal"/>
+        <a:font script="Telu" typeface="Gautami"/>
+        <a:font script="Taml" typeface="Latha"/>
+        <a:font script="Syrc" typeface="Estrangelo Edessa"/>
+        <a:font script="Orya" typeface="Kalinga"/>
+        <a:font script="Mlym" typeface="Kartika"/>
+        <a:font script="Laoo" typeface="DokChampa"/>
+        <a:font script="Sinh" typeface="Iskoola Pota"/>
+        <a:font script="Mong" typeface="Mongolian Baiti"/>
+        <a:font script="Viet" typeface="Times New Roman"/>
+        <a:font script="Uigh" typeface="Microsoft Uighur"/>
+        <a:font script="Geor" typeface="Sylfaen"/>
+      </a:majorFont>
+      <a:minorFont>
+        <a:latin typeface="Calibri" panose="020F0502020204030204"/>
+        <a:ea typeface=""/>
+        <a:cs typeface=""/>
+        <a:font script="Jpan" typeface="ＭＳ Ｐゴシック"/>
+        <a:font script="Hang" typeface="맑은 고딕"/>
+        <a:font script="Hans" typeface="宋体"/>
+        <a:font script="Hant" typeface="新細明體"/>
+        <a:font script="Arab" typeface="Arial"/>
+        <a:font script="Hebr" typeface="Arial"/>
+        <a:font script="Thai" typeface="Cordia New"/>
+        <a:font script="Ethi" typeface="Nyala"/>
+        <a:font script="Beng" typeface="Vrinda"/>
+        <a:font script="Gujr" typeface="Shruti"/>
+        <a:font script="Khmr" typeface="DaunPenh"/>
+        <a:font script="Knda" typeface="Tunga"/>
+        <a:font script="Guru" typeface="Raavi"/>
+        <a:font script="Cans" typeface="Euphemia"/>
+        <a:font script="Cher" typeface="Plantagenet Cherokee"/>
+        <a:font script="Yiii" typeface="Microsoft Yi Baiti"/>
+        <a:font script="Tibt" typeface="Microsoft Himalaya"/>
+        <a:font script="Thaa" typeface="MV Boli"/>
+        <a:font script="Deva" typeface="Mangal"/>
+        <a:font script="Telu" typeface="Gautami"/>
+        <a:font script="Taml" typeface="Latha"/>
+        <a:font script="Syrc" typeface="Estrangelo Edessa"/>
+        <a:font script="Orya" typeface="Kalinga"/>
+        <a:font script="Mlym" typeface="Kartika"/>
+        <a:font script="Laoo" typeface="DokChampa"/>
+        <a:font script="Sinh" typeface="Iskoola Pota"/>
+        <a:font script="Mong" typeface="Mongolian Baiti"/>
+        <a:font script="Viet" typeface="Arial"/>
+        <a:font script="Uigh" typeface="Microsoft Uighur"/>
+        <a:font script="Geor" typeface="Sylfaen"/>
+      </a:minorFont>
+    </a:fontScheme>
+    <a:fmtScheme name="Office">
+      <a:fillStyleLst>
+        <a:solidFill>
+          <a:schemeClr val="phClr"/>
+        </a:solidFill>
+        <a:gradFill rotWithShape="1">
+          <a:gsLst>
+            <a:gs pos="0">
+              <a:schemeClr val="phClr">
+                <a:lumMod val="110000"/>
+                <a:satMod val="105000"/>
+                <a:tint val="67000"/>
+              </a:schemeClr>
+            </a:gs>
+            <a:gs pos="50000">
+              <a:schemeClr val="phClr">
+                <a:lumMod val="105000"/>
+                <a:satMod val="103000"/>
+                <a:tint val="73000"/>
+              </a:schemeClr>
+            </a:gs>
+            <a:gs pos="100000">
+              <a:schemeClr val="phClr">
+                <a:lumMod val="105000"/>
+                <a:satMod val="109000"/>
+                <a:tint val="81000"/>
+              </a:schemeClr>
+            </a:gs>
+          </a:gsLst>
+          <a:lin ang="5400000" scaled="0"/>
+        </a:gradFill>
+        <a:gradFill rotWithShape="1">
+          <a:gsLst>
+            <a:gs pos="0">
+              <a:schemeClr val="phClr">
+                <a:satMod val="103000"/>
+                <a:lumMod val="102000"/>
+                <a:tint val="94000"/>
+              </a:schemeClr>
+            </a:gs>
+            <a:gs pos="50000">
+              <a:schemeClr val="phClr">
+                <a:satMod val="110000"/>
+                <a:lumMod val="100000"/>
+                <a:shade val="100000"/>
+              </a:schemeClr>
+            </a:gs>
+            <a:gs pos="100000">
+              <a:schemeClr val="phClr">
+                <a:lumMod val="99000"/>
+                <a:satMod val="120000"/>
+                <a:shade val="78000"/>
+              </a:schemeClr>
+            </a:gs>
+          </a:gsLst>
+          <a:lin ang="5400000" scaled="0"/>
+        </a:gradFill>
+      </a:fillStyleLst>
+      <a:lnStyleLst>
+        <a:ln w="6350" cap="flat" cmpd="sng" algn="ctr">
+          <a:solidFill>
+            <a:schemeClr val="phClr"/>
+          </a:solidFill>
+          <a:prstDash val="solid"/>
+          <a:miter lim="800000"/>
+        </a:ln>
+        <a:ln w="12700" cap="flat" cmpd="sng" algn="ctr">
+          <a:solidFill>
+            <a:schemeClr val="phClr"/>
+          </a:solidFill>
+          <a:prstDash val="solid"/>
+          <a:miter lim="800000"/>
+        </a:ln>
+        <a:ln w="19050" cap="flat" cmpd="sng" algn="ctr">
+          <a:solidFill>
+            <a:schemeClr val="phClr"/>
+          </a:solidFill>
+          <a:prstDash val="solid"/>
+          <a:miter lim="800000"/>
+        </a:ln>
+      </a:lnStyleLst>
+      <a:effectStyleLst>
+        <a:effectStyle>
+          <a:effectLst/>
+        </a:effectStyle>
+        <a:effectStyle>
+          <a:effectLst/>
+        </a:effectStyle>
+        <a:effectStyle>
+          <a:effectLst>
+            <a:outerShdw blurRad="57150" dist="19050" dir="5400000" algn="ctr" rotWithShape="0">
+              <a:srgbClr val="000000">
+                <a:alpha val="63000"/>
+              </a:srgbClr>
+            </a:outerShdw>
+          </a:effectLst>
+        </a:effectStyle>
+      </a:effectStyleLst>
+      <a:bgFillStyleLst>
+        <a:solidFill>
+          <a:schemeClr val="phClr"/>
+        </a:solidFill>
+        <a:solidFill>
+          <a:schemeClr val="phClr">
+            <a:tint val="95000"/>
+            <a:satMod val="170000"/>
+          </a:schemeClr>
+        </a:solidFill>
+        <a:gradFill rotWithShape="1">
+          <a:gsLst>
+            <a:gs pos="0">
+              <a:schemeClr val="phClr">
+                <a:tint val="93000"/>
+                <a:satMod val="150000"/>
+                <a:shade val="98000"/>
+                <a:lumMod val="102000"/>
+              </a:schemeClr>
+            </a:gs>
+            <a:gs pos="50000">
+              <a:schemeClr val="phClr">
+                <a:tint val="98000"/>
+                <a:satMod val="130000"/>
+                <a:shade val="90000"/>
+                <a:lumMod val="103000"/>
+              </a:schemeClr>
+            </a:gs>
+            <a:gs pos="100000">
+              <a:schemeClr val="phClr">
+                <a:shade val="63000"/>
+                <a:satMod val="120000"/>
+              </a:schemeClr>
+            </a:gs>
+          </a:gsLst>
+          <a:lin ang="5400000" scaled="0"/>
+        </a:gradFill>
+      </a:bgFillStyleLst>
+    </a:fmtScheme>
+  </a:themeElements>
+  <a:objectDefaults/>
+  <a:extraClrSchemeLst/>
+  <a:extLst>
+    <a:ext uri="{05A4C25C-085E-4340-85A3-A5531E510DB2}">
+      <thm15:themeFamily xmlns:thm15="http://schemas.microsoft.com/office/thememl/2012/main" name="Office Theme" id="{62F939B6-93AF-4DB8-9C6B-D6C7DFDC589F}" vid="{4A3C46E8-61CC-4603-A589-7422A47A8E4A}"/>
+    </a:ext>
+  </a:extLst>
+</a:theme>
+</file>
+
 <file path=customXml/item1.xml><?xml version="1.0" encoding="utf-8"?>
-<p:properties xmlns:p="http://schemas.microsoft.com/office/2006/metadata/properties" xmlns:xsi="http://www.w3.org/2001/XMLSchema-instance" xmlns:pc="http://schemas.microsoft.com/office/infopath/2007/PartnerControls">
-  <documentManagement>
-    <lcf76f155ced4ddcb4097134ff3c332f xmlns="7114f878-0223-480d-a325-1373c6d0223b">
-      <Terms xmlns="http://schemas.microsoft.com/office/infopath/2007/PartnerControls"/>
-    </lcf76f155ced4ddcb4097134ff3c332f>
-    <TaxCatchAll xmlns="599183fe-bfa3-49f1-b3c6-3d50208c56e4" xsi:nil="true"/>
-  </documentManagement>
-</p:properties>
+<?mso-contentType ?>
+<FormTemplates xmlns="http://schemas.microsoft.com/sharepoint/v3/contenttype/forms">
+  <Display>DocumentLibraryForm</Display>
+  <Edit>DocumentLibraryForm</Edit>
+  <New>DocumentLibraryForm</New>
+</FormTemplates>
 </file>
 
 <file path=customXml/item2.xml><?xml version="1.0" encoding="utf-8"?>
@@ -21614,27 +26731,20 @@
 </file>
 
 <file path=customXml/item3.xml><?xml version="1.0" encoding="utf-8"?>
-<?mso-contentType ?>
-<FormTemplates xmlns="http://schemas.microsoft.com/sharepoint/v3/contenttype/forms">
-  <Display>DocumentLibraryForm</Display>
-  <Edit>DocumentLibraryForm</Edit>
-  <New>DocumentLibraryForm</New>
-</FormTemplates>
+<p:properties xmlns:p="http://schemas.microsoft.com/office/2006/metadata/properties" xmlns:xsi="http://www.w3.org/2001/XMLSchema-instance" xmlns:pc="http://schemas.microsoft.com/office/infopath/2007/PartnerControls">
+  <documentManagement>
+    <lcf76f155ced4ddcb4097134ff3c332f xmlns="7114f878-0223-480d-a325-1373c6d0223b">
+      <Terms xmlns="http://schemas.microsoft.com/office/infopath/2007/PartnerControls"/>
+    </lcf76f155ced4ddcb4097134ff3c332f>
+    <TaxCatchAll xmlns="599183fe-bfa3-49f1-b3c6-3d50208c56e4" xsi:nil="true"/>
+  </documentManagement>
+</p:properties>
 </file>
 
 <file path=customXml/itemProps1.xml><?xml version="1.0" encoding="utf-8"?>
-<ds:datastoreItem xmlns:ds="http://schemas.openxmlformats.org/officeDocument/2006/customXml" ds:itemID="{9DE45B87-9247-4103-B93A-84FCD96EFCA6}">
+<ds:datastoreItem xmlns:ds="http://schemas.openxmlformats.org/officeDocument/2006/customXml" ds:itemID="{5421F378-326F-4859-B6C8-701A3512AE1B}">
   <ds:schemaRefs>
-    <ds:schemaRef ds:uri="http://schemas.openxmlformats.org/package/2006/metadata/core-properties"/>
-    <ds:schemaRef ds:uri="599183fe-bfa3-49f1-b3c6-3d50208c56e4"/>
-    <ds:schemaRef ds:uri="http://purl.org/dc/terms/"/>
-    <ds:schemaRef ds:uri="http://purl.org/dc/elements/1.1/"/>
-    <ds:schemaRef ds:uri="http://schemas.microsoft.com/office/2006/metadata/properties"/>
-    <ds:schemaRef ds:uri="http://schemas.microsoft.com/office/infopath/2007/PartnerControls"/>
-    <ds:schemaRef ds:uri="http://purl.org/dc/dcmitype/"/>
-    <ds:schemaRef ds:uri="http://schemas.microsoft.com/office/2006/documentManagement/types"/>
-    <ds:schemaRef ds:uri="7114f878-0223-480d-a325-1373c6d0223b"/>
-    <ds:schemaRef ds:uri="http://www.w3.org/XML/1998/namespace"/>
+    <ds:schemaRef ds:uri="http://schemas.microsoft.com/sharepoint/v3/contenttype/forms"/>
   </ds:schemaRefs>
 </ds:datastoreItem>
 </file>
@@ -21659,9 +26769,18 @@
 </file>
 
 <file path=customXml/itemProps3.xml><?xml version="1.0" encoding="utf-8"?>
-<ds:datastoreItem xmlns:ds="http://schemas.openxmlformats.org/officeDocument/2006/customXml" ds:itemID="{5421F378-326F-4859-B6C8-701A3512AE1B}">
+<ds:datastoreItem xmlns:ds="http://schemas.openxmlformats.org/officeDocument/2006/customXml" ds:itemID="{9DE45B87-9247-4103-B93A-84FCD96EFCA6}">
   <ds:schemaRefs>
-    <ds:schemaRef ds:uri="http://schemas.microsoft.com/sharepoint/v3/contenttype/forms"/>
+    <ds:schemaRef ds:uri="http://schemas.openxmlformats.org/package/2006/metadata/core-properties"/>
+    <ds:schemaRef ds:uri="599183fe-bfa3-49f1-b3c6-3d50208c56e4"/>
+    <ds:schemaRef ds:uri="http://purl.org/dc/terms/"/>
+    <ds:schemaRef ds:uri="http://purl.org/dc/elements/1.1/"/>
+    <ds:schemaRef ds:uri="http://schemas.microsoft.com/office/2006/metadata/properties"/>
+    <ds:schemaRef ds:uri="http://schemas.microsoft.com/office/infopath/2007/PartnerControls"/>
+    <ds:schemaRef ds:uri="http://purl.org/dc/dcmitype/"/>
+    <ds:schemaRef ds:uri="http://schemas.microsoft.com/office/2006/documentManagement/types"/>
+    <ds:schemaRef ds:uri="7114f878-0223-480d-a325-1373c6d0223b"/>
+    <ds:schemaRef ds:uri="http://www.w3.org/XML/1998/namespace"/>
   </ds:schemaRefs>
 </ds:datastoreItem>
 </file>